--- a/docs/decks/簡報_2026-09-21_氫氣流失與壓降歸因.pptx
+++ b/docs/decks/簡報_2026-09-21_氫氣流失與壓降歸因.pptx
@@ -19,6 +19,9 @@
     <p:sldId id="267" r:id="rId18"/>
     <p:sldId id="268" r:id="rId19"/>
     <p:sldId id="269" r:id="rId20"/>
+    <p:sldId id="270" r:id="rId21"/>
+    <p:sldId id="271" r:id="rId22"/>
+    <p:sldId id="272" r:id="rId23"/>
   </p:sldIdLst>
   <p:sldSz cx="12193200" cy="6858000" type="screen4x3"/>
   <p:notesSz cx="6858000" cy="9144000"/>
@@ -3636,7 +3639,7 @@
                 <a:ea typeface="標楷體"/>
                 <a:ea typeface="標楷體"/>
               </a:rPr>
-              <a:t>九、佐證二：壓降曲線幾乎是直線</a:t>
+              <a:t>九、佐證一：切斷碳源，壓降照舊</a:t>
             </a:r>
           </a:p>
         </p:txBody>
@@ -3721,7 +3724,7 @@
                 <a:ea typeface="標楷體"/>
                 <a:ea typeface="標楷體"/>
               </a:rPr>
-              <a:t>溶解會讓曲線彎，定速移除是直線</a:t>
+              <a:t>自動化批次 2026-08-11 ~ 08-31</a:t>
             </a:r>
           </a:p>
         </p:txBody>
@@ -3813,7 +3816,7 @@
       </p:sp>
       <p:pic>
         <p:nvPicPr>
-          <p:cNvPr id="7" name="Picture 6" descr="fig36_shape_clusters.png"/>
+          <p:cNvPr id="7" name="Picture 6" descr="deck3_co2cut.png"/>
           <p:cNvPicPr>
             <a:picLocks noChangeAspect="1"/>
           </p:cNvPicPr>
@@ -3827,8 +3830,8 @@
         </p:blipFill>
         <p:spPr>
           <a:xfrm>
-            <a:off x="3031265" y="1260000"/>
-            <a:ext cx="6130668" cy="4248000"/>
+            <a:off x="2136599" y="1188000"/>
+            <a:ext cx="7920000" cy="4596600"/>
           </a:xfrm>
           <a:prstGeom prst="rect">
             <a:avLst/>
@@ -3843,8 +3846,8 @@
         </p:nvSpPr>
         <p:spPr>
           <a:xfrm>
-            <a:off x="612000" y="5580000"/>
-            <a:ext cx="10969200" cy="251999"/>
+            <a:off x="576000" y="5856599"/>
+            <a:ext cx="11041200" cy="659400"/>
           </a:xfrm>
           <a:prstGeom prst="rect">
             <a:avLst/>
@@ -3863,7 +3866,7 @@
               </a:spcAft>
             </a:pPr>
             <a:r>
-              <a:rPr sz="1150" b="1" i="0">
+              <a:rPr sz="1800" b="1" i="0">
                 <a:solidFill>
                   <a:srgbClr val="1F6FB5"/>
                 </a:solidFill>
@@ -3871,18 +3874,18 @@
                 <a:ea typeface="標楷體"/>
                 <a:ea typeface="標楷體"/>
               </a:rPr>
-              <a:t>圖 3.　</a:t>
-            </a:r>
-            <a:r>
-              <a:rPr sz="1150" b="0" i="0">
-                <a:solidFill>
-                  <a:srgbClr val="595959"/>
-                </a:solidFill>
-                <a:latin typeface="Times New Roman"/>
-                <a:ea typeface="標楷體"/>
-                <a:ea typeface="標楷體"/>
-              </a:rPr>
-              <a:t>全資料庫 252 條下降曲線正規化後分群：229 條（91%）落在「接近直線」</a:t>
+              <a:t>這個「沒有差異」有檢定力：</a:t>
+            </a:r>
+            <a:r>
+              <a:rPr sz="1700" b="0" i="0">
+                <a:solidFill>
+                  <a:srgbClr val="000000"/>
+                </a:solidFill>
+                <a:latin typeface="Times New Roman"/>
+                <a:ea typeface="標楷體"/>
+                <a:ea typeface="標楷體"/>
+              </a:rPr>
+              <a:t>若生物途徑真的佔總壓降三分之一（0.0125），本檢定偵測得到的機率是 100%。結果沒有。</a:t>
             </a:r>
           </a:p>
         </p:txBody>
@@ -3941,29 +3944,7 @@
                 <a:ea typeface="標楷體"/>
                 <a:ea typeface="標楷體"/>
               </a:rPr>
-              <a:t>十、氧化還原電位（</a:t>
-            </a:r>
-            <a:r>
-              <a:rPr sz="2800" b="1" i="0">
-                <a:solidFill>
-                  <a:srgbClr val="000000"/>
-                </a:solidFill>
-                <a:latin typeface="Times New Roman"/>
-                <a:ea typeface="標楷體"/>
-                <a:ea typeface="標楷體"/>
-              </a:rPr>
-              <a:t>ORP</a:t>
-            </a:r>
-            <a:r>
-              <a:rPr sz="2800" b="1" i="0">
-                <a:solidFill>
-                  <a:srgbClr val="000000"/>
-                </a:solidFill>
-                <a:latin typeface="Times New Roman"/>
-                <a:ea typeface="標楷體"/>
-                <a:ea typeface="標楷體"/>
-              </a:rPr>
-              <a:t>）該怎麼讀</a:t>
+              <a:t>十、佐證二：壓降曲線幾乎是直線</a:t>
             </a:r>
           </a:p>
         </p:txBody>
@@ -4048,7 +4029,7 @@
                 <a:ea typeface="標楷體"/>
                 <a:ea typeface="標楷體"/>
               </a:rPr>
-              <a:t>水準健康，但循環內的變化不是生物造成的</a:t>
+              <a:t>溶解會讓曲線彎，定速移除是直線</a:t>
             </a:r>
           </a:p>
         </p:txBody>
@@ -4140,7 +4121,7 @@
       </p:sp>
       <p:pic>
         <p:nvPicPr>
-          <p:cNvPr id="7" name="Picture 6" descr="fig41_orp_substrate.png"/>
+          <p:cNvPr id="7" name="Picture 6" descr="deck4_shape.png"/>
           <p:cNvPicPr>
             <a:picLocks noChangeAspect="1"/>
           </p:cNvPicPr>
@@ -4154,8 +4135,8 @@
         </p:blipFill>
         <p:spPr>
           <a:xfrm>
-            <a:off x="2676599" y="1152000"/>
-            <a:ext cx="6840000" cy="2554629"/>
+            <a:off x="1596599" y="1224000"/>
+            <a:ext cx="9000000" cy="4790675"/>
           </a:xfrm>
           <a:prstGeom prst="rect">
             <a:avLst/>
@@ -4170,8 +4151,8 @@
         </p:nvSpPr>
         <p:spPr>
           <a:xfrm>
-            <a:off x="576000" y="3814629"/>
-            <a:ext cx="11041200" cy="1765370"/>
+            <a:off x="576000" y="6086674"/>
+            <a:ext cx="11041200" cy="429325"/>
           </a:xfrm>
           <a:prstGeom prst="rect">
             <a:avLst/>
@@ -4184,13 +4165,13 @@
           </a:bodyPr>
           <a:lstStyle/>
           <a:p>
-            <a:pPr algn="l">
+            <a:pPr algn="ctr">
               <a:spcAft>
                 <a:spcPts val="600"/>
               </a:spcAft>
             </a:pPr>
             <a:r>
-              <a:rPr sz="1700" b="1" i="0">
+              <a:rPr sz="1800" b="1" i="0">
                 <a:solidFill>
                   <a:srgbClr val="000000"/>
                 </a:solidFill>
@@ -4198,339 +4179,7 @@
                 <a:ea typeface="標楷體"/>
                 <a:ea typeface="標楷體"/>
               </a:rPr>
-              <a:t>水準：</a:t>
-            </a:r>
-            <a:r>
-              <a:rPr sz="1600" b="0" i="0">
-                <a:solidFill>
-                  <a:srgbClr val="000000"/>
-                </a:solidFill>
-                <a:latin typeface="Times New Roman"/>
-                <a:ea typeface="標楷體"/>
-                <a:ea typeface="標楷體"/>
-              </a:rPr>
-              <a:t>−357 </a:t>
-            </a:r>
-            <a:r>
-              <a:rPr sz="1600" b="0" i="0">
-                <a:solidFill>
-                  <a:srgbClr val="000000"/>
-                </a:solidFill>
-                <a:latin typeface="Times New Roman"/>
-                <a:ea typeface="標楷體"/>
-                <a:ea typeface="標楷體"/>
-              </a:rPr>
-              <a:t>mV</a:t>
-            </a:r>
-            <a:r>
-              <a:rPr sz="1600" b="0" i="0">
-                <a:solidFill>
-                  <a:srgbClr val="000000"/>
-                </a:solidFill>
-                <a:latin typeface="Times New Roman"/>
-                <a:ea typeface="標楷體"/>
-                <a:ea typeface="標楷體"/>
-              </a:rPr>
-              <a:t>（對標準氫電極）；文獻所報中溫產甲烷相最適為 −335.6 ± 29.0 </a:t>
-            </a:r>
-            <a:r>
-              <a:rPr sz="1600" b="0" i="0">
-                <a:solidFill>
-                  <a:srgbClr val="000000"/>
-                </a:solidFill>
-                <a:latin typeface="Times New Roman"/>
-                <a:ea typeface="標楷體"/>
-                <a:ea typeface="標楷體"/>
-              </a:rPr>
-              <a:t>mV</a:t>
-            </a:r>
-            <a:r>
-              <a:rPr sz="1600" b="0" i="0">
-                <a:solidFill>
-                  <a:srgbClr val="000000"/>
-                </a:solidFill>
-                <a:latin typeface="Times New Roman"/>
-                <a:ea typeface="標楷體"/>
-                <a:ea typeface="標楷體"/>
-              </a:rPr>
-              <a:t>，</a:t>
-            </a:r>
-            <a:r>
-              <a:rPr sz="1700" b="1" i="0">
-                <a:solidFill>
-                  <a:srgbClr val="1F6FB5"/>
-                </a:solidFill>
-                <a:latin typeface="Times New Roman"/>
-                <a:ea typeface="標楷體"/>
-                <a:ea typeface="標楷體"/>
-              </a:rPr>
-              <a:t>正落在最適區間內</a:t>
-            </a:r>
-          </a:p>
-          <a:p>
-            <a:pPr algn="l">
-              <a:spcAft>
-                <a:spcPts val="600"/>
-              </a:spcAft>
-            </a:pPr>
-            <a:r>
-              <a:rPr sz="1700" b="1" i="0">
-                <a:solidFill>
-                  <a:srgbClr val="000000"/>
-                </a:solidFill>
-                <a:latin typeface="Times New Roman"/>
-                <a:ea typeface="標楷體"/>
-                <a:ea typeface="標楷體"/>
-              </a:rPr>
-              <a:t>變化：</a:t>
-            </a:r>
-            <a:r>
-              <a:rPr sz="1600" b="0" i="0">
-                <a:solidFill>
-                  <a:srgbClr val="000000"/>
-                </a:solidFill>
-                <a:latin typeface="Times New Roman"/>
-                <a:ea typeface="標楷體"/>
-                <a:ea typeface="標楷體"/>
-              </a:rPr>
-              <a:t>補氣當下 10 分鐘內跳 +37 </a:t>
-            </a:r>
-            <a:r>
-              <a:rPr sz="1600" b="0" i="0">
-                <a:solidFill>
-                  <a:srgbClr val="000000"/>
-                </a:solidFill>
-                <a:latin typeface="Times New Roman"/>
-                <a:ea typeface="標楷體"/>
-                <a:ea typeface="標楷體"/>
-              </a:rPr>
-              <a:t>mV</a:t>
-            </a:r>
-            <a:r>
-              <a:rPr sz="1600" b="0" i="0">
-                <a:solidFill>
-                  <a:srgbClr val="000000"/>
-                </a:solidFill>
-                <a:latin typeface="Times New Roman"/>
-                <a:ea typeface="標楷體"/>
-                <a:ea typeface="標楷體"/>
-              </a:rPr>
-              <a:t>；氣泵運轉時 +3.5 ~ +10.8 </a:t>
-            </a:r>
-            <a:r>
-              <a:rPr sz="1600" b="0" i="0">
-                <a:solidFill>
-                  <a:srgbClr val="000000"/>
-                </a:solidFill>
-                <a:latin typeface="Times New Roman"/>
-                <a:ea typeface="標楷體"/>
-                <a:ea typeface="標楷體"/>
-              </a:rPr>
-              <a:t>mV</a:t>
-            </a:r>
-            <a:r>
-              <a:rPr sz="1600" b="0" i="0">
-                <a:solidFill>
-                  <a:srgbClr val="000000"/>
-                </a:solidFill>
-                <a:latin typeface="Times New Roman"/>
-                <a:ea typeface="標楷體"/>
-                <a:ea typeface="標楷體"/>
-              </a:rPr>
-              <a:t>/分。</a:t>
-            </a:r>
-          </a:p>
-          <a:p>
-            <a:pPr algn="l">
-              <a:spcAft>
-                <a:spcPts val="600"/>
-              </a:spcAft>
-            </a:pPr>
-            <a:r>
-              <a:rPr sz="1600" b="1" i="0">
-                <a:solidFill>
-                  <a:srgbClr val="FF0000"/>
-                </a:solidFill>
-                <a:latin typeface="Times New Roman"/>
-                <a:ea typeface="標楷體"/>
-                <a:ea typeface="標楷體"/>
-              </a:rPr>
-              <a:t>碳源中斷後每循環位移由 −125.5 變為 −158.8 </a:t>
-            </a:r>
-            <a:r>
-              <a:rPr sz="1600" b="1" i="0">
-                <a:solidFill>
-                  <a:srgbClr val="FF0000"/>
-                </a:solidFill>
-                <a:latin typeface="Times New Roman"/>
-                <a:ea typeface="標楷體"/>
-                <a:ea typeface="標楷體"/>
-              </a:rPr>
-              <a:t>mV</a:t>
-            </a:r>
-            <a:r>
-              <a:rPr sz="1600" b="1" i="0">
-                <a:solidFill>
-                  <a:srgbClr val="FF0000"/>
-                </a:solidFill>
-                <a:latin typeface="Times New Roman"/>
-                <a:ea typeface="標楷體"/>
-                <a:ea typeface="標楷體"/>
-              </a:rPr>
-              <a:t>（走更多，</a:t>
-            </a:r>
-            <a:r>
-              <a:rPr sz="1600" b="1" i="1">
-                <a:solidFill>
-                  <a:srgbClr val="FF0000"/>
-                </a:solidFill>
-                <a:latin typeface="Times New Roman"/>
-                <a:ea typeface="標楷體"/>
-                <a:ea typeface="標楷體"/>
-              </a:rPr>
-              <a:t>p</a:t>
-            </a:r>
-            <a:r>
-              <a:rPr sz="1600" b="1" i="0">
-                <a:solidFill>
-                  <a:srgbClr val="FF0000"/>
-                </a:solidFill>
-                <a:latin typeface="Times New Roman"/>
-                <a:ea typeface="標楷體"/>
-                <a:ea typeface="標楷體"/>
-              </a:rPr>
-              <a:t> = 0.089）——產甲烷必須停止的時段，</a:t>
-            </a:r>
-            <a:r>
-              <a:rPr sz="1600" b="1" i="0">
-                <a:solidFill>
-                  <a:srgbClr val="FF0000"/>
-                </a:solidFill>
-                <a:latin typeface="Times New Roman"/>
-                <a:ea typeface="標楷體"/>
-                <a:ea typeface="標楷體"/>
-              </a:rPr>
-              <a:t>ORP</a:t>
-            </a:r>
-            <a:r>
-              <a:rPr sz="1600" b="1" i="0">
-                <a:solidFill>
-                  <a:srgbClr val="FF0000"/>
-                </a:solidFill>
-                <a:latin typeface="Times New Roman"/>
-                <a:ea typeface="標楷體"/>
-                <a:ea typeface="標楷體"/>
-              </a:rPr>
-              <a:t> 照常變化。</a:t>
-            </a:r>
-          </a:p>
-        </p:txBody>
-      </p:sp>
-      <p:sp>
-        <p:nvSpPr>
-          <p:cNvPr id="9" name="Rectangle 8"/>
-          <p:cNvSpPr/>
-          <p:nvPr/>
-        </p:nvSpPr>
-        <p:spPr>
-          <a:xfrm>
-            <a:off x="432000" y="5562000"/>
-            <a:ext cx="11329200" cy="864000"/>
-          </a:xfrm>
-          <a:prstGeom prst="rect">
-            <a:avLst/>
-          </a:prstGeom>
-          <a:solidFill>
-            <a:srgbClr val="F2F7FC"/>
-          </a:solidFill>
-          <a:ln w="9525">
-            <a:solidFill>
-              <a:srgbClr val="2AB6D8"/>
-            </a:solidFill>
-          </a:ln>
-          <a:effectLst/>
-        </p:spPr>
-        <p:style>
-          <a:lnRef idx="1">
-            <a:schemeClr val="accent1"/>
-          </a:lnRef>
-          <a:fillRef idx="3">
-            <a:schemeClr val="accent1"/>
-          </a:fillRef>
-          <a:effectRef idx="2">
-            <a:schemeClr val="accent1"/>
-          </a:effectRef>
-          <a:fontRef idx="minor">
-            <a:schemeClr val="lt1"/>
-          </a:fontRef>
-        </p:style>
-        <p:txBody>
-          <a:bodyPr rtlCol="0" anchor="ctr"/>
-          <a:lstStyle/>
-          <a:p>
-            <a:pPr algn="ctr"/>
-          </a:p>
-        </p:txBody>
-      </p:sp>
-      <p:sp>
-        <p:nvSpPr>
-          <p:cNvPr id="10" name="TextBox 9"/>
-          <p:cNvSpPr txBox="1"/>
-          <p:nvPr/>
-        </p:nvSpPr>
-        <p:spPr>
-          <a:xfrm>
-            <a:off x="612000" y="5670000"/>
-            <a:ext cx="10969200" cy="648000"/>
-          </a:xfrm>
-          <a:prstGeom prst="rect">
-            <a:avLst/>
-          </a:prstGeom>
-          <a:noFill/>
-        </p:spPr>
-        <p:txBody>
-          <a:bodyPr wrap="square" anchor="ctr" lIns="0" rIns="0" tIns="0" bIns="0">
-            <a:spAutoFit/>
-          </a:bodyPr>
-          <a:lstStyle/>
-          <a:p>
-            <a:pPr algn="l">
-              <a:spcAft>
-                <a:spcPts val="600"/>
-              </a:spcAft>
-            </a:pPr>
-            <a:r>
-              <a:rPr sz="1300" b="0" i="0">
-                <a:solidFill>
-                  <a:srgbClr val="FF0000"/>
-                </a:solidFill>
-                <a:latin typeface="Times New Roman"/>
-                <a:ea typeface="標楷體"/>
-                <a:ea typeface="標楷體"/>
-              </a:rPr>
-              <a:t>文獻將 </a:t>
-            </a:r>
-            <a:r>
-              <a:rPr sz="1300" b="0" i="0">
-                <a:solidFill>
-                  <a:srgbClr val="FF0000"/>
-                </a:solidFill>
-                <a:latin typeface="Times New Roman"/>
-                <a:ea typeface="標楷體"/>
-                <a:ea typeface="標楷體"/>
-              </a:rPr>
-              <a:t>ORP</a:t>
-            </a:r>
-            <a:r>
-              <a:rPr sz="1300" b="0" i="0">
-                <a:solidFill>
-                  <a:srgbClr val="FF0000"/>
-                </a:solidFill>
-                <a:latin typeface="Times New Roman"/>
-                <a:ea typeface="標楷體"/>
-                <a:ea typeface="標楷體"/>
-              </a:rPr>
-              <a:t> 當微生物活性指標，其對象是未外加氫氣的系統；本反應器的氫氣為外部輸入，會直接鉗制電位，該套解讀不能直接移植。</a:t>
+              <a:t>全資料庫 252 條下降曲線，九成落在「接近直線」這一群。</a:t>
             </a:r>
           </a:p>
         </p:txBody>
@@ -4589,7 +4238,29 @@
                 <a:ea typeface="標楷體"/>
                 <a:ea typeface="標楷體"/>
               </a:rPr>
-              <a:t>十一、試過但不成立的兩個方法</a:t>
+              <a:t>十一、氧化還原電位（</a:t>
+            </a:r>
+            <a:r>
+              <a:rPr sz="2800" b="1" i="0">
+                <a:solidFill>
+                  <a:srgbClr val="000000"/>
+                </a:solidFill>
+                <a:latin typeface="Times New Roman"/>
+                <a:ea typeface="標楷體"/>
+                <a:ea typeface="標楷體"/>
+              </a:rPr>
+              <a:t>ORP</a:t>
+            </a:r>
+            <a:r>
+              <a:rPr sz="2800" b="1" i="0">
+                <a:solidFill>
+                  <a:srgbClr val="000000"/>
+                </a:solidFill>
+                <a:latin typeface="Times New Roman"/>
+                <a:ea typeface="標楷體"/>
+                <a:ea typeface="標楷體"/>
+              </a:rPr>
+              <a:t>）該怎麼讀</a:t>
             </a:r>
           </a:p>
         </p:txBody>
@@ -4674,7 +4345,7 @@
                 <a:ea typeface="標楷體"/>
                 <a:ea typeface="標楷體"/>
               </a:rPr>
-              <a:t>誠實記錄，避免後續重複投入</a:t>
+              <a:t>水準健康，但循環內的變化不是生物造成的</a:t>
             </a:r>
           </a:p>
         </p:txBody>
@@ -4764,148 +4435,9 @@
           </a:p>
         </p:txBody>
       </p:sp>
-      <p:sp>
-        <p:nvSpPr>
-          <p:cNvPr id="7" name="TextBox 6"/>
-          <p:cNvSpPr txBox="1"/>
-          <p:nvPr/>
-        </p:nvSpPr>
-        <p:spPr>
-          <a:xfrm>
-            <a:off x="576000" y="1224000"/>
-            <a:ext cx="11041200" cy="2196000"/>
-          </a:xfrm>
-          <a:prstGeom prst="rect">
-            <a:avLst/>
-          </a:prstGeom>
-          <a:noFill/>
-        </p:spPr>
-        <p:txBody>
-          <a:bodyPr wrap="square" anchor="t" lIns="0" rIns="0" tIns="0" bIns="0">
-            <a:spAutoFit/>
-          </a:bodyPr>
-          <a:lstStyle/>
-          <a:p>
-            <a:pPr algn="l">
-              <a:spcAft>
-                <a:spcPts val="800"/>
-              </a:spcAft>
-            </a:pPr>
-            <a:r>
-              <a:rPr sz="2000" b="1" i="0">
-                <a:solidFill>
-                  <a:srgbClr val="000000"/>
-                </a:solidFill>
-                <a:latin typeface="Times New Roman"/>
-                <a:ea typeface="標楷體"/>
-                <a:ea typeface="標楷體"/>
-              </a:rPr>
-              <a:t>① 以「曲率」分離生物與物理</a:t>
-            </a:r>
-          </a:p>
-          <a:p>
-            <a:pPr algn="l">
-              <a:spcAft>
-                <a:spcPts val="1600"/>
-              </a:spcAft>
-            </a:pPr>
-            <a:r>
-              <a:rPr sz="1700" b="0" i="0">
-                <a:solidFill>
-                  <a:srgbClr val="000000"/>
-                </a:solidFill>
-                <a:latin typeface="Times New Roman"/>
-                <a:ea typeface="標楷體"/>
-                <a:ea typeface="標楷體"/>
-              </a:rPr>
-              <a:t>前提是生物速率為定值，但生物速率會隨氫氣耗盡而變動。以已知答案的合成資料驗證：真實物理份額 0%、僅有會衰減的生物時，該方法報出物理份額 </a:t>
-            </a:r>
-            <a:r>
-              <a:rPr sz="1900" b="1" i="0">
-                <a:solidFill>
-                  <a:srgbClr val="FF0000"/>
-                </a:solidFill>
-                <a:latin typeface="Times New Roman"/>
-                <a:ea typeface="標楷體"/>
-                <a:ea typeface="標楷體"/>
-              </a:rPr>
-              <a:t>101%</a:t>
-            </a:r>
-            <a:r>
-              <a:rPr sz="1700" b="0" i="0">
-                <a:solidFill>
-                  <a:srgbClr val="000000"/>
-                </a:solidFill>
-                <a:latin typeface="Times New Roman"/>
-                <a:ea typeface="標楷體"/>
-                <a:ea typeface="標楷體"/>
-              </a:rPr>
-              <a:t>。</a:t>
-            </a:r>
-          </a:p>
-          <a:p>
-            <a:pPr algn="l">
-              <a:spcAft>
-                <a:spcPts val="800"/>
-              </a:spcAft>
-            </a:pPr>
-            <a:r>
-              <a:rPr sz="2000" b="1" i="0">
-                <a:solidFill>
-                  <a:srgbClr val="000000"/>
-                </a:solidFill>
-                <a:latin typeface="Times New Roman"/>
-                <a:ea typeface="標楷體"/>
-                <a:ea typeface="標楷體"/>
-              </a:rPr>
-              <a:t>② 以物理資訊神經網路（</a:t>
-            </a:r>
-            <a:r>
-              <a:rPr sz="2000" b="1" i="0">
-                <a:solidFill>
-                  <a:srgbClr val="000000"/>
-                </a:solidFill>
-                <a:latin typeface="Times New Roman"/>
-                <a:ea typeface="標楷體"/>
-                <a:ea typeface="標楷體"/>
-              </a:rPr>
-              <a:t>PINN</a:t>
-            </a:r>
-            <a:r>
-              <a:rPr sz="2000" b="1" i="0">
-                <a:solidFill>
-                  <a:srgbClr val="000000"/>
-                </a:solidFill>
-                <a:latin typeface="Times New Roman"/>
-                <a:ea typeface="標楷體"/>
-                <a:ea typeface="標楷體"/>
-              </a:rPr>
-              <a:t>）反推生物速率</a:t>
-            </a:r>
-          </a:p>
-          <a:p>
-            <a:pPr algn="l">
-              <a:spcAft>
-                <a:spcPts val="600"/>
-              </a:spcAft>
-            </a:pPr>
-            <a:r>
-              <a:rPr sz="1700" b="0" i="0">
-                <a:solidFill>
-                  <a:srgbClr val="000000"/>
-                </a:solidFill>
-                <a:latin typeface="Times New Roman"/>
-                <a:ea typeface="標楷體"/>
-                <a:ea typeface="標楷體"/>
-              </a:rPr>
-              <a:t>讓生物速率成為時間的函數是正確的方向，但它可以吸收任何殘差，結果由平滑設定決定而非由資料決定。</a:t>
-            </a:r>
-          </a:p>
-        </p:txBody>
-      </p:sp>
       <p:pic>
         <p:nvPicPr>
-          <p:cNvPr id="8" name="Picture 7" descr="fig42_pinn_rb.png"/>
+          <p:cNvPr id="7" name="Picture 6" descr="deck5_orp.png"/>
           <p:cNvPicPr>
             <a:picLocks noChangeAspect="1"/>
           </p:cNvPicPr>
@@ -4919,8 +4451,8 @@
         </p:blipFill>
         <p:spPr>
           <a:xfrm>
-            <a:off x="2586599" y="3491999"/>
-            <a:ext cx="7020000" cy="2607263"/>
+            <a:off x="2856599" y="1152000"/>
+            <a:ext cx="6480000" cy="3165077"/>
           </a:xfrm>
           <a:prstGeom prst="rect">
             <a:avLst/>
@@ -4929,14 +4461,14 @@
       </p:pic>
       <p:sp>
         <p:nvSpPr>
-          <p:cNvPr id="9" name="TextBox 8"/>
+          <p:cNvPr id="8" name="TextBox 7"/>
           <p:cNvSpPr txBox="1"/>
           <p:nvPr/>
         </p:nvSpPr>
         <p:spPr>
           <a:xfrm>
-            <a:off x="1800000" y="6153262"/>
-            <a:ext cx="8593200" cy="251999"/>
+            <a:off x="576000" y="4425077"/>
+            <a:ext cx="11041200" cy="1154922"/>
           </a:xfrm>
           <a:prstGeom prst="rect">
             <a:avLst/>
@@ -4949,32 +4481,331 @@
           </a:bodyPr>
           <a:lstStyle/>
           <a:p>
-            <a:pPr algn="ctr">
+            <a:pPr algn="l">
+              <a:spcAft>
+                <a:spcPts val="500"/>
+              </a:spcAft>
+            </a:pPr>
+            <a:r>
+              <a:rPr sz="1700" b="1" i="0">
+                <a:solidFill>
+                  <a:srgbClr val="000000"/>
+                </a:solidFill>
+                <a:latin typeface="Times New Roman"/>
+                <a:ea typeface="標楷體"/>
+                <a:ea typeface="標楷體"/>
+              </a:rPr>
+              <a:t>水準：</a:t>
+            </a:r>
+            <a:r>
+              <a:rPr sz="1600" b="0" i="0">
+                <a:solidFill>
+                  <a:srgbClr val="000000"/>
+                </a:solidFill>
+                <a:latin typeface="Times New Roman"/>
+                <a:ea typeface="標楷體"/>
+                <a:ea typeface="標楷體"/>
+              </a:rPr>
+              <a:t>−357 </a:t>
+            </a:r>
+            <a:r>
+              <a:rPr sz="1600" b="0" i="0">
+                <a:solidFill>
+                  <a:srgbClr val="000000"/>
+                </a:solidFill>
+                <a:latin typeface="Times New Roman"/>
+                <a:ea typeface="標楷體"/>
+                <a:ea typeface="標楷體"/>
+              </a:rPr>
+              <a:t>mV</a:t>
+            </a:r>
+            <a:r>
+              <a:rPr sz="1600" b="0" i="0">
+                <a:solidFill>
+                  <a:srgbClr val="000000"/>
+                </a:solidFill>
+                <a:latin typeface="Times New Roman"/>
+                <a:ea typeface="標楷體"/>
+                <a:ea typeface="標楷體"/>
+              </a:rPr>
+              <a:t>（對 </a:t>
+            </a:r>
+            <a:r>
+              <a:rPr sz="1600" b="0" i="0">
+                <a:solidFill>
+                  <a:srgbClr val="000000"/>
+                </a:solidFill>
+                <a:latin typeface="Times New Roman"/>
+                <a:ea typeface="標楷體"/>
+                <a:ea typeface="標楷體"/>
+              </a:rPr>
+              <a:t>SHE</a:t>
+            </a:r>
+            <a:r>
+              <a:rPr sz="1600" b="0" i="0">
+                <a:solidFill>
+                  <a:srgbClr val="000000"/>
+                </a:solidFill>
+                <a:latin typeface="Times New Roman"/>
+                <a:ea typeface="標楷體"/>
+                <a:ea typeface="標楷體"/>
+              </a:rPr>
+              <a:t>），文獻最適為 −335.6 ± 29.0 </a:t>
+            </a:r>
+            <a:r>
+              <a:rPr sz="1600" b="0" i="0">
+                <a:solidFill>
+                  <a:srgbClr val="000000"/>
+                </a:solidFill>
+                <a:latin typeface="Times New Roman"/>
+                <a:ea typeface="標楷體"/>
+                <a:ea typeface="標楷體"/>
+              </a:rPr>
+              <a:t>mV</a:t>
+            </a:r>
+            <a:r>
+              <a:rPr sz="1600" b="0" i="0">
+                <a:solidFill>
+                  <a:srgbClr val="000000"/>
+                </a:solidFill>
+                <a:latin typeface="Times New Roman"/>
+                <a:ea typeface="標楷體"/>
+                <a:ea typeface="標楷體"/>
+              </a:rPr>
+              <a:t> — </a:t>
+            </a:r>
+            <a:r>
+              <a:rPr sz="1700" b="1" i="0">
+                <a:solidFill>
+                  <a:srgbClr val="1F6FB5"/>
+                </a:solidFill>
+                <a:latin typeface="Times New Roman"/>
+                <a:ea typeface="標楷體"/>
+                <a:ea typeface="標楷體"/>
+              </a:rPr>
+              <a:t>正落在區間內</a:t>
+            </a:r>
+          </a:p>
+          <a:p>
+            <a:pPr algn="l">
+              <a:spcAft>
+                <a:spcPts val="500"/>
+              </a:spcAft>
+            </a:pPr>
+            <a:r>
+              <a:rPr sz="1700" b="1" i="0">
+                <a:solidFill>
+                  <a:srgbClr val="000000"/>
+                </a:solidFill>
+                <a:latin typeface="Times New Roman"/>
+                <a:ea typeface="標楷體"/>
+                <a:ea typeface="標楷體"/>
+              </a:rPr>
+              <a:t>變化：</a:t>
+            </a:r>
+            <a:r>
+              <a:rPr sz="1600" b="0" i="0">
+                <a:solidFill>
+                  <a:srgbClr val="000000"/>
+                </a:solidFill>
+                <a:latin typeface="Times New Roman"/>
+                <a:ea typeface="標楷體"/>
+                <a:ea typeface="標楷體"/>
+              </a:rPr>
+              <a:t>補氣跳 +37 </a:t>
+            </a:r>
+            <a:r>
+              <a:rPr sz="1600" b="0" i="0">
+                <a:solidFill>
+                  <a:srgbClr val="000000"/>
+                </a:solidFill>
+                <a:latin typeface="Times New Roman"/>
+                <a:ea typeface="標楷體"/>
+                <a:ea typeface="標楷體"/>
+              </a:rPr>
+              <a:t>mV</a:t>
+            </a:r>
+            <a:r>
+              <a:rPr sz="1600" b="0" i="0">
+                <a:solidFill>
+                  <a:srgbClr val="000000"/>
+                </a:solidFill>
+                <a:latin typeface="Times New Roman"/>
+                <a:ea typeface="標楷體"/>
+                <a:ea typeface="標楷體"/>
+              </a:rPr>
+              <a:t>；泵運轉 +3.5 ~ +10.8 </a:t>
+            </a:r>
+            <a:r>
+              <a:rPr sz="1600" b="0" i="0">
+                <a:solidFill>
+                  <a:srgbClr val="000000"/>
+                </a:solidFill>
+                <a:latin typeface="Times New Roman"/>
+                <a:ea typeface="標楷體"/>
+                <a:ea typeface="標楷體"/>
+              </a:rPr>
+              <a:t>mV</a:t>
+            </a:r>
+            <a:r>
+              <a:rPr sz="1600" b="0" i="0">
+                <a:solidFill>
+                  <a:srgbClr val="000000"/>
+                </a:solidFill>
+                <a:latin typeface="Times New Roman"/>
+                <a:ea typeface="標楷體"/>
+                <a:ea typeface="標楷體"/>
+              </a:rPr>
+              <a:t>/分。</a:t>
+            </a:r>
+          </a:p>
+          <a:p>
+            <a:pPr algn="l">
               <a:spcAft>
                 <a:spcPts val="600"/>
               </a:spcAft>
             </a:pPr>
             <a:r>
-              <a:rPr sz="1150" b="1" i="0">
-                <a:solidFill>
-                  <a:srgbClr val="1F6FB5"/>
-                </a:solidFill>
-                <a:latin typeface="Times New Roman"/>
-                <a:ea typeface="標楷體"/>
-                <a:ea typeface="標楷體"/>
-              </a:rPr>
-              <a:t>圖 4.　</a:t>
-            </a:r>
-            <a:r>
-              <a:rPr sz="1150" b="0" i="0">
-                <a:solidFill>
-                  <a:srgbClr val="595959"/>
-                </a:solidFill>
-                <a:latin typeface="Times New Roman"/>
-                <a:ea typeface="標楷體"/>
-                <a:ea typeface="標楷體"/>
-              </a:rPr>
-              <a:t>交叉驗證選到誤差 87% 的設定，真正最佳者誤差 36%——標準的參數選擇方法在此失效</a:t>
+              <a:rPr sz="1600" b="1" i="0">
+                <a:solidFill>
+                  <a:srgbClr val="FF0000"/>
+                </a:solidFill>
+                <a:latin typeface="Times New Roman"/>
+                <a:ea typeface="標楷體"/>
+                <a:ea typeface="標楷體"/>
+              </a:rPr>
+              <a:t>產甲烷必須停止的時段，</a:t>
+            </a:r>
+            <a:r>
+              <a:rPr sz="1600" b="1" i="0">
+                <a:solidFill>
+                  <a:srgbClr val="FF0000"/>
+                </a:solidFill>
+                <a:latin typeface="Times New Roman"/>
+                <a:ea typeface="標楷體"/>
+                <a:ea typeface="標楷體"/>
+              </a:rPr>
+              <a:t>ORP</a:t>
+            </a:r>
+            <a:r>
+              <a:rPr sz="1600" b="1" i="0">
+                <a:solidFill>
+                  <a:srgbClr val="FF0000"/>
+                </a:solidFill>
+                <a:latin typeface="Times New Roman"/>
+                <a:ea typeface="標楷體"/>
+                <a:ea typeface="標楷體"/>
+              </a:rPr>
+              <a:t> 照常變化。</a:t>
+            </a:r>
+          </a:p>
+        </p:txBody>
+      </p:sp>
+      <p:sp>
+        <p:nvSpPr>
+          <p:cNvPr id="9" name="Rectangle 8"/>
+          <p:cNvSpPr/>
+          <p:nvPr/>
+        </p:nvSpPr>
+        <p:spPr>
+          <a:xfrm>
+            <a:off x="432000" y="5562000"/>
+            <a:ext cx="11329200" cy="864000"/>
+          </a:xfrm>
+          <a:prstGeom prst="rect">
+            <a:avLst/>
+          </a:prstGeom>
+          <a:solidFill>
+            <a:srgbClr val="F2F7FC"/>
+          </a:solidFill>
+          <a:ln w="9525">
+            <a:solidFill>
+              <a:srgbClr val="2AB6D8"/>
+            </a:solidFill>
+          </a:ln>
+          <a:effectLst/>
+        </p:spPr>
+        <p:style>
+          <a:lnRef idx="1">
+            <a:schemeClr val="accent1"/>
+          </a:lnRef>
+          <a:fillRef idx="3">
+            <a:schemeClr val="accent1"/>
+          </a:fillRef>
+          <a:effectRef idx="2">
+            <a:schemeClr val="accent1"/>
+          </a:effectRef>
+          <a:fontRef idx="minor">
+            <a:schemeClr val="lt1"/>
+          </a:fontRef>
+        </p:style>
+        <p:txBody>
+          <a:bodyPr rtlCol="0" anchor="ctr"/>
+          <a:lstStyle/>
+          <a:p>
+            <a:pPr algn="ctr"/>
+          </a:p>
+        </p:txBody>
+      </p:sp>
+      <p:sp>
+        <p:nvSpPr>
+          <p:cNvPr id="10" name="TextBox 9"/>
+          <p:cNvSpPr txBox="1"/>
+          <p:nvPr/>
+        </p:nvSpPr>
+        <p:spPr>
+          <a:xfrm>
+            <a:off x="612000" y="5670000"/>
+            <a:ext cx="10969200" cy="648000"/>
+          </a:xfrm>
+          <a:prstGeom prst="rect">
+            <a:avLst/>
+          </a:prstGeom>
+          <a:noFill/>
+        </p:spPr>
+        <p:txBody>
+          <a:bodyPr wrap="square" anchor="ctr" lIns="0" rIns="0" tIns="0" bIns="0">
+            <a:spAutoFit/>
+          </a:bodyPr>
+          <a:lstStyle/>
+          <a:p>
+            <a:pPr algn="l">
+              <a:spcAft>
+                <a:spcPts val="600"/>
+              </a:spcAft>
+            </a:pPr>
+            <a:r>
+              <a:rPr sz="1300" b="0" i="0">
+                <a:solidFill>
+                  <a:srgbClr val="FF0000"/>
+                </a:solidFill>
+                <a:latin typeface="Times New Roman"/>
+                <a:ea typeface="標楷體"/>
+                <a:ea typeface="標楷體"/>
+              </a:rPr>
+              <a:t>文獻將 </a:t>
+            </a:r>
+            <a:r>
+              <a:rPr sz="1300" b="0" i="0">
+                <a:solidFill>
+                  <a:srgbClr val="FF0000"/>
+                </a:solidFill>
+                <a:latin typeface="Times New Roman"/>
+                <a:ea typeface="標楷體"/>
+                <a:ea typeface="標楷體"/>
+              </a:rPr>
+              <a:t>ORP</a:t>
+            </a:r>
+            <a:r>
+              <a:rPr sz="1300" b="0" i="0">
+                <a:solidFill>
+                  <a:srgbClr val="FF0000"/>
+                </a:solidFill>
+                <a:latin typeface="Times New Roman"/>
+                <a:ea typeface="標楷體"/>
+                <a:ea typeface="標楷體"/>
+              </a:rPr>
+              <a:t> 當微生物活性指標，其對象是未外加氫氣的系統；本反應器的氫氣為外部輸入，會直接鉗制電位，該套解讀不能直接移植。</a:t>
             </a:r>
           </a:p>
         </p:txBody>
@@ -5033,7 +4864,7 @@
                 <a:ea typeface="標楷體"/>
                 <a:ea typeface="標楷體"/>
               </a:rPr>
-              <a:t>十二、本分析的限制</a:t>
+              <a:t>十二、試過但不成立的兩個方法</a:t>
             </a:r>
           </a:p>
         </p:txBody>
@@ -5118,7 +4949,7 @@
                 <a:ea typeface="標楷體"/>
                 <a:ea typeface="標楷體"/>
               </a:rPr>
-              <a:t>引用時應一併說明</a:t>
+              <a:t>誠實記錄，避免後續重複投入</a:t>
             </a:r>
           </a:p>
         </p:txBody>
@@ -5216,8 +5047,8 @@
         </p:nvSpPr>
         <p:spPr>
           <a:xfrm>
-            <a:off x="576000" y="1440000"/>
-            <a:ext cx="11041200" cy="4320000"/>
+            <a:off x="576000" y="1152000"/>
+            <a:ext cx="11041200" cy="2088000"/>
           </a:xfrm>
           <a:prstGeom prst="rect">
             <a:avLst/>
@@ -5232,11 +5063,11 @@
           <a:p>
             <a:pPr algn="l">
               <a:spcAft>
-                <a:spcPts val="1600"/>
+                <a:spcPts val="800"/>
               </a:spcAft>
             </a:pPr>
             <a:r>
-              <a:rPr sz="1800" b="0" i="0">
+              <a:rPr sz="2000" b="1" i="0">
                 <a:solidFill>
                   <a:srgbClr val="000000"/>
                 </a:solidFill>
@@ -5244,17 +5075,17 @@
                 <a:ea typeface="標楷體"/>
                 <a:ea typeface="標楷體"/>
               </a:rPr>
-              <a:t>• 氫氣濃度為差額推算，非直接量測（分析儀僅量二氧化碳與甲烷）</a:t>
+              <a:t>① 以「曲率」分離生物與物理</a:t>
             </a:r>
           </a:p>
           <a:p>
             <a:pPr algn="l">
               <a:spcAft>
-                <a:spcPts val="1600"/>
+                <a:spcPts val="1200"/>
               </a:spcAft>
             </a:pPr>
             <a:r>
-              <a:rPr sz="1800" b="0" i="0">
+              <a:rPr sz="1700" b="0" i="0">
                 <a:solidFill>
                   <a:srgbClr val="000000"/>
                 </a:solidFill>
@@ -5262,17 +5093,39 @@
                 <a:ea typeface="標楷體"/>
                 <a:ea typeface="標楷體"/>
               </a:rPr>
-              <a:t>• 無法區分氫氣流失的機制：洩漏、穿透、或其他耗氫生化反應</a:t>
+              <a:t>前提是生物速率為定值，但它會隨氫氣耗盡而變動。以已知答案驗證：真實物理份額 0% 時，該方法報出 </a:t>
+            </a:r>
+            <a:r>
+              <a:rPr sz="1900" b="1" i="0">
+                <a:solidFill>
+                  <a:srgbClr val="FF0000"/>
+                </a:solidFill>
+                <a:latin typeface="Times New Roman"/>
+                <a:ea typeface="標楷體"/>
+                <a:ea typeface="標楷體"/>
+              </a:rPr>
+              <a:t>101%</a:t>
+            </a:r>
+            <a:r>
+              <a:rPr sz="1700" b="0" i="0">
+                <a:solidFill>
+                  <a:srgbClr val="000000"/>
+                </a:solidFill>
+                <a:latin typeface="Times New Roman"/>
+                <a:ea typeface="標楷體"/>
+                <a:ea typeface="標楷體"/>
+              </a:rPr>
+              <a:t>。</a:t>
             </a:r>
           </a:p>
           <a:p>
             <a:pPr algn="l">
               <a:spcAft>
-                <a:spcPts val="1600"/>
+                <a:spcPts val="800"/>
               </a:spcAft>
             </a:pPr>
             <a:r>
-              <a:rPr sz="1800" b="0" i="0">
+              <a:rPr sz="2000" b="1" i="0">
                 <a:solidFill>
                   <a:srgbClr val="000000"/>
                 </a:solidFill>
@@ -5280,17 +5133,39 @@
                 <a:ea typeface="標楷體"/>
                 <a:ea typeface="標楷體"/>
               </a:rPr>
-              <a:t>• 僅 35 筆可用的氣體組成資料，平均每 11 天一筆</a:t>
+              <a:t>② 以物理資訊神經網路（</a:t>
+            </a:r>
+            <a:r>
+              <a:rPr sz="2000" b="1" i="0">
+                <a:solidFill>
+                  <a:srgbClr val="000000"/>
+                </a:solidFill>
+                <a:latin typeface="Times New Roman"/>
+                <a:ea typeface="標楷體"/>
+                <a:ea typeface="標楷體"/>
+              </a:rPr>
+              <a:t>PINN</a:t>
+            </a:r>
+            <a:r>
+              <a:rPr sz="2000" b="1" i="0">
+                <a:solidFill>
+                  <a:srgbClr val="000000"/>
+                </a:solidFill>
+                <a:latin typeface="Times New Roman"/>
+                <a:ea typeface="標楷體"/>
+                <a:ea typeface="標楷體"/>
+              </a:rPr>
+              <a:t>）反推生物速率</a:t>
             </a:r>
           </a:p>
           <a:p>
             <a:pPr algn="l">
               <a:spcAft>
-                <a:spcPts val="1600"/>
+                <a:spcPts val="600"/>
               </a:spcAft>
             </a:pPr>
             <a:r>
-              <a:rPr sz="1800" b="0" i="0">
+              <a:rPr sz="1700" b="0" i="0">
                 <a:solidFill>
                   <a:srgbClr val="000000"/>
                 </a:solidFill>
@@ -5298,29 +5173,35 @@
                 <a:ea typeface="標楷體"/>
                 <a:ea typeface="標楷體"/>
               </a:rPr>
-              <a:t>• 碳源中斷時進料組成同時改變，兩時段的差異不僅限於碳源有無</a:t>
-            </a:r>
-          </a:p>
-          <a:p>
-            <a:pPr algn="l">
-              <a:spcAft>
-                <a:spcPts val="1600"/>
-              </a:spcAft>
-            </a:pPr>
-            <a:r>
-              <a:rPr sz="1800" b="0" i="0">
-                <a:solidFill>
-                  <a:srgbClr val="000000"/>
-                </a:solidFill>
-                <a:latin typeface="Times New Roman"/>
-                <a:ea typeface="標楷體"/>
-                <a:ea typeface="標楷體"/>
-              </a:rPr>
-              <a:t>• 酸鹼值的結果效應量極小（約為儀器刻度的七分之一），屬方向性證據</a:t>
-            </a:r>
-          </a:p>
-        </p:txBody>
-      </p:sp>
+              <a:t>方向正確，但方程式本身存在一個恰好抵銷的自由度（見次頁）。</a:t>
+            </a:r>
+          </a:p>
+        </p:txBody>
+      </p:sp>
+      <p:pic>
+        <p:nvPicPr>
+          <p:cNvPr id="8" name="Picture 7" descr="deck6_pinn.png"/>
+          <p:cNvPicPr>
+            <a:picLocks noChangeAspect="1"/>
+          </p:cNvPicPr>
+          <p:nvPr/>
+        </p:nvPicPr>
+        <p:blipFill>
+          <a:blip r:embed="rId2"/>
+          <a:stretch>
+            <a:fillRect/>
+          </a:stretch>
+        </p:blipFill>
+        <p:spPr>
+          <a:xfrm>
+            <a:off x="3126599" y="3311999"/>
+            <a:ext cx="5940000" cy="3067973"/>
+          </a:xfrm>
+          <a:prstGeom prst="rect">
+            <a:avLst/>
+          </a:prstGeom>
+        </p:spPr>
+      </p:pic>
     </p:spTree>
   </p:cSld>
   <p:clrMapOvr>
@@ -5375,7 +5256,29 @@
                 <a:ea typeface="標楷體"/>
                 <a:ea typeface="標楷體"/>
               </a:rPr>
-              <a:t>十三、建議</a:t>
+              <a:t>十二之一、</a:t>
+            </a:r>
+            <a:r>
+              <a:rPr sz="2800" b="1" i="0">
+                <a:solidFill>
+                  <a:srgbClr val="000000"/>
+                </a:solidFill>
+                <a:latin typeface="Times New Roman"/>
+                <a:ea typeface="標楷體"/>
+                <a:ea typeface="標楷體"/>
+              </a:rPr>
+              <a:t>PINN</a:t>
+            </a:r>
+            <a:r>
+              <a:rPr sz="2800" b="1" i="0">
+                <a:solidFill>
+                  <a:srgbClr val="000000"/>
+                </a:solidFill>
+                <a:latin typeface="Times New Roman"/>
+                <a:ea typeface="標楷體"/>
+                <a:ea typeface="標楷體"/>
+              </a:rPr>
+              <a:t> 為什麼撈不回來</a:t>
             </a:r>
           </a:p>
         </p:txBody>
@@ -5460,7 +5363,7 @@
                 <a:ea typeface="標楷體"/>
                 <a:ea typeface="標楷體"/>
               </a:rPr>
-              <a:t>第一項完成前，其餘方向都無法定案</a:t>
+              <a:t>不是網路不夠大，是壓力這一個通道裡沒有這個資訊</a:t>
             </a:r>
           </a:p>
         </p:txBody>
@@ -5546,6 +5449,1002 @@
                 <a:ea typeface="標楷體"/>
               </a:rPr>
               <a:t>15</a:t>
+            </a:r>
+          </a:p>
+        </p:txBody>
+      </p:sp>
+      <p:sp>
+        <p:nvSpPr>
+          <p:cNvPr id="7" name="TextBox 6"/>
+          <p:cNvSpPr txBox="1"/>
+          <p:nvPr/>
+        </p:nvSpPr>
+        <p:spPr>
+          <a:xfrm>
+            <a:off x="576000" y="1116000"/>
+            <a:ext cx="11041200" cy="1152000"/>
+          </a:xfrm>
+          <a:prstGeom prst="rect">
+            <a:avLst/>
+          </a:prstGeom>
+          <a:noFill/>
+        </p:spPr>
+        <p:txBody>
+          <a:bodyPr wrap="square" anchor="t" lIns="0" rIns="0" tIns="0" bIns="0">
+            <a:spAutoFit/>
+          </a:bodyPr>
+          <a:lstStyle/>
+          <a:p>
+            <a:pPr algn="l">
+              <a:spcAft>
+                <a:spcPts val="600"/>
+              </a:spcAft>
+            </a:pPr>
+            <a:r>
+              <a:rPr sz="1700" b="0" i="0">
+                <a:solidFill>
+                  <a:srgbClr val="000000"/>
+                </a:solidFill>
+                <a:latin typeface="Times New Roman"/>
+                <a:ea typeface="標楷體"/>
+                <a:ea typeface="標楷體"/>
+              </a:rPr>
+              <a:t>氣體變少只有兩個原因：溶進水裡（物理）、被菌吃掉（生物）。壓力計只看得到兩者的</a:t>
+            </a:r>
+            <a:r>
+              <a:rPr sz="1900" b="1" i="0">
+                <a:solidFill>
+                  <a:srgbClr val="FF0000"/>
+                </a:solidFill>
+                <a:latin typeface="Times New Roman"/>
+                <a:ea typeface="標楷體"/>
+                <a:ea typeface="標楷體"/>
+              </a:rPr>
+              <a:t>總和</a:t>
+            </a:r>
+            <a:r>
+              <a:rPr sz="1700" b="0" i="0">
+                <a:solidFill>
+                  <a:srgbClr val="000000"/>
+                </a:solidFill>
+                <a:latin typeface="Times New Roman"/>
+                <a:ea typeface="標楷體"/>
+                <a:ea typeface="標楷體"/>
+              </a:rPr>
+              <a:t>。把生物項算多一點、同時把「平衡壓力」調高一點，兩者剛好互相抵銷——壓力曲線一模一樣。</a:t>
+            </a:r>
+          </a:p>
+        </p:txBody>
+      </p:sp>
+      <p:pic>
+        <p:nvPicPr>
+          <p:cNvPr id="8" name="Picture 7" descr="deck8_pinn_corr.png"/>
+          <p:cNvPicPr>
+            <a:picLocks noChangeAspect="1"/>
+          </p:cNvPicPr>
+          <p:nvPr/>
+        </p:nvPicPr>
+        <p:blipFill>
+          <a:blip r:embed="rId2"/>
+          <a:stretch>
+            <a:fillRect/>
+          </a:stretch>
+        </p:blipFill>
+        <p:spPr>
+          <a:xfrm>
+            <a:off x="2136599" y="2340000"/>
+            <a:ext cx="7920000" cy="3743300"/>
+          </a:xfrm>
+          <a:prstGeom prst="rect">
+            <a:avLst/>
+          </a:prstGeom>
+        </p:spPr>
+      </p:pic>
+    </p:spTree>
+  </p:cSld>
+  <p:clrMapOvr>
+    <a:masterClrMapping/>
+  </p:clrMapOvr>
+</p:sld>
+</file>
+
+<file path=ppt/slides/slide15.xml><?xml version="1.0" encoding="utf-8"?>
+<p:sld xmlns:a="http://schemas.openxmlformats.org/drawingml/2006/main" xmlns:p="http://schemas.openxmlformats.org/presentationml/2006/main" xmlns:r="http://schemas.openxmlformats.org/officeDocument/2006/relationships">
+  <p:cSld>
+    <p:spTree>
+      <p:nvGrpSpPr>
+        <p:cNvPr id="1" name=""/>
+        <p:cNvGrpSpPr/>
+        <p:nvPr/>
+      </p:nvGrpSpPr>
+      <p:grpSpPr/>
+      <p:sp>
+        <p:nvSpPr>
+          <p:cNvPr id="2" name="TextBox 1"/>
+          <p:cNvSpPr txBox="1"/>
+          <p:nvPr/>
+        </p:nvSpPr>
+        <p:spPr>
+          <a:xfrm>
+            <a:off x="432000" y="180000"/>
+            <a:ext cx="11329200" cy="540000"/>
+          </a:xfrm>
+          <a:prstGeom prst="rect">
+            <a:avLst/>
+          </a:prstGeom>
+          <a:noFill/>
+        </p:spPr>
+        <p:txBody>
+          <a:bodyPr wrap="square" anchor="t" lIns="0" rIns="0" tIns="0" bIns="0">
+            <a:spAutoFit/>
+          </a:bodyPr>
+          <a:lstStyle/>
+          <a:p>
+            <a:pPr algn="ctr">
+              <a:spcAft>
+                <a:spcPts val="0"/>
+              </a:spcAft>
+            </a:pPr>
+            <a:r>
+              <a:rPr sz="2800" b="1" i="0">
+                <a:solidFill>
+                  <a:srgbClr val="000000"/>
+                </a:solidFill>
+                <a:latin typeface="Times New Roman"/>
+                <a:ea typeface="標楷體"/>
+                <a:ea typeface="標楷體"/>
+              </a:rPr>
+              <a:t>十二之二、同一條壓降，兩種完全不同的答案</a:t>
+            </a:r>
+          </a:p>
+        </p:txBody>
+      </p:sp>
+      <p:sp>
+        <p:nvSpPr>
+          <p:cNvPr id="3" name="Rectangle 2"/>
+          <p:cNvSpPr/>
+          <p:nvPr/>
+        </p:nvSpPr>
+        <p:spPr>
+          <a:xfrm>
+            <a:off x="216000" y="763200"/>
+            <a:ext cx="11761200" cy="18000"/>
+          </a:xfrm>
+          <a:prstGeom prst="rect">
+            <a:avLst/>
+          </a:prstGeom>
+          <a:solidFill>
+            <a:srgbClr val="2AB6D8"/>
+          </a:solidFill>
+          <a:ln>
+            <a:noFill/>
+          </a:ln>
+          <a:effectLst/>
+        </p:spPr>
+        <p:style>
+          <a:lnRef idx="1">
+            <a:schemeClr val="accent1"/>
+          </a:lnRef>
+          <a:fillRef idx="3">
+            <a:schemeClr val="accent1"/>
+          </a:fillRef>
+          <a:effectRef idx="2">
+            <a:schemeClr val="accent1"/>
+          </a:effectRef>
+          <a:fontRef idx="minor">
+            <a:schemeClr val="lt1"/>
+          </a:fontRef>
+        </p:style>
+        <p:txBody>
+          <a:bodyPr rtlCol="0" anchor="ctr"/>
+          <a:lstStyle/>
+          <a:p>
+            <a:pPr algn="ctr"/>
+          </a:p>
+        </p:txBody>
+      </p:sp>
+      <p:sp>
+        <p:nvSpPr>
+          <p:cNvPr id="4" name="TextBox 3"/>
+          <p:cNvSpPr txBox="1"/>
+          <p:nvPr/>
+        </p:nvSpPr>
+        <p:spPr>
+          <a:xfrm>
+            <a:off x="503999" y="842400"/>
+            <a:ext cx="11185201" cy="251999"/>
+          </a:xfrm>
+          <a:prstGeom prst="rect">
+            <a:avLst/>
+          </a:prstGeom>
+          <a:noFill/>
+        </p:spPr>
+        <p:txBody>
+          <a:bodyPr wrap="square" anchor="t" lIns="0" rIns="0" tIns="0" bIns="0">
+            <a:spAutoFit/>
+          </a:bodyPr>
+          <a:lstStyle/>
+          <a:p>
+            <a:pPr algn="ctr">
+              <a:spcAft>
+                <a:spcPts val="600"/>
+              </a:spcAft>
+            </a:pPr>
+            <a:r>
+              <a:rPr sz="1300" b="0" i="0">
+                <a:solidFill>
+                  <a:srgbClr val="595959"/>
+                </a:solidFill>
+                <a:latin typeface="Times New Roman"/>
+                <a:ea typeface="標楷體"/>
+                <a:ea typeface="標楷體"/>
+              </a:rPr>
+              <a:t>兩者的擬合誤差幾乎相同，資料無從選擇</a:t>
+            </a:r>
+          </a:p>
+        </p:txBody>
+      </p:sp>
+      <p:sp>
+        <p:nvSpPr>
+          <p:cNvPr id="5" name="Rectangle 4"/>
+          <p:cNvSpPr/>
+          <p:nvPr/>
+        </p:nvSpPr>
+        <p:spPr>
+          <a:xfrm>
+            <a:off x="0" y="6552000"/>
+            <a:ext cx="12193200" cy="306000"/>
+          </a:xfrm>
+          <a:prstGeom prst="rect">
+            <a:avLst/>
+          </a:prstGeom>
+          <a:solidFill>
+            <a:srgbClr val="2E8BC0"/>
+          </a:solidFill>
+          <a:ln>
+            <a:noFill/>
+          </a:ln>
+          <a:effectLst/>
+        </p:spPr>
+        <p:style>
+          <a:lnRef idx="1">
+            <a:schemeClr val="accent1"/>
+          </a:lnRef>
+          <a:fillRef idx="3">
+            <a:schemeClr val="accent1"/>
+          </a:fillRef>
+          <a:effectRef idx="2">
+            <a:schemeClr val="accent1"/>
+          </a:effectRef>
+          <a:fontRef idx="minor">
+            <a:schemeClr val="lt1"/>
+          </a:fontRef>
+        </p:style>
+        <p:txBody>
+          <a:bodyPr rtlCol="0" anchor="ctr"/>
+          <a:lstStyle/>
+          <a:p>
+            <a:pPr algn="ctr"/>
+          </a:p>
+        </p:txBody>
+      </p:sp>
+      <p:sp>
+        <p:nvSpPr>
+          <p:cNvPr id="6" name="TextBox 5"/>
+          <p:cNvSpPr txBox="1"/>
+          <p:nvPr/>
+        </p:nvSpPr>
+        <p:spPr>
+          <a:xfrm>
+            <a:off x="11329200" y="6577200"/>
+            <a:ext cx="576000" cy="216000"/>
+          </a:xfrm>
+          <a:prstGeom prst="rect">
+            <a:avLst/>
+          </a:prstGeom>
+          <a:noFill/>
+        </p:spPr>
+        <p:txBody>
+          <a:bodyPr wrap="square" anchor="t" lIns="0" rIns="0" tIns="0" bIns="0">
+            <a:spAutoFit/>
+          </a:bodyPr>
+          <a:lstStyle/>
+          <a:p>
+            <a:pPr algn="r">
+              <a:spcAft>
+                <a:spcPts val="600"/>
+              </a:spcAft>
+            </a:pPr>
+            <a:r>
+              <a:rPr sz="1100" b="0" i="0">
+                <a:solidFill>
+                  <a:srgbClr val="FFFFFF"/>
+                </a:solidFill>
+                <a:latin typeface="Times New Roman"/>
+                <a:ea typeface="標楷體"/>
+                <a:ea typeface="標楷體"/>
+              </a:rPr>
+              <a:t>16</a:t>
+            </a:r>
+          </a:p>
+        </p:txBody>
+      </p:sp>
+      <p:pic>
+        <p:nvPicPr>
+          <p:cNvPr id="7" name="Picture 6" descr="deck7_pinn_features.png"/>
+          <p:cNvPicPr>
+            <a:picLocks noChangeAspect="1"/>
+          </p:cNvPicPr>
+          <p:nvPr/>
+        </p:nvPicPr>
+        <p:blipFill>
+          <a:blip r:embed="rId2"/>
+          <a:stretch>
+            <a:fillRect/>
+          </a:stretch>
+        </p:blipFill>
+        <p:spPr>
+          <a:xfrm>
+            <a:off x="1956599" y="1152000"/>
+            <a:ext cx="8280000" cy="4159528"/>
+          </a:xfrm>
+          <a:prstGeom prst="rect">
+            <a:avLst/>
+          </a:prstGeom>
+        </p:spPr>
+      </p:pic>
+      <p:sp>
+        <p:nvSpPr>
+          <p:cNvPr id="8" name="TextBox 7"/>
+          <p:cNvSpPr txBox="1"/>
+          <p:nvPr/>
+        </p:nvSpPr>
+        <p:spPr>
+          <a:xfrm>
+            <a:off x="576000" y="5455528"/>
+            <a:ext cx="11041200" cy="952471"/>
+          </a:xfrm>
+          <a:prstGeom prst="rect">
+            <a:avLst/>
+          </a:prstGeom>
+          <a:noFill/>
+        </p:spPr>
+        <p:txBody>
+          <a:bodyPr wrap="square" anchor="t" lIns="0" rIns="0" tIns="0" bIns="0">
+            <a:spAutoFit/>
+          </a:bodyPr>
+          <a:lstStyle/>
+          <a:p>
+            <a:pPr algn="l">
+              <a:spcAft>
+                <a:spcPts val="600"/>
+              </a:spcAft>
+            </a:pPr>
+            <a:r>
+              <a:rPr sz="1700" b="0" i="0">
+                <a:solidFill>
+                  <a:srgbClr val="000000"/>
+                </a:solidFill>
+                <a:latin typeface="Times New Roman"/>
+                <a:ea typeface="標楷體"/>
+                <a:ea typeface="標楷體"/>
+              </a:rPr>
+              <a:t>但要講清楚：分不開的是生物速率的</a:t>
+            </a:r>
+            <a:r>
+              <a:rPr sz="1900" b="1" i="0">
+                <a:solidFill>
+                  <a:srgbClr val="FF0000"/>
+                </a:solidFill>
+                <a:latin typeface="Times New Roman"/>
+                <a:ea typeface="標楷體"/>
+                <a:ea typeface="標楷體"/>
+              </a:rPr>
+              <a:t>平均值</a:t>
+            </a:r>
+            <a:r>
+              <a:rPr sz="1700" b="0" i="0">
+                <a:solidFill>
+                  <a:srgbClr val="000000"/>
+                </a:solidFill>
+                <a:latin typeface="Times New Roman"/>
+                <a:ea typeface="標楷體"/>
+                <a:ea typeface="標楷體"/>
+              </a:rPr>
+              <a:t>。它的</a:t>
+            </a:r>
+            <a:r>
+              <a:rPr sz="1900" b="1" i="0">
+                <a:solidFill>
+                  <a:srgbClr val="1F6FB5"/>
+                </a:solidFill>
+                <a:latin typeface="Times New Roman"/>
+                <a:ea typeface="標楷體"/>
+                <a:ea typeface="標楷體"/>
+              </a:rPr>
+              <a:t>時間變化</a:t>
+            </a:r>
+            <a:r>
+              <a:rPr sz="1700" b="0" i="0">
+                <a:solidFill>
+                  <a:srgbClr val="000000"/>
+                </a:solidFill>
+                <a:latin typeface="Times New Roman"/>
+                <a:ea typeface="標楷體"/>
+                <a:ea typeface="標楷體"/>
+              </a:rPr>
+              <a:t>其實還留在資料裡（訊噪比 6.0），只是被「速率不可為負」這個設定連帶壓死了——把平均值另外定住，變化的形狀就回來了（相關 0.97）。</a:t>
+            </a:r>
+          </a:p>
+        </p:txBody>
+      </p:sp>
+    </p:spTree>
+  </p:cSld>
+  <p:clrMapOvr>
+    <a:masterClrMapping/>
+  </p:clrMapOvr>
+</p:sld>
+</file>
+
+<file path=ppt/slides/slide16.xml><?xml version="1.0" encoding="utf-8"?>
+<p:sld xmlns:a="http://schemas.openxmlformats.org/drawingml/2006/main" xmlns:p="http://schemas.openxmlformats.org/presentationml/2006/main" xmlns:r="http://schemas.openxmlformats.org/officeDocument/2006/relationships">
+  <p:cSld>
+    <p:spTree>
+      <p:nvGrpSpPr>
+        <p:cNvPr id="1" name=""/>
+        <p:cNvGrpSpPr/>
+        <p:nvPr/>
+      </p:nvGrpSpPr>
+      <p:grpSpPr/>
+      <p:sp>
+        <p:nvSpPr>
+          <p:cNvPr id="2" name="TextBox 1"/>
+          <p:cNvSpPr txBox="1"/>
+          <p:nvPr/>
+        </p:nvSpPr>
+        <p:spPr>
+          <a:xfrm>
+            <a:off x="432000" y="180000"/>
+            <a:ext cx="11329200" cy="540000"/>
+          </a:xfrm>
+          <a:prstGeom prst="rect">
+            <a:avLst/>
+          </a:prstGeom>
+          <a:noFill/>
+        </p:spPr>
+        <p:txBody>
+          <a:bodyPr wrap="square" anchor="t" lIns="0" rIns="0" tIns="0" bIns="0">
+            <a:spAutoFit/>
+          </a:bodyPr>
+          <a:lstStyle/>
+          <a:p>
+            <a:pPr algn="ctr">
+              <a:spcAft>
+                <a:spcPts val="0"/>
+              </a:spcAft>
+            </a:pPr>
+            <a:r>
+              <a:rPr sz="2800" b="1" i="0">
+                <a:solidFill>
+                  <a:srgbClr val="000000"/>
+                </a:solidFill>
+                <a:latin typeface="Times New Roman"/>
+                <a:ea typeface="標楷體"/>
+                <a:ea typeface="標楷體"/>
+              </a:rPr>
+              <a:t>十三、本分析的限制</a:t>
+            </a:r>
+          </a:p>
+        </p:txBody>
+      </p:sp>
+      <p:sp>
+        <p:nvSpPr>
+          <p:cNvPr id="3" name="Rectangle 2"/>
+          <p:cNvSpPr/>
+          <p:nvPr/>
+        </p:nvSpPr>
+        <p:spPr>
+          <a:xfrm>
+            <a:off x="216000" y="763200"/>
+            <a:ext cx="11761200" cy="18000"/>
+          </a:xfrm>
+          <a:prstGeom prst="rect">
+            <a:avLst/>
+          </a:prstGeom>
+          <a:solidFill>
+            <a:srgbClr val="2AB6D8"/>
+          </a:solidFill>
+          <a:ln>
+            <a:noFill/>
+          </a:ln>
+          <a:effectLst/>
+        </p:spPr>
+        <p:style>
+          <a:lnRef idx="1">
+            <a:schemeClr val="accent1"/>
+          </a:lnRef>
+          <a:fillRef idx="3">
+            <a:schemeClr val="accent1"/>
+          </a:fillRef>
+          <a:effectRef idx="2">
+            <a:schemeClr val="accent1"/>
+          </a:effectRef>
+          <a:fontRef idx="minor">
+            <a:schemeClr val="lt1"/>
+          </a:fontRef>
+        </p:style>
+        <p:txBody>
+          <a:bodyPr rtlCol="0" anchor="ctr"/>
+          <a:lstStyle/>
+          <a:p>
+            <a:pPr algn="ctr"/>
+          </a:p>
+        </p:txBody>
+      </p:sp>
+      <p:sp>
+        <p:nvSpPr>
+          <p:cNvPr id="4" name="TextBox 3"/>
+          <p:cNvSpPr txBox="1"/>
+          <p:nvPr/>
+        </p:nvSpPr>
+        <p:spPr>
+          <a:xfrm>
+            <a:off x="503999" y="842400"/>
+            <a:ext cx="11185201" cy="251999"/>
+          </a:xfrm>
+          <a:prstGeom prst="rect">
+            <a:avLst/>
+          </a:prstGeom>
+          <a:noFill/>
+        </p:spPr>
+        <p:txBody>
+          <a:bodyPr wrap="square" anchor="t" lIns="0" rIns="0" tIns="0" bIns="0">
+            <a:spAutoFit/>
+          </a:bodyPr>
+          <a:lstStyle/>
+          <a:p>
+            <a:pPr algn="ctr">
+              <a:spcAft>
+                <a:spcPts val="600"/>
+              </a:spcAft>
+            </a:pPr>
+            <a:r>
+              <a:rPr sz="1300" b="0" i="0">
+                <a:solidFill>
+                  <a:srgbClr val="595959"/>
+                </a:solidFill>
+                <a:latin typeface="Times New Roman"/>
+                <a:ea typeface="標楷體"/>
+                <a:ea typeface="標楷體"/>
+              </a:rPr>
+              <a:t>引用時應一併說明</a:t>
+            </a:r>
+          </a:p>
+        </p:txBody>
+      </p:sp>
+      <p:sp>
+        <p:nvSpPr>
+          <p:cNvPr id="5" name="Rectangle 4"/>
+          <p:cNvSpPr/>
+          <p:nvPr/>
+        </p:nvSpPr>
+        <p:spPr>
+          <a:xfrm>
+            <a:off x="0" y="6552000"/>
+            <a:ext cx="12193200" cy="306000"/>
+          </a:xfrm>
+          <a:prstGeom prst="rect">
+            <a:avLst/>
+          </a:prstGeom>
+          <a:solidFill>
+            <a:srgbClr val="2E8BC0"/>
+          </a:solidFill>
+          <a:ln>
+            <a:noFill/>
+          </a:ln>
+          <a:effectLst/>
+        </p:spPr>
+        <p:style>
+          <a:lnRef idx="1">
+            <a:schemeClr val="accent1"/>
+          </a:lnRef>
+          <a:fillRef idx="3">
+            <a:schemeClr val="accent1"/>
+          </a:fillRef>
+          <a:effectRef idx="2">
+            <a:schemeClr val="accent1"/>
+          </a:effectRef>
+          <a:fontRef idx="minor">
+            <a:schemeClr val="lt1"/>
+          </a:fontRef>
+        </p:style>
+        <p:txBody>
+          <a:bodyPr rtlCol="0" anchor="ctr"/>
+          <a:lstStyle/>
+          <a:p>
+            <a:pPr algn="ctr"/>
+          </a:p>
+        </p:txBody>
+      </p:sp>
+      <p:sp>
+        <p:nvSpPr>
+          <p:cNvPr id="6" name="TextBox 5"/>
+          <p:cNvSpPr txBox="1"/>
+          <p:nvPr/>
+        </p:nvSpPr>
+        <p:spPr>
+          <a:xfrm>
+            <a:off x="11329200" y="6577200"/>
+            <a:ext cx="576000" cy="216000"/>
+          </a:xfrm>
+          <a:prstGeom prst="rect">
+            <a:avLst/>
+          </a:prstGeom>
+          <a:noFill/>
+        </p:spPr>
+        <p:txBody>
+          <a:bodyPr wrap="square" anchor="t" lIns="0" rIns="0" tIns="0" bIns="0">
+            <a:spAutoFit/>
+          </a:bodyPr>
+          <a:lstStyle/>
+          <a:p>
+            <a:pPr algn="r">
+              <a:spcAft>
+                <a:spcPts val="600"/>
+              </a:spcAft>
+            </a:pPr>
+            <a:r>
+              <a:rPr sz="1100" b="0" i="0">
+                <a:solidFill>
+                  <a:srgbClr val="FFFFFF"/>
+                </a:solidFill>
+                <a:latin typeface="Times New Roman"/>
+                <a:ea typeface="標楷體"/>
+                <a:ea typeface="標楷體"/>
+              </a:rPr>
+              <a:t>17</a:t>
+            </a:r>
+          </a:p>
+        </p:txBody>
+      </p:sp>
+      <p:sp>
+        <p:nvSpPr>
+          <p:cNvPr id="7" name="TextBox 6"/>
+          <p:cNvSpPr txBox="1"/>
+          <p:nvPr/>
+        </p:nvSpPr>
+        <p:spPr>
+          <a:xfrm>
+            <a:off x="576000" y="1440000"/>
+            <a:ext cx="11041200" cy="4320000"/>
+          </a:xfrm>
+          <a:prstGeom prst="rect">
+            <a:avLst/>
+          </a:prstGeom>
+          <a:noFill/>
+        </p:spPr>
+        <p:txBody>
+          <a:bodyPr wrap="square" anchor="t" lIns="0" rIns="0" tIns="0" bIns="0">
+            <a:spAutoFit/>
+          </a:bodyPr>
+          <a:lstStyle/>
+          <a:p>
+            <a:pPr algn="l">
+              <a:spcAft>
+                <a:spcPts val="1600"/>
+              </a:spcAft>
+            </a:pPr>
+            <a:r>
+              <a:rPr sz="1800" b="0" i="0">
+                <a:solidFill>
+                  <a:srgbClr val="000000"/>
+                </a:solidFill>
+                <a:latin typeface="Times New Roman"/>
+                <a:ea typeface="標楷體"/>
+                <a:ea typeface="標楷體"/>
+              </a:rPr>
+              <a:t>• 氫氣濃度為差額推算，非直接量測（分析儀僅量二氧化碳與甲烷）</a:t>
+            </a:r>
+          </a:p>
+          <a:p>
+            <a:pPr algn="l">
+              <a:spcAft>
+                <a:spcPts val="1600"/>
+              </a:spcAft>
+            </a:pPr>
+            <a:r>
+              <a:rPr sz="1800" b="0" i="0">
+                <a:solidFill>
+                  <a:srgbClr val="000000"/>
+                </a:solidFill>
+                <a:latin typeface="Times New Roman"/>
+                <a:ea typeface="標楷體"/>
+                <a:ea typeface="標楷體"/>
+              </a:rPr>
+              <a:t>• 無法區分氫氣流失的機制：洩漏、穿透、或其他耗氫生化反應</a:t>
+            </a:r>
+          </a:p>
+          <a:p>
+            <a:pPr algn="l">
+              <a:spcAft>
+                <a:spcPts val="1600"/>
+              </a:spcAft>
+            </a:pPr>
+            <a:r>
+              <a:rPr sz="1800" b="0" i="0">
+                <a:solidFill>
+                  <a:srgbClr val="000000"/>
+                </a:solidFill>
+                <a:latin typeface="Times New Roman"/>
+                <a:ea typeface="標楷體"/>
+                <a:ea typeface="標楷體"/>
+              </a:rPr>
+              <a:t>• 僅 35 筆可用的氣體組成資料，平均每 11 天一筆</a:t>
+            </a:r>
+          </a:p>
+          <a:p>
+            <a:pPr algn="l">
+              <a:spcAft>
+                <a:spcPts val="1600"/>
+              </a:spcAft>
+            </a:pPr>
+            <a:r>
+              <a:rPr sz="1800" b="0" i="0">
+                <a:solidFill>
+                  <a:srgbClr val="000000"/>
+                </a:solidFill>
+                <a:latin typeface="Times New Roman"/>
+                <a:ea typeface="標楷體"/>
+                <a:ea typeface="標楷體"/>
+              </a:rPr>
+              <a:t>• 碳源中斷時進料組成同時改變，兩時段的差異不僅限於碳源有無</a:t>
+            </a:r>
+          </a:p>
+          <a:p>
+            <a:pPr algn="l">
+              <a:spcAft>
+                <a:spcPts val="1600"/>
+              </a:spcAft>
+            </a:pPr>
+            <a:r>
+              <a:rPr sz="1800" b="0" i="0">
+                <a:solidFill>
+                  <a:srgbClr val="000000"/>
+                </a:solidFill>
+                <a:latin typeface="Times New Roman"/>
+                <a:ea typeface="標楷體"/>
+                <a:ea typeface="標楷體"/>
+              </a:rPr>
+              <a:t>• 酸鹼值的結果效應量極小（約為儀器刻度的七分之一），屬方向性證據</a:t>
+            </a:r>
+          </a:p>
+        </p:txBody>
+      </p:sp>
+    </p:spTree>
+  </p:cSld>
+  <p:clrMapOvr>
+    <a:masterClrMapping/>
+  </p:clrMapOvr>
+</p:sld>
+</file>
+
+<file path=ppt/slides/slide17.xml><?xml version="1.0" encoding="utf-8"?>
+<p:sld xmlns:a="http://schemas.openxmlformats.org/drawingml/2006/main" xmlns:p="http://schemas.openxmlformats.org/presentationml/2006/main" xmlns:r="http://schemas.openxmlformats.org/officeDocument/2006/relationships">
+  <p:cSld>
+    <p:spTree>
+      <p:nvGrpSpPr>
+        <p:cNvPr id="1" name=""/>
+        <p:cNvGrpSpPr/>
+        <p:nvPr/>
+      </p:nvGrpSpPr>
+      <p:grpSpPr/>
+      <p:sp>
+        <p:nvSpPr>
+          <p:cNvPr id="2" name="TextBox 1"/>
+          <p:cNvSpPr txBox="1"/>
+          <p:nvPr/>
+        </p:nvSpPr>
+        <p:spPr>
+          <a:xfrm>
+            <a:off x="432000" y="180000"/>
+            <a:ext cx="11329200" cy="540000"/>
+          </a:xfrm>
+          <a:prstGeom prst="rect">
+            <a:avLst/>
+          </a:prstGeom>
+          <a:noFill/>
+        </p:spPr>
+        <p:txBody>
+          <a:bodyPr wrap="square" anchor="t" lIns="0" rIns="0" tIns="0" bIns="0">
+            <a:spAutoFit/>
+          </a:bodyPr>
+          <a:lstStyle/>
+          <a:p>
+            <a:pPr algn="ctr">
+              <a:spcAft>
+                <a:spcPts val="0"/>
+              </a:spcAft>
+            </a:pPr>
+            <a:r>
+              <a:rPr sz="2800" b="1" i="0">
+                <a:solidFill>
+                  <a:srgbClr val="000000"/>
+                </a:solidFill>
+                <a:latin typeface="Times New Roman"/>
+                <a:ea typeface="標楷體"/>
+                <a:ea typeface="標楷體"/>
+              </a:rPr>
+              <a:t>十四、建議</a:t>
+            </a:r>
+          </a:p>
+        </p:txBody>
+      </p:sp>
+      <p:sp>
+        <p:nvSpPr>
+          <p:cNvPr id="3" name="Rectangle 2"/>
+          <p:cNvSpPr/>
+          <p:nvPr/>
+        </p:nvSpPr>
+        <p:spPr>
+          <a:xfrm>
+            <a:off x="216000" y="763200"/>
+            <a:ext cx="11761200" cy="18000"/>
+          </a:xfrm>
+          <a:prstGeom prst="rect">
+            <a:avLst/>
+          </a:prstGeom>
+          <a:solidFill>
+            <a:srgbClr val="2AB6D8"/>
+          </a:solidFill>
+          <a:ln>
+            <a:noFill/>
+          </a:ln>
+          <a:effectLst/>
+        </p:spPr>
+        <p:style>
+          <a:lnRef idx="1">
+            <a:schemeClr val="accent1"/>
+          </a:lnRef>
+          <a:fillRef idx="3">
+            <a:schemeClr val="accent1"/>
+          </a:fillRef>
+          <a:effectRef idx="2">
+            <a:schemeClr val="accent1"/>
+          </a:effectRef>
+          <a:fontRef idx="minor">
+            <a:schemeClr val="lt1"/>
+          </a:fontRef>
+        </p:style>
+        <p:txBody>
+          <a:bodyPr rtlCol="0" anchor="ctr"/>
+          <a:lstStyle/>
+          <a:p>
+            <a:pPr algn="ctr"/>
+          </a:p>
+        </p:txBody>
+      </p:sp>
+      <p:sp>
+        <p:nvSpPr>
+          <p:cNvPr id="4" name="TextBox 3"/>
+          <p:cNvSpPr txBox="1"/>
+          <p:nvPr/>
+        </p:nvSpPr>
+        <p:spPr>
+          <a:xfrm>
+            <a:off x="503999" y="842400"/>
+            <a:ext cx="11185201" cy="251999"/>
+          </a:xfrm>
+          <a:prstGeom prst="rect">
+            <a:avLst/>
+          </a:prstGeom>
+          <a:noFill/>
+        </p:spPr>
+        <p:txBody>
+          <a:bodyPr wrap="square" anchor="t" lIns="0" rIns="0" tIns="0" bIns="0">
+            <a:spAutoFit/>
+          </a:bodyPr>
+          <a:lstStyle/>
+          <a:p>
+            <a:pPr algn="ctr">
+              <a:spcAft>
+                <a:spcPts val="600"/>
+              </a:spcAft>
+            </a:pPr>
+            <a:r>
+              <a:rPr sz="1300" b="0" i="0">
+                <a:solidFill>
+                  <a:srgbClr val="595959"/>
+                </a:solidFill>
+                <a:latin typeface="Times New Roman"/>
+                <a:ea typeface="標楷體"/>
+                <a:ea typeface="標楷體"/>
+              </a:rPr>
+              <a:t>第一項完成前，其餘方向都無法定案</a:t>
+            </a:r>
+          </a:p>
+        </p:txBody>
+      </p:sp>
+      <p:sp>
+        <p:nvSpPr>
+          <p:cNvPr id="5" name="Rectangle 4"/>
+          <p:cNvSpPr/>
+          <p:nvPr/>
+        </p:nvSpPr>
+        <p:spPr>
+          <a:xfrm>
+            <a:off x="0" y="6552000"/>
+            <a:ext cx="12193200" cy="306000"/>
+          </a:xfrm>
+          <a:prstGeom prst="rect">
+            <a:avLst/>
+          </a:prstGeom>
+          <a:solidFill>
+            <a:srgbClr val="2E8BC0"/>
+          </a:solidFill>
+          <a:ln>
+            <a:noFill/>
+          </a:ln>
+          <a:effectLst/>
+        </p:spPr>
+        <p:style>
+          <a:lnRef idx="1">
+            <a:schemeClr val="accent1"/>
+          </a:lnRef>
+          <a:fillRef idx="3">
+            <a:schemeClr val="accent1"/>
+          </a:fillRef>
+          <a:effectRef idx="2">
+            <a:schemeClr val="accent1"/>
+          </a:effectRef>
+          <a:fontRef idx="minor">
+            <a:schemeClr val="lt1"/>
+          </a:fontRef>
+        </p:style>
+        <p:txBody>
+          <a:bodyPr rtlCol="0" anchor="ctr"/>
+          <a:lstStyle/>
+          <a:p>
+            <a:pPr algn="ctr"/>
+          </a:p>
+        </p:txBody>
+      </p:sp>
+      <p:sp>
+        <p:nvSpPr>
+          <p:cNvPr id="6" name="TextBox 5"/>
+          <p:cNvSpPr txBox="1"/>
+          <p:nvPr/>
+        </p:nvSpPr>
+        <p:spPr>
+          <a:xfrm>
+            <a:off x="11329200" y="6577200"/>
+            <a:ext cx="576000" cy="216000"/>
+          </a:xfrm>
+          <a:prstGeom prst="rect">
+            <a:avLst/>
+          </a:prstGeom>
+          <a:noFill/>
+        </p:spPr>
+        <p:txBody>
+          <a:bodyPr wrap="square" anchor="t" lIns="0" rIns="0" tIns="0" bIns="0">
+            <a:spAutoFit/>
+          </a:bodyPr>
+          <a:lstStyle/>
+          <a:p>
+            <a:pPr algn="r">
+              <a:spcAft>
+                <a:spcPts val="600"/>
+              </a:spcAft>
+            </a:pPr>
+            <a:r>
+              <a:rPr sz="1100" b="0" i="0">
+                <a:solidFill>
+                  <a:srgbClr val="FFFFFF"/>
+                </a:solidFill>
+                <a:latin typeface="Times New Roman"/>
+                <a:ea typeface="標楷體"/>
+                <a:ea typeface="標楷體"/>
+              </a:rPr>
+              <a:t>18</a:t>
             </a:r>
           </a:p>
         </p:txBody>
@@ -6369,7 +7268,7 @@
                 <a:ea typeface="標楷體"/>
                 <a:ea typeface="標楷體"/>
               </a:rPr>
-              <a:t>一、要回答的問題</a:t>
+              <a:t>一、先看懂這台機器</a:t>
             </a:r>
           </a:p>
         </p:txBody>
@@ -6454,7 +7353,7 @@
                 <a:ea typeface="標楷體"/>
                 <a:ea typeface="標楷體"/>
               </a:rPr>
-              <a:t>壓力一直在掉，那些氣體去了哪裡？</a:t>
+              <a:t>補到滿 → 壓力慢慢掉 → 掉到底就自動補，一直重複</a:t>
             </a:r>
           </a:p>
         </p:txBody>
@@ -6544,16 +7443,40 @@
           </a:p>
         </p:txBody>
       </p:sp>
-      <p:sp>
-        <p:nvSpPr>
-          <p:cNvPr id="7" name="TextBox 6"/>
+      <p:pic>
+        <p:nvPicPr>
+          <p:cNvPr id="7" name="Picture 6" descr="deck0a_reactor.png"/>
+          <p:cNvPicPr>
+            <a:picLocks noChangeAspect="1"/>
+          </p:cNvPicPr>
+          <p:nvPr/>
+        </p:nvPicPr>
+        <p:blipFill>
+          <a:blip r:embed="rId2"/>
+          <a:stretch>
+            <a:fillRect/>
+          </a:stretch>
+        </p:blipFill>
+        <p:spPr>
+          <a:xfrm>
+            <a:off x="1416599" y="1224000"/>
+            <a:ext cx="9360000" cy="4684926"/>
+          </a:xfrm>
+          <a:prstGeom prst="rect">
+            <a:avLst/>
+          </a:prstGeom>
+        </p:spPr>
+      </p:pic>
+      <p:sp>
+        <p:nvSpPr>
+          <p:cNvPr id="8" name="TextBox 7"/>
           <p:cNvSpPr txBox="1"/>
           <p:nvPr/>
         </p:nvSpPr>
         <p:spPr>
           <a:xfrm>
-            <a:off x="576000" y="1260000"/>
-            <a:ext cx="11041200" cy="4104000"/>
+            <a:off x="576000" y="5998925"/>
+            <a:ext cx="11041200" cy="535074"/>
           </a:xfrm>
           <a:prstGeom prst="rect">
             <a:avLst/>
@@ -6566,420 +7489,13 @@
           </a:bodyPr>
           <a:lstStyle/>
           <a:p>
-            <a:pPr algn="l">
-              <a:spcAft>
-                <a:spcPts val="1000"/>
-              </a:spcAft>
-            </a:pPr>
-            <a:r>
-              <a:rPr sz="2000" b="1" i="0">
-                <a:solidFill>
-                  <a:srgbClr val="000000"/>
-                </a:solidFill>
-                <a:latin typeface="Times New Roman"/>
-                <a:ea typeface="標楷體"/>
-                <a:ea typeface="標楷體"/>
-              </a:rPr>
-              <a:t>反應器的運作方式</a:t>
-            </a:r>
-          </a:p>
-          <a:p>
-            <a:pPr algn="l">
-              <a:spcAft>
-                <a:spcPts val="1000"/>
-              </a:spcAft>
-            </a:pPr>
-            <a:r>
-              <a:rPr sz="1700" b="0" i="0">
-                <a:solidFill>
-                  <a:srgbClr val="000000"/>
-                </a:solidFill>
-                <a:latin typeface="Times New Roman"/>
-                <a:ea typeface="標楷體"/>
-                <a:ea typeface="標楷體"/>
-              </a:rPr>
-              <a:t>• 把二氧化碳與氫氣依 1:4 充到約 1.17 </a:t>
-            </a:r>
-            <a:r>
-              <a:rPr sz="1700" b="0" i="0">
-                <a:solidFill>
-                  <a:srgbClr val="000000"/>
-                </a:solidFill>
-                <a:latin typeface="Times New Roman"/>
-                <a:ea typeface="標楷體"/>
-                <a:ea typeface="標楷體"/>
-              </a:rPr>
-              <a:t>kgf</a:t>
-            </a:r>
-            <a:r>
-              <a:rPr sz="1700" b="0" i="0">
-                <a:solidFill>
-                  <a:srgbClr val="000000"/>
-                </a:solidFill>
-                <a:latin typeface="Times New Roman"/>
-                <a:ea typeface="標楷體"/>
-                <a:ea typeface="標楷體"/>
-              </a:rPr>
-              <a:t>/</a:t>
-            </a:r>
-            <a:r>
-              <a:rPr sz="1700" b="0" i="0">
-                <a:solidFill>
-                  <a:srgbClr val="000000"/>
-                </a:solidFill>
-                <a:latin typeface="Times New Roman"/>
-                <a:ea typeface="標楷體"/>
-                <a:ea typeface="標楷體"/>
-              </a:rPr>
-              <a:t>cm</a:t>
-            </a:r>
-            <a:r>
-              <a:rPr sz="1700" b="0" i="0">
-                <a:solidFill>
-                  <a:srgbClr val="000000"/>
-                </a:solidFill>
-                <a:latin typeface="Times New Roman"/>
-                <a:ea typeface="標楷體"/>
-                <a:ea typeface="標楷體"/>
-              </a:rPr>
-              <a:t>²</a:t>
-            </a:r>
-          </a:p>
-          <a:p>
-            <a:pPr algn="l">
-              <a:spcAft>
-                <a:spcPts val="1000"/>
-              </a:spcAft>
-            </a:pPr>
-            <a:r>
-              <a:rPr sz="1700" b="0" i="0">
-                <a:solidFill>
-                  <a:srgbClr val="000000"/>
-                </a:solidFill>
-                <a:latin typeface="Times New Roman"/>
-                <a:ea typeface="標楷體"/>
-                <a:ea typeface="標楷體"/>
-              </a:rPr>
-              <a:t>• 壓力慢慢下降，降到約 0.92 就自動補滿，如此反覆</a:t>
-            </a:r>
-          </a:p>
-          <a:p>
-            <a:pPr algn="l">
-              <a:spcAft>
-                <a:spcPts val="1000"/>
-              </a:spcAft>
-            </a:pPr>
-            <a:r>
-              <a:rPr sz="1700" b="0" i="0">
-                <a:solidFill>
-                  <a:srgbClr val="000000"/>
-                </a:solidFill>
-                <a:latin typeface="Times New Roman"/>
-                <a:ea typeface="標楷體"/>
-                <a:ea typeface="標楷體"/>
-              </a:rPr>
-              <a:t>• 每一次「補滿到降低」稱為一個循環</a:t>
-            </a:r>
-          </a:p>
-          <a:p>
-            <a:pPr algn="l">
-              <a:spcAft>
-                <a:spcPts val="1000"/>
-              </a:spcAft>
-            </a:pPr>
-          </a:p>
-          <a:p>
-            <a:pPr algn="l">
-              <a:spcAft>
-                <a:spcPts val="1000"/>
-              </a:spcAft>
-            </a:pPr>
-            <a:r>
-              <a:rPr sz="2000" b="1" i="0">
-                <a:solidFill>
-                  <a:srgbClr val="000000"/>
-                </a:solidFill>
-                <a:latin typeface="Times New Roman"/>
-                <a:ea typeface="標楷體"/>
-                <a:ea typeface="標楷體"/>
-              </a:rPr>
-              <a:t>壓力下降有三種可能的去向</a:t>
-            </a:r>
-          </a:p>
-          <a:p>
-            <a:pPr algn="l">
-              <a:spcAft>
-                <a:spcPts val="1000"/>
-              </a:spcAft>
-            </a:pPr>
-            <a:r>
-              <a:rPr sz="1700" b="1" i="0">
-                <a:solidFill>
-                  <a:srgbClr val="000000"/>
-                </a:solidFill>
-                <a:latin typeface="Times New Roman"/>
-                <a:ea typeface="標楷體"/>
-                <a:ea typeface="標楷體"/>
-              </a:rPr>
-              <a:t>① 被微生物轉換成甲烷</a:t>
-            </a:r>
-            <a:r>
-              <a:rPr sz="1700" b="0" i="0">
-                <a:solidFill>
-                  <a:srgbClr val="595959"/>
-                </a:solidFill>
-                <a:latin typeface="Times New Roman"/>
-                <a:ea typeface="標楷體"/>
-                <a:ea typeface="標楷體"/>
-              </a:rPr>
-              <a:t>　</a:t>
-            </a:r>
-            <a:r>
-              <a:rPr sz="1700" b="0" i="0">
-                <a:solidFill>
-                  <a:srgbClr val="595959"/>
-                </a:solidFill>
-                <a:latin typeface="Times New Roman"/>
-                <a:ea typeface="標楷體"/>
-                <a:ea typeface="標楷體"/>
-              </a:rPr>
-              <a:t>CO</a:t>
-            </a:r>
-            <a:r>
-              <a:rPr sz="1700" b="0" i="0">
-                <a:solidFill>
-                  <a:srgbClr val="595959"/>
-                </a:solidFill>
-                <a:latin typeface="Times New Roman"/>
-                <a:ea typeface="標楷體"/>
-                <a:ea typeface="標楷體"/>
-              </a:rPr>
-              <a:t>₂ + 4</a:t>
-            </a:r>
-            <a:r>
-              <a:rPr sz="1700" b="0" i="0">
-                <a:solidFill>
-                  <a:srgbClr val="595959"/>
-                </a:solidFill>
-                <a:latin typeface="Times New Roman"/>
-                <a:ea typeface="標楷體"/>
-                <a:ea typeface="標楷體"/>
-              </a:rPr>
-              <a:t>H</a:t>
-            </a:r>
-            <a:r>
-              <a:rPr sz="1700" b="0" i="0">
-                <a:solidFill>
-                  <a:srgbClr val="595959"/>
-                </a:solidFill>
-                <a:latin typeface="Times New Roman"/>
-                <a:ea typeface="標楷體"/>
-                <a:ea typeface="標楷體"/>
-              </a:rPr>
-              <a:t>₂ → </a:t>
-            </a:r>
-            <a:r>
-              <a:rPr sz="1700" b="0" i="0">
-                <a:solidFill>
-                  <a:srgbClr val="595959"/>
-                </a:solidFill>
-                <a:latin typeface="Times New Roman"/>
-                <a:ea typeface="標楷體"/>
-                <a:ea typeface="標楷體"/>
-              </a:rPr>
-              <a:t>CH</a:t>
-            </a:r>
-            <a:r>
-              <a:rPr sz="1700" b="0" i="0">
-                <a:solidFill>
-                  <a:srgbClr val="595959"/>
-                </a:solidFill>
-                <a:latin typeface="Times New Roman"/>
-                <a:ea typeface="標楷體"/>
-                <a:ea typeface="標楷體"/>
-              </a:rPr>
-              <a:t>₄ + 2</a:t>
-            </a:r>
-            <a:r>
-              <a:rPr sz="1700" b="0" i="0">
-                <a:solidFill>
-                  <a:srgbClr val="595959"/>
-                </a:solidFill>
-                <a:latin typeface="Times New Roman"/>
-                <a:ea typeface="標楷體"/>
-                <a:ea typeface="標楷體"/>
-              </a:rPr>
-              <a:t>H</a:t>
-            </a:r>
-            <a:r>
-              <a:rPr sz="1700" b="0" i="0">
-                <a:solidFill>
-                  <a:srgbClr val="595959"/>
-                </a:solidFill>
-                <a:latin typeface="Times New Roman"/>
-                <a:ea typeface="標楷體"/>
-                <a:ea typeface="標楷體"/>
-              </a:rPr>
-              <a:t>₂</a:t>
-            </a:r>
-            <a:r>
-              <a:rPr sz="1700" b="0" i="1">
-                <a:solidFill>
-                  <a:srgbClr val="595959"/>
-                </a:solidFill>
-                <a:latin typeface="Times New Roman"/>
-                <a:ea typeface="標楷體"/>
-                <a:ea typeface="標楷體"/>
-              </a:rPr>
-              <a:t>O</a:t>
-            </a:r>
-            <a:r>
-              <a:rPr sz="1700" b="0" i="0">
-                <a:solidFill>
-                  <a:srgbClr val="595959"/>
-                </a:solidFill>
-                <a:latin typeface="Times New Roman"/>
-                <a:ea typeface="標楷體"/>
-                <a:ea typeface="標楷體"/>
-              </a:rPr>
-              <a:t>，氣相淨少 4 個分子</a:t>
-            </a:r>
-          </a:p>
-          <a:p>
-            <a:pPr algn="l">
-              <a:spcAft>
-                <a:spcPts val="1000"/>
-              </a:spcAft>
-            </a:pPr>
-            <a:r>
-              <a:rPr sz="1700" b="1" i="0">
-                <a:solidFill>
-                  <a:srgbClr val="000000"/>
-                </a:solidFill>
-                <a:latin typeface="Times New Roman"/>
-                <a:ea typeface="標楷體"/>
-                <a:ea typeface="標楷體"/>
-              </a:rPr>
-              <a:t>② 溶進液體裡</a:t>
-            </a:r>
-            <a:r>
-              <a:rPr sz="1700" b="0" i="0">
-                <a:solidFill>
-                  <a:srgbClr val="595959"/>
-                </a:solidFill>
-                <a:latin typeface="Times New Roman"/>
-                <a:ea typeface="標楷體"/>
-                <a:ea typeface="標楷體"/>
-              </a:rPr>
-              <a:t>　二氧化碳的溶解度約為氫氣的 44 倍</a:t>
-            </a:r>
-          </a:p>
-          <a:p>
-            <a:pPr algn="l">
-              <a:spcAft>
-                <a:spcPts val="1000"/>
-              </a:spcAft>
-            </a:pPr>
-            <a:r>
-              <a:rPr sz="1700" b="1" i="0">
-                <a:solidFill>
-                  <a:srgbClr val="FF0000"/>
-                </a:solidFill>
-                <a:latin typeface="Times New Roman"/>
-                <a:ea typeface="標楷體"/>
-                <a:ea typeface="標楷體"/>
-              </a:rPr>
-              <a:t>③ 漏掉了</a:t>
-            </a:r>
-            <a:r>
-              <a:rPr sz="1700" b="0" i="0">
-                <a:solidFill>
-                  <a:srgbClr val="595959"/>
-                </a:solidFill>
-                <a:latin typeface="Times New Roman"/>
-                <a:ea typeface="標楷體"/>
-                <a:ea typeface="標楷體"/>
-              </a:rPr>
-              <a:t>　本次分析新增的第三個可能</a:t>
-            </a:r>
-          </a:p>
-        </p:txBody>
-      </p:sp>
-      <p:sp>
-        <p:nvSpPr>
-          <p:cNvPr id="8" name="Rectangle 7"/>
-          <p:cNvSpPr/>
-          <p:nvPr/>
-        </p:nvSpPr>
-        <p:spPr>
-          <a:xfrm>
-            <a:off x="432000" y="5562000"/>
-            <a:ext cx="11329200" cy="864000"/>
-          </a:xfrm>
-          <a:prstGeom prst="rect">
-            <a:avLst/>
-          </a:prstGeom>
-          <a:solidFill>
-            <a:srgbClr val="F2F7FC"/>
-          </a:solidFill>
-          <a:ln w="9525">
-            <a:solidFill>
-              <a:srgbClr val="2AB6D8"/>
-            </a:solidFill>
-          </a:ln>
-          <a:effectLst/>
-        </p:spPr>
-        <p:style>
-          <a:lnRef idx="1">
-            <a:schemeClr val="accent1"/>
-          </a:lnRef>
-          <a:fillRef idx="3">
-            <a:schemeClr val="accent1"/>
-          </a:fillRef>
-          <a:effectRef idx="2">
-            <a:schemeClr val="accent1"/>
-          </a:effectRef>
-          <a:fontRef idx="minor">
-            <a:schemeClr val="lt1"/>
-          </a:fontRef>
-        </p:style>
-        <p:txBody>
-          <a:bodyPr rtlCol="0" anchor="ctr"/>
-          <a:lstStyle/>
-          <a:p>
-            <a:pPr algn="ctr"/>
-          </a:p>
-        </p:txBody>
-      </p:sp>
-      <p:sp>
-        <p:nvSpPr>
-          <p:cNvPr id="9" name="TextBox 8"/>
-          <p:cNvSpPr txBox="1"/>
-          <p:nvPr/>
-        </p:nvSpPr>
-        <p:spPr>
-          <a:xfrm>
-            <a:off x="612000" y="5670000"/>
-            <a:ext cx="10969200" cy="648000"/>
-          </a:xfrm>
-          <a:prstGeom prst="rect">
-            <a:avLst/>
-          </a:prstGeom>
-          <a:noFill/>
-        </p:spPr>
-        <p:txBody>
-          <a:bodyPr wrap="square" anchor="ctr" lIns="0" rIns="0" tIns="0" bIns="0">
-            <a:spAutoFit/>
-          </a:bodyPr>
-          <a:lstStyle/>
-          <a:p>
-            <a:pPr algn="l">
+            <a:pPr algn="ctr">
               <a:spcAft>
                 <a:spcPts val="600"/>
               </a:spcAft>
             </a:pPr>
             <a:r>
-              <a:rPr sz="1300" b="0" i="0">
+              <a:rPr sz="1900" b="1" i="0">
                 <a:solidFill>
                   <a:srgbClr val="000000"/>
                 </a:solidFill>
@@ -6987,7 +7503,7 @@
                 <a:ea typeface="標楷體"/>
                 <a:ea typeface="標楷體"/>
               </a:rPr>
-              <a:t>若不能區分這三者，就算不出反應器的真實轉換效率，也判斷不了菌群狀態。</a:t>
+              <a:t>壓力會下降，就表示容器裡的氣體正在減少。問題是——它們到底去了哪裡？</a:t>
             </a:r>
           </a:p>
         </p:txBody>
@@ -7046,7 +7562,7 @@
                 <a:ea typeface="標楷體"/>
                 <a:ea typeface="標楷體"/>
               </a:rPr>
-              <a:t>二、先前遺留的三個矛盾</a:t>
+              <a:t>二、氣體有三種可能的去向</a:t>
             </a:r>
           </a:p>
         </p:txBody>
@@ -7131,7 +7647,7 @@
                 <a:ea typeface="標楷體"/>
                 <a:ea typeface="標楷體"/>
               </a:rPr>
-              <a:t>這三件事用「產甲烷主導」解釋不通</a:t>
+              <a:t>三條路都會讓壓力下降，所以光看壓力分不出來</a:t>
             </a:r>
           </a:p>
         </p:txBody>
@@ -7217,6 +7733,311 @@
                 <a:ea typeface="標楷體"/>
               </a:rPr>
               <a:t>4</a:t>
+            </a:r>
+          </a:p>
+        </p:txBody>
+      </p:sp>
+      <p:pic>
+        <p:nvPicPr>
+          <p:cNvPr id="7" name="Picture 6" descr="deck0b_fates.png"/>
+          <p:cNvPicPr>
+            <a:picLocks noChangeAspect="1"/>
+          </p:cNvPicPr>
+          <p:nvPr/>
+        </p:nvPicPr>
+        <p:blipFill>
+          <a:blip r:embed="rId2"/>
+          <a:stretch>
+            <a:fillRect/>
+          </a:stretch>
+        </p:blipFill>
+        <p:spPr>
+          <a:xfrm>
+            <a:off x="1596599" y="1224000"/>
+            <a:ext cx="9000000" cy="4419473"/>
+          </a:xfrm>
+          <a:prstGeom prst="rect">
+            <a:avLst/>
+          </a:prstGeom>
+        </p:spPr>
+      </p:pic>
+      <p:sp>
+        <p:nvSpPr>
+          <p:cNvPr id="8" name="TextBox 7"/>
+          <p:cNvSpPr txBox="1"/>
+          <p:nvPr/>
+        </p:nvSpPr>
+        <p:spPr>
+          <a:xfrm>
+            <a:off x="576000" y="5733473"/>
+            <a:ext cx="11041200" cy="800526"/>
+          </a:xfrm>
+          <a:prstGeom prst="rect">
+            <a:avLst/>
+          </a:prstGeom>
+          <a:noFill/>
+        </p:spPr>
+        <p:txBody>
+          <a:bodyPr wrap="square" anchor="t" lIns="0" rIns="0" tIns="0" bIns="0">
+            <a:spAutoFit/>
+          </a:bodyPr>
+          <a:lstStyle/>
+          <a:p>
+            <a:pPr algn="ctr">
+              <a:spcAft>
+                <a:spcPts val="600"/>
+              </a:spcAft>
+            </a:pPr>
+            <a:r>
+              <a:rPr sz="1900" b="0" i="0">
+                <a:solidFill>
+                  <a:srgbClr val="000000"/>
+                </a:solidFill>
+                <a:latin typeface="Times New Roman"/>
+                <a:ea typeface="標楷體"/>
+                <a:ea typeface="標楷體"/>
+              </a:rPr>
+              <a:t>過去只考慮 ① 和 ②。</a:t>
+            </a:r>
+            <a:r>
+              <a:rPr sz="1900" b="1" i="0">
+                <a:solidFill>
+                  <a:srgbClr val="FF0000"/>
+                </a:solidFill>
+                <a:latin typeface="Times New Roman"/>
+                <a:ea typeface="標楷體"/>
+                <a:ea typeface="標楷體"/>
+              </a:rPr>
+              <a:t>　本次分析找到了 ③ 的直接證據。</a:t>
+            </a:r>
+          </a:p>
+        </p:txBody>
+      </p:sp>
+    </p:spTree>
+  </p:cSld>
+  <p:clrMapOvr>
+    <a:masterClrMapping/>
+  </p:clrMapOvr>
+</p:sld>
+</file>
+
+<file path=ppt/slides/slide4.xml><?xml version="1.0" encoding="utf-8"?>
+<p:sld xmlns:a="http://schemas.openxmlformats.org/drawingml/2006/main" xmlns:p="http://schemas.openxmlformats.org/presentationml/2006/main" xmlns:r="http://schemas.openxmlformats.org/officeDocument/2006/relationships">
+  <p:cSld>
+    <p:spTree>
+      <p:nvGrpSpPr>
+        <p:cNvPr id="1" name=""/>
+        <p:cNvGrpSpPr/>
+        <p:nvPr/>
+      </p:nvGrpSpPr>
+      <p:grpSpPr/>
+      <p:sp>
+        <p:nvSpPr>
+          <p:cNvPr id="2" name="TextBox 1"/>
+          <p:cNvSpPr txBox="1"/>
+          <p:nvPr/>
+        </p:nvSpPr>
+        <p:spPr>
+          <a:xfrm>
+            <a:off x="432000" y="180000"/>
+            <a:ext cx="11329200" cy="540000"/>
+          </a:xfrm>
+          <a:prstGeom prst="rect">
+            <a:avLst/>
+          </a:prstGeom>
+          <a:noFill/>
+        </p:spPr>
+        <p:txBody>
+          <a:bodyPr wrap="square" anchor="t" lIns="0" rIns="0" tIns="0" bIns="0">
+            <a:spAutoFit/>
+          </a:bodyPr>
+          <a:lstStyle/>
+          <a:p>
+            <a:pPr algn="ctr">
+              <a:spcAft>
+                <a:spcPts val="0"/>
+              </a:spcAft>
+            </a:pPr>
+            <a:r>
+              <a:rPr sz="2800" b="1" i="0">
+                <a:solidFill>
+                  <a:srgbClr val="000000"/>
+                </a:solidFill>
+                <a:latin typeface="Times New Roman"/>
+                <a:ea typeface="標楷體"/>
+                <a:ea typeface="標楷體"/>
+              </a:rPr>
+              <a:t>三、先前遺留的三個矛盾</a:t>
+            </a:r>
+          </a:p>
+        </p:txBody>
+      </p:sp>
+      <p:sp>
+        <p:nvSpPr>
+          <p:cNvPr id="3" name="Rectangle 2"/>
+          <p:cNvSpPr/>
+          <p:nvPr/>
+        </p:nvSpPr>
+        <p:spPr>
+          <a:xfrm>
+            <a:off x="216000" y="763200"/>
+            <a:ext cx="11761200" cy="18000"/>
+          </a:xfrm>
+          <a:prstGeom prst="rect">
+            <a:avLst/>
+          </a:prstGeom>
+          <a:solidFill>
+            <a:srgbClr val="2AB6D8"/>
+          </a:solidFill>
+          <a:ln>
+            <a:noFill/>
+          </a:ln>
+          <a:effectLst/>
+        </p:spPr>
+        <p:style>
+          <a:lnRef idx="1">
+            <a:schemeClr val="accent1"/>
+          </a:lnRef>
+          <a:fillRef idx="3">
+            <a:schemeClr val="accent1"/>
+          </a:fillRef>
+          <a:effectRef idx="2">
+            <a:schemeClr val="accent1"/>
+          </a:effectRef>
+          <a:fontRef idx="minor">
+            <a:schemeClr val="lt1"/>
+          </a:fontRef>
+        </p:style>
+        <p:txBody>
+          <a:bodyPr rtlCol="0" anchor="ctr"/>
+          <a:lstStyle/>
+          <a:p>
+            <a:pPr algn="ctr"/>
+          </a:p>
+        </p:txBody>
+      </p:sp>
+      <p:sp>
+        <p:nvSpPr>
+          <p:cNvPr id="4" name="TextBox 3"/>
+          <p:cNvSpPr txBox="1"/>
+          <p:nvPr/>
+        </p:nvSpPr>
+        <p:spPr>
+          <a:xfrm>
+            <a:off x="503999" y="842400"/>
+            <a:ext cx="11185201" cy="251999"/>
+          </a:xfrm>
+          <a:prstGeom prst="rect">
+            <a:avLst/>
+          </a:prstGeom>
+          <a:noFill/>
+        </p:spPr>
+        <p:txBody>
+          <a:bodyPr wrap="square" anchor="t" lIns="0" rIns="0" tIns="0" bIns="0">
+            <a:spAutoFit/>
+          </a:bodyPr>
+          <a:lstStyle/>
+          <a:p>
+            <a:pPr algn="ctr">
+              <a:spcAft>
+                <a:spcPts val="600"/>
+              </a:spcAft>
+            </a:pPr>
+            <a:r>
+              <a:rPr sz="1300" b="0" i="0">
+                <a:solidFill>
+                  <a:srgbClr val="595959"/>
+                </a:solidFill>
+                <a:latin typeface="Times New Roman"/>
+                <a:ea typeface="標楷體"/>
+                <a:ea typeface="標楷體"/>
+              </a:rPr>
+              <a:t>這三件事用「產甲烷主導」解釋不通</a:t>
+            </a:r>
+          </a:p>
+        </p:txBody>
+      </p:sp>
+      <p:sp>
+        <p:nvSpPr>
+          <p:cNvPr id="5" name="Rectangle 4"/>
+          <p:cNvSpPr/>
+          <p:nvPr/>
+        </p:nvSpPr>
+        <p:spPr>
+          <a:xfrm>
+            <a:off x="0" y="6552000"/>
+            <a:ext cx="12193200" cy="306000"/>
+          </a:xfrm>
+          <a:prstGeom prst="rect">
+            <a:avLst/>
+          </a:prstGeom>
+          <a:solidFill>
+            <a:srgbClr val="2E8BC0"/>
+          </a:solidFill>
+          <a:ln>
+            <a:noFill/>
+          </a:ln>
+          <a:effectLst/>
+        </p:spPr>
+        <p:style>
+          <a:lnRef idx="1">
+            <a:schemeClr val="accent1"/>
+          </a:lnRef>
+          <a:fillRef idx="3">
+            <a:schemeClr val="accent1"/>
+          </a:fillRef>
+          <a:effectRef idx="2">
+            <a:schemeClr val="accent1"/>
+          </a:effectRef>
+          <a:fontRef idx="minor">
+            <a:schemeClr val="lt1"/>
+          </a:fontRef>
+        </p:style>
+        <p:txBody>
+          <a:bodyPr rtlCol="0" anchor="ctr"/>
+          <a:lstStyle/>
+          <a:p>
+            <a:pPr algn="ctr"/>
+          </a:p>
+        </p:txBody>
+      </p:sp>
+      <p:sp>
+        <p:nvSpPr>
+          <p:cNvPr id="6" name="TextBox 5"/>
+          <p:cNvSpPr txBox="1"/>
+          <p:nvPr/>
+        </p:nvSpPr>
+        <p:spPr>
+          <a:xfrm>
+            <a:off x="11329200" y="6577200"/>
+            <a:ext cx="576000" cy="216000"/>
+          </a:xfrm>
+          <a:prstGeom prst="rect">
+            <a:avLst/>
+          </a:prstGeom>
+          <a:noFill/>
+        </p:spPr>
+        <p:txBody>
+          <a:bodyPr wrap="square" anchor="t" lIns="0" rIns="0" tIns="0" bIns="0">
+            <a:spAutoFit/>
+          </a:bodyPr>
+          <a:lstStyle/>
+          <a:p>
+            <a:pPr algn="r">
+              <a:spcAft>
+                <a:spcPts val="600"/>
+              </a:spcAft>
+            </a:pPr>
+            <a:r>
+              <a:rPr sz="1100" b="0" i="0">
+                <a:solidFill>
+                  <a:srgbClr val="FFFFFF"/>
+                </a:solidFill>
+                <a:latin typeface="Times New Roman"/>
+                <a:ea typeface="標楷體"/>
+                <a:ea typeface="標楷體"/>
+              </a:rPr>
+              <a:t>5</a:t>
             </a:r>
           </a:p>
         </p:txBody>
@@ -7605,458 +8426,6 @@
 </p:sld>
 </file>
 
-<file path=ppt/slides/slide4.xml><?xml version="1.0" encoding="utf-8"?>
-<p:sld xmlns:a="http://schemas.openxmlformats.org/drawingml/2006/main" xmlns:p="http://schemas.openxmlformats.org/presentationml/2006/main" xmlns:r="http://schemas.openxmlformats.org/officeDocument/2006/relationships">
-  <p:cSld>
-    <p:spTree>
-      <p:nvGrpSpPr>
-        <p:cNvPr id="1" name=""/>
-        <p:cNvGrpSpPr/>
-        <p:nvPr/>
-      </p:nvGrpSpPr>
-      <p:grpSpPr/>
-      <p:sp>
-        <p:nvSpPr>
-          <p:cNvPr id="2" name="TextBox 1"/>
-          <p:cNvSpPr txBox="1"/>
-          <p:nvPr/>
-        </p:nvSpPr>
-        <p:spPr>
-          <a:xfrm>
-            <a:off x="432000" y="180000"/>
-            <a:ext cx="11329200" cy="540000"/>
-          </a:xfrm>
-          <a:prstGeom prst="rect">
-            <a:avLst/>
-          </a:prstGeom>
-          <a:noFill/>
-        </p:spPr>
-        <p:txBody>
-          <a:bodyPr wrap="square" anchor="t" lIns="0" rIns="0" tIns="0" bIns="0">
-            <a:spAutoFit/>
-          </a:bodyPr>
-          <a:lstStyle/>
-          <a:p>
-            <a:pPr algn="ctr">
-              <a:spcAft>
-                <a:spcPts val="0"/>
-              </a:spcAft>
-            </a:pPr>
-            <a:r>
-              <a:rPr sz="2800" b="1" i="0">
-                <a:solidFill>
-                  <a:srgbClr val="000000"/>
-                </a:solidFill>
-                <a:latin typeface="Times New Roman"/>
-                <a:ea typeface="標楷體"/>
-                <a:ea typeface="標楷體"/>
-              </a:rPr>
-              <a:t>三、先確認：氣體讀數什麼時候可信</a:t>
-            </a:r>
-          </a:p>
-        </p:txBody>
-      </p:sp>
-      <p:sp>
-        <p:nvSpPr>
-          <p:cNvPr id="3" name="Rectangle 2"/>
-          <p:cNvSpPr/>
-          <p:nvPr/>
-        </p:nvSpPr>
-        <p:spPr>
-          <a:xfrm>
-            <a:off x="216000" y="763200"/>
-            <a:ext cx="11761200" cy="18000"/>
-          </a:xfrm>
-          <a:prstGeom prst="rect">
-            <a:avLst/>
-          </a:prstGeom>
-          <a:solidFill>
-            <a:srgbClr val="2AB6D8"/>
-          </a:solidFill>
-          <a:ln>
-            <a:noFill/>
-          </a:ln>
-          <a:effectLst/>
-        </p:spPr>
-        <p:style>
-          <a:lnRef idx="1">
-            <a:schemeClr val="accent1"/>
-          </a:lnRef>
-          <a:fillRef idx="3">
-            <a:schemeClr val="accent1"/>
-          </a:fillRef>
-          <a:effectRef idx="2">
-            <a:schemeClr val="accent1"/>
-          </a:effectRef>
-          <a:fontRef idx="minor">
-            <a:schemeClr val="lt1"/>
-          </a:fontRef>
-        </p:style>
-        <p:txBody>
-          <a:bodyPr rtlCol="0" anchor="ctr"/>
-          <a:lstStyle/>
-          <a:p>
-            <a:pPr algn="ctr"/>
-          </a:p>
-        </p:txBody>
-      </p:sp>
-      <p:sp>
-        <p:nvSpPr>
-          <p:cNvPr id="4" name="TextBox 3"/>
-          <p:cNvSpPr txBox="1"/>
-          <p:nvPr/>
-        </p:nvSpPr>
-        <p:spPr>
-          <a:xfrm>
-            <a:off x="503999" y="842400"/>
-            <a:ext cx="11185201" cy="251999"/>
-          </a:xfrm>
-          <a:prstGeom prst="rect">
-            <a:avLst/>
-          </a:prstGeom>
-          <a:noFill/>
-        </p:spPr>
-        <p:txBody>
-          <a:bodyPr wrap="square" anchor="t" lIns="0" rIns="0" tIns="0" bIns="0">
-            <a:spAutoFit/>
-          </a:bodyPr>
-          <a:lstStyle/>
-          <a:p>
-            <a:pPr algn="ctr">
-              <a:spcAft>
-                <a:spcPts val="600"/>
-              </a:spcAft>
-            </a:pPr>
-            <a:r>
-              <a:rPr sz="1300" b="0" i="0">
-                <a:solidFill>
-                  <a:srgbClr val="595959"/>
-                </a:solidFill>
-                <a:latin typeface="Times New Roman"/>
-                <a:ea typeface="標楷體"/>
-                <a:ea typeface="標楷體"/>
-              </a:rPr>
-              <a:t>補氣加入的是二氧化碳與氫氣、不含甲烷，真頂空必定被稀釋</a:t>
-            </a:r>
-          </a:p>
-        </p:txBody>
-      </p:sp>
-      <p:sp>
-        <p:nvSpPr>
-          <p:cNvPr id="5" name="Rectangle 4"/>
-          <p:cNvSpPr/>
-          <p:nvPr/>
-        </p:nvSpPr>
-        <p:spPr>
-          <a:xfrm>
-            <a:off x="0" y="6552000"/>
-            <a:ext cx="12193200" cy="306000"/>
-          </a:xfrm>
-          <a:prstGeom prst="rect">
-            <a:avLst/>
-          </a:prstGeom>
-          <a:solidFill>
-            <a:srgbClr val="2E8BC0"/>
-          </a:solidFill>
-          <a:ln>
-            <a:noFill/>
-          </a:ln>
-          <a:effectLst/>
-        </p:spPr>
-        <p:style>
-          <a:lnRef idx="1">
-            <a:schemeClr val="accent1"/>
-          </a:lnRef>
-          <a:fillRef idx="3">
-            <a:schemeClr val="accent1"/>
-          </a:fillRef>
-          <a:effectRef idx="2">
-            <a:schemeClr val="accent1"/>
-          </a:effectRef>
-          <a:fontRef idx="minor">
-            <a:schemeClr val="lt1"/>
-          </a:fontRef>
-        </p:style>
-        <p:txBody>
-          <a:bodyPr rtlCol="0" anchor="ctr"/>
-          <a:lstStyle/>
-          <a:p>
-            <a:pPr algn="ctr"/>
-          </a:p>
-        </p:txBody>
-      </p:sp>
-      <p:sp>
-        <p:nvSpPr>
-          <p:cNvPr id="6" name="TextBox 5"/>
-          <p:cNvSpPr txBox="1"/>
-          <p:nvPr/>
-        </p:nvSpPr>
-        <p:spPr>
-          <a:xfrm>
-            <a:off x="11329200" y="6577200"/>
-            <a:ext cx="576000" cy="216000"/>
-          </a:xfrm>
-          <a:prstGeom prst="rect">
-            <a:avLst/>
-          </a:prstGeom>
-          <a:noFill/>
-        </p:spPr>
-        <p:txBody>
-          <a:bodyPr wrap="square" anchor="t" lIns="0" rIns="0" tIns="0" bIns="0">
-            <a:spAutoFit/>
-          </a:bodyPr>
-          <a:lstStyle/>
-          <a:p>
-            <a:pPr algn="r">
-              <a:spcAft>
-                <a:spcPts val="600"/>
-              </a:spcAft>
-            </a:pPr>
-            <a:r>
-              <a:rPr sz="1100" b="0" i="0">
-                <a:solidFill>
-                  <a:srgbClr val="FFFFFF"/>
-                </a:solidFill>
-                <a:latin typeface="Times New Roman"/>
-                <a:ea typeface="標楷體"/>
-                <a:ea typeface="標楷體"/>
-              </a:rPr>
-              <a:t>5</a:t>
-            </a:r>
-          </a:p>
-        </p:txBody>
-      </p:sp>
-      <p:pic>
-        <p:nvPicPr>
-          <p:cNvPr id="7" name="Picture 6" descr="fig44_sensor_validity.png"/>
-          <p:cNvPicPr>
-            <a:picLocks noChangeAspect="1"/>
-          </p:cNvPicPr>
-          <p:nvPr/>
-        </p:nvPicPr>
-        <p:blipFill>
-          <a:blip r:embed="rId2"/>
-          <a:stretch>
-            <a:fillRect/>
-          </a:stretch>
-        </p:blipFill>
-        <p:spPr>
-          <a:xfrm>
-            <a:off x="1416599" y="1188000"/>
-            <a:ext cx="9360000" cy="3549546"/>
-          </a:xfrm>
-          <a:prstGeom prst="rect">
-            <a:avLst/>
-          </a:prstGeom>
-        </p:spPr>
-      </p:pic>
-      <p:sp>
-        <p:nvSpPr>
-          <p:cNvPr id="8" name="TextBox 7"/>
-          <p:cNvSpPr txBox="1"/>
-          <p:nvPr/>
-        </p:nvSpPr>
-        <p:spPr>
-          <a:xfrm>
-            <a:off x="612000" y="4791546"/>
-            <a:ext cx="10969200" cy="251999"/>
-          </a:xfrm>
-          <a:prstGeom prst="rect">
-            <a:avLst/>
-          </a:prstGeom>
-          <a:noFill/>
-        </p:spPr>
-        <p:txBody>
-          <a:bodyPr wrap="square" anchor="t" lIns="0" rIns="0" tIns="0" bIns="0">
-            <a:spAutoFit/>
-          </a:bodyPr>
-          <a:lstStyle/>
-          <a:p>
-            <a:pPr algn="ctr">
-              <a:spcAft>
-                <a:spcPts val="600"/>
-              </a:spcAft>
-            </a:pPr>
-            <a:r>
-              <a:rPr sz="1150" b="1" i="0">
-                <a:solidFill>
-                  <a:srgbClr val="1F6FB5"/>
-                </a:solidFill>
-                <a:latin typeface="Times New Roman"/>
-                <a:ea typeface="標楷體"/>
-                <a:ea typeface="標楷體"/>
-              </a:rPr>
-              <a:t>圖 1.　</a:t>
-            </a:r>
-            <a:r>
-              <a:rPr sz="1150" b="0" i="0">
-                <a:solidFill>
-                  <a:srgbClr val="595959"/>
-                </a:solidFill>
-                <a:latin typeface="Times New Roman"/>
-                <a:ea typeface="標楷體"/>
-                <a:ea typeface="標楷體"/>
-              </a:rPr>
-              <a:t>(</a:t>
-            </a:r>
-            <a:r>
-              <a:rPr sz="1150" b="0" i="1">
-                <a:solidFill>
-                  <a:srgbClr val="595959"/>
-                </a:solidFill>
-                <a:latin typeface="Times New Roman"/>
-                <a:ea typeface="標楷體"/>
-                <a:ea typeface="標楷體"/>
-              </a:rPr>
-              <a:t>a</a:t>
-            </a:r>
-            <a:r>
-              <a:rPr sz="1150" b="0" i="0">
-                <a:solidFill>
-                  <a:srgbClr val="595959"/>
-                </a:solidFill>
-                <a:latin typeface="Times New Roman"/>
-                <a:ea typeface="標楷體"/>
-                <a:ea typeface="標楷體"/>
-              </a:rPr>
-              <a:t>) 一次排氣的實際讀數　(</a:t>
-            </a:r>
-            <a:r>
-              <a:rPr sz="1150" b="0" i="1">
-                <a:solidFill>
-                  <a:srgbClr val="595959"/>
-                </a:solidFill>
-                <a:latin typeface="Times New Roman"/>
-                <a:ea typeface="標楷體"/>
-                <a:ea typeface="標楷體"/>
-              </a:rPr>
-              <a:t>b</a:t>
-            </a:r>
-            <a:r>
-              <a:rPr sz="1150" b="0" i="0">
-                <a:solidFill>
-                  <a:srgbClr val="595959"/>
-                </a:solidFill>
-                <a:latin typeface="Times New Roman"/>
-                <a:ea typeface="標楷體"/>
-                <a:ea typeface="標楷體"/>
-              </a:rPr>
-              <a:t>) 補氣時甲烷有沒有被稀釋　(</a:t>
-            </a:r>
-            <a:r>
-              <a:rPr sz="1150" b="0" i="1">
-                <a:solidFill>
-                  <a:srgbClr val="595959"/>
-                </a:solidFill>
-                <a:latin typeface="Times New Roman"/>
-                <a:ea typeface="標楷體"/>
-                <a:ea typeface="標楷體"/>
-              </a:rPr>
-              <a:t>c</a:t>
-            </a:r>
-            <a:r>
-              <a:rPr sz="1150" b="0" i="0">
-                <a:solidFill>
-                  <a:srgbClr val="595959"/>
-                </a:solidFill>
-                <a:latin typeface="Times New Roman"/>
-                <a:ea typeface="標楷體"/>
-                <a:ea typeface="標楷體"/>
-              </a:rPr>
-              <a:t>) 單一循環內的斜率</a:t>
-            </a:r>
-          </a:p>
-        </p:txBody>
-      </p:sp>
-      <p:sp>
-        <p:nvSpPr>
-          <p:cNvPr id="9" name="TextBox 8"/>
-          <p:cNvSpPr txBox="1"/>
-          <p:nvPr/>
-        </p:nvSpPr>
-        <p:spPr>
-          <a:xfrm>
-            <a:off x="576000" y="5115546"/>
-            <a:ext cx="11041200" cy="1224000"/>
-          </a:xfrm>
-          <a:prstGeom prst="rect">
-            <a:avLst/>
-          </a:prstGeom>
-          <a:noFill/>
-        </p:spPr>
-        <p:txBody>
-          <a:bodyPr wrap="square" anchor="t" lIns="0" rIns="0" tIns="0" bIns="0">
-            <a:spAutoFit/>
-          </a:bodyPr>
-          <a:lstStyle/>
-          <a:p>
-            <a:pPr algn="l">
-              <a:spcAft>
-                <a:spcPts val="400"/>
-              </a:spcAft>
-            </a:pPr>
-            <a:r>
-              <a:rPr sz="1700" b="0" i="0">
-                <a:solidFill>
-                  <a:srgbClr val="000000"/>
-                </a:solidFill>
-                <a:latin typeface="Times New Roman"/>
-                <a:ea typeface="標楷體"/>
-                <a:ea typeface="標楷體"/>
-              </a:rPr>
-              <a:t>實測斜率 </a:t>
-            </a:r>
-            <a:r>
-              <a:rPr sz="1900" b="1" i="0">
-                <a:solidFill>
-                  <a:srgbClr val="FF0000"/>
-                </a:solidFill>
-                <a:latin typeface="Times New Roman"/>
-                <a:ea typeface="標楷體"/>
-                <a:ea typeface="標楷體"/>
-              </a:rPr>
-              <a:t>+0.008 ± 0.225</a:t>
-            </a:r>
-            <a:r>
-              <a:rPr sz="1700" b="0" i="0">
-                <a:solidFill>
-                  <a:srgbClr val="000000"/>
-                </a:solidFill>
-                <a:latin typeface="Times New Roman"/>
-                <a:ea typeface="標楷體"/>
-                <a:ea typeface="標楷體"/>
-              </a:rPr>
-              <a:t>，距「真頂空」應有的 −1 有 4.5 個標準差。</a:t>
-            </a:r>
-          </a:p>
-          <a:p>
-            <a:pPr algn="l">
-              <a:spcAft>
-                <a:spcPts val="600"/>
-              </a:spcAft>
-            </a:pPr>
-            <a:r>
-              <a:rPr sz="1600" b="0" i="0">
-                <a:solidFill>
-                  <a:srgbClr val="595959"/>
-                </a:solidFill>
-                <a:latin typeface="Times New Roman"/>
-                <a:ea typeface="標楷體"/>
-                <a:ea typeface="標楷體"/>
-              </a:rPr>
-              <a:t>結論：分析儀只有在排氣當下的一至二分鐘可信。全資料庫符合此條件者共 35 筆，後續所有氣體計算只用這 35 筆。</a:t>
-            </a:r>
-          </a:p>
-        </p:txBody>
-      </p:sp>
-    </p:spTree>
-  </p:cSld>
-  <p:clrMapOvr>
-    <a:masterClrMapping/>
-  </p:clrMapOvr>
-</p:sld>
-</file>
-
 <file path=ppt/slides/slide5.xml><?xml version="1.0" encoding="utf-8"?>
 <p:sld xmlns:a="http://schemas.openxmlformats.org/drawingml/2006/main" xmlns:p="http://schemas.openxmlformats.org/presentationml/2006/main" xmlns:r="http://schemas.openxmlformats.org/officeDocument/2006/relationships">
   <p:cSld>
@@ -8103,7 +8472,7 @@
                 <a:ea typeface="標楷體"/>
                 <a:ea typeface="標楷體"/>
               </a:rPr>
-              <a:t>四、關鍵原理：進料比剛好等於反應計量比</a:t>
+              <a:t>四、先確認：氣體讀數什麼時候可信</a:t>
             </a:r>
           </a:p>
         </p:txBody>
@@ -8188,7 +8557,7 @@
                 <a:ea typeface="標楷體"/>
                 <a:ea typeface="標楷體"/>
               </a:rPr>
-              <a:t>這讓一個不需要任何校準常數的檢定成為可能</a:t>
+              <a:t>補氣加入的是二氧化碳與氫氣、不含甲烷，真頂空必定被稀釋</a:t>
             </a:r>
           </a:p>
         </p:txBody>
@@ -8278,16 +8647,40 @@
           </a:p>
         </p:txBody>
       </p:sp>
-      <p:sp>
-        <p:nvSpPr>
-          <p:cNvPr id="7" name="TextBox 6"/>
+      <p:pic>
+        <p:nvPicPr>
+          <p:cNvPr id="7" name="Picture 6" descr="deck1_sensor.png"/>
+          <p:cNvPicPr>
+            <a:picLocks noChangeAspect="1"/>
+          </p:cNvPicPr>
+          <p:nvPr/>
+        </p:nvPicPr>
+        <p:blipFill>
+          <a:blip r:embed="rId2"/>
+          <a:stretch>
+            <a:fillRect/>
+          </a:stretch>
+        </p:blipFill>
+        <p:spPr>
+          <a:xfrm>
+            <a:off x="1596599" y="1224000"/>
+            <a:ext cx="9000000" cy="4475531"/>
+          </a:xfrm>
+          <a:prstGeom prst="rect">
+            <a:avLst/>
+          </a:prstGeom>
+        </p:spPr>
+      </p:pic>
+      <p:sp>
+        <p:nvSpPr>
+          <p:cNvPr id="8" name="TextBox 7"/>
           <p:cNvSpPr txBox="1"/>
           <p:nvPr/>
         </p:nvSpPr>
         <p:spPr>
           <a:xfrm>
-            <a:off x="576000" y="1368000"/>
-            <a:ext cx="11041200" cy="2160000"/>
+            <a:off x="576000" y="5789531"/>
+            <a:ext cx="11041200" cy="744468"/>
           </a:xfrm>
           <a:prstGeom prst="rect">
             <a:avLst/>
@@ -8299,152 +8692,6 @@
             <a:spAutoFit/>
           </a:bodyPr>
           <a:lstStyle/>
-          <a:p>
-            <a:pPr algn="ctr">
-              <a:spcAft>
-                <a:spcPts val="1400"/>
-              </a:spcAft>
-            </a:pPr>
-            <a:r>
-              <a:rPr sz="2400" b="1" i="0">
-                <a:solidFill>
-                  <a:srgbClr val="000000"/>
-                </a:solidFill>
-                <a:latin typeface="Times New Roman"/>
-                <a:ea typeface="標楷體"/>
-                <a:ea typeface="標楷體"/>
-              </a:rPr>
-              <a:t>產甲烷反應　</a:t>
-            </a:r>
-            <a:r>
-              <a:rPr sz="2400" b="1" i="0">
-                <a:solidFill>
-                  <a:srgbClr val="000000"/>
-                </a:solidFill>
-                <a:latin typeface="Times New Roman"/>
-                <a:ea typeface="標楷體"/>
-                <a:ea typeface="標楷體"/>
-              </a:rPr>
-              <a:t>CO</a:t>
-            </a:r>
-            <a:r>
-              <a:rPr sz="2400" b="1" i="0">
-                <a:solidFill>
-                  <a:srgbClr val="000000"/>
-                </a:solidFill>
-                <a:latin typeface="Times New Roman"/>
-                <a:ea typeface="標楷體"/>
-                <a:ea typeface="標楷體"/>
-              </a:rPr>
-              <a:t>₂ + 4 </a:t>
-            </a:r>
-            <a:r>
-              <a:rPr sz="2400" b="1" i="0">
-                <a:solidFill>
-                  <a:srgbClr val="000000"/>
-                </a:solidFill>
-                <a:latin typeface="Times New Roman"/>
-                <a:ea typeface="標楷體"/>
-                <a:ea typeface="標楷體"/>
-              </a:rPr>
-              <a:t>H</a:t>
-            </a:r>
-            <a:r>
-              <a:rPr sz="2400" b="1" i="0">
-                <a:solidFill>
-                  <a:srgbClr val="000000"/>
-                </a:solidFill>
-                <a:latin typeface="Times New Roman"/>
-                <a:ea typeface="標楷體"/>
-                <a:ea typeface="標楷體"/>
-              </a:rPr>
-              <a:t>₂ → </a:t>
-            </a:r>
-            <a:r>
-              <a:rPr sz="2400" b="1" i="0">
-                <a:solidFill>
-                  <a:srgbClr val="000000"/>
-                </a:solidFill>
-                <a:latin typeface="Times New Roman"/>
-                <a:ea typeface="標楷體"/>
-                <a:ea typeface="標楷體"/>
-              </a:rPr>
-              <a:t>CH</a:t>
-            </a:r>
-            <a:r>
-              <a:rPr sz="2400" b="1" i="0">
-                <a:solidFill>
-                  <a:srgbClr val="000000"/>
-                </a:solidFill>
-                <a:latin typeface="Times New Roman"/>
-                <a:ea typeface="標楷體"/>
-                <a:ea typeface="標楷體"/>
-              </a:rPr>
-              <a:t>₄ + 2 </a:t>
-            </a:r>
-            <a:r>
-              <a:rPr sz="2400" b="1" i="0">
-                <a:solidFill>
-                  <a:srgbClr val="000000"/>
-                </a:solidFill>
-                <a:latin typeface="Times New Roman"/>
-                <a:ea typeface="標楷體"/>
-                <a:ea typeface="標楷體"/>
-              </a:rPr>
-              <a:t>H</a:t>
-            </a:r>
-            <a:r>
-              <a:rPr sz="2400" b="1" i="0">
-                <a:solidFill>
-                  <a:srgbClr val="000000"/>
-                </a:solidFill>
-                <a:latin typeface="Times New Roman"/>
-                <a:ea typeface="標楷體"/>
-                <a:ea typeface="標楷體"/>
-              </a:rPr>
-              <a:t>₂</a:t>
-            </a:r>
-            <a:r>
-              <a:rPr sz="2400" b="1" i="1">
-                <a:solidFill>
-                  <a:srgbClr val="000000"/>
-                </a:solidFill>
-                <a:latin typeface="Times New Roman"/>
-                <a:ea typeface="標楷體"/>
-                <a:ea typeface="標楷體"/>
-              </a:rPr>
-              <a:t>O</a:t>
-            </a:r>
-          </a:p>
-          <a:p>
-            <a:pPr algn="ctr">
-              <a:spcAft>
-                <a:spcPts val="1400"/>
-              </a:spcAft>
-            </a:pPr>
-            <a:r>
-              <a:rPr sz="2000" b="0" i="0">
-                <a:solidFill>
-                  <a:srgbClr val="000000"/>
-                </a:solidFill>
-                <a:latin typeface="Times New Roman"/>
-                <a:ea typeface="標楷體"/>
-                <a:ea typeface="標楷體"/>
-              </a:rPr>
-              <a:t>進料也是 1:4 ——</a:t>
-            </a:r>
-            <a:r>
-              <a:rPr sz="2200" b="1" i="0">
-                <a:solidFill>
-                  <a:srgbClr val="FF0000"/>
-                </a:solidFill>
-                <a:latin typeface="Times New Roman"/>
-                <a:ea typeface="標楷體"/>
-                <a:ea typeface="標楷體"/>
-              </a:rPr>
-              <a:t>兩者完全相同</a:t>
-            </a:r>
-          </a:p>
           <a:p>
             <a:pPr algn="ctr">
               <a:spcAft>
@@ -8452,7 +8699,7 @@
               </a:spcAft>
             </a:pPr>
             <a:r>
-              <a:rPr sz="1900" b="0" i="0">
+              <a:rPr sz="1700" b="0" i="0">
                 <a:solidFill>
                   <a:srgbClr val="000000"/>
                 </a:solidFill>
@@ -8460,307 +8707,33 @@
                 <a:ea typeface="標楷體"/>
                 <a:ea typeface="標楷體"/>
               </a:rPr>
-              <a:t>所以若系統內只有產甲烷反應：補進去 1:4、消耗掉 1:4，</a:t>
-            </a:r>
-          </a:p>
-          <a:p>
-            <a:pPr algn="ctr">
-              <a:spcAft>
-                <a:spcPts val="600"/>
-              </a:spcAft>
-            </a:pPr>
-            <a:r>
-              <a:rPr sz="2100" b="1" i="0">
-                <a:solidFill>
-                  <a:srgbClr val="1F6FB5"/>
-                </a:solidFill>
-                <a:latin typeface="Times New Roman"/>
-                <a:ea typeface="標楷體"/>
-                <a:ea typeface="標楷體"/>
-              </a:rPr>
-              <a:t>剩下的必然永遠是 1:4（比值 0.25），與轉換率高低無關。</a:t>
-            </a:r>
-          </a:p>
-        </p:txBody>
-      </p:sp>
-      <p:graphicFrame>
-        <p:nvGraphicFramePr>
-          <p:cNvPr id="8" name="Table 7"/>
-          <p:cNvGraphicFramePr>
-            <a:graphicFrameLocks noGrp="1"/>
-          </p:cNvGraphicFramePr>
-          <p:nvPr/>
-        </p:nvGraphicFramePr>
-        <p:xfrm>
-          <a:off x="2015999" y="4031999"/>
-          <a:ext cx="8172000" cy="1371600"/>
-        </p:xfrm>
-        <a:graphic>
-          <a:graphicData uri="http://schemas.openxmlformats.org/drawingml/2006/table">
-            <a:tbl>
-              <a:tblPr>
-                <a:tableStyleId>{5C22544A-7EE6-4342-B048-85BDC9FD1C3A}</a:tableStyleId>
-              </a:tblPr>
-              <a:tblGrid>
-                <a:gridCol w="2880000"/>
-                <a:gridCol w="5292000"/>
-              </a:tblGrid>
-              <a:tr h="378000">
-                <a:tc>
-                  <a:txBody>
-                    <a:bodyPr/>
-                    <a:lstStyle/>
-                    <a:p>
-                      <a:pPr algn="ctr"/>
-                      <a:r>
-                        <a:rPr sz="1500" b="1" i="0">
-                          <a:solidFill>
-                            <a:srgbClr val="FFFFFF"/>
-                          </a:solidFill>
-                          <a:latin typeface="Times New Roman"/>
-                          <a:ea typeface="標楷體"/>
-                          <a:ea typeface="標楷體"/>
-                        </a:rPr>
-                        <a:t>殘餘的 </a:t>
-                      </a:r>
-                      <a:r>
-                        <a:rPr sz="1500" b="1" i="0">
-                          <a:solidFill>
-                            <a:srgbClr val="FFFFFF"/>
-                          </a:solidFill>
-                          <a:latin typeface="Times New Roman"/>
-                          <a:ea typeface="標楷體"/>
-                          <a:ea typeface="標楷體"/>
-                        </a:rPr>
-                        <a:t>CO</a:t>
-                      </a:r>
-                      <a:r>
-                        <a:rPr sz="1500" b="1" i="0">
-                          <a:solidFill>
-                            <a:srgbClr val="FFFFFF"/>
-                          </a:solidFill>
-                          <a:latin typeface="Times New Roman"/>
-                          <a:ea typeface="標楷體"/>
-                          <a:ea typeface="標楷體"/>
-                        </a:rPr>
-                        <a:t>₂ ÷ </a:t>
-                      </a:r>
-                      <a:r>
-                        <a:rPr sz="1500" b="1" i="0">
-                          <a:solidFill>
-                            <a:srgbClr val="FFFFFF"/>
-                          </a:solidFill>
-                          <a:latin typeface="Times New Roman"/>
-                          <a:ea typeface="標楷體"/>
-                          <a:ea typeface="標楷體"/>
-                        </a:rPr>
-                        <a:t>H</a:t>
-                      </a:r>
-                      <a:r>
-                        <a:rPr sz="1500" b="1" i="0">
-                          <a:solidFill>
-                            <a:srgbClr val="FFFFFF"/>
-                          </a:solidFill>
-                          <a:latin typeface="Times New Roman"/>
-                          <a:ea typeface="標楷體"/>
-                          <a:ea typeface="標楷體"/>
-                        </a:rPr>
-                        <a:t>₂</a:t>
-                      </a:r>
-                    </a:p>
-                  </a:txBody>
-                  <a:tcPr marL="72000" marR="72000" anchor="ctr">
-                    <a:solidFill>
-                      <a:srgbClr val="2E9BD6"/>
-                    </a:solidFill>
-                  </a:tcPr>
-                </a:tc>
-                <a:tc>
-                  <a:txBody>
-                    <a:bodyPr/>
-                    <a:lstStyle/>
-                    <a:p>
-                      <a:pPr algn="ctr"/>
-                      <a:r>
-                        <a:rPr sz="1500" b="1" i="0">
-                          <a:solidFill>
-                            <a:srgbClr val="FFFFFF"/>
-                          </a:solidFill>
-                          <a:latin typeface="Times New Roman"/>
-                          <a:ea typeface="標楷體"/>
-                          <a:ea typeface="標楷體"/>
-                        </a:rPr>
-                        <a:t>代表什麼</a:t>
-                      </a:r>
-                    </a:p>
-                  </a:txBody>
-                  <a:tcPr marL="72000" marR="72000" anchor="ctr">
-                    <a:solidFill>
-                      <a:srgbClr val="2E9BD6"/>
-                    </a:solidFill>
-                  </a:tcPr>
-                </a:tc>
-              </a:tr>
-              <a:tr h="331200">
-                <a:tc>
-                  <a:txBody>
-                    <a:bodyPr/>
-                    <a:lstStyle/>
-                    <a:p>
-                      <a:pPr algn="ctr"/>
-                      <a:r>
-                        <a:rPr sz="1500" b="0" i="0">
-                          <a:solidFill>
-                            <a:srgbClr val="000000"/>
-                          </a:solidFill>
-                          <a:latin typeface="Times New Roman"/>
-                          <a:ea typeface="標楷體"/>
-                          <a:ea typeface="標楷體"/>
-                        </a:rPr>
-                        <a:t>低於 0.25</a:t>
-                      </a:r>
-                    </a:p>
-                  </a:txBody>
-                  <a:tcPr marL="72000" marR="72000" anchor="ctr">
-                    <a:solidFill>
-                      <a:srgbClr val="DBE9F6"/>
-                    </a:solidFill>
-                  </a:tcPr>
-                </a:tc>
-                <a:tc>
-                  <a:txBody>
-                    <a:bodyPr/>
-                    <a:lstStyle/>
-                    <a:p>
-                      <a:pPr algn="ctr"/>
-                      <a:r>
-                        <a:rPr sz="1500" b="0" i="0">
-                          <a:solidFill>
-                            <a:srgbClr val="000000"/>
-                          </a:solidFill>
-                          <a:latin typeface="Times New Roman"/>
-                          <a:ea typeface="標楷體"/>
-                          <a:ea typeface="標楷體"/>
-                        </a:rPr>
-                        <a:t>二氧化碳被額外移除 → 溶解</a:t>
-                      </a:r>
-                    </a:p>
-                  </a:txBody>
-                  <a:tcPr marL="72000" marR="72000" anchor="ctr">
-                    <a:solidFill>
-                      <a:srgbClr val="DBE9F6"/>
-                    </a:solidFill>
-                  </a:tcPr>
-                </a:tc>
-              </a:tr>
-              <a:tr h="331200">
-                <a:tc>
-                  <a:txBody>
-                    <a:bodyPr/>
-                    <a:lstStyle/>
-                    <a:p>
-                      <a:pPr algn="ctr"/>
-                      <a:r>
-                        <a:rPr sz="1500" b="0" i="0">
-                          <a:solidFill>
-                            <a:srgbClr val="000000"/>
-                          </a:solidFill>
-                          <a:latin typeface="Times New Roman"/>
-                          <a:ea typeface="標楷體"/>
-                          <a:ea typeface="標楷體"/>
-                        </a:rPr>
-                        <a:t>等於 0.25</a:t>
-                      </a:r>
-                    </a:p>
-                  </a:txBody>
-                  <a:tcPr marL="72000" marR="72000" anchor="ctr">
-                    <a:solidFill>
-                      <a:srgbClr val="EAF2FA"/>
-                    </a:solidFill>
-                  </a:tcPr>
-                </a:tc>
-                <a:tc>
-                  <a:txBody>
-                    <a:bodyPr/>
-                    <a:lstStyle/>
-                    <a:p>
-                      <a:pPr algn="ctr"/>
-                      <a:r>
-                        <a:rPr sz="1500" b="0" i="0">
-                          <a:solidFill>
-                            <a:srgbClr val="000000"/>
-                          </a:solidFill>
-                          <a:latin typeface="Times New Roman"/>
-                          <a:ea typeface="標楷體"/>
-                          <a:ea typeface="標楷體"/>
-                        </a:rPr>
-                        <a:t>只有產甲烷反應</a:t>
-                      </a:r>
-                    </a:p>
-                  </a:txBody>
-                  <a:tcPr marL="72000" marR="72000" anchor="ctr">
-                    <a:solidFill>
-                      <a:srgbClr val="EAF2FA"/>
-                    </a:solidFill>
-                  </a:tcPr>
-                </a:tc>
-              </a:tr>
-              <a:tr h="331200">
-                <a:tc>
-                  <a:txBody>
-                    <a:bodyPr/>
-                    <a:lstStyle/>
-                    <a:p>
-                      <a:pPr algn="ctr"/>
-                      <a:r>
-                        <a:rPr sz="1500" b="1" i="0">
-                          <a:solidFill>
-                            <a:srgbClr val="FF0000"/>
-                          </a:solidFill>
-                          <a:latin typeface="Times New Roman"/>
-                          <a:ea typeface="標楷體"/>
-                          <a:ea typeface="標楷體"/>
-                        </a:rPr>
-                        <a:t>高於 0.25</a:t>
-                      </a:r>
-                    </a:p>
-                  </a:txBody>
-                  <a:tcPr marL="72000" marR="72000" anchor="ctr">
-                    <a:solidFill>
-                      <a:srgbClr val="DBE9F6"/>
-                    </a:solidFill>
-                  </a:tcPr>
-                </a:tc>
-                <a:tc>
-                  <a:txBody>
-                    <a:bodyPr/>
-                    <a:lstStyle/>
-                    <a:p>
-                      <a:pPr algn="ctr"/>
-                      <a:r>
-                        <a:rPr sz="1500" b="1" i="0">
-                          <a:solidFill>
-                            <a:srgbClr val="FF0000"/>
-                          </a:solidFill>
-                          <a:latin typeface="Times New Roman"/>
-                          <a:ea typeface="標楷體"/>
-                          <a:ea typeface="標楷體"/>
-                        </a:rPr>
-                        <a:t>氫氣被額外移除 → 洩漏或其他耗氫反應</a:t>
-                      </a:r>
-                    </a:p>
-                  </a:txBody>
-                  <a:tcPr marL="72000" marR="72000" anchor="ctr">
-                    <a:solidFill>
-                      <a:srgbClr val="DBE9F6"/>
-                    </a:solidFill>
-                  </a:tcPr>
-                </a:tc>
-              </a:tr>
-            </a:tbl>
-          </a:graphicData>
-        </a:graphic>
-      </p:graphicFrame>
+              <a:t>實測斜率 </a:t>
+            </a:r>
+            <a:r>
+              <a:rPr sz="1900" b="1" i="0">
+                <a:solidFill>
+                  <a:srgbClr val="FF0000"/>
+                </a:solidFill>
+                <a:latin typeface="Times New Roman"/>
+                <a:ea typeface="標楷體"/>
+                <a:ea typeface="標楷體"/>
+              </a:rPr>
+              <a:t>+0.008 ± 0.225</a:t>
+            </a:r>
+            <a:r>
+              <a:rPr sz="1700" b="0" i="0">
+                <a:solidFill>
+                  <a:srgbClr val="000000"/>
+                </a:solidFill>
+                <a:latin typeface="Times New Roman"/>
+                <a:ea typeface="標楷體"/>
+                <a:ea typeface="標楷體"/>
+              </a:rPr>
+              <a:t>，距「真頂空」應有的 −1 有 4.5 個標準差。分析儀只有在排氣當下的一至二分鐘可信——全資料庫僅 35 筆，後續所有氣體計算只用這 35 筆。</a:t>
+            </a:r>
+          </a:p>
+        </p:txBody>
+      </p:sp>
     </p:spTree>
   </p:cSld>
   <p:clrMapOvr>
@@ -8815,7 +8788,7 @@
                 <a:ea typeface="標楷體"/>
                 <a:ea typeface="標楷體"/>
               </a:rPr>
-              <a:t>五、結果：34 / 35 次都偏向同一側</a:t>
+              <a:t>五、關鍵原理：進料比剛好等於反應吃掉的比例</a:t>
             </a:r>
           </a:p>
         </p:txBody>
@@ -8900,7 +8873,7 @@
                 <a:ea typeface="標楷體"/>
                 <a:ea typeface="標楷體"/>
               </a:rPr>
-              <a:t>紅色虛線 = 只有產甲烷反應時應有的位置</a:t>
+              <a:t>這讓一個不需要任何校準常數的檢定成為可能</a:t>
             </a:r>
           </a:p>
         </p:txBody>
@@ -8992,7 +8965,7 @@
       </p:sp>
       <p:pic>
         <p:nvPicPr>
-          <p:cNvPr id="7" name="Picture 6" descr="fig43_feed_ratio.png"/>
+          <p:cNvPr id="7" name="Picture 6" descr="deck0c_ratio.png"/>
           <p:cNvPicPr>
             <a:picLocks noChangeAspect="1"/>
           </p:cNvPicPr>
@@ -9006,375 +8979,14 @@
         </p:blipFill>
         <p:spPr>
           <a:xfrm>
-            <a:off x="1416599" y="1188000"/>
-            <a:ext cx="9360000" cy="3485064"/>
+            <a:off x="1326599" y="1260000"/>
+            <a:ext cx="9540000" cy="4840294"/>
           </a:xfrm>
           <a:prstGeom prst="rect">
             <a:avLst/>
           </a:prstGeom>
         </p:spPr>
       </p:pic>
-      <p:sp>
-        <p:nvSpPr>
-          <p:cNvPr id="8" name="TextBox 7"/>
-          <p:cNvSpPr txBox="1"/>
-          <p:nvPr/>
-        </p:nvSpPr>
-        <p:spPr>
-          <a:xfrm>
-            <a:off x="612000" y="4727064"/>
-            <a:ext cx="10969200" cy="251999"/>
-          </a:xfrm>
-          <a:prstGeom prst="rect">
-            <a:avLst/>
-          </a:prstGeom>
-          <a:noFill/>
-        </p:spPr>
-        <p:txBody>
-          <a:bodyPr wrap="square" anchor="t" lIns="0" rIns="0" tIns="0" bIns="0">
-            <a:spAutoFit/>
-          </a:bodyPr>
-          <a:lstStyle/>
-          <a:p>
-            <a:pPr algn="ctr">
-              <a:spcAft>
-                <a:spcPts val="600"/>
-              </a:spcAft>
-            </a:pPr>
-            <a:r>
-              <a:rPr sz="1150" b="1" i="0">
-                <a:solidFill>
-                  <a:srgbClr val="1F6FB5"/>
-                </a:solidFill>
-                <a:latin typeface="Times New Roman"/>
-                <a:ea typeface="標楷體"/>
-                <a:ea typeface="標楷體"/>
-              </a:rPr>
-              <a:t>圖 2.　</a:t>
-            </a:r>
-            <a:r>
-              <a:rPr sz="1150" b="0" i="0">
-                <a:solidFill>
-                  <a:srgbClr val="595959"/>
-                </a:solidFill>
-                <a:latin typeface="Times New Roman"/>
-                <a:ea typeface="標楷體"/>
-                <a:ea typeface="標楷體"/>
-              </a:rPr>
-              <a:t>(</a:t>
-            </a:r>
-            <a:r>
-              <a:rPr sz="1150" b="0" i="1">
-                <a:solidFill>
-                  <a:srgbClr val="595959"/>
-                </a:solidFill>
-                <a:latin typeface="Times New Roman"/>
-                <a:ea typeface="標楷體"/>
-                <a:ea typeface="標楷體"/>
-              </a:rPr>
-              <a:t>a</a:t>
-            </a:r>
-            <a:r>
-              <a:rPr sz="1150" b="0" i="0">
-                <a:solidFill>
-                  <a:srgbClr val="595959"/>
-                </a:solidFill>
-                <a:latin typeface="Times New Roman"/>
-                <a:ea typeface="標楷體"/>
-                <a:ea typeface="標楷體"/>
-              </a:rPr>
-              <a:t>) 分布　(</a:t>
-            </a:r>
-            <a:r>
-              <a:rPr sz="1150" b="0" i="1">
-                <a:solidFill>
-                  <a:srgbClr val="595959"/>
-                </a:solidFill>
-                <a:latin typeface="Times New Roman"/>
-                <a:ea typeface="標楷體"/>
-                <a:ea typeface="標楷體"/>
-              </a:rPr>
-              <a:t>b</a:t>
-            </a:r>
-            <a:r>
-              <a:rPr sz="1150" b="0" i="0">
-                <a:solidFill>
-                  <a:srgbClr val="595959"/>
-                </a:solidFill>
-                <a:latin typeface="Times New Roman"/>
-                <a:ea typeface="標楷體"/>
-                <a:ea typeface="標楷體"/>
-              </a:rPr>
-              <a:t>) 一整年的時序　(</a:t>
-            </a:r>
-            <a:r>
-              <a:rPr sz="1150" b="0" i="1">
-                <a:solidFill>
-                  <a:srgbClr val="595959"/>
-                </a:solidFill>
-                <a:latin typeface="Times New Roman"/>
-                <a:ea typeface="標楷體"/>
-                <a:ea typeface="標楷體"/>
-              </a:rPr>
-              <a:t>c</a:t>
-            </a:r>
-            <a:r>
-              <a:rPr sz="1150" b="0" i="0">
-                <a:solidFill>
-                  <a:srgbClr val="595959"/>
-                </a:solidFill>
-                <a:latin typeface="Times New Roman"/>
-                <a:ea typeface="標楷體"/>
-                <a:ea typeface="標楷體"/>
-              </a:rPr>
-              <a:t>) 二氧化碳剩餘量對氫氣剩餘量</a:t>
-            </a:r>
-          </a:p>
-        </p:txBody>
-      </p:sp>
-      <p:graphicFrame>
-        <p:nvGraphicFramePr>
-          <p:cNvPr id="9" name="Table 8"/>
-          <p:cNvGraphicFramePr>
-            <a:graphicFrameLocks noGrp="1"/>
-          </p:cNvGraphicFramePr>
-          <p:nvPr/>
-        </p:nvGraphicFramePr>
-        <p:xfrm>
-          <a:off x="2304000" y="5051064"/>
-          <a:ext cx="7595999" cy="709200"/>
-        </p:xfrm>
-        <a:graphic>
-          <a:graphicData uri="http://schemas.openxmlformats.org/drawingml/2006/table">
-            <a:tbl>
-              <a:tblPr>
-                <a:tableStyleId>{5C22544A-7EE6-4342-B048-85BDC9FD1C3A}</a:tableStyleId>
-              </a:tblPr>
-              <a:tblGrid>
-                <a:gridCol w="2232000"/>
-                <a:gridCol w="1655999"/>
-                <a:gridCol w="1944000"/>
-                <a:gridCol w="1764000"/>
-              </a:tblGrid>
-              <a:tr h="378000">
-                <a:tc>
-                  <a:txBody>
-                    <a:bodyPr/>
-                    <a:lstStyle/>
-                    <a:p>
-                      <a:pPr algn="ctr"/>
-                      <a:r>
-                        <a:rPr sz="1500" b="1" i="0">
-                          <a:solidFill>
-                            <a:srgbClr val="FFFFFF"/>
-                          </a:solidFill>
-                          <a:latin typeface="Times New Roman"/>
-                          <a:ea typeface="標楷體"/>
-                          <a:ea typeface="標楷體"/>
-                        </a:rPr>
-                        <a:t>二氧化碳 ÷ 氫氣（中位）</a:t>
-                      </a:r>
-                    </a:p>
-                  </a:txBody>
-                  <a:tcPr marL="72000" marR="72000" anchor="ctr">
-                    <a:solidFill>
-                      <a:srgbClr val="2E9BD6"/>
-                    </a:solidFill>
-                  </a:tcPr>
-                </a:tc>
-                <a:tc>
-                  <a:txBody>
-                    <a:bodyPr/>
-                    <a:lstStyle/>
-                    <a:p>
-                      <a:pPr algn="ctr"/>
-                      <a:r>
-                        <a:rPr sz="1500" b="1" i="0">
-                          <a:solidFill>
-                            <a:srgbClr val="FFFFFF"/>
-                          </a:solidFill>
-                          <a:latin typeface="Times New Roman"/>
-                          <a:ea typeface="標楷體"/>
-                          <a:ea typeface="標楷體"/>
-                        </a:rPr>
-                        <a:t>相對進料比</a:t>
-                      </a:r>
-                    </a:p>
-                  </a:txBody>
-                  <a:tcPr marL="72000" marR="72000" anchor="ctr">
-                    <a:solidFill>
-                      <a:srgbClr val="2E9BD6"/>
-                    </a:solidFill>
-                  </a:tcPr>
-                </a:tc>
-                <a:tc>
-                  <a:txBody>
-                    <a:bodyPr/>
-                    <a:lstStyle/>
-                    <a:p>
-                      <a:pPr algn="ctr"/>
-                      <a:r>
-                        <a:rPr sz="1500" b="1" i="0">
-                          <a:solidFill>
-                            <a:srgbClr val="FFFFFF"/>
-                          </a:solidFill>
-                          <a:latin typeface="Times New Roman"/>
-                          <a:ea typeface="標楷體"/>
-                          <a:ea typeface="標楷體"/>
-                        </a:rPr>
-                        <a:t>高於進料比</a:t>
-                      </a:r>
-                    </a:p>
-                  </a:txBody>
-                  <a:tcPr marL="72000" marR="72000" anchor="ctr">
-                    <a:solidFill>
-                      <a:srgbClr val="2E9BD6"/>
-                    </a:solidFill>
-                  </a:tcPr>
-                </a:tc>
-                <a:tc>
-                  <a:txBody>
-                    <a:bodyPr/>
-                    <a:lstStyle/>
-                    <a:p>
-                      <a:pPr algn="ctr"/>
-                      <a:r>
-                        <a:rPr sz="1500" b="1" i="0">
-                          <a:solidFill>
-                            <a:srgbClr val="FFFFFF"/>
-                          </a:solidFill>
-                          <a:latin typeface="Times New Roman"/>
-                          <a:ea typeface="標楷體"/>
-                          <a:ea typeface="標楷體"/>
-                        </a:rPr>
-                        <a:t>置換檢定</a:t>
-                      </a:r>
-                    </a:p>
-                  </a:txBody>
-                  <a:tcPr marL="72000" marR="72000" anchor="ctr">
-                    <a:solidFill>
-                      <a:srgbClr val="2E9BD6"/>
-                    </a:solidFill>
-                  </a:tcPr>
-                </a:tc>
-              </a:tr>
-              <a:tr h="331200">
-                <a:tc>
-                  <a:txBody>
-                    <a:bodyPr/>
-                    <a:lstStyle/>
-                    <a:p>
-                      <a:pPr algn="ctr"/>
-                      <a:r>
-                        <a:rPr sz="1500" b="1" i="0">
-                          <a:solidFill>
-                            <a:srgbClr val="FF0000"/>
-                          </a:solidFill>
-                          <a:latin typeface="Times New Roman"/>
-                          <a:ea typeface="標楷體"/>
-                          <a:ea typeface="標楷體"/>
-                        </a:rPr>
-                        <a:t>0.699</a:t>
-                      </a:r>
-                    </a:p>
-                  </a:txBody>
-                  <a:tcPr marL="72000" marR="72000" anchor="ctr">
-                    <a:solidFill>
-                      <a:srgbClr val="DBE9F6"/>
-                    </a:solidFill>
-                  </a:tcPr>
-                </a:tc>
-                <a:tc>
-                  <a:txBody>
-                    <a:bodyPr/>
-                    <a:lstStyle/>
-                    <a:p>
-                      <a:pPr algn="ctr"/>
-                      <a:r>
-                        <a:rPr sz="1500" b="1" i="0">
-                          <a:solidFill>
-                            <a:srgbClr val="FF0000"/>
-                          </a:solidFill>
-                          <a:latin typeface="Times New Roman"/>
-                          <a:ea typeface="標楷體"/>
-                          <a:ea typeface="標楷體"/>
-                        </a:rPr>
-                        <a:t>2.79 倍</a:t>
-                      </a:r>
-                    </a:p>
-                  </a:txBody>
-                  <a:tcPr marL="72000" marR="72000" anchor="ctr">
-                    <a:solidFill>
-                      <a:srgbClr val="DBE9F6"/>
-                    </a:solidFill>
-                  </a:tcPr>
-                </a:tc>
-                <a:tc>
-                  <a:txBody>
-                    <a:bodyPr/>
-                    <a:lstStyle/>
-                    <a:p>
-                      <a:pPr algn="ctr"/>
-                      <a:r>
-                        <a:rPr sz="1500" b="1" i="0">
-                          <a:solidFill>
-                            <a:srgbClr val="FF0000"/>
-                          </a:solidFill>
-                          <a:latin typeface="Times New Roman"/>
-                          <a:ea typeface="標楷體"/>
-                          <a:ea typeface="標楷體"/>
-                        </a:rPr>
-                        <a:t>34 / 35（97%）</a:t>
-                      </a:r>
-                    </a:p>
-                  </a:txBody>
-                  <a:tcPr marL="72000" marR="72000" anchor="ctr">
-                    <a:solidFill>
-                      <a:srgbClr val="DBE9F6"/>
-                    </a:solidFill>
-                  </a:tcPr>
-                </a:tc>
-                <a:tc>
-                  <a:txBody>
-                    <a:bodyPr/>
-                    <a:lstStyle/>
-                    <a:p>
-                      <a:pPr algn="ctr"/>
-                      <a:r>
-                        <a:rPr sz="1500" b="1" i="1">
-                          <a:solidFill>
-                            <a:srgbClr val="FF0000"/>
-                          </a:solidFill>
-                          <a:latin typeface="Times New Roman"/>
-                          <a:ea typeface="標楷體"/>
-                          <a:ea typeface="標楷體"/>
-                        </a:rPr>
-                        <a:t>p</a:t>
-                      </a:r>
-                      <a:r>
-                        <a:rPr sz="1500" b="1" i="0">
-                          <a:solidFill>
-                            <a:srgbClr val="FF0000"/>
-                          </a:solidFill>
-                          <a:latin typeface="Times New Roman"/>
-                          <a:ea typeface="標楷體"/>
-                          <a:ea typeface="標楷體"/>
-                        </a:rPr>
-                        <a:t> &lt; 0.0001</a:t>
-                      </a:r>
-                    </a:p>
-                  </a:txBody>
-                  <a:tcPr marL="72000" marR="72000" anchor="ctr">
-                    <a:solidFill>
-                      <a:srgbClr val="DBE9F6"/>
-                    </a:solidFill>
-                  </a:tcPr>
-                </a:tc>
-              </a:tr>
-            </a:tbl>
-          </a:graphicData>
-        </a:graphic>
-      </p:graphicFrame>
     </p:spTree>
   </p:cSld>
   <p:clrMapOvr>
@@ -9429,7 +9041,7 @@
                 <a:ea typeface="標楷體"/>
                 <a:ea typeface="標楷體"/>
               </a:rPr>
-              <a:t>六、這不是量測誤差造成的</a:t>
+              <a:t>六、結果：34 / 35 次都偏向同一側</a:t>
             </a:r>
           </a:p>
         </p:txBody>
@@ -9514,7 +9126,7 @@
                 <a:ea typeface="標楷體"/>
                 <a:ea typeface="標楷體"/>
               </a:rPr>
-              <a:t>以 2026-07-30 那次排氣為例</a:t>
+              <a:t>紅色虛線 = 只有產甲烷反應時應有的位置</a:t>
             </a:r>
           </a:p>
         </p:txBody>
@@ -9604,16 +9216,40 @@
           </a:p>
         </p:txBody>
       </p:sp>
-      <p:sp>
-        <p:nvSpPr>
-          <p:cNvPr id="7" name="TextBox 6"/>
+      <p:pic>
+        <p:nvPicPr>
+          <p:cNvPr id="7" name="Picture 6" descr="deck2_hydrogen.png"/>
+          <p:cNvPicPr>
+            <a:picLocks noChangeAspect="1"/>
+          </p:cNvPicPr>
+          <p:nvPr/>
+        </p:nvPicPr>
+        <p:blipFill>
+          <a:blip r:embed="rId2"/>
+          <a:stretch>
+            <a:fillRect/>
+          </a:stretch>
+        </p:blipFill>
+        <p:spPr>
+          <a:xfrm>
+            <a:off x="1596599" y="1188000"/>
+            <a:ext cx="9000000" cy="4613445"/>
+          </a:xfrm>
+          <a:prstGeom prst="rect">
+            <a:avLst/>
+          </a:prstGeom>
+        </p:spPr>
+      </p:pic>
+      <p:sp>
+        <p:nvSpPr>
+          <p:cNvPr id="8" name="TextBox 7"/>
           <p:cNvSpPr txBox="1"/>
           <p:nvPr/>
         </p:nvSpPr>
         <p:spPr>
           <a:xfrm>
-            <a:off x="576000" y="1440000"/>
-            <a:ext cx="11041200" cy="3960000"/>
+            <a:off x="576000" y="5891445"/>
+            <a:ext cx="11041200" cy="642554"/>
           </a:xfrm>
           <a:prstGeom prst="rect">
             <a:avLst/>
@@ -9626,212 +9262,13 @@
           </a:bodyPr>
           <a:lstStyle/>
           <a:p>
-            <a:pPr algn="l">
-              <a:spcAft>
-                <a:spcPts val="1400"/>
-              </a:spcAft>
-            </a:pPr>
-            <a:r>
-              <a:rPr sz="2000" b="1" i="0">
-                <a:solidFill>
-                  <a:srgbClr val="000000"/>
-                </a:solidFill>
-                <a:latin typeface="Times New Roman"/>
-                <a:ea typeface="標楷體"/>
-                <a:ea typeface="標楷體"/>
-              </a:rPr>
-              <a:t>量測到：二氧化碳 21.3%、甲烷 34.79%</a:t>
-            </a:r>
-          </a:p>
-          <a:p>
-            <a:pPr algn="l">
-              <a:spcAft>
-                <a:spcPts val="1400"/>
-              </a:spcAft>
-            </a:pPr>
-            <a:r>
-              <a:rPr sz="1800" b="0" i="0">
-                <a:solidFill>
-                  <a:srgbClr val="000000"/>
-                </a:solidFill>
-                <a:latin typeface="Times New Roman"/>
-                <a:ea typeface="標楷體"/>
-                <a:ea typeface="標楷體"/>
-              </a:rPr>
-              <a:t>若殘餘氣體真的維持 1:4，扣除甲烷與水蒸氣後，二氧化碳應該只有 </a:t>
-            </a:r>
-            <a:r>
-              <a:rPr sz="2000" b="1" i="0">
-                <a:solidFill>
-                  <a:srgbClr val="1F6FB5"/>
-                </a:solidFill>
-                <a:latin typeface="Times New Roman"/>
-                <a:ea typeface="標楷體"/>
-                <a:ea typeface="標楷體"/>
-              </a:rPr>
-              <a:t>12.6%</a:t>
-            </a:r>
-          </a:p>
-          <a:p>
-            <a:pPr algn="l">
-              <a:spcAft>
-                <a:spcPts val="1400"/>
-              </a:spcAft>
-            </a:pPr>
-            <a:r>
-              <a:rPr sz="1800" b="0" i="0">
-                <a:solidFill>
-                  <a:srgbClr val="000000"/>
-                </a:solidFill>
-                <a:latin typeface="Times New Roman"/>
-                <a:ea typeface="標楷體"/>
-                <a:ea typeface="標楷體"/>
-              </a:rPr>
-              <a:t>即使把甲烷讀數</a:t>
-            </a:r>
-            <a:r>
-              <a:rPr sz="2000" b="1" i="0">
-                <a:solidFill>
-                  <a:srgbClr val="FF0000"/>
-                </a:solidFill>
-                <a:latin typeface="Times New Roman"/>
-                <a:ea typeface="標楷體"/>
-                <a:ea typeface="標楷體"/>
-              </a:rPr>
-              <a:t>全部當成零</a:t>
-            </a:r>
-            <a:r>
-              <a:rPr sz="1800" b="0" i="0">
-                <a:solidFill>
-                  <a:srgbClr val="000000"/>
-                </a:solidFill>
-                <a:latin typeface="Times New Roman"/>
-                <a:ea typeface="標楷體"/>
-                <a:ea typeface="標楷體"/>
-              </a:rPr>
-              <a:t>（最極端的假設），氫氣上限也只有 78.7%，比值仍為 0.27</a:t>
-            </a:r>
-          </a:p>
-          <a:p>
-            <a:pPr algn="l">
-              <a:spcAft>
-                <a:spcPts val="1000"/>
-              </a:spcAft>
-            </a:pPr>
-          </a:p>
-          <a:p>
-            <a:pPr algn="l">
-              <a:spcAft>
-                <a:spcPts val="1600"/>
-              </a:spcAft>
-            </a:pPr>
-            <a:r>
-              <a:rPr sz="2200" b="1" i="0">
-                <a:solidFill>
-                  <a:srgbClr val="FF0000"/>
-                </a:solidFill>
-                <a:latin typeface="Times New Roman"/>
-                <a:ea typeface="標楷體"/>
-                <a:ea typeface="標楷體"/>
-              </a:rPr>
-              <a:t>也就是說——二氧化碳的實測值本身，就高到與 1:4 不相容。</a:t>
-            </a:r>
-          </a:p>
-          <a:p>
-            <a:pPr algn="l">
+            <a:pPr algn="ctr">
               <a:spcAft>
                 <a:spcPts val="600"/>
               </a:spcAft>
             </a:pPr>
             <a:r>
-              <a:rPr sz="1600" b="0" i="0">
-                <a:solidFill>
-                  <a:srgbClr val="595959"/>
-                </a:solidFill>
-                <a:latin typeface="Times New Roman"/>
-                <a:ea typeface="標楷體"/>
-                <a:ea typeface="標楷體"/>
-              </a:rPr>
-              <a:t>量級換算（保守估計）：要讓比值漂移到實測中位數，需要額外移除約 2.57 莫耳氫氣，相當於進料氫氣的 64%。</a:t>
-            </a:r>
-          </a:p>
-        </p:txBody>
-      </p:sp>
-      <p:sp>
-        <p:nvSpPr>
-          <p:cNvPr id="8" name="Rectangle 7"/>
-          <p:cNvSpPr/>
-          <p:nvPr/>
-        </p:nvSpPr>
-        <p:spPr>
-          <a:xfrm>
-            <a:off x="432000" y="5562000"/>
-            <a:ext cx="11329200" cy="864000"/>
-          </a:xfrm>
-          <a:prstGeom prst="rect">
-            <a:avLst/>
-          </a:prstGeom>
-          <a:solidFill>
-            <a:srgbClr val="F2F7FC"/>
-          </a:solidFill>
-          <a:ln w="9525">
-            <a:solidFill>
-              <a:srgbClr val="2AB6D8"/>
-            </a:solidFill>
-          </a:ln>
-          <a:effectLst/>
-        </p:spPr>
-        <p:style>
-          <a:lnRef idx="1">
-            <a:schemeClr val="accent1"/>
-          </a:lnRef>
-          <a:fillRef idx="3">
-            <a:schemeClr val="accent1"/>
-          </a:fillRef>
-          <a:effectRef idx="2">
-            <a:schemeClr val="accent1"/>
-          </a:effectRef>
-          <a:fontRef idx="minor">
-            <a:schemeClr val="lt1"/>
-          </a:fontRef>
-        </p:style>
-        <p:txBody>
-          <a:bodyPr rtlCol="0" anchor="ctr"/>
-          <a:lstStyle/>
-          <a:p>
-            <a:pPr algn="ctr"/>
-          </a:p>
-        </p:txBody>
-      </p:sp>
-      <p:sp>
-        <p:nvSpPr>
-          <p:cNvPr id="9" name="TextBox 8"/>
-          <p:cNvSpPr txBox="1"/>
-          <p:nvPr/>
-        </p:nvSpPr>
-        <p:spPr>
-          <a:xfrm>
-            <a:off x="612000" y="5670000"/>
-            <a:ext cx="10969200" cy="648000"/>
-          </a:xfrm>
-          <a:prstGeom prst="rect">
-            <a:avLst/>
-          </a:prstGeom>
-          <a:noFill/>
-        </p:spPr>
-        <p:txBody>
-          <a:bodyPr wrap="square" anchor="ctr" lIns="0" rIns="0" tIns="0" bIns="0">
-            <a:spAutoFit/>
-          </a:bodyPr>
-          <a:lstStyle/>
-          <a:p>
-            <a:pPr algn="l">
-              <a:spcAft>
-                <a:spcPts val="600"/>
-              </a:spcAft>
-            </a:pPr>
-            <a:r>
-              <a:rPr sz="1300" b="0" i="0">
+              <a:rPr sz="1900" b="1" i="0">
                 <a:solidFill>
                   <a:srgbClr val="FF0000"/>
                 </a:solidFill>
@@ -9839,7 +9276,29 @@
                 <a:ea typeface="標楷體"/>
                 <a:ea typeface="標楷體"/>
               </a:rPr>
-              <a:t>此換算為單次通過的保守估計，實際為連續補氣，數值僅示意量級。</a:t>
+              <a:t>34 / 35 次高於進料比　｜　中位 0.699 = 進料比的 2.79 倍　｜　置換檢定 </a:t>
+            </a:r>
+            <a:r>
+              <a:rPr sz="1900" b="1" i="1">
+                <a:solidFill>
+                  <a:srgbClr val="FF0000"/>
+                </a:solidFill>
+                <a:latin typeface="Times New Roman"/>
+                <a:ea typeface="標楷體"/>
+                <a:ea typeface="標楷體"/>
+              </a:rPr>
+              <a:t>p</a:t>
+            </a:r>
+            <a:r>
+              <a:rPr sz="1900" b="1" i="0">
+                <a:solidFill>
+                  <a:srgbClr val="FF0000"/>
+                </a:solidFill>
+                <a:latin typeface="Times New Roman"/>
+                <a:ea typeface="標楷體"/>
+                <a:ea typeface="標楷體"/>
+              </a:rPr>
+              <a:t> &lt; 0.0001</a:t>
             </a:r>
           </a:p>
         </p:txBody>
@@ -9898,7 +9357,7 @@
                 <a:ea typeface="標楷體"/>
                 <a:ea typeface="標楷體"/>
               </a:rPr>
-              <a:t>七、三個矛盾，同一個答案</a:t>
+              <a:t>七、這不是量測誤差造成的</a:t>
             </a:r>
           </a:p>
         </p:txBody>
@@ -9949,7 +9408,48 @@
       </p:sp>
       <p:sp>
         <p:nvSpPr>
-          <p:cNvPr id="4" name="Rectangle 3"/>
+          <p:cNvPr id="4" name="TextBox 3"/>
+          <p:cNvSpPr txBox="1"/>
+          <p:nvPr/>
+        </p:nvSpPr>
+        <p:spPr>
+          <a:xfrm>
+            <a:off x="503999" y="842400"/>
+            <a:ext cx="11185201" cy="251999"/>
+          </a:xfrm>
+          <a:prstGeom prst="rect">
+            <a:avLst/>
+          </a:prstGeom>
+          <a:noFill/>
+        </p:spPr>
+        <p:txBody>
+          <a:bodyPr wrap="square" anchor="t" lIns="0" rIns="0" tIns="0" bIns="0">
+            <a:spAutoFit/>
+          </a:bodyPr>
+          <a:lstStyle/>
+          <a:p>
+            <a:pPr algn="ctr">
+              <a:spcAft>
+                <a:spcPts val="600"/>
+              </a:spcAft>
+            </a:pPr>
+            <a:r>
+              <a:rPr sz="1300" b="0" i="0">
+                <a:solidFill>
+                  <a:srgbClr val="595959"/>
+                </a:solidFill>
+                <a:latin typeface="Times New Roman"/>
+                <a:ea typeface="標楷體"/>
+                <a:ea typeface="標楷體"/>
+              </a:rPr>
+              <a:t>以 2026-07-30 那次排氣為例</a:t>
+            </a:r>
+          </a:p>
+        </p:txBody>
+      </p:sp>
+      <p:sp>
+        <p:nvSpPr>
+          <p:cNvPr id="5" name="Rectangle 4"/>
           <p:cNvSpPr/>
           <p:nvPr/>
         </p:nvSpPr>
@@ -9993,7 +9493,7 @@
       </p:sp>
       <p:sp>
         <p:nvSpPr>
-          <p:cNvPr id="5" name="TextBox 4"/>
+          <p:cNvPr id="6" name="TextBox 5"/>
           <p:cNvSpPr txBox="1"/>
           <p:nvPr/>
         </p:nvSpPr>
@@ -10028,6 +9528,434 @@
                 <a:ea typeface="標楷體"/>
               </a:rPr>
               <a:t>9</a:t>
+            </a:r>
+          </a:p>
+        </p:txBody>
+      </p:sp>
+      <p:sp>
+        <p:nvSpPr>
+          <p:cNvPr id="7" name="TextBox 6"/>
+          <p:cNvSpPr txBox="1"/>
+          <p:nvPr/>
+        </p:nvSpPr>
+        <p:spPr>
+          <a:xfrm>
+            <a:off x="576000" y="1440000"/>
+            <a:ext cx="11041200" cy="3960000"/>
+          </a:xfrm>
+          <a:prstGeom prst="rect">
+            <a:avLst/>
+          </a:prstGeom>
+          <a:noFill/>
+        </p:spPr>
+        <p:txBody>
+          <a:bodyPr wrap="square" anchor="t" lIns="0" rIns="0" tIns="0" bIns="0">
+            <a:spAutoFit/>
+          </a:bodyPr>
+          <a:lstStyle/>
+          <a:p>
+            <a:pPr algn="l">
+              <a:spcAft>
+                <a:spcPts val="1400"/>
+              </a:spcAft>
+            </a:pPr>
+            <a:r>
+              <a:rPr sz="2000" b="1" i="0">
+                <a:solidFill>
+                  <a:srgbClr val="000000"/>
+                </a:solidFill>
+                <a:latin typeface="Times New Roman"/>
+                <a:ea typeface="標楷體"/>
+                <a:ea typeface="標楷體"/>
+              </a:rPr>
+              <a:t>量測到：二氧化碳 21.3%、甲烷 34.79%</a:t>
+            </a:r>
+          </a:p>
+          <a:p>
+            <a:pPr algn="l">
+              <a:spcAft>
+                <a:spcPts val="1400"/>
+              </a:spcAft>
+            </a:pPr>
+            <a:r>
+              <a:rPr sz="1800" b="0" i="0">
+                <a:solidFill>
+                  <a:srgbClr val="000000"/>
+                </a:solidFill>
+                <a:latin typeface="Times New Roman"/>
+                <a:ea typeface="標楷體"/>
+                <a:ea typeface="標楷體"/>
+              </a:rPr>
+              <a:t>若殘餘氣體真的維持 1:4，扣除甲烷與水蒸氣後，二氧化碳應該只有 </a:t>
+            </a:r>
+            <a:r>
+              <a:rPr sz="2000" b="1" i="0">
+                <a:solidFill>
+                  <a:srgbClr val="1F6FB5"/>
+                </a:solidFill>
+                <a:latin typeface="Times New Roman"/>
+                <a:ea typeface="標楷體"/>
+                <a:ea typeface="標楷體"/>
+              </a:rPr>
+              <a:t>12.6%</a:t>
+            </a:r>
+          </a:p>
+          <a:p>
+            <a:pPr algn="l">
+              <a:spcAft>
+                <a:spcPts val="1400"/>
+              </a:spcAft>
+            </a:pPr>
+            <a:r>
+              <a:rPr sz="1800" b="0" i="0">
+                <a:solidFill>
+                  <a:srgbClr val="000000"/>
+                </a:solidFill>
+                <a:latin typeface="Times New Roman"/>
+                <a:ea typeface="標楷體"/>
+                <a:ea typeface="標楷體"/>
+              </a:rPr>
+              <a:t>即使把甲烷讀數</a:t>
+            </a:r>
+            <a:r>
+              <a:rPr sz="2000" b="1" i="0">
+                <a:solidFill>
+                  <a:srgbClr val="FF0000"/>
+                </a:solidFill>
+                <a:latin typeface="Times New Roman"/>
+                <a:ea typeface="標楷體"/>
+                <a:ea typeface="標楷體"/>
+              </a:rPr>
+              <a:t>全部當成零</a:t>
+            </a:r>
+            <a:r>
+              <a:rPr sz="1800" b="0" i="0">
+                <a:solidFill>
+                  <a:srgbClr val="000000"/>
+                </a:solidFill>
+                <a:latin typeface="Times New Roman"/>
+                <a:ea typeface="標楷體"/>
+                <a:ea typeface="標楷體"/>
+              </a:rPr>
+              <a:t>（最極端的假設），氫氣上限也只有 78.7%，比值仍為 0.27</a:t>
+            </a:r>
+          </a:p>
+          <a:p>
+            <a:pPr algn="l">
+              <a:spcAft>
+                <a:spcPts val="1000"/>
+              </a:spcAft>
+            </a:pPr>
+          </a:p>
+          <a:p>
+            <a:pPr algn="l">
+              <a:spcAft>
+                <a:spcPts val="1600"/>
+              </a:spcAft>
+            </a:pPr>
+            <a:r>
+              <a:rPr sz="2200" b="1" i="0">
+                <a:solidFill>
+                  <a:srgbClr val="FF0000"/>
+                </a:solidFill>
+                <a:latin typeface="Times New Roman"/>
+                <a:ea typeface="標楷體"/>
+                <a:ea typeface="標楷體"/>
+              </a:rPr>
+              <a:t>也就是說——二氧化碳的實測值本身，就高到與 1:4 不相容。</a:t>
+            </a:r>
+          </a:p>
+          <a:p>
+            <a:pPr algn="l">
+              <a:spcAft>
+                <a:spcPts val="600"/>
+              </a:spcAft>
+            </a:pPr>
+            <a:r>
+              <a:rPr sz="1600" b="0" i="0">
+                <a:solidFill>
+                  <a:srgbClr val="595959"/>
+                </a:solidFill>
+                <a:latin typeface="Times New Roman"/>
+                <a:ea typeface="標楷體"/>
+                <a:ea typeface="標楷體"/>
+              </a:rPr>
+              <a:t>量級換算（保守估計）：要讓比值漂移到實測中位數，需要額外移除約 2.57 莫耳氫氣，相當於進料氫氣的 64%。</a:t>
+            </a:r>
+          </a:p>
+        </p:txBody>
+      </p:sp>
+      <p:sp>
+        <p:nvSpPr>
+          <p:cNvPr id="8" name="Rectangle 7"/>
+          <p:cNvSpPr/>
+          <p:nvPr/>
+        </p:nvSpPr>
+        <p:spPr>
+          <a:xfrm>
+            <a:off x="432000" y="5562000"/>
+            <a:ext cx="11329200" cy="864000"/>
+          </a:xfrm>
+          <a:prstGeom prst="rect">
+            <a:avLst/>
+          </a:prstGeom>
+          <a:solidFill>
+            <a:srgbClr val="F2F7FC"/>
+          </a:solidFill>
+          <a:ln w="9525">
+            <a:solidFill>
+              <a:srgbClr val="2AB6D8"/>
+            </a:solidFill>
+          </a:ln>
+          <a:effectLst/>
+        </p:spPr>
+        <p:style>
+          <a:lnRef idx="1">
+            <a:schemeClr val="accent1"/>
+          </a:lnRef>
+          <a:fillRef idx="3">
+            <a:schemeClr val="accent1"/>
+          </a:fillRef>
+          <a:effectRef idx="2">
+            <a:schemeClr val="accent1"/>
+          </a:effectRef>
+          <a:fontRef idx="minor">
+            <a:schemeClr val="lt1"/>
+          </a:fontRef>
+        </p:style>
+        <p:txBody>
+          <a:bodyPr rtlCol="0" anchor="ctr"/>
+          <a:lstStyle/>
+          <a:p>
+            <a:pPr algn="ctr"/>
+          </a:p>
+        </p:txBody>
+      </p:sp>
+      <p:sp>
+        <p:nvSpPr>
+          <p:cNvPr id="9" name="TextBox 8"/>
+          <p:cNvSpPr txBox="1"/>
+          <p:nvPr/>
+        </p:nvSpPr>
+        <p:spPr>
+          <a:xfrm>
+            <a:off x="612000" y="5670000"/>
+            <a:ext cx="10969200" cy="648000"/>
+          </a:xfrm>
+          <a:prstGeom prst="rect">
+            <a:avLst/>
+          </a:prstGeom>
+          <a:noFill/>
+        </p:spPr>
+        <p:txBody>
+          <a:bodyPr wrap="square" anchor="ctr" lIns="0" rIns="0" tIns="0" bIns="0">
+            <a:spAutoFit/>
+          </a:bodyPr>
+          <a:lstStyle/>
+          <a:p>
+            <a:pPr algn="l">
+              <a:spcAft>
+                <a:spcPts val="600"/>
+              </a:spcAft>
+            </a:pPr>
+            <a:r>
+              <a:rPr sz="1300" b="0" i="0">
+                <a:solidFill>
+                  <a:srgbClr val="FF0000"/>
+                </a:solidFill>
+                <a:latin typeface="Times New Roman"/>
+                <a:ea typeface="標楷體"/>
+                <a:ea typeface="標楷體"/>
+              </a:rPr>
+              <a:t>此換算為單次通過的保守估計，實際為連續補氣，數值僅示意量級。</a:t>
+            </a:r>
+          </a:p>
+        </p:txBody>
+      </p:sp>
+    </p:spTree>
+  </p:cSld>
+  <p:clrMapOvr>
+    <a:masterClrMapping/>
+  </p:clrMapOvr>
+</p:sld>
+</file>
+
+<file path=ppt/slides/slide9.xml><?xml version="1.0" encoding="utf-8"?>
+<p:sld xmlns:a="http://schemas.openxmlformats.org/drawingml/2006/main" xmlns:p="http://schemas.openxmlformats.org/presentationml/2006/main" xmlns:r="http://schemas.openxmlformats.org/officeDocument/2006/relationships">
+  <p:cSld>
+    <p:spTree>
+      <p:nvGrpSpPr>
+        <p:cNvPr id="1" name=""/>
+        <p:cNvGrpSpPr/>
+        <p:nvPr/>
+      </p:nvGrpSpPr>
+      <p:grpSpPr/>
+      <p:sp>
+        <p:nvSpPr>
+          <p:cNvPr id="2" name="TextBox 1"/>
+          <p:cNvSpPr txBox="1"/>
+          <p:nvPr/>
+        </p:nvSpPr>
+        <p:spPr>
+          <a:xfrm>
+            <a:off x="432000" y="180000"/>
+            <a:ext cx="11329200" cy="540000"/>
+          </a:xfrm>
+          <a:prstGeom prst="rect">
+            <a:avLst/>
+          </a:prstGeom>
+          <a:noFill/>
+        </p:spPr>
+        <p:txBody>
+          <a:bodyPr wrap="square" anchor="t" lIns="0" rIns="0" tIns="0" bIns="0">
+            <a:spAutoFit/>
+          </a:bodyPr>
+          <a:lstStyle/>
+          <a:p>
+            <a:pPr algn="ctr">
+              <a:spcAft>
+                <a:spcPts val="0"/>
+              </a:spcAft>
+            </a:pPr>
+            <a:r>
+              <a:rPr sz="2800" b="1" i="0">
+                <a:solidFill>
+                  <a:srgbClr val="000000"/>
+                </a:solidFill>
+                <a:latin typeface="Times New Roman"/>
+                <a:ea typeface="標楷體"/>
+                <a:ea typeface="標楷體"/>
+              </a:rPr>
+              <a:t>八、三個矛盾，同一個答案</a:t>
+            </a:r>
+          </a:p>
+        </p:txBody>
+      </p:sp>
+      <p:sp>
+        <p:nvSpPr>
+          <p:cNvPr id="3" name="Rectangle 2"/>
+          <p:cNvSpPr/>
+          <p:nvPr/>
+        </p:nvSpPr>
+        <p:spPr>
+          <a:xfrm>
+            <a:off x="216000" y="763200"/>
+            <a:ext cx="11761200" cy="18000"/>
+          </a:xfrm>
+          <a:prstGeom prst="rect">
+            <a:avLst/>
+          </a:prstGeom>
+          <a:solidFill>
+            <a:srgbClr val="2AB6D8"/>
+          </a:solidFill>
+          <a:ln>
+            <a:noFill/>
+          </a:ln>
+          <a:effectLst/>
+        </p:spPr>
+        <p:style>
+          <a:lnRef idx="1">
+            <a:schemeClr val="accent1"/>
+          </a:lnRef>
+          <a:fillRef idx="3">
+            <a:schemeClr val="accent1"/>
+          </a:fillRef>
+          <a:effectRef idx="2">
+            <a:schemeClr val="accent1"/>
+          </a:effectRef>
+          <a:fontRef idx="minor">
+            <a:schemeClr val="lt1"/>
+          </a:fontRef>
+        </p:style>
+        <p:txBody>
+          <a:bodyPr rtlCol="0" anchor="ctr"/>
+          <a:lstStyle/>
+          <a:p>
+            <a:pPr algn="ctr"/>
+          </a:p>
+        </p:txBody>
+      </p:sp>
+      <p:sp>
+        <p:nvSpPr>
+          <p:cNvPr id="4" name="Rectangle 3"/>
+          <p:cNvSpPr/>
+          <p:nvPr/>
+        </p:nvSpPr>
+        <p:spPr>
+          <a:xfrm>
+            <a:off x="0" y="6552000"/>
+            <a:ext cx="12193200" cy="306000"/>
+          </a:xfrm>
+          <a:prstGeom prst="rect">
+            <a:avLst/>
+          </a:prstGeom>
+          <a:solidFill>
+            <a:srgbClr val="2E8BC0"/>
+          </a:solidFill>
+          <a:ln>
+            <a:noFill/>
+          </a:ln>
+          <a:effectLst/>
+        </p:spPr>
+        <p:style>
+          <a:lnRef idx="1">
+            <a:schemeClr val="accent1"/>
+          </a:lnRef>
+          <a:fillRef idx="3">
+            <a:schemeClr val="accent1"/>
+          </a:fillRef>
+          <a:effectRef idx="2">
+            <a:schemeClr val="accent1"/>
+          </a:effectRef>
+          <a:fontRef idx="minor">
+            <a:schemeClr val="lt1"/>
+          </a:fontRef>
+        </p:style>
+        <p:txBody>
+          <a:bodyPr rtlCol="0" anchor="ctr"/>
+          <a:lstStyle/>
+          <a:p>
+            <a:pPr algn="ctr"/>
+          </a:p>
+        </p:txBody>
+      </p:sp>
+      <p:sp>
+        <p:nvSpPr>
+          <p:cNvPr id="5" name="TextBox 4"/>
+          <p:cNvSpPr txBox="1"/>
+          <p:nvPr/>
+        </p:nvSpPr>
+        <p:spPr>
+          <a:xfrm>
+            <a:off x="11329200" y="6577200"/>
+            <a:ext cx="576000" cy="216000"/>
+          </a:xfrm>
+          <a:prstGeom prst="rect">
+            <a:avLst/>
+          </a:prstGeom>
+          <a:noFill/>
+        </p:spPr>
+        <p:txBody>
+          <a:bodyPr wrap="square" anchor="t" lIns="0" rIns="0" tIns="0" bIns="0">
+            <a:spAutoFit/>
+          </a:bodyPr>
+          <a:lstStyle/>
+          <a:p>
+            <a:pPr algn="r">
+              <a:spcAft>
+                <a:spcPts val="600"/>
+              </a:spcAft>
+            </a:pPr>
+            <a:r>
+              <a:rPr sz="1100" b="0" i="0">
+                <a:solidFill>
+                  <a:srgbClr val="FFFFFF"/>
+                </a:solidFill>
+                <a:latin typeface="Times New Roman"/>
+                <a:ea typeface="標楷體"/>
+                <a:ea typeface="標楷體"/>
+              </a:rPr>
+              <a:t>10</a:t>
             </a:r>
           </a:p>
         </p:txBody>
@@ -10332,412 +10260,6 @@
                 <a:ea typeface="標楷體"/>
               </a:rPr>
               <a:t>但——以壓降速率作為產甲烷速率的代理量，會嚴重高估。</a:t>
-            </a:r>
-          </a:p>
-        </p:txBody>
-      </p:sp>
-    </p:spTree>
-  </p:cSld>
-  <p:clrMapOvr>
-    <a:masterClrMapping/>
-  </p:clrMapOvr>
-</p:sld>
-</file>
-
-<file path=ppt/slides/slide9.xml><?xml version="1.0" encoding="utf-8"?>
-<p:sld xmlns:a="http://schemas.openxmlformats.org/drawingml/2006/main" xmlns:p="http://schemas.openxmlformats.org/presentationml/2006/main" xmlns:r="http://schemas.openxmlformats.org/officeDocument/2006/relationships">
-  <p:cSld>
-    <p:spTree>
-      <p:nvGrpSpPr>
-        <p:cNvPr id="1" name=""/>
-        <p:cNvGrpSpPr/>
-        <p:nvPr/>
-      </p:nvGrpSpPr>
-      <p:grpSpPr/>
-      <p:sp>
-        <p:nvSpPr>
-          <p:cNvPr id="2" name="TextBox 1"/>
-          <p:cNvSpPr txBox="1"/>
-          <p:nvPr/>
-        </p:nvSpPr>
-        <p:spPr>
-          <a:xfrm>
-            <a:off x="432000" y="180000"/>
-            <a:ext cx="11329200" cy="540000"/>
-          </a:xfrm>
-          <a:prstGeom prst="rect">
-            <a:avLst/>
-          </a:prstGeom>
-          <a:noFill/>
-        </p:spPr>
-        <p:txBody>
-          <a:bodyPr wrap="square" anchor="t" lIns="0" rIns="0" tIns="0" bIns="0">
-            <a:spAutoFit/>
-          </a:bodyPr>
-          <a:lstStyle/>
-          <a:p>
-            <a:pPr algn="ctr">
-              <a:spcAft>
-                <a:spcPts val="0"/>
-              </a:spcAft>
-            </a:pPr>
-            <a:r>
-              <a:rPr sz="2800" b="1" i="0">
-                <a:solidFill>
-                  <a:srgbClr val="000000"/>
-                </a:solidFill>
-                <a:latin typeface="Times New Roman"/>
-                <a:ea typeface="標楷體"/>
-                <a:ea typeface="標楷體"/>
-              </a:rPr>
-              <a:t>八、佐證一：切斷碳源，壓降照舊</a:t>
-            </a:r>
-          </a:p>
-        </p:txBody>
-      </p:sp>
-      <p:sp>
-        <p:nvSpPr>
-          <p:cNvPr id="3" name="Rectangle 2"/>
-          <p:cNvSpPr/>
-          <p:nvPr/>
-        </p:nvSpPr>
-        <p:spPr>
-          <a:xfrm>
-            <a:off x="216000" y="763200"/>
-            <a:ext cx="11761200" cy="18000"/>
-          </a:xfrm>
-          <a:prstGeom prst="rect">
-            <a:avLst/>
-          </a:prstGeom>
-          <a:solidFill>
-            <a:srgbClr val="2AB6D8"/>
-          </a:solidFill>
-          <a:ln>
-            <a:noFill/>
-          </a:ln>
-          <a:effectLst/>
-        </p:spPr>
-        <p:style>
-          <a:lnRef idx="1">
-            <a:schemeClr val="accent1"/>
-          </a:lnRef>
-          <a:fillRef idx="3">
-            <a:schemeClr val="accent1"/>
-          </a:fillRef>
-          <a:effectRef idx="2">
-            <a:schemeClr val="accent1"/>
-          </a:effectRef>
-          <a:fontRef idx="minor">
-            <a:schemeClr val="lt1"/>
-          </a:fontRef>
-        </p:style>
-        <p:txBody>
-          <a:bodyPr rtlCol="0" anchor="ctr"/>
-          <a:lstStyle/>
-          <a:p>
-            <a:pPr algn="ctr"/>
-          </a:p>
-        </p:txBody>
-      </p:sp>
-      <p:sp>
-        <p:nvSpPr>
-          <p:cNvPr id="4" name="TextBox 3"/>
-          <p:cNvSpPr txBox="1"/>
-          <p:nvPr/>
-        </p:nvSpPr>
-        <p:spPr>
-          <a:xfrm>
-            <a:off x="503999" y="842400"/>
-            <a:ext cx="11185201" cy="251999"/>
-          </a:xfrm>
-          <a:prstGeom prst="rect">
-            <a:avLst/>
-          </a:prstGeom>
-          <a:noFill/>
-        </p:spPr>
-        <p:txBody>
-          <a:bodyPr wrap="square" anchor="t" lIns="0" rIns="0" tIns="0" bIns="0">
-            <a:spAutoFit/>
-          </a:bodyPr>
-          <a:lstStyle/>
-          <a:p>
-            <a:pPr algn="ctr">
-              <a:spcAft>
-                <a:spcPts val="600"/>
-              </a:spcAft>
-            </a:pPr>
-            <a:r>
-              <a:rPr sz="1300" b="0" i="0">
-                <a:solidFill>
-                  <a:srgbClr val="595959"/>
-                </a:solidFill>
-                <a:latin typeface="Times New Roman"/>
-                <a:ea typeface="標楷體"/>
-                <a:ea typeface="標楷體"/>
-              </a:rPr>
-              <a:t>自動化批次 2026-08-11 ~ 08-31</a:t>
-            </a:r>
-          </a:p>
-        </p:txBody>
-      </p:sp>
-      <p:sp>
-        <p:nvSpPr>
-          <p:cNvPr id="5" name="Rectangle 4"/>
-          <p:cNvSpPr/>
-          <p:nvPr/>
-        </p:nvSpPr>
-        <p:spPr>
-          <a:xfrm>
-            <a:off x="0" y="6552000"/>
-            <a:ext cx="12193200" cy="306000"/>
-          </a:xfrm>
-          <a:prstGeom prst="rect">
-            <a:avLst/>
-          </a:prstGeom>
-          <a:solidFill>
-            <a:srgbClr val="2E8BC0"/>
-          </a:solidFill>
-          <a:ln>
-            <a:noFill/>
-          </a:ln>
-          <a:effectLst/>
-        </p:spPr>
-        <p:style>
-          <a:lnRef idx="1">
-            <a:schemeClr val="accent1"/>
-          </a:lnRef>
-          <a:fillRef idx="3">
-            <a:schemeClr val="accent1"/>
-          </a:fillRef>
-          <a:effectRef idx="2">
-            <a:schemeClr val="accent1"/>
-          </a:effectRef>
-          <a:fontRef idx="minor">
-            <a:schemeClr val="lt1"/>
-          </a:fontRef>
-        </p:style>
-        <p:txBody>
-          <a:bodyPr rtlCol="0" anchor="ctr"/>
-          <a:lstStyle/>
-          <a:p>
-            <a:pPr algn="ctr"/>
-          </a:p>
-        </p:txBody>
-      </p:sp>
-      <p:sp>
-        <p:nvSpPr>
-          <p:cNvPr id="6" name="TextBox 5"/>
-          <p:cNvSpPr txBox="1"/>
-          <p:nvPr/>
-        </p:nvSpPr>
-        <p:spPr>
-          <a:xfrm>
-            <a:off x="11329200" y="6577200"/>
-            <a:ext cx="576000" cy="216000"/>
-          </a:xfrm>
-          <a:prstGeom prst="rect">
-            <a:avLst/>
-          </a:prstGeom>
-          <a:noFill/>
-        </p:spPr>
-        <p:txBody>
-          <a:bodyPr wrap="square" anchor="t" lIns="0" rIns="0" tIns="0" bIns="0">
-            <a:spAutoFit/>
-          </a:bodyPr>
-          <a:lstStyle/>
-          <a:p>
-            <a:pPr algn="r">
-              <a:spcAft>
-                <a:spcPts val="600"/>
-              </a:spcAft>
-            </a:pPr>
-            <a:r>
-              <a:rPr sz="1100" b="0" i="0">
-                <a:solidFill>
-                  <a:srgbClr val="FFFFFF"/>
-                </a:solidFill>
-                <a:latin typeface="Times New Roman"/>
-                <a:ea typeface="標楷體"/>
-                <a:ea typeface="標楷體"/>
-              </a:rPr>
-              <a:t>10</a:t>
-            </a:r>
-          </a:p>
-        </p:txBody>
-      </p:sp>
-      <p:pic>
-        <p:nvPicPr>
-          <p:cNvPr id="7" name="Picture 6" descr="fig37_co2_story.png"/>
-          <p:cNvPicPr>
-            <a:picLocks noChangeAspect="1"/>
-          </p:cNvPicPr>
-          <p:nvPr/>
-        </p:nvPicPr>
-        <p:blipFill>
-          <a:blip r:embed="rId2"/>
-          <a:stretch>
-            <a:fillRect/>
-          </a:stretch>
-        </p:blipFill>
-        <p:spPr>
-          <a:xfrm>
-            <a:off x="576000" y="1260000"/>
-            <a:ext cx="5629321" cy="4536000"/>
-          </a:xfrm>
-          <a:prstGeom prst="rect">
-            <a:avLst/>
-          </a:prstGeom>
-        </p:spPr>
-      </p:pic>
-      <p:sp>
-        <p:nvSpPr>
-          <p:cNvPr id="8" name="TextBox 7"/>
-          <p:cNvSpPr txBox="1"/>
-          <p:nvPr/>
-        </p:nvSpPr>
-        <p:spPr>
-          <a:xfrm>
-            <a:off x="6696000" y="1440000"/>
-            <a:ext cx="5040000" cy="4320000"/>
-          </a:xfrm>
-          <a:prstGeom prst="rect">
-            <a:avLst/>
-          </a:prstGeom>
-          <a:noFill/>
-        </p:spPr>
-        <p:txBody>
-          <a:bodyPr wrap="square" anchor="t" lIns="0" rIns="0" tIns="0" bIns="0">
-            <a:spAutoFit/>
-          </a:bodyPr>
-          <a:lstStyle/>
-          <a:p>
-            <a:pPr algn="l">
-              <a:spcAft>
-                <a:spcPts val="1200"/>
-              </a:spcAft>
-            </a:pPr>
-            <a:r>
-              <a:rPr sz="1800" b="1" i="0">
-                <a:solidFill>
-                  <a:srgbClr val="000000"/>
-                </a:solidFill>
-                <a:latin typeface="Times New Roman"/>
-                <a:ea typeface="標楷體"/>
-                <a:ea typeface="標楷體"/>
-              </a:rPr>
-              <a:t>碳源不存在，產甲烷必然停止。</a:t>
-            </a:r>
-          </a:p>
-          <a:p>
-            <a:pPr algn="l">
-              <a:spcAft>
-                <a:spcPts val="600"/>
-              </a:spcAft>
-            </a:pPr>
-            <a:r>
-              <a:rPr sz="1700" b="0" i="0">
-                <a:solidFill>
-                  <a:srgbClr val="000000"/>
-                </a:solidFill>
-                <a:latin typeface="Times New Roman"/>
-                <a:ea typeface="標楷體"/>
-                <a:ea typeface="標楷體"/>
-              </a:rPr>
-              <a:t>碳源充足（59 個循環）　0.0347</a:t>
-            </a:r>
-          </a:p>
-          <a:p>
-            <a:pPr algn="l">
-              <a:spcAft>
-                <a:spcPts val="1200"/>
-              </a:spcAft>
-            </a:pPr>
-            <a:r>
-              <a:rPr sz="1700" b="1" i="0">
-                <a:solidFill>
-                  <a:srgbClr val="FF0000"/>
-                </a:solidFill>
-                <a:latin typeface="Times New Roman"/>
-                <a:ea typeface="標楷體"/>
-                <a:ea typeface="標楷體"/>
-              </a:rPr>
-              <a:t>碳源中斷（31 個循環）　0.0367</a:t>
-            </a:r>
-          </a:p>
-          <a:p>
-            <a:pPr algn="l">
-              <a:spcAft>
-                <a:spcPts val="1400"/>
-              </a:spcAft>
-            </a:pPr>
-            <a:r>
-              <a:rPr sz="1700" b="0" i="0">
-                <a:solidFill>
-                  <a:srgbClr val="000000"/>
-                </a:solidFill>
-                <a:latin typeface="Times New Roman"/>
-                <a:ea typeface="標楷體"/>
-                <a:ea typeface="標楷體"/>
-              </a:rPr>
-              <a:t>差 +0.0020，方向還相反，</a:t>
-            </a:r>
-            <a:r>
-              <a:rPr sz="1700" b="0" i="1">
-                <a:solidFill>
-                  <a:srgbClr val="000000"/>
-                </a:solidFill>
-                <a:latin typeface="Times New Roman"/>
-                <a:ea typeface="標楷體"/>
-                <a:ea typeface="標楷體"/>
-              </a:rPr>
-              <a:t>p</a:t>
-            </a:r>
-            <a:r>
-              <a:rPr sz="1700" b="0" i="0">
-                <a:solidFill>
-                  <a:srgbClr val="000000"/>
-                </a:solidFill>
-                <a:latin typeface="Times New Roman"/>
-                <a:ea typeface="標楷體"/>
-                <a:ea typeface="標楷體"/>
-              </a:rPr>
-              <a:t> = 0.21。</a:t>
-            </a:r>
-          </a:p>
-          <a:p>
-            <a:pPr algn="l">
-              <a:spcAft>
-                <a:spcPts val="800"/>
-              </a:spcAft>
-            </a:pPr>
-            <a:r>
-              <a:rPr sz="1800" b="1" i="0">
-                <a:solidFill>
-                  <a:srgbClr val="1F6FB5"/>
-                </a:solidFill>
-                <a:latin typeface="Times New Roman"/>
-                <a:ea typeface="標楷體"/>
-                <a:ea typeface="標楷體"/>
-              </a:rPr>
-              <a:t>這個「沒有差異」有檢定力</a:t>
-            </a:r>
-          </a:p>
-          <a:p>
-            <a:pPr algn="l">
-              <a:spcAft>
-                <a:spcPts val="600"/>
-              </a:spcAft>
-            </a:pPr>
-            <a:r>
-              <a:rPr sz="1600" b="0" i="0">
-                <a:solidFill>
-                  <a:srgbClr val="595959"/>
-                </a:solidFill>
-                <a:latin typeface="Times New Roman"/>
-                <a:ea typeface="標楷體"/>
-                <a:ea typeface="標楷體"/>
-              </a:rPr>
-              <a:t>若生物途徑真的佔總壓降三分之一（0.0125），本檢定偵測得到的機率是 100%。結果沒有。</a:t>
             </a:r>
           </a:p>
         </p:txBody>

--- a/docs/decks/簡報_2026-09-21_氫氣流失與壓降歸因.pptx
+++ b/docs/decks/簡報_2026-09-21_氫氣流失與壓降歸因.pptx
@@ -22,6 +22,8 @@
     <p:sldId id="270" r:id="rId21"/>
     <p:sldId id="271" r:id="rId22"/>
     <p:sldId id="272" r:id="rId23"/>
+    <p:sldId id="273" r:id="rId24"/>
+    <p:sldId id="274" r:id="rId25"/>
   </p:sldIdLst>
   <p:sldSz cx="12193200" cy="6858000" type="screen4x3"/>
   <p:notesSz cx="6858000" cy="9144000"/>
@@ -3357,11 +3359,11 @@
           <a:p>
             <a:pPr algn="l">
               <a:spcAft>
-                <a:spcPts val="600"/>
+                <a:spcPts val="1000"/>
               </a:spcAft>
             </a:pPr>
             <a:r>
-              <a:rPr sz="2600" b="1" i="0">
+              <a:rPr sz="2400" b="1" i="0">
                 <a:solidFill>
                   <a:srgbClr val="FF0000"/>
                 </a:solidFill>
@@ -3369,17 +3371,72 @@
                 <a:ea typeface="標楷體"/>
                 <a:ea typeface="標楷體"/>
               </a:rPr>
-              <a:t>壓力下降的主要成分，既不是二氧化碳溶解，也不是產甲烷，</a:t>
+              <a:t>壓力下降的主要成分，既不是二氧化碳溶解，也不是產甲烷。</a:t>
             </a:r>
           </a:p>
           <a:p>
             <a:pPr algn="l">
               <a:spcAft>
-                <a:spcPts val="2000"/>
+                <a:spcPts val="1600"/>
               </a:spcAft>
             </a:pPr>
             <a:r>
-              <a:rPr sz="2600" b="1" i="0">
+              <a:rPr sz="2200" b="1" i="0">
+                <a:solidFill>
+                  <a:srgbClr val="000000"/>
+                </a:solidFill>
+                <a:latin typeface="Times New Roman"/>
+                <a:ea typeface="標楷體"/>
+                <a:ea typeface="標楷體"/>
+              </a:rPr>
+              <a:t>殘餘氣體的 </a:t>
+            </a:r>
+            <a:r>
+              <a:rPr sz="2200" b="1" i="0">
+                <a:solidFill>
+                  <a:srgbClr val="000000"/>
+                </a:solidFill>
+                <a:latin typeface="Times New Roman"/>
+                <a:ea typeface="標楷體"/>
+                <a:ea typeface="標楷體"/>
+              </a:rPr>
+              <a:t>CO</a:t>
+            </a:r>
+            <a:r>
+              <a:rPr sz="2200" b="1" i="0">
+                <a:solidFill>
+                  <a:srgbClr val="000000"/>
+                </a:solidFill>
+                <a:latin typeface="Times New Roman"/>
+                <a:ea typeface="標楷體"/>
+                <a:ea typeface="標楷體"/>
+              </a:rPr>
+              <a:t>₂:</a:t>
+            </a:r>
+            <a:r>
+              <a:rPr sz="2200" b="1" i="0">
+                <a:solidFill>
+                  <a:srgbClr val="000000"/>
+                </a:solidFill>
+                <a:latin typeface="Times New Roman"/>
+                <a:ea typeface="標楷體"/>
+                <a:ea typeface="標楷體"/>
+              </a:rPr>
+              <a:t>H</a:t>
+            </a:r>
+            <a:r>
+              <a:rPr sz="2200" b="1" i="0">
+                <a:solidFill>
+                  <a:srgbClr val="000000"/>
+                </a:solidFill>
+                <a:latin typeface="Times New Roman"/>
+                <a:ea typeface="標楷體"/>
+                <a:ea typeface="標楷體"/>
+              </a:rPr>
+              <a:t>₂ 持續偏離進料比，</a:t>
+            </a:r>
+            <a:r>
+              <a:rPr sz="2200" b="1" i="0">
                 <a:solidFill>
                   <a:srgbClr val="FF0000"/>
                 </a:solidFill>
@@ -3387,29 +3444,7 @@
                 <a:ea typeface="標楷體"/>
                 <a:ea typeface="標楷體"/>
               </a:rPr>
-              <a:t>而是</a:t>
-            </a:r>
-            <a:r>
-              <a:rPr sz="3200" b="1" i="0">
-                <a:solidFill>
-                  <a:srgbClr val="FF0000"/>
-                </a:solidFill>
-                <a:latin typeface="Times New Roman"/>
-                <a:ea typeface="標楷體"/>
-                <a:ea typeface="標楷體"/>
-              </a:rPr>
-              <a:t>氫氣的超量流失</a:t>
-            </a:r>
-            <a:r>
-              <a:rPr sz="2600" b="1" i="0">
-                <a:solidFill>
-                  <a:srgbClr val="FF0000"/>
-                </a:solidFill>
-                <a:latin typeface="Times New Roman"/>
-                <a:ea typeface="標楷體"/>
-                <a:ea typeface="標楷體"/>
-              </a:rPr>
-              <a:t>。</a:t>
+              <a:t>但原因尚未定論。</a:t>
             </a:r>
           </a:p>
           <a:p>
@@ -3419,18 +3454,65 @@
               </a:spcAft>
             </a:pPr>
             <a:r>
+              <a:rPr sz="1800" b="1" i="0">
+                <a:solidFill>
+                  <a:srgbClr val="000000"/>
+                </a:solidFill>
+                <a:latin typeface="Times New Roman"/>
+                <a:ea typeface="標楷體"/>
+                <a:ea typeface="標楷體"/>
+              </a:rPr>
+              <a:t>兩個候選解釋目前皆無法排除：</a:t>
+            </a:r>
+          </a:p>
+          <a:p>
+            <a:pPr algn="l">
+              <a:spcAft>
+                <a:spcPts val="1400"/>
+              </a:spcAft>
+            </a:pPr>
+            <a:r>
               <a:rPr sz="1700" b="0" i="0">
                 <a:solidFill>
+                  <a:srgbClr val="000000"/>
+                </a:solidFill>
+                <a:latin typeface="Times New Roman"/>
+                <a:ea typeface="標楷體"/>
+                <a:ea typeface="標楷體"/>
+              </a:rPr>
+              <a:t>① 氫氣超量流失（洩漏、穿透或其他耗氫反應）　② 碳酸鹽緩衝庫於排氣瞬間脫氣</a:t>
+            </a:r>
+          </a:p>
+          <a:p>
+            <a:pPr algn="l">
+              <a:spcAft>
+                <a:spcPts val="600"/>
+              </a:spcAft>
+            </a:pPr>
+            <a:r>
+              <a:rPr sz="1700" b="0" i="0">
+                <a:solidFill>
                   <a:srgbClr val="595959"/>
                 </a:solidFill>
                 <a:latin typeface="Times New Roman"/>
                 <a:ea typeface="標楷體"/>
                 <a:ea typeface="標楷體"/>
               </a:rPr>
-              <a:t>證據：35 次排氣量測中有 34 次，殘餘氣體的二氧化碳對氫氣比例高於進料比，中位為進料比的 2.79 倍（</a:t>
-            </a:r>
-            <a:r>
-              <a:rPr sz="1700" b="0" i="1">
+              <a:t>效果量：進料比的 </a:t>
+            </a:r>
+            <a:r>
+              <a:rPr sz="2000" b="1" i="0">
+                <a:solidFill>
+                  <a:srgbClr val="FF0000"/>
+                </a:solidFill>
+                <a:latin typeface="Times New Roman"/>
+                <a:ea typeface="標楷體"/>
+                <a:ea typeface="標楷體"/>
+              </a:rPr>
+              <a:t>1.33 – 2.79 倍</a:t>
+            </a:r>
+            <a:r>
+              <a:rPr sz="1700" b="0" i="0">
                 <a:solidFill>
                   <a:srgbClr val="595959"/>
                 </a:solidFill>
@@ -3438,18 +3520,7 @@
                 <a:ea typeface="標楷體"/>
                 <a:ea typeface="標楷體"/>
               </a:rPr>
-              <a:t>p</a:t>
-            </a:r>
-            <a:r>
-              <a:rPr sz="1700" b="0" i="0">
-                <a:solidFill>
-                  <a:srgbClr val="595959"/>
-                </a:solidFill>
-                <a:latin typeface="Times New Roman"/>
-                <a:ea typeface="標楷體"/>
-                <a:ea typeface="標楷體"/>
-              </a:rPr>
-              <a:t> &lt; 0.0001）。</a:t>
+              <a:t>（下限為將甲烷讀數全當成零的最壞情況）。</a:t>
             </a:r>
           </a:p>
         </p:txBody>
@@ -3536,7 +3607,7 @@
                 <a:ea typeface="標楷體"/>
                 <a:ea typeface="標楷體"/>
               </a:rPr>
-              <a:t>本頁結論的前提是進料確認為 </a:t>
+              <a:t>前提：進料確認為 </a:t>
             </a:r>
             <a:r>
               <a:rPr sz="1300" b="0" i="0">
@@ -3580,7 +3651,7 @@
                 <a:ea typeface="標楷體"/>
                 <a:ea typeface="標楷體"/>
               </a:rPr>
-              <a:t>₂ = 1:4。本分析無法區分洩漏、穿透、或其他耗氫生化反應。</a:t>
+              <a:t>₂ = 1:4。★ 2026-09-23 修正：原寫「而是氫氣的超量流失」已改寫——碳酸鹽脫氣在量級上同樣能解釋，且不需要任何洩漏。</a:t>
             </a:r>
           </a:p>
         </p:txBody>
@@ -5932,7 +6003,7 @@
                 <a:ea typeface="標楷體"/>
                 <a:ea typeface="標楷體"/>
               </a:rPr>
-              <a:t>十三、本分析的限制</a:t>
+              <a:t>十二之三、還有另一個解釋：碳酸鹽脫氣</a:t>
             </a:r>
           </a:p>
         </p:txBody>
@@ -6017,7 +6088,7 @@
                 <a:ea typeface="標楷體"/>
                 <a:ea typeface="標楷體"/>
               </a:rPr>
-              <a:t>引用時應一併說明</a:t>
+              <a:t>2026-09-23 補充——這個解釋不需要任何洩漏</a:t>
             </a:r>
           </a:p>
         </p:txBody>
@@ -6107,16 +6178,40 @@
           </a:p>
         </p:txBody>
       </p:sp>
-      <p:sp>
-        <p:nvSpPr>
-          <p:cNvPr id="7" name="TextBox 6"/>
+      <p:pic>
+        <p:nvPicPr>
+          <p:cNvPr id="7" name="Picture 6" descr="deck9_carbonate.png"/>
+          <p:cNvPicPr>
+            <a:picLocks noChangeAspect="1"/>
+          </p:cNvPicPr>
+          <p:nvPr/>
+        </p:nvPicPr>
+        <p:blipFill>
+          <a:blip r:embed="rId2"/>
+          <a:stretch>
+            <a:fillRect/>
+          </a:stretch>
+        </p:blipFill>
+        <p:spPr>
+          <a:xfrm>
+            <a:off x="1956599" y="1188000"/>
+            <a:ext cx="8280000" cy="4247456"/>
+          </a:xfrm>
+          <a:prstGeom prst="rect">
+            <a:avLst/>
+          </a:prstGeom>
+        </p:spPr>
+      </p:pic>
+      <p:sp>
+        <p:nvSpPr>
+          <p:cNvPr id="8" name="TextBox 7"/>
           <p:cNvSpPr txBox="1"/>
           <p:nvPr/>
         </p:nvSpPr>
         <p:spPr>
           <a:xfrm>
-            <a:off x="576000" y="1440000"/>
-            <a:ext cx="11041200" cy="4320000"/>
+            <a:off x="576000" y="5561455"/>
+            <a:ext cx="11041200" cy="846544"/>
           </a:xfrm>
           <a:prstGeom prst="rect">
             <a:avLst/>
@@ -6129,13 +6224,13 @@
           </a:bodyPr>
           <a:lstStyle/>
           <a:p>
-            <a:pPr algn="l">
+            <a:pPr algn="ctr">
               <a:spcAft>
-                <a:spcPts val="1600"/>
+                <a:spcPts val="600"/>
               </a:spcAft>
             </a:pPr>
             <a:r>
-              <a:rPr sz="1800" b="0" i="0">
+              <a:rPr sz="1700" b="0" i="0">
                 <a:solidFill>
                   <a:srgbClr val="000000"/>
                 </a:solidFill>
@@ -6143,79 +6238,113 @@
                 <a:ea typeface="標楷體"/>
                 <a:ea typeface="標楷體"/>
               </a:rPr>
-              <a:t>• 氫氣濃度為差額推算，非直接量測（分析儀僅量二氧化碳與甲烷）</a:t>
-            </a:r>
-          </a:p>
-          <a:p>
-            <a:pPr algn="l">
+              <a:t>量級檢查：只需 </a:t>
+            </a:r>
+            <a:r>
+              <a:rPr sz="2000" b="1" i="0">
+                <a:solidFill>
+                  <a:srgbClr val="FF0000"/>
+                </a:solidFill>
+                <a:latin typeface="Times New Roman"/>
+                <a:ea typeface="標楷體"/>
+                <a:ea typeface="標楷體"/>
+              </a:rPr>
+              <a:t>2.6%</a:t>
+            </a:r>
+            <a:r>
+              <a:rPr sz="1700" b="0" i="0">
+                <a:solidFill>
+                  <a:srgbClr val="000000"/>
+                </a:solidFill>
+                <a:latin typeface="Times New Roman"/>
+                <a:ea typeface="標楷體"/>
+                <a:ea typeface="標楷體"/>
+              </a:rPr>
+              <a:t> 的液相碳庫在排氣瞬間冒出來，就足以解釋觀測到的全部偏離。</a:t>
+            </a:r>
+          </a:p>
+          <a:p>
+            <a:pPr algn="ctr">
               <a:spcAft>
-                <a:spcPts val="1600"/>
+                <a:spcPts val="600"/>
               </a:spcAft>
             </a:pPr>
             <a:r>
-              <a:rPr sz="1800" b="0" i="0">
-                <a:solidFill>
-                  <a:srgbClr val="000000"/>
-                </a:solidFill>
-                <a:latin typeface="Times New Roman"/>
-                <a:ea typeface="標楷體"/>
-                <a:ea typeface="標楷體"/>
-              </a:rPr>
-              <a:t>• 無法區分氫氣流失的機制：洩漏、穿透、或其他耗氫生化反應</a:t>
-            </a:r>
-          </a:p>
-          <a:p>
-            <a:pPr algn="l">
-              <a:spcAft>
-                <a:spcPts val="1600"/>
-              </a:spcAft>
-            </a:pPr>
-            <a:r>
-              <a:rPr sz="1800" b="0" i="0">
-                <a:solidFill>
-                  <a:srgbClr val="000000"/>
-                </a:solidFill>
-                <a:latin typeface="Times New Roman"/>
-                <a:ea typeface="標楷體"/>
-                <a:ea typeface="標楷體"/>
-              </a:rPr>
-              <a:t>• 僅 35 筆可用的氣體組成資料，平均每 11 天一筆</a:t>
-            </a:r>
-          </a:p>
-          <a:p>
-            <a:pPr algn="l">
-              <a:spcAft>
-                <a:spcPts val="1600"/>
-              </a:spcAft>
-            </a:pPr>
-            <a:r>
-              <a:rPr sz="1800" b="0" i="0">
-                <a:solidFill>
-                  <a:srgbClr val="000000"/>
-                </a:solidFill>
-                <a:latin typeface="Times New Roman"/>
-                <a:ea typeface="標楷體"/>
-                <a:ea typeface="標楷體"/>
-              </a:rPr>
-              <a:t>• 碳源中斷時進料組成同時改變，兩時段的差異不僅限於碳源有無</a:t>
-            </a:r>
-          </a:p>
-          <a:p>
-            <a:pPr algn="l">
-              <a:spcAft>
-                <a:spcPts val="1600"/>
-              </a:spcAft>
-            </a:pPr>
-            <a:r>
-              <a:rPr sz="1800" b="0" i="0">
-                <a:solidFill>
-                  <a:srgbClr val="000000"/>
-                </a:solidFill>
-                <a:latin typeface="Times New Roman"/>
-                <a:ea typeface="標楷體"/>
-                <a:ea typeface="標楷體"/>
-              </a:rPr>
-              <a:t>• 酸鹼值的結果效應量極小（約為儀器刻度的七分之一），屬方向性證據</a:t>
+              <a:rPr sz="1400" b="0" i="0">
+                <a:solidFill>
+                  <a:srgbClr val="595959"/>
+                </a:solidFill>
+                <a:latin typeface="Times New Roman"/>
+                <a:ea typeface="標楷體"/>
+                <a:ea typeface="標楷體"/>
+              </a:rPr>
+              <a:t>方向性檢驗（壓降越大應脫越多）實測 </a:t>
+            </a:r>
+            <a:r>
+              <a:rPr sz="1400" b="0" i="1">
+                <a:solidFill>
+                  <a:srgbClr val="595959"/>
+                </a:solidFill>
+                <a:latin typeface="Times New Roman"/>
+                <a:ea typeface="標楷體"/>
+                <a:ea typeface="標楷體"/>
+              </a:rPr>
+              <a:t>ρ</a:t>
+            </a:r>
+            <a:r>
+              <a:rPr sz="1400" b="0" i="0">
+                <a:solidFill>
+                  <a:srgbClr val="595959"/>
+                </a:solidFill>
+                <a:latin typeface="Times New Roman"/>
+                <a:ea typeface="標楷體"/>
+                <a:ea typeface="標楷體"/>
+              </a:rPr>
+              <a:t>=+0.21，方向符合，但 35 筆的可偵測門檻是 0.46，樣本不足以分辨；排氣後立刻補氣會降 </a:t>
+            </a:r>
+            <a:r>
+              <a:rPr sz="1400" b="0" i="0">
+                <a:solidFill>
+                  <a:srgbClr val="595959"/>
+                </a:solidFill>
+                <a:latin typeface="Times New Roman"/>
+                <a:ea typeface="標楷體"/>
+                <a:ea typeface="標楷體"/>
+              </a:rPr>
+              <a:t>pH</a:t>
+            </a:r>
+            <a:r>
+              <a:rPr sz="1400" b="0" i="0">
+                <a:solidFill>
+                  <a:srgbClr val="595959"/>
+                </a:solidFill>
+                <a:latin typeface="Times New Roman"/>
+                <a:ea typeface="標楷體"/>
+                <a:ea typeface="標楷體"/>
+              </a:rPr>
+              <a:t>，故 </a:t>
+            </a:r>
+            <a:r>
+              <a:rPr sz="1400" b="0" i="0">
+                <a:solidFill>
+                  <a:srgbClr val="595959"/>
+                </a:solidFill>
+                <a:latin typeface="Times New Roman"/>
+                <a:ea typeface="標楷體"/>
+                <a:ea typeface="標楷體"/>
+              </a:rPr>
+              <a:t>pH</a:t>
+            </a:r>
+            <a:r>
+              <a:rPr sz="1400" b="0" i="0">
+                <a:solidFill>
+                  <a:srgbClr val="595959"/>
+                </a:solidFill>
+                <a:latin typeface="Times New Roman"/>
+                <a:ea typeface="標楷體"/>
+                <a:ea typeface="標楷體"/>
+              </a:rPr>
+              <a:t> 檢驗遭混淆、不可單獨解讀。</a:t>
             </a:r>
           </a:p>
         </p:txBody>
@@ -6274,7 +6403,51 @@
                 <a:ea typeface="標楷體"/>
                 <a:ea typeface="標楷體"/>
               </a:rPr>
-              <a:t>十四、建議</a:t>
+              <a:t>十二之四、</a:t>
+            </a:r>
+            <a:r>
+              <a:rPr sz="2800" b="1" i="0">
+                <a:solidFill>
+                  <a:srgbClr val="000000"/>
+                </a:solidFill>
+                <a:latin typeface="Times New Roman"/>
+                <a:ea typeface="標楷體"/>
+                <a:ea typeface="標楷體"/>
+              </a:rPr>
+              <a:t>ORP</a:t>
+            </a:r>
+            <a:r>
+              <a:rPr sz="2800" b="1" i="0">
+                <a:solidFill>
+                  <a:srgbClr val="000000"/>
+                </a:solidFill>
+                <a:latin typeface="Times New Roman"/>
+                <a:ea typeface="標楷體"/>
+                <a:ea typeface="標楷體"/>
+              </a:rPr>
+              <a:t> 與 </a:t>
+            </a:r>
+            <a:r>
+              <a:rPr sz="2800" b="1" i="0">
+                <a:solidFill>
+                  <a:srgbClr val="000000"/>
+                </a:solidFill>
+                <a:latin typeface="Times New Roman"/>
+                <a:ea typeface="標楷體"/>
+                <a:ea typeface="標楷體"/>
+              </a:rPr>
+              <a:t>pH</a:t>
+            </a:r>
+            <a:r>
+              <a:rPr sz="2800" b="1" i="0">
+                <a:solidFill>
+                  <a:srgbClr val="000000"/>
+                </a:solidFill>
+                <a:latin typeface="Times New Roman"/>
+                <a:ea typeface="標楷體"/>
+                <a:ea typeface="標楷體"/>
+              </a:rPr>
+              <a:t> 的關聯到底長什麼樣</a:t>
             </a:r>
           </a:p>
         </p:txBody>
@@ -6359,7 +6532,7 @@
                 <a:ea typeface="標楷體"/>
                 <a:ea typeface="標楷體"/>
               </a:rPr>
-              <a:t>第一項完成前，其餘方向都無法定案</a:t>
+              <a:t>現場觀察到兩者有關聯——資料顯示有，但不是想像的那種</a:t>
             </a:r>
           </a:p>
         </p:txBody>
@@ -6445,6 +6618,752 @@
                 <a:ea typeface="標楷體"/>
               </a:rPr>
               <a:t>18</a:t>
+            </a:r>
+          </a:p>
+        </p:txBody>
+      </p:sp>
+      <p:pic>
+        <p:nvPicPr>
+          <p:cNvPr id="7" name="Picture 6" descr="deck10_coupling.png"/>
+          <p:cNvPicPr>
+            <a:picLocks noChangeAspect="1"/>
+          </p:cNvPicPr>
+          <p:nvPr/>
+        </p:nvPicPr>
+        <p:blipFill>
+          <a:blip r:embed="rId2"/>
+          <a:stretch>
+            <a:fillRect/>
+          </a:stretch>
+        </p:blipFill>
+        <p:spPr>
+          <a:xfrm>
+            <a:off x="1776599" y="1188000"/>
+            <a:ext cx="8640000" cy="3853072"/>
+          </a:xfrm>
+          <a:prstGeom prst="rect">
+            <a:avLst/>
+          </a:prstGeom>
+        </p:spPr>
+      </p:pic>
+      <p:sp>
+        <p:nvSpPr>
+          <p:cNvPr id="8" name="TextBox 7"/>
+          <p:cNvSpPr txBox="1"/>
+          <p:nvPr/>
+        </p:nvSpPr>
+        <p:spPr>
+          <a:xfrm>
+            <a:off x="576000" y="5149072"/>
+            <a:ext cx="11041200" cy="1258928"/>
+          </a:xfrm>
+          <a:prstGeom prst="rect">
+            <a:avLst/>
+          </a:prstGeom>
+          <a:noFill/>
+        </p:spPr>
+        <p:txBody>
+          <a:bodyPr wrap="square" anchor="t" lIns="0" rIns="0" tIns="0" bIns="0">
+            <a:spAutoFit/>
+          </a:bodyPr>
+          <a:lstStyle/>
+          <a:p>
+            <a:pPr algn="l">
+              <a:spcAft>
+                <a:spcPts val="600"/>
+              </a:spcAft>
+            </a:pPr>
+            <a:r>
+              <a:rPr sz="1700" b="0" i="0">
+                <a:solidFill>
+                  <a:srgbClr val="000000"/>
+                </a:solidFill>
+                <a:latin typeface="Times New Roman"/>
+                <a:ea typeface="標楷體"/>
+                <a:ea typeface="標楷體"/>
+              </a:rPr>
+              <a:t>關聯確實存在，但是「</a:t>
+            </a:r>
+            <a:r>
+              <a:rPr sz="1700" b="0" i="0">
+                <a:solidFill>
+                  <a:srgbClr val="000000"/>
+                </a:solidFill>
+                <a:latin typeface="Times New Roman"/>
+                <a:ea typeface="標楷體"/>
+                <a:ea typeface="標楷體"/>
+              </a:rPr>
+              <a:t>ORP</a:t>
+            </a:r>
+            <a:r>
+              <a:rPr sz="1700" b="0" i="0">
+                <a:solidFill>
+                  <a:srgbClr val="000000"/>
+                </a:solidFill>
+                <a:latin typeface="Times New Roman"/>
+                <a:ea typeface="標楷體"/>
+                <a:ea typeface="標楷體"/>
+              </a:rPr>
+              <a:t> 的水準」對「</a:t>
+            </a:r>
+            <a:r>
+              <a:rPr sz="1700" b="0" i="0">
+                <a:solidFill>
+                  <a:srgbClr val="000000"/>
+                </a:solidFill>
+                <a:latin typeface="Times New Roman"/>
+                <a:ea typeface="標楷體"/>
+                <a:ea typeface="標楷體"/>
+              </a:rPr>
+              <a:t>pH</a:t>
+            </a:r>
+            <a:r>
+              <a:rPr sz="1700" b="0" i="0">
+                <a:solidFill>
+                  <a:srgbClr val="000000"/>
+                </a:solidFill>
+                <a:latin typeface="Times New Roman"/>
+                <a:ea typeface="標楷體"/>
+                <a:ea typeface="標楷體"/>
+              </a:rPr>
+              <a:t> 的變化」；</a:t>
+            </a:r>
+            <a:r>
+              <a:rPr sz="1700" b="0" i="0">
+                <a:solidFill>
+                  <a:srgbClr val="000000"/>
+                </a:solidFill>
+                <a:latin typeface="Times New Roman"/>
+                <a:ea typeface="標楷體"/>
+                <a:ea typeface="標楷體"/>
+              </a:rPr>
+              <a:t>ORP</a:t>
+            </a:r>
+            <a:r>
+              <a:rPr sz="1700" b="0" i="0">
+                <a:solidFill>
+                  <a:srgbClr val="000000"/>
+                </a:solidFill>
+                <a:latin typeface="Times New Roman"/>
+                <a:ea typeface="標楷體"/>
+                <a:ea typeface="標楷體"/>
+              </a:rPr>
+              <a:t> 與 </a:t>
+            </a:r>
+            <a:r>
+              <a:rPr sz="1700" b="0" i="0">
+                <a:solidFill>
+                  <a:srgbClr val="000000"/>
+                </a:solidFill>
+                <a:latin typeface="Times New Roman"/>
+                <a:ea typeface="標楷體"/>
+                <a:ea typeface="標楷體"/>
+              </a:rPr>
+              <a:t>pH</a:t>
+            </a:r>
+            <a:r>
+              <a:rPr sz="1700" b="0" i="0">
+                <a:solidFill>
+                  <a:srgbClr val="000000"/>
+                </a:solidFill>
+                <a:latin typeface="Times New Roman"/>
+                <a:ea typeface="標楷體"/>
+                <a:ea typeface="標楷體"/>
+              </a:rPr>
+              <a:t> 的</a:t>
+            </a:r>
+            <a:r>
+              <a:rPr sz="1900" b="1" i="0">
+                <a:solidFill>
+                  <a:srgbClr val="FF0000"/>
+                </a:solidFill>
+                <a:latin typeface="Times New Roman"/>
+                <a:ea typeface="標楷體"/>
+                <a:ea typeface="標楷體"/>
+              </a:rPr>
+              <a:t>變化量之間幾乎無關</a:t>
+            </a:r>
+            <a:r>
+              <a:rPr sz="1700" b="0" i="0">
+                <a:solidFill>
+                  <a:srgbClr val="000000"/>
+                </a:solidFill>
+                <a:latin typeface="Times New Roman"/>
+                <a:ea typeface="標楷體"/>
+                <a:ea typeface="標楷體"/>
+              </a:rPr>
+              <a:t>（+0.02）。扣掉時間漂移後這些關聯幾乎不變，故不是時間造成的。</a:t>
+            </a:r>
+          </a:p>
+        </p:txBody>
+      </p:sp>
+    </p:spTree>
+  </p:cSld>
+  <p:clrMapOvr>
+    <a:masterClrMapping/>
+  </p:clrMapOvr>
+</p:sld>
+</file>
+
+<file path=ppt/slides/slide18.xml><?xml version="1.0" encoding="utf-8"?>
+<p:sld xmlns:a="http://schemas.openxmlformats.org/drawingml/2006/main" xmlns:p="http://schemas.openxmlformats.org/presentationml/2006/main" xmlns:r="http://schemas.openxmlformats.org/officeDocument/2006/relationships">
+  <p:cSld>
+    <p:spTree>
+      <p:nvGrpSpPr>
+        <p:cNvPr id="1" name=""/>
+        <p:cNvGrpSpPr/>
+        <p:nvPr/>
+      </p:nvGrpSpPr>
+      <p:grpSpPr/>
+      <p:sp>
+        <p:nvSpPr>
+          <p:cNvPr id="2" name="TextBox 1"/>
+          <p:cNvSpPr txBox="1"/>
+          <p:nvPr/>
+        </p:nvSpPr>
+        <p:spPr>
+          <a:xfrm>
+            <a:off x="432000" y="180000"/>
+            <a:ext cx="11329200" cy="540000"/>
+          </a:xfrm>
+          <a:prstGeom prst="rect">
+            <a:avLst/>
+          </a:prstGeom>
+          <a:noFill/>
+        </p:spPr>
+        <p:txBody>
+          <a:bodyPr wrap="square" anchor="t" lIns="0" rIns="0" tIns="0" bIns="0">
+            <a:spAutoFit/>
+          </a:bodyPr>
+          <a:lstStyle/>
+          <a:p>
+            <a:pPr algn="ctr">
+              <a:spcAft>
+                <a:spcPts val="0"/>
+              </a:spcAft>
+            </a:pPr>
+            <a:r>
+              <a:rPr sz="2800" b="1" i="0">
+                <a:solidFill>
+                  <a:srgbClr val="000000"/>
+                </a:solidFill>
+                <a:latin typeface="Times New Roman"/>
+                <a:ea typeface="標楷體"/>
+                <a:ea typeface="標楷體"/>
+              </a:rPr>
+              <a:t>十三、本分析的限制</a:t>
+            </a:r>
+          </a:p>
+        </p:txBody>
+      </p:sp>
+      <p:sp>
+        <p:nvSpPr>
+          <p:cNvPr id="3" name="Rectangle 2"/>
+          <p:cNvSpPr/>
+          <p:nvPr/>
+        </p:nvSpPr>
+        <p:spPr>
+          <a:xfrm>
+            <a:off x="216000" y="763200"/>
+            <a:ext cx="11761200" cy="18000"/>
+          </a:xfrm>
+          <a:prstGeom prst="rect">
+            <a:avLst/>
+          </a:prstGeom>
+          <a:solidFill>
+            <a:srgbClr val="2AB6D8"/>
+          </a:solidFill>
+          <a:ln>
+            <a:noFill/>
+          </a:ln>
+          <a:effectLst/>
+        </p:spPr>
+        <p:style>
+          <a:lnRef idx="1">
+            <a:schemeClr val="accent1"/>
+          </a:lnRef>
+          <a:fillRef idx="3">
+            <a:schemeClr val="accent1"/>
+          </a:fillRef>
+          <a:effectRef idx="2">
+            <a:schemeClr val="accent1"/>
+          </a:effectRef>
+          <a:fontRef idx="minor">
+            <a:schemeClr val="lt1"/>
+          </a:fontRef>
+        </p:style>
+        <p:txBody>
+          <a:bodyPr rtlCol="0" anchor="ctr"/>
+          <a:lstStyle/>
+          <a:p>
+            <a:pPr algn="ctr"/>
+          </a:p>
+        </p:txBody>
+      </p:sp>
+      <p:sp>
+        <p:nvSpPr>
+          <p:cNvPr id="4" name="TextBox 3"/>
+          <p:cNvSpPr txBox="1"/>
+          <p:nvPr/>
+        </p:nvSpPr>
+        <p:spPr>
+          <a:xfrm>
+            <a:off x="503999" y="842400"/>
+            <a:ext cx="11185201" cy="251999"/>
+          </a:xfrm>
+          <a:prstGeom prst="rect">
+            <a:avLst/>
+          </a:prstGeom>
+          <a:noFill/>
+        </p:spPr>
+        <p:txBody>
+          <a:bodyPr wrap="square" anchor="t" lIns="0" rIns="0" tIns="0" bIns="0">
+            <a:spAutoFit/>
+          </a:bodyPr>
+          <a:lstStyle/>
+          <a:p>
+            <a:pPr algn="ctr">
+              <a:spcAft>
+                <a:spcPts val="600"/>
+              </a:spcAft>
+            </a:pPr>
+            <a:r>
+              <a:rPr sz="1300" b="0" i="0">
+                <a:solidFill>
+                  <a:srgbClr val="595959"/>
+                </a:solidFill>
+                <a:latin typeface="Times New Roman"/>
+                <a:ea typeface="標楷體"/>
+                <a:ea typeface="標楷體"/>
+              </a:rPr>
+              <a:t>引用時應一併說明</a:t>
+            </a:r>
+          </a:p>
+        </p:txBody>
+      </p:sp>
+      <p:sp>
+        <p:nvSpPr>
+          <p:cNvPr id="5" name="Rectangle 4"/>
+          <p:cNvSpPr/>
+          <p:nvPr/>
+        </p:nvSpPr>
+        <p:spPr>
+          <a:xfrm>
+            <a:off x="0" y="6552000"/>
+            <a:ext cx="12193200" cy="306000"/>
+          </a:xfrm>
+          <a:prstGeom prst="rect">
+            <a:avLst/>
+          </a:prstGeom>
+          <a:solidFill>
+            <a:srgbClr val="2E8BC0"/>
+          </a:solidFill>
+          <a:ln>
+            <a:noFill/>
+          </a:ln>
+          <a:effectLst/>
+        </p:spPr>
+        <p:style>
+          <a:lnRef idx="1">
+            <a:schemeClr val="accent1"/>
+          </a:lnRef>
+          <a:fillRef idx="3">
+            <a:schemeClr val="accent1"/>
+          </a:fillRef>
+          <a:effectRef idx="2">
+            <a:schemeClr val="accent1"/>
+          </a:effectRef>
+          <a:fontRef idx="minor">
+            <a:schemeClr val="lt1"/>
+          </a:fontRef>
+        </p:style>
+        <p:txBody>
+          <a:bodyPr rtlCol="0" anchor="ctr"/>
+          <a:lstStyle/>
+          <a:p>
+            <a:pPr algn="ctr"/>
+          </a:p>
+        </p:txBody>
+      </p:sp>
+      <p:sp>
+        <p:nvSpPr>
+          <p:cNvPr id="6" name="TextBox 5"/>
+          <p:cNvSpPr txBox="1"/>
+          <p:nvPr/>
+        </p:nvSpPr>
+        <p:spPr>
+          <a:xfrm>
+            <a:off x="11329200" y="6577200"/>
+            <a:ext cx="576000" cy="216000"/>
+          </a:xfrm>
+          <a:prstGeom prst="rect">
+            <a:avLst/>
+          </a:prstGeom>
+          <a:noFill/>
+        </p:spPr>
+        <p:txBody>
+          <a:bodyPr wrap="square" anchor="t" lIns="0" rIns="0" tIns="0" bIns="0">
+            <a:spAutoFit/>
+          </a:bodyPr>
+          <a:lstStyle/>
+          <a:p>
+            <a:pPr algn="r">
+              <a:spcAft>
+                <a:spcPts val="600"/>
+              </a:spcAft>
+            </a:pPr>
+            <a:r>
+              <a:rPr sz="1100" b="0" i="0">
+                <a:solidFill>
+                  <a:srgbClr val="FFFFFF"/>
+                </a:solidFill>
+                <a:latin typeface="Times New Roman"/>
+                <a:ea typeface="標楷體"/>
+                <a:ea typeface="標楷體"/>
+              </a:rPr>
+              <a:t>19</a:t>
+            </a:r>
+          </a:p>
+        </p:txBody>
+      </p:sp>
+      <p:sp>
+        <p:nvSpPr>
+          <p:cNvPr id="7" name="TextBox 6"/>
+          <p:cNvSpPr txBox="1"/>
+          <p:nvPr/>
+        </p:nvSpPr>
+        <p:spPr>
+          <a:xfrm>
+            <a:off x="576000" y="1440000"/>
+            <a:ext cx="11041200" cy="4320000"/>
+          </a:xfrm>
+          <a:prstGeom prst="rect">
+            <a:avLst/>
+          </a:prstGeom>
+          <a:noFill/>
+        </p:spPr>
+        <p:txBody>
+          <a:bodyPr wrap="square" anchor="t" lIns="0" rIns="0" tIns="0" bIns="0">
+            <a:spAutoFit/>
+          </a:bodyPr>
+          <a:lstStyle/>
+          <a:p>
+            <a:pPr algn="l">
+              <a:spcAft>
+                <a:spcPts val="1600"/>
+              </a:spcAft>
+            </a:pPr>
+            <a:r>
+              <a:rPr sz="1800" b="0" i="0">
+                <a:solidFill>
+                  <a:srgbClr val="000000"/>
+                </a:solidFill>
+                <a:latin typeface="Times New Roman"/>
+                <a:ea typeface="標楷體"/>
+                <a:ea typeface="標楷體"/>
+              </a:rPr>
+              <a:t>• 氫氣濃度為差額推算，非直接量測（分析儀僅量二氧化碳與甲烷）</a:t>
+            </a:r>
+          </a:p>
+          <a:p>
+            <a:pPr algn="l">
+              <a:spcAft>
+                <a:spcPts val="1600"/>
+              </a:spcAft>
+            </a:pPr>
+            <a:r>
+              <a:rPr sz="1800" b="0" i="0">
+                <a:solidFill>
+                  <a:srgbClr val="000000"/>
+                </a:solidFill>
+                <a:latin typeface="Times New Roman"/>
+                <a:ea typeface="標楷體"/>
+                <a:ea typeface="標楷體"/>
+              </a:rPr>
+              <a:t>• 無法區分氫氣流失的機制：洩漏、穿透、或其他耗氫生化反應</a:t>
+            </a:r>
+          </a:p>
+          <a:p>
+            <a:pPr algn="l">
+              <a:spcAft>
+                <a:spcPts val="1600"/>
+              </a:spcAft>
+            </a:pPr>
+            <a:r>
+              <a:rPr sz="1800" b="0" i="0">
+                <a:solidFill>
+                  <a:srgbClr val="000000"/>
+                </a:solidFill>
+                <a:latin typeface="Times New Roman"/>
+                <a:ea typeface="標楷體"/>
+                <a:ea typeface="標楷體"/>
+              </a:rPr>
+              <a:t>• 僅 35 筆可用的氣體組成資料，平均每 11 天一筆</a:t>
+            </a:r>
+          </a:p>
+          <a:p>
+            <a:pPr algn="l">
+              <a:spcAft>
+                <a:spcPts val="1600"/>
+              </a:spcAft>
+            </a:pPr>
+            <a:r>
+              <a:rPr sz="1800" b="0" i="0">
+                <a:solidFill>
+                  <a:srgbClr val="000000"/>
+                </a:solidFill>
+                <a:latin typeface="Times New Roman"/>
+                <a:ea typeface="標楷體"/>
+                <a:ea typeface="標楷體"/>
+              </a:rPr>
+              <a:t>• 碳源中斷時進料組成同時改變，兩時段的差異不僅限於碳源有無</a:t>
+            </a:r>
+          </a:p>
+          <a:p>
+            <a:pPr algn="l">
+              <a:spcAft>
+                <a:spcPts val="1600"/>
+              </a:spcAft>
+            </a:pPr>
+            <a:r>
+              <a:rPr sz="1800" b="0" i="0">
+                <a:solidFill>
+                  <a:srgbClr val="000000"/>
+                </a:solidFill>
+                <a:latin typeface="Times New Roman"/>
+                <a:ea typeface="標楷體"/>
+                <a:ea typeface="標楷體"/>
+              </a:rPr>
+              <a:t>• 酸鹼值的結果效應量極小（約為儀器刻度的七分之一），屬方向性證據</a:t>
+            </a:r>
+          </a:p>
+        </p:txBody>
+      </p:sp>
+    </p:spTree>
+  </p:cSld>
+  <p:clrMapOvr>
+    <a:masterClrMapping/>
+  </p:clrMapOvr>
+</p:sld>
+</file>
+
+<file path=ppt/slides/slide19.xml><?xml version="1.0" encoding="utf-8"?>
+<p:sld xmlns:a="http://schemas.openxmlformats.org/drawingml/2006/main" xmlns:p="http://schemas.openxmlformats.org/presentationml/2006/main" xmlns:r="http://schemas.openxmlformats.org/officeDocument/2006/relationships">
+  <p:cSld>
+    <p:spTree>
+      <p:nvGrpSpPr>
+        <p:cNvPr id="1" name=""/>
+        <p:cNvGrpSpPr/>
+        <p:nvPr/>
+      </p:nvGrpSpPr>
+      <p:grpSpPr/>
+      <p:sp>
+        <p:nvSpPr>
+          <p:cNvPr id="2" name="TextBox 1"/>
+          <p:cNvSpPr txBox="1"/>
+          <p:nvPr/>
+        </p:nvSpPr>
+        <p:spPr>
+          <a:xfrm>
+            <a:off x="432000" y="180000"/>
+            <a:ext cx="11329200" cy="540000"/>
+          </a:xfrm>
+          <a:prstGeom prst="rect">
+            <a:avLst/>
+          </a:prstGeom>
+          <a:noFill/>
+        </p:spPr>
+        <p:txBody>
+          <a:bodyPr wrap="square" anchor="t" lIns="0" rIns="0" tIns="0" bIns="0">
+            <a:spAutoFit/>
+          </a:bodyPr>
+          <a:lstStyle/>
+          <a:p>
+            <a:pPr algn="ctr">
+              <a:spcAft>
+                <a:spcPts val="0"/>
+              </a:spcAft>
+            </a:pPr>
+            <a:r>
+              <a:rPr sz="2800" b="1" i="0">
+                <a:solidFill>
+                  <a:srgbClr val="000000"/>
+                </a:solidFill>
+                <a:latin typeface="Times New Roman"/>
+                <a:ea typeface="標楷體"/>
+                <a:ea typeface="標楷體"/>
+              </a:rPr>
+              <a:t>十四、建議</a:t>
+            </a:r>
+          </a:p>
+        </p:txBody>
+      </p:sp>
+      <p:sp>
+        <p:nvSpPr>
+          <p:cNvPr id="3" name="Rectangle 2"/>
+          <p:cNvSpPr/>
+          <p:nvPr/>
+        </p:nvSpPr>
+        <p:spPr>
+          <a:xfrm>
+            <a:off x="216000" y="763200"/>
+            <a:ext cx="11761200" cy="18000"/>
+          </a:xfrm>
+          <a:prstGeom prst="rect">
+            <a:avLst/>
+          </a:prstGeom>
+          <a:solidFill>
+            <a:srgbClr val="2AB6D8"/>
+          </a:solidFill>
+          <a:ln>
+            <a:noFill/>
+          </a:ln>
+          <a:effectLst/>
+        </p:spPr>
+        <p:style>
+          <a:lnRef idx="1">
+            <a:schemeClr val="accent1"/>
+          </a:lnRef>
+          <a:fillRef idx="3">
+            <a:schemeClr val="accent1"/>
+          </a:fillRef>
+          <a:effectRef idx="2">
+            <a:schemeClr val="accent1"/>
+          </a:effectRef>
+          <a:fontRef idx="minor">
+            <a:schemeClr val="lt1"/>
+          </a:fontRef>
+        </p:style>
+        <p:txBody>
+          <a:bodyPr rtlCol="0" anchor="ctr"/>
+          <a:lstStyle/>
+          <a:p>
+            <a:pPr algn="ctr"/>
+          </a:p>
+        </p:txBody>
+      </p:sp>
+      <p:sp>
+        <p:nvSpPr>
+          <p:cNvPr id="4" name="TextBox 3"/>
+          <p:cNvSpPr txBox="1"/>
+          <p:nvPr/>
+        </p:nvSpPr>
+        <p:spPr>
+          <a:xfrm>
+            <a:off x="503999" y="842400"/>
+            <a:ext cx="11185201" cy="251999"/>
+          </a:xfrm>
+          <a:prstGeom prst="rect">
+            <a:avLst/>
+          </a:prstGeom>
+          <a:noFill/>
+        </p:spPr>
+        <p:txBody>
+          <a:bodyPr wrap="square" anchor="t" lIns="0" rIns="0" tIns="0" bIns="0">
+            <a:spAutoFit/>
+          </a:bodyPr>
+          <a:lstStyle/>
+          <a:p>
+            <a:pPr algn="ctr">
+              <a:spcAft>
+                <a:spcPts val="600"/>
+              </a:spcAft>
+            </a:pPr>
+            <a:r>
+              <a:rPr sz="1300" b="0" i="0">
+                <a:solidFill>
+                  <a:srgbClr val="595959"/>
+                </a:solidFill>
+                <a:latin typeface="Times New Roman"/>
+                <a:ea typeface="標楷體"/>
+                <a:ea typeface="標楷體"/>
+              </a:rPr>
+              <a:t>第一項完成前，其餘方向都無法定案</a:t>
+            </a:r>
+          </a:p>
+        </p:txBody>
+      </p:sp>
+      <p:sp>
+        <p:nvSpPr>
+          <p:cNvPr id="5" name="Rectangle 4"/>
+          <p:cNvSpPr/>
+          <p:nvPr/>
+        </p:nvSpPr>
+        <p:spPr>
+          <a:xfrm>
+            <a:off x="0" y="6552000"/>
+            <a:ext cx="12193200" cy="306000"/>
+          </a:xfrm>
+          <a:prstGeom prst="rect">
+            <a:avLst/>
+          </a:prstGeom>
+          <a:solidFill>
+            <a:srgbClr val="2E8BC0"/>
+          </a:solidFill>
+          <a:ln>
+            <a:noFill/>
+          </a:ln>
+          <a:effectLst/>
+        </p:spPr>
+        <p:style>
+          <a:lnRef idx="1">
+            <a:schemeClr val="accent1"/>
+          </a:lnRef>
+          <a:fillRef idx="3">
+            <a:schemeClr val="accent1"/>
+          </a:fillRef>
+          <a:effectRef idx="2">
+            <a:schemeClr val="accent1"/>
+          </a:effectRef>
+          <a:fontRef idx="minor">
+            <a:schemeClr val="lt1"/>
+          </a:fontRef>
+        </p:style>
+        <p:txBody>
+          <a:bodyPr rtlCol="0" anchor="ctr"/>
+          <a:lstStyle/>
+          <a:p>
+            <a:pPr algn="ctr"/>
+          </a:p>
+        </p:txBody>
+      </p:sp>
+      <p:sp>
+        <p:nvSpPr>
+          <p:cNvPr id="6" name="TextBox 5"/>
+          <p:cNvSpPr txBox="1"/>
+          <p:nvPr/>
+        </p:nvSpPr>
+        <p:spPr>
+          <a:xfrm>
+            <a:off x="11329200" y="6577200"/>
+            <a:ext cx="576000" cy="216000"/>
+          </a:xfrm>
+          <a:prstGeom prst="rect">
+            <a:avLst/>
+          </a:prstGeom>
+          <a:noFill/>
+        </p:spPr>
+        <p:txBody>
+          <a:bodyPr wrap="square" anchor="t" lIns="0" rIns="0" tIns="0" bIns="0">
+            <a:spAutoFit/>
+          </a:bodyPr>
+          <a:lstStyle/>
+          <a:p>
+            <a:pPr algn="r">
+              <a:spcAft>
+                <a:spcPts val="600"/>
+              </a:spcAft>
+            </a:pPr>
+            <a:r>
+              <a:rPr sz="1100" b="0" i="0">
+                <a:solidFill>
+                  <a:srgbClr val="FFFFFF"/>
+                </a:solidFill>
+                <a:latin typeface="Times New Roman"/>
+                <a:ea typeface="標楷體"/>
+                <a:ea typeface="標楷體"/>
+              </a:rPr>
+              <a:t>20</a:t>
             </a:r>
           </a:p>
         </p:txBody>
@@ -7808,7 +8727,7 @@
                 <a:ea typeface="標楷體"/>
                 <a:ea typeface="標楷體"/>
               </a:rPr>
-              <a:t>　本次分析找到了 ③ 的直接證據。</a:t>
+              <a:t>　本次分析發現 ③ 不可排除，但尚未確認。</a:t>
             </a:r>
           </a:p>
         </p:txBody>
@@ -9268,7 +10187,7 @@
               </a:spcAft>
             </a:pPr>
             <a:r>
-              <a:rPr sz="1900" b="1" i="0">
+              <a:rPr sz="1700" b="1" i="0">
                 <a:solidFill>
                   <a:srgbClr val="FF0000"/>
                 </a:solidFill>
@@ -9276,10 +10195,10 @@
                 <a:ea typeface="標楷體"/>
                 <a:ea typeface="標楷體"/>
               </a:rPr>
-              <a:t>34 / 35 次高於進料比　｜　中位 0.699 = 進料比的 2.79 倍　｜　置換檢定 </a:t>
-            </a:r>
-            <a:r>
-              <a:rPr sz="1900" b="1" i="1">
+              <a:t>34 / 35 次高於進料比　｜　中位 2.79 倍　｜　</a:t>
+            </a:r>
+            <a:r>
+              <a:rPr sz="1700" b="1" i="1">
                 <a:solidFill>
                   <a:srgbClr val="FF0000"/>
                 </a:solidFill>
@@ -9290,7 +10209,7 @@
               <a:t>p</a:t>
             </a:r>
             <a:r>
-              <a:rPr sz="1900" b="1" i="0">
+              <a:rPr sz="1700" b="1" i="0">
                 <a:solidFill>
                   <a:srgbClr val="FF0000"/>
                 </a:solidFill>
@@ -9298,7 +10217,29 @@
                 <a:ea typeface="標楷體"/>
                 <a:ea typeface="標楷體"/>
               </a:rPr>
-              <a:t> &lt; 0.0001</a:t>
+              <a:t> &lt; 0.0001。★把甲烷當零的最壞情況下仍有 1.33 倍（25/35，</a:t>
+            </a:r>
+            <a:r>
+              <a:rPr sz="1700" b="1" i="1">
+                <a:solidFill>
+                  <a:srgbClr val="FF0000"/>
+                </a:solidFill>
+                <a:latin typeface="Times New Roman"/>
+                <a:ea typeface="標楷體"/>
+                <a:ea typeface="標楷體"/>
+              </a:rPr>
+              <a:t>p</a:t>
+            </a:r>
+            <a:r>
+              <a:rPr sz="1700" b="1" i="0">
+                <a:solidFill>
+                  <a:srgbClr val="FF0000"/>
+                </a:solidFill>
+                <a:latin typeface="Times New Roman"/>
+                <a:ea typeface="標楷體"/>
+                <a:ea typeface="標楷體"/>
+              </a:rPr>
+              <a:t>=0.031）</a:t>
             </a:r>
           </a:p>
         </p:txBody>
@@ -10023,7 +10964,7 @@
                           <a:ea typeface="標楷體"/>
                           <a:ea typeface="標楷體"/>
                         </a:rPr>
-                        <a:t>用「氫氣流失」如何解釋</a:t>
+                        <a:t>「氫氣流失」如何解釋（★但見第十五頁的替代解釋）</a:t>
                       </a:r>
                     </a:p>
                   </a:txBody>
@@ -10260,6 +11201,93 @@
                 <a:ea typeface="標楷體"/>
               </a:rPr>
               <a:t>但——以壓降速率作為產甲烷速率的代理量，會嚴重高估。</a:t>
+            </a:r>
+          </a:p>
+        </p:txBody>
+      </p:sp>
+      <p:sp>
+        <p:nvSpPr>
+          <p:cNvPr id="8" name="Rectangle 7"/>
+          <p:cNvSpPr/>
+          <p:nvPr/>
+        </p:nvSpPr>
+        <p:spPr>
+          <a:xfrm>
+            <a:off x="432000" y="5562000"/>
+            <a:ext cx="11329200" cy="864000"/>
+          </a:xfrm>
+          <a:prstGeom prst="rect">
+            <a:avLst/>
+          </a:prstGeom>
+          <a:solidFill>
+            <a:srgbClr val="F2F7FC"/>
+          </a:solidFill>
+          <a:ln w="9525">
+            <a:solidFill>
+              <a:srgbClr val="2AB6D8"/>
+            </a:solidFill>
+          </a:ln>
+          <a:effectLst/>
+        </p:spPr>
+        <p:style>
+          <a:lnRef idx="1">
+            <a:schemeClr val="accent1"/>
+          </a:lnRef>
+          <a:fillRef idx="3">
+            <a:schemeClr val="accent1"/>
+          </a:fillRef>
+          <a:effectRef idx="2">
+            <a:schemeClr val="accent1"/>
+          </a:effectRef>
+          <a:fontRef idx="minor">
+            <a:schemeClr val="lt1"/>
+          </a:fontRef>
+        </p:style>
+        <p:txBody>
+          <a:bodyPr rtlCol="0" anchor="ctr"/>
+          <a:lstStyle/>
+          <a:p>
+            <a:pPr algn="ctr"/>
+          </a:p>
+        </p:txBody>
+      </p:sp>
+      <p:sp>
+        <p:nvSpPr>
+          <p:cNvPr id="9" name="TextBox 8"/>
+          <p:cNvSpPr txBox="1"/>
+          <p:nvPr/>
+        </p:nvSpPr>
+        <p:spPr>
+          <a:xfrm>
+            <a:off x="612000" y="5670000"/>
+            <a:ext cx="10969200" cy="648000"/>
+          </a:xfrm>
+          <a:prstGeom prst="rect">
+            <a:avLst/>
+          </a:prstGeom>
+          <a:noFill/>
+        </p:spPr>
+        <p:txBody>
+          <a:bodyPr wrap="square" anchor="ctr" lIns="0" rIns="0" tIns="0" bIns="0">
+            <a:spAutoFit/>
+          </a:bodyPr>
+          <a:lstStyle/>
+          <a:p>
+            <a:pPr algn="l">
+              <a:spcAft>
+                <a:spcPts val="600"/>
+              </a:spcAft>
+            </a:pPr>
+            <a:r>
+              <a:rPr sz="1300" b="0" i="0">
+                <a:solidFill>
+                  <a:srgbClr val="FF0000"/>
+                </a:solidFill>
+                <a:latin typeface="Times New Roman"/>
+                <a:ea typeface="標楷體"/>
+                <a:ea typeface="標楷體"/>
+              </a:rPr>
+              <a:t>★ 2026-09-23：這三項矛盾也能由「碳酸鹽脫氣」解釋，且不需要任何洩漏。兩個候選解釋尚未分辨，見第十五、十六頁。</a:t>
             </a:r>
           </a:p>
         </p:txBody>

--- a/docs/decks/簡報_2026-09-21_氫氣流失與壓降歸因.pptx
+++ b/docs/decks/簡報_2026-09-21_氫氣流失與壓降歸因.pptx
@@ -24,6 +24,7 @@
     <p:sldId id="272" r:id="rId23"/>
     <p:sldId id="273" r:id="rId24"/>
     <p:sldId id="274" r:id="rId25"/>
+    <p:sldId id="275" r:id="rId26"/>
   </p:sldIdLst>
   <p:sldSz cx="12193200" cy="6858000" type="screen4x3"/>
   <p:notesSz cx="6858000" cy="9144000"/>
@@ -8435,6 +8436,860 @@
 </p:sld>
 </file>
 
+<file path=ppt/slides/slide20.xml><?xml version="1.0" encoding="utf-8"?>
+<p:sld xmlns:a="http://schemas.openxmlformats.org/drawingml/2006/main" xmlns:p="http://schemas.openxmlformats.org/presentationml/2006/main" xmlns:r="http://schemas.openxmlformats.org/officeDocument/2006/relationships">
+  <p:cSld>
+    <p:spTree>
+      <p:nvGrpSpPr>
+        <p:cNvPr id="1" name=""/>
+        <p:cNvGrpSpPr/>
+        <p:nvPr/>
+      </p:nvGrpSpPr>
+      <p:grpSpPr/>
+      <p:sp>
+        <p:nvSpPr>
+          <p:cNvPr id="2" name="TextBox 1"/>
+          <p:cNvSpPr txBox="1"/>
+          <p:nvPr/>
+        </p:nvSpPr>
+        <p:spPr>
+          <a:xfrm>
+            <a:off x="432000" y="180000"/>
+            <a:ext cx="11329200" cy="540000"/>
+          </a:xfrm>
+          <a:prstGeom prst="rect">
+            <a:avLst/>
+          </a:prstGeom>
+          <a:noFill/>
+        </p:spPr>
+        <p:txBody>
+          <a:bodyPr wrap="square" anchor="t" lIns="0" rIns="0" tIns="0" bIns="0">
+            <a:spAutoFit/>
+          </a:bodyPr>
+          <a:lstStyle/>
+          <a:p>
+            <a:pPr algn="ctr">
+              <a:spcAft>
+                <a:spcPts val="0"/>
+              </a:spcAft>
+            </a:pPr>
+            <a:r>
+              <a:rPr sz="2800" b="1" i="0">
+                <a:solidFill>
+                  <a:srgbClr val="000000"/>
+                </a:solidFill>
+                <a:latin typeface="Times New Roman"/>
+                <a:ea typeface="標楷體"/>
+                <a:ea typeface="標楷體"/>
+              </a:rPr>
+              <a:t>十五、需要協助與確認的事項</a:t>
+            </a:r>
+          </a:p>
+        </p:txBody>
+      </p:sp>
+      <p:sp>
+        <p:nvSpPr>
+          <p:cNvPr id="3" name="Rectangle 2"/>
+          <p:cNvSpPr/>
+          <p:nvPr/>
+        </p:nvSpPr>
+        <p:spPr>
+          <a:xfrm>
+            <a:off x="216000" y="763200"/>
+            <a:ext cx="11761200" cy="18000"/>
+          </a:xfrm>
+          <a:prstGeom prst="rect">
+            <a:avLst/>
+          </a:prstGeom>
+          <a:solidFill>
+            <a:srgbClr val="2AB6D8"/>
+          </a:solidFill>
+          <a:ln>
+            <a:noFill/>
+          </a:ln>
+          <a:effectLst/>
+        </p:spPr>
+        <p:style>
+          <a:lnRef idx="1">
+            <a:schemeClr val="accent1"/>
+          </a:lnRef>
+          <a:fillRef idx="3">
+            <a:schemeClr val="accent1"/>
+          </a:fillRef>
+          <a:effectRef idx="2">
+            <a:schemeClr val="accent1"/>
+          </a:effectRef>
+          <a:fontRef idx="minor">
+            <a:schemeClr val="lt1"/>
+          </a:fontRef>
+        </p:style>
+        <p:txBody>
+          <a:bodyPr rtlCol="0" anchor="ctr"/>
+          <a:lstStyle/>
+          <a:p>
+            <a:pPr algn="ctr"/>
+          </a:p>
+        </p:txBody>
+      </p:sp>
+      <p:sp>
+        <p:nvSpPr>
+          <p:cNvPr id="4" name="TextBox 3"/>
+          <p:cNvSpPr txBox="1"/>
+          <p:nvPr/>
+        </p:nvSpPr>
+        <p:spPr>
+          <a:xfrm>
+            <a:off x="503999" y="842400"/>
+            <a:ext cx="11185201" cy="251999"/>
+          </a:xfrm>
+          <a:prstGeom prst="rect">
+            <a:avLst/>
+          </a:prstGeom>
+          <a:noFill/>
+        </p:spPr>
+        <p:txBody>
+          <a:bodyPr wrap="square" anchor="t" lIns="0" rIns="0" tIns="0" bIns="0">
+            <a:spAutoFit/>
+          </a:bodyPr>
+          <a:lstStyle/>
+          <a:p>
+            <a:pPr algn="ctr">
+              <a:spcAft>
+                <a:spcPts val="600"/>
+              </a:spcAft>
+            </a:pPr>
+            <a:r>
+              <a:rPr sz="1300" b="0" i="0">
+                <a:solidFill>
+                  <a:srgbClr val="595959"/>
+                </a:solidFill>
+                <a:latin typeface="Times New Roman"/>
+                <a:ea typeface="標楷體"/>
+                <a:ea typeface="標楷體"/>
+              </a:rPr>
+              <a:t>2026-09-23</a:t>
+            </a:r>
+          </a:p>
+        </p:txBody>
+      </p:sp>
+      <p:sp>
+        <p:nvSpPr>
+          <p:cNvPr id="5" name="Rectangle 4"/>
+          <p:cNvSpPr/>
+          <p:nvPr/>
+        </p:nvSpPr>
+        <p:spPr>
+          <a:xfrm>
+            <a:off x="0" y="6552000"/>
+            <a:ext cx="12193200" cy="306000"/>
+          </a:xfrm>
+          <a:prstGeom prst="rect">
+            <a:avLst/>
+          </a:prstGeom>
+          <a:solidFill>
+            <a:srgbClr val="2E8BC0"/>
+          </a:solidFill>
+          <a:ln>
+            <a:noFill/>
+          </a:ln>
+          <a:effectLst/>
+        </p:spPr>
+        <p:style>
+          <a:lnRef idx="1">
+            <a:schemeClr val="accent1"/>
+          </a:lnRef>
+          <a:fillRef idx="3">
+            <a:schemeClr val="accent1"/>
+          </a:fillRef>
+          <a:effectRef idx="2">
+            <a:schemeClr val="accent1"/>
+          </a:effectRef>
+          <a:fontRef idx="minor">
+            <a:schemeClr val="lt1"/>
+          </a:fontRef>
+        </p:style>
+        <p:txBody>
+          <a:bodyPr rtlCol="0" anchor="ctr"/>
+          <a:lstStyle/>
+          <a:p>
+            <a:pPr algn="ctr"/>
+          </a:p>
+        </p:txBody>
+      </p:sp>
+      <p:sp>
+        <p:nvSpPr>
+          <p:cNvPr id="6" name="TextBox 5"/>
+          <p:cNvSpPr txBox="1"/>
+          <p:nvPr/>
+        </p:nvSpPr>
+        <p:spPr>
+          <a:xfrm>
+            <a:off x="11329200" y="6577200"/>
+            <a:ext cx="576000" cy="216000"/>
+          </a:xfrm>
+          <a:prstGeom prst="rect">
+            <a:avLst/>
+          </a:prstGeom>
+          <a:noFill/>
+        </p:spPr>
+        <p:txBody>
+          <a:bodyPr wrap="square" anchor="t" lIns="0" rIns="0" tIns="0" bIns="0">
+            <a:spAutoFit/>
+          </a:bodyPr>
+          <a:lstStyle/>
+          <a:p>
+            <a:pPr algn="r">
+              <a:spcAft>
+                <a:spcPts val="600"/>
+              </a:spcAft>
+            </a:pPr>
+            <a:r>
+              <a:rPr sz="1100" b="0" i="0">
+                <a:solidFill>
+                  <a:srgbClr val="FFFFFF"/>
+                </a:solidFill>
+                <a:latin typeface="Times New Roman"/>
+                <a:ea typeface="標楷體"/>
+                <a:ea typeface="標楷體"/>
+              </a:rPr>
+              <a:t>21</a:t>
+            </a:r>
+          </a:p>
+        </p:txBody>
+      </p:sp>
+      <p:sp>
+        <p:nvSpPr>
+          <p:cNvPr id="7" name="TextBox 6"/>
+          <p:cNvSpPr txBox="1"/>
+          <p:nvPr/>
+        </p:nvSpPr>
+        <p:spPr>
+          <a:xfrm>
+            <a:off x="576000" y="1188000"/>
+            <a:ext cx="11041200" cy="1655999"/>
+          </a:xfrm>
+          <a:prstGeom prst="rect">
+            <a:avLst/>
+          </a:prstGeom>
+          <a:noFill/>
+        </p:spPr>
+        <p:txBody>
+          <a:bodyPr wrap="square" anchor="t" lIns="0" rIns="0" tIns="0" bIns="0">
+            <a:spAutoFit/>
+          </a:bodyPr>
+          <a:lstStyle/>
+          <a:p>
+            <a:pPr algn="l">
+              <a:spcAft>
+                <a:spcPts val="800"/>
+              </a:spcAft>
+            </a:pPr>
+            <a:r>
+              <a:rPr sz="2200" b="1" i="0">
+                <a:solidFill>
+                  <a:srgbClr val="FF0000"/>
+                </a:solidFill>
+                <a:latin typeface="Times New Roman"/>
+                <a:ea typeface="標楷體"/>
+                <a:ea typeface="標楷體"/>
+              </a:rPr>
+              <a:t>最優先：無菌（或不含活性菌）靜態保壓</a:t>
+            </a:r>
+          </a:p>
+          <a:p>
+            <a:pPr algn="l">
+              <a:spcAft>
+                <a:spcPts val="600"/>
+              </a:spcAft>
+            </a:pPr>
+            <a:r>
+              <a:rPr sz="1700" b="0" i="0">
+                <a:solidFill>
+                  <a:srgbClr val="000000"/>
+                </a:solidFill>
+                <a:latin typeface="Times New Roman"/>
+                <a:ea typeface="標楷體"/>
+                <a:ea typeface="標楷體"/>
+              </a:rPr>
+              <a:t>以 </a:t>
+            </a:r>
+            <a:r>
+              <a:rPr sz="1700" b="0" i="0">
+                <a:solidFill>
+                  <a:srgbClr val="000000"/>
+                </a:solidFill>
+                <a:latin typeface="Times New Roman"/>
+                <a:ea typeface="標楷體"/>
+                <a:ea typeface="標楷體"/>
+              </a:rPr>
+              <a:t>N</a:t>
+            </a:r>
+            <a:r>
+              <a:rPr sz="1700" b="0" i="0">
+                <a:solidFill>
+                  <a:srgbClr val="000000"/>
+                </a:solidFill>
+                <a:latin typeface="Times New Roman"/>
+                <a:ea typeface="標楷體"/>
+                <a:ea typeface="標楷體"/>
+              </a:rPr>
+              <a:t>₂ 與 </a:t>
+            </a:r>
+            <a:r>
+              <a:rPr sz="1700" b="0" i="0">
+                <a:solidFill>
+                  <a:srgbClr val="000000"/>
+                </a:solidFill>
+                <a:latin typeface="Times New Roman"/>
+                <a:ea typeface="標楷體"/>
+                <a:ea typeface="標楷體"/>
+              </a:rPr>
+              <a:t>H</a:t>
+            </a:r>
+            <a:r>
+              <a:rPr sz="1700" b="0" i="0">
+                <a:solidFill>
+                  <a:srgbClr val="000000"/>
+                </a:solidFill>
+                <a:latin typeface="Times New Roman"/>
+                <a:ea typeface="標楷體"/>
+                <a:ea typeface="標楷體"/>
+              </a:rPr>
+              <a:t>₂ 分別充壓至相同絕對壓力，各記錄約 </a:t>
+            </a:r>
+            <a:r>
+              <a:rPr sz="1900" b="1" i="0">
+                <a:solidFill>
+                  <a:srgbClr val="000000"/>
+                </a:solidFill>
+                <a:latin typeface="Times New Roman"/>
+                <a:ea typeface="標楷體"/>
+                <a:ea typeface="標楷體"/>
+              </a:rPr>
+              <a:t>3.5 天</a:t>
+            </a:r>
+            <a:r>
+              <a:rPr sz="1700" b="0" i="0">
+                <a:solidFill>
+                  <a:srgbClr val="000000"/>
+                </a:solidFill>
+                <a:latin typeface="Times New Roman"/>
+                <a:ea typeface="標楷體"/>
+                <a:ea typeface="標楷體"/>
+              </a:rPr>
+              <a:t>。這是目前唯一能分辨「氫氣流失」與「碳酸鹽脫氣」的方法。</a:t>
+            </a:r>
+          </a:p>
+          <a:p>
+            <a:pPr algn="l">
+              <a:spcAft>
+                <a:spcPts val="600"/>
+              </a:spcAft>
+            </a:pPr>
+            <a:r>
+              <a:rPr sz="1800" b="1" i="0">
+                <a:solidFill>
+                  <a:srgbClr val="FF0000"/>
+                </a:solidFill>
+                <a:latin typeface="Times New Roman"/>
+                <a:ea typeface="標楷體"/>
+                <a:ea typeface="標楷體"/>
+              </a:rPr>
+              <a:t>⚠ 關鍵細節：前 33 小時的資料不可採計</a:t>
+            </a:r>
+            <a:r>
+              <a:rPr sz="1600" b="0" i="0">
+                <a:solidFill>
+                  <a:srgbClr val="000000"/>
+                </a:solidFill>
+                <a:latin typeface="Times New Roman"/>
+                <a:ea typeface="標楷體"/>
+                <a:ea typeface="標楷體"/>
+              </a:rPr>
+              <a:t>——剛充壓時氣體仍在溶進水裡，那段壓降不是洩漏。須待溶解平衡後（約 5 個時間常數）才開始計算。</a:t>
+            </a:r>
+          </a:p>
+        </p:txBody>
+      </p:sp>
+      <p:graphicFrame>
+        <p:nvGraphicFramePr>
+          <p:cNvPr id="8" name="Table 7"/>
+          <p:cNvGraphicFramePr>
+            <a:graphicFrameLocks noGrp="1"/>
+          </p:cNvGraphicFramePr>
+          <p:nvPr/>
+        </p:nvGraphicFramePr>
+        <p:xfrm>
+          <a:off x="576000" y="3096000"/>
+          <a:ext cx="11052000" cy="1371600"/>
+        </p:xfrm>
+        <a:graphic>
+          <a:graphicData uri="http://schemas.openxmlformats.org/drawingml/2006/table">
+            <a:tbl>
+              <a:tblPr>
+                <a:tableStyleId>{5C22544A-7EE6-4342-B048-85BDC9FD1C3A}</a:tableStyleId>
+              </a:tblPr>
+              <a:tblGrid>
+                <a:gridCol w="3420000"/>
+                <a:gridCol w="3420000"/>
+                <a:gridCol w="4212000"/>
+              </a:tblGrid>
+              <a:tr h="378000">
+                <a:tc>
+                  <a:txBody>
+                    <a:bodyPr/>
+                    <a:lstStyle/>
+                    <a:p>
+                      <a:pPr algn="ctr"/>
+                      <a:r>
+                        <a:rPr sz="1500" b="1" i="0">
+                          <a:solidFill>
+                            <a:srgbClr val="FFFFFF"/>
+                          </a:solidFill>
+                          <a:latin typeface="Times New Roman"/>
+                          <a:ea typeface="標楷體"/>
+                          <a:ea typeface="標楷體"/>
+                        </a:rPr>
+                        <a:t>量到什麼</a:t>
+                      </a:r>
+                    </a:p>
+                  </a:txBody>
+                  <a:tcPr marL="72000" marR="72000" anchor="ctr">
+                    <a:solidFill>
+                      <a:srgbClr val="2E9BD6"/>
+                    </a:solidFill>
+                  </a:tcPr>
+                </a:tc>
+                <a:tc>
+                  <a:txBody>
+                    <a:bodyPr/>
+                    <a:lstStyle/>
+                    <a:p>
+                      <a:pPr algn="ctr"/>
+                      <a:r>
+                        <a:rPr sz="1500" b="1" i="0">
+                          <a:solidFill>
+                            <a:srgbClr val="FFFFFF"/>
+                          </a:solidFill>
+                          <a:latin typeface="Times New Roman"/>
+                          <a:ea typeface="標楷體"/>
+                          <a:ea typeface="標楷體"/>
+                        </a:rPr>
+                        <a:t>代表什麼</a:t>
+                      </a:r>
+                    </a:p>
+                  </a:txBody>
+                  <a:tcPr marL="72000" marR="72000" anchor="ctr">
+                    <a:solidFill>
+                      <a:srgbClr val="2E9BD6"/>
+                    </a:solidFill>
+                  </a:tcPr>
+                </a:tc>
+                <a:tc>
+                  <a:txBody>
+                    <a:bodyPr/>
+                    <a:lstStyle/>
+                    <a:p>
+                      <a:pPr algn="ctr"/>
+                      <a:r>
+                        <a:rPr sz="1500" b="1" i="0">
+                          <a:solidFill>
+                            <a:srgbClr val="FFFFFF"/>
+                          </a:solidFill>
+                          <a:latin typeface="Times New Roman"/>
+                          <a:ea typeface="標楷體"/>
+                          <a:ea typeface="標楷體"/>
+                        </a:rPr>
+                        <a:t>後續處置</a:t>
+                      </a:r>
+                    </a:p>
+                  </a:txBody>
+                  <a:tcPr marL="72000" marR="72000" anchor="ctr">
+                    <a:solidFill>
+                      <a:srgbClr val="2E9BD6"/>
+                    </a:solidFill>
+                  </a:tcPr>
+                </a:tc>
+              </a:tr>
+              <a:tr h="331200">
+                <a:tc>
+                  <a:txBody>
+                    <a:bodyPr/>
+                    <a:lstStyle/>
+                    <a:p>
+                      <a:pPr algn="ctr"/>
+                      <a:r>
+                        <a:rPr sz="1500" b="1" i="0">
+                          <a:solidFill>
+                            <a:srgbClr val="FF0000"/>
+                          </a:solidFill>
+                          <a:latin typeface="Times New Roman"/>
+                          <a:ea typeface="標楷體"/>
+                          <a:ea typeface="標楷體"/>
+                        </a:rPr>
+                        <a:t>H</a:t>
+                      </a:r>
+                      <a:r>
+                        <a:rPr sz="1500" b="1" i="0">
+                          <a:solidFill>
+                            <a:srgbClr val="FF0000"/>
+                          </a:solidFill>
+                          <a:latin typeface="Times New Roman"/>
+                          <a:ea typeface="標楷體"/>
+                          <a:ea typeface="標楷體"/>
+                        </a:rPr>
+                        <a:t>₂ 掉得比 </a:t>
+                      </a:r>
+                      <a:r>
+                        <a:rPr sz="1500" b="1" i="0">
+                          <a:solidFill>
+                            <a:srgbClr val="FF0000"/>
+                          </a:solidFill>
+                          <a:latin typeface="Times New Roman"/>
+                          <a:ea typeface="標楷體"/>
+                          <a:ea typeface="標楷體"/>
+                        </a:rPr>
+                        <a:t>N</a:t>
+                      </a:r>
+                      <a:r>
+                        <a:rPr sz="1500" b="1" i="0">
+                          <a:solidFill>
+                            <a:srgbClr val="FF0000"/>
+                          </a:solidFill>
+                          <a:latin typeface="Times New Roman"/>
+                          <a:ea typeface="標楷體"/>
+                          <a:ea typeface="標楷體"/>
+                        </a:rPr>
+                        <a:t>₂ 快約 3.74 倍</a:t>
+                      </a:r>
+                    </a:p>
+                  </a:txBody>
+                  <a:tcPr marL="72000" marR="72000" anchor="ctr">
+                    <a:solidFill>
+                      <a:srgbClr val="DBE9F6"/>
+                    </a:solidFill>
+                  </a:tcPr>
+                </a:tc>
+                <a:tc>
+                  <a:txBody>
+                    <a:bodyPr/>
+                    <a:lstStyle/>
+                    <a:p>
+                      <a:pPr algn="ctr"/>
+                      <a:r>
+                        <a:rPr sz="1500" b="1" i="0">
+                          <a:solidFill>
+                            <a:srgbClr val="FF0000"/>
+                          </a:solidFill>
+                          <a:latin typeface="Times New Roman"/>
+                          <a:ea typeface="標楷體"/>
+                          <a:ea typeface="標楷體"/>
+                        </a:rPr>
+                        <a:t>機械洩漏（</a:t>
+                      </a:r>
+                      <a:r>
+                        <a:rPr sz="1500" b="1" i="0">
+                          <a:solidFill>
+                            <a:srgbClr val="FF0000"/>
+                          </a:solidFill>
+                          <a:latin typeface="Times New Roman"/>
+                          <a:ea typeface="標楷體"/>
+                          <a:ea typeface="標楷體"/>
+                        </a:rPr>
+                        <a:t>Graham</a:t>
+                      </a:r>
+                      <a:r>
+                        <a:rPr sz="1500" b="1" i="0">
+                          <a:solidFill>
+                            <a:srgbClr val="FF0000"/>
+                          </a:solidFill>
+                          <a:latin typeface="Times New Roman"/>
+                          <a:ea typeface="標楷體"/>
+                          <a:ea typeface="標楷體"/>
+                        </a:rPr>
+                        <a:t> 定律）</a:t>
+                      </a:r>
+                    </a:p>
+                  </a:txBody>
+                  <a:tcPr marL="72000" marR="72000" anchor="ctr">
+                    <a:solidFill>
+                      <a:srgbClr val="DBE9F6"/>
+                    </a:solidFill>
+                  </a:tcPr>
+                </a:tc>
+                <a:tc>
+                  <a:txBody>
+                    <a:bodyPr/>
+                    <a:lstStyle/>
+                    <a:p>
+                      <a:pPr algn="ctr"/>
+                      <a:r>
+                        <a:rPr sz="1500" b="1" i="0">
+                          <a:solidFill>
+                            <a:srgbClr val="FF0000"/>
+                          </a:solidFill>
+                          <a:latin typeface="Times New Roman"/>
+                          <a:ea typeface="標楷體"/>
+                          <a:ea typeface="標楷體"/>
+                        </a:rPr>
+                        <a:t>查接頭、閥件、焊道</a:t>
+                      </a:r>
+                    </a:p>
+                  </a:txBody>
+                  <a:tcPr marL="72000" marR="72000" anchor="ctr">
+                    <a:solidFill>
+                      <a:srgbClr val="DBE9F6"/>
+                    </a:solidFill>
+                  </a:tcPr>
+                </a:tc>
+              </a:tr>
+              <a:tr h="331200">
+                <a:tc>
+                  <a:txBody>
+                    <a:bodyPr/>
+                    <a:lstStyle/>
+                    <a:p>
+                      <a:pPr algn="ctr"/>
+                      <a:r>
+                        <a:rPr sz="1500" b="0" i="0">
+                          <a:solidFill>
+                            <a:srgbClr val="000000"/>
+                          </a:solidFill>
+                          <a:latin typeface="Times New Roman"/>
+                          <a:ea typeface="標楷體"/>
+                          <a:ea typeface="標楷體"/>
+                        </a:rPr>
+                        <a:t>比例不是 3.74，但 </a:t>
+                      </a:r>
+                      <a:r>
+                        <a:rPr sz="1500" b="0" i="0">
+                          <a:solidFill>
+                            <a:srgbClr val="000000"/>
+                          </a:solidFill>
+                          <a:latin typeface="Times New Roman"/>
+                          <a:ea typeface="標楷體"/>
+                          <a:ea typeface="標楷體"/>
+                        </a:rPr>
+                        <a:t>H</a:t>
+                      </a:r>
+                      <a:r>
+                        <a:rPr sz="1500" b="0" i="0">
+                          <a:solidFill>
+                            <a:srgbClr val="000000"/>
+                          </a:solidFill>
+                          <a:latin typeface="Times New Roman"/>
+                          <a:ea typeface="標楷體"/>
+                          <a:ea typeface="標楷體"/>
+                        </a:rPr>
+                        <a:t>₂ 明顯較快</a:t>
+                      </a:r>
+                    </a:p>
+                  </a:txBody>
+                  <a:tcPr marL="72000" marR="72000" anchor="ctr">
+                    <a:solidFill>
+                      <a:srgbClr val="EAF2FA"/>
+                    </a:solidFill>
+                  </a:tcPr>
+                </a:tc>
+                <a:tc>
+                  <a:txBody>
+                    <a:bodyPr/>
+                    <a:lstStyle/>
+                    <a:p>
+                      <a:pPr algn="ctr"/>
+                      <a:r>
+                        <a:rPr sz="1500" b="0" i="0">
+                          <a:solidFill>
+                            <a:srgbClr val="000000"/>
+                          </a:solidFill>
+                          <a:latin typeface="Times New Roman"/>
+                          <a:ea typeface="標楷體"/>
+                          <a:ea typeface="標楷體"/>
+                        </a:rPr>
+                        <a:t>材料穿透</a:t>
+                      </a:r>
+                    </a:p>
+                  </a:txBody>
+                  <a:tcPr marL="72000" marR="72000" anchor="ctr">
+                    <a:solidFill>
+                      <a:srgbClr val="EAF2FA"/>
+                    </a:solidFill>
+                  </a:tcPr>
+                </a:tc>
+                <a:tc>
+                  <a:txBody>
+                    <a:bodyPr/>
+                    <a:lstStyle/>
+                    <a:p>
+                      <a:pPr algn="ctr"/>
+                      <a:r>
+                        <a:rPr sz="1500" b="0" i="0">
+                          <a:solidFill>
+                            <a:srgbClr val="000000"/>
+                          </a:solidFill>
+                          <a:latin typeface="Times New Roman"/>
+                          <a:ea typeface="標楷體"/>
+                          <a:ea typeface="標楷體"/>
+                        </a:rPr>
+                        <a:t>更換墊片材質</a:t>
+                      </a:r>
+                    </a:p>
+                  </a:txBody>
+                  <a:tcPr marL="72000" marR="72000" anchor="ctr">
+                    <a:solidFill>
+                      <a:srgbClr val="EAF2FA"/>
+                    </a:solidFill>
+                  </a:tcPr>
+                </a:tc>
+              </a:tr>
+              <a:tr h="331200">
+                <a:tc>
+                  <a:txBody>
+                    <a:bodyPr/>
+                    <a:lstStyle/>
+                    <a:p>
+                      <a:pPr algn="ctr"/>
+                      <a:r>
+                        <a:rPr sz="1500" b="0" i="0">
+                          <a:solidFill>
+                            <a:srgbClr val="000000"/>
+                          </a:solidFill>
+                          <a:latin typeface="Times New Roman"/>
+                          <a:ea typeface="標楷體"/>
+                          <a:ea typeface="標楷體"/>
+                        </a:rPr>
+                        <a:t>兩者都幾乎不掉</a:t>
+                      </a:r>
+                    </a:p>
+                  </a:txBody>
+                  <a:tcPr marL="72000" marR="72000" anchor="ctr">
+                    <a:solidFill>
+                      <a:srgbClr val="DBE9F6"/>
+                    </a:solidFill>
+                  </a:tcPr>
+                </a:tc>
+                <a:tc>
+                  <a:txBody>
+                    <a:bodyPr/>
+                    <a:lstStyle/>
+                    <a:p>
+                      <a:pPr algn="ctr"/>
+                      <a:r>
+                        <a:rPr sz="1500" b="0" i="0">
+                          <a:solidFill>
+                            <a:srgbClr val="000000"/>
+                          </a:solidFill>
+                          <a:latin typeface="Times New Roman"/>
+                          <a:ea typeface="標楷體"/>
+                          <a:ea typeface="標楷體"/>
+                        </a:rPr>
+                        <a:t>洩漏被排除，剩碳酸鹽脫氣</a:t>
+                      </a:r>
+                    </a:p>
+                  </a:txBody>
+                  <a:tcPr marL="72000" marR="72000" anchor="ctr">
+                    <a:solidFill>
+                      <a:srgbClr val="DBE9F6"/>
+                    </a:solidFill>
+                  </a:tcPr>
+                </a:tc>
+                <a:tc>
+                  <a:txBody>
+                    <a:bodyPr/>
+                    <a:lstStyle/>
+                    <a:p>
+                      <a:pPr algn="ctr"/>
+                      <a:r>
+                        <a:rPr sz="1500" b="0" i="0">
+                          <a:solidFill>
+                            <a:srgbClr val="000000"/>
+                          </a:solidFill>
+                          <a:latin typeface="Times New Roman"/>
+                          <a:ea typeface="標楷體"/>
+                          <a:ea typeface="標楷體"/>
+                        </a:rPr>
+                        <a:t>改由加密排氣取樣驗證</a:t>
+                      </a:r>
+                    </a:p>
+                  </a:txBody>
+                  <a:tcPr marL="72000" marR="72000" anchor="ctr">
+                    <a:solidFill>
+                      <a:srgbClr val="DBE9F6"/>
+                    </a:solidFill>
+                  </a:tcPr>
+                </a:tc>
+              </a:tr>
+            </a:tbl>
+          </a:graphicData>
+        </a:graphic>
+      </p:graphicFrame>
+      <p:sp>
+        <p:nvSpPr>
+          <p:cNvPr id="9" name="TextBox 8"/>
+          <p:cNvSpPr txBox="1"/>
+          <p:nvPr/>
+        </p:nvSpPr>
+        <p:spPr>
+          <a:xfrm>
+            <a:off x="576000" y="4824000"/>
+            <a:ext cx="11041200" cy="1440000"/>
+          </a:xfrm>
+          <a:prstGeom prst="rect">
+            <a:avLst/>
+          </a:prstGeom>
+          <a:noFill/>
+        </p:spPr>
+        <p:txBody>
+          <a:bodyPr wrap="square" anchor="t" lIns="0" rIns="0" tIns="0" bIns="0">
+            <a:spAutoFit/>
+          </a:bodyPr>
+          <a:lstStyle/>
+          <a:p>
+            <a:pPr algn="l">
+              <a:spcAft>
+                <a:spcPts val="600"/>
+              </a:spcAft>
+            </a:pPr>
+            <a:r>
+              <a:rPr sz="1800" b="1" i="0">
+                <a:solidFill>
+                  <a:srgbClr val="000000"/>
+                </a:solidFill>
+                <a:latin typeface="Times New Roman"/>
+                <a:ea typeface="標楷體"/>
+                <a:ea typeface="標楷體"/>
+              </a:rPr>
+              <a:t>需要確認的現場資訊（未敢自行假設）：</a:t>
+            </a:r>
+          </a:p>
+          <a:p>
+            <a:pPr algn="l">
+              <a:spcAft>
+                <a:spcPts val="600"/>
+              </a:spcAft>
+            </a:pPr>
+            <a:r>
+              <a:rPr sz="1700" b="0" i="0">
+                <a:solidFill>
+                  <a:srgbClr val="000000"/>
+                </a:solidFill>
+                <a:latin typeface="Times New Roman"/>
+                <a:ea typeface="標楷體"/>
+                <a:ea typeface="標楷體"/>
+              </a:rPr>
+              <a:t>① 滅菌／去活性方式　② 液位（估算液相碳庫需要）　③ 墊片材質（評估氫氣穿透）　④ 20 分鐘循環的問題是否已排除</a:t>
+            </a:r>
+          </a:p>
+        </p:txBody>
+      </p:sp>
+    </p:spTree>
+  </p:cSld>
+  <p:clrMapOvr>
+    <a:masterClrMapping/>
+  </p:clrMapOvr>
+</p:sld>
+</file>
+
 <file path=ppt/slides/slide3.xml><?xml version="1.0" encoding="utf-8"?>
 <p:sld xmlns:a="http://schemas.openxmlformats.org/drawingml/2006/main" xmlns:p="http://schemas.openxmlformats.org/presentationml/2006/main" xmlns:r="http://schemas.openxmlformats.org/officeDocument/2006/relationships">
   <p:cSld>
@@ -10964,7 +11819,7 @@
                           <a:ea typeface="標楷體"/>
                           <a:ea typeface="標楷體"/>
                         </a:rPr>
-                        <a:t>「氫氣流失」如何解釋（★但見第十五頁的替代解釋）</a:t>
+                        <a:t>「氫氣流失」如何解釋（★但見第 16 頁的替代解釋）</a:t>
                       </a:r>
                     </a:p>
                   </a:txBody>
@@ -11287,7 +12142,7 @@
                 <a:ea typeface="標楷體"/>
                 <a:ea typeface="標楷體"/>
               </a:rPr>
-              <a:t>★ 2026-09-23：這三項矛盾也能由「碳酸鹽脫氣」解釋，且不需要任何洩漏。兩個候選解釋尚未分辨，見第十五、十六頁。</a:t>
+              <a:t>★ 2026-09-23：這三項矛盾也能由「碳酸鹽脫氣」解釋，且不需要任何洩漏。兩個候選解釋尚未分辨，見第 16、17 頁。</a:t>
             </a:r>
           </a:p>
         </p:txBody>

--- a/docs/decks/簡報_2026-09-21_氫氣流失與壓降歸因.pptx
+++ b/docs/decks/簡報_2026-09-21_氫氣流失與壓降歸因.pptx
@@ -25,6 +25,10 @@
     <p:sldId id="273" r:id="rId24"/>
     <p:sldId id="274" r:id="rId25"/>
     <p:sldId id="275" r:id="rId26"/>
+    <p:sldId id="276" r:id="rId27"/>
+    <p:sldId id="277" r:id="rId28"/>
+    <p:sldId id="278" r:id="rId29"/>
+    <p:sldId id="279" r:id="rId30"/>
   </p:sldIdLst>
   <p:sldSz cx="12193200" cy="6858000" type="screen4x3"/>
   <p:notesSz cx="6858000" cy="9144000"/>
@@ -3463,7 +3467,7 @@
                 <a:ea typeface="標楷體"/>
                 <a:ea typeface="標楷體"/>
               </a:rPr>
-              <a:t>兩個候選解釋目前皆無法排除：</a:t>
+              <a:t>三個候選解釋目前皆無法排除：</a:t>
             </a:r>
           </a:p>
           <a:p>
@@ -3481,7 +3485,7 @@
                 <a:ea typeface="標楷體"/>
                 <a:ea typeface="標楷體"/>
               </a:rPr>
-              <a:t>① 氫氣超量流失（洩漏、穿透或其他耗氫反應）　② 碳酸鹽緩衝庫於排氣瞬間脫氣</a:t>
+              <a:t>① 氫氣超量流失（洩漏、穿透或其他耗氫反應）　② 碳酸鹽脫氣　③ 排氣本身就會選擇性挑掉氫氣</a:t>
             </a:r>
           </a:p>
           <a:p>
@@ -4936,7 +4940,18 @@
                 <a:ea typeface="標楷體"/>
                 <a:ea typeface="標楷體"/>
               </a:rPr>
-              <a:t>十二、試過但不成立的兩個方法</a:t>
+              <a:t>十一之一、先說明什麼是 </a:t>
+            </a:r>
+            <a:r>
+              <a:rPr sz="2800" b="1" i="0">
+                <a:solidFill>
+                  <a:srgbClr val="000000"/>
+                </a:solidFill>
+                <a:latin typeface="Times New Roman"/>
+                <a:ea typeface="標楷體"/>
+                <a:ea typeface="標楷體"/>
+              </a:rPr>
+              <a:t>PINN</a:t>
             </a:r>
           </a:p>
         </p:txBody>
@@ -5021,7 +5036,7 @@
                 <a:ea typeface="標楷體"/>
                 <a:ea typeface="標楷體"/>
               </a:rPr>
-              <a:t>誠實記錄，避免後續重複投入</a:t>
+              <a:t>後面兩頁會用到，這裡先把它講清楚</a:t>
             </a:r>
           </a:p>
         </p:txBody>
@@ -5111,148 +5126,9 @@
           </a:p>
         </p:txBody>
       </p:sp>
-      <p:sp>
-        <p:nvSpPr>
-          <p:cNvPr id="7" name="TextBox 6"/>
-          <p:cNvSpPr txBox="1"/>
-          <p:nvPr/>
-        </p:nvSpPr>
-        <p:spPr>
-          <a:xfrm>
-            <a:off x="576000" y="1152000"/>
-            <a:ext cx="11041200" cy="2088000"/>
-          </a:xfrm>
-          <a:prstGeom prst="rect">
-            <a:avLst/>
-          </a:prstGeom>
-          <a:noFill/>
-        </p:spPr>
-        <p:txBody>
-          <a:bodyPr wrap="square" anchor="t" lIns="0" rIns="0" tIns="0" bIns="0">
-            <a:spAutoFit/>
-          </a:bodyPr>
-          <a:lstStyle/>
-          <a:p>
-            <a:pPr algn="l">
-              <a:spcAft>
-                <a:spcPts val="800"/>
-              </a:spcAft>
-            </a:pPr>
-            <a:r>
-              <a:rPr sz="2000" b="1" i="0">
-                <a:solidFill>
-                  <a:srgbClr val="000000"/>
-                </a:solidFill>
-                <a:latin typeface="Times New Roman"/>
-                <a:ea typeface="標楷體"/>
-                <a:ea typeface="標楷體"/>
-              </a:rPr>
-              <a:t>① 以「曲率」分離生物與物理</a:t>
-            </a:r>
-          </a:p>
-          <a:p>
-            <a:pPr algn="l">
-              <a:spcAft>
-                <a:spcPts val="1200"/>
-              </a:spcAft>
-            </a:pPr>
-            <a:r>
-              <a:rPr sz="1700" b="0" i="0">
-                <a:solidFill>
-                  <a:srgbClr val="000000"/>
-                </a:solidFill>
-                <a:latin typeface="Times New Roman"/>
-                <a:ea typeface="標楷體"/>
-                <a:ea typeface="標楷體"/>
-              </a:rPr>
-              <a:t>前提是生物速率為定值，但它會隨氫氣耗盡而變動。以已知答案驗證：真實物理份額 0% 時，該方法報出 </a:t>
-            </a:r>
-            <a:r>
-              <a:rPr sz="1900" b="1" i="0">
-                <a:solidFill>
-                  <a:srgbClr val="FF0000"/>
-                </a:solidFill>
-                <a:latin typeface="Times New Roman"/>
-                <a:ea typeface="標楷體"/>
-                <a:ea typeface="標楷體"/>
-              </a:rPr>
-              <a:t>101%</a:t>
-            </a:r>
-            <a:r>
-              <a:rPr sz="1700" b="0" i="0">
-                <a:solidFill>
-                  <a:srgbClr val="000000"/>
-                </a:solidFill>
-                <a:latin typeface="Times New Roman"/>
-                <a:ea typeface="標楷體"/>
-                <a:ea typeface="標楷體"/>
-              </a:rPr>
-              <a:t>。</a:t>
-            </a:r>
-          </a:p>
-          <a:p>
-            <a:pPr algn="l">
-              <a:spcAft>
-                <a:spcPts val="800"/>
-              </a:spcAft>
-            </a:pPr>
-            <a:r>
-              <a:rPr sz="2000" b="1" i="0">
-                <a:solidFill>
-                  <a:srgbClr val="000000"/>
-                </a:solidFill>
-                <a:latin typeface="Times New Roman"/>
-                <a:ea typeface="標楷體"/>
-                <a:ea typeface="標楷體"/>
-              </a:rPr>
-              <a:t>② 以物理資訊神經網路（</a:t>
-            </a:r>
-            <a:r>
-              <a:rPr sz="2000" b="1" i="0">
-                <a:solidFill>
-                  <a:srgbClr val="000000"/>
-                </a:solidFill>
-                <a:latin typeface="Times New Roman"/>
-                <a:ea typeface="標楷體"/>
-                <a:ea typeface="標楷體"/>
-              </a:rPr>
-              <a:t>PINN</a:t>
-            </a:r>
-            <a:r>
-              <a:rPr sz="2000" b="1" i="0">
-                <a:solidFill>
-                  <a:srgbClr val="000000"/>
-                </a:solidFill>
-                <a:latin typeface="Times New Roman"/>
-                <a:ea typeface="標楷體"/>
-                <a:ea typeface="標楷體"/>
-              </a:rPr>
-              <a:t>）反推生物速率</a:t>
-            </a:r>
-          </a:p>
-          <a:p>
-            <a:pPr algn="l">
-              <a:spcAft>
-                <a:spcPts val="600"/>
-              </a:spcAft>
-            </a:pPr>
-            <a:r>
-              <a:rPr sz="1700" b="0" i="0">
-                <a:solidFill>
-                  <a:srgbClr val="000000"/>
-                </a:solidFill>
-                <a:latin typeface="Times New Roman"/>
-                <a:ea typeface="標楷體"/>
-                <a:ea typeface="標楷體"/>
-              </a:rPr>
-              <a:t>方向正確，但方程式本身存在一個恰好抵銷的自由度（見次頁）。</a:t>
-            </a:r>
-          </a:p>
-        </p:txBody>
-      </p:sp>
       <p:pic>
         <p:nvPicPr>
-          <p:cNvPr id="8" name="Picture 7" descr="deck6_pinn.png"/>
+          <p:cNvPr id="7" name="Picture 6" descr="deck11_pinn_what.png"/>
           <p:cNvPicPr>
             <a:picLocks noChangeAspect="1"/>
           </p:cNvPicPr>
@@ -5266,14 +5142,84 @@
         </p:blipFill>
         <p:spPr>
           <a:xfrm>
-            <a:off x="3126599" y="3311999"/>
-            <a:ext cx="5940000" cy="3067973"/>
+            <a:off x="1596599" y="1152000"/>
+            <a:ext cx="9000000" cy="4277636"/>
           </a:xfrm>
           <a:prstGeom prst="rect">
             <a:avLst/>
           </a:prstGeom>
         </p:spPr>
       </p:pic>
+      <p:sp>
+        <p:nvSpPr>
+          <p:cNvPr id="8" name="TextBox 7"/>
+          <p:cNvSpPr txBox="1"/>
+          <p:nvPr/>
+        </p:nvSpPr>
+        <p:spPr>
+          <a:xfrm>
+            <a:off x="576000" y="5555635"/>
+            <a:ext cx="11041200" cy="852364"/>
+          </a:xfrm>
+          <a:prstGeom prst="rect">
+            <a:avLst/>
+          </a:prstGeom>
+          <a:noFill/>
+        </p:spPr>
+        <p:txBody>
+          <a:bodyPr wrap="square" anchor="t" lIns="0" rIns="0" tIns="0" bIns="0">
+            <a:spAutoFit/>
+          </a:bodyPr>
+          <a:lstStyle/>
+          <a:p>
+            <a:pPr algn="ctr">
+              <a:spcAft>
+                <a:spcPts val="600"/>
+              </a:spcAft>
+            </a:pPr>
+            <a:r>
+              <a:rPr sz="1800" b="1" i="0">
+                <a:solidFill>
+                  <a:srgbClr val="000000"/>
+                </a:solidFill>
+                <a:latin typeface="Times New Roman"/>
+                <a:ea typeface="標楷體"/>
+                <a:ea typeface="標楷體"/>
+              </a:rPr>
+              <a:t>一句話：</a:t>
+            </a:r>
+            <a:r>
+              <a:rPr sz="1800" b="0" i="0">
+                <a:solidFill>
+                  <a:srgbClr val="000000"/>
+                </a:solidFill>
+                <a:latin typeface="Times New Roman"/>
+                <a:ea typeface="標楷體"/>
+                <a:ea typeface="標楷體"/>
+              </a:rPr>
+              <a:t>用神經網路取代「固定公式」，但要求它同時滿足物理定律。</a:t>
+            </a:r>
+          </a:p>
+          <a:p>
+            <a:pPr algn="ctr">
+              <a:spcAft>
+                <a:spcPts val="600"/>
+              </a:spcAft>
+            </a:pPr>
+            <a:r>
+              <a:rPr sz="1600" b="0" i="0">
+                <a:solidFill>
+                  <a:srgbClr val="595959"/>
+                </a:solidFill>
+                <a:latin typeface="Times New Roman"/>
+                <a:ea typeface="標楷體"/>
+                <a:ea typeface="標楷體"/>
+              </a:rPr>
+              <a:t>這樣生物速率就不必被假設成固定值——它本來就會隨氫氣耗盡而改變。</a:t>
+            </a:r>
+          </a:p>
+        </p:txBody>
+      </p:sp>
     </p:spTree>
   </p:cSld>
   <p:clrMapOvr>
@@ -5328,29 +5274,7 @@
                 <a:ea typeface="標楷體"/>
                 <a:ea typeface="標楷體"/>
               </a:rPr>
-              <a:t>十二之一、</a:t>
-            </a:r>
-            <a:r>
-              <a:rPr sz="2800" b="1" i="0">
-                <a:solidFill>
-                  <a:srgbClr val="000000"/>
-                </a:solidFill>
-                <a:latin typeface="Times New Roman"/>
-                <a:ea typeface="標楷體"/>
-                <a:ea typeface="標楷體"/>
-              </a:rPr>
-              <a:t>PINN</a:t>
-            </a:r>
-            <a:r>
-              <a:rPr sz="2800" b="1" i="0">
-                <a:solidFill>
-                  <a:srgbClr val="000000"/>
-                </a:solidFill>
-                <a:latin typeface="Times New Roman"/>
-                <a:ea typeface="標楷體"/>
-                <a:ea typeface="標楷體"/>
-              </a:rPr>
-              <a:t> 為什麼撈不回來</a:t>
+              <a:t>十二、試過但不成立的兩個方法</a:t>
             </a:r>
           </a:p>
         </p:txBody>
@@ -5435,7 +5359,7 @@
                 <a:ea typeface="標楷體"/>
                 <a:ea typeface="標楷體"/>
               </a:rPr>
-              <a:t>不是網路不夠大，是壓力這一個通道裡沒有這個資訊</a:t>
+              <a:t>誠實記錄，避免後續重複投入</a:t>
             </a:r>
           </a:p>
         </p:txBody>
@@ -5533,8 +5457,8 @@
         </p:nvSpPr>
         <p:spPr>
           <a:xfrm>
-            <a:off x="576000" y="1116000"/>
-            <a:ext cx="11041200" cy="1152000"/>
+            <a:off x="576000" y="1152000"/>
+            <a:ext cx="11041200" cy="2088000"/>
           </a:xfrm>
           <a:prstGeom prst="rect">
             <a:avLst/>
@@ -5546,6 +5470,104 @@
             <a:spAutoFit/>
           </a:bodyPr>
           <a:lstStyle/>
+          <a:p>
+            <a:pPr algn="l">
+              <a:spcAft>
+                <a:spcPts val="800"/>
+              </a:spcAft>
+            </a:pPr>
+            <a:r>
+              <a:rPr sz="2000" b="1" i="0">
+                <a:solidFill>
+                  <a:srgbClr val="000000"/>
+                </a:solidFill>
+                <a:latin typeface="Times New Roman"/>
+                <a:ea typeface="標楷體"/>
+                <a:ea typeface="標楷體"/>
+              </a:rPr>
+              <a:t>① 以「曲率」分離生物與物理</a:t>
+            </a:r>
+          </a:p>
+          <a:p>
+            <a:pPr algn="l">
+              <a:spcAft>
+                <a:spcPts val="1200"/>
+              </a:spcAft>
+            </a:pPr>
+            <a:r>
+              <a:rPr sz="1700" b="0" i="0">
+                <a:solidFill>
+                  <a:srgbClr val="000000"/>
+                </a:solidFill>
+                <a:latin typeface="Times New Roman"/>
+                <a:ea typeface="標楷體"/>
+                <a:ea typeface="標楷體"/>
+              </a:rPr>
+              <a:t>前提是生物速率為定值，但它會隨氫氣耗盡而變動。以已知答案驗證：真實物理份額 0% 時，該方法報出 </a:t>
+            </a:r>
+            <a:r>
+              <a:rPr sz="1900" b="1" i="0">
+                <a:solidFill>
+                  <a:srgbClr val="FF0000"/>
+                </a:solidFill>
+                <a:latin typeface="Times New Roman"/>
+                <a:ea typeface="標楷體"/>
+                <a:ea typeface="標楷體"/>
+              </a:rPr>
+              <a:t>101%</a:t>
+            </a:r>
+            <a:r>
+              <a:rPr sz="1700" b="0" i="0">
+                <a:solidFill>
+                  <a:srgbClr val="000000"/>
+                </a:solidFill>
+                <a:latin typeface="Times New Roman"/>
+                <a:ea typeface="標楷體"/>
+                <a:ea typeface="標楷體"/>
+              </a:rPr>
+              <a:t>。</a:t>
+            </a:r>
+          </a:p>
+          <a:p>
+            <a:pPr algn="l">
+              <a:spcAft>
+                <a:spcPts val="800"/>
+              </a:spcAft>
+            </a:pPr>
+            <a:r>
+              <a:rPr sz="2000" b="1" i="0">
+                <a:solidFill>
+                  <a:srgbClr val="000000"/>
+                </a:solidFill>
+                <a:latin typeface="Times New Roman"/>
+                <a:ea typeface="標楷體"/>
+                <a:ea typeface="標楷體"/>
+              </a:rPr>
+              <a:t>② 以物理資訊神經網路（</a:t>
+            </a:r>
+            <a:r>
+              <a:rPr sz="2000" b="1" i="0">
+                <a:solidFill>
+                  <a:srgbClr val="000000"/>
+                </a:solidFill>
+                <a:latin typeface="Times New Roman"/>
+                <a:ea typeface="標楷體"/>
+                <a:ea typeface="標楷體"/>
+              </a:rPr>
+              <a:t>PINN</a:t>
+            </a:r>
+            <a:r>
+              <a:rPr sz="2000" b="1" i="0">
+                <a:solidFill>
+                  <a:srgbClr val="000000"/>
+                </a:solidFill>
+                <a:latin typeface="Times New Roman"/>
+                <a:ea typeface="標楷體"/>
+                <a:ea typeface="標楷體"/>
+              </a:rPr>
+              <a:t>）反推生物速率</a:t>
+            </a:r>
+          </a:p>
           <a:p>
             <a:pPr algn="l">
               <a:spcAft>
@@ -5561,36 +5583,14 @@
                 <a:ea typeface="標楷體"/>
                 <a:ea typeface="標楷體"/>
               </a:rPr>
-              <a:t>氣體變少只有兩個原因：溶進水裡（物理）、被菌吃掉（生物）。壓力計只看得到兩者的</a:t>
-            </a:r>
-            <a:r>
-              <a:rPr sz="1900" b="1" i="0">
-                <a:solidFill>
-                  <a:srgbClr val="FF0000"/>
-                </a:solidFill>
-                <a:latin typeface="Times New Roman"/>
-                <a:ea typeface="標楷體"/>
-                <a:ea typeface="標楷體"/>
-              </a:rPr>
-              <a:t>總和</a:t>
-            </a:r>
-            <a:r>
-              <a:rPr sz="1700" b="0" i="0">
-                <a:solidFill>
-                  <a:srgbClr val="000000"/>
-                </a:solidFill>
-                <a:latin typeface="Times New Roman"/>
-                <a:ea typeface="標楷體"/>
-                <a:ea typeface="標楷體"/>
-              </a:rPr>
-              <a:t>。把生物項算多一點、同時把「平衡壓力」調高一點，兩者剛好互相抵銷——壓力曲線一模一樣。</a:t>
+              <a:t>方向正確，但方程式本身存在一個恰好抵銷的自由度（見次頁）。</a:t>
             </a:r>
           </a:p>
         </p:txBody>
       </p:sp>
       <p:pic>
         <p:nvPicPr>
-          <p:cNvPr id="8" name="Picture 7" descr="deck8_pinn_corr.png"/>
+          <p:cNvPr id="8" name="Picture 7" descr="deck6_pinn.png"/>
           <p:cNvPicPr>
             <a:picLocks noChangeAspect="1"/>
           </p:cNvPicPr>
@@ -5604,8 +5604,8 @@
         </p:blipFill>
         <p:spPr>
           <a:xfrm>
-            <a:off x="2136599" y="2340000"/>
-            <a:ext cx="7920000" cy="3743300"/>
+            <a:off x="3126599" y="3311999"/>
+            <a:ext cx="5940000" cy="3067973"/>
           </a:xfrm>
           <a:prstGeom prst="rect">
             <a:avLst/>
@@ -5666,7 +5666,29 @@
                 <a:ea typeface="標楷體"/>
                 <a:ea typeface="標楷體"/>
               </a:rPr>
-              <a:t>十二之二、同一條壓降，兩種完全不同的答案</a:t>
+              <a:t>十二之一、</a:t>
+            </a:r>
+            <a:r>
+              <a:rPr sz="2800" b="1" i="0">
+                <a:solidFill>
+                  <a:srgbClr val="000000"/>
+                </a:solidFill>
+                <a:latin typeface="Times New Roman"/>
+                <a:ea typeface="標楷體"/>
+                <a:ea typeface="標楷體"/>
+              </a:rPr>
+              <a:t>PINN</a:t>
+            </a:r>
+            <a:r>
+              <a:rPr sz="2800" b="1" i="0">
+                <a:solidFill>
+                  <a:srgbClr val="000000"/>
+                </a:solidFill>
+                <a:latin typeface="Times New Roman"/>
+                <a:ea typeface="標楷體"/>
+                <a:ea typeface="標楷體"/>
+              </a:rPr>
+              <a:t> 為什麼撈不回來</a:t>
             </a:r>
           </a:p>
         </p:txBody>
@@ -5751,7 +5773,7 @@
                 <a:ea typeface="標楷體"/>
                 <a:ea typeface="標楷體"/>
               </a:rPr>
-              <a:t>兩者的擬合誤差幾乎相同，資料無從選擇</a:t>
+              <a:t>不是網路不夠大，是壓力這一個通道裡沒有這個資訊</a:t>
             </a:r>
           </a:p>
         </p:txBody>
@@ -5841,9 +5863,72 @@
           </a:p>
         </p:txBody>
       </p:sp>
+      <p:sp>
+        <p:nvSpPr>
+          <p:cNvPr id="7" name="TextBox 6"/>
+          <p:cNvSpPr txBox="1"/>
+          <p:nvPr/>
+        </p:nvSpPr>
+        <p:spPr>
+          <a:xfrm>
+            <a:off x="576000" y="1116000"/>
+            <a:ext cx="11041200" cy="1152000"/>
+          </a:xfrm>
+          <a:prstGeom prst="rect">
+            <a:avLst/>
+          </a:prstGeom>
+          <a:noFill/>
+        </p:spPr>
+        <p:txBody>
+          <a:bodyPr wrap="square" anchor="t" lIns="0" rIns="0" tIns="0" bIns="0">
+            <a:spAutoFit/>
+          </a:bodyPr>
+          <a:lstStyle/>
+          <a:p>
+            <a:pPr algn="l">
+              <a:spcAft>
+                <a:spcPts val="600"/>
+              </a:spcAft>
+            </a:pPr>
+            <a:r>
+              <a:rPr sz="1700" b="0" i="0">
+                <a:solidFill>
+                  <a:srgbClr val="000000"/>
+                </a:solidFill>
+                <a:latin typeface="Times New Roman"/>
+                <a:ea typeface="標楷體"/>
+                <a:ea typeface="標楷體"/>
+              </a:rPr>
+              <a:t>氣體變少只有兩個原因：溶進水裡（物理）、被菌吃掉（生物）。壓力計只看得到兩者的</a:t>
+            </a:r>
+            <a:r>
+              <a:rPr sz="1900" b="1" i="0">
+                <a:solidFill>
+                  <a:srgbClr val="FF0000"/>
+                </a:solidFill>
+                <a:latin typeface="Times New Roman"/>
+                <a:ea typeface="標楷體"/>
+                <a:ea typeface="標楷體"/>
+              </a:rPr>
+              <a:t>總和</a:t>
+            </a:r>
+            <a:r>
+              <a:rPr sz="1700" b="0" i="0">
+                <a:solidFill>
+                  <a:srgbClr val="000000"/>
+                </a:solidFill>
+                <a:latin typeface="Times New Roman"/>
+                <a:ea typeface="標楷體"/>
+                <a:ea typeface="標楷體"/>
+              </a:rPr>
+              <a:t>。把生物項算多一點、同時把「平衡壓力」調高一點，兩者剛好互相抵銷——壓力曲線一模一樣。</a:t>
+            </a:r>
+          </a:p>
+        </p:txBody>
+      </p:sp>
       <p:pic>
         <p:nvPicPr>
-          <p:cNvPr id="7" name="Picture 6" descr="deck7_pinn_features.png"/>
+          <p:cNvPr id="8" name="Picture 7" descr="deck8_pinn_corr.png"/>
           <p:cNvPicPr>
             <a:picLocks noChangeAspect="1"/>
           </p:cNvPicPr>
@@ -5857,99 +5942,14 @@
         </p:blipFill>
         <p:spPr>
           <a:xfrm>
-            <a:off x="1956599" y="1152000"/>
-            <a:ext cx="8280000" cy="4159528"/>
+            <a:off x="2136599" y="2340000"/>
+            <a:ext cx="7920000" cy="3743300"/>
           </a:xfrm>
           <a:prstGeom prst="rect">
             <a:avLst/>
           </a:prstGeom>
         </p:spPr>
       </p:pic>
-      <p:sp>
-        <p:nvSpPr>
-          <p:cNvPr id="8" name="TextBox 7"/>
-          <p:cNvSpPr txBox="1"/>
-          <p:nvPr/>
-        </p:nvSpPr>
-        <p:spPr>
-          <a:xfrm>
-            <a:off x="576000" y="5455528"/>
-            <a:ext cx="11041200" cy="952471"/>
-          </a:xfrm>
-          <a:prstGeom prst="rect">
-            <a:avLst/>
-          </a:prstGeom>
-          <a:noFill/>
-        </p:spPr>
-        <p:txBody>
-          <a:bodyPr wrap="square" anchor="t" lIns="0" rIns="0" tIns="0" bIns="0">
-            <a:spAutoFit/>
-          </a:bodyPr>
-          <a:lstStyle/>
-          <a:p>
-            <a:pPr algn="l">
-              <a:spcAft>
-                <a:spcPts val="600"/>
-              </a:spcAft>
-            </a:pPr>
-            <a:r>
-              <a:rPr sz="1700" b="0" i="0">
-                <a:solidFill>
-                  <a:srgbClr val="000000"/>
-                </a:solidFill>
-                <a:latin typeface="Times New Roman"/>
-                <a:ea typeface="標楷體"/>
-                <a:ea typeface="標楷體"/>
-              </a:rPr>
-              <a:t>但要講清楚：分不開的是生物速率的</a:t>
-            </a:r>
-            <a:r>
-              <a:rPr sz="1900" b="1" i="0">
-                <a:solidFill>
-                  <a:srgbClr val="FF0000"/>
-                </a:solidFill>
-                <a:latin typeface="Times New Roman"/>
-                <a:ea typeface="標楷體"/>
-                <a:ea typeface="標楷體"/>
-              </a:rPr>
-              <a:t>平均值</a:t>
-            </a:r>
-            <a:r>
-              <a:rPr sz="1700" b="0" i="0">
-                <a:solidFill>
-                  <a:srgbClr val="000000"/>
-                </a:solidFill>
-                <a:latin typeface="Times New Roman"/>
-                <a:ea typeface="標楷體"/>
-                <a:ea typeface="標楷體"/>
-              </a:rPr>
-              <a:t>。它的</a:t>
-            </a:r>
-            <a:r>
-              <a:rPr sz="1900" b="1" i="0">
-                <a:solidFill>
-                  <a:srgbClr val="1F6FB5"/>
-                </a:solidFill>
-                <a:latin typeface="Times New Roman"/>
-                <a:ea typeface="標楷體"/>
-                <a:ea typeface="標楷體"/>
-              </a:rPr>
-              <a:t>時間變化</a:t>
-            </a:r>
-            <a:r>
-              <a:rPr sz="1700" b="0" i="0">
-                <a:solidFill>
-                  <a:srgbClr val="000000"/>
-                </a:solidFill>
-                <a:latin typeface="Times New Roman"/>
-                <a:ea typeface="標楷體"/>
-                <a:ea typeface="標楷體"/>
-              </a:rPr>
-              <a:t>其實還留在資料裡（訊噪比 6.0），只是被「速率不可為負」這個設定連帶壓死了——把平均值另外定住，變化的形狀就回來了（相關 0.97）。</a:t>
-            </a:r>
-          </a:p>
-        </p:txBody>
-      </p:sp>
     </p:spTree>
   </p:cSld>
   <p:clrMapOvr>
@@ -6004,7 +6004,7 @@
                 <a:ea typeface="標楷體"/>
                 <a:ea typeface="標楷體"/>
               </a:rPr>
-              <a:t>十二之三、還有另一個解釋：碳酸鹽脫氣</a:t>
+              <a:t>十二之二、同一條壓降，兩種完全不同的答案</a:t>
             </a:r>
           </a:p>
         </p:txBody>
@@ -6089,7 +6089,7 @@
                 <a:ea typeface="標楷體"/>
                 <a:ea typeface="標楷體"/>
               </a:rPr>
-              <a:t>2026-09-23 補充——這個解釋不需要任何洩漏</a:t>
+              <a:t>兩者的擬合誤差幾乎相同，資料無從選擇</a:t>
             </a:r>
           </a:p>
         </p:txBody>
@@ -6181,7 +6181,7 @@
       </p:sp>
       <p:pic>
         <p:nvPicPr>
-          <p:cNvPr id="7" name="Picture 6" descr="deck9_carbonate.png"/>
+          <p:cNvPr id="7" name="Picture 6" descr="deck7_pinn_features.png"/>
           <p:cNvPicPr>
             <a:picLocks noChangeAspect="1"/>
           </p:cNvPicPr>
@@ -6195,8 +6195,8 @@
         </p:blipFill>
         <p:spPr>
           <a:xfrm>
-            <a:off x="1956599" y="1188000"/>
-            <a:ext cx="8280000" cy="4247456"/>
+            <a:off x="1956599" y="1152000"/>
+            <a:ext cx="8280000" cy="4159528"/>
           </a:xfrm>
           <a:prstGeom prst="rect">
             <a:avLst/>
@@ -6211,8 +6211,8 @@
         </p:nvSpPr>
         <p:spPr>
           <a:xfrm>
-            <a:off x="576000" y="5561455"/>
-            <a:ext cx="11041200" cy="846544"/>
+            <a:off x="576000" y="5455528"/>
+            <a:ext cx="11041200" cy="952471"/>
           </a:xfrm>
           <a:prstGeom prst="rect">
             <a:avLst/>
@@ -6225,7 +6225,7 @@
           </a:bodyPr>
           <a:lstStyle/>
           <a:p>
-            <a:pPr algn="ctr">
+            <a:pPr algn="l">
               <a:spcAft>
                 <a:spcPts val="600"/>
               </a:spcAft>
@@ -6239,10 +6239,10 @@
                 <a:ea typeface="標楷體"/>
                 <a:ea typeface="標楷體"/>
               </a:rPr>
-              <a:t>量級檢查：只需 </a:t>
-            </a:r>
-            <a:r>
-              <a:rPr sz="2000" b="1" i="0">
+              <a:t>但要講清楚：分不開的是生物速率的</a:t>
+            </a:r>
+            <a:r>
+              <a:rPr sz="1900" b="1" i="0">
                 <a:solidFill>
                   <a:srgbClr val="FF0000"/>
                 </a:solidFill>
@@ -6250,7 +6250,7 @@
                 <a:ea typeface="標楷體"/>
                 <a:ea typeface="標楷體"/>
               </a:rPr>
-              <a:t>2.6%</a:t>
+              <a:t>平均值</a:t>
             </a:r>
             <a:r>
               <a:rPr sz="1700" b="0" i="0">
@@ -6261,91 +6261,29 @@
                 <a:ea typeface="標楷體"/>
                 <a:ea typeface="標楷體"/>
               </a:rPr>
-              <a:t> 的液相碳庫在排氣瞬間冒出來，就足以解釋觀測到的全部偏離。</a:t>
-            </a:r>
-          </a:p>
-          <a:p>
-            <a:pPr algn="ctr">
-              <a:spcAft>
-                <a:spcPts val="600"/>
-              </a:spcAft>
-            </a:pPr>
-            <a:r>
-              <a:rPr sz="1400" b="0" i="0">
-                <a:solidFill>
-                  <a:srgbClr val="595959"/>
-                </a:solidFill>
-                <a:latin typeface="Times New Roman"/>
-                <a:ea typeface="標楷體"/>
-                <a:ea typeface="標楷體"/>
-              </a:rPr>
-              <a:t>方向性檢驗（壓降越大應脫越多）實測 </a:t>
-            </a:r>
-            <a:r>
-              <a:rPr sz="1400" b="0" i="1">
-                <a:solidFill>
-                  <a:srgbClr val="595959"/>
-                </a:solidFill>
-                <a:latin typeface="Times New Roman"/>
-                <a:ea typeface="標楷體"/>
-                <a:ea typeface="標楷體"/>
-              </a:rPr>
-              <a:t>ρ</a:t>
-            </a:r>
-            <a:r>
-              <a:rPr sz="1400" b="0" i="0">
-                <a:solidFill>
-                  <a:srgbClr val="595959"/>
-                </a:solidFill>
-                <a:latin typeface="Times New Roman"/>
-                <a:ea typeface="標楷體"/>
-                <a:ea typeface="標楷體"/>
-              </a:rPr>
-              <a:t>=+0.21，方向符合，但 35 筆的可偵測門檻是 0.46，樣本不足以分辨；排氣後立刻補氣會降 </a:t>
-            </a:r>
-            <a:r>
-              <a:rPr sz="1400" b="0" i="0">
-                <a:solidFill>
-                  <a:srgbClr val="595959"/>
-                </a:solidFill>
-                <a:latin typeface="Times New Roman"/>
-                <a:ea typeface="標楷體"/>
-                <a:ea typeface="標楷體"/>
-              </a:rPr>
-              <a:t>pH</a:t>
-            </a:r>
-            <a:r>
-              <a:rPr sz="1400" b="0" i="0">
-                <a:solidFill>
-                  <a:srgbClr val="595959"/>
-                </a:solidFill>
-                <a:latin typeface="Times New Roman"/>
-                <a:ea typeface="標楷體"/>
-                <a:ea typeface="標楷體"/>
-              </a:rPr>
-              <a:t>，故 </a:t>
-            </a:r>
-            <a:r>
-              <a:rPr sz="1400" b="0" i="0">
-                <a:solidFill>
-                  <a:srgbClr val="595959"/>
-                </a:solidFill>
-                <a:latin typeface="Times New Roman"/>
-                <a:ea typeface="標楷體"/>
-                <a:ea typeface="標楷體"/>
-              </a:rPr>
-              <a:t>pH</a:t>
-            </a:r>
-            <a:r>
-              <a:rPr sz="1400" b="0" i="0">
-                <a:solidFill>
-                  <a:srgbClr val="595959"/>
-                </a:solidFill>
-                <a:latin typeface="Times New Roman"/>
-                <a:ea typeface="標楷體"/>
-                <a:ea typeface="標楷體"/>
-              </a:rPr>
-              <a:t> 檢驗遭混淆、不可單獨解讀。</a:t>
+              <a:t>。它的</a:t>
+            </a:r>
+            <a:r>
+              <a:rPr sz="1900" b="1" i="0">
+                <a:solidFill>
+                  <a:srgbClr val="1F6FB5"/>
+                </a:solidFill>
+                <a:latin typeface="Times New Roman"/>
+                <a:ea typeface="標楷體"/>
+                <a:ea typeface="標楷體"/>
+              </a:rPr>
+              <a:t>時間變化</a:t>
+            </a:r>
+            <a:r>
+              <a:rPr sz="1700" b="0" i="0">
+                <a:solidFill>
+                  <a:srgbClr val="000000"/>
+                </a:solidFill>
+                <a:latin typeface="Times New Roman"/>
+                <a:ea typeface="標楷體"/>
+                <a:ea typeface="標楷體"/>
+              </a:rPr>
+              <a:t>其實還留在資料裡（訊噪比 6.0），只是被「速率不可為負」這個設定連帶壓死了——把平均值另外定住，變化的形狀就回來了（相關 0.97）。</a:t>
             </a:r>
           </a:p>
         </p:txBody>
@@ -6404,51 +6342,7 @@
                 <a:ea typeface="標楷體"/>
                 <a:ea typeface="標楷體"/>
               </a:rPr>
-              <a:t>十二之四、</a:t>
-            </a:r>
-            <a:r>
-              <a:rPr sz="2800" b="1" i="0">
-                <a:solidFill>
-                  <a:srgbClr val="000000"/>
-                </a:solidFill>
-                <a:latin typeface="Times New Roman"/>
-                <a:ea typeface="標楷體"/>
-                <a:ea typeface="標楷體"/>
-              </a:rPr>
-              <a:t>ORP</a:t>
-            </a:r>
-            <a:r>
-              <a:rPr sz="2800" b="1" i="0">
-                <a:solidFill>
-                  <a:srgbClr val="000000"/>
-                </a:solidFill>
-                <a:latin typeface="Times New Roman"/>
-                <a:ea typeface="標楷體"/>
-                <a:ea typeface="標楷體"/>
-              </a:rPr>
-              <a:t> 與 </a:t>
-            </a:r>
-            <a:r>
-              <a:rPr sz="2800" b="1" i="0">
-                <a:solidFill>
-                  <a:srgbClr val="000000"/>
-                </a:solidFill>
-                <a:latin typeface="Times New Roman"/>
-                <a:ea typeface="標楷體"/>
-                <a:ea typeface="標楷體"/>
-              </a:rPr>
-              <a:t>pH</a:t>
-            </a:r>
-            <a:r>
-              <a:rPr sz="2800" b="1" i="0">
-                <a:solidFill>
-                  <a:srgbClr val="000000"/>
-                </a:solidFill>
-                <a:latin typeface="Times New Roman"/>
-                <a:ea typeface="標楷體"/>
-                <a:ea typeface="標楷體"/>
-              </a:rPr>
-              <a:t> 的關聯到底長什麼樣</a:t>
+              <a:t>十二之三、還有另一個解釋：碳酸鹽脫氣</a:t>
             </a:r>
           </a:p>
         </p:txBody>
@@ -6533,7 +6427,7 @@
                 <a:ea typeface="標楷體"/>
                 <a:ea typeface="標楷體"/>
               </a:rPr>
-              <a:t>現場觀察到兩者有關聯——資料顯示有，但不是想像的那種</a:t>
+              <a:t>2026-09-23 補充——這個解釋不需要任何洩漏</a:t>
             </a:r>
           </a:p>
         </p:txBody>
@@ -6625,7 +6519,7 @@
       </p:sp>
       <p:pic>
         <p:nvPicPr>
-          <p:cNvPr id="7" name="Picture 6" descr="deck10_coupling.png"/>
+          <p:cNvPr id="7" name="Picture 6" descr="deck9_carbonate.png"/>
           <p:cNvPicPr>
             <a:picLocks noChangeAspect="1"/>
           </p:cNvPicPr>
@@ -6639,8 +6533,8 @@
         </p:blipFill>
         <p:spPr>
           <a:xfrm>
-            <a:off x="1776599" y="1188000"/>
-            <a:ext cx="8640000" cy="3853072"/>
+            <a:off x="1956599" y="1188000"/>
+            <a:ext cx="8280000" cy="4247456"/>
           </a:xfrm>
           <a:prstGeom prst="rect">
             <a:avLst/>
@@ -6655,8 +6549,8 @@
         </p:nvSpPr>
         <p:spPr>
           <a:xfrm>
-            <a:off x="576000" y="5149072"/>
-            <a:ext cx="11041200" cy="1258928"/>
+            <a:off x="576000" y="5561455"/>
+            <a:ext cx="11041200" cy="846544"/>
           </a:xfrm>
           <a:prstGeom prst="rect">
             <a:avLst/>
@@ -6669,7 +6563,7 @@
           </a:bodyPr>
           <a:lstStyle/>
           <a:p>
-            <a:pPr algn="l">
+            <a:pPr algn="ctr">
               <a:spcAft>
                 <a:spcPts val="600"/>
               </a:spcAft>
@@ -6683,7 +6577,18 @@
                 <a:ea typeface="標楷體"/>
                 <a:ea typeface="標楷體"/>
               </a:rPr>
-              <a:t>關聯確實存在，但是「</a:t>
+              <a:t>量級檢查：只需 </a:t>
+            </a:r>
+            <a:r>
+              <a:rPr sz="2000" b="1" i="0">
+                <a:solidFill>
+                  <a:srgbClr val="FF0000"/>
+                </a:solidFill>
+                <a:latin typeface="Times New Roman"/>
+                <a:ea typeface="標楷體"/>
+                <a:ea typeface="標楷體"/>
+              </a:rPr>
+              <a:t>2.6%</a:t>
             </a:r>
             <a:r>
               <a:rPr sz="1700" b="0" i="0">
@@ -6694,23 +6599,52 @@
                 <a:ea typeface="標楷體"/>
                 <a:ea typeface="標楷體"/>
               </a:rPr>
-              <a:t>ORP</a:t>
-            </a:r>
-            <a:r>
-              <a:rPr sz="1700" b="0" i="0">
-                <a:solidFill>
-                  <a:srgbClr val="000000"/>
-                </a:solidFill>
-                <a:latin typeface="Times New Roman"/>
-                <a:ea typeface="標楷體"/>
-                <a:ea typeface="標楷體"/>
-              </a:rPr>
-              <a:t> 的水準」對「</a:t>
-            </a:r>
-            <a:r>
-              <a:rPr sz="1700" b="0" i="0">
-                <a:solidFill>
-                  <a:srgbClr val="000000"/>
+              <a:t> 的液相碳庫在排氣瞬間冒出來，就足以解釋觀測到的全部偏離。</a:t>
+            </a:r>
+          </a:p>
+          <a:p>
+            <a:pPr algn="ctr">
+              <a:spcAft>
+                <a:spcPts val="600"/>
+              </a:spcAft>
+            </a:pPr>
+            <a:r>
+              <a:rPr sz="1400" b="0" i="0">
+                <a:solidFill>
+                  <a:srgbClr val="595959"/>
+                </a:solidFill>
+                <a:latin typeface="Times New Roman"/>
+                <a:ea typeface="標楷體"/>
+                <a:ea typeface="標楷體"/>
+              </a:rPr>
+              <a:t>方向性檢驗（壓降越大應脫越多）實測 </a:t>
+            </a:r>
+            <a:r>
+              <a:rPr sz="1400" b="0" i="1">
+                <a:solidFill>
+                  <a:srgbClr val="595959"/>
+                </a:solidFill>
+                <a:latin typeface="Times New Roman"/>
+                <a:ea typeface="標楷體"/>
+                <a:ea typeface="標楷體"/>
+              </a:rPr>
+              <a:t>ρ</a:t>
+            </a:r>
+            <a:r>
+              <a:rPr sz="1400" b="0" i="0">
+                <a:solidFill>
+                  <a:srgbClr val="595959"/>
+                </a:solidFill>
+                <a:latin typeface="Times New Roman"/>
+                <a:ea typeface="標楷體"/>
+                <a:ea typeface="標楷體"/>
+              </a:rPr>
+              <a:t>=+0.21，方向符合，但 35 筆的可偵測門檻是 0.46，樣本不足以分辨；排氣後立刻補氣會降 </a:t>
+            </a:r>
+            <a:r>
+              <a:rPr sz="1400" b="0" i="0">
+                <a:solidFill>
+                  <a:srgbClr val="595959"/>
                 </a:solidFill>
                 <a:latin typeface="Times New Roman"/>
                 <a:ea typeface="標楷體"/>
@@ -6719,42 +6653,20 @@
               <a:t>pH</a:t>
             </a:r>
             <a:r>
-              <a:rPr sz="1700" b="0" i="0">
-                <a:solidFill>
-                  <a:srgbClr val="000000"/>
-                </a:solidFill>
-                <a:latin typeface="Times New Roman"/>
-                <a:ea typeface="標楷體"/>
-                <a:ea typeface="標楷體"/>
-              </a:rPr>
-              <a:t> 的變化」；</a:t>
-            </a:r>
-            <a:r>
-              <a:rPr sz="1700" b="0" i="0">
-                <a:solidFill>
-                  <a:srgbClr val="000000"/>
-                </a:solidFill>
-                <a:latin typeface="Times New Roman"/>
-                <a:ea typeface="標楷體"/>
-                <a:ea typeface="標楷體"/>
-              </a:rPr>
-              <a:t>ORP</a:t>
-            </a:r>
-            <a:r>
-              <a:rPr sz="1700" b="0" i="0">
-                <a:solidFill>
-                  <a:srgbClr val="000000"/>
-                </a:solidFill>
-                <a:latin typeface="Times New Roman"/>
-                <a:ea typeface="標楷體"/>
-                <a:ea typeface="標楷體"/>
-              </a:rPr>
-              <a:t> 與 </a:t>
-            </a:r>
-            <a:r>
-              <a:rPr sz="1700" b="0" i="0">
-                <a:solidFill>
-                  <a:srgbClr val="000000"/>
+              <a:rPr sz="1400" b="0" i="0">
+                <a:solidFill>
+                  <a:srgbClr val="595959"/>
+                </a:solidFill>
+                <a:latin typeface="Times New Roman"/>
+                <a:ea typeface="標楷體"/>
+                <a:ea typeface="標楷體"/>
+              </a:rPr>
+              <a:t>，故 </a:t>
+            </a:r>
+            <a:r>
+              <a:rPr sz="1400" b="0" i="0">
+                <a:solidFill>
+                  <a:srgbClr val="595959"/>
                 </a:solidFill>
                 <a:latin typeface="Times New Roman"/>
                 <a:ea typeface="標楷體"/>
@@ -6763,37 +6675,15 @@
               <a:t>pH</a:t>
             </a:r>
             <a:r>
-              <a:rPr sz="1700" b="0" i="0">
-                <a:solidFill>
-                  <a:srgbClr val="000000"/>
-                </a:solidFill>
-                <a:latin typeface="Times New Roman"/>
-                <a:ea typeface="標楷體"/>
-                <a:ea typeface="標楷體"/>
-              </a:rPr>
-              <a:t> 的</a:t>
-            </a:r>
-            <a:r>
-              <a:rPr sz="1900" b="1" i="0">
-                <a:solidFill>
-                  <a:srgbClr val="FF0000"/>
-                </a:solidFill>
-                <a:latin typeface="Times New Roman"/>
-                <a:ea typeface="標楷體"/>
-                <a:ea typeface="標楷體"/>
-              </a:rPr>
-              <a:t>變化量之間幾乎無關</a:t>
-            </a:r>
-            <a:r>
-              <a:rPr sz="1700" b="0" i="0">
-                <a:solidFill>
-                  <a:srgbClr val="000000"/>
-                </a:solidFill>
-                <a:latin typeface="Times New Roman"/>
-                <a:ea typeface="標楷體"/>
-                <a:ea typeface="標楷體"/>
-              </a:rPr>
-              <a:t>（+0.02）。扣掉時間漂移後這些關聯幾乎不變，故不是時間造成的。</a:t>
+              <a:rPr sz="1400" b="0" i="0">
+                <a:solidFill>
+                  <a:srgbClr val="595959"/>
+                </a:solidFill>
+                <a:latin typeface="Times New Roman"/>
+                <a:ea typeface="標楷體"/>
+                <a:ea typeface="標楷體"/>
+              </a:rPr>
+              <a:t> 檢驗遭混淆、不可單獨解讀。</a:t>
             </a:r>
           </a:p>
         </p:txBody>
@@ -6852,7 +6742,51 @@
                 <a:ea typeface="標楷體"/>
                 <a:ea typeface="標楷體"/>
               </a:rPr>
-              <a:t>十三、本分析的限制</a:t>
+              <a:t>十二之四、</a:t>
+            </a:r>
+            <a:r>
+              <a:rPr sz="2800" b="1" i="0">
+                <a:solidFill>
+                  <a:srgbClr val="000000"/>
+                </a:solidFill>
+                <a:latin typeface="Times New Roman"/>
+                <a:ea typeface="標楷體"/>
+                <a:ea typeface="標楷體"/>
+              </a:rPr>
+              <a:t>ORP</a:t>
+            </a:r>
+            <a:r>
+              <a:rPr sz="2800" b="1" i="0">
+                <a:solidFill>
+                  <a:srgbClr val="000000"/>
+                </a:solidFill>
+                <a:latin typeface="Times New Roman"/>
+                <a:ea typeface="標楷體"/>
+                <a:ea typeface="標楷體"/>
+              </a:rPr>
+              <a:t> 與 </a:t>
+            </a:r>
+            <a:r>
+              <a:rPr sz="2800" b="1" i="0">
+                <a:solidFill>
+                  <a:srgbClr val="000000"/>
+                </a:solidFill>
+                <a:latin typeface="Times New Roman"/>
+                <a:ea typeface="標楷體"/>
+                <a:ea typeface="標楷體"/>
+              </a:rPr>
+              <a:t>pH</a:t>
+            </a:r>
+            <a:r>
+              <a:rPr sz="2800" b="1" i="0">
+                <a:solidFill>
+                  <a:srgbClr val="000000"/>
+                </a:solidFill>
+                <a:latin typeface="Times New Roman"/>
+                <a:ea typeface="標楷體"/>
+                <a:ea typeface="標楷體"/>
+              </a:rPr>
+              <a:t> 的關聯到底長什麼樣</a:t>
             </a:r>
           </a:p>
         </p:txBody>
@@ -6937,7 +6871,7 @@
                 <a:ea typeface="標楷體"/>
                 <a:ea typeface="標楷體"/>
               </a:rPr>
-              <a:t>引用時應一併說明</a:t>
+              <a:t>現場觀察到兩者有關聯——資料顯示有，但不是想像的那種</a:t>
             </a:r>
           </a:p>
         </p:txBody>
@@ -7027,16 +6961,40 @@
           </a:p>
         </p:txBody>
       </p:sp>
-      <p:sp>
-        <p:nvSpPr>
-          <p:cNvPr id="7" name="TextBox 6"/>
+      <p:pic>
+        <p:nvPicPr>
+          <p:cNvPr id="7" name="Picture 6" descr="deck10_coupling.png"/>
+          <p:cNvPicPr>
+            <a:picLocks noChangeAspect="1"/>
+          </p:cNvPicPr>
+          <p:nvPr/>
+        </p:nvPicPr>
+        <p:blipFill>
+          <a:blip r:embed="rId2"/>
+          <a:stretch>
+            <a:fillRect/>
+          </a:stretch>
+        </p:blipFill>
+        <p:spPr>
+          <a:xfrm>
+            <a:off x="1776599" y="1188000"/>
+            <a:ext cx="8640000" cy="3853072"/>
+          </a:xfrm>
+          <a:prstGeom prst="rect">
+            <a:avLst/>
+          </a:prstGeom>
+        </p:spPr>
+      </p:pic>
+      <p:sp>
+        <p:nvSpPr>
+          <p:cNvPr id="8" name="TextBox 7"/>
           <p:cNvSpPr txBox="1"/>
           <p:nvPr/>
         </p:nvSpPr>
         <p:spPr>
           <a:xfrm>
-            <a:off x="576000" y="1440000"/>
-            <a:ext cx="11041200" cy="4320000"/>
+            <a:off x="576000" y="5149072"/>
+            <a:ext cx="11041200" cy="1258928"/>
           </a:xfrm>
           <a:prstGeom prst="rect">
             <a:avLst/>
@@ -7051,11 +7009,11 @@
           <a:p>
             <a:pPr algn="l">
               <a:spcAft>
-                <a:spcPts val="1600"/>
+                <a:spcPts val="600"/>
               </a:spcAft>
             </a:pPr>
             <a:r>
-              <a:rPr sz="1800" b="0" i="0">
+              <a:rPr sz="1700" b="0" i="0">
                 <a:solidFill>
                   <a:srgbClr val="000000"/>
                 </a:solidFill>
@@ -7063,17 +7021,10 @@
                 <a:ea typeface="標楷體"/>
                 <a:ea typeface="標楷體"/>
               </a:rPr>
-              <a:t>• 氫氣濃度為差額推算，非直接量測（分析儀僅量二氧化碳與甲烷）</a:t>
-            </a:r>
-          </a:p>
-          <a:p>
-            <a:pPr algn="l">
-              <a:spcAft>
-                <a:spcPts val="1600"/>
-              </a:spcAft>
-            </a:pPr>
-            <a:r>
-              <a:rPr sz="1800" b="0" i="0">
+              <a:t>關聯確實存在，但是「</a:t>
+            </a:r>
+            <a:r>
+              <a:rPr sz="1700" b="0" i="0">
                 <a:solidFill>
                   <a:srgbClr val="000000"/>
                 </a:solidFill>
@@ -7081,17 +7032,10 @@
                 <a:ea typeface="標楷體"/>
                 <a:ea typeface="標楷體"/>
               </a:rPr>
-              <a:t>• 無法區分氫氣流失的機制：洩漏、穿透、或其他耗氫生化反應</a:t>
-            </a:r>
-          </a:p>
-          <a:p>
-            <a:pPr algn="l">
-              <a:spcAft>
-                <a:spcPts val="1600"/>
-              </a:spcAft>
-            </a:pPr>
-            <a:r>
-              <a:rPr sz="1800" b="0" i="0">
+              <a:t>ORP</a:t>
+            </a:r>
+            <a:r>
+              <a:rPr sz="1700" b="0" i="0">
                 <a:solidFill>
                   <a:srgbClr val="000000"/>
                 </a:solidFill>
@@ -7099,17 +7043,10 @@
                 <a:ea typeface="標楷體"/>
                 <a:ea typeface="標楷體"/>
               </a:rPr>
-              <a:t>• 僅 35 筆可用的氣體組成資料，平均每 11 天一筆</a:t>
-            </a:r>
-          </a:p>
-          <a:p>
-            <a:pPr algn="l">
-              <a:spcAft>
-                <a:spcPts val="1600"/>
-              </a:spcAft>
-            </a:pPr>
-            <a:r>
-              <a:rPr sz="1800" b="0" i="0">
+              <a:t> 的水準」對「</a:t>
+            </a:r>
+            <a:r>
+              <a:rPr sz="1700" b="0" i="0">
                 <a:solidFill>
                   <a:srgbClr val="000000"/>
                 </a:solidFill>
@@ -7117,17 +7054,10 @@
                 <a:ea typeface="標楷體"/>
                 <a:ea typeface="標楷體"/>
               </a:rPr>
-              <a:t>• 碳源中斷時進料組成同時改變，兩時段的差異不僅限於碳源有無</a:t>
-            </a:r>
-          </a:p>
-          <a:p>
-            <a:pPr algn="l">
-              <a:spcAft>
-                <a:spcPts val="1600"/>
-              </a:spcAft>
-            </a:pPr>
-            <a:r>
-              <a:rPr sz="1800" b="0" i="0">
+              <a:t>pH</a:t>
+            </a:r>
+            <a:r>
+              <a:rPr sz="1700" b="0" i="0">
                 <a:solidFill>
                   <a:srgbClr val="000000"/>
                 </a:solidFill>
@@ -7135,7 +7065,73 @@
                 <a:ea typeface="標楷體"/>
                 <a:ea typeface="標楷體"/>
               </a:rPr>
-              <a:t>• 酸鹼值的結果效應量極小（約為儀器刻度的七分之一），屬方向性證據</a:t>
+              <a:t> 的變化」；</a:t>
+            </a:r>
+            <a:r>
+              <a:rPr sz="1700" b="0" i="0">
+                <a:solidFill>
+                  <a:srgbClr val="000000"/>
+                </a:solidFill>
+                <a:latin typeface="Times New Roman"/>
+                <a:ea typeface="標楷體"/>
+                <a:ea typeface="標楷體"/>
+              </a:rPr>
+              <a:t>ORP</a:t>
+            </a:r>
+            <a:r>
+              <a:rPr sz="1700" b="0" i="0">
+                <a:solidFill>
+                  <a:srgbClr val="000000"/>
+                </a:solidFill>
+                <a:latin typeface="Times New Roman"/>
+                <a:ea typeface="標楷體"/>
+                <a:ea typeface="標楷體"/>
+              </a:rPr>
+              <a:t> 與 </a:t>
+            </a:r>
+            <a:r>
+              <a:rPr sz="1700" b="0" i="0">
+                <a:solidFill>
+                  <a:srgbClr val="000000"/>
+                </a:solidFill>
+                <a:latin typeface="Times New Roman"/>
+                <a:ea typeface="標楷體"/>
+                <a:ea typeface="標楷體"/>
+              </a:rPr>
+              <a:t>pH</a:t>
+            </a:r>
+            <a:r>
+              <a:rPr sz="1700" b="0" i="0">
+                <a:solidFill>
+                  <a:srgbClr val="000000"/>
+                </a:solidFill>
+                <a:latin typeface="Times New Roman"/>
+                <a:ea typeface="標楷體"/>
+                <a:ea typeface="標楷體"/>
+              </a:rPr>
+              <a:t> 的</a:t>
+            </a:r>
+            <a:r>
+              <a:rPr sz="1900" b="1" i="0">
+                <a:solidFill>
+                  <a:srgbClr val="FF0000"/>
+                </a:solidFill>
+                <a:latin typeface="Times New Roman"/>
+                <a:ea typeface="標楷體"/>
+                <a:ea typeface="標楷體"/>
+              </a:rPr>
+              <a:t>變化量之間幾乎無關</a:t>
+            </a:r>
+            <a:r>
+              <a:rPr sz="1700" b="0" i="0">
+                <a:solidFill>
+                  <a:srgbClr val="000000"/>
+                </a:solidFill>
+                <a:latin typeface="Times New Roman"/>
+                <a:ea typeface="標楷體"/>
+                <a:ea typeface="標楷體"/>
+              </a:rPr>
+              <a:t>（+0.02）。扣掉時間漂移後這些關聯幾乎不變，故不是時間造成的。</a:t>
             </a:r>
           </a:p>
         </p:txBody>
@@ -7194,7 +7190,7 @@
                 <a:ea typeface="標楷體"/>
                 <a:ea typeface="標楷體"/>
               </a:rPr>
-              <a:t>十四、建議</a:t>
+              <a:t>十二之五、第三個解釋：排氣本身就會挑掉氫氣</a:t>
             </a:r>
           </a:p>
         </p:txBody>
@@ -7279,7 +7275,7 @@
                 <a:ea typeface="標楷體"/>
                 <a:ea typeface="標楷體"/>
               </a:rPr>
-              <a:t>第一項完成前，其餘方向都無法定案</a:t>
+              <a:t>2026-09-27 補充——這也不需要洩漏</a:t>
             </a:r>
           </a:p>
         </p:txBody>
@@ -7365,6 +7361,1700 @@
                 <a:ea typeface="標楷體"/>
               </a:rPr>
               <a:t>20</a:t>
+            </a:r>
+          </a:p>
+        </p:txBody>
+      </p:sp>
+      <p:pic>
+        <p:nvPicPr>
+          <p:cNvPr id="7" name="Picture 6" descr="deck13_ventloss.png"/>
+          <p:cNvPicPr>
+            <a:picLocks noChangeAspect="1"/>
+          </p:cNvPicPr>
+          <p:nvPr/>
+        </p:nvPicPr>
+        <p:blipFill>
+          <a:blip r:embed="rId2"/>
+          <a:stretch>
+            <a:fillRect/>
+          </a:stretch>
+        </p:blipFill>
+        <p:spPr>
+          <a:xfrm>
+            <a:off x="1596599" y="1152000"/>
+            <a:ext cx="9000000" cy="4958613"/>
+          </a:xfrm>
+          <a:prstGeom prst="rect">
+            <a:avLst/>
+          </a:prstGeom>
+        </p:spPr>
+      </p:pic>
+      <p:sp>
+        <p:nvSpPr>
+          <p:cNvPr id="8" name="TextBox 7"/>
+          <p:cNvSpPr txBox="1"/>
+          <p:nvPr/>
+        </p:nvSpPr>
+        <p:spPr>
+          <a:xfrm>
+            <a:off x="576000" y="6218613"/>
+            <a:ext cx="11041200" cy="189386"/>
+          </a:xfrm>
+          <a:prstGeom prst="rect">
+            <a:avLst/>
+          </a:prstGeom>
+          <a:noFill/>
+        </p:spPr>
+        <p:txBody>
+          <a:bodyPr wrap="square" anchor="t" lIns="0" rIns="0" tIns="0" bIns="0">
+            <a:spAutoFit/>
+          </a:bodyPr>
+          <a:lstStyle/>
+          <a:p>
+            <a:pPr algn="ctr">
+              <a:spcAft>
+                <a:spcPts val="600"/>
+              </a:spcAft>
+            </a:pPr>
+            <a:r>
+              <a:rPr sz="1700" b="0" i="0">
+                <a:solidFill>
+                  <a:srgbClr val="000000"/>
+                </a:solidFill>
+                <a:latin typeface="Times New Roman"/>
+                <a:ea typeface="標楷體"/>
+                <a:ea typeface="標楷體"/>
+              </a:rPr>
+              <a:t>另一項更正：先前偵測到的排氣只有 </a:t>
+            </a:r>
+            <a:r>
+              <a:rPr sz="1900" b="1" i="0">
+                <a:solidFill>
+                  <a:srgbClr val="000000"/>
+                </a:solidFill>
+                <a:latin typeface="Times New Roman"/>
+                <a:ea typeface="標楷體"/>
+                <a:ea typeface="標楷體"/>
+              </a:rPr>
+              <a:t>35 次</a:t>
+            </a:r>
+            <a:r>
+              <a:rPr sz="1700" b="0" i="0">
+                <a:solidFill>
+                  <a:srgbClr val="000000"/>
+                </a:solidFill>
+                <a:latin typeface="Times New Roman"/>
+                <a:ea typeface="標楷體"/>
+                <a:ea typeface="標楷體"/>
+              </a:rPr>
+              <a:t>（限有氣體組成者），以壓力驟降重新偵測後實際有 </a:t>
+            </a:r>
+            <a:r>
+              <a:rPr sz="1900" b="1" i="0">
+                <a:solidFill>
+                  <a:srgbClr val="FF0000"/>
+                </a:solidFill>
+                <a:latin typeface="Times New Roman"/>
+                <a:ea typeface="標楷體"/>
+                <a:ea typeface="標楷體"/>
+              </a:rPr>
+              <a:t>108 次</a:t>
+            </a:r>
+            <a:r>
+              <a:rPr sz="1700" b="0" i="0">
+                <a:solidFill>
+                  <a:srgbClr val="000000"/>
+                </a:solidFill>
+                <a:latin typeface="Times New Roman"/>
+                <a:ea typeface="標楷體"/>
+                <a:ea typeface="標楷體"/>
+              </a:rPr>
+              <a:t>。</a:t>
+            </a:r>
+          </a:p>
+        </p:txBody>
+      </p:sp>
+    </p:spTree>
+  </p:cSld>
+  <p:clrMapOvr>
+    <a:masterClrMapping/>
+  </p:clrMapOvr>
+</p:sld>
+</file>
+
+<file path=ppt/slides/slide2.xml><?xml version="1.0" encoding="utf-8"?>
+<p:sld xmlns:a="http://schemas.openxmlformats.org/drawingml/2006/main" xmlns:p="http://schemas.openxmlformats.org/presentationml/2006/main" xmlns:r="http://schemas.openxmlformats.org/officeDocument/2006/relationships">
+  <p:cSld>
+    <p:spTree>
+      <p:nvGrpSpPr>
+        <p:cNvPr id="1" name=""/>
+        <p:cNvGrpSpPr/>
+        <p:nvPr/>
+      </p:nvGrpSpPr>
+      <p:grpSpPr/>
+      <p:sp>
+        <p:nvSpPr>
+          <p:cNvPr id="2" name="TextBox 1"/>
+          <p:cNvSpPr txBox="1"/>
+          <p:nvPr/>
+        </p:nvSpPr>
+        <p:spPr>
+          <a:xfrm>
+            <a:off x="432000" y="180000"/>
+            <a:ext cx="11329200" cy="540000"/>
+          </a:xfrm>
+          <a:prstGeom prst="rect">
+            <a:avLst/>
+          </a:prstGeom>
+          <a:noFill/>
+        </p:spPr>
+        <p:txBody>
+          <a:bodyPr wrap="square" anchor="t" lIns="0" rIns="0" tIns="0" bIns="0">
+            <a:spAutoFit/>
+          </a:bodyPr>
+          <a:lstStyle/>
+          <a:p>
+            <a:pPr algn="ctr">
+              <a:spcAft>
+                <a:spcPts val="0"/>
+              </a:spcAft>
+            </a:pPr>
+            <a:r>
+              <a:rPr sz="2800" b="1" i="0">
+                <a:solidFill>
+                  <a:srgbClr val="000000"/>
+                </a:solidFill>
+                <a:latin typeface="Times New Roman"/>
+                <a:ea typeface="標楷體"/>
+                <a:ea typeface="標楷體"/>
+              </a:rPr>
+              <a:t>一、先看懂這台機器</a:t>
+            </a:r>
+          </a:p>
+        </p:txBody>
+      </p:sp>
+      <p:sp>
+        <p:nvSpPr>
+          <p:cNvPr id="3" name="Rectangle 2"/>
+          <p:cNvSpPr/>
+          <p:nvPr/>
+        </p:nvSpPr>
+        <p:spPr>
+          <a:xfrm>
+            <a:off x="216000" y="763200"/>
+            <a:ext cx="11761200" cy="18000"/>
+          </a:xfrm>
+          <a:prstGeom prst="rect">
+            <a:avLst/>
+          </a:prstGeom>
+          <a:solidFill>
+            <a:srgbClr val="2AB6D8"/>
+          </a:solidFill>
+          <a:ln>
+            <a:noFill/>
+          </a:ln>
+          <a:effectLst/>
+        </p:spPr>
+        <p:style>
+          <a:lnRef idx="1">
+            <a:schemeClr val="accent1"/>
+          </a:lnRef>
+          <a:fillRef idx="3">
+            <a:schemeClr val="accent1"/>
+          </a:fillRef>
+          <a:effectRef idx="2">
+            <a:schemeClr val="accent1"/>
+          </a:effectRef>
+          <a:fontRef idx="minor">
+            <a:schemeClr val="lt1"/>
+          </a:fontRef>
+        </p:style>
+        <p:txBody>
+          <a:bodyPr rtlCol="0" anchor="ctr"/>
+          <a:lstStyle/>
+          <a:p>
+            <a:pPr algn="ctr"/>
+          </a:p>
+        </p:txBody>
+      </p:sp>
+      <p:sp>
+        <p:nvSpPr>
+          <p:cNvPr id="4" name="TextBox 3"/>
+          <p:cNvSpPr txBox="1"/>
+          <p:nvPr/>
+        </p:nvSpPr>
+        <p:spPr>
+          <a:xfrm>
+            <a:off x="503999" y="842400"/>
+            <a:ext cx="11185201" cy="251999"/>
+          </a:xfrm>
+          <a:prstGeom prst="rect">
+            <a:avLst/>
+          </a:prstGeom>
+          <a:noFill/>
+        </p:spPr>
+        <p:txBody>
+          <a:bodyPr wrap="square" anchor="t" lIns="0" rIns="0" tIns="0" bIns="0">
+            <a:spAutoFit/>
+          </a:bodyPr>
+          <a:lstStyle/>
+          <a:p>
+            <a:pPr algn="ctr">
+              <a:spcAft>
+                <a:spcPts val="600"/>
+              </a:spcAft>
+            </a:pPr>
+            <a:r>
+              <a:rPr sz="1300" b="0" i="0">
+                <a:solidFill>
+                  <a:srgbClr val="595959"/>
+                </a:solidFill>
+                <a:latin typeface="Times New Roman"/>
+                <a:ea typeface="標楷體"/>
+                <a:ea typeface="標楷體"/>
+              </a:rPr>
+              <a:t>補到滿 → 壓力慢慢掉 → 掉到底就自動補，一直重複</a:t>
+            </a:r>
+          </a:p>
+        </p:txBody>
+      </p:sp>
+      <p:sp>
+        <p:nvSpPr>
+          <p:cNvPr id="5" name="Rectangle 4"/>
+          <p:cNvSpPr/>
+          <p:nvPr/>
+        </p:nvSpPr>
+        <p:spPr>
+          <a:xfrm>
+            <a:off x="0" y="6552000"/>
+            <a:ext cx="12193200" cy="306000"/>
+          </a:xfrm>
+          <a:prstGeom prst="rect">
+            <a:avLst/>
+          </a:prstGeom>
+          <a:solidFill>
+            <a:srgbClr val="2E8BC0"/>
+          </a:solidFill>
+          <a:ln>
+            <a:noFill/>
+          </a:ln>
+          <a:effectLst/>
+        </p:spPr>
+        <p:style>
+          <a:lnRef idx="1">
+            <a:schemeClr val="accent1"/>
+          </a:lnRef>
+          <a:fillRef idx="3">
+            <a:schemeClr val="accent1"/>
+          </a:fillRef>
+          <a:effectRef idx="2">
+            <a:schemeClr val="accent1"/>
+          </a:effectRef>
+          <a:fontRef idx="minor">
+            <a:schemeClr val="lt1"/>
+          </a:fontRef>
+        </p:style>
+        <p:txBody>
+          <a:bodyPr rtlCol="0" anchor="ctr"/>
+          <a:lstStyle/>
+          <a:p>
+            <a:pPr algn="ctr"/>
+          </a:p>
+        </p:txBody>
+      </p:sp>
+      <p:sp>
+        <p:nvSpPr>
+          <p:cNvPr id="6" name="TextBox 5"/>
+          <p:cNvSpPr txBox="1"/>
+          <p:nvPr/>
+        </p:nvSpPr>
+        <p:spPr>
+          <a:xfrm>
+            <a:off x="11329200" y="6577200"/>
+            <a:ext cx="576000" cy="216000"/>
+          </a:xfrm>
+          <a:prstGeom prst="rect">
+            <a:avLst/>
+          </a:prstGeom>
+          <a:noFill/>
+        </p:spPr>
+        <p:txBody>
+          <a:bodyPr wrap="square" anchor="t" lIns="0" rIns="0" tIns="0" bIns="0">
+            <a:spAutoFit/>
+          </a:bodyPr>
+          <a:lstStyle/>
+          <a:p>
+            <a:pPr algn="r">
+              <a:spcAft>
+                <a:spcPts val="600"/>
+              </a:spcAft>
+            </a:pPr>
+            <a:r>
+              <a:rPr sz="1100" b="0" i="0">
+                <a:solidFill>
+                  <a:srgbClr val="FFFFFF"/>
+                </a:solidFill>
+                <a:latin typeface="Times New Roman"/>
+                <a:ea typeface="標楷體"/>
+                <a:ea typeface="標楷體"/>
+              </a:rPr>
+              <a:t>3</a:t>
+            </a:r>
+          </a:p>
+        </p:txBody>
+      </p:sp>
+      <p:pic>
+        <p:nvPicPr>
+          <p:cNvPr id="7" name="Picture 6" descr="deck0a_reactor.png"/>
+          <p:cNvPicPr>
+            <a:picLocks noChangeAspect="1"/>
+          </p:cNvPicPr>
+          <p:nvPr/>
+        </p:nvPicPr>
+        <p:blipFill>
+          <a:blip r:embed="rId2"/>
+          <a:stretch>
+            <a:fillRect/>
+          </a:stretch>
+        </p:blipFill>
+        <p:spPr>
+          <a:xfrm>
+            <a:off x="1416599" y="1224000"/>
+            <a:ext cx="9360000" cy="4684926"/>
+          </a:xfrm>
+          <a:prstGeom prst="rect">
+            <a:avLst/>
+          </a:prstGeom>
+        </p:spPr>
+      </p:pic>
+      <p:sp>
+        <p:nvSpPr>
+          <p:cNvPr id="8" name="TextBox 7"/>
+          <p:cNvSpPr txBox="1"/>
+          <p:nvPr/>
+        </p:nvSpPr>
+        <p:spPr>
+          <a:xfrm>
+            <a:off x="576000" y="5998925"/>
+            <a:ext cx="11041200" cy="535074"/>
+          </a:xfrm>
+          <a:prstGeom prst="rect">
+            <a:avLst/>
+          </a:prstGeom>
+          <a:noFill/>
+        </p:spPr>
+        <p:txBody>
+          <a:bodyPr wrap="square" anchor="t" lIns="0" rIns="0" tIns="0" bIns="0">
+            <a:spAutoFit/>
+          </a:bodyPr>
+          <a:lstStyle/>
+          <a:p>
+            <a:pPr algn="ctr">
+              <a:spcAft>
+                <a:spcPts val="600"/>
+              </a:spcAft>
+            </a:pPr>
+            <a:r>
+              <a:rPr sz="1900" b="1" i="0">
+                <a:solidFill>
+                  <a:srgbClr val="000000"/>
+                </a:solidFill>
+                <a:latin typeface="Times New Roman"/>
+                <a:ea typeface="標楷體"/>
+                <a:ea typeface="標楷體"/>
+              </a:rPr>
+              <a:t>壓力會下降，就表示容器裡的氣體正在減少。問題是——它們到底去了哪裡？</a:t>
+            </a:r>
+          </a:p>
+        </p:txBody>
+      </p:sp>
+    </p:spTree>
+  </p:cSld>
+  <p:clrMapOvr>
+    <a:masterClrMapping/>
+  </p:clrMapOvr>
+</p:sld>
+</file>
+
+<file path=ppt/slides/slide20.xml><?xml version="1.0" encoding="utf-8"?>
+<p:sld xmlns:a="http://schemas.openxmlformats.org/drawingml/2006/main" xmlns:p="http://schemas.openxmlformats.org/presentationml/2006/main" xmlns:r="http://schemas.openxmlformats.org/officeDocument/2006/relationships">
+  <p:cSld>
+    <p:spTree>
+      <p:nvGrpSpPr>
+        <p:cNvPr id="1" name=""/>
+        <p:cNvGrpSpPr/>
+        <p:nvPr/>
+      </p:nvGrpSpPr>
+      <p:grpSpPr/>
+      <p:sp>
+        <p:nvSpPr>
+          <p:cNvPr id="2" name="TextBox 1"/>
+          <p:cNvSpPr txBox="1"/>
+          <p:nvPr/>
+        </p:nvSpPr>
+        <p:spPr>
+          <a:xfrm>
+            <a:off x="432000" y="180000"/>
+            <a:ext cx="11329200" cy="540000"/>
+          </a:xfrm>
+          <a:prstGeom prst="rect">
+            <a:avLst/>
+          </a:prstGeom>
+          <a:noFill/>
+        </p:spPr>
+        <p:txBody>
+          <a:bodyPr wrap="square" anchor="t" lIns="0" rIns="0" tIns="0" bIns="0">
+            <a:spAutoFit/>
+          </a:bodyPr>
+          <a:lstStyle/>
+          <a:p>
+            <a:pPr algn="ctr">
+              <a:spcAft>
+                <a:spcPts val="0"/>
+              </a:spcAft>
+            </a:pPr>
+            <a:r>
+              <a:rPr sz="2800" b="1" i="0">
+                <a:solidFill>
+                  <a:srgbClr val="000000"/>
+                </a:solidFill>
+                <a:latin typeface="Times New Roman"/>
+                <a:ea typeface="標楷體"/>
+                <a:ea typeface="標楷體"/>
+              </a:rPr>
+              <a:t>十二之六、二氧化碳的消耗量</a:t>
+            </a:r>
+          </a:p>
+        </p:txBody>
+      </p:sp>
+      <p:sp>
+        <p:nvSpPr>
+          <p:cNvPr id="3" name="Rectangle 2"/>
+          <p:cNvSpPr/>
+          <p:nvPr/>
+        </p:nvSpPr>
+        <p:spPr>
+          <a:xfrm>
+            <a:off x="216000" y="763200"/>
+            <a:ext cx="11761200" cy="18000"/>
+          </a:xfrm>
+          <a:prstGeom prst="rect">
+            <a:avLst/>
+          </a:prstGeom>
+          <a:solidFill>
+            <a:srgbClr val="2AB6D8"/>
+          </a:solidFill>
+          <a:ln>
+            <a:noFill/>
+          </a:ln>
+          <a:effectLst/>
+        </p:spPr>
+        <p:style>
+          <a:lnRef idx="1">
+            <a:schemeClr val="accent1"/>
+          </a:lnRef>
+          <a:fillRef idx="3">
+            <a:schemeClr val="accent1"/>
+          </a:fillRef>
+          <a:effectRef idx="2">
+            <a:schemeClr val="accent1"/>
+          </a:effectRef>
+          <a:fontRef idx="minor">
+            <a:schemeClr val="lt1"/>
+          </a:fontRef>
+        </p:style>
+        <p:txBody>
+          <a:bodyPr rtlCol="0" anchor="ctr"/>
+          <a:lstStyle/>
+          <a:p>
+            <a:pPr algn="ctr"/>
+          </a:p>
+        </p:txBody>
+      </p:sp>
+      <p:sp>
+        <p:nvSpPr>
+          <p:cNvPr id="4" name="TextBox 3"/>
+          <p:cNvSpPr txBox="1"/>
+          <p:nvPr/>
+        </p:nvSpPr>
+        <p:spPr>
+          <a:xfrm>
+            <a:off x="503999" y="842400"/>
+            <a:ext cx="11185201" cy="251999"/>
+          </a:xfrm>
+          <a:prstGeom prst="rect">
+            <a:avLst/>
+          </a:prstGeom>
+          <a:noFill/>
+        </p:spPr>
+        <p:txBody>
+          <a:bodyPr wrap="square" anchor="t" lIns="0" rIns="0" tIns="0" bIns="0">
+            <a:spAutoFit/>
+          </a:bodyPr>
+          <a:lstStyle/>
+          <a:p>
+            <a:pPr algn="ctr">
+              <a:spcAft>
+                <a:spcPts val="600"/>
+              </a:spcAft>
+            </a:pPr>
+            <a:r>
+              <a:rPr sz="1300" b="0" i="0">
+                <a:solidFill>
+                  <a:srgbClr val="595959"/>
+                </a:solidFill>
+                <a:latin typeface="Times New Roman"/>
+                <a:ea typeface="標楷體"/>
+                <a:ea typeface="標楷體"/>
+              </a:rPr>
+              <a:t>洪博要求的數字——不需要氫氣感測器就能給</a:t>
+            </a:r>
+          </a:p>
+        </p:txBody>
+      </p:sp>
+      <p:sp>
+        <p:nvSpPr>
+          <p:cNvPr id="5" name="Rectangle 4"/>
+          <p:cNvSpPr/>
+          <p:nvPr/>
+        </p:nvSpPr>
+        <p:spPr>
+          <a:xfrm>
+            <a:off x="0" y="6552000"/>
+            <a:ext cx="12193200" cy="306000"/>
+          </a:xfrm>
+          <a:prstGeom prst="rect">
+            <a:avLst/>
+          </a:prstGeom>
+          <a:solidFill>
+            <a:srgbClr val="2E8BC0"/>
+          </a:solidFill>
+          <a:ln>
+            <a:noFill/>
+          </a:ln>
+          <a:effectLst/>
+        </p:spPr>
+        <p:style>
+          <a:lnRef idx="1">
+            <a:schemeClr val="accent1"/>
+          </a:lnRef>
+          <a:fillRef idx="3">
+            <a:schemeClr val="accent1"/>
+          </a:fillRef>
+          <a:effectRef idx="2">
+            <a:schemeClr val="accent1"/>
+          </a:effectRef>
+          <a:fontRef idx="minor">
+            <a:schemeClr val="lt1"/>
+          </a:fontRef>
+        </p:style>
+        <p:txBody>
+          <a:bodyPr rtlCol="0" anchor="ctr"/>
+          <a:lstStyle/>
+          <a:p>
+            <a:pPr algn="ctr"/>
+          </a:p>
+        </p:txBody>
+      </p:sp>
+      <p:sp>
+        <p:nvSpPr>
+          <p:cNvPr id="6" name="TextBox 5"/>
+          <p:cNvSpPr txBox="1"/>
+          <p:nvPr/>
+        </p:nvSpPr>
+        <p:spPr>
+          <a:xfrm>
+            <a:off x="11329200" y="6577200"/>
+            <a:ext cx="576000" cy="216000"/>
+          </a:xfrm>
+          <a:prstGeom prst="rect">
+            <a:avLst/>
+          </a:prstGeom>
+          <a:noFill/>
+        </p:spPr>
+        <p:txBody>
+          <a:bodyPr wrap="square" anchor="t" lIns="0" rIns="0" tIns="0" bIns="0">
+            <a:spAutoFit/>
+          </a:bodyPr>
+          <a:lstStyle/>
+          <a:p>
+            <a:pPr algn="r">
+              <a:spcAft>
+                <a:spcPts val="600"/>
+              </a:spcAft>
+            </a:pPr>
+            <a:r>
+              <a:rPr sz="1100" b="0" i="0">
+                <a:solidFill>
+                  <a:srgbClr val="FFFFFF"/>
+                </a:solidFill>
+                <a:latin typeface="Times New Roman"/>
+                <a:ea typeface="標楷體"/>
+                <a:ea typeface="標楷體"/>
+              </a:rPr>
+              <a:t>21</a:t>
+            </a:r>
+          </a:p>
+        </p:txBody>
+      </p:sp>
+      <p:pic>
+        <p:nvPicPr>
+          <p:cNvPr id="7" name="Picture 6" descr="deck12_co2.png"/>
+          <p:cNvPicPr>
+            <a:picLocks noChangeAspect="1"/>
+          </p:cNvPicPr>
+          <p:nvPr/>
+        </p:nvPicPr>
+        <p:blipFill>
+          <a:blip r:embed="rId2"/>
+          <a:stretch>
+            <a:fillRect/>
+          </a:stretch>
+        </p:blipFill>
+        <p:spPr>
+          <a:xfrm>
+            <a:off x="1596599" y="1152000"/>
+            <a:ext cx="9000000" cy="4945054"/>
+          </a:xfrm>
+          <a:prstGeom prst="rect">
+            <a:avLst/>
+          </a:prstGeom>
+        </p:spPr>
+      </p:pic>
+      <p:sp>
+        <p:nvSpPr>
+          <p:cNvPr id="8" name="TextBox 7"/>
+          <p:cNvSpPr txBox="1"/>
+          <p:nvPr/>
+        </p:nvSpPr>
+        <p:spPr>
+          <a:xfrm>
+            <a:off x="576000" y="6205054"/>
+            <a:ext cx="11041200" cy="202946"/>
+          </a:xfrm>
+          <a:prstGeom prst="rect">
+            <a:avLst/>
+          </a:prstGeom>
+          <a:noFill/>
+        </p:spPr>
+        <p:txBody>
+          <a:bodyPr wrap="square" anchor="t" lIns="0" rIns="0" tIns="0" bIns="0">
+            <a:spAutoFit/>
+          </a:bodyPr>
+          <a:lstStyle/>
+          <a:p>
+            <a:pPr algn="ctr">
+              <a:spcAft>
+                <a:spcPts val="600"/>
+              </a:spcAft>
+            </a:pPr>
+            <a:r>
+              <a:rPr sz="1700" b="0" i="0">
+                <a:solidFill>
+                  <a:srgbClr val="000000"/>
+                </a:solidFill>
+                <a:latin typeface="Times New Roman"/>
+                <a:ea typeface="標楷體"/>
+                <a:ea typeface="標楷體"/>
+              </a:rPr>
+              <a:t>以總容積 1.8 </a:t>
+            </a:r>
+            <a:r>
+              <a:rPr sz="1700" b="0" i="1">
+                <a:solidFill>
+                  <a:srgbClr val="000000"/>
+                </a:solidFill>
+                <a:latin typeface="Times New Roman"/>
+                <a:ea typeface="標楷體"/>
+                <a:ea typeface="標楷體"/>
+              </a:rPr>
+              <a:t>L</a:t>
+            </a:r>
+            <a:r>
+              <a:rPr sz="1700" b="0" i="0">
+                <a:solidFill>
+                  <a:srgbClr val="000000"/>
+                </a:solidFill>
+                <a:latin typeface="Times New Roman"/>
+                <a:ea typeface="標楷體"/>
+                <a:ea typeface="標楷體"/>
+              </a:rPr>
+              <a:t>、液相佔一半估算整機：長期 </a:t>
+            </a:r>
+            <a:r>
+              <a:rPr sz="1900" b="1" i="0">
+                <a:solidFill>
+                  <a:srgbClr val="1F6FB5"/>
+                </a:solidFill>
+                <a:latin typeface="Times New Roman"/>
+                <a:ea typeface="標楷體"/>
+                <a:ea typeface="標楷體"/>
+              </a:rPr>
+              <a:t>0.082 </a:t>
+            </a:r>
+            <a:r>
+              <a:rPr sz="1900" b="1" i="0">
+                <a:solidFill>
+                  <a:srgbClr val="1F6FB5"/>
+                </a:solidFill>
+                <a:latin typeface="Times New Roman"/>
+                <a:ea typeface="標楷體"/>
+                <a:ea typeface="標楷體"/>
+              </a:rPr>
+              <a:t>mmol</a:t>
+            </a:r>
+            <a:r>
+              <a:rPr sz="1900" b="1" i="0">
+                <a:solidFill>
+                  <a:srgbClr val="1F6FB5"/>
+                </a:solidFill>
+                <a:latin typeface="Times New Roman"/>
+                <a:ea typeface="標楷體"/>
+                <a:ea typeface="標楷體"/>
+              </a:rPr>
+              <a:t>/</a:t>
+            </a:r>
+            <a:r>
+              <a:rPr sz="1900" b="1" i="0">
+                <a:solidFill>
+                  <a:srgbClr val="1F6FB5"/>
+                </a:solidFill>
+                <a:latin typeface="Times New Roman"/>
+                <a:ea typeface="標楷體"/>
+                <a:ea typeface="標楷體"/>
+              </a:rPr>
+              <a:t>hr</a:t>
+            </a:r>
+            <a:r>
+              <a:rPr sz="1700" b="0" i="0">
+                <a:solidFill>
+                  <a:srgbClr val="000000"/>
+                </a:solidFill>
+                <a:latin typeface="Times New Roman"/>
+                <a:ea typeface="標楷體"/>
+                <a:ea typeface="標楷體"/>
+              </a:rPr>
+              <a:t>、初始 </a:t>
+            </a:r>
+            <a:r>
+              <a:rPr sz="1900" b="1" i="0">
+                <a:solidFill>
+                  <a:srgbClr val="FF0000"/>
+                </a:solidFill>
+                <a:latin typeface="Times New Roman"/>
+                <a:ea typeface="標楷體"/>
+                <a:ea typeface="標楷體"/>
+              </a:rPr>
+              <a:t>0.391 </a:t>
+            </a:r>
+            <a:r>
+              <a:rPr sz="1900" b="1" i="0">
+                <a:solidFill>
+                  <a:srgbClr val="FF0000"/>
+                </a:solidFill>
+                <a:latin typeface="Times New Roman"/>
+                <a:ea typeface="標楷體"/>
+                <a:ea typeface="標楷體"/>
+              </a:rPr>
+              <a:t>mmol</a:t>
+            </a:r>
+            <a:r>
+              <a:rPr sz="1900" b="1" i="0">
+                <a:solidFill>
+                  <a:srgbClr val="FF0000"/>
+                </a:solidFill>
+                <a:latin typeface="Times New Roman"/>
+                <a:ea typeface="標楷體"/>
+                <a:ea typeface="標楷體"/>
+              </a:rPr>
+              <a:t>/</a:t>
+            </a:r>
+            <a:r>
+              <a:rPr sz="1900" b="1" i="0">
+                <a:solidFill>
+                  <a:srgbClr val="FF0000"/>
+                </a:solidFill>
+                <a:latin typeface="Times New Roman"/>
+                <a:ea typeface="標楷體"/>
+                <a:ea typeface="標楷體"/>
+              </a:rPr>
+              <a:t>hr</a:t>
+            </a:r>
+            <a:r>
+              <a:rPr sz="1700" b="0" i="0">
+                <a:solidFill>
+                  <a:srgbClr val="000000"/>
+                </a:solidFill>
+                <a:latin typeface="Times New Roman"/>
+                <a:ea typeface="標楷體"/>
+                <a:ea typeface="標楷體"/>
+              </a:rPr>
+              <a:t>。⚠ 液位確認後即可定案。</a:t>
+            </a:r>
+          </a:p>
+        </p:txBody>
+      </p:sp>
+    </p:spTree>
+  </p:cSld>
+  <p:clrMapOvr>
+    <a:masterClrMapping/>
+  </p:clrMapOvr>
+</p:sld>
+</file>
+
+<file path=ppt/slides/slide21.xml><?xml version="1.0" encoding="utf-8"?>
+<p:sld xmlns:a="http://schemas.openxmlformats.org/drawingml/2006/main" xmlns:p="http://schemas.openxmlformats.org/presentationml/2006/main" xmlns:r="http://schemas.openxmlformats.org/officeDocument/2006/relationships">
+  <p:cSld>
+    <p:spTree>
+      <p:nvGrpSpPr>
+        <p:cNvPr id="1" name=""/>
+        <p:cNvGrpSpPr/>
+        <p:nvPr/>
+      </p:nvGrpSpPr>
+      <p:grpSpPr/>
+      <p:sp>
+        <p:nvSpPr>
+          <p:cNvPr id="2" name="TextBox 1"/>
+          <p:cNvSpPr txBox="1"/>
+          <p:nvPr/>
+        </p:nvSpPr>
+        <p:spPr>
+          <a:xfrm>
+            <a:off x="432000" y="180000"/>
+            <a:ext cx="11329200" cy="540000"/>
+          </a:xfrm>
+          <a:prstGeom prst="rect">
+            <a:avLst/>
+          </a:prstGeom>
+          <a:noFill/>
+        </p:spPr>
+        <p:txBody>
+          <a:bodyPr wrap="square" anchor="t" lIns="0" rIns="0" tIns="0" bIns="0">
+            <a:spAutoFit/>
+          </a:bodyPr>
+          <a:lstStyle/>
+          <a:p>
+            <a:pPr algn="ctr">
+              <a:spcAft>
+                <a:spcPts val="0"/>
+              </a:spcAft>
+            </a:pPr>
+            <a:r>
+              <a:rPr sz="2800" b="1" i="0">
+                <a:solidFill>
+                  <a:srgbClr val="000000"/>
+                </a:solidFill>
+                <a:latin typeface="Times New Roman"/>
+                <a:ea typeface="標楷體"/>
+                <a:ea typeface="標楷體"/>
+              </a:rPr>
+              <a:t>十二之七、四個方法都指向同一個方向</a:t>
+            </a:r>
+          </a:p>
+        </p:txBody>
+      </p:sp>
+      <p:sp>
+        <p:nvSpPr>
+          <p:cNvPr id="3" name="Rectangle 2"/>
+          <p:cNvSpPr/>
+          <p:nvPr/>
+        </p:nvSpPr>
+        <p:spPr>
+          <a:xfrm>
+            <a:off x="216000" y="763200"/>
+            <a:ext cx="11761200" cy="18000"/>
+          </a:xfrm>
+          <a:prstGeom prst="rect">
+            <a:avLst/>
+          </a:prstGeom>
+          <a:solidFill>
+            <a:srgbClr val="2AB6D8"/>
+          </a:solidFill>
+          <a:ln>
+            <a:noFill/>
+          </a:ln>
+          <a:effectLst/>
+        </p:spPr>
+        <p:style>
+          <a:lnRef idx="1">
+            <a:schemeClr val="accent1"/>
+          </a:lnRef>
+          <a:fillRef idx="3">
+            <a:schemeClr val="accent1"/>
+          </a:fillRef>
+          <a:effectRef idx="2">
+            <a:schemeClr val="accent1"/>
+          </a:effectRef>
+          <a:fontRef idx="minor">
+            <a:schemeClr val="lt1"/>
+          </a:fontRef>
+        </p:style>
+        <p:txBody>
+          <a:bodyPr rtlCol="0" anchor="ctr"/>
+          <a:lstStyle/>
+          <a:p>
+            <a:pPr algn="ctr"/>
+          </a:p>
+        </p:txBody>
+      </p:sp>
+      <p:sp>
+        <p:nvSpPr>
+          <p:cNvPr id="4" name="TextBox 3"/>
+          <p:cNvSpPr txBox="1"/>
+          <p:nvPr/>
+        </p:nvSpPr>
+        <p:spPr>
+          <a:xfrm>
+            <a:off x="503999" y="842400"/>
+            <a:ext cx="11185201" cy="251999"/>
+          </a:xfrm>
+          <a:prstGeom prst="rect">
+            <a:avLst/>
+          </a:prstGeom>
+          <a:noFill/>
+        </p:spPr>
+        <p:txBody>
+          <a:bodyPr wrap="square" anchor="t" lIns="0" rIns="0" tIns="0" bIns="0">
+            <a:spAutoFit/>
+          </a:bodyPr>
+          <a:lstStyle/>
+          <a:p>
+            <a:pPr algn="ctr">
+              <a:spcAft>
+                <a:spcPts val="600"/>
+              </a:spcAft>
+            </a:pPr>
+            <a:r>
+              <a:rPr sz="1300" b="0" i="0">
+                <a:solidFill>
+                  <a:srgbClr val="595959"/>
+                </a:solidFill>
+                <a:latin typeface="Times New Roman"/>
+                <a:ea typeface="標楷體"/>
+                <a:ea typeface="標楷體"/>
+              </a:rPr>
+              <a:t>論文定版的生物速率可能被低估</a:t>
+            </a:r>
+          </a:p>
+        </p:txBody>
+      </p:sp>
+      <p:sp>
+        <p:nvSpPr>
+          <p:cNvPr id="5" name="Rectangle 4"/>
+          <p:cNvSpPr/>
+          <p:nvPr/>
+        </p:nvSpPr>
+        <p:spPr>
+          <a:xfrm>
+            <a:off x="0" y="6552000"/>
+            <a:ext cx="12193200" cy="306000"/>
+          </a:xfrm>
+          <a:prstGeom prst="rect">
+            <a:avLst/>
+          </a:prstGeom>
+          <a:solidFill>
+            <a:srgbClr val="2E8BC0"/>
+          </a:solidFill>
+          <a:ln>
+            <a:noFill/>
+          </a:ln>
+          <a:effectLst/>
+        </p:spPr>
+        <p:style>
+          <a:lnRef idx="1">
+            <a:schemeClr val="accent1"/>
+          </a:lnRef>
+          <a:fillRef idx="3">
+            <a:schemeClr val="accent1"/>
+          </a:fillRef>
+          <a:effectRef idx="2">
+            <a:schemeClr val="accent1"/>
+          </a:effectRef>
+          <a:fontRef idx="minor">
+            <a:schemeClr val="lt1"/>
+          </a:fontRef>
+        </p:style>
+        <p:txBody>
+          <a:bodyPr rtlCol="0" anchor="ctr"/>
+          <a:lstStyle/>
+          <a:p>
+            <a:pPr algn="ctr"/>
+          </a:p>
+        </p:txBody>
+      </p:sp>
+      <p:sp>
+        <p:nvSpPr>
+          <p:cNvPr id="6" name="TextBox 5"/>
+          <p:cNvSpPr txBox="1"/>
+          <p:nvPr/>
+        </p:nvSpPr>
+        <p:spPr>
+          <a:xfrm>
+            <a:off x="11329200" y="6577200"/>
+            <a:ext cx="576000" cy="216000"/>
+          </a:xfrm>
+          <a:prstGeom prst="rect">
+            <a:avLst/>
+          </a:prstGeom>
+          <a:noFill/>
+        </p:spPr>
+        <p:txBody>
+          <a:bodyPr wrap="square" anchor="t" lIns="0" rIns="0" tIns="0" bIns="0">
+            <a:spAutoFit/>
+          </a:bodyPr>
+          <a:lstStyle/>
+          <a:p>
+            <a:pPr algn="r">
+              <a:spcAft>
+                <a:spcPts val="600"/>
+              </a:spcAft>
+            </a:pPr>
+            <a:r>
+              <a:rPr sz="1100" b="0" i="0">
+                <a:solidFill>
+                  <a:srgbClr val="FFFFFF"/>
+                </a:solidFill>
+                <a:latin typeface="Times New Roman"/>
+                <a:ea typeface="標楷體"/>
+                <a:ea typeface="標楷體"/>
+              </a:rPr>
+              <a:t>22</a:t>
+            </a:r>
+          </a:p>
+        </p:txBody>
+      </p:sp>
+      <p:pic>
+        <p:nvPicPr>
+          <p:cNvPr id="7" name="Picture 6" descr="deck14_curvature.png"/>
+          <p:cNvPicPr>
+            <a:picLocks noChangeAspect="1"/>
+          </p:cNvPicPr>
+          <p:nvPr/>
+        </p:nvPicPr>
+        <p:blipFill>
+          <a:blip r:embed="rId2"/>
+          <a:stretch>
+            <a:fillRect/>
+          </a:stretch>
+        </p:blipFill>
+        <p:spPr>
+          <a:xfrm>
+            <a:off x="1776599" y="1152000"/>
+            <a:ext cx="8640000" cy="3921815"/>
+          </a:xfrm>
+          <a:prstGeom prst="rect">
+            <a:avLst/>
+          </a:prstGeom>
+        </p:spPr>
+      </p:pic>
+      <p:sp>
+        <p:nvSpPr>
+          <p:cNvPr id="8" name="TextBox 7"/>
+          <p:cNvSpPr txBox="1"/>
+          <p:nvPr/>
+        </p:nvSpPr>
+        <p:spPr>
+          <a:xfrm>
+            <a:off x="576000" y="5181815"/>
+            <a:ext cx="11041200" cy="1226185"/>
+          </a:xfrm>
+          <a:prstGeom prst="rect">
+            <a:avLst/>
+          </a:prstGeom>
+          <a:noFill/>
+        </p:spPr>
+        <p:txBody>
+          <a:bodyPr wrap="square" anchor="t" lIns="0" rIns="0" tIns="0" bIns="0">
+            <a:spAutoFit/>
+          </a:bodyPr>
+          <a:lstStyle/>
+          <a:p>
+            <a:pPr algn="ctr">
+              <a:spcAft>
+                <a:spcPts val="600"/>
+              </a:spcAft>
+            </a:pPr>
+            <a:r>
+              <a:rPr sz="1600" b="0" i="0">
+                <a:solidFill>
+                  <a:srgbClr val="000000"/>
+                </a:solidFill>
+                <a:latin typeface="Times New Roman"/>
+                <a:ea typeface="標楷體"/>
+                <a:ea typeface="標楷體"/>
+              </a:rPr>
+              <a:t>曲率配對是本次新做的：用既有資料裡「質傳速率不同」的兩條曲線互相對消，即可解出生物速率，不需要新實驗。</a:t>
+            </a:r>
+          </a:p>
+        </p:txBody>
+      </p:sp>
+    </p:spTree>
+  </p:cSld>
+  <p:clrMapOvr>
+    <a:masterClrMapping/>
+  </p:clrMapOvr>
+</p:sld>
+</file>
+
+<file path=ppt/slides/slide22.xml><?xml version="1.0" encoding="utf-8"?>
+<p:sld xmlns:a="http://schemas.openxmlformats.org/drawingml/2006/main" xmlns:p="http://schemas.openxmlformats.org/presentationml/2006/main" xmlns:r="http://schemas.openxmlformats.org/officeDocument/2006/relationships">
+  <p:cSld>
+    <p:spTree>
+      <p:nvGrpSpPr>
+        <p:cNvPr id="1" name=""/>
+        <p:cNvGrpSpPr/>
+        <p:nvPr/>
+      </p:nvGrpSpPr>
+      <p:grpSpPr/>
+      <p:sp>
+        <p:nvSpPr>
+          <p:cNvPr id="2" name="TextBox 1"/>
+          <p:cNvSpPr txBox="1"/>
+          <p:nvPr/>
+        </p:nvSpPr>
+        <p:spPr>
+          <a:xfrm>
+            <a:off x="432000" y="180000"/>
+            <a:ext cx="11329200" cy="540000"/>
+          </a:xfrm>
+          <a:prstGeom prst="rect">
+            <a:avLst/>
+          </a:prstGeom>
+          <a:noFill/>
+        </p:spPr>
+        <p:txBody>
+          <a:bodyPr wrap="square" anchor="t" lIns="0" rIns="0" tIns="0" bIns="0">
+            <a:spAutoFit/>
+          </a:bodyPr>
+          <a:lstStyle/>
+          <a:p>
+            <a:pPr algn="ctr">
+              <a:spcAft>
+                <a:spcPts val="0"/>
+              </a:spcAft>
+            </a:pPr>
+            <a:r>
+              <a:rPr sz="2800" b="1" i="0">
+                <a:solidFill>
+                  <a:srgbClr val="000000"/>
+                </a:solidFill>
+                <a:latin typeface="Times New Roman"/>
+                <a:ea typeface="標楷體"/>
+                <a:ea typeface="標楷體"/>
+              </a:rPr>
+              <a:t>十三、本分析的限制</a:t>
+            </a:r>
+          </a:p>
+        </p:txBody>
+      </p:sp>
+      <p:sp>
+        <p:nvSpPr>
+          <p:cNvPr id="3" name="Rectangle 2"/>
+          <p:cNvSpPr/>
+          <p:nvPr/>
+        </p:nvSpPr>
+        <p:spPr>
+          <a:xfrm>
+            <a:off x="216000" y="763200"/>
+            <a:ext cx="11761200" cy="18000"/>
+          </a:xfrm>
+          <a:prstGeom prst="rect">
+            <a:avLst/>
+          </a:prstGeom>
+          <a:solidFill>
+            <a:srgbClr val="2AB6D8"/>
+          </a:solidFill>
+          <a:ln>
+            <a:noFill/>
+          </a:ln>
+          <a:effectLst/>
+        </p:spPr>
+        <p:style>
+          <a:lnRef idx="1">
+            <a:schemeClr val="accent1"/>
+          </a:lnRef>
+          <a:fillRef idx="3">
+            <a:schemeClr val="accent1"/>
+          </a:fillRef>
+          <a:effectRef idx="2">
+            <a:schemeClr val="accent1"/>
+          </a:effectRef>
+          <a:fontRef idx="minor">
+            <a:schemeClr val="lt1"/>
+          </a:fontRef>
+        </p:style>
+        <p:txBody>
+          <a:bodyPr rtlCol="0" anchor="ctr"/>
+          <a:lstStyle/>
+          <a:p>
+            <a:pPr algn="ctr"/>
+          </a:p>
+        </p:txBody>
+      </p:sp>
+      <p:sp>
+        <p:nvSpPr>
+          <p:cNvPr id="4" name="TextBox 3"/>
+          <p:cNvSpPr txBox="1"/>
+          <p:nvPr/>
+        </p:nvSpPr>
+        <p:spPr>
+          <a:xfrm>
+            <a:off x="503999" y="842400"/>
+            <a:ext cx="11185201" cy="251999"/>
+          </a:xfrm>
+          <a:prstGeom prst="rect">
+            <a:avLst/>
+          </a:prstGeom>
+          <a:noFill/>
+        </p:spPr>
+        <p:txBody>
+          <a:bodyPr wrap="square" anchor="t" lIns="0" rIns="0" tIns="0" bIns="0">
+            <a:spAutoFit/>
+          </a:bodyPr>
+          <a:lstStyle/>
+          <a:p>
+            <a:pPr algn="ctr">
+              <a:spcAft>
+                <a:spcPts val="600"/>
+              </a:spcAft>
+            </a:pPr>
+            <a:r>
+              <a:rPr sz="1300" b="0" i="0">
+                <a:solidFill>
+                  <a:srgbClr val="595959"/>
+                </a:solidFill>
+                <a:latin typeface="Times New Roman"/>
+                <a:ea typeface="標楷體"/>
+                <a:ea typeface="標楷體"/>
+              </a:rPr>
+              <a:t>引用時應一併說明</a:t>
+            </a:r>
+          </a:p>
+        </p:txBody>
+      </p:sp>
+      <p:sp>
+        <p:nvSpPr>
+          <p:cNvPr id="5" name="Rectangle 4"/>
+          <p:cNvSpPr/>
+          <p:nvPr/>
+        </p:nvSpPr>
+        <p:spPr>
+          <a:xfrm>
+            <a:off x="0" y="6552000"/>
+            <a:ext cx="12193200" cy="306000"/>
+          </a:xfrm>
+          <a:prstGeom prst="rect">
+            <a:avLst/>
+          </a:prstGeom>
+          <a:solidFill>
+            <a:srgbClr val="2E8BC0"/>
+          </a:solidFill>
+          <a:ln>
+            <a:noFill/>
+          </a:ln>
+          <a:effectLst/>
+        </p:spPr>
+        <p:style>
+          <a:lnRef idx="1">
+            <a:schemeClr val="accent1"/>
+          </a:lnRef>
+          <a:fillRef idx="3">
+            <a:schemeClr val="accent1"/>
+          </a:fillRef>
+          <a:effectRef idx="2">
+            <a:schemeClr val="accent1"/>
+          </a:effectRef>
+          <a:fontRef idx="minor">
+            <a:schemeClr val="lt1"/>
+          </a:fontRef>
+        </p:style>
+        <p:txBody>
+          <a:bodyPr rtlCol="0" anchor="ctr"/>
+          <a:lstStyle/>
+          <a:p>
+            <a:pPr algn="ctr"/>
+          </a:p>
+        </p:txBody>
+      </p:sp>
+      <p:sp>
+        <p:nvSpPr>
+          <p:cNvPr id="6" name="TextBox 5"/>
+          <p:cNvSpPr txBox="1"/>
+          <p:nvPr/>
+        </p:nvSpPr>
+        <p:spPr>
+          <a:xfrm>
+            <a:off x="11329200" y="6577200"/>
+            <a:ext cx="576000" cy="216000"/>
+          </a:xfrm>
+          <a:prstGeom prst="rect">
+            <a:avLst/>
+          </a:prstGeom>
+          <a:noFill/>
+        </p:spPr>
+        <p:txBody>
+          <a:bodyPr wrap="square" anchor="t" lIns="0" rIns="0" tIns="0" bIns="0">
+            <a:spAutoFit/>
+          </a:bodyPr>
+          <a:lstStyle/>
+          <a:p>
+            <a:pPr algn="r">
+              <a:spcAft>
+                <a:spcPts val="600"/>
+              </a:spcAft>
+            </a:pPr>
+            <a:r>
+              <a:rPr sz="1100" b="0" i="0">
+                <a:solidFill>
+                  <a:srgbClr val="FFFFFF"/>
+                </a:solidFill>
+                <a:latin typeface="Times New Roman"/>
+                <a:ea typeface="標楷體"/>
+                <a:ea typeface="標楷體"/>
+              </a:rPr>
+              <a:t>23</a:t>
+            </a:r>
+          </a:p>
+        </p:txBody>
+      </p:sp>
+      <p:sp>
+        <p:nvSpPr>
+          <p:cNvPr id="7" name="TextBox 6"/>
+          <p:cNvSpPr txBox="1"/>
+          <p:nvPr/>
+        </p:nvSpPr>
+        <p:spPr>
+          <a:xfrm>
+            <a:off x="576000" y="1440000"/>
+            <a:ext cx="11041200" cy="4320000"/>
+          </a:xfrm>
+          <a:prstGeom prst="rect">
+            <a:avLst/>
+          </a:prstGeom>
+          <a:noFill/>
+        </p:spPr>
+        <p:txBody>
+          <a:bodyPr wrap="square" anchor="t" lIns="0" rIns="0" tIns="0" bIns="0">
+            <a:spAutoFit/>
+          </a:bodyPr>
+          <a:lstStyle/>
+          <a:p>
+            <a:pPr algn="l">
+              <a:spcAft>
+                <a:spcPts val="1600"/>
+              </a:spcAft>
+            </a:pPr>
+            <a:r>
+              <a:rPr sz="1800" b="0" i="0">
+                <a:solidFill>
+                  <a:srgbClr val="000000"/>
+                </a:solidFill>
+                <a:latin typeface="Times New Roman"/>
+                <a:ea typeface="標楷體"/>
+                <a:ea typeface="標楷體"/>
+              </a:rPr>
+              <a:t>• 氫氣濃度為差額推算，非直接量測（分析儀僅量二氧化碳與甲烷）</a:t>
+            </a:r>
+          </a:p>
+          <a:p>
+            <a:pPr algn="l">
+              <a:spcAft>
+                <a:spcPts val="1600"/>
+              </a:spcAft>
+            </a:pPr>
+            <a:r>
+              <a:rPr sz="1800" b="0" i="0">
+                <a:solidFill>
+                  <a:srgbClr val="000000"/>
+                </a:solidFill>
+                <a:latin typeface="Times New Roman"/>
+                <a:ea typeface="標楷體"/>
+                <a:ea typeface="標楷體"/>
+              </a:rPr>
+              <a:t>• 無法區分氫氣流失的機制：洩漏、穿透、或其他耗氫生化反應</a:t>
+            </a:r>
+          </a:p>
+          <a:p>
+            <a:pPr algn="l">
+              <a:spcAft>
+                <a:spcPts val="1600"/>
+              </a:spcAft>
+            </a:pPr>
+            <a:r>
+              <a:rPr sz="1800" b="0" i="0">
+                <a:solidFill>
+                  <a:srgbClr val="000000"/>
+                </a:solidFill>
+                <a:latin typeface="Times New Roman"/>
+                <a:ea typeface="標楷體"/>
+                <a:ea typeface="標楷體"/>
+              </a:rPr>
+              <a:t>• 僅 35 筆可用的氣體組成資料，平均每 11 天一筆</a:t>
+            </a:r>
+          </a:p>
+          <a:p>
+            <a:pPr algn="l">
+              <a:spcAft>
+                <a:spcPts val="1600"/>
+              </a:spcAft>
+            </a:pPr>
+            <a:r>
+              <a:rPr sz="1800" b="0" i="0">
+                <a:solidFill>
+                  <a:srgbClr val="000000"/>
+                </a:solidFill>
+                <a:latin typeface="Times New Roman"/>
+                <a:ea typeface="標楷體"/>
+                <a:ea typeface="標楷體"/>
+              </a:rPr>
+              <a:t>• 碳源中斷時進料組成同時改變，兩時段的差異不僅限於碳源有無</a:t>
+            </a:r>
+          </a:p>
+          <a:p>
+            <a:pPr algn="l">
+              <a:spcAft>
+                <a:spcPts val="1600"/>
+              </a:spcAft>
+            </a:pPr>
+            <a:r>
+              <a:rPr sz="1800" b="0" i="0">
+                <a:solidFill>
+                  <a:srgbClr val="000000"/>
+                </a:solidFill>
+                <a:latin typeface="Times New Roman"/>
+                <a:ea typeface="標楷體"/>
+                <a:ea typeface="標楷體"/>
+              </a:rPr>
+              <a:t>• 酸鹼值的結果效應量極小（約為儀器刻度的七分之一），屬方向性證據</a:t>
+            </a:r>
+          </a:p>
+        </p:txBody>
+      </p:sp>
+    </p:spTree>
+  </p:cSld>
+  <p:clrMapOvr>
+    <a:masterClrMapping/>
+  </p:clrMapOvr>
+</p:sld>
+</file>
+
+<file path=ppt/slides/slide23.xml><?xml version="1.0" encoding="utf-8"?>
+<p:sld xmlns:a="http://schemas.openxmlformats.org/drawingml/2006/main" xmlns:p="http://schemas.openxmlformats.org/presentationml/2006/main" xmlns:r="http://schemas.openxmlformats.org/officeDocument/2006/relationships">
+  <p:cSld>
+    <p:spTree>
+      <p:nvGrpSpPr>
+        <p:cNvPr id="1" name=""/>
+        <p:cNvGrpSpPr/>
+        <p:nvPr/>
+      </p:nvGrpSpPr>
+      <p:grpSpPr/>
+      <p:sp>
+        <p:nvSpPr>
+          <p:cNvPr id="2" name="TextBox 1"/>
+          <p:cNvSpPr txBox="1"/>
+          <p:nvPr/>
+        </p:nvSpPr>
+        <p:spPr>
+          <a:xfrm>
+            <a:off x="432000" y="180000"/>
+            <a:ext cx="11329200" cy="540000"/>
+          </a:xfrm>
+          <a:prstGeom prst="rect">
+            <a:avLst/>
+          </a:prstGeom>
+          <a:noFill/>
+        </p:spPr>
+        <p:txBody>
+          <a:bodyPr wrap="square" anchor="t" lIns="0" rIns="0" tIns="0" bIns="0">
+            <a:spAutoFit/>
+          </a:bodyPr>
+          <a:lstStyle/>
+          <a:p>
+            <a:pPr algn="ctr">
+              <a:spcAft>
+                <a:spcPts val="0"/>
+              </a:spcAft>
+            </a:pPr>
+            <a:r>
+              <a:rPr sz="2800" b="1" i="0">
+                <a:solidFill>
+                  <a:srgbClr val="000000"/>
+                </a:solidFill>
+                <a:latin typeface="Times New Roman"/>
+                <a:ea typeface="標楷體"/>
+                <a:ea typeface="標楷體"/>
+              </a:rPr>
+              <a:t>十四、建議</a:t>
+            </a:r>
+          </a:p>
+        </p:txBody>
+      </p:sp>
+      <p:sp>
+        <p:nvSpPr>
+          <p:cNvPr id="3" name="Rectangle 2"/>
+          <p:cNvSpPr/>
+          <p:nvPr/>
+        </p:nvSpPr>
+        <p:spPr>
+          <a:xfrm>
+            <a:off x="216000" y="763200"/>
+            <a:ext cx="11761200" cy="18000"/>
+          </a:xfrm>
+          <a:prstGeom prst="rect">
+            <a:avLst/>
+          </a:prstGeom>
+          <a:solidFill>
+            <a:srgbClr val="2AB6D8"/>
+          </a:solidFill>
+          <a:ln>
+            <a:noFill/>
+          </a:ln>
+          <a:effectLst/>
+        </p:spPr>
+        <p:style>
+          <a:lnRef idx="1">
+            <a:schemeClr val="accent1"/>
+          </a:lnRef>
+          <a:fillRef idx="3">
+            <a:schemeClr val="accent1"/>
+          </a:fillRef>
+          <a:effectRef idx="2">
+            <a:schemeClr val="accent1"/>
+          </a:effectRef>
+          <a:fontRef idx="minor">
+            <a:schemeClr val="lt1"/>
+          </a:fontRef>
+        </p:style>
+        <p:txBody>
+          <a:bodyPr rtlCol="0" anchor="ctr"/>
+          <a:lstStyle/>
+          <a:p>
+            <a:pPr algn="ctr"/>
+          </a:p>
+        </p:txBody>
+      </p:sp>
+      <p:sp>
+        <p:nvSpPr>
+          <p:cNvPr id="4" name="TextBox 3"/>
+          <p:cNvSpPr txBox="1"/>
+          <p:nvPr/>
+        </p:nvSpPr>
+        <p:spPr>
+          <a:xfrm>
+            <a:off x="503999" y="842400"/>
+            <a:ext cx="11185201" cy="251999"/>
+          </a:xfrm>
+          <a:prstGeom prst="rect">
+            <a:avLst/>
+          </a:prstGeom>
+          <a:noFill/>
+        </p:spPr>
+        <p:txBody>
+          <a:bodyPr wrap="square" anchor="t" lIns="0" rIns="0" tIns="0" bIns="0">
+            <a:spAutoFit/>
+          </a:bodyPr>
+          <a:lstStyle/>
+          <a:p>
+            <a:pPr algn="ctr">
+              <a:spcAft>
+                <a:spcPts val="600"/>
+              </a:spcAft>
+            </a:pPr>
+            <a:r>
+              <a:rPr sz="1300" b="0" i="0">
+                <a:solidFill>
+                  <a:srgbClr val="595959"/>
+                </a:solidFill>
+                <a:latin typeface="Times New Roman"/>
+                <a:ea typeface="標楷體"/>
+                <a:ea typeface="標楷體"/>
+              </a:rPr>
+              <a:t>第一項完成前，其餘方向都無法定案</a:t>
+            </a:r>
+          </a:p>
+        </p:txBody>
+      </p:sp>
+      <p:sp>
+        <p:nvSpPr>
+          <p:cNvPr id="5" name="Rectangle 4"/>
+          <p:cNvSpPr/>
+          <p:nvPr/>
+        </p:nvSpPr>
+        <p:spPr>
+          <a:xfrm>
+            <a:off x="0" y="6552000"/>
+            <a:ext cx="12193200" cy="306000"/>
+          </a:xfrm>
+          <a:prstGeom prst="rect">
+            <a:avLst/>
+          </a:prstGeom>
+          <a:solidFill>
+            <a:srgbClr val="2E8BC0"/>
+          </a:solidFill>
+          <a:ln>
+            <a:noFill/>
+          </a:ln>
+          <a:effectLst/>
+        </p:spPr>
+        <p:style>
+          <a:lnRef idx="1">
+            <a:schemeClr val="accent1"/>
+          </a:lnRef>
+          <a:fillRef idx="3">
+            <a:schemeClr val="accent1"/>
+          </a:fillRef>
+          <a:effectRef idx="2">
+            <a:schemeClr val="accent1"/>
+          </a:effectRef>
+          <a:fontRef idx="minor">
+            <a:schemeClr val="lt1"/>
+          </a:fontRef>
+        </p:style>
+        <p:txBody>
+          <a:bodyPr rtlCol="0" anchor="ctr"/>
+          <a:lstStyle/>
+          <a:p>
+            <a:pPr algn="ctr"/>
+          </a:p>
+        </p:txBody>
+      </p:sp>
+      <p:sp>
+        <p:nvSpPr>
+          <p:cNvPr id="6" name="TextBox 5"/>
+          <p:cNvSpPr txBox="1"/>
+          <p:nvPr/>
+        </p:nvSpPr>
+        <p:spPr>
+          <a:xfrm>
+            <a:off x="11329200" y="6577200"/>
+            <a:ext cx="576000" cy="216000"/>
+          </a:xfrm>
+          <a:prstGeom prst="rect">
+            <a:avLst/>
+          </a:prstGeom>
+          <a:noFill/>
+        </p:spPr>
+        <p:txBody>
+          <a:bodyPr wrap="square" anchor="t" lIns="0" rIns="0" tIns="0" bIns="0">
+            <a:spAutoFit/>
+          </a:bodyPr>
+          <a:lstStyle/>
+          <a:p>
+            <a:pPr algn="r">
+              <a:spcAft>
+                <a:spcPts val="600"/>
+              </a:spcAft>
+            </a:pPr>
+            <a:r>
+              <a:rPr sz="1100" b="0" i="0">
+                <a:solidFill>
+                  <a:srgbClr val="FFFFFF"/>
+                </a:solidFill>
+                <a:latin typeface="Times New Roman"/>
+                <a:ea typeface="標楷體"/>
+                <a:ea typeface="標楷體"/>
+              </a:rPr>
+              <a:t>24</a:t>
             </a:r>
           </a:p>
         </p:txBody>
@@ -8142,7 +9832,7 @@
 </p:sld>
 </file>
 
-<file path=ppt/slides/slide2.xml><?xml version="1.0" encoding="utf-8"?>
+<file path=ppt/slides/slide24.xml><?xml version="1.0" encoding="utf-8"?>
 <p:sld xmlns:a="http://schemas.openxmlformats.org/drawingml/2006/main" xmlns:p="http://schemas.openxmlformats.org/presentationml/2006/main" xmlns:r="http://schemas.openxmlformats.org/officeDocument/2006/relationships">
   <p:cSld>
     <p:spTree>
@@ -8188,7 +9878,7 @@
                 <a:ea typeface="標楷體"/>
                 <a:ea typeface="標楷體"/>
               </a:rPr>
-              <a:t>一、先看懂這台機器</a:t>
+              <a:t>十五、需要協助與確認的事項</a:t>
             </a:r>
           </a:p>
         </p:txBody>
@@ -8273,7 +9963,7 @@
                 <a:ea typeface="標楷體"/>
                 <a:ea typeface="標楷體"/>
               </a:rPr>
-              <a:t>補到滿 → 壓力慢慢掉 → 掉到底就自動補，一直重複</a:t>
+              <a:t>2026-09-23</a:t>
             </a:r>
           </a:p>
         </p:txBody>
@@ -8358,301 +10048,7 @@
                 <a:ea typeface="標楷體"/>
                 <a:ea typeface="標楷體"/>
               </a:rPr>
-              <a:t>3</a:t>
-            </a:r>
-          </a:p>
-        </p:txBody>
-      </p:sp>
-      <p:pic>
-        <p:nvPicPr>
-          <p:cNvPr id="7" name="Picture 6" descr="deck0a_reactor.png"/>
-          <p:cNvPicPr>
-            <a:picLocks noChangeAspect="1"/>
-          </p:cNvPicPr>
-          <p:nvPr/>
-        </p:nvPicPr>
-        <p:blipFill>
-          <a:blip r:embed="rId2"/>
-          <a:stretch>
-            <a:fillRect/>
-          </a:stretch>
-        </p:blipFill>
-        <p:spPr>
-          <a:xfrm>
-            <a:off x="1416599" y="1224000"/>
-            <a:ext cx="9360000" cy="4684926"/>
-          </a:xfrm>
-          <a:prstGeom prst="rect">
-            <a:avLst/>
-          </a:prstGeom>
-        </p:spPr>
-      </p:pic>
-      <p:sp>
-        <p:nvSpPr>
-          <p:cNvPr id="8" name="TextBox 7"/>
-          <p:cNvSpPr txBox="1"/>
-          <p:nvPr/>
-        </p:nvSpPr>
-        <p:spPr>
-          <a:xfrm>
-            <a:off x="576000" y="5998925"/>
-            <a:ext cx="11041200" cy="535074"/>
-          </a:xfrm>
-          <a:prstGeom prst="rect">
-            <a:avLst/>
-          </a:prstGeom>
-          <a:noFill/>
-        </p:spPr>
-        <p:txBody>
-          <a:bodyPr wrap="square" anchor="t" lIns="0" rIns="0" tIns="0" bIns="0">
-            <a:spAutoFit/>
-          </a:bodyPr>
-          <a:lstStyle/>
-          <a:p>
-            <a:pPr algn="ctr">
-              <a:spcAft>
-                <a:spcPts val="600"/>
-              </a:spcAft>
-            </a:pPr>
-            <a:r>
-              <a:rPr sz="1900" b="1" i="0">
-                <a:solidFill>
-                  <a:srgbClr val="000000"/>
-                </a:solidFill>
-                <a:latin typeface="Times New Roman"/>
-                <a:ea typeface="標楷體"/>
-                <a:ea typeface="標楷體"/>
-              </a:rPr>
-              <a:t>壓力會下降，就表示容器裡的氣體正在減少。問題是——它們到底去了哪裡？</a:t>
-            </a:r>
-          </a:p>
-        </p:txBody>
-      </p:sp>
-    </p:spTree>
-  </p:cSld>
-  <p:clrMapOvr>
-    <a:masterClrMapping/>
-  </p:clrMapOvr>
-</p:sld>
-</file>
-
-<file path=ppt/slides/slide20.xml><?xml version="1.0" encoding="utf-8"?>
-<p:sld xmlns:a="http://schemas.openxmlformats.org/drawingml/2006/main" xmlns:p="http://schemas.openxmlformats.org/presentationml/2006/main" xmlns:r="http://schemas.openxmlformats.org/officeDocument/2006/relationships">
-  <p:cSld>
-    <p:spTree>
-      <p:nvGrpSpPr>
-        <p:cNvPr id="1" name=""/>
-        <p:cNvGrpSpPr/>
-        <p:nvPr/>
-      </p:nvGrpSpPr>
-      <p:grpSpPr/>
-      <p:sp>
-        <p:nvSpPr>
-          <p:cNvPr id="2" name="TextBox 1"/>
-          <p:cNvSpPr txBox="1"/>
-          <p:nvPr/>
-        </p:nvSpPr>
-        <p:spPr>
-          <a:xfrm>
-            <a:off x="432000" y="180000"/>
-            <a:ext cx="11329200" cy="540000"/>
-          </a:xfrm>
-          <a:prstGeom prst="rect">
-            <a:avLst/>
-          </a:prstGeom>
-          <a:noFill/>
-        </p:spPr>
-        <p:txBody>
-          <a:bodyPr wrap="square" anchor="t" lIns="0" rIns="0" tIns="0" bIns="0">
-            <a:spAutoFit/>
-          </a:bodyPr>
-          <a:lstStyle/>
-          <a:p>
-            <a:pPr algn="ctr">
-              <a:spcAft>
-                <a:spcPts val="0"/>
-              </a:spcAft>
-            </a:pPr>
-            <a:r>
-              <a:rPr sz="2800" b="1" i="0">
-                <a:solidFill>
-                  <a:srgbClr val="000000"/>
-                </a:solidFill>
-                <a:latin typeface="Times New Roman"/>
-                <a:ea typeface="標楷體"/>
-                <a:ea typeface="標楷體"/>
-              </a:rPr>
-              <a:t>十五、需要協助與確認的事項</a:t>
-            </a:r>
-          </a:p>
-        </p:txBody>
-      </p:sp>
-      <p:sp>
-        <p:nvSpPr>
-          <p:cNvPr id="3" name="Rectangle 2"/>
-          <p:cNvSpPr/>
-          <p:nvPr/>
-        </p:nvSpPr>
-        <p:spPr>
-          <a:xfrm>
-            <a:off x="216000" y="763200"/>
-            <a:ext cx="11761200" cy="18000"/>
-          </a:xfrm>
-          <a:prstGeom prst="rect">
-            <a:avLst/>
-          </a:prstGeom>
-          <a:solidFill>
-            <a:srgbClr val="2AB6D8"/>
-          </a:solidFill>
-          <a:ln>
-            <a:noFill/>
-          </a:ln>
-          <a:effectLst/>
-        </p:spPr>
-        <p:style>
-          <a:lnRef idx="1">
-            <a:schemeClr val="accent1"/>
-          </a:lnRef>
-          <a:fillRef idx="3">
-            <a:schemeClr val="accent1"/>
-          </a:fillRef>
-          <a:effectRef idx="2">
-            <a:schemeClr val="accent1"/>
-          </a:effectRef>
-          <a:fontRef idx="minor">
-            <a:schemeClr val="lt1"/>
-          </a:fontRef>
-        </p:style>
-        <p:txBody>
-          <a:bodyPr rtlCol="0" anchor="ctr"/>
-          <a:lstStyle/>
-          <a:p>
-            <a:pPr algn="ctr"/>
-          </a:p>
-        </p:txBody>
-      </p:sp>
-      <p:sp>
-        <p:nvSpPr>
-          <p:cNvPr id="4" name="TextBox 3"/>
-          <p:cNvSpPr txBox="1"/>
-          <p:nvPr/>
-        </p:nvSpPr>
-        <p:spPr>
-          <a:xfrm>
-            <a:off x="503999" y="842400"/>
-            <a:ext cx="11185201" cy="251999"/>
-          </a:xfrm>
-          <a:prstGeom prst="rect">
-            <a:avLst/>
-          </a:prstGeom>
-          <a:noFill/>
-        </p:spPr>
-        <p:txBody>
-          <a:bodyPr wrap="square" anchor="t" lIns="0" rIns="0" tIns="0" bIns="0">
-            <a:spAutoFit/>
-          </a:bodyPr>
-          <a:lstStyle/>
-          <a:p>
-            <a:pPr algn="ctr">
-              <a:spcAft>
-                <a:spcPts val="600"/>
-              </a:spcAft>
-            </a:pPr>
-            <a:r>
-              <a:rPr sz="1300" b="0" i="0">
-                <a:solidFill>
-                  <a:srgbClr val="595959"/>
-                </a:solidFill>
-                <a:latin typeface="Times New Roman"/>
-                <a:ea typeface="標楷體"/>
-                <a:ea typeface="標楷體"/>
-              </a:rPr>
-              <a:t>2026-09-23</a:t>
-            </a:r>
-          </a:p>
-        </p:txBody>
-      </p:sp>
-      <p:sp>
-        <p:nvSpPr>
-          <p:cNvPr id="5" name="Rectangle 4"/>
-          <p:cNvSpPr/>
-          <p:nvPr/>
-        </p:nvSpPr>
-        <p:spPr>
-          <a:xfrm>
-            <a:off x="0" y="6552000"/>
-            <a:ext cx="12193200" cy="306000"/>
-          </a:xfrm>
-          <a:prstGeom prst="rect">
-            <a:avLst/>
-          </a:prstGeom>
-          <a:solidFill>
-            <a:srgbClr val="2E8BC0"/>
-          </a:solidFill>
-          <a:ln>
-            <a:noFill/>
-          </a:ln>
-          <a:effectLst/>
-        </p:spPr>
-        <p:style>
-          <a:lnRef idx="1">
-            <a:schemeClr val="accent1"/>
-          </a:lnRef>
-          <a:fillRef idx="3">
-            <a:schemeClr val="accent1"/>
-          </a:fillRef>
-          <a:effectRef idx="2">
-            <a:schemeClr val="accent1"/>
-          </a:effectRef>
-          <a:fontRef idx="minor">
-            <a:schemeClr val="lt1"/>
-          </a:fontRef>
-        </p:style>
-        <p:txBody>
-          <a:bodyPr rtlCol="0" anchor="ctr"/>
-          <a:lstStyle/>
-          <a:p>
-            <a:pPr algn="ctr"/>
-          </a:p>
-        </p:txBody>
-      </p:sp>
-      <p:sp>
-        <p:nvSpPr>
-          <p:cNvPr id="6" name="TextBox 5"/>
-          <p:cNvSpPr txBox="1"/>
-          <p:nvPr/>
-        </p:nvSpPr>
-        <p:spPr>
-          <a:xfrm>
-            <a:off x="11329200" y="6577200"/>
-            <a:ext cx="576000" cy="216000"/>
-          </a:xfrm>
-          <a:prstGeom prst="rect">
-            <a:avLst/>
-          </a:prstGeom>
-          <a:noFill/>
-        </p:spPr>
-        <p:txBody>
-          <a:bodyPr wrap="square" anchor="t" lIns="0" rIns="0" tIns="0" bIns="0">
-            <a:spAutoFit/>
-          </a:bodyPr>
-          <a:lstStyle/>
-          <a:p>
-            <a:pPr algn="r">
-              <a:spcAft>
-                <a:spcPts val="600"/>
-              </a:spcAft>
-            </a:pPr>
-            <a:r>
-              <a:rPr sz="1100" b="0" i="0">
-                <a:solidFill>
-                  <a:srgbClr val="FFFFFF"/>
-                </a:solidFill>
-                <a:latin typeface="Times New Roman"/>
-                <a:ea typeface="標楷體"/>
-                <a:ea typeface="標楷體"/>
-              </a:rPr>
-              <a:t>21</a:t>
+              <a:t>25</a:t>
             </a:r>
           </a:p>
         </p:txBody>
@@ -9265,6 +10661,79 @@
           <a:p>
             <a:pPr algn="l">
               <a:spcAft>
+                <a:spcPts val="800"/>
+              </a:spcAft>
+            </a:pPr>
+            <a:r>
+              <a:rPr sz="1700" b="0" i="0">
+                <a:solidFill>
+                  <a:srgbClr val="000000"/>
+                </a:solidFill>
+                <a:latin typeface="Times New Roman"/>
+                <a:ea typeface="標楷體"/>
+                <a:ea typeface="標楷體"/>
+              </a:rPr>
+              <a:t>① 滅菌／去活性方式　② </a:t>
+            </a:r>
+            <a:r>
+              <a:rPr sz="1800" b="1" i="0">
+                <a:solidFill>
+                  <a:srgbClr val="FF0000"/>
+                </a:solidFill>
+                <a:latin typeface="Times New Roman"/>
+                <a:ea typeface="標楷體"/>
+                <a:ea typeface="標楷體"/>
+              </a:rPr>
+              <a:t>液位</a:t>
+            </a:r>
+            <a:r>
+              <a:rPr sz="1700" b="0" i="0">
+                <a:solidFill>
+                  <a:srgbClr val="000000"/>
+                </a:solidFill>
+                <a:latin typeface="Times New Roman"/>
+                <a:ea typeface="標楷體"/>
+                <a:ea typeface="標楷體"/>
+              </a:rPr>
+              <a:t>（最優先，液相三成 </a:t>
+            </a:r>
+            <a:r>
+              <a:rPr sz="1700" b="0" i="0">
+                <a:solidFill>
+                  <a:srgbClr val="000000"/>
+                </a:solidFill>
+                <a:latin typeface="Times New Roman"/>
+                <a:ea typeface="標楷體"/>
+                <a:ea typeface="標楷體"/>
+              </a:rPr>
+              <a:t>vs</a:t>
+            </a:r>
+            <a:r>
+              <a:rPr sz="1700" b="0" i="0">
+                <a:solidFill>
+                  <a:srgbClr val="000000"/>
+                </a:solidFill>
+                <a:latin typeface="Times New Roman"/>
+                <a:ea typeface="標楷體"/>
+                <a:ea typeface="標楷體"/>
+              </a:rPr>
+              <a:t> 七成整機速率差 2.3 倍）　③ 墊片材質　④ 液相溫度　⑤ 總容積究竉是 1.8 還是 1.99 </a:t>
+            </a:r>
+            <a:r>
+              <a:rPr sz="1700" b="0" i="1">
+                <a:solidFill>
+                  <a:srgbClr val="000000"/>
+                </a:solidFill>
+                <a:latin typeface="Times New Roman"/>
+                <a:ea typeface="標楷體"/>
+                <a:ea typeface="標楷體"/>
+              </a:rPr>
+              <a:t>L</a:t>
+            </a:r>
+          </a:p>
+          <a:p>
+            <a:pPr algn="l">
+              <a:spcAft>
                 <a:spcPts val="600"/>
               </a:spcAft>
             </a:pPr>
@@ -9277,7 +10746,73 @@
                 <a:ea typeface="標楷體"/>
                 <a:ea typeface="標楷體"/>
               </a:rPr>
-              <a:t>① 滅菌／去活性方式　② 液位（估算液相碳庫需要）　③ 墊片材質（評估氫氣穿透）　④ 20 分鐘循環的問題是否已排除</a:t>
+              <a:t>⑥ </a:t>
+            </a:r>
+            <a:r>
+              <a:rPr sz="1800" b="1" i="0">
+                <a:solidFill>
+                  <a:srgbClr val="FF0000"/>
+                </a:solidFill>
+                <a:latin typeface="Times New Roman"/>
+                <a:ea typeface="標楷體"/>
+                <a:ea typeface="標楷體"/>
+              </a:rPr>
+              <a:t>鹼度 </a:t>
+            </a:r>
+            <a:r>
+              <a:rPr sz="1800" b="1" i="0">
+                <a:solidFill>
+                  <a:srgbClr val="FF0000"/>
+                </a:solidFill>
+                <a:latin typeface="Times New Roman"/>
+                <a:ea typeface="標楷體"/>
+                <a:ea typeface="標楷體"/>
+              </a:rPr>
+              <a:t>TA</a:t>
+            </a:r>
+            <a:r>
+              <a:rPr sz="1800" b="1" i="0">
+                <a:solidFill>
+                  <a:srgbClr val="FF0000"/>
+                </a:solidFill>
+                <a:latin typeface="Times New Roman"/>
+                <a:ea typeface="標楷體"/>
+                <a:ea typeface="標楷體"/>
+              </a:rPr>
+              <a:t> 或總溶解無機碳</a:t>
+            </a:r>
+            <a:r>
+              <a:rPr sz="1700" b="0" i="0">
+                <a:solidFill>
+                  <a:srgbClr val="000000"/>
+                </a:solidFill>
+                <a:latin typeface="Times New Roman"/>
+                <a:ea typeface="標楷體"/>
+                <a:ea typeface="標楷體"/>
+              </a:rPr>
+              <a:t>（需滴定）——目前液相碳庫是由 </a:t>
+            </a:r>
+            <a:r>
+              <a:rPr sz="1700" b="0" i="0">
+                <a:solidFill>
+                  <a:srgbClr val="000000"/>
+                </a:solidFill>
+                <a:latin typeface="Times New Roman"/>
+                <a:ea typeface="標楷體"/>
+                <a:ea typeface="標楷體"/>
+              </a:rPr>
+              <a:t>pH</a:t>
+            </a:r>
+            <a:r>
+              <a:rPr sz="1700" b="0" i="0">
+                <a:solidFill>
+                  <a:srgbClr val="000000"/>
+                </a:solidFill>
+                <a:latin typeface="Times New Roman"/>
+                <a:ea typeface="標楷體"/>
+                <a:ea typeface="標楷體"/>
+              </a:rPr>
+              <a:t> 推算的，而它直接決定上述兩個機制的強度。</a:t>
             </a:r>
           </a:p>
         </p:txBody>
@@ -11819,7 +13354,7 @@
                           <a:ea typeface="標楷體"/>
                           <a:ea typeface="標楷體"/>
                         </a:rPr>
-                        <a:t>「氫氣流失」如何解釋（★但見第 16 頁的替代解釋）</a:t>
+                        <a:t>「氫氣流失」如何解釋（★但見第 17、19 頁的替代解釋）</a:t>
                       </a:r>
                     </a:p>
                   </a:txBody>
@@ -12142,7 +13677,7 @@
                 <a:ea typeface="標楷體"/>
                 <a:ea typeface="標楷體"/>
               </a:rPr>
-              <a:t>★ 2026-09-23：這三項矛盾也能由「碳酸鹽脫氣」解釋，且不需要任何洩漏。兩個候選解釋尚未分辨，見第 16、17 頁。</a:t>
+              <a:t>★ 2026-09-23：這三項矛盾也能由「碳酸鹽脫氣」解釋，且不需要任何洩漏。★ 2026-09-27 又找到第三個解釋（排氣本身會挑掉氫氣），三者尚未分辨，見第 17、19 頁。</a:t>
             </a:r>
           </a:p>
         </p:txBody>

--- a/docs/decks/簡報_2026-09-21_氫氣流失與壓降歸因.pptx
+++ b/docs/decks/簡報_2026-09-21_氫氣流失與壓降歸因.pptx
@@ -26,9 +26,6 @@
     <p:sldId id="274" r:id="rId25"/>
     <p:sldId id="275" r:id="rId26"/>
     <p:sldId id="276" r:id="rId27"/>
-    <p:sldId id="277" r:id="rId28"/>
-    <p:sldId id="278" r:id="rId29"/>
-    <p:sldId id="279" r:id="rId30"/>
   </p:sldIdLst>
   <p:sldSz cx="12193200" cy="6858000" type="screen4x3"/>
   <p:notesSz cx="6858000" cy="9144000"/>
@@ -3715,7 +3712,18 @@
                 <a:ea typeface="標楷體"/>
                 <a:ea typeface="標楷體"/>
               </a:rPr>
-              <a:t>九、佐證一：切斷碳源，壓降照舊</a:t>
+              <a:t>十一之一、先說明什麼是 </a:t>
+            </a:r>
+            <a:r>
+              <a:rPr sz="2800" b="1" i="0">
+                <a:solidFill>
+                  <a:srgbClr val="000000"/>
+                </a:solidFill>
+                <a:latin typeface="Times New Roman"/>
+                <a:ea typeface="標楷體"/>
+                <a:ea typeface="標楷體"/>
+              </a:rPr>
+              <a:t>PINN</a:t>
             </a:r>
           </a:p>
         </p:txBody>
@@ -3800,7 +3808,7 @@
                 <a:ea typeface="標楷體"/>
                 <a:ea typeface="標楷體"/>
               </a:rPr>
-              <a:t>自動化批次 2026-08-11 ~ 08-31</a:t>
+              <a:t>後面兩頁會用到，這裡先把它講清楚</a:t>
             </a:r>
           </a:p>
         </p:txBody>
@@ -3892,7 +3900,7 @@
       </p:sp>
       <p:pic>
         <p:nvPicPr>
-          <p:cNvPr id="7" name="Picture 6" descr="deck3_co2cut.png"/>
+          <p:cNvPr id="7" name="Picture 6" descr="deck11_pinn_what.png"/>
           <p:cNvPicPr>
             <a:picLocks noChangeAspect="1"/>
           </p:cNvPicPr>
@@ -3906,8 +3914,8 @@
         </p:blipFill>
         <p:spPr>
           <a:xfrm>
-            <a:off x="2136599" y="1188000"/>
-            <a:ext cx="7920000" cy="4596600"/>
+            <a:off x="1596599" y="1152000"/>
+            <a:ext cx="9000000" cy="4277636"/>
           </a:xfrm>
           <a:prstGeom prst="rect">
             <a:avLst/>
@@ -3922,8 +3930,8 @@
         </p:nvSpPr>
         <p:spPr>
           <a:xfrm>
-            <a:off x="576000" y="5856599"/>
-            <a:ext cx="11041200" cy="659400"/>
+            <a:off x="576000" y="5555635"/>
+            <a:ext cx="11041200" cy="852364"/>
           </a:xfrm>
           <a:prstGeom prst="rect">
             <a:avLst/>
@@ -3944,24 +3952,42 @@
             <a:r>
               <a:rPr sz="1800" b="1" i="0">
                 <a:solidFill>
-                  <a:srgbClr val="1F6FB5"/>
-                </a:solidFill>
-                <a:latin typeface="Times New Roman"/>
-                <a:ea typeface="標楷體"/>
-                <a:ea typeface="標楷體"/>
-              </a:rPr>
-              <a:t>這個「沒有差異」有檢定力：</a:t>
-            </a:r>
-            <a:r>
-              <a:rPr sz="1700" b="0" i="0">
-                <a:solidFill>
                   <a:srgbClr val="000000"/>
                 </a:solidFill>
                 <a:latin typeface="Times New Roman"/>
                 <a:ea typeface="標楷體"/>
                 <a:ea typeface="標楷體"/>
               </a:rPr>
-              <a:t>若生物途徑真的佔總壓降三分之一（0.0125），本檢定偵測得到的機率是 100%。結果沒有。</a:t>
+              <a:t>一句話：</a:t>
+            </a:r>
+            <a:r>
+              <a:rPr sz="1800" b="0" i="0">
+                <a:solidFill>
+                  <a:srgbClr val="000000"/>
+                </a:solidFill>
+                <a:latin typeface="Times New Roman"/>
+                <a:ea typeface="標楷體"/>
+                <a:ea typeface="標楷體"/>
+              </a:rPr>
+              <a:t>用神經網路取代「固定公式」，但要求它同時滿足物理定律。</a:t>
+            </a:r>
+          </a:p>
+          <a:p>
+            <a:pPr algn="ctr">
+              <a:spcAft>
+                <a:spcPts val="600"/>
+              </a:spcAft>
+            </a:pPr>
+            <a:r>
+              <a:rPr sz="1600" b="0" i="0">
+                <a:solidFill>
+                  <a:srgbClr val="595959"/>
+                </a:solidFill>
+                <a:latin typeface="Times New Roman"/>
+                <a:ea typeface="標楷體"/>
+                <a:ea typeface="標楷體"/>
+              </a:rPr>
+              <a:t>這樣生物速率就不必被假設成固定值——它本來就會隨氫氣耗盡而改變。</a:t>
             </a:r>
           </a:p>
         </p:txBody>
@@ -4020,7 +4046,7 @@
                 <a:ea typeface="標楷體"/>
                 <a:ea typeface="標楷體"/>
               </a:rPr>
-              <a:t>十、佐證二：壓降曲線幾乎是直線</a:t>
+              <a:t>十二、試過但不成立的兩個方法</a:t>
             </a:r>
           </a:p>
         </p:txBody>
@@ -4105,7 +4131,7 @@
                 <a:ea typeface="標楷體"/>
                 <a:ea typeface="標楷體"/>
               </a:rPr>
-              <a:t>溶解會讓曲線彎，定速移除是直線</a:t>
+              <a:t>誠實記錄，避免後續重複投入</a:t>
             </a:r>
           </a:p>
         </p:txBody>
@@ -4195,9 +4221,148 @@
           </a:p>
         </p:txBody>
       </p:sp>
+      <p:sp>
+        <p:nvSpPr>
+          <p:cNvPr id="7" name="TextBox 6"/>
+          <p:cNvSpPr txBox="1"/>
+          <p:nvPr/>
+        </p:nvSpPr>
+        <p:spPr>
+          <a:xfrm>
+            <a:off x="576000" y="1152000"/>
+            <a:ext cx="11041200" cy="2088000"/>
+          </a:xfrm>
+          <a:prstGeom prst="rect">
+            <a:avLst/>
+          </a:prstGeom>
+          <a:noFill/>
+        </p:spPr>
+        <p:txBody>
+          <a:bodyPr wrap="square" anchor="t" lIns="0" rIns="0" tIns="0" bIns="0">
+            <a:spAutoFit/>
+          </a:bodyPr>
+          <a:lstStyle/>
+          <a:p>
+            <a:pPr algn="l">
+              <a:spcAft>
+                <a:spcPts val="800"/>
+              </a:spcAft>
+            </a:pPr>
+            <a:r>
+              <a:rPr sz="2000" b="1" i="0">
+                <a:solidFill>
+                  <a:srgbClr val="000000"/>
+                </a:solidFill>
+                <a:latin typeface="Times New Roman"/>
+                <a:ea typeface="標楷體"/>
+                <a:ea typeface="標楷體"/>
+              </a:rPr>
+              <a:t>① 以「曲率」分離生物與物理</a:t>
+            </a:r>
+          </a:p>
+          <a:p>
+            <a:pPr algn="l">
+              <a:spcAft>
+                <a:spcPts val="1200"/>
+              </a:spcAft>
+            </a:pPr>
+            <a:r>
+              <a:rPr sz="1700" b="0" i="0">
+                <a:solidFill>
+                  <a:srgbClr val="000000"/>
+                </a:solidFill>
+                <a:latin typeface="Times New Roman"/>
+                <a:ea typeface="標楷體"/>
+                <a:ea typeface="標楷體"/>
+              </a:rPr>
+              <a:t>前提是生物速率為定值，但它會隨氫氣耗盡而變動。以已知答案驗證：真實物理份額 0% 時，該方法報出 </a:t>
+            </a:r>
+            <a:r>
+              <a:rPr sz="1900" b="1" i="0">
+                <a:solidFill>
+                  <a:srgbClr val="FF0000"/>
+                </a:solidFill>
+                <a:latin typeface="Times New Roman"/>
+                <a:ea typeface="標楷體"/>
+                <a:ea typeface="標楷體"/>
+              </a:rPr>
+              <a:t>101%</a:t>
+            </a:r>
+            <a:r>
+              <a:rPr sz="1700" b="0" i="0">
+                <a:solidFill>
+                  <a:srgbClr val="000000"/>
+                </a:solidFill>
+                <a:latin typeface="Times New Roman"/>
+                <a:ea typeface="標楷體"/>
+                <a:ea typeface="標楷體"/>
+              </a:rPr>
+              <a:t>。</a:t>
+            </a:r>
+          </a:p>
+          <a:p>
+            <a:pPr algn="l">
+              <a:spcAft>
+                <a:spcPts val="800"/>
+              </a:spcAft>
+            </a:pPr>
+            <a:r>
+              <a:rPr sz="2000" b="1" i="0">
+                <a:solidFill>
+                  <a:srgbClr val="000000"/>
+                </a:solidFill>
+                <a:latin typeface="Times New Roman"/>
+                <a:ea typeface="標楷體"/>
+                <a:ea typeface="標楷體"/>
+              </a:rPr>
+              <a:t>② 以物理資訊神經網路（</a:t>
+            </a:r>
+            <a:r>
+              <a:rPr sz="2000" b="1" i="0">
+                <a:solidFill>
+                  <a:srgbClr val="000000"/>
+                </a:solidFill>
+                <a:latin typeface="Times New Roman"/>
+                <a:ea typeface="標楷體"/>
+                <a:ea typeface="標楷體"/>
+              </a:rPr>
+              <a:t>PINN</a:t>
+            </a:r>
+            <a:r>
+              <a:rPr sz="2000" b="1" i="0">
+                <a:solidFill>
+                  <a:srgbClr val="000000"/>
+                </a:solidFill>
+                <a:latin typeface="Times New Roman"/>
+                <a:ea typeface="標楷體"/>
+                <a:ea typeface="標楷體"/>
+              </a:rPr>
+              <a:t>）反推生物速率</a:t>
+            </a:r>
+          </a:p>
+          <a:p>
+            <a:pPr algn="l">
+              <a:spcAft>
+                <a:spcPts val="600"/>
+              </a:spcAft>
+            </a:pPr>
+            <a:r>
+              <a:rPr sz="1700" b="0" i="0">
+                <a:solidFill>
+                  <a:srgbClr val="000000"/>
+                </a:solidFill>
+                <a:latin typeface="Times New Roman"/>
+                <a:ea typeface="標楷體"/>
+                <a:ea typeface="標楷體"/>
+              </a:rPr>
+              <a:t>方向正確，但方程式本身存在一個恰好抵銷的自由度（見次頁）。</a:t>
+            </a:r>
+          </a:p>
+        </p:txBody>
+      </p:sp>
       <p:pic>
         <p:nvPicPr>
-          <p:cNvPr id="7" name="Picture 6" descr="deck4_shape.png"/>
+          <p:cNvPr id="8" name="Picture 7" descr="deck6_pinn.png"/>
           <p:cNvPicPr>
             <a:picLocks noChangeAspect="1"/>
           </p:cNvPicPr>
@@ -4211,55 +4376,14 @@
         </p:blipFill>
         <p:spPr>
           <a:xfrm>
-            <a:off x="1596599" y="1224000"/>
-            <a:ext cx="9000000" cy="4790675"/>
+            <a:off x="3126599" y="3311999"/>
+            <a:ext cx="5940000" cy="3101591"/>
           </a:xfrm>
           <a:prstGeom prst="rect">
             <a:avLst/>
           </a:prstGeom>
         </p:spPr>
       </p:pic>
-      <p:sp>
-        <p:nvSpPr>
-          <p:cNvPr id="8" name="TextBox 7"/>
-          <p:cNvSpPr txBox="1"/>
-          <p:nvPr/>
-        </p:nvSpPr>
-        <p:spPr>
-          <a:xfrm>
-            <a:off x="576000" y="6086674"/>
-            <a:ext cx="11041200" cy="429325"/>
-          </a:xfrm>
-          <a:prstGeom prst="rect">
-            <a:avLst/>
-          </a:prstGeom>
-          <a:noFill/>
-        </p:spPr>
-        <p:txBody>
-          <a:bodyPr wrap="square" anchor="t" lIns="0" rIns="0" tIns="0" bIns="0">
-            <a:spAutoFit/>
-          </a:bodyPr>
-          <a:lstStyle/>
-          <a:p>
-            <a:pPr algn="ctr">
-              <a:spcAft>
-                <a:spcPts val="600"/>
-              </a:spcAft>
-            </a:pPr>
-            <a:r>
-              <a:rPr sz="1800" b="1" i="0">
-                <a:solidFill>
-                  <a:srgbClr val="000000"/>
-                </a:solidFill>
-                <a:latin typeface="Times New Roman"/>
-                <a:ea typeface="標楷體"/>
-                <a:ea typeface="標楷體"/>
-              </a:rPr>
-              <a:t>全資料庫 252 條下降曲線，九成落在「接近直線」這一群。</a:t>
-            </a:r>
-          </a:p>
-        </p:txBody>
-      </p:sp>
     </p:spTree>
   </p:cSld>
   <p:clrMapOvr>
@@ -4314,7 +4438,7 @@
                 <a:ea typeface="標楷體"/>
                 <a:ea typeface="標楷體"/>
               </a:rPr>
-              <a:t>十一、氧化還原電位（</a:t>
+              <a:t>十二之一、</a:t>
             </a:r>
             <a:r>
               <a:rPr sz="2800" b="1" i="0">
@@ -4325,7 +4449,7 @@
                 <a:ea typeface="標楷體"/>
                 <a:ea typeface="標楷體"/>
               </a:rPr>
-              <a:t>ORP</a:t>
+              <a:t>PINN</a:t>
             </a:r>
             <a:r>
               <a:rPr sz="2800" b="1" i="0">
@@ -4336,7 +4460,7 @@
                 <a:ea typeface="標楷體"/>
                 <a:ea typeface="標楷體"/>
               </a:rPr>
-              <a:t>）該怎麼讀</a:t>
+              <a:t> 為什麼撈不回來</a:t>
             </a:r>
           </a:p>
         </p:txBody>
@@ -4421,7 +4545,7 @@
                 <a:ea typeface="標楷體"/>
                 <a:ea typeface="標楷體"/>
               </a:rPr>
-              <a:t>水準健康，但循環內的變化不是生物造成的</a:t>
+              <a:t>不是網路不夠大，是壓力這一個通道裡沒有這個資訊</a:t>
             </a:r>
           </a:p>
         </p:txBody>
@@ -4511,9 +4635,72 @@
           </a:p>
         </p:txBody>
       </p:sp>
+      <p:sp>
+        <p:nvSpPr>
+          <p:cNvPr id="7" name="TextBox 6"/>
+          <p:cNvSpPr txBox="1"/>
+          <p:nvPr/>
+        </p:nvSpPr>
+        <p:spPr>
+          <a:xfrm>
+            <a:off x="576000" y="1116000"/>
+            <a:ext cx="11041200" cy="1152000"/>
+          </a:xfrm>
+          <a:prstGeom prst="rect">
+            <a:avLst/>
+          </a:prstGeom>
+          <a:noFill/>
+        </p:spPr>
+        <p:txBody>
+          <a:bodyPr wrap="square" anchor="t" lIns="0" rIns="0" tIns="0" bIns="0">
+            <a:spAutoFit/>
+          </a:bodyPr>
+          <a:lstStyle/>
+          <a:p>
+            <a:pPr algn="l">
+              <a:spcAft>
+                <a:spcPts val="600"/>
+              </a:spcAft>
+            </a:pPr>
+            <a:r>
+              <a:rPr sz="1700" b="0" i="0">
+                <a:solidFill>
+                  <a:srgbClr val="000000"/>
+                </a:solidFill>
+                <a:latin typeface="Times New Roman"/>
+                <a:ea typeface="標楷體"/>
+                <a:ea typeface="標楷體"/>
+              </a:rPr>
+              <a:t>氣體變少只有兩個原因：溶進水裡（物理）、被菌吃掉（生物）。壓力計只看得到兩者的</a:t>
+            </a:r>
+            <a:r>
+              <a:rPr sz="1900" b="1" i="0">
+                <a:solidFill>
+                  <a:srgbClr val="FF0000"/>
+                </a:solidFill>
+                <a:latin typeface="Times New Roman"/>
+                <a:ea typeface="標楷體"/>
+                <a:ea typeface="標楷體"/>
+              </a:rPr>
+              <a:t>總和</a:t>
+            </a:r>
+            <a:r>
+              <a:rPr sz="1700" b="0" i="0">
+                <a:solidFill>
+                  <a:srgbClr val="000000"/>
+                </a:solidFill>
+                <a:latin typeface="Times New Roman"/>
+                <a:ea typeface="標楷體"/>
+                <a:ea typeface="標楷體"/>
+              </a:rPr>
+              <a:t>。把生物項算多一點、同時把「平衡壓力」調高一點，兩者剛好互相抵銷——壓力曲線一模一樣。</a:t>
+            </a:r>
+          </a:p>
+        </p:txBody>
+      </p:sp>
       <p:pic>
         <p:nvPicPr>
-          <p:cNvPr id="7" name="Picture 6" descr="deck5_orp.png"/>
+          <p:cNvPr id="8" name="Picture 7" descr="deck8_pinn_corr.png"/>
           <p:cNvPicPr>
             <a:picLocks noChangeAspect="1"/>
           </p:cNvPicPr>
@@ -4527,365 +4714,14 @@
         </p:blipFill>
         <p:spPr>
           <a:xfrm>
-            <a:off x="2856599" y="1152000"/>
-            <a:ext cx="6480000" cy="3165077"/>
+            <a:off x="2136599" y="2340000"/>
+            <a:ext cx="7920000" cy="3743300"/>
           </a:xfrm>
           <a:prstGeom prst="rect">
             <a:avLst/>
           </a:prstGeom>
         </p:spPr>
       </p:pic>
-      <p:sp>
-        <p:nvSpPr>
-          <p:cNvPr id="8" name="TextBox 7"/>
-          <p:cNvSpPr txBox="1"/>
-          <p:nvPr/>
-        </p:nvSpPr>
-        <p:spPr>
-          <a:xfrm>
-            <a:off x="576000" y="4425077"/>
-            <a:ext cx="11041200" cy="1154922"/>
-          </a:xfrm>
-          <a:prstGeom prst="rect">
-            <a:avLst/>
-          </a:prstGeom>
-          <a:noFill/>
-        </p:spPr>
-        <p:txBody>
-          <a:bodyPr wrap="square" anchor="t" lIns="0" rIns="0" tIns="0" bIns="0">
-            <a:spAutoFit/>
-          </a:bodyPr>
-          <a:lstStyle/>
-          <a:p>
-            <a:pPr algn="l">
-              <a:spcAft>
-                <a:spcPts val="500"/>
-              </a:spcAft>
-            </a:pPr>
-            <a:r>
-              <a:rPr sz="1700" b="1" i="0">
-                <a:solidFill>
-                  <a:srgbClr val="000000"/>
-                </a:solidFill>
-                <a:latin typeface="Times New Roman"/>
-                <a:ea typeface="標楷體"/>
-                <a:ea typeface="標楷體"/>
-              </a:rPr>
-              <a:t>水準：</a:t>
-            </a:r>
-            <a:r>
-              <a:rPr sz="1600" b="0" i="0">
-                <a:solidFill>
-                  <a:srgbClr val="000000"/>
-                </a:solidFill>
-                <a:latin typeface="Times New Roman"/>
-                <a:ea typeface="標楷體"/>
-                <a:ea typeface="標楷體"/>
-              </a:rPr>
-              <a:t>−357 </a:t>
-            </a:r>
-            <a:r>
-              <a:rPr sz="1600" b="0" i="0">
-                <a:solidFill>
-                  <a:srgbClr val="000000"/>
-                </a:solidFill>
-                <a:latin typeface="Times New Roman"/>
-                <a:ea typeface="標楷體"/>
-                <a:ea typeface="標楷體"/>
-              </a:rPr>
-              <a:t>mV</a:t>
-            </a:r>
-            <a:r>
-              <a:rPr sz="1600" b="0" i="0">
-                <a:solidFill>
-                  <a:srgbClr val="000000"/>
-                </a:solidFill>
-                <a:latin typeface="Times New Roman"/>
-                <a:ea typeface="標楷體"/>
-                <a:ea typeface="標楷體"/>
-              </a:rPr>
-              <a:t>（對 </a:t>
-            </a:r>
-            <a:r>
-              <a:rPr sz="1600" b="0" i="0">
-                <a:solidFill>
-                  <a:srgbClr val="000000"/>
-                </a:solidFill>
-                <a:latin typeface="Times New Roman"/>
-                <a:ea typeface="標楷體"/>
-                <a:ea typeface="標楷體"/>
-              </a:rPr>
-              <a:t>SHE</a:t>
-            </a:r>
-            <a:r>
-              <a:rPr sz="1600" b="0" i="0">
-                <a:solidFill>
-                  <a:srgbClr val="000000"/>
-                </a:solidFill>
-                <a:latin typeface="Times New Roman"/>
-                <a:ea typeface="標楷體"/>
-                <a:ea typeface="標楷體"/>
-              </a:rPr>
-              <a:t>），文獻最適為 −335.6 ± 29.0 </a:t>
-            </a:r>
-            <a:r>
-              <a:rPr sz="1600" b="0" i="0">
-                <a:solidFill>
-                  <a:srgbClr val="000000"/>
-                </a:solidFill>
-                <a:latin typeface="Times New Roman"/>
-                <a:ea typeface="標楷體"/>
-                <a:ea typeface="標楷體"/>
-              </a:rPr>
-              <a:t>mV</a:t>
-            </a:r>
-            <a:r>
-              <a:rPr sz="1600" b="0" i="0">
-                <a:solidFill>
-                  <a:srgbClr val="000000"/>
-                </a:solidFill>
-                <a:latin typeface="Times New Roman"/>
-                <a:ea typeface="標楷體"/>
-                <a:ea typeface="標楷體"/>
-              </a:rPr>
-              <a:t> — </a:t>
-            </a:r>
-            <a:r>
-              <a:rPr sz="1700" b="1" i="0">
-                <a:solidFill>
-                  <a:srgbClr val="1F6FB5"/>
-                </a:solidFill>
-                <a:latin typeface="Times New Roman"/>
-                <a:ea typeface="標楷體"/>
-                <a:ea typeface="標楷體"/>
-              </a:rPr>
-              <a:t>正落在區間內</a:t>
-            </a:r>
-          </a:p>
-          <a:p>
-            <a:pPr algn="l">
-              <a:spcAft>
-                <a:spcPts val="500"/>
-              </a:spcAft>
-            </a:pPr>
-            <a:r>
-              <a:rPr sz="1700" b="1" i="0">
-                <a:solidFill>
-                  <a:srgbClr val="000000"/>
-                </a:solidFill>
-                <a:latin typeface="Times New Roman"/>
-                <a:ea typeface="標楷體"/>
-                <a:ea typeface="標楷體"/>
-              </a:rPr>
-              <a:t>變化：</a:t>
-            </a:r>
-            <a:r>
-              <a:rPr sz="1600" b="0" i="0">
-                <a:solidFill>
-                  <a:srgbClr val="000000"/>
-                </a:solidFill>
-                <a:latin typeface="Times New Roman"/>
-                <a:ea typeface="標楷體"/>
-                <a:ea typeface="標楷體"/>
-              </a:rPr>
-              <a:t>補氣跳 +37 </a:t>
-            </a:r>
-            <a:r>
-              <a:rPr sz="1600" b="0" i="0">
-                <a:solidFill>
-                  <a:srgbClr val="000000"/>
-                </a:solidFill>
-                <a:latin typeface="Times New Roman"/>
-                <a:ea typeface="標楷體"/>
-                <a:ea typeface="標楷體"/>
-              </a:rPr>
-              <a:t>mV</a:t>
-            </a:r>
-            <a:r>
-              <a:rPr sz="1600" b="0" i="0">
-                <a:solidFill>
-                  <a:srgbClr val="000000"/>
-                </a:solidFill>
-                <a:latin typeface="Times New Roman"/>
-                <a:ea typeface="標楷體"/>
-                <a:ea typeface="標楷體"/>
-              </a:rPr>
-              <a:t>；泵運轉 +3.5 ~ +10.8 </a:t>
-            </a:r>
-            <a:r>
-              <a:rPr sz="1600" b="0" i="0">
-                <a:solidFill>
-                  <a:srgbClr val="000000"/>
-                </a:solidFill>
-                <a:latin typeface="Times New Roman"/>
-                <a:ea typeface="標楷體"/>
-                <a:ea typeface="標楷體"/>
-              </a:rPr>
-              <a:t>mV</a:t>
-            </a:r>
-            <a:r>
-              <a:rPr sz="1600" b="0" i="0">
-                <a:solidFill>
-                  <a:srgbClr val="000000"/>
-                </a:solidFill>
-                <a:latin typeface="Times New Roman"/>
-                <a:ea typeface="標楷體"/>
-                <a:ea typeface="標楷體"/>
-              </a:rPr>
-              <a:t>/分。</a:t>
-            </a:r>
-          </a:p>
-          <a:p>
-            <a:pPr algn="l">
-              <a:spcAft>
-                <a:spcPts val="600"/>
-              </a:spcAft>
-            </a:pPr>
-            <a:r>
-              <a:rPr sz="1600" b="1" i="0">
-                <a:solidFill>
-                  <a:srgbClr val="FF0000"/>
-                </a:solidFill>
-                <a:latin typeface="Times New Roman"/>
-                <a:ea typeface="標楷體"/>
-                <a:ea typeface="標楷體"/>
-              </a:rPr>
-              <a:t>產甲烷必須停止的時段，</a:t>
-            </a:r>
-            <a:r>
-              <a:rPr sz="1600" b="1" i="0">
-                <a:solidFill>
-                  <a:srgbClr val="FF0000"/>
-                </a:solidFill>
-                <a:latin typeface="Times New Roman"/>
-                <a:ea typeface="標楷體"/>
-                <a:ea typeface="標楷體"/>
-              </a:rPr>
-              <a:t>ORP</a:t>
-            </a:r>
-            <a:r>
-              <a:rPr sz="1600" b="1" i="0">
-                <a:solidFill>
-                  <a:srgbClr val="FF0000"/>
-                </a:solidFill>
-                <a:latin typeface="Times New Roman"/>
-                <a:ea typeface="標楷體"/>
-                <a:ea typeface="標楷體"/>
-              </a:rPr>
-              <a:t> 照常變化。</a:t>
-            </a:r>
-          </a:p>
-        </p:txBody>
-      </p:sp>
-      <p:sp>
-        <p:nvSpPr>
-          <p:cNvPr id="9" name="Rectangle 8"/>
-          <p:cNvSpPr/>
-          <p:nvPr/>
-        </p:nvSpPr>
-        <p:spPr>
-          <a:xfrm>
-            <a:off x="432000" y="5562000"/>
-            <a:ext cx="11329200" cy="864000"/>
-          </a:xfrm>
-          <a:prstGeom prst="rect">
-            <a:avLst/>
-          </a:prstGeom>
-          <a:solidFill>
-            <a:srgbClr val="F2F7FC"/>
-          </a:solidFill>
-          <a:ln w="9525">
-            <a:solidFill>
-              <a:srgbClr val="2AB6D8"/>
-            </a:solidFill>
-          </a:ln>
-          <a:effectLst/>
-        </p:spPr>
-        <p:style>
-          <a:lnRef idx="1">
-            <a:schemeClr val="accent1"/>
-          </a:lnRef>
-          <a:fillRef idx="3">
-            <a:schemeClr val="accent1"/>
-          </a:fillRef>
-          <a:effectRef idx="2">
-            <a:schemeClr val="accent1"/>
-          </a:effectRef>
-          <a:fontRef idx="minor">
-            <a:schemeClr val="lt1"/>
-          </a:fontRef>
-        </p:style>
-        <p:txBody>
-          <a:bodyPr rtlCol="0" anchor="ctr"/>
-          <a:lstStyle/>
-          <a:p>
-            <a:pPr algn="ctr"/>
-          </a:p>
-        </p:txBody>
-      </p:sp>
-      <p:sp>
-        <p:nvSpPr>
-          <p:cNvPr id="10" name="TextBox 9"/>
-          <p:cNvSpPr txBox="1"/>
-          <p:nvPr/>
-        </p:nvSpPr>
-        <p:spPr>
-          <a:xfrm>
-            <a:off x="612000" y="5670000"/>
-            <a:ext cx="10969200" cy="648000"/>
-          </a:xfrm>
-          <a:prstGeom prst="rect">
-            <a:avLst/>
-          </a:prstGeom>
-          <a:noFill/>
-        </p:spPr>
-        <p:txBody>
-          <a:bodyPr wrap="square" anchor="ctr" lIns="0" rIns="0" tIns="0" bIns="0">
-            <a:spAutoFit/>
-          </a:bodyPr>
-          <a:lstStyle/>
-          <a:p>
-            <a:pPr algn="l">
-              <a:spcAft>
-                <a:spcPts val="600"/>
-              </a:spcAft>
-            </a:pPr>
-            <a:r>
-              <a:rPr sz="1300" b="0" i="0">
-                <a:solidFill>
-                  <a:srgbClr val="FF0000"/>
-                </a:solidFill>
-                <a:latin typeface="Times New Roman"/>
-                <a:ea typeface="標楷體"/>
-                <a:ea typeface="標楷體"/>
-              </a:rPr>
-              <a:t>文獻將 </a:t>
-            </a:r>
-            <a:r>
-              <a:rPr sz="1300" b="0" i="0">
-                <a:solidFill>
-                  <a:srgbClr val="FF0000"/>
-                </a:solidFill>
-                <a:latin typeface="Times New Roman"/>
-                <a:ea typeface="標楷體"/>
-                <a:ea typeface="標楷體"/>
-              </a:rPr>
-              <a:t>ORP</a:t>
-            </a:r>
-            <a:r>
-              <a:rPr sz="1300" b="0" i="0">
-                <a:solidFill>
-                  <a:srgbClr val="FF0000"/>
-                </a:solidFill>
-                <a:latin typeface="Times New Roman"/>
-                <a:ea typeface="標楷體"/>
-                <a:ea typeface="標楷體"/>
-              </a:rPr>
-              <a:t> 當微生物活性指標，其對象是未外加氫氣的系統；本反應器的氫氣為外部輸入，會直接鉗制電位，該套解讀不能直接移植。</a:t>
-            </a:r>
-          </a:p>
-        </p:txBody>
-      </p:sp>
     </p:spTree>
   </p:cSld>
   <p:clrMapOvr>
@@ -4940,18 +4776,7 @@
                 <a:ea typeface="標楷體"/>
                 <a:ea typeface="標楷體"/>
               </a:rPr>
-              <a:t>十一之一、先說明什麼是 </a:t>
-            </a:r>
-            <a:r>
-              <a:rPr sz="2800" b="1" i="0">
-                <a:solidFill>
-                  <a:srgbClr val="000000"/>
-                </a:solidFill>
-                <a:latin typeface="Times New Roman"/>
-                <a:ea typeface="標楷體"/>
-                <a:ea typeface="標楷體"/>
-              </a:rPr>
-              <a:t>PINN</a:t>
+              <a:t>十二之二、同一條壓降，兩種完全不同的答案</a:t>
             </a:r>
           </a:p>
         </p:txBody>
@@ -5036,7 +4861,7 @@
                 <a:ea typeface="標楷體"/>
                 <a:ea typeface="標楷體"/>
               </a:rPr>
-              <a:t>後面兩頁會用到，這裡先把它講清楚</a:t>
+              <a:t>兩者的擬合誤差幾乎相同，資料無從選擇</a:t>
             </a:r>
           </a:p>
         </p:txBody>
@@ -5128,7 +4953,7 @@
       </p:sp>
       <p:pic>
         <p:nvPicPr>
-          <p:cNvPr id="7" name="Picture 6" descr="deck11_pinn_what.png"/>
+          <p:cNvPr id="7" name="Picture 6" descr="deck7_pinn_features.png"/>
           <p:cNvPicPr>
             <a:picLocks noChangeAspect="1"/>
           </p:cNvPicPr>
@@ -5142,8 +4967,8 @@
         </p:blipFill>
         <p:spPr>
           <a:xfrm>
-            <a:off x="1596599" y="1152000"/>
-            <a:ext cx="9000000" cy="4277636"/>
+            <a:off x="1956599" y="1152000"/>
+            <a:ext cx="8280000" cy="4159528"/>
           </a:xfrm>
           <a:prstGeom prst="rect">
             <a:avLst/>
@@ -5158,8 +4983,8 @@
         </p:nvSpPr>
         <p:spPr>
           <a:xfrm>
-            <a:off x="576000" y="5555635"/>
-            <a:ext cx="11041200" cy="852364"/>
+            <a:off x="576000" y="5455528"/>
+            <a:ext cx="11041200" cy="952471"/>
           </a:xfrm>
           <a:prstGeom prst="rect">
             <a:avLst/>
@@ -5172,13 +4997,13 @@
           </a:bodyPr>
           <a:lstStyle/>
           <a:p>
-            <a:pPr algn="ctr">
+            <a:pPr algn="l">
               <a:spcAft>
                 <a:spcPts val="600"/>
               </a:spcAft>
             </a:pPr>
             <a:r>
-              <a:rPr sz="1800" b="1" i="0">
+              <a:rPr sz="1700" b="0" i="0">
                 <a:solidFill>
                   <a:srgbClr val="000000"/>
                 </a:solidFill>
@@ -5186,10 +5011,21 @@
                 <a:ea typeface="標楷體"/>
                 <a:ea typeface="標楷體"/>
               </a:rPr>
-              <a:t>一句話：</a:t>
-            </a:r>
-            <a:r>
-              <a:rPr sz="1800" b="0" i="0">
+              <a:t>但要講清楚：分不開的是生物速率的</a:t>
+            </a:r>
+            <a:r>
+              <a:rPr sz="1900" b="1" i="0">
+                <a:solidFill>
+                  <a:srgbClr val="FF0000"/>
+                </a:solidFill>
+                <a:latin typeface="Times New Roman"/>
+                <a:ea typeface="標楷體"/>
+                <a:ea typeface="標楷體"/>
+              </a:rPr>
+              <a:t>平均值</a:t>
+            </a:r>
+            <a:r>
+              <a:rPr sz="1700" b="0" i="0">
                 <a:solidFill>
                   <a:srgbClr val="000000"/>
                 </a:solidFill>
@@ -5197,25 +5033,29 @@
                 <a:ea typeface="標楷體"/>
                 <a:ea typeface="標楷體"/>
               </a:rPr>
-              <a:t>用神經網路取代「固定公式」，但要求它同時滿足物理定律。</a:t>
-            </a:r>
-          </a:p>
-          <a:p>
-            <a:pPr algn="ctr">
-              <a:spcAft>
-                <a:spcPts val="600"/>
-              </a:spcAft>
-            </a:pPr>
-            <a:r>
-              <a:rPr sz="1600" b="0" i="0">
-                <a:solidFill>
-                  <a:srgbClr val="595959"/>
-                </a:solidFill>
-                <a:latin typeface="Times New Roman"/>
-                <a:ea typeface="標楷體"/>
-                <a:ea typeface="標楷體"/>
-              </a:rPr>
-              <a:t>這樣生物速率就不必被假設成固定值——它本來就會隨氫氣耗盡而改變。</a:t>
+              <a:t>。它的</a:t>
+            </a:r>
+            <a:r>
+              <a:rPr sz="1900" b="1" i="0">
+                <a:solidFill>
+                  <a:srgbClr val="1F6FB5"/>
+                </a:solidFill>
+                <a:latin typeface="Times New Roman"/>
+                <a:ea typeface="標楷體"/>
+                <a:ea typeface="標楷體"/>
+              </a:rPr>
+              <a:t>時間變化</a:t>
+            </a:r>
+            <a:r>
+              <a:rPr sz="1700" b="0" i="0">
+                <a:solidFill>
+                  <a:srgbClr val="000000"/>
+                </a:solidFill>
+                <a:latin typeface="Times New Roman"/>
+                <a:ea typeface="標楷體"/>
+                <a:ea typeface="標楷體"/>
+              </a:rPr>
+              <a:t>其實還留在資料裡（訊噪比 6.0），只是被「速率不可為負」這個設定連帶壓死了——把平均值另外定住，變化的形狀就回來了（相關 0.97）。</a:t>
             </a:r>
           </a:p>
         </p:txBody>
@@ -5274,7 +5114,7 @@
                 <a:ea typeface="標楷體"/>
                 <a:ea typeface="標楷體"/>
               </a:rPr>
-              <a:t>十二、試過但不成立的兩個方法</a:t>
+              <a:t>十二之三、還有另一個解釋：碳酸鹽脫氣</a:t>
             </a:r>
           </a:p>
         </p:txBody>
@@ -5359,7 +5199,7 @@
                 <a:ea typeface="標楷體"/>
                 <a:ea typeface="標楷體"/>
               </a:rPr>
-              <a:t>誠實記錄，避免後續重複投入</a:t>
+              <a:t>2026-09-23 補充——這個解釋不需要任何洩漏</a:t>
             </a:r>
           </a:p>
         </p:txBody>
@@ -5449,148 +5289,9 @@
           </a:p>
         </p:txBody>
       </p:sp>
-      <p:sp>
-        <p:nvSpPr>
-          <p:cNvPr id="7" name="TextBox 6"/>
-          <p:cNvSpPr txBox="1"/>
-          <p:nvPr/>
-        </p:nvSpPr>
-        <p:spPr>
-          <a:xfrm>
-            <a:off x="576000" y="1152000"/>
-            <a:ext cx="11041200" cy="2088000"/>
-          </a:xfrm>
-          <a:prstGeom prst="rect">
-            <a:avLst/>
-          </a:prstGeom>
-          <a:noFill/>
-        </p:spPr>
-        <p:txBody>
-          <a:bodyPr wrap="square" anchor="t" lIns="0" rIns="0" tIns="0" bIns="0">
-            <a:spAutoFit/>
-          </a:bodyPr>
-          <a:lstStyle/>
-          <a:p>
-            <a:pPr algn="l">
-              <a:spcAft>
-                <a:spcPts val="800"/>
-              </a:spcAft>
-            </a:pPr>
-            <a:r>
-              <a:rPr sz="2000" b="1" i="0">
-                <a:solidFill>
-                  <a:srgbClr val="000000"/>
-                </a:solidFill>
-                <a:latin typeface="Times New Roman"/>
-                <a:ea typeface="標楷體"/>
-                <a:ea typeface="標楷體"/>
-              </a:rPr>
-              <a:t>① 以「曲率」分離生物與物理</a:t>
-            </a:r>
-          </a:p>
-          <a:p>
-            <a:pPr algn="l">
-              <a:spcAft>
-                <a:spcPts val="1200"/>
-              </a:spcAft>
-            </a:pPr>
-            <a:r>
-              <a:rPr sz="1700" b="0" i="0">
-                <a:solidFill>
-                  <a:srgbClr val="000000"/>
-                </a:solidFill>
-                <a:latin typeface="Times New Roman"/>
-                <a:ea typeface="標楷體"/>
-                <a:ea typeface="標楷體"/>
-              </a:rPr>
-              <a:t>前提是生物速率為定值，但它會隨氫氣耗盡而變動。以已知答案驗證：真實物理份額 0% 時，該方法報出 </a:t>
-            </a:r>
-            <a:r>
-              <a:rPr sz="1900" b="1" i="0">
-                <a:solidFill>
-                  <a:srgbClr val="FF0000"/>
-                </a:solidFill>
-                <a:latin typeface="Times New Roman"/>
-                <a:ea typeface="標楷體"/>
-                <a:ea typeface="標楷體"/>
-              </a:rPr>
-              <a:t>101%</a:t>
-            </a:r>
-            <a:r>
-              <a:rPr sz="1700" b="0" i="0">
-                <a:solidFill>
-                  <a:srgbClr val="000000"/>
-                </a:solidFill>
-                <a:latin typeface="Times New Roman"/>
-                <a:ea typeface="標楷體"/>
-                <a:ea typeface="標楷體"/>
-              </a:rPr>
-              <a:t>。</a:t>
-            </a:r>
-          </a:p>
-          <a:p>
-            <a:pPr algn="l">
-              <a:spcAft>
-                <a:spcPts val="800"/>
-              </a:spcAft>
-            </a:pPr>
-            <a:r>
-              <a:rPr sz="2000" b="1" i="0">
-                <a:solidFill>
-                  <a:srgbClr val="000000"/>
-                </a:solidFill>
-                <a:latin typeface="Times New Roman"/>
-                <a:ea typeface="標楷體"/>
-                <a:ea typeface="標楷體"/>
-              </a:rPr>
-              <a:t>② 以物理資訊神經網路（</a:t>
-            </a:r>
-            <a:r>
-              <a:rPr sz="2000" b="1" i="0">
-                <a:solidFill>
-                  <a:srgbClr val="000000"/>
-                </a:solidFill>
-                <a:latin typeface="Times New Roman"/>
-                <a:ea typeface="標楷體"/>
-                <a:ea typeface="標楷體"/>
-              </a:rPr>
-              <a:t>PINN</a:t>
-            </a:r>
-            <a:r>
-              <a:rPr sz="2000" b="1" i="0">
-                <a:solidFill>
-                  <a:srgbClr val="000000"/>
-                </a:solidFill>
-                <a:latin typeface="Times New Roman"/>
-                <a:ea typeface="標楷體"/>
-                <a:ea typeface="標楷體"/>
-              </a:rPr>
-              <a:t>）反推生物速率</a:t>
-            </a:r>
-          </a:p>
-          <a:p>
-            <a:pPr algn="l">
-              <a:spcAft>
-                <a:spcPts val="600"/>
-              </a:spcAft>
-            </a:pPr>
-            <a:r>
-              <a:rPr sz="1700" b="0" i="0">
-                <a:solidFill>
-                  <a:srgbClr val="000000"/>
-                </a:solidFill>
-                <a:latin typeface="Times New Roman"/>
-                <a:ea typeface="標楷體"/>
-                <a:ea typeface="標楷體"/>
-              </a:rPr>
-              <a:t>方向正確，但方程式本身存在一個恰好抵銷的自由度（見次頁）。</a:t>
-            </a:r>
-          </a:p>
-        </p:txBody>
-      </p:sp>
       <p:pic>
         <p:nvPicPr>
-          <p:cNvPr id="8" name="Picture 7" descr="deck6_pinn.png"/>
+          <p:cNvPr id="7" name="Picture 6" descr="deck9_carbonate.png"/>
           <p:cNvPicPr>
             <a:picLocks noChangeAspect="1"/>
           </p:cNvPicPr>
@@ -5604,14 +5305,161 @@
         </p:blipFill>
         <p:spPr>
           <a:xfrm>
-            <a:off x="3126599" y="3311999"/>
-            <a:ext cx="5940000" cy="3067973"/>
+            <a:off x="1956599" y="1188000"/>
+            <a:ext cx="8280000" cy="4247456"/>
           </a:xfrm>
           <a:prstGeom prst="rect">
             <a:avLst/>
           </a:prstGeom>
         </p:spPr>
       </p:pic>
+      <p:sp>
+        <p:nvSpPr>
+          <p:cNvPr id="8" name="TextBox 7"/>
+          <p:cNvSpPr txBox="1"/>
+          <p:nvPr/>
+        </p:nvSpPr>
+        <p:spPr>
+          <a:xfrm>
+            <a:off x="576000" y="5561455"/>
+            <a:ext cx="11041200" cy="846544"/>
+          </a:xfrm>
+          <a:prstGeom prst="rect">
+            <a:avLst/>
+          </a:prstGeom>
+          <a:noFill/>
+        </p:spPr>
+        <p:txBody>
+          <a:bodyPr wrap="square" anchor="t" lIns="0" rIns="0" tIns="0" bIns="0">
+            <a:spAutoFit/>
+          </a:bodyPr>
+          <a:lstStyle/>
+          <a:p>
+            <a:pPr algn="ctr">
+              <a:spcAft>
+                <a:spcPts val="600"/>
+              </a:spcAft>
+            </a:pPr>
+            <a:r>
+              <a:rPr sz="1700" b="0" i="0">
+                <a:solidFill>
+                  <a:srgbClr val="000000"/>
+                </a:solidFill>
+                <a:latin typeface="Times New Roman"/>
+                <a:ea typeface="標楷體"/>
+                <a:ea typeface="標楷體"/>
+              </a:rPr>
+              <a:t>量級檢查：只需 </a:t>
+            </a:r>
+            <a:r>
+              <a:rPr sz="2000" b="1" i="0">
+                <a:solidFill>
+                  <a:srgbClr val="FF0000"/>
+                </a:solidFill>
+                <a:latin typeface="Times New Roman"/>
+                <a:ea typeface="標楷體"/>
+                <a:ea typeface="標楷體"/>
+              </a:rPr>
+              <a:t>2.6%</a:t>
+            </a:r>
+            <a:r>
+              <a:rPr sz="1700" b="0" i="0">
+                <a:solidFill>
+                  <a:srgbClr val="000000"/>
+                </a:solidFill>
+                <a:latin typeface="Times New Roman"/>
+                <a:ea typeface="標楷體"/>
+                <a:ea typeface="標楷體"/>
+              </a:rPr>
+              <a:t> 的液相碳庫在排氣瞬間冒出來，就足以解釋觀測到的全部偏離。</a:t>
+            </a:r>
+          </a:p>
+          <a:p>
+            <a:pPr algn="ctr">
+              <a:spcAft>
+                <a:spcPts val="600"/>
+              </a:spcAft>
+            </a:pPr>
+            <a:r>
+              <a:rPr sz="1400" b="0" i="0">
+                <a:solidFill>
+                  <a:srgbClr val="595959"/>
+                </a:solidFill>
+                <a:latin typeface="Times New Roman"/>
+                <a:ea typeface="標楷體"/>
+                <a:ea typeface="標楷體"/>
+              </a:rPr>
+              <a:t>方向性檢驗（壓降越大應脫越多）實測 </a:t>
+            </a:r>
+            <a:r>
+              <a:rPr sz="1400" b="0" i="1">
+                <a:solidFill>
+                  <a:srgbClr val="595959"/>
+                </a:solidFill>
+                <a:latin typeface="Times New Roman"/>
+                <a:ea typeface="標楷體"/>
+                <a:ea typeface="標楷體"/>
+              </a:rPr>
+              <a:t>ρ</a:t>
+            </a:r>
+            <a:r>
+              <a:rPr sz="1400" b="0" i="0">
+                <a:solidFill>
+                  <a:srgbClr val="595959"/>
+                </a:solidFill>
+                <a:latin typeface="Times New Roman"/>
+                <a:ea typeface="標楷體"/>
+                <a:ea typeface="標楷體"/>
+              </a:rPr>
+              <a:t>=+0.21，方向符合，但 35 筆的可偵測門檻是 0.46，樣本不足以分辨；排氣後立刻補氣會降 </a:t>
+            </a:r>
+            <a:r>
+              <a:rPr sz="1400" b="0" i="0">
+                <a:solidFill>
+                  <a:srgbClr val="595959"/>
+                </a:solidFill>
+                <a:latin typeface="Times New Roman"/>
+                <a:ea typeface="標楷體"/>
+                <a:ea typeface="標楷體"/>
+              </a:rPr>
+              <a:t>pH</a:t>
+            </a:r>
+            <a:r>
+              <a:rPr sz="1400" b="0" i="0">
+                <a:solidFill>
+                  <a:srgbClr val="595959"/>
+                </a:solidFill>
+                <a:latin typeface="Times New Roman"/>
+                <a:ea typeface="標楷體"/>
+                <a:ea typeface="標楷體"/>
+              </a:rPr>
+              <a:t>，故 </a:t>
+            </a:r>
+            <a:r>
+              <a:rPr sz="1400" b="0" i="0">
+                <a:solidFill>
+                  <a:srgbClr val="595959"/>
+                </a:solidFill>
+                <a:latin typeface="Times New Roman"/>
+                <a:ea typeface="標楷體"/>
+                <a:ea typeface="標楷體"/>
+              </a:rPr>
+              <a:t>pH</a:t>
+            </a:r>
+            <a:r>
+              <a:rPr sz="1400" b="0" i="0">
+                <a:solidFill>
+                  <a:srgbClr val="595959"/>
+                </a:solidFill>
+                <a:latin typeface="Times New Roman"/>
+                <a:ea typeface="標楷體"/>
+                <a:ea typeface="標楷體"/>
+              </a:rPr>
+              <a:t> 檢驗遭混淆、不可單獨解讀。</a:t>
+            </a:r>
+          </a:p>
+        </p:txBody>
+      </p:sp>
     </p:spTree>
   </p:cSld>
   <p:clrMapOvr>
@@ -5666,7 +5514,7 @@
                 <a:ea typeface="標楷體"/>
                 <a:ea typeface="標楷體"/>
               </a:rPr>
-              <a:t>十二之一、</a:t>
+              <a:t>十二之四、</a:t>
             </a:r>
             <a:r>
               <a:rPr sz="2800" b="1" i="0">
@@ -5677,7 +5525,7 @@
                 <a:ea typeface="標楷體"/>
                 <a:ea typeface="標楷體"/>
               </a:rPr>
-              <a:t>PINN</a:t>
+              <a:t>ORP</a:t>
             </a:r>
             <a:r>
               <a:rPr sz="2800" b="1" i="0">
@@ -5688,7 +5536,29 @@
                 <a:ea typeface="標楷體"/>
                 <a:ea typeface="標楷體"/>
               </a:rPr>
-              <a:t> 為什麼撈不回來</a:t>
+              <a:t> 與 </a:t>
+            </a:r>
+            <a:r>
+              <a:rPr sz="2800" b="1" i="0">
+                <a:solidFill>
+                  <a:srgbClr val="000000"/>
+                </a:solidFill>
+                <a:latin typeface="Times New Roman"/>
+                <a:ea typeface="標楷體"/>
+                <a:ea typeface="標楷體"/>
+              </a:rPr>
+              <a:t>pH</a:t>
+            </a:r>
+            <a:r>
+              <a:rPr sz="2800" b="1" i="0">
+                <a:solidFill>
+                  <a:srgbClr val="000000"/>
+                </a:solidFill>
+                <a:latin typeface="Times New Roman"/>
+                <a:ea typeface="標楷體"/>
+                <a:ea typeface="標楷體"/>
+              </a:rPr>
+              <a:t> 的關聯到底長什麼樣</a:t>
             </a:r>
           </a:p>
         </p:txBody>
@@ -5773,7 +5643,7 @@
                 <a:ea typeface="標楷體"/>
                 <a:ea typeface="標楷體"/>
               </a:rPr>
-              <a:t>不是網路不夠大，是壓力這一個通道裡沒有這個資訊</a:t>
+              <a:t>現場觀察到兩者有關聯——資料顯示有，但不是想像的那種</a:t>
             </a:r>
           </a:p>
         </p:txBody>
@@ -5863,72 +5733,9 @@
           </a:p>
         </p:txBody>
       </p:sp>
-      <p:sp>
-        <p:nvSpPr>
-          <p:cNvPr id="7" name="TextBox 6"/>
-          <p:cNvSpPr txBox="1"/>
-          <p:nvPr/>
-        </p:nvSpPr>
-        <p:spPr>
-          <a:xfrm>
-            <a:off x="576000" y="1116000"/>
-            <a:ext cx="11041200" cy="1152000"/>
-          </a:xfrm>
-          <a:prstGeom prst="rect">
-            <a:avLst/>
-          </a:prstGeom>
-          <a:noFill/>
-        </p:spPr>
-        <p:txBody>
-          <a:bodyPr wrap="square" anchor="t" lIns="0" rIns="0" tIns="0" bIns="0">
-            <a:spAutoFit/>
-          </a:bodyPr>
-          <a:lstStyle/>
-          <a:p>
-            <a:pPr algn="l">
-              <a:spcAft>
-                <a:spcPts val="600"/>
-              </a:spcAft>
-            </a:pPr>
-            <a:r>
-              <a:rPr sz="1700" b="0" i="0">
-                <a:solidFill>
-                  <a:srgbClr val="000000"/>
-                </a:solidFill>
-                <a:latin typeface="Times New Roman"/>
-                <a:ea typeface="標楷體"/>
-                <a:ea typeface="標楷體"/>
-              </a:rPr>
-              <a:t>氣體變少只有兩個原因：溶進水裡（物理）、被菌吃掉（生物）。壓力計只看得到兩者的</a:t>
-            </a:r>
-            <a:r>
-              <a:rPr sz="1900" b="1" i="0">
-                <a:solidFill>
-                  <a:srgbClr val="FF0000"/>
-                </a:solidFill>
-                <a:latin typeface="Times New Roman"/>
-                <a:ea typeface="標楷體"/>
-                <a:ea typeface="標楷體"/>
-              </a:rPr>
-              <a:t>總和</a:t>
-            </a:r>
-            <a:r>
-              <a:rPr sz="1700" b="0" i="0">
-                <a:solidFill>
-                  <a:srgbClr val="000000"/>
-                </a:solidFill>
-                <a:latin typeface="Times New Roman"/>
-                <a:ea typeface="標楷體"/>
-                <a:ea typeface="標楷體"/>
-              </a:rPr>
-              <a:t>。把生物項算多一點、同時把「平衡壓力」調高一點，兩者剛好互相抵銷——壓力曲線一模一樣。</a:t>
-            </a:r>
-          </a:p>
-        </p:txBody>
-      </p:sp>
       <p:pic>
         <p:nvPicPr>
-          <p:cNvPr id="8" name="Picture 7" descr="deck8_pinn_corr.png"/>
+          <p:cNvPr id="7" name="Picture 6" descr="deck10_coupling.png"/>
           <p:cNvPicPr>
             <a:picLocks noChangeAspect="1"/>
           </p:cNvPicPr>
@@ -5942,14 +5749,165 @@
         </p:blipFill>
         <p:spPr>
           <a:xfrm>
-            <a:off x="2136599" y="2340000"/>
-            <a:ext cx="7920000" cy="3743300"/>
+            <a:off x="1776599" y="1188000"/>
+            <a:ext cx="8640000" cy="3853072"/>
           </a:xfrm>
           <a:prstGeom prst="rect">
             <a:avLst/>
           </a:prstGeom>
         </p:spPr>
       </p:pic>
+      <p:sp>
+        <p:nvSpPr>
+          <p:cNvPr id="8" name="TextBox 7"/>
+          <p:cNvSpPr txBox="1"/>
+          <p:nvPr/>
+        </p:nvSpPr>
+        <p:spPr>
+          <a:xfrm>
+            <a:off x="576000" y="5149072"/>
+            <a:ext cx="11041200" cy="1258928"/>
+          </a:xfrm>
+          <a:prstGeom prst="rect">
+            <a:avLst/>
+          </a:prstGeom>
+          <a:noFill/>
+        </p:spPr>
+        <p:txBody>
+          <a:bodyPr wrap="square" anchor="t" lIns="0" rIns="0" tIns="0" bIns="0">
+            <a:spAutoFit/>
+          </a:bodyPr>
+          <a:lstStyle/>
+          <a:p>
+            <a:pPr algn="l">
+              <a:spcAft>
+                <a:spcPts val="600"/>
+              </a:spcAft>
+            </a:pPr>
+            <a:r>
+              <a:rPr sz="1700" b="0" i="0">
+                <a:solidFill>
+                  <a:srgbClr val="000000"/>
+                </a:solidFill>
+                <a:latin typeface="Times New Roman"/>
+                <a:ea typeface="標楷體"/>
+                <a:ea typeface="標楷體"/>
+              </a:rPr>
+              <a:t>關聯確實存在，但是「</a:t>
+            </a:r>
+            <a:r>
+              <a:rPr sz="1700" b="0" i="0">
+                <a:solidFill>
+                  <a:srgbClr val="000000"/>
+                </a:solidFill>
+                <a:latin typeface="Times New Roman"/>
+                <a:ea typeface="標楷體"/>
+                <a:ea typeface="標楷體"/>
+              </a:rPr>
+              <a:t>ORP</a:t>
+            </a:r>
+            <a:r>
+              <a:rPr sz="1700" b="0" i="0">
+                <a:solidFill>
+                  <a:srgbClr val="000000"/>
+                </a:solidFill>
+                <a:latin typeface="Times New Roman"/>
+                <a:ea typeface="標楷體"/>
+                <a:ea typeface="標楷體"/>
+              </a:rPr>
+              <a:t> 的水準」對「</a:t>
+            </a:r>
+            <a:r>
+              <a:rPr sz="1700" b="0" i="0">
+                <a:solidFill>
+                  <a:srgbClr val="000000"/>
+                </a:solidFill>
+                <a:latin typeface="Times New Roman"/>
+                <a:ea typeface="標楷體"/>
+                <a:ea typeface="標楷體"/>
+              </a:rPr>
+              <a:t>pH</a:t>
+            </a:r>
+            <a:r>
+              <a:rPr sz="1700" b="0" i="0">
+                <a:solidFill>
+                  <a:srgbClr val="000000"/>
+                </a:solidFill>
+                <a:latin typeface="Times New Roman"/>
+                <a:ea typeface="標楷體"/>
+                <a:ea typeface="標楷體"/>
+              </a:rPr>
+              <a:t> 的變化」；</a:t>
+            </a:r>
+            <a:r>
+              <a:rPr sz="1700" b="0" i="0">
+                <a:solidFill>
+                  <a:srgbClr val="000000"/>
+                </a:solidFill>
+                <a:latin typeface="Times New Roman"/>
+                <a:ea typeface="標楷體"/>
+                <a:ea typeface="標楷體"/>
+              </a:rPr>
+              <a:t>ORP</a:t>
+            </a:r>
+            <a:r>
+              <a:rPr sz="1700" b="0" i="0">
+                <a:solidFill>
+                  <a:srgbClr val="000000"/>
+                </a:solidFill>
+                <a:latin typeface="Times New Roman"/>
+                <a:ea typeface="標楷體"/>
+                <a:ea typeface="標楷體"/>
+              </a:rPr>
+              <a:t> 與 </a:t>
+            </a:r>
+            <a:r>
+              <a:rPr sz="1700" b="0" i="0">
+                <a:solidFill>
+                  <a:srgbClr val="000000"/>
+                </a:solidFill>
+                <a:latin typeface="Times New Roman"/>
+                <a:ea typeface="標楷體"/>
+                <a:ea typeface="標楷體"/>
+              </a:rPr>
+              <a:t>pH</a:t>
+            </a:r>
+            <a:r>
+              <a:rPr sz="1700" b="0" i="0">
+                <a:solidFill>
+                  <a:srgbClr val="000000"/>
+                </a:solidFill>
+                <a:latin typeface="Times New Roman"/>
+                <a:ea typeface="標楷體"/>
+                <a:ea typeface="標楷體"/>
+              </a:rPr>
+              <a:t> 的</a:t>
+            </a:r>
+            <a:r>
+              <a:rPr sz="1900" b="1" i="0">
+                <a:solidFill>
+                  <a:srgbClr val="FF0000"/>
+                </a:solidFill>
+                <a:latin typeface="Times New Roman"/>
+                <a:ea typeface="標楷體"/>
+                <a:ea typeface="標楷體"/>
+              </a:rPr>
+              <a:t>變化量之間幾乎無關</a:t>
+            </a:r>
+            <a:r>
+              <a:rPr sz="1700" b="0" i="0">
+                <a:solidFill>
+                  <a:srgbClr val="000000"/>
+                </a:solidFill>
+                <a:latin typeface="Times New Roman"/>
+                <a:ea typeface="標楷體"/>
+                <a:ea typeface="標楷體"/>
+              </a:rPr>
+              <a:t>（+0.02）。扣掉時間漂移後這些關聯幾乎不變，故不是時間造成的。</a:t>
+            </a:r>
+          </a:p>
+        </p:txBody>
+      </p:sp>
     </p:spTree>
   </p:cSld>
   <p:clrMapOvr>
@@ -6004,7 +5962,7 @@
                 <a:ea typeface="標楷體"/>
                 <a:ea typeface="標楷體"/>
               </a:rPr>
-              <a:t>十二之二、同一條壓降，兩種完全不同的答案</a:t>
+              <a:t>十二之五、第三個解釋：排氣本身就會挑掉氫氣</a:t>
             </a:r>
           </a:p>
         </p:txBody>
@@ -6089,7 +6047,7 @@
                 <a:ea typeface="標楷體"/>
                 <a:ea typeface="標楷體"/>
               </a:rPr>
-              <a:t>兩者的擬合誤差幾乎相同，資料無從選擇</a:t>
+              <a:t>2026-09-27 補充——這也不需要洩漏</a:t>
             </a:r>
           </a:p>
         </p:txBody>
@@ -6181,7 +6139,7 @@
       </p:sp>
       <p:pic>
         <p:nvPicPr>
-          <p:cNvPr id="7" name="Picture 6" descr="deck7_pinn_features.png"/>
+          <p:cNvPr id="7" name="Picture 6" descr="deck13_ventloss.png"/>
           <p:cNvPicPr>
             <a:picLocks noChangeAspect="1"/>
           </p:cNvPicPr>
@@ -6195,8 +6153,8 @@
         </p:blipFill>
         <p:spPr>
           <a:xfrm>
-            <a:off x="1956599" y="1152000"/>
-            <a:ext cx="8280000" cy="4159528"/>
+            <a:off x="1596599" y="1152000"/>
+            <a:ext cx="9000000" cy="4958613"/>
           </a:xfrm>
           <a:prstGeom prst="rect">
             <a:avLst/>
@@ -6211,8 +6169,8 @@
         </p:nvSpPr>
         <p:spPr>
           <a:xfrm>
-            <a:off x="576000" y="5455528"/>
-            <a:ext cx="11041200" cy="952471"/>
+            <a:off x="576000" y="6218613"/>
+            <a:ext cx="11041200" cy="189386"/>
           </a:xfrm>
           <a:prstGeom prst="rect">
             <a:avLst/>
@@ -6225,7 +6183,7 @@
           </a:bodyPr>
           <a:lstStyle/>
           <a:p>
-            <a:pPr algn="l">
+            <a:pPr algn="ctr">
               <a:spcAft>
                 <a:spcPts val="600"/>
               </a:spcAft>
@@ -6239,18 +6197,40 @@
                 <a:ea typeface="標楷體"/>
                 <a:ea typeface="標楷體"/>
               </a:rPr>
-              <a:t>但要講清楚：分不開的是生物速率的</a:t>
+              <a:t>另一項更正：先前偵測到的排氣只有 </a:t>
             </a:r>
             <a:r>
               <a:rPr sz="1900" b="1" i="0">
                 <a:solidFill>
+                  <a:srgbClr val="000000"/>
+                </a:solidFill>
+                <a:latin typeface="Times New Roman"/>
+                <a:ea typeface="標楷體"/>
+                <a:ea typeface="標楷體"/>
+              </a:rPr>
+              <a:t>35 次</a:t>
+            </a:r>
+            <a:r>
+              <a:rPr sz="1700" b="0" i="0">
+                <a:solidFill>
+                  <a:srgbClr val="000000"/>
+                </a:solidFill>
+                <a:latin typeface="Times New Roman"/>
+                <a:ea typeface="標楷體"/>
+                <a:ea typeface="標楷體"/>
+              </a:rPr>
+              <a:t>（限有氣體組成者），以壓力驟降重新偵測後實際有 </a:t>
+            </a:r>
+            <a:r>
+              <a:rPr sz="1900" b="1" i="0">
+                <a:solidFill>
                   <a:srgbClr val="FF0000"/>
                 </a:solidFill>
                 <a:latin typeface="Times New Roman"/>
                 <a:ea typeface="標楷體"/>
                 <a:ea typeface="標楷體"/>
               </a:rPr>
-              <a:t>平均值</a:t>
+              <a:t>108 次</a:t>
             </a:r>
             <a:r>
               <a:rPr sz="1700" b="0" i="0">
@@ -6261,29 +6241,7 @@
                 <a:ea typeface="標楷體"/>
                 <a:ea typeface="標楷體"/>
               </a:rPr>
-              <a:t>。它的</a:t>
-            </a:r>
-            <a:r>
-              <a:rPr sz="1900" b="1" i="0">
-                <a:solidFill>
-                  <a:srgbClr val="1F6FB5"/>
-                </a:solidFill>
-                <a:latin typeface="Times New Roman"/>
-                <a:ea typeface="標楷體"/>
-                <a:ea typeface="標楷體"/>
-              </a:rPr>
-              <a:t>時間變化</a:t>
-            </a:r>
-            <a:r>
-              <a:rPr sz="1700" b="0" i="0">
-                <a:solidFill>
-                  <a:srgbClr val="000000"/>
-                </a:solidFill>
-                <a:latin typeface="Times New Roman"/>
-                <a:ea typeface="標楷體"/>
-                <a:ea typeface="標楷體"/>
-              </a:rPr>
-              <a:t>其實還留在資料裡（訊噪比 6.0），只是被「速率不可為負」這個設定連帶壓死了——把平均值另外定住，變化的形狀就回來了（相關 0.97）。</a:t>
+              <a:t>。</a:t>
             </a:r>
           </a:p>
         </p:txBody>
@@ -6342,7 +6300,7 @@
                 <a:ea typeface="標楷體"/>
                 <a:ea typeface="標楷體"/>
               </a:rPr>
-              <a:t>十二之三、還有另一個解釋：碳酸鹽脫氣</a:t>
+              <a:t>十二之六、二氧化碳的消耗量</a:t>
             </a:r>
           </a:p>
         </p:txBody>
@@ -6427,7 +6385,7 @@
                 <a:ea typeface="標楷體"/>
                 <a:ea typeface="標楷體"/>
               </a:rPr>
-              <a:t>2026-09-23 補充——這個解釋不需要任何洩漏</a:t>
+              <a:t>洪博要求的數字——不需要氫氣感測器就能給</a:t>
             </a:r>
           </a:p>
         </p:txBody>
@@ -6519,7 +6477,7 @@
       </p:sp>
       <p:pic>
         <p:nvPicPr>
-          <p:cNvPr id="7" name="Picture 6" descr="deck9_carbonate.png"/>
+          <p:cNvPr id="7" name="Picture 6" descr="deck12_co2.png"/>
           <p:cNvPicPr>
             <a:picLocks noChangeAspect="1"/>
           </p:cNvPicPr>
@@ -6533,8 +6491,8 @@
         </p:blipFill>
         <p:spPr>
           <a:xfrm>
-            <a:off x="1956599" y="1188000"/>
-            <a:ext cx="8280000" cy="4247456"/>
+            <a:off x="1596599" y="1152000"/>
+            <a:ext cx="9000000" cy="4945054"/>
           </a:xfrm>
           <a:prstGeom prst="rect">
             <a:avLst/>
@@ -6549,8 +6507,8 @@
         </p:nvSpPr>
         <p:spPr>
           <a:xfrm>
-            <a:off x="576000" y="5561455"/>
-            <a:ext cx="11041200" cy="846544"/>
+            <a:off x="576000" y="6205054"/>
+            <a:ext cx="11041200" cy="202946"/>
           </a:xfrm>
           <a:prstGeom prst="rect">
             <a:avLst/>
@@ -6577,10 +6535,87 @@
                 <a:ea typeface="標楷體"/>
                 <a:ea typeface="標楷體"/>
               </a:rPr>
-              <a:t>量級檢查：只需 </a:t>
-            </a:r>
-            <a:r>
-              <a:rPr sz="2000" b="1" i="0">
+              <a:t>以總容積 1.8 </a:t>
+            </a:r>
+            <a:r>
+              <a:rPr sz="1700" b="0" i="1">
+                <a:solidFill>
+                  <a:srgbClr val="000000"/>
+                </a:solidFill>
+                <a:latin typeface="Times New Roman"/>
+                <a:ea typeface="標楷體"/>
+                <a:ea typeface="標楷體"/>
+              </a:rPr>
+              <a:t>L</a:t>
+            </a:r>
+            <a:r>
+              <a:rPr sz="1700" b="0" i="0">
+                <a:solidFill>
+                  <a:srgbClr val="000000"/>
+                </a:solidFill>
+                <a:latin typeface="Times New Roman"/>
+                <a:ea typeface="標楷體"/>
+                <a:ea typeface="標楷體"/>
+              </a:rPr>
+              <a:t>、液相佔一半估算整機：長期 </a:t>
+            </a:r>
+            <a:r>
+              <a:rPr sz="1900" b="1" i="0">
+                <a:solidFill>
+                  <a:srgbClr val="1F6FB5"/>
+                </a:solidFill>
+                <a:latin typeface="Times New Roman"/>
+                <a:ea typeface="標楷體"/>
+                <a:ea typeface="標楷體"/>
+              </a:rPr>
+              <a:t>0.120 </a:t>
+            </a:r>
+            <a:r>
+              <a:rPr sz="1900" b="1" i="0">
+                <a:solidFill>
+                  <a:srgbClr val="1F6FB5"/>
+                </a:solidFill>
+                <a:latin typeface="Times New Roman"/>
+                <a:ea typeface="標楷體"/>
+                <a:ea typeface="標楷體"/>
+              </a:rPr>
+              <a:t>mmol</a:t>
+            </a:r>
+            <a:r>
+              <a:rPr sz="1900" b="1" i="0">
+                <a:solidFill>
+                  <a:srgbClr val="1F6FB5"/>
+                </a:solidFill>
+                <a:latin typeface="Times New Roman"/>
+                <a:ea typeface="標楷體"/>
+                <a:ea typeface="標楷體"/>
+              </a:rPr>
+              <a:t>/</a:t>
+            </a:r>
+            <a:r>
+              <a:rPr sz="1900" b="1" i="0">
+                <a:solidFill>
+                  <a:srgbClr val="1F6FB5"/>
+                </a:solidFill>
+                <a:latin typeface="Times New Roman"/>
+                <a:ea typeface="標楷體"/>
+                <a:ea typeface="標楷體"/>
+              </a:rPr>
+              <a:t>hr</a:t>
+            </a:r>
+            <a:r>
+              <a:rPr sz="1700" b="0" i="0">
+                <a:solidFill>
+                  <a:srgbClr val="000000"/>
+                </a:solidFill>
+                <a:latin typeface="Times New Roman"/>
+                <a:ea typeface="標楷體"/>
+                <a:ea typeface="標楷體"/>
+              </a:rPr>
+              <a:t>、初始 </a:t>
+            </a:r>
+            <a:r>
+              <a:rPr sz="1900" b="1" i="0">
                 <a:solidFill>
                   <a:srgbClr val="FF0000"/>
                 </a:solidFill>
@@ -6588,7 +6623,40 @@
                 <a:ea typeface="標楷體"/>
                 <a:ea typeface="標楷體"/>
               </a:rPr>
-              <a:t>2.6%</a:t>
+              <a:t>0.391 </a:t>
+            </a:r>
+            <a:r>
+              <a:rPr sz="1900" b="1" i="0">
+                <a:solidFill>
+                  <a:srgbClr val="FF0000"/>
+                </a:solidFill>
+                <a:latin typeface="Times New Roman"/>
+                <a:ea typeface="標楷體"/>
+                <a:ea typeface="標楷體"/>
+              </a:rPr>
+              <a:t>mmol</a:t>
+            </a:r>
+            <a:r>
+              <a:rPr sz="1900" b="1" i="0">
+                <a:solidFill>
+                  <a:srgbClr val="FF0000"/>
+                </a:solidFill>
+                <a:latin typeface="Times New Roman"/>
+                <a:ea typeface="標楷體"/>
+                <a:ea typeface="標楷體"/>
+              </a:rPr>
+              <a:t>/</a:t>
+            </a:r>
+            <a:r>
+              <a:rPr sz="1900" b="1" i="0">
+                <a:solidFill>
+                  <a:srgbClr val="FF0000"/>
+                </a:solidFill>
+                <a:latin typeface="Times New Roman"/>
+                <a:ea typeface="標楷體"/>
+                <a:ea typeface="標楷體"/>
+              </a:rPr>
+              <a:t>hr</a:t>
             </a:r>
             <a:r>
               <a:rPr sz="1700" b="0" i="0">
@@ -6599,91 +6667,7 @@
                 <a:ea typeface="標楷體"/>
                 <a:ea typeface="標楷體"/>
               </a:rPr>
-              <a:t> 的液相碳庫在排氣瞬間冒出來，就足以解釋觀測到的全部偏離。</a:t>
-            </a:r>
-          </a:p>
-          <a:p>
-            <a:pPr algn="ctr">
-              <a:spcAft>
-                <a:spcPts val="600"/>
-              </a:spcAft>
-            </a:pPr>
-            <a:r>
-              <a:rPr sz="1400" b="0" i="0">
-                <a:solidFill>
-                  <a:srgbClr val="595959"/>
-                </a:solidFill>
-                <a:latin typeface="Times New Roman"/>
-                <a:ea typeface="標楷體"/>
-                <a:ea typeface="標楷體"/>
-              </a:rPr>
-              <a:t>方向性檢驗（壓降越大應脫越多）實測 </a:t>
-            </a:r>
-            <a:r>
-              <a:rPr sz="1400" b="0" i="1">
-                <a:solidFill>
-                  <a:srgbClr val="595959"/>
-                </a:solidFill>
-                <a:latin typeface="Times New Roman"/>
-                <a:ea typeface="標楷體"/>
-                <a:ea typeface="標楷體"/>
-              </a:rPr>
-              <a:t>ρ</a:t>
-            </a:r>
-            <a:r>
-              <a:rPr sz="1400" b="0" i="0">
-                <a:solidFill>
-                  <a:srgbClr val="595959"/>
-                </a:solidFill>
-                <a:latin typeface="Times New Roman"/>
-                <a:ea typeface="標楷體"/>
-                <a:ea typeface="標楷體"/>
-              </a:rPr>
-              <a:t>=+0.21，方向符合，但 35 筆的可偵測門檻是 0.46，樣本不足以分辨；排氣後立刻補氣會降 </a:t>
-            </a:r>
-            <a:r>
-              <a:rPr sz="1400" b="0" i="0">
-                <a:solidFill>
-                  <a:srgbClr val="595959"/>
-                </a:solidFill>
-                <a:latin typeface="Times New Roman"/>
-                <a:ea typeface="標楷體"/>
-                <a:ea typeface="標楷體"/>
-              </a:rPr>
-              <a:t>pH</a:t>
-            </a:r>
-            <a:r>
-              <a:rPr sz="1400" b="0" i="0">
-                <a:solidFill>
-                  <a:srgbClr val="595959"/>
-                </a:solidFill>
-                <a:latin typeface="Times New Roman"/>
-                <a:ea typeface="標楷體"/>
-                <a:ea typeface="標楷體"/>
-              </a:rPr>
-              <a:t>，故 </a:t>
-            </a:r>
-            <a:r>
-              <a:rPr sz="1400" b="0" i="0">
-                <a:solidFill>
-                  <a:srgbClr val="595959"/>
-                </a:solidFill>
-                <a:latin typeface="Times New Roman"/>
-                <a:ea typeface="標楷體"/>
-                <a:ea typeface="標楷體"/>
-              </a:rPr>
-              <a:t>pH</a:t>
-            </a:r>
-            <a:r>
-              <a:rPr sz="1400" b="0" i="0">
-                <a:solidFill>
-                  <a:srgbClr val="595959"/>
-                </a:solidFill>
-                <a:latin typeface="Times New Roman"/>
-                <a:ea typeface="標楷體"/>
-                <a:ea typeface="標楷體"/>
-              </a:rPr>
-              <a:t> 檢驗遭混淆、不可單獨解讀。</a:t>
+              <a:t>。⚠ 液位確認後即可定案。</a:t>
             </a:r>
           </a:p>
         </p:txBody>
@@ -6742,51 +6726,7 @@
                 <a:ea typeface="標楷體"/>
                 <a:ea typeface="標楷體"/>
               </a:rPr>
-              <a:t>十二之四、</a:t>
-            </a:r>
-            <a:r>
-              <a:rPr sz="2800" b="1" i="0">
-                <a:solidFill>
-                  <a:srgbClr val="000000"/>
-                </a:solidFill>
-                <a:latin typeface="Times New Roman"/>
-                <a:ea typeface="標楷體"/>
-                <a:ea typeface="標楷體"/>
-              </a:rPr>
-              <a:t>ORP</a:t>
-            </a:r>
-            <a:r>
-              <a:rPr sz="2800" b="1" i="0">
-                <a:solidFill>
-                  <a:srgbClr val="000000"/>
-                </a:solidFill>
-                <a:latin typeface="Times New Roman"/>
-                <a:ea typeface="標楷體"/>
-                <a:ea typeface="標楷體"/>
-              </a:rPr>
-              <a:t> 與 </a:t>
-            </a:r>
-            <a:r>
-              <a:rPr sz="2800" b="1" i="0">
-                <a:solidFill>
-                  <a:srgbClr val="000000"/>
-                </a:solidFill>
-                <a:latin typeface="Times New Roman"/>
-                <a:ea typeface="標楷體"/>
-                <a:ea typeface="標楷體"/>
-              </a:rPr>
-              <a:t>pH</a:t>
-            </a:r>
-            <a:r>
-              <a:rPr sz="2800" b="1" i="0">
-                <a:solidFill>
-                  <a:srgbClr val="000000"/>
-                </a:solidFill>
-                <a:latin typeface="Times New Roman"/>
-                <a:ea typeface="標楷體"/>
-                <a:ea typeface="標楷體"/>
-              </a:rPr>
-              <a:t> 的關聯到底長什麼樣</a:t>
+              <a:t>十二之七、四個方法都指向同一個方向</a:t>
             </a:r>
           </a:p>
         </p:txBody>
@@ -6871,7 +6811,7 @@
                 <a:ea typeface="標楷體"/>
                 <a:ea typeface="標楷體"/>
               </a:rPr>
-              <a:t>現場觀察到兩者有關聯——資料顯示有，但不是想像的那種</a:t>
+              <a:t>論文定版的生物速率可能被低估</a:t>
             </a:r>
           </a:p>
         </p:txBody>
@@ -6963,7 +6903,7 @@
       </p:sp>
       <p:pic>
         <p:nvPicPr>
-          <p:cNvPr id="7" name="Picture 6" descr="deck10_coupling.png"/>
+          <p:cNvPr id="7" name="Picture 6" descr="deck14_curvature.png"/>
           <p:cNvPicPr>
             <a:picLocks noChangeAspect="1"/>
           </p:cNvPicPr>
@@ -6977,8 +6917,8 @@
         </p:blipFill>
         <p:spPr>
           <a:xfrm>
-            <a:off x="1776599" y="1188000"/>
-            <a:ext cx="8640000" cy="3853072"/>
+            <a:off x="1776599" y="1152000"/>
+            <a:ext cx="8640000" cy="3921815"/>
           </a:xfrm>
           <a:prstGeom prst="rect">
             <a:avLst/>
@@ -6993,8 +6933,8 @@
         </p:nvSpPr>
         <p:spPr>
           <a:xfrm>
-            <a:off x="576000" y="5149072"/>
-            <a:ext cx="11041200" cy="1258928"/>
+            <a:off x="576000" y="5181815"/>
+            <a:ext cx="11041200" cy="1226185"/>
           </a:xfrm>
           <a:prstGeom prst="rect">
             <a:avLst/>
@@ -7007,13 +6947,13 @@
           </a:bodyPr>
           <a:lstStyle/>
           <a:p>
-            <a:pPr algn="l">
+            <a:pPr algn="ctr">
               <a:spcAft>
                 <a:spcPts val="600"/>
               </a:spcAft>
             </a:pPr>
             <a:r>
-              <a:rPr sz="1700" b="0" i="0">
+              <a:rPr sz="1600" b="0" i="0">
                 <a:solidFill>
                   <a:srgbClr val="000000"/>
                 </a:solidFill>
@@ -7021,117 +6961,7 @@
                 <a:ea typeface="標楷體"/>
                 <a:ea typeface="標楷體"/>
               </a:rPr>
-              <a:t>關聯確實存在，但是「</a:t>
-            </a:r>
-            <a:r>
-              <a:rPr sz="1700" b="0" i="0">
-                <a:solidFill>
-                  <a:srgbClr val="000000"/>
-                </a:solidFill>
-                <a:latin typeface="Times New Roman"/>
-                <a:ea typeface="標楷體"/>
-                <a:ea typeface="標楷體"/>
-              </a:rPr>
-              <a:t>ORP</a:t>
-            </a:r>
-            <a:r>
-              <a:rPr sz="1700" b="0" i="0">
-                <a:solidFill>
-                  <a:srgbClr val="000000"/>
-                </a:solidFill>
-                <a:latin typeface="Times New Roman"/>
-                <a:ea typeface="標楷體"/>
-                <a:ea typeface="標楷體"/>
-              </a:rPr>
-              <a:t> 的水準」對「</a:t>
-            </a:r>
-            <a:r>
-              <a:rPr sz="1700" b="0" i="0">
-                <a:solidFill>
-                  <a:srgbClr val="000000"/>
-                </a:solidFill>
-                <a:latin typeface="Times New Roman"/>
-                <a:ea typeface="標楷體"/>
-                <a:ea typeface="標楷體"/>
-              </a:rPr>
-              <a:t>pH</a:t>
-            </a:r>
-            <a:r>
-              <a:rPr sz="1700" b="0" i="0">
-                <a:solidFill>
-                  <a:srgbClr val="000000"/>
-                </a:solidFill>
-                <a:latin typeface="Times New Roman"/>
-                <a:ea typeface="標楷體"/>
-                <a:ea typeface="標楷體"/>
-              </a:rPr>
-              <a:t> 的變化」；</a:t>
-            </a:r>
-            <a:r>
-              <a:rPr sz="1700" b="0" i="0">
-                <a:solidFill>
-                  <a:srgbClr val="000000"/>
-                </a:solidFill>
-                <a:latin typeface="Times New Roman"/>
-                <a:ea typeface="標楷體"/>
-                <a:ea typeface="標楷體"/>
-              </a:rPr>
-              <a:t>ORP</a:t>
-            </a:r>
-            <a:r>
-              <a:rPr sz="1700" b="0" i="0">
-                <a:solidFill>
-                  <a:srgbClr val="000000"/>
-                </a:solidFill>
-                <a:latin typeface="Times New Roman"/>
-                <a:ea typeface="標楷體"/>
-                <a:ea typeface="標楷體"/>
-              </a:rPr>
-              <a:t> 與 </a:t>
-            </a:r>
-            <a:r>
-              <a:rPr sz="1700" b="0" i="0">
-                <a:solidFill>
-                  <a:srgbClr val="000000"/>
-                </a:solidFill>
-                <a:latin typeface="Times New Roman"/>
-                <a:ea typeface="標楷體"/>
-                <a:ea typeface="標楷體"/>
-              </a:rPr>
-              <a:t>pH</a:t>
-            </a:r>
-            <a:r>
-              <a:rPr sz="1700" b="0" i="0">
-                <a:solidFill>
-                  <a:srgbClr val="000000"/>
-                </a:solidFill>
-                <a:latin typeface="Times New Roman"/>
-                <a:ea typeface="標楷體"/>
-                <a:ea typeface="標楷體"/>
-              </a:rPr>
-              <a:t> 的</a:t>
-            </a:r>
-            <a:r>
-              <a:rPr sz="1900" b="1" i="0">
-                <a:solidFill>
-                  <a:srgbClr val="FF0000"/>
-                </a:solidFill>
-                <a:latin typeface="Times New Roman"/>
-                <a:ea typeface="標楷體"/>
-                <a:ea typeface="標楷體"/>
-              </a:rPr>
-              <a:t>變化量之間幾乎無關</a:t>
-            </a:r>
-            <a:r>
-              <a:rPr sz="1700" b="0" i="0">
-                <a:solidFill>
-                  <a:srgbClr val="000000"/>
-                </a:solidFill>
-                <a:latin typeface="Times New Roman"/>
-                <a:ea typeface="標楷體"/>
-                <a:ea typeface="標楷體"/>
-              </a:rPr>
-              <a:t>（+0.02）。扣掉時間漂移後這些關聯幾乎不變，故不是時間造成的。</a:t>
+              <a:t>曲率配對是本次新做的：用既有資料裡「質傳速率不同」的兩條曲線互相對消，即可解出生物速率，不需要新實驗。</a:t>
             </a:r>
           </a:p>
         </p:txBody>
@@ -7190,7 +7020,7 @@
                 <a:ea typeface="標楷體"/>
                 <a:ea typeface="標楷體"/>
               </a:rPr>
-              <a:t>十二之五、第三個解釋：排氣本身就會挑掉氫氣</a:t>
+              <a:t>十三、本分析的限制</a:t>
             </a:r>
           </a:p>
         </p:txBody>
@@ -7275,7 +7105,7 @@
                 <a:ea typeface="標楷體"/>
                 <a:ea typeface="標楷體"/>
               </a:rPr>
-              <a:t>2026-09-27 補充——這也不需要洩漏</a:t>
+              <a:t>引用時應一併說明</a:t>
             </a:r>
           </a:p>
         </p:txBody>
@@ -7365,40 +7195,16 @@
           </a:p>
         </p:txBody>
       </p:sp>
-      <p:pic>
-        <p:nvPicPr>
-          <p:cNvPr id="7" name="Picture 6" descr="deck13_ventloss.png"/>
-          <p:cNvPicPr>
-            <a:picLocks noChangeAspect="1"/>
-          </p:cNvPicPr>
-          <p:nvPr/>
-        </p:nvPicPr>
-        <p:blipFill>
-          <a:blip r:embed="rId2"/>
-          <a:stretch>
-            <a:fillRect/>
-          </a:stretch>
-        </p:blipFill>
-        <p:spPr>
-          <a:xfrm>
-            <a:off x="1596599" y="1152000"/>
-            <a:ext cx="9000000" cy="4958613"/>
-          </a:xfrm>
-          <a:prstGeom prst="rect">
-            <a:avLst/>
-          </a:prstGeom>
-        </p:spPr>
-      </p:pic>
-      <p:sp>
-        <p:nvSpPr>
-          <p:cNvPr id="8" name="TextBox 7"/>
+      <p:sp>
+        <p:nvSpPr>
+          <p:cNvPr id="7" name="TextBox 6"/>
           <p:cNvSpPr txBox="1"/>
           <p:nvPr/>
         </p:nvSpPr>
         <p:spPr>
           <a:xfrm>
-            <a:off x="576000" y="6218613"/>
-            <a:ext cx="11041200" cy="189386"/>
+            <a:off x="576000" y="1440000"/>
+            <a:ext cx="11041200" cy="4320000"/>
           </a:xfrm>
           <a:prstGeom prst="rect">
             <a:avLst/>
@@ -7411,13 +7217,13 @@
           </a:bodyPr>
           <a:lstStyle/>
           <a:p>
-            <a:pPr algn="ctr">
+            <a:pPr algn="l">
               <a:spcAft>
-                <a:spcPts val="600"/>
+                <a:spcPts val="1600"/>
               </a:spcAft>
             </a:pPr>
             <a:r>
-              <a:rPr sz="1700" b="0" i="0">
+              <a:rPr sz="1800" b="0" i="0">
                 <a:solidFill>
                   <a:srgbClr val="000000"/>
                 </a:solidFill>
@@ -7425,10 +7231,17 @@
                 <a:ea typeface="標楷體"/>
                 <a:ea typeface="標楷體"/>
               </a:rPr>
-              <a:t>另一項更正：先前偵測到的排氣只有 </a:t>
-            </a:r>
-            <a:r>
-              <a:rPr sz="1900" b="1" i="0">
+              <a:t>• 氫氣濃度為差額推算，非直接量測（分析儀僅量二氧化碳與甲烷）</a:t>
+            </a:r>
+          </a:p>
+          <a:p>
+            <a:pPr algn="l">
+              <a:spcAft>
+                <a:spcPts val="1600"/>
+              </a:spcAft>
+            </a:pPr>
+            <a:r>
+              <a:rPr sz="1800" b="0" i="0">
                 <a:solidFill>
                   <a:srgbClr val="000000"/>
                 </a:solidFill>
@@ -7436,10 +7249,17 @@
                 <a:ea typeface="標楷體"/>
                 <a:ea typeface="標楷體"/>
               </a:rPr>
-              <a:t>35 次</a:t>
-            </a:r>
-            <a:r>
-              <a:rPr sz="1700" b="0" i="0">
+              <a:t>• 無法區分氫氣流失的機制：洩漏、穿透、或其他耗氫生化反應</a:t>
+            </a:r>
+          </a:p>
+          <a:p>
+            <a:pPr algn="l">
+              <a:spcAft>
+                <a:spcPts val="1600"/>
+              </a:spcAft>
+            </a:pPr>
+            <a:r>
+              <a:rPr sz="1800" b="0" i="0">
                 <a:solidFill>
                   <a:srgbClr val="000000"/>
                 </a:solidFill>
@@ -7447,21 +7267,17 @@
                 <a:ea typeface="標楷體"/>
                 <a:ea typeface="標楷體"/>
               </a:rPr>
-              <a:t>（限有氣體組成者），以壓力驟降重新偵測後實際有 </a:t>
-            </a:r>
-            <a:r>
-              <a:rPr sz="1900" b="1" i="0">
-                <a:solidFill>
-                  <a:srgbClr val="FF0000"/>
-                </a:solidFill>
-                <a:latin typeface="Times New Roman"/>
-                <a:ea typeface="標楷體"/>
-                <a:ea typeface="標楷體"/>
-              </a:rPr>
-              <a:t>108 次</a:t>
-            </a:r>
-            <a:r>
-              <a:rPr sz="1700" b="0" i="0">
+              <a:t>• 僅 35 筆可用的氣體組成資料，平均每 11 天一筆</a:t>
+            </a:r>
+          </a:p>
+          <a:p>
+            <a:pPr algn="l">
+              <a:spcAft>
+                <a:spcPts val="1600"/>
+              </a:spcAft>
+            </a:pPr>
+            <a:r>
+              <a:rPr sz="1800" b="0" i="0">
                 <a:solidFill>
                   <a:srgbClr val="000000"/>
                 </a:solidFill>
@@ -7469,7 +7285,25 @@
                 <a:ea typeface="標楷體"/>
                 <a:ea typeface="標楷體"/>
               </a:rPr>
-              <a:t>。</a:t>
+              <a:t>• 碳源中斷時進料組成同時改變，兩時段的差異不僅限於碳源有無</a:t>
+            </a:r>
+          </a:p>
+          <a:p>
+            <a:pPr algn="l">
+              <a:spcAft>
+                <a:spcPts val="1600"/>
+              </a:spcAft>
+            </a:pPr>
+            <a:r>
+              <a:rPr sz="1800" b="0" i="0">
+                <a:solidFill>
+                  <a:srgbClr val="000000"/>
+                </a:solidFill>
+                <a:latin typeface="Times New Roman"/>
+                <a:ea typeface="標楷體"/>
+                <a:ea typeface="標楷體"/>
+              </a:rPr>
+              <a:t>• 酸鹼值的結果效應量極小（約為儀器刻度的七分之一），屬方向性證據</a:t>
             </a:r>
           </a:p>
         </p:txBody>
@@ -7528,7 +7362,7 @@
                 <a:ea typeface="標楷體"/>
                 <a:ea typeface="標楷體"/>
               </a:rPr>
-              <a:t>一、先看懂這台機器</a:t>
+              <a:t>三、先前遺留的三個矛盾</a:t>
             </a:r>
           </a:p>
         </p:txBody>
@@ -7613,7 +7447,7 @@
                 <a:ea typeface="標楷體"/>
                 <a:ea typeface="標楷體"/>
               </a:rPr>
-              <a:t>補到滿 → 壓力慢慢掉 → 掉到底就自動補，一直重複</a:t>
+              <a:t>這三件事用「產甲烷主導」解釋不通</a:t>
             </a:r>
           </a:p>
         </p:txBody>
@@ -7703,30 +7537,341 @@
           </a:p>
         </p:txBody>
       </p:sp>
-      <p:pic>
-        <p:nvPicPr>
-          <p:cNvPr id="7" name="Picture 6" descr="deck0a_reactor.png"/>
-          <p:cNvPicPr>
-            <a:picLocks noChangeAspect="1"/>
-          </p:cNvPicPr>
-          <p:nvPr/>
-        </p:nvPicPr>
-        <p:blipFill>
-          <a:blip r:embed="rId2"/>
-          <a:stretch>
-            <a:fillRect/>
-          </a:stretch>
-        </p:blipFill>
-        <p:spPr>
-          <a:xfrm>
-            <a:off x="1416599" y="1224000"/>
-            <a:ext cx="9360000" cy="4684926"/>
-          </a:xfrm>
-          <a:prstGeom prst="rect">
-            <a:avLst/>
-          </a:prstGeom>
-        </p:spPr>
-      </p:pic>
+      <p:graphicFrame>
+        <p:nvGraphicFramePr>
+          <p:cNvPr id="7" name="Table 6"/>
+          <p:cNvGraphicFramePr>
+            <a:graphicFrameLocks noGrp="1"/>
+          </p:cNvGraphicFramePr>
+          <p:nvPr/>
+        </p:nvGraphicFramePr>
+        <p:xfrm>
+          <a:off x="576000" y="1512000"/>
+          <a:ext cx="11051999" cy="1371600"/>
+        </p:xfrm>
+        <a:graphic>
+          <a:graphicData uri="http://schemas.openxmlformats.org/drawingml/2006/table">
+            <a:tbl>
+              <a:tblPr>
+                <a:tableStyleId>{5C22544A-7EE6-4342-B048-85BDC9FD1C3A}</a:tableStyleId>
+              </a:tblPr>
+              <a:tblGrid>
+                <a:gridCol w="2880000"/>
+                <a:gridCol w="4140000"/>
+                <a:gridCol w="4031999"/>
+              </a:tblGrid>
+              <a:tr h="378000">
+                <a:tc>
+                  <a:txBody>
+                    <a:bodyPr/>
+                    <a:lstStyle/>
+                    <a:p>
+                      <a:pPr algn="ctr"/>
+                      <a:r>
+                        <a:rPr sz="1500" b="1" i="0">
+                          <a:solidFill>
+                            <a:srgbClr val="FFFFFF"/>
+                          </a:solidFill>
+                          <a:latin typeface="Times New Roman"/>
+                          <a:ea typeface="標楷體"/>
+                          <a:ea typeface="標楷體"/>
+                        </a:rPr>
+                        <a:t>觀察</a:t>
+                      </a:r>
+                    </a:p>
+                  </a:txBody>
+                  <a:tcPr marL="72000" marR="72000" anchor="ctr">
+                    <a:solidFill>
+                      <a:srgbClr val="2E9BD6"/>
+                    </a:solidFill>
+                  </a:tcPr>
+                </a:tc>
+                <a:tc>
+                  <a:txBody>
+                    <a:bodyPr/>
+                    <a:lstStyle/>
+                    <a:p>
+                      <a:pPr algn="ctr"/>
+                      <a:r>
+                        <a:rPr sz="1500" b="1" i="0">
+                          <a:solidFill>
+                            <a:srgbClr val="FFFFFF"/>
+                          </a:solidFill>
+                          <a:latin typeface="Times New Roman"/>
+                          <a:ea typeface="標楷體"/>
+                          <a:ea typeface="標楷體"/>
+                        </a:rPr>
+                        <a:t>若壓降主要來自產甲烷，應該看到</a:t>
+                      </a:r>
+                    </a:p>
+                  </a:txBody>
+                  <a:tcPr marL="72000" marR="72000" anchor="ctr">
+                    <a:solidFill>
+                      <a:srgbClr val="2E9BD6"/>
+                    </a:solidFill>
+                  </a:tcPr>
+                </a:tc>
+                <a:tc>
+                  <a:txBody>
+                    <a:bodyPr/>
+                    <a:lstStyle/>
+                    <a:p>
+                      <a:pPr algn="ctr"/>
+                      <a:r>
+                        <a:rPr sz="1500" b="1" i="0">
+                          <a:solidFill>
+                            <a:srgbClr val="FFFFFF"/>
+                          </a:solidFill>
+                          <a:latin typeface="Times New Roman"/>
+                          <a:ea typeface="標楷體"/>
+                          <a:ea typeface="標楷體"/>
+                        </a:rPr>
+                        <a:t>實際看到</a:t>
+                      </a:r>
+                    </a:p>
+                  </a:txBody>
+                  <a:tcPr marL="72000" marR="72000" anchor="ctr">
+                    <a:solidFill>
+                      <a:srgbClr val="2E9BD6"/>
+                    </a:solidFill>
+                  </a:tcPr>
+                </a:tc>
+              </a:tr>
+              <a:tr h="331200">
+                <a:tc>
+                  <a:txBody>
+                    <a:bodyPr/>
+                    <a:lstStyle/>
+                    <a:p>
+                      <a:pPr algn="ctr"/>
+                      <a:r>
+                        <a:rPr sz="1500" b="0" i="0">
+                          <a:solidFill>
+                            <a:srgbClr val="000000"/>
+                          </a:solidFill>
+                          <a:latin typeface="Times New Roman"/>
+                          <a:ea typeface="標楷體"/>
+                          <a:ea typeface="標楷體"/>
+                        </a:rPr>
+                        <a:t>切斷碳源（二氧化碳）後</a:t>
+                      </a:r>
+                    </a:p>
+                  </a:txBody>
+                  <a:tcPr marL="72000" marR="72000" anchor="ctr">
+                    <a:solidFill>
+                      <a:srgbClr val="DBE9F6"/>
+                    </a:solidFill>
+                  </a:tcPr>
+                </a:tc>
+                <a:tc>
+                  <a:txBody>
+                    <a:bodyPr/>
+                    <a:lstStyle/>
+                    <a:p>
+                      <a:pPr algn="ctr"/>
+                      <a:r>
+                        <a:rPr sz="1500" b="0" i="0">
+                          <a:solidFill>
+                            <a:srgbClr val="000000"/>
+                          </a:solidFill>
+                          <a:latin typeface="Times New Roman"/>
+                          <a:ea typeface="標楷體"/>
+                          <a:ea typeface="標楷體"/>
+                        </a:rPr>
+                        <a:t>壓降速率應大幅下降</a:t>
+                      </a:r>
+                    </a:p>
+                  </a:txBody>
+                  <a:tcPr marL="72000" marR="72000" anchor="ctr">
+                    <a:solidFill>
+                      <a:srgbClr val="DBE9F6"/>
+                    </a:solidFill>
+                  </a:tcPr>
+                </a:tc>
+                <a:tc>
+                  <a:txBody>
+                    <a:bodyPr/>
+                    <a:lstStyle/>
+                    <a:p>
+                      <a:pPr algn="ctr"/>
+                      <a:r>
+                        <a:rPr sz="1500" b="0" i="0">
+                          <a:solidFill>
+                            <a:srgbClr val="000000"/>
+                          </a:solidFill>
+                          <a:latin typeface="Times New Roman"/>
+                          <a:ea typeface="標楷體"/>
+                          <a:ea typeface="標楷體"/>
+                        </a:rPr>
+                        <a:t>幾乎沒變（0.0347 → 0.0367）</a:t>
+                      </a:r>
+                    </a:p>
+                  </a:txBody>
+                  <a:tcPr marL="72000" marR="72000" anchor="ctr">
+                    <a:solidFill>
+                      <a:srgbClr val="DBE9F6"/>
+                    </a:solidFill>
+                  </a:tcPr>
+                </a:tc>
+              </a:tr>
+              <a:tr h="331200">
+                <a:tc>
+                  <a:txBody>
+                    <a:bodyPr/>
+                    <a:lstStyle/>
+                    <a:p>
+                      <a:pPr algn="ctr"/>
+                      <a:r>
+                        <a:rPr sz="1500" b="0" i="0">
+                          <a:solidFill>
+                            <a:srgbClr val="000000"/>
+                          </a:solidFill>
+                          <a:latin typeface="Times New Roman"/>
+                          <a:ea typeface="標楷體"/>
+                          <a:ea typeface="標楷體"/>
+                        </a:rPr>
+                        <a:t>氣體總收支</a:t>
+                      </a:r>
+                    </a:p>
+                  </a:txBody>
+                  <a:tcPr marL="72000" marR="72000" anchor="ctr">
+                    <a:solidFill>
+                      <a:srgbClr val="EAF2FA"/>
+                    </a:solidFill>
+                  </a:tcPr>
+                </a:tc>
+                <a:tc>
+                  <a:txBody>
+                    <a:bodyPr/>
+                    <a:lstStyle/>
+                    <a:p>
+                      <a:pPr algn="ctr"/>
+                      <a:r>
+                        <a:rPr sz="1500" b="0" i="0">
+                          <a:solidFill>
+                            <a:srgbClr val="000000"/>
+                          </a:solidFill>
+                          <a:latin typeface="Times New Roman"/>
+                          <a:ea typeface="標楷體"/>
+                          <a:ea typeface="標楷體"/>
+                        </a:rPr>
+                        <a:t>消失的氣體應對應到甲烷產量</a:t>
+                      </a:r>
+                    </a:p>
+                  </a:txBody>
+                  <a:tcPr marL="72000" marR="72000" anchor="ctr">
+                    <a:solidFill>
+                      <a:srgbClr val="EAF2FA"/>
+                    </a:solidFill>
+                  </a:tcPr>
+                </a:tc>
+                <a:tc>
+                  <a:txBody>
+                    <a:bodyPr/>
+                    <a:lstStyle/>
+                    <a:p>
+                      <a:pPr algn="ctr"/>
+                      <a:r>
+                        <a:rPr sz="1500" b="0" i="0">
+                          <a:solidFill>
+                            <a:srgbClr val="000000"/>
+                          </a:solidFill>
+                          <a:latin typeface="Times New Roman"/>
+                          <a:ea typeface="標楷體"/>
+                          <a:ea typeface="標楷體"/>
+                        </a:rPr>
+                        <a:t>有一大段對不起來</a:t>
+                      </a:r>
+                    </a:p>
+                  </a:txBody>
+                  <a:tcPr marL="72000" marR="72000" anchor="ctr">
+                    <a:solidFill>
+                      <a:srgbClr val="EAF2FA"/>
+                    </a:solidFill>
+                  </a:tcPr>
+                </a:tc>
+              </a:tr>
+              <a:tr h="331200">
+                <a:tc>
+                  <a:txBody>
+                    <a:bodyPr/>
+                    <a:lstStyle/>
+                    <a:p>
+                      <a:pPr algn="ctr"/>
+                      <a:r>
+                        <a:rPr sz="1500" b="0" i="0">
+                          <a:solidFill>
+                            <a:srgbClr val="000000"/>
+                          </a:solidFill>
+                          <a:latin typeface="Times New Roman"/>
+                          <a:ea typeface="標楷體"/>
+                          <a:ea typeface="標楷體"/>
+                        </a:rPr>
+                        <a:t>壓降曲線形狀</a:t>
+                      </a:r>
+                    </a:p>
+                  </a:txBody>
+                  <a:tcPr marL="72000" marR="72000" anchor="ctr">
+                    <a:solidFill>
+                      <a:srgbClr val="DBE9F6"/>
+                    </a:solidFill>
+                  </a:tcPr>
+                </a:tc>
+                <a:tc>
+                  <a:txBody>
+                    <a:bodyPr/>
+                    <a:lstStyle/>
+                    <a:p>
+                      <a:pPr algn="ctr"/>
+                      <a:r>
+                        <a:rPr sz="1500" b="0" i="0">
+                          <a:solidFill>
+                            <a:srgbClr val="000000"/>
+                          </a:solidFill>
+                          <a:latin typeface="Times New Roman"/>
+                          <a:ea typeface="標楷體"/>
+                          <a:ea typeface="標楷體"/>
+                        </a:rPr>
+                        <a:t>應呈明顯彎曲（溶解的特徵）</a:t>
+                      </a:r>
+                    </a:p>
+                  </a:txBody>
+                  <a:tcPr marL="72000" marR="72000" anchor="ctr">
+                    <a:solidFill>
+                      <a:srgbClr val="DBE9F6"/>
+                    </a:solidFill>
+                  </a:tcPr>
+                </a:tc>
+                <a:tc>
+                  <a:txBody>
+                    <a:bodyPr/>
+                    <a:lstStyle/>
+                    <a:p>
+                      <a:pPr algn="ctr"/>
+                      <a:r>
+                        <a:rPr sz="1500" b="0" i="0">
+                          <a:solidFill>
+                            <a:srgbClr val="000000"/>
+                          </a:solidFill>
+                          <a:latin typeface="Times New Roman"/>
+                          <a:ea typeface="標楷體"/>
+                          <a:ea typeface="標楷體"/>
+                        </a:rPr>
+                        <a:t>91% 幾乎是直線</a:t>
+                      </a:r>
+                    </a:p>
+                  </a:txBody>
+                  <a:tcPr marL="72000" marR="72000" anchor="ctr">
+                    <a:solidFill>
+                      <a:srgbClr val="DBE9F6"/>
+                    </a:solidFill>
+                  </a:tcPr>
+                </a:tc>
+              </a:tr>
+            </a:tbl>
+          </a:graphicData>
+        </a:graphic>
+      </p:graphicFrame>
       <p:sp>
         <p:nvSpPr>
           <p:cNvPr id="8" name="TextBox 7"/>
@@ -7735,8 +7880,8 @@
         </p:nvSpPr>
         <p:spPr>
           <a:xfrm>
-            <a:off x="576000" y="5998925"/>
-            <a:ext cx="11041200" cy="535074"/>
+            <a:off x="576000" y="3816000"/>
+            <a:ext cx="11041200" cy="2160000"/>
           </a:xfrm>
           <a:prstGeom prst="rect">
             <a:avLst/>
@@ -7749,7 +7894,7 @@
           </a:bodyPr>
           <a:lstStyle/>
           <a:p>
-            <a:pPr algn="ctr">
+            <a:pPr algn="l">
               <a:spcAft>
                 <a:spcPts val="600"/>
               </a:spcAft>
@@ -7763,7 +7908,7 @@
                 <a:ea typeface="標楷體"/>
                 <a:ea typeface="標楷體"/>
               </a:rPr>
-              <a:t>壓力會下降，就表示容器裡的氣體正在減少。問題是——它們到底去了哪裡？</a:t>
+              <a:t>本次分析從解開這三個矛盾出發。結果是：它們有同一個答案。</a:t>
             </a:r>
           </a:p>
         </p:txBody>
@@ -7822,7 +7967,7 @@
                 <a:ea typeface="標楷體"/>
                 <a:ea typeface="標楷體"/>
               </a:rPr>
-              <a:t>十二之六、二氧化碳的消耗量</a:t>
+              <a:t>十四、建議</a:t>
             </a:r>
           </a:p>
         </p:txBody>
@@ -7907,7 +8052,7 @@
                 <a:ea typeface="標楷體"/>
                 <a:ea typeface="標楷體"/>
               </a:rPr>
-              <a:t>洪博要求的數字——不需要氫氣感測器就能給</a:t>
+              <a:t>第一項完成前，其餘方向都無法定案</a:t>
             </a:r>
           </a:p>
         </p:txBody>
@@ -7993,1068 +8138,6 @@
                 <a:ea typeface="標楷體"/>
               </a:rPr>
               <a:t>21</a:t>
-            </a:r>
-          </a:p>
-        </p:txBody>
-      </p:sp>
-      <p:pic>
-        <p:nvPicPr>
-          <p:cNvPr id="7" name="Picture 6" descr="deck12_co2.png"/>
-          <p:cNvPicPr>
-            <a:picLocks noChangeAspect="1"/>
-          </p:cNvPicPr>
-          <p:nvPr/>
-        </p:nvPicPr>
-        <p:blipFill>
-          <a:blip r:embed="rId2"/>
-          <a:stretch>
-            <a:fillRect/>
-          </a:stretch>
-        </p:blipFill>
-        <p:spPr>
-          <a:xfrm>
-            <a:off x="1596599" y="1152000"/>
-            <a:ext cx="9000000" cy="4945054"/>
-          </a:xfrm>
-          <a:prstGeom prst="rect">
-            <a:avLst/>
-          </a:prstGeom>
-        </p:spPr>
-      </p:pic>
-      <p:sp>
-        <p:nvSpPr>
-          <p:cNvPr id="8" name="TextBox 7"/>
-          <p:cNvSpPr txBox="1"/>
-          <p:nvPr/>
-        </p:nvSpPr>
-        <p:spPr>
-          <a:xfrm>
-            <a:off x="576000" y="6205054"/>
-            <a:ext cx="11041200" cy="202946"/>
-          </a:xfrm>
-          <a:prstGeom prst="rect">
-            <a:avLst/>
-          </a:prstGeom>
-          <a:noFill/>
-        </p:spPr>
-        <p:txBody>
-          <a:bodyPr wrap="square" anchor="t" lIns="0" rIns="0" tIns="0" bIns="0">
-            <a:spAutoFit/>
-          </a:bodyPr>
-          <a:lstStyle/>
-          <a:p>
-            <a:pPr algn="ctr">
-              <a:spcAft>
-                <a:spcPts val="600"/>
-              </a:spcAft>
-            </a:pPr>
-            <a:r>
-              <a:rPr sz="1700" b="0" i="0">
-                <a:solidFill>
-                  <a:srgbClr val="000000"/>
-                </a:solidFill>
-                <a:latin typeface="Times New Roman"/>
-                <a:ea typeface="標楷體"/>
-                <a:ea typeface="標楷體"/>
-              </a:rPr>
-              <a:t>以總容積 1.8 </a:t>
-            </a:r>
-            <a:r>
-              <a:rPr sz="1700" b="0" i="1">
-                <a:solidFill>
-                  <a:srgbClr val="000000"/>
-                </a:solidFill>
-                <a:latin typeface="Times New Roman"/>
-                <a:ea typeface="標楷體"/>
-                <a:ea typeface="標楷體"/>
-              </a:rPr>
-              <a:t>L</a:t>
-            </a:r>
-            <a:r>
-              <a:rPr sz="1700" b="0" i="0">
-                <a:solidFill>
-                  <a:srgbClr val="000000"/>
-                </a:solidFill>
-                <a:latin typeface="Times New Roman"/>
-                <a:ea typeface="標楷體"/>
-                <a:ea typeface="標楷體"/>
-              </a:rPr>
-              <a:t>、液相佔一半估算整機：長期 </a:t>
-            </a:r>
-            <a:r>
-              <a:rPr sz="1900" b="1" i="0">
-                <a:solidFill>
-                  <a:srgbClr val="1F6FB5"/>
-                </a:solidFill>
-                <a:latin typeface="Times New Roman"/>
-                <a:ea typeface="標楷體"/>
-                <a:ea typeface="標楷體"/>
-              </a:rPr>
-              <a:t>0.082 </a:t>
-            </a:r>
-            <a:r>
-              <a:rPr sz="1900" b="1" i="0">
-                <a:solidFill>
-                  <a:srgbClr val="1F6FB5"/>
-                </a:solidFill>
-                <a:latin typeface="Times New Roman"/>
-                <a:ea typeface="標楷體"/>
-                <a:ea typeface="標楷體"/>
-              </a:rPr>
-              <a:t>mmol</a:t>
-            </a:r>
-            <a:r>
-              <a:rPr sz="1900" b="1" i="0">
-                <a:solidFill>
-                  <a:srgbClr val="1F6FB5"/>
-                </a:solidFill>
-                <a:latin typeface="Times New Roman"/>
-                <a:ea typeface="標楷體"/>
-                <a:ea typeface="標楷體"/>
-              </a:rPr>
-              <a:t>/</a:t>
-            </a:r>
-            <a:r>
-              <a:rPr sz="1900" b="1" i="0">
-                <a:solidFill>
-                  <a:srgbClr val="1F6FB5"/>
-                </a:solidFill>
-                <a:latin typeface="Times New Roman"/>
-                <a:ea typeface="標楷體"/>
-                <a:ea typeface="標楷體"/>
-              </a:rPr>
-              <a:t>hr</a:t>
-            </a:r>
-            <a:r>
-              <a:rPr sz="1700" b="0" i="0">
-                <a:solidFill>
-                  <a:srgbClr val="000000"/>
-                </a:solidFill>
-                <a:latin typeface="Times New Roman"/>
-                <a:ea typeface="標楷體"/>
-                <a:ea typeface="標楷體"/>
-              </a:rPr>
-              <a:t>、初始 </a:t>
-            </a:r>
-            <a:r>
-              <a:rPr sz="1900" b="1" i="0">
-                <a:solidFill>
-                  <a:srgbClr val="FF0000"/>
-                </a:solidFill>
-                <a:latin typeface="Times New Roman"/>
-                <a:ea typeface="標楷體"/>
-                <a:ea typeface="標楷體"/>
-              </a:rPr>
-              <a:t>0.391 </a:t>
-            </a:r>
-            <a:r>
-              <a:rPr sz="1900" b="1" i="0">
-                <a:solidFill>
-                  <a:srgbClr val="FF0000"/>
-                </a:solidFill>
-                <a:latin typeface="Times New Roman"/>
-                <a:ea typeface="標楷體"/>
-                <a:ea typeface="標楷體"/>
-              </a:rPr>
-              <a:t>mmol</a:t>
-            </a:r>
-            <a:r>
-              <a:rPr sz="1900" b="1" i="0">
-                <a:solidFill>
-                  <a:srgbClr val="FF0000"/>
-                </a:solidFill>
-                <a:latin typeface="Times New Roman"/>
-                <a:ea typeface="標楷體"/>
-                <a:ea typeface="標楷體"/>
-              </a:rPr>
-              <a:t>/</a:t>
-            </a:r>
-            <a:r>
-              <a:rPr sz="1900" b="1" i="0">
-                <a:solidFill>
-                  <a:srgbClr val="FF0000"/>
-                </a:solidFill>
-                <a:latin typeface="Times New Roman"/>
-                <a:ea typeface="標楷體"/>
-                <a:ea typeface="標楷體"/>
-              </a:rPr>
-              <a:t>hr</a:t>
-            </a:r>
-            <a:r>
-              <a:rPr sz="1700" b="0" i="0">
-                <a:solidFill>
-                  <a:srgbClr val="000000"/>
-                </a:solidFill>
-                <a:latin typeface="Times New Roman"/>
-                <a:ea typeface="標楷體"/>
-                <a:ea typeface="標楷體"/>
-              </a:rPr>
-              <a:t>。⚠ 液位確認後即可定案。</a:t>
-            </a:r>
-          </a:p>
-        </p:txBody>
-      </p:sp>
-    </p:spTree>
-  </p:cSld>
-  <p:clrMapOvr>
-    <a:masterClrMapping/>
-  </p:clrMapOvr>
-</p:sld>
-</file>
-
-<file path=ppt/slides/slide21.xml><?xml version="1.0" encoding="utf-8"?>
-<p:sld xmlns:a="http://schemas.openxmlformats.org/drawingml/2006/main" xmlns:p="http://schemas.openxmlformats.org/presentationml/2006/main" xmlns:r="http://schemas.openxmlformats.org/officeDocument/2006/relationships">
-  <p:cSld>
-    <p:spTree>
-      <p:nvGrpSpPr>
-        <p:cNvPr id="1" name=""/>
-        <p:cNvGrpSpPr/>
-        <p:nvPr/>
-      </p:nvGrpSpPr>
-      <p:grpSpPr/>
-      <p:sp>
-        <p:nvSpPr>
-          <p:cNvPr id="2" name="TextBox 1"/>
-          <p:cNvSpPr txBox="1"/>
-          <p:nvPr/>
-        </p:nvSpPr>
-        <p:spPr>
-          <a:xfrm>
-            <a:off x="432000" y="180000"/>
-            <a:ext cx="11329200" cy="540000"/>
-          </a:xfrm>
-          <a:prstGeom prst="rect">
-            <a:avLst/>
-          </a:prstGeom>
-          <a:noFill/>
-        </p:spPr>
-        <p:txBody>
-          <a:bodyPr wrap="square" anchor="t" lIns="0" rIns="0" tIns="0" bIns="0">
-            <a:spAutoFit/>
-          </a:bodyPr>
-          <a:lstStyle/>
-          <a:p>
-            <a:pPr algn="ctr">
-              <a:spcAft>
-                <a:spcPts val="0"/>
-              </a:spcAft>
-            </a:pPr>
-            <a:r>
-              <a:rPr sz="2800" b="1" i="0">
-                <a:solidFill>
-                  <a:srgbClr val="000000"/>
-                </a:solidFill>
-                <a:latin typeface="Times New Roman"/>
-                <a:ea typeface="標楷體"/>
-                <a:ea typeface="標楷體"/>
-              </a:rPr>
-              <a:t>十二之七、四個方法都指向同一個方向</a:t>
-            </a:r>
-          </a:p>
-        </p:txBody>
-      </p:sp>
-      <p:sp>
-        <p:nvSpPr>
-          <p:cNvPr id="3" name="Rectangle 2"/>
-          <p:cNvSpPr/>
-          <p:nvPr/>
-        </p:nvSpPr>
-        <p:spPr>
-          <a:xfrm>
-            <a:off x="216000" y="763200"/>
-            <a:ext cx="11761200" cy="18000"/>
-          </a:xfrm>
-          <a:prstGeom prst="rect">
-            <a:avLst/>
-          </a:prstGeom>
-          <a:solidFill>
-            <a:srgbClr val="2AB6D8"/>
-          </a:solidFill>
-          <a:ln>
-            <a:noFill/>
-          </a:ln>
-          <a:effectLst/>
-        </p:spPr>
-        <p:style>
-          <a:lnRef idx="1">
-            <a:schemeClr val="accent1"/>
-          </a:lnRef>
-          <a:fillRef idx="3">
-            <a:schemeClr val="accent1"/>
-          </a:fillRef>
-          <a:effectRef idx="2">
-            <a:schemeClr val="accent1"/>
-          </a:effectRef>
-          <a:fontRef idx="minor">
-            <a:schemeClr val="lt1"/>
-          </a:fontRef>
-        </p:style>
-        <p:txBody>
-          <a:bodyPr rtlCol="0" anchor="ctr"/>
-          <a:lstStyle/>
-          <a:p>
-            <a:pPr algn="ctr"/>
-          </a:p>
-        </p:txBody>
-      </p:sp>
-      <p:sp>
-        <p:nvSpPr>
-          <p:cNvPr id="4" name="TextBox 3"/>
-          <p:cNvSpPr txBox="1"/>
-          <p:nvPr/>
-        </p:nvSpPr>
-        <p:spPr>
-          <a:xfrm>
-            <a:off x="503999" y="842400"/>
-            <a:ext cx="11185201" cy="251999"/>
-          </a:xfrm>
-          <a:prstGeom prst="rect">
-            <a:avLst/>
-          </a:prstGeom>
-          <a:noFill/>
-        </p:spPr>
-        <p:txBody>
-          <a:bodyPr wrap="square" anchor="t" lIns="0" rIns="0" tIns="0" bIns="0">
-            <a:spAutoFit/>
-          </a:bodyPr>
-          <a:lstStyle/>
-          <a:p>
-            <a:pPr algn="ctr">
-              <a:spcAft>
-                <a:spcPts val="600"/>
-              </a:spcAft>
-            </a:pPr>
-            <a:r>
-              <a:rPr sz="1300" b="0" i="0">
-                <a:solidFill>
-                  <a:srgbClr val="595959"/>
-                </a:solidFill>
-                <a:latin typeface="Times New Roman"/>
-                <a:ea typeface="標楷體"/>
-                <a:ea typeface="標楷體"/>
-              </a:rPr>
-              <a:t>論文定版的生物速率可能被低估</a:t>
-            </a:r>
-          </a:p>
-        </p:txBody>
-      </p:sp>
-      <p:sp>
-        <p:nvSpPr>
-          <p:cNvPr id="5" name="Rectangle 4"/>
-          <p:cNvSpPr/>
-          <p:nvPr/>
-        </p:nvSpPr>
-        <p:spPr>
-          <a:xfrm>
-            <a:off x="0" y="6552000"/>
-            <a:ext cx="12193200" cy="306000"/>
-          </a:xfrm>
-          <a:prstGeom prst="rect">
-            <a:avLst/>
-          </a:prstGeom>
-          <a:solidFill>
-            <a:srgbClr val="2E8BC0"/>
-          </a:solidFill>
-          <a:ln>
-            <a:noFill/>
-          </a:ln>
-          <a:effectLst/>
-        </p:spPr>
-        <p:style>
-          <a:lnRef idx="1">
-            <a:schemeClr val="accent1"/>
-          </a:lnRef>
-          <a:fillRef idx="3">
-            <a:schemeClr val="accent1"/>
-          </a:fillRef>
-          <a:effectRef idx="2">
-            <a:schemeClr val="accent1"/>
-          </a:effectRef>
-          <a:fontRef idx="minor">
-            <a:schemeClr val="lt1"/>
-          </a:fontRef>
-        </p:style>
-        <p:txBody>
-          <a:bodyPr rtlCol="0" anchor="ctr"/>
-          <a:lstStyle/>
-          <a:p>
-            <a:pPr algn="ctr"/>
-          </a:p>
-        </p:txBody>
-      </p:sp>
-      <p:sp>
-        <p:nvSpPr>
-          <p:cNvPr id="6" name="TextBox 5"/>
-          <p:cNvSpPr txBox="1"/>
-          <p:nvPr/>
-        </p:nvSpPr>
-        <p:spPr>
-          <a:xfrm>
-            <a:off x="11329200" y="6577200"/>
-            <a:ext cx="576000" cy="216000"/>
-          </a:xfrm>
-          <a:prstGeom prst="rect">
-            <a:avLst/>
-          </a:prstGeom>
-          <a:noFill/>
-        </p:spPr>
-        <p:txBody>
-          <a:bodyPr wrap="square" anchor="t" lIns="0" rIns="0" tIns="0" bIns="0">
-            <a:spAutoFit/>
-          </a:bodyPr>
-          <a:lstStyle/>
-          <a:p>
-            <a:pPr algn="r">
-              <a:spcAft>
-                <a:spcPts val="600"/>
-              </a:spcAft>
-            </a:pPr>
-            <a:r>
-              <a:rPr sz="1100" b="0" i="0">
-                <a:solidFill>
-                  <a:srgbClr val="FFFFFF"/>
-                </a:solidFill>
-                <a:latin typeface="Times New Roman"/>
-                <a:ea typeface="標楷體"/>
-                <a:ea typeface="標楷體"/>
-              </a:rPr>
-              <a:t>22</a:t>
-            </a:r>
-          </a:p>
-        </p:txBody>
-      </p:sp>
-      <p:pic>
-        <p:nvPicPr>
-          <p:cNvPr id="7" name="Picture 6" descr="deck14_curvature.png"/>
-          <p:cNvPicPr>
-            <a:picLocks noChangeAspect="1"/>
-          </p:cNvPicPr>
-          <p:nvPr/>
-        </p:nvPicPr>
-        <p:blipFill>
-          <a:blip r:embed="rId2"/>
-          <a:stretch>
-            <a:fillRect/>
-          </a:stretch>
-        </p:blipFill>
-        <p:spPr>
-          <a:xfrm>
-            <a:off x="1776599" y="1152000"/>
-            <a:ext cx="8640000" cy="3921815"/>
-          </a:xfrm>
-          <a:prstGeom prst="rect">
-            <a:avLst/>
-          </a:prstGeom>
-        </p:spPr>
-      </p:pic>
-      <p:sp>
-        <p:nvSpPr>
-          <p:cNvPr id="8" name="TextBox 7"/>
-          <p:cNvSpPr txBox="1"/>
-          <p:nvPr/>
-        </p:nvSpPr>
-        <p:spPr>
-          <a:xfrm>
-            <a:off x="576000" y="5181815"/>
-            <a:ext cx="11041200" cy="1226185"/>
-          </a:xfrm>
-          <a:prstGeom prst="rect">
-            <a:avLst/>
-          </a:prstGeom>
-          <a:noFill/>
-        </p:spPr>
-        <p:txBody>
-          <a:bodyPr wrap="square" anchor="t" lIns="0" rIns="0" tIns="0" bIns="0">
-            <a:spAutoFit/>
-          </a:bodyPr>
-          <a:lstStyle/>
-          <a:p>
-            <a:pPr algn="ctr">
-              <a:spcAft>
-                <a:spcPts val="600"/>
-              </a:spcAft>
-            </a:pPr>
-            <a:r>
-              <a:rPr sz="1600" b="0" i="0">
-                <a:solidFill>
-                  <a:srgbClr val="000000"/>
-                </a:solidFill>
-                <a:latin typeface="Times New Roman"/>
-                <a:ea typeface="標楷體"/>
-                <a:ea typeface="標楷體"/>
-              </a:rPr>
-              <a:t>曲率配對是本次新做的：用既有資料裡「質傳速率不同」的兩條曲線互相對消，即可解出生物速率，不需要新實驗。</a:t>
-            </a:r>
-          </a:p>
-        </p:txBody>
-      </p:sp>
-    </p:spTree>
-  </p:cSld>
-  <p:clrMapOvr>
-    <a:masterClrMapping/>
-  </p:clrMapOvr>
-</p:sld>
-</file>
-
-<file path=ppt/slides/slide22.xml><?xml version="1.0" encoding="utf-8"?>
-<p:sld xmlns:a="http://schemas.openxmlformats.org/drawingml/2006/main" xmlns:p="http://schemas.openxmlformats.org/presentationml/2006/main" xmlns:r="http://schemas.openxmlformats.org/officeDocument/2006/relationships">
-  <p:cSld>
-    <p:spTree>
-      <p:nvGrpSpPr>
-        <p:cNvPr id="1" name=""/>
-        <p:cNvGrpSpPr/>
-        <p:nvPr/>
-      </p:nvGrpSpPr>
-      <p:grpSpPr/>
-      <p:sp>
-        <p:nvSpPr>
-          <p:cNvPr id="2" name="TextBox 1"/>
-          <p:cNvSpPr txBox="1"/>
-          <p:nvPr/>
-        </p:nvSpPr>
-        <p:spPr>
-          <a:xfrm>
-            <a:off x="432000" y="180000"/>
-            <a:ext cx="11329200" cy="540000"/>
-          </a:xfrm>
-          <a:prstGeom prst="rect">
-            <a:avLst/>
-          </a:prstGeom>
-          <a:noFill/>
-        </p:spPr>
-        <p:txBody>
-          <a:bodyPr wrap="square" anchor="t" lIns="0" rIns="0" tIns="0" bIns="0">
-            <a:spAutoFit/>
-          </a:bodyPr>
-          <a:lstStyle/>
-          <a:p>
-            <a:pPr algn="ctr">
-              <a:spcAft>
-                <a:spcPts val="0"/>
-              </a:spcAft>
-            </a:pPr>
-            <a:r>
-              <a:rPr sz="2800" b="1" i="0">
-                <a:solidFill>
-                  <a:srgbClr val="000000"/>
-                </a:solidFill>
-                <a:latin typeface="Times New Roman"/>
-                <a:ea typeface="標楷體"/>
-                <a:ea typeface="標楷體"/>
-              </a:rPr>
-              <a:t>十三、本分析的限制</a:t>
-            </a:r>
-          </a:p>
-        </p:txBody>
-      </p:sp>
-      <p:sp>
-        <p:nvSpPr>
-          <p:cNvPr id="3" name="Rectangle 2"/>
-          <p:cNvSpPr/>
-          <p:nvPr/>
-        </p:nvSpPr>
-        <p:spPr>
-          <a:xfrm>
-            <a:off x="216000" y="763200"/>
-            <a:ext cx="11761200" cy="18000"/>
-          </a:xfrm>
-          <a:prstGeom prst="rect">
-            <a:avLst/>
-          </a:prstGeom>
-          <a:solidFill>
-            <a:srgbClr val="2AB6D8"/>
-          </a:solidFill>
-          <a:ln>
-            <a:noFill/>
-          </a:ln>
-          <a:effectLst/>
-        </p:spPr>
-        <p:style>
-          <a:lnRef idx="1">
-            <a:schemeClr val="accent1"/>
-          </a:lnRef>
-          <a:fillRef idx="3">
-            <a:schemeClr val="accent1"/>
-          </a:fillRef>
-          <a:effectRef idx="2">
-            <a:schemeClr val="accent1"/>
-          </a:effectRef>
-          <a:fontRef idx="minor">
-            <a:schemeClr val="lt1"/>
-          </a:fontRef>
-        </p:style>
-        <p:txBody>
-          <a:bodyPr rtlCol="0" anchor="ctr"/>
-          <a:lstStyle/>
-          <a:p>
-            <a:pPr algn="ctr"/>
-          </a:p>
-        </p:txBody>
-      </p:sp>
-      <p:sp>
-        <p:nvSpPr>
-          <p:cNvPr id="4" name="TextBox 3"/>
-          <p:cNvSpPr txBox="1"/>
-          <p:nvPr/>
-        </p:nvSpPr>
-        <p:spPr>
-          <a:xfrm>
-            <a:off x="503999" y="842400"/>
-            <a:ext cx="11185201" cy="251999"/>
-          </a:xfrm>
-          <a:prstGeom prst="rect">
-            <a:avLst/>
-          </a:prstGeom>
-          <a:noFill/>
-        </p:spPr>
-        <p:txBody>
-          <a:bodyPr wrap="square" anchor="t" lIns="0" rIns="0" tIns="0" bIns="0">
-            <a:spAutoFit/>
-          </a:bodyPr>
-          <a:lstStyle/>
-          <a:p>
-            <a:pPr algn="ctr">
-              <a:spcAft>
-                <a:spcPts val="600"/>
-              </a:spcAft>
-            </a:pPr>
-            <a:r>
-              <a:rPr sz="1300" b="0" i="0">
-                <a:solidFill>
-                  <a:srgbClr val="595959"/>
-                </a:solidFill>
-                <a:latin typeface="Times New Roman"/>
-                <a:ea typeface="標楷體"/>
-                <a:ea typeface="標楷體"/>
-              </a:rPr>
-              <a:t>引用時應一併說明</a:t>
-            </a:r>
-          </a:p>
-        </p:txBody>
-      </p:sp>
-      <p:sp>
-        <p:nvSpPr>
-          <p:cNvPr id="5" name="Rectangle 4"/>
-          <p:cNvSpPr/>
-          <p:nvPr/>
-        </p:nvSpPr>
-        <p:spPr>
-          <a:xfrm>
-            <a:off x="0" y="6552000"/>
-            <a:ext cx="12193200" cy="306000"/>
-          </a:xfrm>
-          <a:prstGeom prst="rect">
-            <a:avLst/>
-          </a:prstGeom>
-          <a:solidFill>
-            <a:srgbClr val="2E8BC0"/>
-          </a:solidFill>
-          <a:ln>
-            <a:noFill/>
-          </a:ln>
-          <a:effectLst/>
-        </p:spPr>
-        <p:style>
-          <a:lnRef idx="1">
-            <a:schemeClr val="accent1"/>
-          </a:lnRef>
-          <a:fillRef idx="3">
-            <a:schemeClr val="accent1"/>
-          </a:fillRef>
-          <a:effectRef idx="2">
-            <a:schemeClr val="accent1"/>
-          </a:effectRef>
-          <a:fontRef idx="minor">
-            <a:schemeClr val="lt1"/>
-          </a:fontRef>
-        </p:style>
-        <p:txBody>
-          <a:bodyPr rtlCol="0" anchor="ctr"/>
-          <a:lstStyle/>
-          <a:p>
-            <a:pPr algn="ctr"/>
-          </a:p>
-        </p:txBody>
-      </p:sp>
-      <p:sp>
-        <p:nvSpPr>
-          <p:cNvPr id="6" name="TextBox 5"/>
-          <p:cNvSpPr txBox="1"/>
-          <p:nvPr/>
-        </p:nvSpPr>
-        <p:spPr>
-          <a:xfrm>
-            <a:off x="11329200" y="6577200"/>
-            <a:ext cx="576000" cy="216000"/>
-          </a:xfrm>
-          <a:prstGeom prst="rect">
-            <a:avLst/>
-          </a:prstGeom>
-          <a:noFill/>
-        </p:spPr>
-        <p:txBody>
-          <a:bodyPr wrap="square" anchor="t" lIns="0" rIns="0" tIns="0" bIns="0">
-            <a:spAutoFit/>
-          </a:bodyPr>
-          <a:lstStyle/>
-          <a:p>
-            <a:pPr algn="r">
-              <a:spcAft>
-                <a:spcPts val="600"/>
-              </a:spcAft>
-            </a:pPr>
-            <a:r>
-              <a:rPr sz="1100" b="0" i="0">
-                <a:solidFill>
-                  <a:srgbClr val="FFFFFF"/>
-                </a:solidFill>
-                <a:latin typeface="Times New Roman"/>
-                <a:ea typeface="標楷體"/>
-                <a:ea typeface="標楷體"/>
-              </a:rPr>
-              <a:t>23</a:t>
-            </a:r>
-          </a:p>
-        </p:txBody>
-      </p:sp>
-      <p:sp>
-        <p:nvSpPr>
-          <p:cNvPr id="7" name="TextBox 6"/>
-          <p:cNvSpPr txBox="1"/>
-          <p:nvPr/>
-        </p:nvSpPr>
-        <p:spPr>
-          <a:xfrm>
-            <a:off x="576000" y="1440000"/>
-            <a:ext cx="11041200" cy="4320000"/>
-          </a:xfrm>
-          <a:prstGeom prst="rect">
-            <a:avLst/>
-          </a:prstGeom>
-          <a:noFill/>
-        </p:spPr>
-        <p:txBody>
-          <a:bodyPr wrap="square" anchor="t" lIns="0" rIns="0" tIns="0" bIns="0">
-            <a:spAutoFit/>
-          </a:bodyPr>
-          <a:lstStyle/>
-          <a:p>
-            <a:pPr algn="l">
-              <a:spcAft>
-                <a:spcPts val="1600"/>
-              </a:spcAft>
-            </a:pPr>
-            <a:r>
-              <a:rPr sz="1800" b="0" i="0">
-                <a:solidFill>
-                  <a:srgbClr val="000000"/>
-                </a:solidFill>
-                <a:latin typeface="Times New Roman"/>
-                <a:ea typeface="標楷體"/>
-                <a:ea typeface="標楷體"/>
-              </a:rPr>
-              <a:t>• 氫氣濃度為差額推算，非直接量測（分析儀僅量二氧化碳與甲烷）</a:t>
-            </a:r>
-          </a:p>
-          <a:p>
-            <a:pPr algn="l">
-              <a:spcAft>
-                <a:spcPts val="1600"/>
-              </a:spcAft>
-            </a:pPr>
-            <a:r>
-              <a:rPr sz="1800" b="0" i="0">
-                <a:solidFill>
-                  <a:srgbClr val="000000"/>
-                </a:solidFill>
-                <a:latin typeface="Times New Roman"/>
-                <a:ea typeface="標楷體"/>
-                <a:ea typeface="標楷體"/>
-              </a:rPr>
-              <a:t>• 無法區分氫氣流失的機制：洩漏、穿透、或其他耗氫生化反應</a:t>
-            </a:r>
-          </a:p>
-          <a:p>
-            <a:pPr algn="l">
-              <a:spcAft>
-                <a:spcPts val="1600"/>
-              </a:spcAft>
-            </a:pPr>
-            <a:r>
-              <a:rPr sz="1800" b="0" i="0">
-                <a:solidFill>
-                  <a:srgbClr val="000000"/>
-                </a:solidFill>
-                <a:latin typeface="Times New Roman"/>
-                <a:ea typeface="標楷體"/>
-                <a:ea typeface="標楷體"/>
-              </a:rPr>
-              <a:t>• 僅 35 筆可用的氣體組成資料，平均每 11 天一筆</a:t>
-            </a:r>
-          </a:p>
-          <a:p>
-            <a:pPr algn="l">
-              <a:spcAft>
-                <a:spcPts val="1600"/>
-              </a:spcAft>
-            </a:pPr>
-            <a:r>
-              <a:rPr sz="1800" b="0" i="0">
-                <a:solidFill>
-                  <a:srgbClr val="000000"/>
-                </a:solidFill>
-                <a:latin typeface="Times New Roman"/>
-                <a:ea typeface="標楷體"/>
-                <a:ea typeface="標楷體"/>
-              </a:rPr>
-              <a:t>• 碳源中斷時進料組成同時改變，兩時段的差異不僅限於碳源有無</a:t>
-            </a:r>
-          </a:p>
-          <a:p>
-            <a:pPr algn="l">
-              <a:spcAft>
-                <a:spcPts val="1600"/>
-              </a:spcAft>
-            </a:pPr>
-            <a:r>
-              <a:rPr sz="1800" b="0" i="0">
-                <a:solidFill>
-                  <a:srgbClr val="000000"/>
-                </a:solidFill>
-                <a:latin typeface="Times New Roman"/>
-                <a:ea typeface="標楷體"/>
-                <a:ea typeface="標楷體"/>
-              </a:rPr>
-              <a:t>• 酸鹼值的結果效應量極小（約為儀器刻度的七分之一），屬方向性證據</a:t>
-            </a:r>
-          </a:p>
-        </p:txBody>
-      </p:sp>
-    </p:spTree>
-  </p:cSld>
-  <p:clrMapOvr>
-    <a:masterClrMapping/>
-  </p:clrMapOvr>
-</p:sld>
-</file>
-
-<file path=ppt/slides/slide23.xml><?xml version="1.0" encoding="utf-8"?>
-<p:sld xmlns:a="http://schemas.openxmlformats.org/drawingml/2006/main" xmlns:p="http://schemas.openxmlformats.org/presentationml/2006/main" xmlns:r="http://schemas.openxmlformats.org/officeDocument/2006/relationships">
-  <p:cSld>
-    <p:spTree>
-      <p:nvGrpSpPr>
-        <p:cNvPr id="1" name=""/>
-        <p:cNvGrpSpPr/>
-        <p:nvPr/>
-      </p:nvGrpSpPr>
-      <p:grpSpPr/>
-      <p:sp>
-        <p:nvSpPr>
-          <p:cNvPr id="2" name="TextBox 1"/>
-          <p:cNvSpPr txBox="1"/>
-          <p:nvPr/>
-        </p:nvSpPr>
-        <p:spPr>
-          <a:xfrm>
-            <a:off x="432000" y="180000"/>
-            <a:ext cx="11329200" cy="540000"/>
-          </a:xfrm>
-          <a:prstGeom prst="rect">
-            <a:avLst/>
-          </a:prstGeom>
-          <a:noFill/>
-        </p:spPr>
-        <p:txBody>
-          <a:bodyPr wrap="square" anchor="t" lIns="0" rIns="0" tIns="0" bIns="0">
-            <a:spAutoFit/>
-          </a:bodyPr>
-          <a:lstStyle/>
-          <a:p>
-            <a:pPr algn="ctr">
-              <a:spcAft>
-                <a:spcPts val="0"/>
-              </a:spcAft>
-            </a:pPr>
-            <a:r>
-              <a:rPr sz="2800" b="1" i="0">
-                <a:solidFill>
-                  <a:srgbClr val="000000"/>
-                </a:solidFill>
-                <a:latin typeface="Times New Roman"/>
-                <a:ea typeface="標楷體"/>
-                <a:ea typeface="標楷體"/>
-              </a:rPr>
-              <a:t>十四、建議</a:t>
-            </a:r>
-          </a:p>
-        </p:txBody>
-      </p:sp>
-      <p:sp>
-        <p:nvSpPr>
-          <p:cNvPr id="3" name="Rectangle 2"/>
-          <p:cNvSpPr/>
-          <p:nvPr/>
-        </p:nvSpPr>
-        <p:spPr>
-          <a:xfrm>
-            <a:off x="216000" y="763200"/>
-            <a:ext cx="11761200" cy="18000"/>
-          </a:xfrm>
-          <a:prstGeom prst="rect">
-            <a:avLst/>
-          </a:prstGeom>
-          <a:solidFill>
-            <a:srgbClr val="2AB6D8"/>
-          </a:solidFill>
-          <a:ln>
-            <a:noFill/>
-          </a:ln>
-          <a:effectLst/>
-        </p:spPr>
-        <p:style>
-          <a:lnRef idx="1">
-            <a:schemeClr val="accent1"/>
-          </a:lnRef>
-          <a:fillRef idx="3">
-            <a:schemeClr val="accent1"/>
-          </a:fillRef>
-          <a:effectRef idx="2">
-            <a:schemeClr val="accent1"/>
-          </a:effectRef>
-          <a:fontRef idx="minor">
-            <a:schemeClr val="lt1"/>
-          </a:fontRef>
-        </p:style>
-        <p:txBody>
-          <a:bodyPr rtlCol="0" anchor="ctr"/>
-          <a:lstStyle/>
-          <a:p>
-            <a:pPr algn="ctr"/>
-          </a:p>
-        </p:txBody>
-      </p:sp>
-      <p:sp>
-        <p:nvSpPr>
-          <p:cNvPr id="4" name="TextBox 3"/>
-          <p:cNvSpPr txBox="1"/>
-          <p:nvPr/>
-        </p:nvSpPr>
-        <p:spPr>
-          <a:xfrm>
-            <a:off x="503999" y="842400"/>
-            <a:ext cx="11185201" cy="251999"/>
-          </a:xfrm>
-          <a:prstGeom prst="rect">
-            <a:avLst/>
-          </a:prstGeom>
-          <a:noFill/>
-        </p:spPr>
-        <p:txBody>
-          <a:bodyPr wrap="square" anchor="t" lIns="0" rIns="0" tIns="0" bIns="0">
-            <a:spAutoFit/>
-          </a:bodyPr>
-          <a:lstStyle/>
-          <a:p>
-            <a:pPr algn="ctr">
-              <a:spcAft>
-                <a:spcPts val="600"/>
-              </a:spcAft>
-            </a:pPr>
-            <a:r>
-              <a:rPr sz="1300" b="0" i="0">
-                <a:solidFill>
-                  <a:srgbClr val="595959"/>
-                </a:solidFill>
-                <a:latin typeface="Times New Roman"/>
-                <a:ea typeface="標楷體"/>
-                <a:ea typeface="標楷體"/>
-              </a:rPr>
-              <a:t>第一項完成前，其餘方向都無法定案</a:t>
-            </a:r>
-          </a:p>
-        </p:txBody>
-      </p:sp>
-      <p:sp>
-        <p:nvSpPr>
-          <p:cNvPr id="5" name="Rectangle 4"/>
-          <p:cNvSpPr/>
-          <p:nvPr/>
-        </p:nvSpPr>
-        <p:spPr>
-          <a:xfrm>
-            <a:off x="0" y="6552000"/>
-            <a:ext cx="12193200" cy="306000"/>
-          </a:xfrm>
-          <a:prstGeom prst="rect">
-            <a:avLst/>
-          </a:prstGeom>
-          <a:solidFill>
-            <a:srgbClr val="2E8BC0"/>
-          </a:solidFill>
-          <a:ln>
-            <a:noFill/>
-          </a:ln>
-          <a:effectLst/>
-        </p:spPr>
-        <p:style>
-          <a:lnRef idx="1">
-            <a:schemeClr val="accent1"/>
-          </a:lnRef>
-          <a:fillRef idx="3">
-            <a:schemeClr val="accent1"/>
-          </a:fillRef>
-          <a:effectRef idx="2">
-            <a:schemeClr val="accent1"/>
-          </a:effectRef>
-          <a:fontRef idx="minor">
-            <a:schemeClr val="lt1"/>
-          </a:fontRef>
-        </p:style>
-        <p:txBody>
-          <a:bodyPr rtlCol="0" anchor="ctr"/>
-          <a:lstStyle/>
-          <a:p>
-            <a:pPr algn="ctr"/>
-          </a:p>
-        </p:txBody>
-      </p:sp>
-      <p:sp>
-        <p:nvSpPr>
-          <p:cNvPr id="6" name="TextBox 5"/>
-          <p:cNvSpPr txBox="1"/>
-          <p:nvPr/>
-        </p:nvSpPr>
-        <p:spPr>
-          <a:xfrm>
-            <a:off x="11329200" y="6577200"/>
-            <a:ext cx="576000" cy="216000"/>
-          </a:xfrm>
-          <a:prstGeom prst="rect">
-            <a:avLst/>
-          </a:prstGeom>
-          <a:noFill/>
-        </p:spPr>
-        <p:txBody>
-          <a:bodyPr wrap="square" anchor="t" lIns="0" rIns="0" tIns="0" bIns="0">
-            <a:spAutoFit/>
-          </a:bodyPr>
-          <a:lstStyle/>
-          <a:p>
-            <a:pPr algn="r">
-              <a:spcAft>
-                <a:spcPts val="600"/>
-              </a:spcAft>
-            </a:pPr>
-            <a:r>
-              <a:rPr sz="1100" b="0" i="0">
-                <a:solidFill>
-                  <a:srgbClr val="FFFFFF"/>
-                </a:solidFill>
-                <a:latin typeface="Times New Roman"/>
-                <a:ea typeface="標楷體"/>
-                <a:ea typeface="標楷體"/>
-              </a:rPr>
-              <a:t>24</a:t>
             </a:r>
           </a:p>
         </p:txBody>
@@ -9832,7 +8915,7 @@
 </p:sld>
 </file>
 
-<file path=ppt/slides/slide24.xml><?xml version="1.0" encoding="utf-8"?>
+<file path=ppt/slides/slide21.xml><?xml version="1.0" encoding="utf-8"?>
 <p:sld xmlns:a="http://schemas.openxmlformats.org/drawingml/2006/main" xmlns:p="http://schemas.openxmlformats.org/presentationml/2006/main" xmlns:r="http://schemas.openxmlformats.org/officeDocument/2006/relationships">
   <p:cSld>
     <p:spTree>
@@ -10048,7 +9131,7 @@
                 <a:ea typeface="標楷體"/>
                 <a:ea typeface="標楷體"/>
               </a:rPr>
-              <a:t>25</a:t>
+              <a:t>22</a:t>
             </a:r>
           </a:p>
         </p:txBody>
@@ -10871,7 +9954,7 @@
                 <a:ea typeface="標楷體"/>
                 <a:ea typeface="標楷體"/>
               </a:rPr>
-              <a:t>二、氣體有三種可能的去向</a:t>
+              <a:t>四、先確認：氣體讀數什麼時候可信</a:t>
             </a:r>
           </a:p>
         </p:txBody>
@@ -10956,7 +10039,7 @@
                 <a:ea typeface="標楷體"/>
                 <a:ea typeface="標楷體"/>
               </a:rPr>
-              <a:t>三條路都會讓壓力下降，所以光看壓力分不出來</a:t>
+              <a:t>補氣加入的是二氧化碳與氫氣、不含甲烷，真頂空必定被稀釋</a:t>
             </a:r>
           </a:p>
         </p:txBody>
@@ -11048,7 +10131,7 @@
       </p:sp>
       <p:pic>
         <p:nvPicPr>
-          <p:cNvPr id="7" name="Picture 6" descr="deck0b_fates.png"/>
+          <p:cNvPr id="7" name="Picture 6" descr="deck1_sensor.png"/>
           <p:cNvPicPr>
             <a:picLocks noChangeAspect="1"/>
           </p:cNvPicPr>
@@ -11063,7 +10146,7 @@
         <p:spPr>
           <a:xfrm>
             <a:off x="1596599" y="1224000"/>
-            <a:ext cx="9000000" cy="4419473"/>
+            <a:ext cx="9000000" cy="4475531"/>
           </a:xfrm>
           <a:prstGeom prst="rect">
             <a:avLst/>
@@ -11078,8 +10161,8 @@
         </p:nvSpPr>
         <p:spPr>
           <a:xfrm>
-            <a:off x="576000" y="5733473"/>
-            <a:ext cx="11041200" cy="800526"/>
+            <a:off x="576000" y="5789531"/>
+            <a:ext cx="11041200" cy="744468"/>
           </a:xfrm>
           <a:prstGeom prst="rect">
             <a:avLst/>
@@ -11098,7 +10181,7 @@
               </a:spcAft>
             </a:pPr>
             <a:r>
-              <a:rPr sz="1900" b="0" i="0">
+              <a:rPr sz="1700" b="0" i="0">
                 <a:solidFill>
                   <a:srgbClr val="000000"/>
                 </a:solidFill>
@@ -11106,7 +10189,7 @@
                 <a:ea typeface="標楷體"/>
                 <a:ea typeface="標楷體"/>
               </a:rPr>
-              <a:t>過去只考慮 ① 和 ②。</a:t>
+              <a:t>實測斜率 </a:t>
             </a:r>
             <a:r>
               <a:rPr sz="1900" b="1" i="0">
@@ -11117,7 +10200,18 @@
                 <a:ea typeface="標楷體"/>
                 <a:ea typeface="標楷體"/>
               </a:rPr>
-              <a:t>　本次分析發現 ③ 不可排除，但尚未確認。</a:t>
+              <a:t>+0.008 ± 0.225</a:t>
+            </a:r>
+            <a:r>
+              <a:rPr sz="1700" b="0" i="0">
+                <a:solidFill>
+                  <a:srgbClr val="000000"/>
+                </a:solidFill>
+                <a:latin typeface="Times New Roman"/>
+                <a:ea typeface="標楷體"/>
+                <a:ea typeface="標楷體"/>
+              </a:rPr>
+              <a:t>，距「真頂空」應有的 −1 有 4.5 個標準差。分析儀只有在排氣當下的一至二分鐘可信——全資料庫僅 35 筆，後續所有氣體計算只用這 35 筆。</a:t>
             </a:r>
           </a:p>
         </p:txBody>
@@ -11176,7 +10270,7 @@
                 <a:ea typeface="標楷體"/>
                 <a:ea typeface="標楷體"/>
               </a:rPr>
-              <a:t>三、先前遺留的三個矛盾</a:t>
+              <a:t>六、結果：34 / 35 次都偏向同一側</a:t>
             </a:r>
           </a:p>
         </p:txBody>
@@ -11261,7 +10355,7 @@
                 <a:ea typeface="標楷體"/>
                 <a:ea typeface="標楷體"/>
               </a:rPr>
-              <a:t>這三件事用「產甲烷主導」解釋不通</a:t>
+              <a:t>紅色虛線 = 只有產甲烷反應時應有的位置</a:t>
             </a:r>
           </a:p>
         </p:txBody>
@@ -11351,341 +10445,30 @@
           </a:p>
         </p:txBody>
       </p:sp>
-      <p:graphicFrame>
-        <p:nvGraphicFramePr>
-          <p:cNvPr id="7" name="Table 6"/>
-          <p:cNvGraphicFramePr>
-            <a:graphicFrameLocks noGrp="1"/>
-          </p:cNvGraphicFramePr>
-          <p:nvPr/>
-        </p:nvGraphicFramePr>
-        <p:xfrm>
-          <a:off x="576000" y="1512000"/>
-          <a:ext cx="11051999" cy="1371600"/>
-        </p:xfrm>
-        <a:graphic>
-          <a:graphicData uri="http://schemas.openxmlformats.org/drawingml/2006/table">
-            <a:tbl>
-              <a:tblPr>
-                <a:tableStyleId>{5C22544A-7EE6-4342-B048-85BDC9FD1C3A}</a:tableStyleId>
-              </a:tblPr>
-              <a:tblGrid>
-                <a:gridCol w="2880000"/>
-                <a:gridCol w="4140000"/>
-                <a:gridCol w="4031999"/>
-              </a:tblGrid>
-              <a:tr h="378000">
-                <a:tc>
-                  <a:txBody>
-                    <a:bodyPr/>
-                    <a:lstStyle/>
-                    <a:p>
-                      <a:pPr algn="ctr"/>
-                      <a:r>
-                        <a:rPr sz="1500" b="1" i="0">
-                          <a:solidFill>
-                            <a:srgbClr val="FFFFFF"/>
-                          </a:solidFill>
-                          <a:latin typeface="Times New Roman"/>
-                          <a:ea typeface="標楷體"/>
-                          <a:ea typeface="標楷體"/>
-                        </a:rPr>
-                        <a:t>觀察</a:t>
-                      </a:r>
-                    </a:p>
-                  </a:txBody>
-                  <a:tcPr marL="72000" marR="72000" anchor="ctr">
-                    <a:solidFill>
-                      <a:srgbClr val="2E9BD6"/>
-                    </a:solidFill>
-                  </a:tcPr>
-                </a:tc>
-                <a:tc>
-                  <a:txBody>
-                    <a:bodyPr/>
-                    <a:lstStyle/>
-                    <a:p>
-                      <a:pPr algn="ctr"/>
-                      <a:r>
-                        <a:rPr sz="1500" b="1" i="0">
-                          <a:solidFill>
-                            <a:srgbClr val="FFFFFF"/>
-                          </a:solidFill>
-                          <a:latin typeface="Times New Roman"/>
-                          <a:ea typeface="標楷體"/>
-                          <a:ea typeface="標楷體"/>
-                        </a:rPr>
-                        <a:t>若壓降主要來自產甲烷，應該看到</a:t>
-                      </a:r>
-                    </a:p>
-                  </a:txBody>
-                  <a:tcPr marL="72000" marR="72000" anchor="ctr">
-                    <a:solidFill>
-                      <a:srgbClr val="2E9BD6"/>
-                    </a:solidFill>
-                  </a:tcPr>
-                </a:tc>
-                <a:tc>
-                  <a:txBody>
-                    <a:bodyPr/>
-                    <a:lstStyle/>
-                    <a:p>
-                      <a:pPr algn="ctr"/>
-                      <a:r>
-                        <a:rPr sz="1500" b="1" i="0">
-                          <a:solidFill>
-                            <a:srgbClr val="FFFFFF"/>
-                          </a:solidFill>
-                          <a:latin typeface="Times New Roman"/>
-                          <a:ea typeface="標楷體"/>
-                          <a:ea typeface="標楷體"/>
-                        </a:rPr>
-                        <a:t>實際看到</a:t>
-                      </a:r>
-                    </a:p>
-                  </a:txBody>
-                  <a:tcPr marL="72000" marR="72000" anchor="ctr">
-                    <a:solidFill>
-                      <a:srgbClr val="2E9BD6"/>
-                    </a:solidFill>
-                  </a:tcPr>
-                </a:tc>
-              </a:tr>
-              <a:tr h="331200">
-                <a:tc>
-                  <a:txBody>
-                    <a:bodyPr/>
-                    <a:lstStyle/>
-                    <a:p>
-                      <a:pPr algn="ctr"/>
-                      <a:r>
-                        <a:rPr sz="1500" b="0" i="0">
-                          <a:solidFill>
-                            <a:srgbClr val="000000"/>
-                          </a:solidFill>
-                          <a:latin typeface="Times New Roman"/>
-                          <a:ea typeface="標楷體"/>
-                          <a:ea typeface="標楷體"/>
-                        </a:rPr>
-                        <a:t>切斷碳源（二氧化碳）後</a:t>
-                      </a:r>
-                    </a:p>
-                  </a:txBody>
-                  <a:tcPr marL="72000" marR="72000" anchor="ctr">
-                    <a:solidFill>
-                      <a:srgbClr val="DBE9F6"/>
-                    </a:solidFill>
-                  </a:tcPr>
-                </a:tc>
-                <a:tc>
-                  <a:txBody>
-                    <a:bodyPr/>
-                    <a:lstStyle/>
-                    <a:p>
-                      <a:pPr algn="ctr"/>
-                      <a:r>
-                        <a:rPr sz="1500" b="0" i="0">
-                          <a:solidFill>
-                            <a:srgbClr val="000000"/>
-                          </a:solidFill>
-                          <a:latin typeface="Times New Roman"/>
-                          <a:ea typeface="標楷體"/>
-                          <a:ea typeface="標楷體"/>
-                        </a:rPr>
-                        <a:t>壓降速率應大幅下降</a:t>
-                      </a:r>
-                    </a:p>
-                  </a:txBody>
-                  <a:tcPr marL="72000" marR="72000" anchor="ctr">
-                    <a:solidFill>
-                      <a:srgbClr val="DBE9F6"/>
-                    </a:solidFill>
-                  </a:tcPr>
-                </a:tc>
-                <a:tc>
-                  <a:txBody>
-                    <a:bodyPr/>
-                    <a:lstStyle/>
-                    <a:p>
-                      <a:pPr algn="ctr"/>
-                      <a:r>
-                        <a:rPr sz="1500" b="0" i="0">
-                          <a:solidFill>
-                            <a:srgbClr val="000000"/>
-                          </a:solidFill>
-                          <a:latin typeface="Times New Roman"/>
-                          <a:ea typeface="標楷體"/>
-                          <a:ea typeface="標楷體"/>
-                        </a:rPr>
-                        <a:t>幾乎沒變（0.0347 → 0.0367）</a:t>
-                      </a:r>
-                    </a:p>
-                  </a:txBody>
-                  <a:tcPr marL="72000" marR="72000" anchor="ctr">
-                    <a:solidFill>
-                      <a:srgbClr val="DBE9F6"/>
-                    </a:solidFill>
-                  </a:tcPr>
-                </a:tc>
-              </a:tr>
-              <a:tr h="331200">
-                <a:tc>
-                  <a:txBody>
-                    <a:bodyPr/>
-                    <a:lstStyle/>
-                    <a:p>
-                      <a:pPr algn="ctr"/>
-                      <a:r>
-                        <a:rPr sz="1500" b="0" i="0">
-                          <a:solidFill>
-                            <a:srgbClr val="000000"/>
-                          </a:solidFill>
-                          <a:latin typeface="Times New Roman"/>
-                          <a:ea typeface="標楷體"/>
-                          <a:ea typeface="標楷體"/>
-                        </a:rPr>
-                        <a:t>氣體總收支</a:t>
-                      </a:r>
-                    </a:p>
-                  </a:txBody>
-                  <a:tcPr marL="72000" marR="72000" anchor="ctr">
-                    <a:solidFill>
-                      <a:srgbClr val="EAF2FA"/>
-                    </a:solidFill>
-                  </a:tcPr>
-                </a:tc>
-                <a:tc>
-                  <a:txBody>
-                    <a:bodyPr/>
-                    <a:lstStyle/>
-                    <a:p>
-                      <a:pPr algn="ctr"/>
-                      <a:r>
-                        <a:rPr sz="1500" b="0" i="0">
-                          <a:solidFill>
-                            <a:srgbClr val="000000"/>
-                          </a:solidFill>
-                          <a:latin typeface="Times New Roman"/>
-                          <a:ea typeface="標楷體"/>
-                          <a:ea typeface="標楷體"/>
-                        </a:rPr>
-                        <a:t>消失的氣體應對應到甲烷產量</a:t>
-                      </a:r>
-                    </a:p>
-                  </a:txBody>
-                  <a:tcPr marL="72000" marR="72000" anchor="ctr">
-                    <a:solidFill>
-                      <a:srgbClr val="EAF2FA"/>
-                    </a:solidFill>
-                  </a:tcPr>
-                </a:tc>
-                <a:tc>
-                  <a:txBody>
-                    <a:bodyPr/>
-                    <a:lstStyle/>
-                    <a:p>
-                      <a:pPr algn="ctr"/>
-                      <a:r>
-                        <a:rPr sz="1500" b="0" i="0">
-                          <a:solidFill>
-                            <a:srgbClr val="000000"/>
-                          </a:solidFill>
-                          <a:latin typeface="Times New Roman"/>
-                          <a:ea typeface="標楷體"/>
-                          <a:ea typeface="標楷體"/>
-                        </a:rPr>
-                        <a:t>有一大段對不起來</a:t>
-                      </a:r>
-                    </a:p>
-                  </a:txBody>
-                  <a:tcPr marL="72000" marR="72000" anchor="ctr">
-                    <a:solidFill>
-                      <a:srgbClr val="EAF2FA"/>
-                    </a:solidFill>
-                  </a:tcPr>
-                </a:tc>
-              </a:tr>
-              <a:tr h="331200">
-                <a:tc>
-                  <a:txBody>
-                    <a:bodyPr/>
-                    <a:lstStyle/>
-                    <a:p>
-                      <a:pPr algn="ctr"/>
-                      <a:r>
-                        <a:rPr sz="1500" b="0" i="0">
-                          <a:solidFill>
-                            <a:srgbClr val="000000"/>
-                          </a:solidFill>
-                          <a:latin typeface="Times New Roman"/>
-                          <a:ea typeface="標楷體"/>
-                          <a:ea typeface="標楷體"/>
-                        </a:rPr>
-                        <a:t>壓降曲線形狀</a:t>
-                      </a:r>
-                    </a:p>
-                  </a:txBody>
-                  <a:tcPr marL="72000" marR="72000" anchor="ctr">
-                    <a:solidFill>
-                      <a:srgbClr val="DBE9F6"/>
-                    </a:solidFill>
-                  </a:tcPr>
-                </a:tc>
-                <a:tc>
-                  <a:txBody>
-                    <a:bodyPr/>
-                    <a:lstStyle/>
-                    <a:p>
-                      <a:pPr algn="ctr"/>
-                      <a:r>
-                        <a:rPr sz="1500" b="0" i="0">
-                          <a:solidFill>
-                            <a:srgbClr val="000000"/>
-                          </a:solidFill>
-                          <a:latin typeface="Times New Roman"/>
-                          <a:ea typeface="標楷體"/>
-                          <a:ea typeface="標楷體"/>
-                        </a:rPr>
-                        <a:t>應呈明顯彎曲（溶解的特徵）</a:t>
-                      </a:r>
-                    </a:p>
-                  </a:txBody>
-                  <a:tcPr marL="72000" marR="72000" anchor="ctr">
-                    <a:solidFill>
-                      <a:srgbClr val="DBE9F6"/>
-                    </a:solidFill>
-                  </a:tcPr>
-                </a:tc>
-                <a:tc>
-                  <a:txBody>
-                    <a:bodyPr/>
-                    <a:lstStyle/>
-                    <a:p>
-                      <a:pPr algn="ctr"/>
-                      <a:r>
-                        <a:rPr sz="1500" b="0" i="0">
-                          <a:solidFill>
-                            <a:srgbClr val="000000"/>
-                          </a:solidFill>
-                          <a:latin typeface="Times New Roman"/>
-                          <a:ea typeface="標楷體"/>
-                          <a:ea typeface="標楷體"/>
-                        </a:rPr>
-                        <a:t>91% 幾乎是直線</a:t>
-                      </a:r>
-                    </a:p>
-                  </a:txBody>
-                  <a:tcPr marL="72000" marR="72000" anchor="ctr">
-                    <a:solidFill>
-                      <a:srgbClr val="DBE9F6"/>
-                    </a:solidFill>
-                  </a:tcPr>
-                </a:tc>
-              </a:tr>
-            </a:tbl>
-          </a:graphicData>
-        </a:graphic>
-      </p:graphicFrame>
+      <p:pic>
+        <p:nvPicPr>
+          <p:cNvPr id="7" name="Picture 6" descr="deck2_hydrogen.png"/>
+          <p:cNvPicPr>
+            <a:picLocks noChangeAspect="1"/>
+          </p:cNvPicPr>
+          <p:nvPr/>
+        </p:nvPicPr>
+        <p:blipFill>
+          <a:blip r:embed="rId2"/>
+          <a:stretch>
+            <a:fillRect/>
+          </a:stretch>
+        </p:blipFill>
+        <p:spPr>
+          <a:xfrm>
+            <a:off x="1596599" y="1188000"/>
+            <a:ext cx="9000000" cy="4613445"/>
+          </a:xfrm>
+          <a:prstGeom prst="rect">
+            <a:avLst/>
+          </a:prstGeom>
+        </p:spPr>
+      </p:pic>
       <p:sp>
         <p:nvSpPr>
           <p:cNvPr id="8" name="TextBox 7"/>
@@ -11694,8 +10477,8 @@
         </p:nvSpPr>
         <p:spPr>
           <a:xfrm>
-            <a:off x="576000" y="3816000"/>
-            <a:ext cx="11041200" cy="2160000"/>
+            <a:off x="576000" y="5891445"/>
+            <a:ext cx="11041200" cy="642554"/>
           </a:xfrm>
           <a:prstGeom prst="rect">
             <a:avLst/>
@@ -11708,21 +10491,65 @@
           </a:bodyPr>
           <a:lstStyle/>
           <a:p>
-            <a:pPr algn="l">
+            <a:pPr algn="ctr">
               <a:spcAft>
                 <a:spcPts val="600"/>
               </a:spcAft>
             </a:pPr>
             <a:r>
-              <a:rPr sz="1900" b="1" i="0">
-                <a:solidFill>
-                  <a:srgbClr val="000000"/>
-                </a:solidFill>
-                <a:latin typeface="Times New Roman"/>
-                <a:ea typeface="標楷體"/>
-                <a:ea typeface="標楷體"/>
-              </a:rPr>
-              <a:t>本次分析從解開這三個矛盾出發。結果是：它們有同一個答案。</a:t>
+              <a:rPr sz="1700" b="1" i="0">
+                <a:solidFill>
+                  <a:srgbClr val="FF0000"/>
+                </a:solidFill>
+                <a:latin typeface="Times New Roman"/>
+                <a:ea typeface="標楷體"/>
+                <a:ea typeface="標楷體"/>
+              </a:rPr>
+              <a:t>34 / 35 次高於進料比　｜　中位 2.79 倍　｜　</a:t>
+            </a:r>
+            <a:r>
+              <a:rPr sz="1700" b="1" i="1">
+                <a:solidFill>
+                  <a:srgbClr val="FF0000"/>
+                </a:solidFill>
+                <a:latin typeface="Times New Roman"/>
+                <a:ea typeface="標楷體"/>
+                <a:ea typeface="標楷體"/>
+              </a:rPr>
+              <a:t>p</a:t>
+            </a:r>
+            <a:r>
+              <a:rPr sz="1700" b="1" i="0">
+                <a:solidFill>
+                  <a:srgbClr val="FF0000"/>
+                </a:solidFill>
+                <a:latin typeface="Times New Roman"/>
+                <a:ea typeface="標楷體"/>
+                <a:ea typeface="標楷體"/>
+              </a:rPr>
+              <a:t> &lt; 0.0001。★把甲烷當零的最壞情況下仍有 1.33 倍（25/35，</a:t>
+            </a:r>
+            <a:r>
+              <a:rPr sz="1700" b="1" i="1">
+                <a:solidFill>
+                  <a:srgbClr val="FF0000"/>
+                </a:solidFill>
+                <a:latin typeface="Times New Roman"/>
+                <a:ea typeface="標楷體"/>
+                <a:ea typeface="標楷體"/>
+              </a:rPr>
+              <a:t>p</a:t>
+            </a:r>
+            <a:r>
+              <a:rPr sz="1700" b="1" i="0">
+                <a:solidFill>
+                  <a:srgbClr val="FF0000"/>
+                </a:solidFill>
+                <a:latin typeface="Times New Roman"/>
+                <a:ea typeface="標楷體"/>
+                <a:ea typeface="標楷體"/>
+              </a:rPr>
+              <a:t>=0.031）</a:t>
             </a:r>
           </a:p>
         </p:txBody>
@@ -11781,7 +10608,7 @@
                 <a:ea typeface="標楷體"/>
                 <a:ea typeface="標楷體"/>
               </a:rPr>
-              <a:t>四、先確認：氣體讀數什麼時候可信</a:t>
+              <a:t>七、這不是量測誤差造成的</a:t>
             </a:r>
           </a:p>
         </p:txBody>
@@ -11866,7 +10693,7 @@
                 <a:ea typeface="標楷體"/>
                 <a:ea typeface="標楷體"/>
               </a:rPr>
-              <a:t>補氣加入的是二氧化碳與氫氣、不含甲烷，真頂空必定被稀釋</a:t>
+              <a:t>以 2026-07-30 那次排氣為例</a:t>
             </a:r>
           </a:p>
         </p:txBody>
@@ -11956,40 +10783,16 @@
           </a:p>
         </p:txBody>
       </p:sp>
-      <p:pic>
-        <p:nvPicPr>
-          <p:cNvPr id="7" name="Picture 6" descr="deck1_sensor.png"/>
-          <p:cNvPicPr>
-            <a:picLocks noChangeAspect="1"/>
-          </p:cNvPicPr>
-          <p:nvPr/>
-        </p:nvPicPr>
-        <p:blipFill>
-          <a:blip r:embed="rId2"/>
-          <a:stretch>
-            <a:fillRect/>
-          </a:stretch>
-        </p:blipFill>
-        <p:spPr>
-          <a:xfrm>
-            <a:off x="1596599" y="1224000"/>
-            <a:ext cx="9000000" cy="4475531"/>
-          </a:xfrm>
-          <a:prstGeom prst="rect">
-            <a:avLst/>
-          </a:prstGeom>
-        </p:spPr>
-      </p:pic>
-      <p:sp>
-        <p:nvSpPr>
-          <p:cNvPr id="8" name="TextBox 7"/>
+      <p:sp>
+        <p:nvSpPr>
+          <p:cNvPr id="7" name="TextBox 6"/>
           <p:cNvSpPr txBox="1"/>
           <p:nvPr/>
         </p:nvSpPr>
         <p:spPr>
           <a:xfrm>
-            <a:off x="576000" y="5789531"/>
-            <a:ext cx="11041200" cy="744468"/>
+            <a:off x="576000" y="1440000"/>
+            <a:ext cx="11041200" cy="3960000"/>
           </a:xfrm>
           <a:prstGeom prst="rect">
             <a:avLst/>
@@ -12002,24 +10805,212 @@
           </a:bodyPr>
           <a:lstStyle/>
           <a:p>
-            <a:pPr algn="ctr">
+            <a:pPr algn="l">
+              <a:spcAft>
+                <a:spcPts val="1400"/>
+              </a:spcAft>
+            </a:pPr>
+            <a:r>
+              <a:rPr sz="2000" b="1" i="0">
+                <a:solidFill>
+                  <a:srgbClr val="000000"/>
+                </a:solidFill>
+                <a:latin typeface="Times New Roman"/>
+                <a:ea typeface="標楷體"/>
+                <a:ea typeface="標楷體"/>
+              </a:rPr>
+              <a:t>量測到：二氧化碳 21.3%、甲烷 34.79%</a:t>
+            </a:r>
+          </a:p>
+          <a:p>
+            <a:pPr algn="l">
+              <a:spcAft>
+                <a:spcPts val="1400"/>
+              </a:spcAft>
+            </a:pPr>
+            <a:r>
+              <a:rPr sz="1800" b="0" i="0">
+                <a:solidFill>
+                  <a:srgbClr val="000000"/>
+                </a:solidFill>
+                <a:latin typeface="Times New Roman"/>
+                <a:ea typeface="標楷體"/>
+                <a:ea typeface="標楷體"/>
+              </a:rPr>
+              <a:t>若殘餘氣體真的維持 1:4，扣除甲烷與水蒸氣後，二氧化碳應該只有 </a:t>
+            </a:r>
+            <a:r>
+              <a:rPr sz="2000" b="1" i="0">
+                <a:solidFill>
+                  <a:srgbClr val="1F6FB5"/>
+                </a:solidFill>
+                <a:latin typeface="Times New Roman"/>
+                <a:ea typeface="標楷體"/>
+                <a:ea typeface="標楷體"/>
+              </a:rPr>
+              <a:t>12.6%</a:t>
+            </a:r>
+          </a:p>
+          <a:p>
+            <a:pPr algn="l">
+              <a:spcAft>
+                <a:spcPts val="1400"/>
+              </a:spcAft>
+            </a:pPr>
+            <a:r>
+              <a:rPr sz="1800" b="0" i="0">
+                <a:solidFill>
+                  <a:srgbClr val="000000"/>
+                </a:solidFill>
+                <a:latin typeface="Times New Roman"/>
+                <a:ea typeface="標楷體"/>
+                <a:ea typeface="標楷體"/>
+              </a:rPr>
+              <a:t>即使把甲烷讀數</a:t>
+            </a:r>
+            <a:r>
+              <a:rPr sz="2000" b="1" i="0">
+                <a:solidFill>
+                  <a:srgbClr val="FF0000"/>
+                </a:solidFill>
+                <a:latin typeface="Times New Roman"/>
+                <a:ea typeface="標楷體"/>
+                <a:ea typeface="標楷體"/>
+              </a:rPr>
+              <a:t>全部當成零</a:t>
+            </a:r>
+            <a:r>
+              <a:rPr sz="1800" b="0" i="0">
+                <a:solidFill>
+                  <a:srgbClr val="000000"/>
+                </a:solidFill>
+                <a:latin typeface="Times New Roman"/>
+                <a:ea typeface="標楷體"/>
+                <a:ea typeface="標楷體"/>
+              </a:rPr>
+              <a:t>（最極端的假設），氫氣上限也只有 78.7%，比值仍為 0.27</a:t>
+            </a:r>
+          </a:p>
+          <a:p>
+            <a:pPr algn="l">
+              <a:spcAft>
+                <a:spcPts val="1000"/>
+              </a:spcAft>
+            </a:pPr>
+          </a:p>
+          <a:p>
+            <a:pPr algn="l">
+              <a:spcAft>
+                <a:spcPts val="1600"/>
+              </a:spcAft>
+            </a:pPr>
+            <a:r>
+              <a:rPr sz="2200" b="1" i="0">
+                <a:solidFill>
+                  <a:srgbClr val="FF0000"/>
+                </a:solidFill>
+                <a:latin typeface="Times New Roman"/>
+                <a:ea typeface="標楷體"/>
+                <a:ea typeface="標楷體"/>
+              </a:rPr>
+              <a:t>也就是說——二氧化碳的實測值本身，就高到與 1:4 不相容。</a:t>
+            </a:r>
+          </a:p>
+          <a:p>
+            <a:pPr algn="l">
               <a:spcAft>
                 <a:spcPts val="600"/>
               </a:spcAft>
             </a:pPr>
             <a:r>
-              <a:rPr sz="1700" b="0" i="0">
-                <a:solidFill>
-                  <a:srgbClr val="000000"/>
-                </a:solidFill>
-                <a:latin typeface="Times New Roman"/>
-                <a:ea typeface="標楷體"/>
-                <a:ea typeface="標楷體"/>
-              </a:rPr>
-              <a:t>實測斜率 </a:t>
-            </a:r>
-            <a:r>
-              <a:rPr sz="1900" b="1" i="0">
+              <a:rPr sz="1600" b="0" i="0">
+                <a:solidFill>
+                  <a:srgbClr val="595959"/>
+                </a:solidFill>
+                <a:latin typeface="Times New Roman"/>
+                <a:ea typeface="標楷體"/>
+                <a:ea typeface="標楷體"/>
+              </a:rPr>
+              <a:t>量級換算（保守估計）：要讓比值漂移到實測中位數，需要額外移除約 2.57 莫耳氫氣，相當於進料氫氣的 64%。</a:t>
+            </a:r>
+          </a:p>
+        </p:txBody>
+      </p:sp>
+      <p:sp>
+        <p:nvSpPr>
+          <p:cNvPr id="8" name="Rectangle 7"/>
+          <p:cNvSpPr/>
+          <p:nvPr/>
+        </p:nvSpPr>
+        <p:spPr>
+          <a:xfrm>
+            <a:off x="432000" y="5562000"/>
+            <a:ext cx="11329200" cy="864000"/>
+          </a:xfrm>
+          <a:prstGeom prst="rect">
+            <a:avLst/>
+          </a:prstGeom>
+          <a:solidFill>
+            <a:srgbClr val="F2F7FC"/>
+          </a:solidFill>
+          <a:ln w="9525">
+            <a:solidFill>
+              <a:srgbClr val="2AB6D8"/>
+            </a:solidFill>
+          </a:ln>
+          <a:effectLst/>
+        </p:spPr>
+        <p:style>
+          <a:lnRef idx="1">
+            <a:schemeClr val="accent1"/>
+          </a:lnRef>
+          <a:fillRef idx="3">
+            <a:schemeClr val="accent1"/>
+          </a:fillRef>
+          <a:effectRef idx="2">
+            <a:schemeClr val="accent1"/>
+          </a:effectRef>
+          <a:fontRef idx="minor">
+            <a:schemeClr val="lt1"/>
+          </a:fontRef>
+        </p:style>
+        <p:txBody>
+          <a:bodyPr rtlCol="0" anchor="ctr"/>
+          <a:lstStyle/>
+          <a:p>
+            <a:pPr algn="ctr"/>
+          </a:p>
+        </p:txBody>
+      </p:sp>
+      <p:sp>
+        <p:nvSpPr>
+          <p:cNvPr id="9" name="TextBox 8"/>
+          <p:cNvSpPr txBox="1"/>
+          <p:nvPr/>
+        </p:nvSpPr>
+        <p:spPr>
+          <a:xfrm>
+            <a:off x="612000" y="5670000"/>
+            <a:ext cx="10969200" cy="648000"/>
+          </a:xfrm>
+          <a:prstGeom prst="rect">
+            <a:avLst/>
+          </a:prstGeom>
+          <a:noFill/>
+        </p:spPr>
+        <p:txBody>
+          <a:bodyPr wrap="square" anchor="ctr" lIns="0" rIns="0" tIns="0" bIns="0">
+            <a:spAutoFit/>
+          </a:bodyPr>
+          <a:lstStyle/>
+          <a:p>
+            <a:pPr algn="l">
+              <a:spcAft>
+                <a:spcPts val="600"/>
+              </a:spcAft>
+            </a:pPr>
+            <a:r>
+              <a:rPr sz="1300" b="0" i="0">
                 <a:solidFill>
                   <a:srgbClr val="FF0000"/>
                 </a:solidFill>
@@ -12027,18 +11018,7 @@
                 <a:ea typeface="標楷體"/>
                 <a:ea typeface="標楷體"/>
               </a:rPr>
-              <a:t>+0.008 ± 0.225</a:t>
-            </a:r>
-            <a:r>
-              <a:rPr sz="1700" b="0" i="0">
-                <a:solidFill>
-                  <a:srgbClr val="000000"/>
-                </a:solidFill>
-                <a:latin typeface="Times New Roman"/>
-                <a:ea typeface="標楷體"/>
-                <a:ea typeface="標楷體"/>
-              </a:rPr>
-              <a:t>，距「真頂空」應有的 −1 有 4.5 個標準差。分析儀只有在排氣當下的一至二分鐘可信——全資料庫僅 35 筆，後續所有氣體計算只用這 35 筆。</a:t>
+              <a:t>此換算為單次通過的保守估計，實際為連續補氣，數值僅示意量級。</a:t>
             </a:r>
           </a:p>
         </p:txBody>
@@ -12097,7 +11077,7 @@
                 <a:ea typeface="標楷體"/>
                 <a:ea typeface="標楷體"/>
               </a:rPr>
-              <a:t>五、關鍵原理：進料比剛好等於反應吃掉的比例</a:t>
+              <a:t>八、三個矛盾，同一個答案</a:t>
             </a:r>
           </a:p>
         </p:txBody>
@@ -12148,48 +11128,7 @@
       </p:sp>
       <p:sp>
         <p:nvSpPr>
-          <p:cNvPr id="4" name="TextBox 3"/>
-          <p:cNvSpPr txBox="1"/>
-          <p:nvPr/>
-        </p:nvSpPr>
-        <p:spPr>
-          <a:xfrm>
-            <a:off x="503999" y="842400"/>
-            <a:ext cx="11185201" cy="251999"/>
-          </a:xfrm>
-          <a:prstGeom prst="rect">
-            <a:avLst/>
-          </a:prstGeom>
-          <a:noFill/>
-        </p:spPr>
-        <p:txBody>
-          <a:bodyPr wrap="square" anchor="t" lIns="0" rIns="0" tIns="0" bIns="0">
-            <a:spAutoFit/>
-          </a:bodyPr>
-          <a:lstStyle/>
-          <a:p>
-            <a:pPr algn="ctr">
-              <a:spcAft>
-                <a:spcPts val="600"/>
-              </a:spcAft>
-            </a:pPr>
-            <a:r>
-              <a:rPr sz="1300" b="0" i="0">
-                <a:solidFill>
-                  <a:srgbClr val="595959"/>
-                </a:solidFill>
-                <a:latin typeface="Times New Roman"/>
-                <a:ea typeface="標楷體"/>
-                <a:ea typeface="標楷體"/>
-              </a:rPr>
-              <a:t>這讓一個不需要任何校準常數的檢定成為可能</a:t>
-            </a:r>
-          </a:p>
-        </p:txBody>
-      </p:sp>
-      <p:sp>
-        <p:nvSpPr>
-          <p:cNvPr id="5" name="Rectangle 4"/>
+          <p:cNvPr id="4" name="Rectangle 3"/>
           <p:cNvSpPr/>
           <p:nvPr/>
         </p:nvSpPr>
@@ -12233,7 +11172,7 @@
       </p:sp>
       <p:sp>
         <p:nvSpPr>
-          <p:cNvPr id="6" name="TextBox 5"/>
+          <p:cNvPr id="5" name="TextBox 4"/>
           <p:cNvSpPr txBox="1"/>
           <p:nvPr/>
         </p:nvSpPr>
@@ -12268,1025 +11207,6 @@
                 <a:ea typeface="標楷體"/>
               </a:rPr>
               <a:t>7</a:t>
-            </a:r>
-          </a:p>
-        </p:txBody>
-      </p:sp>
-      <p:pic>
-        <p:nvPicPr>
-          <p:cNvPr id="7" name="Picture 6" descr="deck0c_ratio.png"/>
-          <p:cNvPicPr>
-            <a:picLocks noChangeAspect="1"/>
-          </p:cNvPicPr>
-          <p:nvPr/>
-        </p:nvPicPr>
-        <p:blipFill>
-          <a:blip r:embed="rId2"/>
-          <a:stretch>
-            <a:fillRect/>
-          </a:stretch>
-        </p:blipFill>
-        <p:spPr>
-          <a:xfrm>
-            <a:off x="1326599" y="1260000"/>
-            <a:ext cx="9540000" cy="4840294"/>
-          </a:xfrm>
-          <a:prstGeom prst="rect">
-            <a:avLst/>
-          </a:prstGeom>
-        </p:spPr>
-      </p:pic>
-    </p:spTree>
-  </p:cSld>
-  <p:clrMapOvr>
-    <a:masterClrMapping/>
-  </p:clrMapOvr>
-</p:sld>
-</file>
-
-<file path=ppt/slides/slide7.xml><?xml version="1.0" encoding="utf-8"?>
-<p:sld xmlns:a="http://schemas.openxmlformats.org/drawingml/2006/main" xmlns:p="http://schemas.openxmlformats.org/presentationml/2006/main" xmlns:r="http://schemas.openxmlformats.org/officeDocument/2006/relationships">
-  <p:cSld>
-    <p:spTree>
-      <p:nvGrpSpPr>
-        <p:cNvPr id="1" name=""/>
-        <p:cNvGrpSpPr/>
-        <p:nvPr/>
-      </p:nvGrpSpPr>
-      <p:grpSpPr/>
-      <p:sp>
-        <p:nvSpPr>
-          <p:cNvPr id="2" name="TextBox 1"/>
-          <p:cNvSpPr txBox="1"/>
-          <p:nvPr/>
-        </p:nvSpPr>
-        <p:spPr>
-          <a:xfrm>
-            <a:off x="432000" y="180000"/>
-            <a:ext cx="11329200" cy="540000"/>
-          </a:xfrm>
-          <a:prstGeom prst="rect">
-            <a:avLst/>
-          </a:prstGeom>
-          <a:noFill/>
-        </p:spPr>
-        <p:txBody>
-          <a:bodyPr wrap="square" anchor="t" lIns="0" rIns="0" tIns="0" bIns="0">
-            <a:spAutoFit/>
-          </a:bodyPr>
-          <a:lstStyle/>
-          <a:p>
-            <a:pPr algn="ctr">
-              <a:spcAft>
-                <a:spcPts val="0"/>
-              </a:spcAft>
-            </a:pPr>
-            <a:r>
-              <a:rPr sz="2800" b="1" i="0">
-                <a:solidFill>
-                  <a:srgbClr val="000000"/>
-                </a:solidFill>
-                <a:latin typeface="Times New Roman"/>
-                <a:ea typeface="標楷體"/>
-                <a:ea typeface="標楷體"/>
-              </a:rPr>
-              <a:t>六、結果：34 / 35 次都偏向同一側</a:t>
-            </a:r>
-          </a:p>
-        </p:txBody>
-      </p:sp>
-      <p:sp>
-        <p:nvSpPr>
-          <p:cNvPr id="3" name="Rectangle 2"/>
-          <p:cNvSpPr/>
-          <p:nvPr/>
-        </p:nvSpPr>
-        <p:spPr>
-          <a:xfrm>
-            <a:off x="216000" y="763200"/>
-            <a:ext cx="11761200" cy="18000"/>
-          </a:xfrm>
-          <a:prstGeom prst="rect">
-            <a:avLst/>
-          </a:prstGeom>
-          <a:solidFill>
-            <a:srgbClr val="2AB6D8"/>
-          </a:solidFill>
-          <a:ln>
-            <a:noFill/>
-          </a:ln>
-          <a:effectLst/>
-        </p:spPr>
-        <p:style>
-          <a:lnRef idx="1">
-            <a:schemeClr val="accent1"/>
-          </a:lnRef>
-          <a:fillRef idx="3">
-            <a:schemeClr val="accent1"/>
-          </a:fillRef>
-          <a:effectRef idx="2">
-            <a:schemeClr val="accent1"/>
-          </a:effectRef>
-          <a:fontRef idx="minor">
-            <a:schemeClr val="lt1"/>
-          </a:fontRef>
-        </p:style>
-        <p:txBody>
-          <a:bodyPr rtlCol="0" anchor="ctr"/>
-          <a:lstStyle/>
-          <a:p>
-            <a:pPr algn="ctr"/>
-          </a:p>
-        </p:txBody>
-      </p:sp>
-      <p:sp>
-        <p:nvSpPr>
-          <p:cNvPr id="4" name="TextBox 3"/>
-          <p:cNvSpPr txBox="1"/>
-          <p:nvPr/>
-        </p:nvSpPr>
-        <p:spPr>
-          <a:xfrm>
-            <a:off x="503999" y="842400"/>
-            <a:ext cx="11185201" cy="251999"/>
-          </a:xfrm>
-          <a:prstGeom prst="rect">
-            <a:avLst/>
-          </a:prstGeom>
-          <a:noFill/>
-        </p:spPr>
-        <p:txBody>
-          <a:bodyPr wrap="square" anchor="t" lIns="0" rIns="0" tIns="0" bIns="0">
-            <a:spAutoFit/>
-          </a:bodyPr>
-          <a:lstStyle/>
-          <a:p>
-            <a:pPr algn="ctr">
-              <a:spcAft>
-                <a:spcPts val="600"/>
-              </a:spcAft>
-            </a:pPr>
-            <a:r>
-              <a:rPr sz="1300" b="0" i="0">
-                <a:solidFill>
-                  <a:srgbClr val="595959"/>
-                </a:solidFill>
-                <a:latin typeface="Times New Roman"/>
-                <a:ea typeface="標楷體"/>
-                <a:ea typeface="標楷體"/>
-              </a:rPr>
-              <a:t>紅色虛線 = 只有產甲烷反應時應有的位置</a:t>
-            </a:r>
-          </a:p>
-        </p:txBody>
-      </p:sp>
-      <p:sp>
-        <p:nvSpPr>
-          <p:cNvPr id="5" name="Rectangle 4"/>
-          <p:cNvSpPr/>
-          <p:nvPr/>
-        </p:nvSpPr>
-        <p:spPr>
-          <a:xfrm>
-            <a:off x="0" y="6552000"/>
-            <a:ext cx="12193200" cy="306000"/>
-          </a:xfrm>
-          <a:prstGeom prst="rect">
-            <a:avLst/>
-          </a:prstGeom>
-          <a:solidFill>
-            <a:srgbClr val="2E8BC0"/>
-          </a:solidFill>
-          <a:ln>
-            <a:noFill/>
-          </a:ln>
-          <a:effectLst/>
-        </p:spPr>
-        <p:style>
-          <a:lnRef idx="1">
-            <a:schemeClr val="accent1"/>
-          </a:lnRef>
-          <a:fillRef idx="3">
-            <a:schemeClr val="accent1"/>
-          </a:fillRef>
-          <a:effectRef idx="2">
-            <a:schemeClr val="accent1"/>
-          </a:effectRef>
-          <a:fontRef idx="minor">
-            <a:schemeClr val="lt1"/>
-          </a:fontRef>
-        </p:style>
-        <p:txBody>
-          <a:bodyPr rtlCol="0" anchor="ctr"/>
-          <a:lstStyle/>
-          <a:p>
-            <a:pPr algn="ctr"/>
-          </a:p>
-        </p:txBody>
-      </p:sp>
-      <p:sp>
-        <p:nvSpPr>
-          <p:cNvPr id="6" name="TextBox 5"/>
-          <p:cNvSpPr txBox="1"/>
-          <p:nvPr/>
-        </p:nvSpPr>
-        <p:spPr>
-          <a:xfrm>
-            <a:off x="11329200" y="6577200"/>
-            <a:ext cx="576000" cy="216000"/>
-          </a:xfrm>
-          <a:prstGeom prst="rect">
-            <a:avLst/>
-          </a:prstGeom>
-          <a:noFill/>
-        </p:spPr>
-        <p:txBody>
-          <a:bodyPr wrap="square" anchor="t" lIns="0" rIns="0" tIns="0" bIns="0">
-            <a:spAutoFit/>
-          </a:bodyPr>
-          <a:lstStyle/>
-          <a:p>
-            <a:pPr algn="r">
-              <a:spcAft>
-                <a:spcPts val="600"/>
-              </a:spcAft>
-            </a:pPr>
-            <a:r>
-              <a:rPr sz="1100" b="0" i="0">
-                <a:solidFill>
-                  <a:srgbClr val="FFFFFF"/>
-                </a:solidFill>
-                <a:latin typeface="Times New Roman"/>
-                <a:ea typeface="標楷體"/>
-                <a:ea typeface="標楷體"/>
-              </a:rPr>
-              <a:t>8</a:t>
-            </a:r>
-          </a:p>
-        </p:txBody>
-      </p:sp>
-      <p:pic>
-        <p:nvPicPr>
-          <p:cNvPr id="7" name="Picture 6" descr="deck2_hydrogen.png"/>
-          <p:cNvPicPr>
-            <a:picLocks noChangeAspect="1"/>
-          </p:cNvPicPr>
-          <p:nvPr/>
-        </p:nvPicPr>
-        <p:blipFill>
-          <a:blip r:embed="rId2"/>
-          <a:stretch>
-            <a:fillRect/>
-          </a:stretch>
-        </p:blipFill>
-        <p:spPr>
-          <a:xfrm>
-            <a:off x="1596599" y="1188000"/>
-            <a:ext cx="9000000" cy="4613445"/>
-          </a:xfrm>
-          <a:prstGeom prst="rect">
-            <a:avLst/>
-          </a:prstGeom>
-        </p:spPr>
-      </p:pic>
-      <p:sp>
-        <p:nvSpPr>
-          <p:cNvPr id="8" name="TextBox 7"/>
-          <p:cNvSpPr txBox="1"/>
-          <p:nvPr/>
-        </p:nvSpPr>
-        <p:spPr>
-          <a:xfrm>
-            <a:off x="576000" y="5891445"/>
-            <a:ext cx="11041200" cy="642554"/>
-          </a:xfrm>
-          <a:prstGeom prst="rect">
-            <a:avLst/>
-          </a:prstGeom>
-          <a:noFill/>
-        </p:spPr>
-        <p:txBody>
-          <a:bodyPr wrap="square" anchor="t" lIns="0" rIns="0" tIns="0" bIns="0">
-            <a:spAutoFit/>
-          </a:bodyPr>
-          <a:lstStyle/>
-          <a:p>
-            <a:pPr algn="ctr">
-              <a:spcAft>
-                <a:spcPts val="600"/>
-              </a:spcAft>
-            </a:pPr>
-            <a:r>
-              <a:rPr sz="1700" b="1" i="0">
-                <a:solidFill>
-                  <a:srgbClr val="FF0000"/>
-                </a:solidFill>
-                <a:latin typeface="Times New Roman"/>
-                <a:ea typeface="標楷體"/>
-                <a:ea typeface="標楷體"/>
-              </a:rPr>
-              <a:t>34 / 35 次高於進料比　｜　中位 2.79 倍　｜　</a:t>
-            </a:r>
-            <a:r>
-              <a:rPr sz="1700" b="1" i="1">
-                <a:solidFill>
-                  <a:srgbClr val="FF0000"/>
-                </a:solidFill>
-                <a:latin typeface="Times New Roman"/>
-                <a:ea typeface="標楷體"/>
-                <a:ea typeface="標楷體"/>
-              </a:rPr>
-              <a:t>p</a:t>
-            </a:r>
-            <a:r>
-              <a:rPr sz="1700" b="1" i="0">
-                <a:solidFill>
-                  <a:srgbClr val="FF0000"/>
-                </a:solidFill>
-                <a:latin typeface="Times New Roman"/>
-                <a:ea typeface="標楷體"/>
-                <a:ea typeface="標楷體"/>
-              </a:rPr>
-              <a:t> &lt; 0.0001。★把甲烷當零的最壞情況下仍有 1.33 倍（25/35，</a:t>
-            </a:r>
-            <a:r>
-              <a:rPr sz="1700" b="1" i="1">
-                <a:solidFill>
-                  <a:srgbClr val="FF0000"/>
-                </a:solidFill>
-                <a:latin typeface="Times New Roman"/>
-                <a:ea typeface="標楷體"/>
-                <a:ea typeface="標楷體"/>
-              </a:rPr>
-              <a:t>p</a:t>
-            </a:r>
-            <a:r>
-              <a:rPr sz="1700" b="1" i="0">
-                <a:solidFill>
-                  <a:srgbClr val="FF0000"/>
-                </a:solidFill>
-                <a:latin typeface="Times New Roman"/>
-                <a:ea typeface="標楷體"/>
-                <a:ea typeface="標楷體"/>
-              </a:rPr>
-              <a:t>=0.031）</a:t>
-            </a:r>
-          </a:p>
-        </p:txBody>
-      </p:sp>
-    </p:spTree>
-  </p:cSld>
-  <p:clrMapOvr>
-    <a:masterClrMapping/>
-  </p:clrMapOvr>
-</p:sld>
-</file>
-
-<file path=ppt/slides/slide8.xml><?xml version="1.0" encoding="utf-8"?>
-<p:sld xmlns:a="http://schemas.openxmlformats.org/drawingml/2006/main" xmlns:p="http://schemas.openxmlformats.org/presentationml/2006/main" xmlns:r="http://schemas.openxmlformats.org/officeDocument/2006/relationships">
-  <p:cSld>
-    <p:spTree>
-      <p:nvGrpSpPr>
-        <p:cNvPr id="1" name=""/>
-        <p:cNvGrpSpPr/>
-        <p:nvPr/>
-      </p:nvGrpSpPr>
-      <p:grpSpPr/>
-      <p:sp>
-        <p:nvSpPr>
-          <p:cNvPr id="2" name="TextBox 1"/>
-          <p:cNvSpPr txBox="1"/>
-          <p:nvPr/>
-        </p:nvSpPr>
-        <p:spPr>
-          <a:xfrm>
-            <a:off x="432000" y="180000"/>
-            <a:ext cx="11329200" cy="540000"/>
-          </a:xfrm>
-          <a:prstGeom prst="rect">
-            <a:avLst/>
-          </a:prstGeom>
-          <a:noFill/>
-        </p:spPr>
-        <p:txBody>
-          <a:bodyPr wrap="square" anchor="t" lIns="0" rIns="0" tIns="0" bIns="0">
-            <a:spAutoFit/>
-          </a:bodyPr>
-          <a:lstStyle/>
-          <a:p>
-            <a:pPr algn="ctr">
-              <a:spcAft>
-                <a:spcPts val="0"/>
-              </a:spcAft>
-            </a:pPr>
-            <a:r>
-              <a:rPr sz="2800" b="1" i="0">
-                <a:solidFill>
-                  <a:srgbClr val="000000"/>
-                </a:solidFill>
-                <a:latin typeface="Times New Roman"/>
-                <a:ea typeface="標楷體"/>
-                <a:ea typeface="標楷體"/>
-              </a:rPr>
-              <a:t>七、這不是量測誤差造成的</a:t>
-            </a:r>
-          </a:p>
-        </p:txBody>
-      </p:sp>
-      <p:sp>
-        <p:nvSpPr>
-          <p:cNvPr id="3" name="Rectangle 2"/>
-          <p:cNvSpPr/>
-          <p:nvPr/>
-        </p:nvSpPr>
-        <p:spPr>
-          <a:xfrm>
-            <a:off x="216000" y="763200"/>
-            <a:ext cx="11761200" cy="18000"/>
-          </a:xfrm>
-          <a:prstGeom prst="rect">
-            <a:avLst/>
-          </a:prstGeom>
-          <a:solidFill>
-            <a:srgbClr val="2AB6D8"/>
-          </a:solidFill>
-          <a:ln>
-            <a:noFill/>
-          </a:ln>
-          <a:effectLst/>
-        </p:spPr>
-        <p:style>
-          <a:lnRef idx="1">
-            <a:schemeClr val="accent1"/>
-          </a:lnRef>
-          <a:fillRef idx="3">
-            <a:schemeClr val="accent1"/>
-          </a:fillRef>
-          <a:effectRef idx="2">
-            <a:schemeClr val="accent1"/>
-          </a:effectRef>
-          <a:fontRef idx="minor">
-            <a:schemeClr val="lt1"/>
-          </a:fontRef>
-        </p:style>
-        <p:txBody>
-          <a:bodyPr rtlCol="0" anchor="ctr"/>
-          <a:lstStyle/>
-          <a:p>
-            <a:pPr algn="ctr"/>
-          </a:p>
-        </p:txBody>
-      </p:sp>
-      <p:sp>
-        <p:nvSpPr>
-          <p:cNvPr id="4" name="TextBox 3"/>
-          <p:cNvSpPr txBox="1"/>
-          <p:nvPr/>
-        </p:nvSpPr>
-        <p:spPr>
-          <a:xfrm>
-            <a:off x="503999" y="842400"/>
-            <a:ext cx="11185201" cy="251999"/>
-          </a:xfrm>
-          <a:prstGeom prst="rect">
-            <a:avLst/>
-          </a:prstGeom>
-          <a:noFill/>
-        </p:spPr>
-        <p:txBody>
-          <a:bodyPr wrap="square" anchor="t" lIns="0" rIns="0" tIns="0" bIns="0">
-            <a:spAutoFit/>
-          </a:bodyPr>
-          <a:lstStyle/>
-          <a:p>
-            <a:pPr algn="ctr">
-              <a:spcAft>
-                <a:spcPts val="600"/>
-              </a:spcAft>
-            </a:pPr>
-            <a:r>
-              <a:rPr sz="1300" b="0" i="0">
-                <a:solidFill>
-                  <a:srgbClr val="595959"/>
-                </a:solidFill>
-                <a:latin typeface="Times New Roman"/>
-                <a:ea typeface="標楷體"/>
-                <a:ea typeface="標楷體"/>
-              </a:rPr>
-              <a:t>以 2026-07-30 那次排氣為例</a:t>
-            </a:r>
-          </a:p>
-        </p:txBody>
-      </p:sp>
-      <p:sp>
-        <p:nvSpPr>
-          <p:cNvPr id="5" name="Rectangle 4"/>
-          <p:cNvSpPr/>
-          <p:nvPr/>
-        </p:nvSpPr>
-        <p:spPr>
-          <a:xfrm>
-            <a:off x="0" y="6552000"/>
-            <a:ext cx="12193200" cy="306000"/>
-          </a:xfrm>
-          <a:prstGeom prst="rect">
-            <a:avLst/>
-          </a:prstGeom>
-          <a:solidFill>
-            <a:srgbClr val="2E8BC0"/>
-          </a:solidFill>
-          <a:ln>
-            <a:noFill/>
-          </a:ln>
-          <a:effectLst/>
-        </p:spPr>
-        <p:style>
-          <a:lnRef idx="1">
-            <a:schemeClr val="accent1"/>
-          </a:lnRef>
-          <a:fillRef idx="3">
-            <a:schemeClr val="accent1"/>
-          </a:fillRef>
-          <a:effectRef idx="2">
-            <a:schemeClr val="accent1"/>
-          </a:effectRef>
-          <a:fontRef idx="minor">
-            <a:schemeClr val="lt1"/>
-          </a:fontRef>
-        </p:style>
-        <p:txBody>
-          <a:bodyPr rtlCol="0" anchor="ctr"/>
-          <a:lstStyle/>
-          <a:p>
-            <a:pPr algn="ctr"/>
-          </a:p>
-        </p:txBody>
-      </p:sp>
-      <p:sp>
-        <p:nvSpPr>
-          <p:cNvPr id="6" name="TextBox 5"/>
-          <p:cNvSpPr txBox="1"/>
-          <p:nvPr/>
-        </p:nvSpPr>
-        <p:spPr>
-          <a:xfrm>
-            <a:off x="11329200" y="6577200"/>
-            <a:ext cx="576000" cy="216000"/>
-          </a:xfrm>
-          <a:prstGeom prst="rect">
-            <a:avLst/>
-          </a:prstGeom>
-          <a:noFill/>
-        </p:spPr>
-        <p:txBody>
-          <a:bodyPr wrap="square" anchor="t" lIns="0" rIns="0" tIns="0" bIns="0">
-            <a:spAutoFit/>
-          </a:bodyPr>
-          <a:lstStyle/>
-          <a:p>
-            <a:pPr algn="r">
-              <a:spcAft>
-                <a:spcPts val="600"/>
-              </a:spcAft>
-            </a:pPr>
-            <a:r>
-              <a:rPr sz="1100" b="0" i="0">
-                <a:solidFill>
-                  <a:srgbClr val="FFFFFF"/>
-                </a:solidFill>
-                <a:latin typeface="Times New Roman"/>
-                <a:ea typeface="標楷體"/>
-                <a:ea typeface="標楷體"/>
-              </a:rPr>
-              <a:t>9</a:t>
-            </a:r>
-          </a:p>
-        </p:txBody>
-      </p:sp>
-      <p:sp>
-        <p:nvSpPr>
-          <p:cNvPr id="7" name="TextBox 6"/>
-          <p:cNvSpPr txBox="1"/>
-          <p:nvPr/>
-        </p:nvSpPr>
-        <p:spPr>
-          <a:xfrm>
-            <a:off x="576000" y="1440000"/>
-            <a:ext cx="11041200" cy="3960000"/>
-          </a:xfrm>
-          <a:prstGeom prst="rect">
-            <a:avLst/>
-          </a:prstGeom>
-          <a:noFill/>
-        </p:spPr>
-        <p:txBody>
-          <a:bodyPr wrap="square" anchor="t" lIns="0" rIns="0" tIns="0" bIns="0">
-            <a:spAutoFit/>
-          </a:bodyPr>
-          <a:lstStyle/>
-          <a:p>
-            <a:pPr algn="l">
-              <a:spcAft>
-                <a:spcPts val="1400"/>
-              </a:spcAft>
-            </a:pPr>
-            <a:r>
-              <a:rPr sz="2000" b="1" i="0">
-                <a:solidFill>
-                  <a:srgbClr val="000000"/>
-                </a:solidFill>
-                <a:latin typeface="Times New Roman"/>
-                <a:ea typeface="標楷體"/>
-                <a:ea typeface="標楷體"/>
-              </a:rPr>
-              <a:t>量測到：二氧化碳 21.3%、甲烷 34.79%</a:t>
-            </a:r>
-          </a:p>
-          <a:p>
-            <a:pPr algn="l">
-              <a:spcAft>
-                <a:spcPts val="1400"/>
-              </a:spcAft>
-            </a:pPr>
-            <a:r>
-              <a:rPr sz="1800" b="0" i="0">
-                <a:solidFill>
-                  <a:srgbClr val="000000"/>
-                </a:solidFill>
-                <a:latin typeface="Times New Roman"/>
-                <a:ea typeface="標楷體"/>
-                <a:ea typeface="標楷體"/>
-              </a:rPr>
-              <a:t>若殘餘氣體真的維持 1:4，扣除甲烷與水蒸氣後，二氧化碳應該只有 </a:t>
-            </a:r>
-            <a:r>
-              <a:rPr sz="2000" b="1" i="0">
-                <a:solidFill>
-                  <a:srgbClr val="1F6FB5"/>
-                </a:solidFill>
-                <a:latin typeface="Times New Roman"/>
-                <a:ea typeface="標楷體"/>
-                <a:ea typeface="標楷體"/>
-              </a:rPr>
-              <a:t>12.6%</a:t>
-            </a:r>
-          </a:p>
-          <a:p>
-            <a:pPr algn="l">
-              <a:spcAft>
-                <a:spcPts val="1400"/>
-              </a:spcAft>
-            </a:pPr>
-            <a:r>
-              <a:rPr sz="1800" b="0" i="0">
-                <a:solidFill>
-                  <a:srgbClr val="000000"/>
-                </a:solidFill>
-                <a:latin typeface="Times New Roman"/>
-                <a:ea typeface="標楷體"/>
-                <a:ea typeface="標楷體"/>
-              </a:rPr>
-              <a:t>即使把甲烷讀數</a:t>
-            </a:r>
-            <a:r>
-              <a:rPr sz="2000" b="1" i="0">
-                <a:solidFill>
-                  <a:srgbClr val="FF0000"/>
-                </a:solidFill>
-                <a:latin typeface="Times New Roman"/>
-                <a:ea typeface="標楷體"/>
-                <a:ea typeface="標楷體"/>
-              </a:rPr>
-              <a:t>全部當成零</a:t>
-            </a:r>
-            <a:r>
-              <a:rPr sz="1800" b="0" i="0">
-                <a:solidFill>
-                  <a:srgbClr val="000000"/>
-                </a:solidFill>
-                <a:latin typeface="Times New Roman"/>
-                <a:ea typeface="標楷體"/>
-                <a:ea typeface="標楷體"/>
-              </a:rPr>
-              <a:t>（最極端的假設），氫氣上限也只有 78.7%，比值仍為 0.27</a:t>
-            </a:r>
-          </a:p>
-          <a:p>
-            <a:pPr algn="l">
-              <a:spcAft>
-                <a:spcPts val="1000"/>
-              </a:spcAft>
-            </a:pPr>
-          </a:p>
-          <a:p>
-            <a:pPr algn="l">
-              <a:spcAft>
-                <a:spcPts val="1600"/>
-              </a:spcAft>
-            </a:pPr>
-            <a:r>
-              <a:rPr sz="2200" b="1" i="0">
-                <a:solidFill>
-                  <a:srgbClr val="FF0000"/>
-                </a:solidFill>
-                <a:latin typeface="Times New Roman"/>
-                <a:ea typeface="標楷體"/>
-                <a:ea typeface="標楷體"/>
-              </a:rPr>
-              <a:t>也就是說——二氧化碳的實測值本身，就高到與 1:4 不相容。</a:t>
-            </a:r>
-          </a:p>
-          <a:p>
-            <a:pPr algn="l">
-              <a:spcAft>
-                <a:spcPts val="600"/>
-              </a:spcAft>
-            </a:pPr>
-            <a:r>
-              <a:rPr sz="1600" b="0" i="0">
-                <a:solidFill>
-                  <a:srgbClr val="595959"/>
-                </a:solidFill>
-                <a:latin typeface="Times New Roman"/>
-                <a:ea typeface="標楷體"/>
-                <a:ea typeface="標楷體"/>
-              </a:rPr>
-              <a:t>量級換算（保守估計）：要讓比值漂移到實測中位數，需要額外移除約 2.57 莫耳氫氣，相當於進料氫氣的 64%。</a:t>
-            </a:r>
-          </a:p>
-        </p:txBody>
-      </p:sp>
-      <p:sp>
-        <p:nvSpPr>
-          <p:cNvPr id="8" name="Rectangle 7"/>
-          <p:cNvSpPr/>
-          <p:nvPr/>
-        </p:nvSpPr>
-        <p:spPr>
-          <a:xfrm>
-            <a:off x="432000" y="5562000"/>
-            <a:ext cx="11329200" cy="864000"/>
-          </a:xfrm>
-          <a:prstGeom prst="rect">
-            <a:avLst/>
-          </a:prstGeom>
-          <a:solidFill>
-            <a:srgbClr val="F2F7FC"/>
-          </a:solidFill>
-          <a:ln w="9525">
-            <a:solidFill>
-              <a:srgbClr val="2AB6D8"/>
-            </a:solidFill>
-          </a:ln>
-          <a:effectLst/>
-        </p:spPr>
-        <p:style>
-          <a:lnRef idx="1">
-            <a:schemeClr val="accent1"/>
-          </a:lnRef>
-          <a:fillRef idx="3">
-            <a:schemeClr val="accent1"/>
-          </a:fillRef>
-          <a:effectRef idx="2">
-            <a:schemeClr val="accent1"/>
-          </a:effectRef>
-          <a:fontRef idx="minor">
-            <a:schemeClr val="lt1"/>
-          </a:fontRef>
-        </p:style>
-        <p:txBody>
-          <a:bodyPr rtlCol="0" anchor="ctr"/>
-          <a:lstStyle/>
-          <a:p>
-            <a:pPr algn="ctr"/>
-          </a:p>
-        </p:txBody>
-      </p:sp>
-      <p:sp>
-        <p:nvSpPr>
-          <p:cNvPr id="9" name="TextBox 8"/>
-          <p:cNvSpPr txBox="1"/>
-          <p:nvPr/>
-        </p:nvSpPr>
-        <p:spPr>
-          <a:xfrm>
-            <a:off x="612000" y="5670000"/>
-            <a:ext cx="10969200" cy="648000"/>
-          </a:xfrm>
-          <a:prstGeom prst="rect">
-            <a:avLst/>
-          </a:prstGeom>
-          <a:noFill/>
-        </p:spPr>
-        <p:txBody>
-          <a:bodyPr wrap="square" anchor="ctr" lIns="0" rIns="0" tIns="0" bIns="0">
-            <a:spAutoFit/>
-          </a:bodyPr>
-          <a:lstStyle/>
-          <a:p>
-            <a:pPr algn="l">
-              <a:spcAft>
-                <a:spcPts val="600"/>
-              </a:spcAft>
-            </a:pPr>
-            <a:r>
-              <a:rPr sz="1300" b="0" i="0">
-                <a:solidFill>
-                  <a:srgbClr val="FF0000"/>
-                </a:solidFill>
-                <a:latin typeface="Times New Roman"/>
-                <a:ea typeface="標楷體"/>
-                <a:ea typeface="標楷體"/>
-              </a:rPr>
-              <a:t>此換算為單次通過的保守估計，實際為連續補氣，數值僅示意量級。</a:t>
-            </a:r>
-          </a:p>
-        </p:txBody>
-      </p:sp>
-    </p:spTree>
-  </p:cSld>
-  <p:clrMapOvr>
-    <a:masterClrMapping/>
-  </p:clrMapOvr>
-</p:sld>
-</file>
-
-<file path=ppt/slides/slide9.xml><?xml version="1.0" encoding="utf-8"?>
-<p:sld xmlns:a="http://schemas.openxmlformats.org/drawingml/2006/main" xmlns:p="http://schemas.openxmlformats.org/presentationml/2006/main" xmlns:r="http://schemas.openxmlformats.org/officeDocument/2006/relationships">
-  <p:cSld>
-    <p:spTree>
-      <p:nvGrpSpPr>
-        <p:cNvPr id="1" name=""/>
-        <p:cNvGrpSpPr/>
-        <p:nvPr/>
-      </p:nvGrpSpPr>
-      <p:grpSpPr/>
-      <p:sp>
-        <p:nvSpPr>
-          <p:cNvPr id="2" name="TextBox 1"/>
-          <p:cNvSpPr txBox="1"/>
-          <p:nvPr/>
-        </p:nvSpPr>
-        <p:spPr>
-          <a:xfrm>
-            <a:off x="432000" y="180000"/>
-            <a:ext cx="11329200" cy="540000"/>
-          </a:xfrm>
-          <a:prstGeom prst="rect">
-            <a:avLst/>
-          </a:prstGeom>
-          <a:noFill/>
-        </p:spPr>
-        <p:txBody>
-          <a:bodyPr wrap="square" anchor="t" lIns="0" rIns="0" tIns="0" bIns="0">
-            <a:spAutoFit/>
-          </a:bodyPr>
-          <a:lstStyle/>
-          <a:p>
-            <a:pPr algn="ctr">
-              <a:spcAft>
-                <a:spcPts val="0"/>
-              </a:spcAft>
-            </a:pPr>
-            <a:r>
-              <a:rPr sz="2800" b="1" i="0">
-                <a:solidFill>
-                  <a:srgbClr val="000000"/>
-                </a:solidFill>
-                <a:latin typeface="Times New Roman"/>
-                <a:ea typeface="標楷體"/>
-                <a:ea typeface="標楷體"/>
-              </a:rPr>
-              <a:t>八、三個矛盾，同一個答案</a:t>
-            </a:r>
-          </a:p>
-        </p:txBody>
-      </p:sp>
-      <p:sp>
-        <p:nvSpPr>
-          <p:cNvPr id="3" name="Rectangle 2"/>
-          <p:cNvSpPr/>
-          <p:nvPr/>
-        </p:nvSpPr>
-        <p:spPr>
-          <a:xfrm>
-            <a:off x="216000" y="763200"/>
-            <a:ext cx="11761200" cy="18000"/>
-          </a:xfrm>
-          <a:prstGeom prst="rect">
-            <a:avLst/>
-          </a:prstGeom>
-          <a:solidFill>
-            <a:srgbClr val="2AB6D8"/>
-          </a:solidFill>
-          <a:ln>
-            <a:noFill/>
-          </a:ln>
-          <a:effectLst/>
-        </p:spPr>
-        <p:style>
-          <a:lnRef idx="1">
-            <a:schemeClr val="accent1"/>
-          </a:lnRef>
-          <a:fillRef idx="3">
-            <a:schemeClr val="accent1"/>
-          </a:fillRef>
-          <a:effectRef idx="2">
-            <a:schemeClr val="accent1"/>
-          </a:effectRef>
-          <a:fontRef idx="minor">
-            <a:schemeClr val="lt1"/>
-          </a:fontRef>
-        </p:style>
-        <p:txBody>
-          <a:bodyPr rtlCol="0" anchor="ctr"/>
-          <a:lstStyle/>
-          <a:p>
-            <a:pPr algn="ctr"/>
-          </a:p>
-        </p:txBody>
-      </p:sp>
-      <p:sp>
-        <p:nvSpPr>
-          <p:cNvPr id="4" name="Rectangle 3"/>
-          <p:cNvSpPr/>
-          <p:nvPr/>
-        </p:nvSpPr>
-        <p:spPr>
-          <a:xfrm>
-            <a:off x="0" y="6552000"/>
-            <a:ext cx="12193200" cy="306000"/>
-          </a:xfrm>
-          <a:prstGeom prst="rect">
-            <a:avLst/>
-          </a:prstGeom>
-          <a:solidFill>
-            <a:srgbClr val="2E8BC0"/>
-          </a:solidFill>
-          <a:ln>
-            <a:noFill/>
-          </a:ln>
-          <a:effectLst/>
-        </p:spPr>
-        <p:style>
-          <a:lnRef idx="1">
-            <a:schemeClr val="accent1"/>
-          </a:lnRef>
-          <a:fillRef idx="3">
-            <a:schemeClr val="accent1"/>
-          </a:fillRef>
-          <a:effectRef idx="2">
-            <a:schemeClr val="accent1"/>
-          </a:effectRef>
-          <a:fontRef idx="minor">
-            <a:schemeClr val="lt1"/>
-          </a:fontRef>
-        </p:style>
-        <p:txBody>
-          <a:bodyPr rtlCol="0" anchor="ctr"/>
-          <a:lstStyle/>
-          <a:p>
-            <a:pPr algn="ctr"/>
-          </a:p>
-        </p:txBody>
-      </p:sp>
-      <p:sp>
-        <p:nvSpPr>
-          <p:cNvPr id="5" name="TextBox 4"/>
-          <p:cNvSpPr txBox="1"/>
-          <p:nvPr/>
-        </p:nvSpPr>
-        <p:spPr>
-          <a:xfrm>
-            <a:off x="11329200" y="6577200"/>
-            <a:ext cx="576000" cy="216000"/>
-          </a:xfrm>
-          <a:prstGeom prst="rect">
-            <a:avLst/>
-          </a:prstGeom>
-          <a:noFill/>
-        </p:spPr>
-        <p:txBody>
-          <a:bodyPr wrap="square" anchor="t" lIns="0" rIns="0" tIns="0" bIns="0">
-            <a:spAutoFit/>
-          </a:bodyPr>
-          <a:lstStyle/>
-          <a:p>
-            <a:pPr algn="r">
-              <a:spcAft>
-                <a:spcPts val="600"/>
-              </a:spcAft>
-            </a:pPr>
-            <a:r>
-              <a:rPr sz="1100" b="0" i="0">
-                <a:solidFill>
-                  <a:srgbClr val="FFFFFF"/>
-                </a:solidFill>
-                <a:latin typeface="Times New Roman"/>
-                <a:ea typeface="標楷體"/>
-                <a:ea typeface="標楷體"/>
-              </a:rPr>
-              <a:t>10</a:t>
             </a:r>
           </a:p>
         </p:txBody>
@@ -13678,6 +11598,1231 @@
                 <a:ea typeface="標楷體"/>
               </a:rPr>
               <a:t>★ 2026-09-23：這三項矛盾也能由「碳酸鹽脫氣」解釋，且不需要任何洩漏。★ 2026-09-27 又找到第三個解釋（排氣本身會挑掉氫氣），三者尚未分辨，見第 17、19 頁。</a:t>
+            </a:r>
+          </a:p>
+        </p:txBody>
+      </p:sp>
+    </p:spTree>
+  </p:cSld>
+  <p:clrMapOvr>
+    <a:masterClrMapping/>
+  </p:clrMapOvr>
+</p:sld>
+</file>
+
+<file path=ppt/slides/slide7.xml><?xml version="1.0" encoding="utf-8"?>
+<p:sld xmlns:a="http://schemas.openxmlformats.org/drawingml/2006/main" xmlns:p="http://schemas.openxmlformats.org/presentationml/2006/main" xmlns:r="http://schemas.openxmlformats.org/officeDocument/2006/relationships">
+  <p:cSld>
+    <p:spTree>
+      <p:nvGrpSpPr>
+        <p:cNvPr id="1" name=""/>
+        <p:cNvGrpSpPr/>
+        <p:nvPr/>
+      </p:nvGrpSpPr>
+      <p:grpSpPr/>
+      <p:sp>
+        <p:nvSpPr>
+          <p:cNvPr id="2" name="TextBox 1"/>
+          <p:cNvSpPr txBox="1"/>
+          <p:nvPr/>
+        </p:nvSpPr>
+        <p:spPr>
+          <a:xfrm>
+            <a:off x="432000" y="180000"/>
+            <a:ext cx="11329200" cy="540000"/>
+          </a:xfrm>
+          <a:prstGeom prst="rect">
+            <a:avLst/>
+          </a:prstGeom>
+          <a:noFill/>
+        </p:spPr>
+        <p:txBody>
+          <a:bodyPr wrap="square" anchor="t" lIns="0" rIns="0" tIns="0" bIns="0">
+            <a:spAutoFit/>
+          </a:bodyPr>
+          <a:lstStyle/>
+          <a:p>
+            <a:pPr algn="ctr">
+              <a:spcAft>
+                <a:spcPts val="0"/>
+              </a:spcAft>
+            </a:pPr>
+            <a:r>
+              <a:rPr sz="2800" b="1" i="0">
+                <a:solidFill>
+                  <a:srgbClr val="000000"/>
+                </a:solidFill>
+                <a:latin typeface="Times New Roman"/>
+                <a:ea typeface="標楷體"/>
+                <a:ea typeface="標楷體"/>
+              </a:rPr>
+              <a:t>九、佐證一：切斷碳源，壓降照舊</a:t>
+            </a:r>
+          </a:p>
+        </p:txBody>
+      </p:sp>
+      <p:sp>
+        <p:nvSpPr>
+          <p:cNvPr id="3" name="Rectangle 2"/>
+          <p:cNvSpPr/>
+          <p:nvPr/>
+        </p:nvSpPr>
+        <p:spPr>
+          <a:xfrm>
+            <a:off x="216000" y="763200"/>
+            <a:ext cx="11761200" cy="18000"/>
+          </a:xfrm>
+          <a:prstGeom prst="rect">
+            <a:avLst/>
+          </a:prstGeom>
+          <a:solidFill>
+            <a:srgbClr val="2AB6D8"/>
+          </a:solidFill>
+          <a:ln>
+            <a:noFill/>
+          </a:ln>
+          <a:effectLst/>
+        </p:spPr>
+        <p:style>
+          <a:lnRef idx="1">
+            <a:schemeClr val="accent1"/>
+          </a:lnRef>
+          <a:fillRef idx="3">
+            <a:schemeClr val="accent1"/>
+          </a:fillRef>
+          <a:effectRef idx="2">
+            <a:schemeClr val="accent1"/>
+          </a:effectRef>
+          <a:fontRef idx="minor">
+            <a:schemeClr val="lt1"/>
+          </a:fontRef>
+        </p:style>
+        <p:txBody>
+          <a:bodyPr rtlCol="0" anchor="ctr"/>
+          <a:lstStyle/>
+          <a:p>
+            <a:pPr algn="ctr"/>
+          </a:p>
+        </p:txBody>
+      </p:sp>
+      <p:sp>
+        <p:nvSpPr>
+          <p:cNvPr id="4" name="TextBox 3"/>
+          <p:cNvSpPr txBox="1"/>
+          <p:nvPr/>
+        </p:nvSpPr>
+        <p:spPr>
+          <a:xfrm>
+            <a:off x="503999" y="842400"/>
+            <a:ext cx="11185201" cy="251999"/>
+          </a:xfrm>
+          <a:prstGeom prst="rect">
+            <a:avLst/>
+          </a:prstGeom>
+          <a:noFill/>
+        </p:spPr>
+        <p:txBody>
+          <a:bodyPr wrap="square" anchor="t" lIns="0" rIns="0" tIns="0" bIns="0">
+            <a:spAutoFit/>
+          </a:bodyPr>
+          <a:lstStyle/>
+          <a:p>
+            <a:pPr algn="ctr">
+              <a:spcAft>
+                <a:spcPts val="600"/>
+              </a:spcAft>
+            </a:pPr>
+            <a:r>
+              <a:rPr sz="1300" b="0" i="0">
+                <a:solidFill>
+                  <a:srgbClr val="595959"/>
+                </a:solidFill>
+                <a:latin typeface="Times New Roman"/>
+                <a:ea typeface="標楷體"/>
+                <a:ea typeface="標楷體"/>
+              </a:rPr>
+              <a:t>自動化批次 2026-08-11 ~ 08-31</a:t>
+            </a:r>
+          </a:p>
+        </p:txBody>
+      </p:sp>
+      <p:sp>
+        <p:nvSpPr>
+          <p:cNvPr id="5" name="Rectangle 4"/>
+          <p:cNvSpPr/>
+          <p:nvPr/>
+        </p:nvSpPr>
+        <p:spPr>
+          <a:xfrm>
+            <a:off x="0" y="6552000"/>
+            <a:ext cx="12193200" cy="306000"/>
+          </a:xfrm>
+          <a:prstGeom prst="rect">
+            <a:avLst/>
+          </a:prstGeom>
+          <a:solidFill>
+            <a:srgbClr val="2E8BC0"/>
+          </a:solidFill>
+          <a:ln>
+            <a:noFill/>
+          </a:ln>
+          <a:effectLst/>
+        </p:spPr>
+        <p:style>
+          <a:lnRef idx="1">
+            <a:schemeClr val="accent1"/>
+          </a:lnRef>
+          <a:fillRef idx="3">
+            <a:schemeClr val="accent1"/>
+          </a:fillRef>
+          <a:effectRef idx="2">
+            <a:schemeClr val="accent1"/>
+          </a:effectRef>
+          <a:fontRef idx="minor">
+            <a:schemeClr val="lt1"/>
+          </a:fontRef>
+        </p:style>
+        <p:txBody>
+          <a:bodyPr rtlCol="0" anchor="ctr"/>
+          <a:lstStyle/>
+          <a:p>
+            <a:pPr algn="ctr"/>
+          </a:p>
+        </p:txBody>
+      </p:sp>
+      <p:sp>
+        <p:nvSpPr>
+          <p:cNvPr id="6" name="TextBox 5"/>
+          <p:cNvSpPr txBox="1"/>
+          <p:nvPr/>
+        </p:nvSpPr>
+        <p:spPr>
+          <a:xfrm>
+            <a:off x="11329200" y="6577200"/>
+            <a:ext cx="576000" cy="216000"/>
+          </a:xfrm>
+          <a:prstGeom prst="rect">
+            <a:avLst/>
+          </a:prstGeom>
+          <a:noFill/>
+        </p:spPr>
+        <p:txBody>
+          <a:bodyPr wrap="square" anchor="t" lIns="0" rIns="0" tIns="0" bIns="0">
+            <a:spAutoFit/>
+          </a:bodyPr>
+          <a:lstStyle/>
+          <a:p>
+            <a:pPr algn="r">
+              <a:spcAft>
+                <a:spcPts val="600"/>
+              </a:spcAft>
+            </a:pPr>
+            <a:r>
+              <a:rPr sz="1100" b="0" i="0">
+                <a:solidFill>
+                  <a:srgbClr val="FFFFFF"/>
+                </a:solidFill>
+                <a:latin typeface="Times New Roman"/>
+                <a:ea typeface="標楷體"/>
+                <a:ea typeface="標楷體"/>
+              </a:rPr>
+              <a:t>8</a:t>
+            </a:r>
+          </a:p>
+        </p:txBody>
+      </p:sp>
+      <p:pic>
+        <p:nvPicPr>
+          <p:cNvPr id="7" name="Picture 6" descr="deck3_co2cut.png"/>
+          <p:cNvPicPr>
+            <a:picLocks noChangeAspect="1"/>
+          </p:cNvPicPr>
+          <p:nvPr/>
+        </p:nvPicPr>
+        <p:blipFill>
+          <a:blip r:embed="rId2"/>
+          <a:stretch>
+            <a:fillRect/>
+          </a:stretch>
+        </p:blipFill>
+        <p:spPr>
+          <a:xfrm>
+            <a:off x="2136599" y="1188000"/>
+            <a:ext cx="7920000" cy="4596600"/>
+          </a:xfrm>
+          <a:prstGeom prst="rect">
+            <a:avLst/>
+          </a:prstGeom>
+        </p:spPr>
+      </p:pic>
+      <p:sp>
+        <p:nvSpPr>
+          <p:cNvPr id="8" name="TextBox 7"/>
+          <p:cNvSpPr txBox="1"/>
+          <p:nvPr/>
+        </p:nvSpPr>
+        <p:spPr>
+          <a:xfrm>
+            <a:off x="576000" y="5856599"/>
+            <a:ext cx="11041200" cy="659400"/>
+          </a:xfrm>
+          <a:prstGeom prst="rect">
+            <a:avLst/>
+          </a:prstGeom>
+          <a:noFill/>
+        </p:spPr>
+        <p:txBody>
+          <a:bodyPr wrap="square" anchor="t" lIns="0" rIns="0" tIns="0" bIns="0">
+            <a:spAutoFit/>
+          </a:bodyPr>
+          <a:lstStyle/>
+          <a:p>
+            <a:pPr algn="ctr">
+              <a:spcAft>
+                <a:spcPts val="600"/>
+              </a:spcAft>
+            </a:pPr>
+            <a:r>
+              <a:rPr sz="1800" b="1" i="0">
+                <a:solidFill>
+                  <a:srgbClr val="1F6FB5"/>
+                </a:solidFill>
+                <a:latin typeface="Times New Roman"/>
+                <a:ea typeface="標楷體"/>
+                <a:ea typeface="標楷體"/>
+              </a:rPr>
+              <a:t>這個「沒有差異」有檢定力：</a:t>
+            </a:r>
+            <a:r>
+              <a:rPr sz="1700" b="0" i="0">
+                <a:solidFill>
+                  <a:srgbClr val="000000"/>
+                </a:solidFill>
+                <a:latin typeface="Times New Roman"/>
+                <a:ea typeface="標楷體"/>
+                <a:ea typeface="標楷體"/>
+              </a:rPr>
+              <a:t>若生物途徑真的佔總壓降三分之一（0.0125），本檢定偵測得到的機率是 100%。結果沒有。</a:t>
+            </a:r>
+          </a:p>
+        </p:txBody>
+      </p:sp>
+    </p:spTree>
+  </p:cSld>
+  <p:clrMapOvr>
+    <a:masterClrMapping/>
+  </p:clrMapOvr>
+</p:sld>
+</file>
+
+<file path=ppt/slides/slide8.xml><?xml version="1.0" encoding="utf-8"?>
+<p:sld xmlns:a="http://schemas.openxmlformats.org/drawingml/2006/main" xmlns:p="http://schemas.openxmlformats.org/presentationml/2006/main" xmlns:r="http://schemas.openxmlformats.org/officeDocument/2006/relationships">
+  <p:cSld>
+    <p:spTree>
+      <p:nvGrpSpPr>
+        <p:cNvPr id="1" name=""/>
+        <p:cNvGrpSpPr/>
+        <p:nvPr/>
+      </p:nvGrpSpPr>
+      <p:grpSpPr/>
+      <p:sp>
+        <p:nvSpPr>
+          <p:cNvPr id="2" name="TextBox 1"/>
+          <p:cNvSpPr txBox="1"/>
+          <p:nvPr/>
+        </p:nvSpPr>
+        <p:spPr>
+          <a:xfrm>
+            <a:off x="432000" y="180000"/>
+            <a:ext cx="11329200" cy="540000"/>
+          </a:xfrm>
+          <a:prstGeom prst="rect">
+            <a:avLst/>
+          </a:prstGeom>
+          <a:noFill/>
+        </p:spPr>
+        <p:txBody>
+          <a:bodyPr wrap="square" anchor="t" lIns="0" rIns="0" tIns="0" bIns="0">
+            <a:spAutoFit/>
+          </a:bodyPr>
+          <a:lstStyle/>
+          <a:p>
+            <a:pPr algn="ctr">
+              <a:spcAft>
+                <a:spcPts val="0"/>
+              </a:spcAft>
+            </a:pPr>
+            <a:r>
+              <a:rPr sz="2800" b="1" i="0">
+                <a:solidFill>
+                  <a:srgbClr val="000000"/>
+                </a:solidFill>
+                <a:latin typeface="Times New Roman"/>
+                <a:ea typeface="標楷體"/>
+                <a:ea typeface="標楷體"/>
+              </a:rPr>
+              <a:t>十、佐證二：壓降曲線幾乎是直線</a:t>
+            </a:r>
+          </a:p>
+        </p:txBody>
+      </p:sp>
+      <p:sp>
+        <p:nvSpPr>
+          <p:cNvPr id="3" name="Rectangle 2"/>
+          <p:cNvSpPr/>
+          <p:nvPr/>
+        </p:nvSpPr>
+        <p:spPr>
+          <a:xfrm>
+            <a:off x="216000" y="763200"/>
+            <a:ext cx="11761200" cy="18000"/>
+          </a:xfrm>
+          <a:prstGeom prst="rect">
+            <a:avLst/>
+          </a:prstGeom>
+          <a:solidFill>
+            <a:srgbClr val="2AB6D8"/>
+          </a:solidFill>
+          <a:ln>
+            <a:noFill/>
+          </a:ln>
+          <a:effectLst/>
+        </p:spPr>
+        <p:style>
+          <a:lnRef idx="1">
+            <a:schemeClr val="accent1"/>
+          </a:lnRef>
+          <a:fillRef idx="3">
+            <a:schemeClr val="accent1"/>
+          </a:fillRef>
+          <a:effectRef idx="2">
+            <a:schemeClr val="accent1"/>
+          </a:effectRef>
+          <a:fontRef idx="minor">
+            <a:schemeClr val="lt1"/>
+          </a:fontRef>
+        </p:style>
+        <p:txBody>
+          <a:bodyPr rtlCol="0" anchor="ctr"/>
+          <a:lstStyle/>
+          <a:p>
+            <a:pPr algn="ctr"/>
+          </a:p>
+        </p:txBody>
+      </p:sp>
+      <p:sp>
+        <p:nvSpPr>
+          <p:cNvPr id="4" name="TextBox 3"/>
+          <p:cNvSpPr txBox="1"/>
+          <p:nvPr/>
+        </p:nvSpPr>
+        <p:spPr>
+          <a:xfrm>
+            <a:off x="503999" y="842400"/>
+            <a:ext cx="11185201" cy="251999"/>
+          </a:xfrm>
+          <a:prstGeom prst="rect">
+            <a:avLst/>
+          </a:prstGeom>
+          <a:noFill/>
+        </p:spPr>
+        <p:txBody>
+          <a:bodyPr wrap="square" anchor="t" lIns="0" rIns="0" tIns="0" bIns="0">
+            <a:spAutoFit/>
+          </a:bodyPr>
+          <a:lstStyle/>
+          <a:p>
+            <a:pPr algn="ctr">
+              <a:spcAft>
+                <a:spcPts val="600"/>
+              </a:spcAft>
+            </a:pPr>
+            <a:r>
+              <a:rPr sz="1300" b="0" i="0">
+                <a:solidFill>
+                  <a:srgbClr val="595959"/>
+                </a:solidFill>
+                <a:latin typeface="Times New Roman"/>
+                <a:ea typeface="標楷體"/>
+                <a:ea typeface="標楷體"/>
+              </a:rPr>
+              <a:t>溶解會讓曲線彎，定速移除是直線</a:t>
+            </a:r>
+          </a:p>
+        </p:txBody>
+      </p:sp>
+      <p:sp>
+        <p:nvSpPr>
+          <p:cNvPr id="5" name="Rectangle 4"/>
+          <p:cNvSpPr/>
+          <p:nvPr/>
+        </p:nvSpPr>
+        <p:spPr>
+          <a:xfrm>
+            <a:off x="0" y="6552000"/>
+            <a:ext cx="12193200" cy="306000"/>
+          </a:xfrm>
+          <a:prstGeom prst="rect">
+            <a:avLst/>
+          </a:prstGeom>
+          <a:solidFill>
+            <a:srgbClr val="2E8BC0"/>
+          </a:solidFill>
+          <a:ln>
+            <a:noFill/>
+          </a:ln>
+          <a:effectLst/>
+        </p:spPr>
+        <p:style>
+          <a:lnRef idx="1">
+            <a:schemeClr val="accent1"/>
+          </a:lnRef>
+          <a:fillRef idx="3">
+            <a:schemeClr val="accent1"/>
+          </a:fillRef>
+          <a:effectRef idx="2">
+            <a:schemeClr val="accent1"/>
+          </a:effectRef>
+          <a:fontRef idx="minor">
+            <a:schemeClr val="lt1"/>
+          </a:fontRef>
+        </p:style>
+        <p:txBody>
+          <a:bodyPr rtlCol="0" anchor="ctr"/>
+          <a:lstStyle/>
+          <a:p>
+            <a:pPr algn="ctr"/>
+          </a:p>
+        </p:txBody>
+      </p:sp>
+      <p:sp>
+        <p:nvSpPr>
+          <p:cNvPr id="6" name="TextBox 5"/>
+          <p:cNvSpPr txBox="1"/>
+          <p:nvPr/>
+        </p:nvSpPr>
+        <p:spPr>
+          <a:xfrm>
+            <a:off x="11329200" y="6577200"/>
+            <a:ext cx="576000" cy="216000"/>
+          </a:xfrm>
+          <a:prstGeom prst="rect">
+            <a:avLst/>
+          </a:prstGeom>
+          <a:noFill/>
+        </p:spPr>
+        <p:txBody>
+          <a:bodyPr wrap="square" anchor="t" lIns="0" rIns="0" tIns="0" bIns="0">
+            <a:spAutoFit/>
+          </a:bodyPr>
+          <a:lstStyle/>
+          <a:p>
+            <a:pPr algn="r">
+              <a:spcAft>
+                <a:spcPts val="600"/>
+              </a:spcAft>
+            </a:pPr>
+            <a:r>
+              <a:rPr sz="1100" b="0" i="0">
+                <a:solidFill>
+                  <a:srgbClr val="FFFFFF"/>
+                </a:solidFill>
+                <a:latin typeface="Times New Roman"/>
+                <a:ea typeface="標楷體"/>
+                <a:ea typeface="標楷體"/>
+              </a:rPr>
+              <a:t>9</a:t>
+            </a:r>
+          </a:p>
+        </p:txBody>
+      </p:sp>
+      <p:pic>
+        <p:nvPicPr>
+          <p:cNvPr id="7" name="Picture 6" descr="deck4_shape.png"/>
+          <p:cNvPicPr>
+            <a:picLocks noChangeAspect="1"/>
+          </p:cNvPicPr>
+          <p:nvPr/>
+        </p:nvPicPr>
+        <p:blipFill>
+          <a:blip r:embed="rId2"/>
+          <a:stretch>
+            <a:fillRect/>
+          </a:stretch>
+        </p:blipFill>
+        <p:spPr>
+          <a:xfrm>
+            <a:off x="1596599" y="1224000"/>
+            <a:ext cx="9000000" cy="4790675"/>
+          </a:xfrm>
+          <a:prstGeom prst="rect">
+            <a:avLst/>
+          </a:prstGeom>
+        </p:spPr>
+      </p:pic>
+      <p:sp>
+        <p:nvSpPr>
+          <p:cNvPr id="8" name="TextBox 7"/>
+          <p:cNvSpPr txBox="1"/>
+          <p:nvPr/>
+        </p:nvSpPr>
+        <p:spPr>
+          <a:xfrm>
+            <a:off x="576000" y="6086674"/>
+            <a:ext cx="11041200" cy="429325"/>
+          </a:xfrm>
+          <a:prstGeom prst="rect">
+            <a:avLst/>
+          </a:prstGeom>
+          <a:noFill/>
+        </p:spPr>
+        <p:txBody>
+          <a:bodyPr wrap="square" anchor="t" lIns="0" rIns="0" tIns="0" bIns="0">
+            <a:spAutoFit/>
+          </a:bodyPr>
+          <a:lstStyle/>
+          <a:p>
+            <a:pPr algn="ctr">
+              <a:spcAft>
+                <a:spcPts val="600"/>
+              </a:spcAft>
+            </a:pPr>
+            <a:r>
+              <a:rPr sz="1800" b="1" i="0">
+                <a:solidFill>
+                  <a:srgbClr val="000000"/>
+                </a:solidFill>
+                <a:latin typeface="Times New Roman"/>
+                <a:ea typeface="標楷體"/>
+                <a:ea typeface="標楷體"/>
+              </a:rPr>
+              <a:t>全資料庫 252 條下降曲線，九成落在「接近直線」這一群。</a:t>
+            </a:r>
+          </a:p>
+        </p:txBody>
+      </p:sp>
+    </p:spTree>
+  </p:cSld>
+  <p:clrMapOvr>
+    <a:masterClrMapping/>
+  </p:clrMapOvr>
+</p:sld>
+</file>
+
+<file path=ppt/slides/slide9.xml><?xml version="1.0" encoding="utf-8"?>
+<p:sld xmlns:a="http://schemas.openxmlformats.org/drawingml/2006/main" xmlns:p="http://schemas.openxmlformats.org/presentationml/2006/main" xmlns:r="http://schemas.openxmlformats.org/officeDocument/2006/relationships">
+  <p:cSld>
+    <p:spTree>
+      <p:nvGrpSpPr>
+        <p:cNvPr id="1" name=""/>
+        <p:cNvGrpSpPr/>
+        <p:nvPr/>
+      </p:nvGrpSpPr>
+      <p:grpSpPr/>
+      <p:sp>
+        <p:nvSpPr>
+          <p:cNvPr id="2" name="TextBox 1"/>
+          <p:cNvSpPr txBox="1"/>
+          <p:nvPr/>
+        </p:nvSpPr>
+        <p:spPr>
+          <a:xfrm>
+            <a:off x="432000" y="180000"/>
+            <a:ext cx="11329200" cy="540000"/>
+          </a:xfrm>
+          <a:prstGeom prst="rect">
+            <a:avLst/>
+          </a:prstGeom>
+          <a:noFill/>
+        </p:spPr>
+        <p:txBody>
+          <a:bodyPr wrap="square" anchor="t" lIns="0" rIns="0" tIns="0" bIns="0">
+            <a:spAutoFit/>
+          </a:bodyPr>
+          <a:lstStyle/>
+          <a:p>
+            <a:pPr algn="ctr">
+              <a:spcAft>
+                <a:spcPts val="0"/>
+              </a:spcAft>
+            </a:pPr>
+            <a:r>
+              <a:rPr sz="2800" b="1" i="0">
+                <a:solidFill>
+                  <a:srgbClr val="000000"/>
+                </a:solidFill>
+                <a:latin typeface="Times New Roman"/>
+                <a:ea typeface="標楷體"/>
+                <a:ea typeface="標楷體"/>
+              </a:rPr>
+              <a:t>十一、氧化還原電位（</a:t>
+            </a:r>
+            <a:r>
+              <a:rPr sz="2800" b="1" i="0">
+                <a:solidFill>
+                  <a:srgbClr val="000000"/>
+                </a:solidFill>
+                <a:latin typeface="Times New Roman"/>
+                <a:ea typeface="標楷體"/>
+                <a:ea typeface="標楷體"/>
+              </a:rPr>
+              <a:t>ORP</a:t>
+            </a:r>
+            <a:r>
+              <a:rPr sz="2800" b="1" i="0">
+                <a:solidFill>
+                  <a:srgbClr val="000000"/>
+                </a:solidFill>
+                <a:latin typeface="Times New Roman"/>
+                <a:ea typeface="標楷體"/>
+                <a:ea typeface="標楷體"/>
+              </a:rPr>
+              <a:t>）該怎麼讀</a:t>
+            </a:r>
+          </a:p>
+        </p:txBody>
+      </p:sp>
+      <p:sp>
+        <p:nvSpPr>
+          <p:cNvPr id="3" name="Rectangle 2"/>
+          <p:cNvSpPr/>
+          <p:nvPr/>
+        </p:nvSpPr>
+        <p:spPr>
+          <a:xfrm>
+            <a:off x="216000" y="763200"/>
+            <a:ext cx="11761200" cy="18000"/>
+          </a:xfrm>
+          <a:prstGeom prst="rect">
+            <a:avLst/>
+          </a:prstGeom>
+          <a:solidFill>
+            <a:srgbClr val="2AB6D8"/>
+          </a:solidFill>
+          <a:ln>
+            <a:noFill/>
+          </a:ln>
+          <a:effectLst/>
+        </p:spPr>
+        <p:style>
+          <a:lnRef idx="1">
+            <a:schemeClr val="accent1"/>
+          </a:lnRef>
+          <a:fillRef idx="3">
+            <a:schemeClr val="accent1"/>
+          </a:fillRef>
+          <a:effectRef idx="2">
+            <a:schemeClr val="accent1"/>
+          </a:effectRef>
+          <a:fontRef idx="minor">
+            <a:schemeClr val="lt1"/>
+          </a:fontRef>
+        </p:style>
+        <p:txBody>
+          <a:bodyPr rtlCol="0" anchor="ctr"/>
+          <a:lstStyle/>
+          <a:p>
+            <a:pPr algn="ctr"/>
+          </a:p>
+        </p:txBody>
+      </p:sp>
+      <p:sp>
+        <p:nvSpPr>
+          <p:cNvPr id="4" name="TextBox 3"/>
+          <p:cNvSpPr txBox="1"/>
+          <p:nvPr/>
+        </p:nvSpPr>
+        <p:spPr>
+          <a:xfrm>
+            <a:off x="503999" y="842400"/>
+            <a:ext cx="11185201" cy="251999"/>
+          </a:xfrm>
+          <a:prstGeom prst="rect">
+            <a:avLst/>
+          </a:prstGeom>
+          <a:noFill/>
+        </p:spPr>
+        <p:txBody>
+          <a:bodyPr wrap="square" anchor="t" lIns="0" rIns="0" tIns="0" bIns="0">
+            <a:spAutoFit/>
+          </a:bodyPr>
+          <a:lstStyle/>
+          <a:p>
+            <a:pPr algn="ctr">
+              <a:spcAft>
+                <a:spcPts val="600"/>
+              </a:spcAft>
+            </a:pPr>
+            <a:r>
+              <a:rPr sz="1300" b="0" i="0">
+                <a:solidFill>
+                  <a:srgbClr val="595959"/>
+                </a:solidFill>
+                <a:latin typeface="Times New Roman"/>
+                <a:ea typeface="標楷體"/>
+                <a:ea typeface="標楷體"/>
+              </a:rPr>
+              <a:t>水準健康，但循環內的變化不是生物造成的</a:t>
+            </a:r>
+          </a:p>
+        </p:txBody>
+      </p:sp>
+      <p:sp>
+        <p:nvSpPr>
+          <p:cNvPr id="5" name="Rectangle 4"/>
+          <p:cNvSpPr/>
+          <p:nvPr/>
+        </p:nvSpPr>
+        <p:spPr>
+          <a:xfrm>
+            <a:off x="0" y="6552000"/>
+            <a:ext cx="12193200" cy="306000"/>
+          </a:xfrm>
+          <a:prstGeom prst="rect">
+            <a:avLst/>
+          </a:prstGeom>
+          <a:solidFill>
+            <a:srgbClr val="2E8BC0"/>
+          </a:solidFill>
+          <a:ln>
+            <a:noFill/>
+          </a:ln>
+          <a:effectLst/>
+        </p:spPr>
+        <p:style>
+          <a:lnRef idx="1">
+            <a:schemeClr val="accent1"/>
+          </a:lnRef>
+          <a:fillRef idx="3">
+            <a:schemeClr val="accent1"/>
+          </a:fillRef>
+          <a:effectRef idx="2">
+            <a:schemeClr val="accent1"/>
+          </a:effectRef>
+          <a:fontRef idx="minor">
+            <a:schemeClr val="lt1"/>
+          </a:fontRef>
+        </p:style>
+        <p:txBody>
+          <a:bodyPr rtlCol="0" anchor="ctr"/>
+          <a:lstStyle/>
+          <a:p>
+            <a:pPr algn="ctr"/>
+          </a:p>
+        </p:txBody>
+      </p:sp>
+      <p:sp>
+        <p:nvSpPr>
+          <p:cNvPr id="6" name="TextBox 5"/>
+          <p:cNvSpPr txBox="1"/>
+          <p:nvPr/>
+        </p:nvSpPr>
+        <p:spPr>
+          <a:xfrm>
+            <a:off x="11329200" y="6577200"/>
+            <a:ext cx="576000" cy="216000"/>
+          </a:xfrm>
+          <a:prstGeom prst="rect">
+            <a:avLst/>
+          </a:prstGeom>
+          <a:noFill/>
+        </p:spPr>
+        <p:txBody>
+          <a:bodyPr wrap="square" anchor="t" lIns="0" rIns="0" tIns="0" bIns="0">
+            <a:spAutoFit/>
+          </a:bodyPr>
+          <a:lstStyle/>
+          <a:p>
+            <a:pPr algn="r">
+              <a:spcAft>
+                <a:spcPts val="600"/>
+              </a:spcAft>
+            </a:pPr>
+            <a:r>
+              <a:rPr sz="1100" b="0" i="0">
+                <a:solidFill>
+                  <a:srgbClr val="FFFFFF"/>
+                </a:solidFill>
+                <a:latin typeface="Times New Roman"/>
+                <a:ea typeface="標楷體"/>
+                <a:ea typeface="標楷體"/>
+              </a:rPr>
+              <a:t>10</a:t>
+            </a:r>
+          </a:p>
+        </p:txBody>
+      </p:sp>
+      <p:pic>
+        <p:nvPicPr>
+          <p:cNvPr id="7" name="Picture 6" descr="deck5_orp.png"/>
+          <p:cNvPicPr>
+            <a:picLocks noChangeAspect="1"/>
+          </p:cNvPicPr>
+          <p:nvPr/>
+        </p:nvPicPr>
+        <p:blipFill>
+          <a:blip r:embed="rId2"/>
+          <a:stretch>
+            <a:fillRect/>
+          </a:stretch>
+        </p:blipFill>
+        <p:spPr>
+          <a:xfrm>
+            <a:off x="2856599" y="1152000"/>
+            <a:ext cx="6480000" cy="3165077"/>
+          </a:xfrm>
+          <a:prstGeom prst="rect">
+            <a:avLst/>
+          </a:prstGeom>
+        </p:spPr>
+      </p:pic>
+      <p:sp>
+        <p:nvSpPr>
+          <p:cNvPr id="8" name="TextBox 7"/>
+          <p:cNvSpPr txBox="1"/>
+          <p:nvPr/>
+        </p:nvSpPr>
+        <p:spPr>
+          <a:xfrm>
+            <a:off x="576000" y="4425077"/>
+            <a:ext cx="11041200" cy="1154922"/>
+          </a:xfrm>
+          <a:prstGeom prst="rect">
+            <a:avLst/>
+          </a:prstGeom>
+          <a:noFill/>
+        </p:spPr>
+        <p:txBody>
+          <a:bodyPr wrap="square" anchor="t" lIns="0" rIns="0" tIns="0" bIns="0">
+            <a:spAutoFit/>
+          </a:bodyPr>
+          <a:lstStyle/>
+          <a:p>
+            <a:pPr algn="l">
+              <a:spcAft>
+                <a:spcPts val="500"/>
+              </a:spcAft>
+            </a:pPr>
+            <a:r>
+              <a:rPr sz="1700" b="1" i="0">
+                <a:solidFill>
+                  <a:srgbClr val="000000"/>
+                </a:solidFill>
+                <a:latin typeface="Times New Roman"/>
+                <a:ea typeface="標楷體"/>
+                <a:ea typeface="標楷體"/>
+              </a:rPr>
+              <a:t>水準：</a:t>
+            </a:r>
+            <a:r>
+              <a:rPr sz="1600" b="0" i="0">
+                <a:solidFill>
+                  <a:srgbClr val="000000"/>
+                </a:solidFill>
+                <a:latin typeface="Times New Roman"/>
+                <a:ea typeface="標楷體"/>
+                <a:ea typeface="標楷體"/>
+              </a:rPr>
+              <a:t>−357 </a:t>
+            </a:r>
+            <a:r>
+              <a:rPr sz="1600" b="0" i="0">
+                <a:solidFill>
+                  <a:srgbClr val="000000"/>
+                </a:solidFill>
+                <a:latin typeface="Times New Roman"/>
+                <a:ea typeface="標楷體"/>
+                <a:ea typeface="標楷體"/>
+              </a:rPr>
+              <a:t>mV</a:t>
+            </a:r>
+            <a:r>
+              <a:rPr sz="1600" b="0" i="0">
+                <a:solidFill>
+                  <a:srgbClr val="000000"/>
+                </a:solidFill>
+                <a:latin typeface="Times New Roman"/>
+                <a:ea typeface="標楷體"/>
+                <a:ea typeface="標楷體"/>
+              </a:rPr>
+              <a:t>（對 </a:t>
+            </a:r>
+            <a:r>
+              <a:rPr sz="1600" b="0" i="0">
+                <a:solidFill>
+                  <a:srgbClr val="000000"/>
+                </a:solidFill>
+                <a:latin typeface="Times New Roman"/>
+                <a:ea typeface="標楷體"/>
+                <a:ea typeface="標楷體"/>
+              </a:rPr>
+              <a:t>SHE</a:t>
+            </a:r>
+            <a:r>
+              <a:rPr sz="1600" b="0" i="0">
+                <a:solidFill>
+                  <a:srgbClr val="000000"/>
+                </a:solidFill>
+                <a:latin typeface="Times New Roman"/>
+                <a:ea typeface="標楷體"/>
+                <a:ea typeface="標楷體"/>
+              </a:rPr>
+              <a:t>），文獻最適為 −335.6 ± 29.0 </a:t>
+            </a:r>
+            <a:r>
+              <a:rPr sz="1600" b="0" i="0">
+                <a:solidFill>
+                  <a:srgbClr val="000000"/>
+                </a:solidFill>
+                <a:latin typeface="Times New Roman"/>
+                <a:ea typeface="標楷體"/>
+                <a:ea typeface="標楷體"/>
+              </a:rPr>
+              <a:t>mV</a:t>
+            </a:r>
+            <a:r>
+              <a:rPr sz="1600" b="0" i="0">
+                <a:solidFill>
+                  <a:srgbClr val="000000"/>
+                </a:solidFill>
+                <a:latin typeface="Times New Roman"/>
+                <a:ea typeface="標楷體"/>
+                <a:ea typeface="標楷體"/>
+              </a:rPr>
+              <a:t> — </a:t>
+            </a:r>
+            <a:r>
+              <a:rPr sz="1700" b="1" i="0">
+                <a:solidFill>
+                  <a:srgbClr val="1F6FB5"/>
+                </a:solidFill>
+                <a:latin typeface="Times New Roman"/>
+                <a:ea typeface="標楷體"/>
+                <a:ea typeface="標楷體"/>
+              </a:rPr>
+              <a:t>正落在區間內</a:t>
+            </a:r>
+          </a:p>
+          <a:p>
+            <a:pPr algn="l">
+              <a:spcAft>
+                <a:spcPts val="500"/>
+              </a:spcAft>
+            </a:pPr>
+            <a:r>
+              <a:rPr sz="1700" b="1" i="0">
+                <a:solidFill>
+                  <a:srgbClr val="000000"/>
+                </a:solidFill>
+                <a:latin typeface="Times New Roman"/>
+                <a:ea typeface="標楷體"/>
+                <a:ea typeface="標楷體"/>
+              </a:rPr>
+              <a:t>變化：</a:t>
+            </a:r>
+            <a:r>
+              <a:rPr sz="1600" b="0" i="0">
+                <a:solidFill>
+                  <a:srgbClr val="000000"/>
+                </a:solidFill>
+                <a:latin typeface="Times New Roman"/>
+                <a:ea typeface="標楷體"/>
+                <a:ea typeface="標楷體"/>
+              </a:rPr>
+              <a:t>補氣跳 +37 </a:t>
+            </a:r>
+            <a:r>
+              <a:rPr sz="1600" b="0" i="0">
+                <a:solidFill>
+                  <a:srgbClr val="000000"/>
+                </a:solidFill>
+                <a:latin typeface="Times New Roman"/>
+                <a:ea typeface="標楷體"/>
+                <a:ea typeface="標楷體"/>
+              </a:rPr>
+              <a:t>mV</a:t>
+            </a:r>
+            <a:r>
+              <a:rPr sz="1600" b="0" i="0">
+                <a:solidFill>
+                  <a:srgbClr val="000000"/>
+                </a:solidFill>
+                <a:latin typeface="Times New Roman"/>
+                <a:ea typeface="標楷體"/>
+                <a:ea typeface="標楷體"/>
+              </a:rPr>
+              <a:t>；泵運轉 +3.5 ~ +10.8 </a:t>
+            </a:r>
+            <a:r>
+              <a:rPr sz="1600" b="0" i="0">
+                <a:solidFill>
+                  <a:srgbClr val="000000"/>
+                </a:solidFill>
+                <a:latin typeface="Times New Roman"/>
+                <a:ea typeface="標楷體"/>
+                <a:ea typeface="標楷體"/>
+              </a:rPr>
+              <a:t>mV</a:t>
+            </a:r>
+            <a:r>
+              <a:rPr sz="1600" b="0" i="0">
+                <a:solidFill>
+                  <a:srgbClr val="000000"/>
+                </a:solidFill>
+                <a:latin typeface="Times New Roman"/>
+                <a:ea typeface="標楷體"/>
+                <a:ea typeface="標楷體"/>
+              </a:rPr>
+              <a:t>/分。</a:t>
+            </a:r>
+          </a:p>
+          <a:p>
+            <a:pPr algn="l">
+              <a:spcAft>
+                <a:spcPts val="600"/>
+              </a:spcAft>
+            </a:pPr>
+            <a:r>
+              <a:rPr sz="1600" b="1" i="0">
+                <a:solidFill>
+                  <a:srgbClr val="FF0000"/>
+                </a:solidFill>
+                <a:latin typeface="Times New Roman"/>
+                <a:ea typeface="標楷體"/>
+                <a:ea typeface="標楷體"/>
+              </a:rPr>
+              <a:t>產甲烷必須停止的時段，</a:t>
+            </a:r>
+            <a:r>
+              <a:rPr sz="1600" b="1" i="0">
+                <a:solidFill>
+                  <a:srgbClr val="FF0000"/>
+                </a:solidFill>
+                <a:latin typeface="Times New Roman"/>
+                <a:ea typeface="標楷體"/>
+                <a:ea typeface="標楷體"/>
+              </a:rPr>
+              <a:t>ORP</a:t>
+            </a:r>
+            <a:r>
+              <a:rPr sz="1600" b="1" i="0">
+                <a:solidFill>
+                  <a:srgbClr val="FF0000"/>
+                </a:solidFill>
+                <a:latin typeface="Times New Roman"/>
+                <a:ea typeface="標楷體"/>
+                <a:ea typeface="標楷體"/>
+              </a:rPr>
+              <a:t> 照常變化。</a:t>
+            </a:r>
+          </a:p>
+        </p:txBody>
+      </p:sp>
+      <p:sp>
+        <p:nvSpPr>
+          <p:cNvPr id="9" name="Rectangle 8"/>
+          <p:cNvSpPr/>
+          <p:nvPr/>
+        </p:nvSpPr>
+        <p:spPr>
+          <a:xfrm>
+            <a:off x="432000" y="5562000"/>
+            <a:ext cx="11329200" cy="864000"/>
+          </a:xfrm>
+          <a:prstGeom prst="rect">
+            <a:avLst/>
+          </a:prstGeom>
+          <a:solidFill>
+            <a:srgbClr val="F2F7FC"/>
+          </a:solidFill>
+          <a:ln w="9525">
+            <a:solidFill>
+              <a:srgbClr val="2AB6D8"/>
+            </a:solidFill>
+          </a:ln>
+          <a:effectLst/>
+        </p:spPr>
+        <p:style>
+          <a:lnRef idx="1">
+            <a:schemeClr val="accent1"/>
+          </a:lnRef>
+          <a:fillRef idx="3">
+            <a:schemeClr val="accent1"/>
+          </a:fillRef>
+          <a:effectRef idx="2">
+            <a:schemeClr val="accent1"/>
+          </a:effectRef>
+          <a:fontRef idx="minor">
+            <a:schemeClr val="lt1"/>
+          </a:fontRef>
+        </p:style>
+        <p:txBody>
+          <a:bodyPr rtlCol="0" anchor="ctr"/>
+          <a:lstStyle/>
+          <a:p>
+            <a:pPr algn="ctr"/>
+          </a:p>
+        </p:txBody>
+      </p:sp>
+      <p:sp>
+        <p:nvSpPr>
+          <p:cNvPr id="10" name="TextBox 9"/>
+          <p:cNvSpPr txBox="1"/>
+          <p:nvPr/>
+        </p:nvSpPr>
+        <p:spPr>
+          <a:xfrm>
+            <a:off x="612000" y="5670000"/>
+            <a:ext cx="10969200" cy="648000"/>
+          </a:xfrm>
+          <a:prstGeom prst="rect">
+            <a:avLst/>
+          </a:prstGeom>
+          <a:noFill/>
+        </p:spPr>
+        <p:txBody>
+          <a:bodyPr wrap="square" anchor="ctr" lIns="0" rIns="0" tIns="0" bIns="0">
+            <a:spAutoFit/>
+          </a:bodyPr>
+          <a:lstStyle/>
+          <a:p>
+            <a:pPr algn="l">
+              <a:spcAft>
+                <a:spcPts val="600"/>
+              </a:spcAft>
+            </a:pPr>
+            <a:r>
+              <a:rPr sz="1300" b="0" i="0">
+                <a:solidFill>
+                  <a:srgbClr val="FF0000"/>
+                </a:solidFill>
+                <a:latin typeface="Times New Roman"/>
+                <a:ea typeface="標楷體"/>
+                <a:ea typeface="標楷體"/>
+              </a:rPr>
+              <a:t>文獻將 </a:t>
+            </a:r>
+            <a:r>
+              <a:rPr sz="1300" b="0" i="0">
+                <a:solidFill>
+                  <a:srgbClr val="FF0000"/>
+                </a:solidFill>
+                <a:latin typeface="Times New Roman"/>
+                <a:ea typeface="標楷體"/>
+                <a:ea typeface="標楷體"/>
+              </a:rPr>
+              <a:t>ORP</a:t>
+            </a:r>
+            <a:r>
+              <a:rPr sz="1300" b="0" i="0">
+                <a:solidFill>
+                  <a:srgbClr val="FF0000"/>
+                </a:solidFill>
+                <a:latin typeface="Times New Roman"/>
+                <a:ea typeface="標楷體"/>
+                <a:ea typeface="標楷體"/>
+              </a:rPr>
+              <a:t> 當微生物活性指標，其對象是未外加氫氣的系統；本反應器的氫氣為外部輸入，會直接鉗制電位，該套解讀不能直接移植。</a:t>
             </a:r>
           </a:p>
         </p:txBody>

--- a/docs/decks/簡報_2026-09-21_氫氣流失與壓降歸因.pptx
+++ b/docs/decks/簡報_2026-09-21_氫氣流失與壓降歸因.pptx
@@ -24,8 +24,6 @@
     <p:sldId id="272" r:id="rId23"/>
     <p:sldId id="273" r:id="rId24"/>
     <p:sldId id="274" r:id="rId25"/>
-    <p:sldId id="275" r:id="rId26"/>
-    <p:sldId id="276" r:id="rId27"/>
   </p:sldIdLst>
   <p:sldSz cx="12193200" cy="6858000" type="screen4x3"/>
   <p:notesSz cx="6858000" cy="9144000"/>
@@ -3144,7 +3142,7 @@
                 <a:ea typeface="標楷體"/>
                 <a:ea typeface="標楷體"/>
               </a:rPr>
-              <a:t>反應器的氣體究竟去了哪裡？</a:t>
+              <a:t>壓降歸因與氫氣收支</a:t>
             </a:r>
           </a:p>
         </p:txBody>
@@ -3229,7 +3227,7 @@
                 <a:ea typeface="標楷體"/>
                 <a:ea typeface="標楷體"/>
               </a:rPr>
-              <a:t>壓降歸因與氫氣質量平衡分析｜2026-09-21｜李承育</a:t>
+              <a:t>微正壓循環生物甲烷化反應器｜2026-09-21（10-02 架構修正）｜李承育</a:t>
             </a:r>
           </a:p>
         </p:txBody>
@@ -3327,8 +3325,8 @@
         </p:nvSpPr>
         <p:spPr>
           <a:xfrm>
-            <a:off x="576000" y="1944000"/>
-            <a:ext cx="11041200" cy="2880000"/>
+            <a:off x="576000" y="1800000"/>
+            <a:ext cx="11041200" cy="3240000"/>
           </a:xfrm>
           <a:prstGeom prst="rect">
             <a:avLst/>
@@ -3343,7 +3341,7 @@
           <a:p>
             <a:pPr algn="l">
               <a:spcAft>
-                <a:spcPts val="1400"/>
+                <a:spcPts val="1200"/>
               </a:spcAft>
             </a:pPr>
             <a:r>
@@ -3355,25 +3353,36 @@
                 <a:ea typeface="標楷體"/>
                 <a:ea typeface="標楷體"/>
               </a:rPr>
-              <a:t>一句話的結論：</a:t>
+              <a:t>兩個要分開的問題：</a:t>
             </a:r>
           </a:p>
           <a:p>
             <a:pPr algn="l">
               <a:spcAft>
-                <a:spcPts val="1000"/>
+                <a:spcPts val="800"/>
               </a:spcAft>
             </a:pPr>
             <a:r>
-              <a:rPr sz="2400" b="1" i="0">
-                <a:solidFill>
-                  <a:srgbClr val="FF0000"/>
-                </a:solidFill>
-                <a:latin typeface="Times New Roman"/>
-                <a:ea typeface="標楷體"/>
-                <a:ea typeface="標楷體"/>
-              </a:rPr>
-              <a:t>壓力下降的主要成分，既不是二氧化碳溶解，也不是產甲烷。</a:t>
+              <a:rPr sz="2000" b="1" i="0">
+                <a:solidFill>
+                  <a:srgbClr val="1F6FB5"/>
+                </a:solidFill>
+                <a:latin typeface="Times New Roman"/>
+                <a:ea typeface="標楷體"/>
+                <a:ea typeface="標楷體"/>
+              </a:rPr>
+              <a:t>① 壓力為什麼會掉　</a:t>
+            </a:r>
+            <a:r>
+              <a:rPr sz="1800" b="0" i="0">
+                <a:solidFill>
+                  <a:srgbClr val="000000"/>
+                </a:solidFill>
+                <a:latin typeface="Times New Roman"/>
+                <a:ea typeface="標楷體"/>
+                <a:ea typeface="標楷體"/>
+              </a:rPr>
+              <a:t>氣泵把氣體打回液相（裝置設計如此），再由微生物消耗。</a:t>
             </a:r>
           </a:p>
           <a:p>
@@ -3383,7 +3392,18 @@
               </a:spcAft>
             </a:pPr>
             <a:r>
-              <a:rPr sz="2200" b="1" i="0">
+              <a:rPr sz="1700" b="0" i="0">
+                <a:solidFill>
+                  <a:srgbClr val="595959"/>
+                </a:solidFill>
+                <a:latin typeface="Times New Roman"/>
+                <a:ea typeface="標楷體"/>
+                <a:ea typeface="標楷體"/>
+              </a:rPr>
+              <a:t>　 由甲烷換算，生物解釋 </a:t>
+            </a:r>
+            <a:r>
+              <a:rPr sz="1900" b="1" i="0">
                 <a:solidFill>
                   <a:srgbClr val="000000"/>
                 </a:solidFill>
@@ -3391,10 +3411,61 @@
                 <a:ea typeface="標楷體"/>
                 <a:ea typeface="標楷體"/>
               </a:rPr>
-              <a:t>殘餘氣體的 </a:t>
-            </a:r>
-            <a:r>
-              <a:rPr sz="2200" b="1" i="0">
+              <a:t>39%</a:t>
+            </a:r>
+            <a:r>
+              <a:rPr sz="1700" b="0" i="0">
+                <a:solidFill>
+                  <a:srgbClr val="595959"/>
+                </a:solidFill>
+                <a:latin typeface="Times New Roman"/>
+                <a:ea typeface="標楷體"/>
+                <a:ea typeface="標楷體"/>
+              </a:rPr>
+              <a:t> 的壓降；</a:t>
+            </a:r>
+            <a:r>
+              <a:rPr sz="1900" b="1" i="0">
+                <a:solidFill>
+                  <a:srgbClr val="FF0000"/>
+                </a:solidFill>
+                <a:latin typeface="Times New Roman"/>
+                <a:ea typeface="標楷體"/>
+                <a:ea typeface="標楷體"/>
+              </a:rPr>
+              <a:t>殘餘 61% 尚待解釋</a:t>
+            </a:r>
+            <a:r>
+              <a:rPr sz="1700" b="0" i="0">
+                <a:solidFill>
+                  <a:srgbClr val="595959"/>
+                </a:solidFill>
+                <a:latin typeface="Times New Roman"/>
+                <a:ea typeface="標楷體"/>
+                <a:ea typeface="標楷體"/>
+              </a:rPr>
+              <a:t>。</a:t>
+            </a:r>
+          </a:p>
+          <a:p>
+            <a:pPr algn="l">
+              <a:spcAft>
+                <a:spcPts val="800"/>
+              </a:spcAft>
+            </a:pPr>
+            <a:r>
+              <a:rPr sz="2000" b="1" i="0">
+                <a:solidFill>
+                  <a:srgbClr val="1F6FB5"/>
+                </a:solidFill>
+                <a:latin typeface="Times New Roman"/>
+                <a:ea typeface="標楷體"/>
+                <a:ea typeface="標楷體"/>
+              </a:rPr>
+              <a:t>② 殘餘氣體為何偏離進料比　</a:t>
+            </a:r>
+            <a:r>
+              <a:rPr sz="1800" b="0" i="0">
                 <a:solidFill>
                   <a:srgbClr val="000000"/>
                 </a:solidFill>
@@ -3405,7 +3476,7 @@
               <a:t>CO</a:t>
             </a:r>
             <a:r>
-              <a:rPr sz="2200" b="1" i="0">
+              <a:rPr sz="1800" b="0" i="0">
                 <a:solidFill>
                   <a:srgbClr val="000000"/>
                 </a:solidFill>
@@ -3416,7 +3487,7 @@
               <a:t>₂:</a:t>
             </a:r>
             <a:r>
-              <a:rPr sz="2200" b="1" i="0">
+              <a:rPr sz="1800" b="0" i="0">
                 <a:solidFill>
                   <a:srgbClr val="000000"/>
                 </a:solidFill>
@@ -3427,7 +3498,7 @@
               <a:t>H</a:t>
             </a:r>
             <a:r>
-              <a:rPr sz="2200" b="1" i="0">
+              <a:rPr sz="1800" b="0" i="0">
                 <a:solidFill>
                   <a:srgbClr val="000000"/>
                 </a:solidFill>
@@ -3435,18 +3506,47 @@
                 <a:ea typeface="標楷體"/>
                 <a:ea typeface="標楷體"/>
               </a:rPr>
-              <a:t>₂ 持續偏離進料比，</a:t>
-            </a:r>
-            <a:r>
-              <a:rPr sz="2200" b="1" i="0">
-                <a:solidFill>
-                  <a:srgbClr val="FF0000"/>
-                </a:solidFill>
-                <a:latin typeface="Times New Roman"/>
-                <a:ea typeface="標楷體"/>
-                <a:ea typeface="標楷體"/>
-              </a:rPr>
-              <a:t>但原因尚未定論。</a:t>
+              <a:t>₂ 高於 1:4 達 1.33 – 2.79 倍。</a:t>
+            </a:r>
+          </a:p>
+          <a:p>
+            <a:pPr algn="l">
+              <a:spcAft>
+                <a:spcPts val="1600"/>
+              </a:spcAft>
+            </a:pPr>
+            <a:r>
+              <a:rPr sz="1700" b="0" i="0">
+                <a:solidFill>
+                  <a:srgbClr val="595959"/>
+                </a:solidFill>
+                <a:latin typeface="Times New Roman"/>
+                <a:ea typeface="標楷體"/>
+                <a:ea typeface="標楷體"/>
+              </a:rPr>
+              <a:t>　 溶解**不能**解釋（移除 </a:t>
+            </a:r>
+            <a:r>
+              <a:rPr sz="1700" b="0" i="0">
+                <a:solidFill>
+                  <a:srgbClr val="595959"/>
+                </a:solidFill>
+                <a:latin typeface="Times New Roman"/>
+                <a:ea typeface="標楷體"/>
+                <a:ea typeface="標楷體"/>
+              </a:rPr>
+              <a:t>CO</a:t>
+            </a:r>
+            <a:r>
+              <a:rPr sz="1700" b="0" i="0">
+                <a:solidFill>
+                  <a:srgbClr val="595959"/>
+                </a:solidFill>
+                <a:latin typeface="Times New Roman"/>
+                <a:ea typeface="標楷體"/>
+                <a:ea typeface="標楷體"/>
+              </a:rPr>
+              <a:t>₂ 會讓比值下降，實測是上升），故為獨立的待解問題。</a:t>
             </a:r>
           </a:p>
           <a:p>
@@ -3458,31 +3558,13 @@
             <a:r>
               <a:rPr sz="1800" b="1" i="0">
                 <a:solidFill>
-                  <a:srgbClr val="000000"/>
-                </a:solidFill>
-                <a:latin typeface="Times New Roman"/>
-                <a:ea typeface="標楷體"/>
-                <a:ea typeface="標楷體"/>
-              </a:rPr>
-              <a:t>三個候選解釋目前皆無法排除：</a:t>
-            </a:r>
-          </a:p>
-          <a:p>
-            <a:pPr algn="l">
-              <a:spcAft>
-                <a:spcPts val="1400"/>
-              </a:spcAft>
-            </a:pPr>
-            <a:r>
-              <a:rPr sz="1700" b="0" i="0">
-                <a:solidFill>
-                  <a:srgbClr val="000000"/>
-                </a:solidFill>
-                <a:latin typeface="Times New Roman"/>
-                <a:ea typeface="標楷體"/>
-                <a:ea typeface="標楷體"/>
-              </a:rPr>
-              <a:t>① 氫氣超量流失（洩漏、穿透或其他耗氫反應）　② 碳酸鹽脫氣　③ 排氣本身就會選擇性挑掉氫氣</a:t>
+                  <a:srgbClr val="FF0000"/>
+                </a:solidFill>
+                <a:latin typeface="Times New Roman"/>
+                <a:ea typeface="標楷體"/>
+                <a:ea typeface="標楷體"/>
+              </a:rPr>
+              <a:t>⚠ 本版修正了先前的模型錯誤：</a:t>
             </a:r>
           </a:p>
           <a:p>
@@ -3492,37 +3574,15 @@
               </a:spcAft>
             </a:pPr>
             <a:r>
-              <a:rPr sz="1700" b="0" i="0">
-                <a:solidFill>
-                  <a:srgbClr val="595959"/>
-                </a:solidFill>
-                <a:latin typeface="Times New Roman"/>
-                <a:ea typeface="標楷體"/>
-                <a:ea typeface="標楷體"/>
-              </a:rPr>
-              <a:t>效果量：進料比的 </a:t>
-            </a:r>
-            <a:r>
-              <a:rPr sz="2000" b="1" i="0">
-                <a:solidFill>
-                  <a:srgbClr val="FF0000"/>
-                </a:solidFill>
-                <a:latin typeface="Times New Roman"/>
-                <a:ea typeface="標楷體"/>
-                <a:ea typeface="標楷體"/>
-              </a:rPr>
-              <a:t>1.33 – 2.79 倍</a:t>
-            </a:r>
-            <a:r>
-              <a:rPr sz="1700" b="0" i="0">
-                <a:solidFill>
-                  <a:srgbClr val="595959"/>
-                </a:solidFill>
-                <a:latin typeface="Times New Roman"/>
-                <a:ea typeface="標楷體"/>
-                <a:ea typeface="標楷體"/>
-              </a:rPr>
-              <a:t>（下限為將甲烷讀數全當成零的最壞情況）。</a:t>
+              <a:rPr sz="1600" b="0" i="0">
+                <a:solidFill>
+                  <a:srgbClr val="000000"/>
+                </a:solidFill>
+                <a:latin typeface="Times New Roman"/>
+                <a:ea typeface="標楷體"/>
+                <a:ea typeface="標楷體"/>
+              </a:rPr>
+              <a:t>原先把溶解與生物當成兩條並聯途徑，並據此主張「壓降主因不是溶解」。實際上兩者是串聯——溶解是通道、生物是匯。該主張已撤回。</a:t>
             </a:r>
           </a:p>
         </p:txBody>
@@ -3653,7 +3713,7 @@
                 <a:ea typeface="標楷體"/>
                 <a:ea typeface="標楷體"/>
               </a:rPr>
-              <a:t>₂ = 1:4。★ 2026-09-23 修正：原寫「而是氫氣的超量流失」已改寫——碳酸鹽脫氣在量級上同樣能解釋，且不需要任何洩漏。</a:t>
+              <a:t>₂ = 1:4。氣體讀數僅排氣當下 1~2 分鐘可信，全資料庫 35 筆。</a:t>
             </a:r>
           </a:p>
         </p:txBody>
@@ -3712,7 +3772,7 @@
                 <a:ea typeface="標楷體"/>
                 <a:ea typeface="標楷體"/>
               </a:rPr>
-              <a:t>十一之一、先說明什麼是 </a:t>
+              <a:t>九、</a:t>
             </a:r>
             <a:r>
               <a:rPr sz="2800" b="1" i="0">
@@ -3724,6 +3784,17 @@
                 <a:ea typeface="標楷體"/>
               </a:rPr>
               <a:t>PINN</a:t>
+            </a:r>
+            <a:r>
+              <a:rPr sz="2800" b="1" i="0">
+                <a:solidFill>
+                  <a:srgbClr val="000000"/>
+                </a:solidFill>
+                <a:latin typeface="Times New Roman"/>
+                <a:ea typeface="標楷體"/>
+                <a:ea typeface="標楷體"/>
+              </a:rPr>
+              <a:t> 為什麼撈不回來</a:t>
             </a:r>
           </a:p>
         </p:txBody>
@@ -3808,7 +3879,7 @@
                 <a:ea typeface="標楷體"/>
                 <a:ea typeface="標楷體"/>
               </a:rPr>
-              <a:t>後面兩頁會用到，這裡先把它講清楚</a:t>
+              <a:t>不是網路不夠大，是壓力這一個通道裡沒有這個資訊</a:t>
             </a:r>
           </a:p>
         </p:txBody>
@@ -3898,9 +3969,72 @@
           </a:p>
         </p:txBody>
       </p:sp>
+      <p:sp>
+        <p:nvSpPr>
+          <p:cNvPr id="7" name="TextBox 6"/>
+          <p:cNvSpPr txBox="1"/>
+          <p:nvPr/>
+        </p:nvSpPr>
+        <p:spPr>
+          <a:xfrm>
+            <a:off x="576000" y="1116000"/>
+            <a:ext cx="11041200" cy="1152000"/>
+          </a:xfrm>
+          <a:prstGeom prst="rect">
+            <a:avLst/>
+          </a:prstGeom>
+          <a:noFill/>
+        </p:spPr>
+        <p:txBody>
+          <a:bodyPr wrap="square" anchor="t" lIns="0" rIns="0" tIns="0" bIns="0">
+            <a:spAutoFit/>
+          </a:bodyPr>
+          <a:lstStyle/>
+          <a:p>
+            <a:pPr algn="l">
+              <a:spcAft>
+                <a:spcPts val="600"/>
+              </a:spcAft>
+            </a:pPr>
+            <a:r>
+              <a:rPr sz="1700" b="0" i="0">
+                <a:solidFill>
+                  <a:srgbClr val="000000"/>
+                </a:solidFill>
+                <a:latin typeface="Times New Roman"/>
+                <a:ea typeface="標楷體"/>
+                <a:ea typeface="標楷體"/>
+              </a:rPr>
+              <a:t>氣體變少只有兩個原因：溶進水裡（物理）、被菌吃掉（生物）。壓力計只看得到兩者的</a:t>
+            </a:r>
+            <a:r>
+              <a:rPr sz="1900" b="1" i="0">
+                <a:solidFill>
+                  <a:srgbClr val="FF0000"/>
+                </a:solidFill>
+                <a:latin typeface="Times New Roman"/>
+                <a:ea typeface="標楷體"/>
+                <a:ea typeface="標楷體"/>
+              </a:rPr>
+              <a:t>總和</a:t>
+            </a:r>
+            <a:r>
+              <a:rPr sz="1700" b="0" i="0">
+                <a:solidFill>
+                  <a:srgbClr val="000000"/>
+                </a:solidFill>
+                <a:latin typeface="Times New Roman"/>
+                <a:ea typeface="標楷體"/>
+                <a:ea typeface="標楷體"/>
+              </a:rPr>
+              <a:t>。把生物項算多一點、同時把「平衡壓力」調高一點，兩者剛好互相抵銷——壓力曲線一模一樣。</a:t>
+            </a:r>
+          </a:p>
+        </p:txBody>
+      </p:sp>
       <p:pic>
         <p:nvPicPr>
-          <p:cNvPr id="7" name="Picture 6" descr="deck11_pinn_what.png"/>
+          <p:cNvPr id="8" name="Picture 7" descr="deck8_pinn_corr.png"/>
           <p:cNvPicPr>
             <a:picLocks noChangeAspect="1"/>
           </p:cNvPicPr>
@@ -3914,84 +4048,14 @@
         </p:blipFill>
         <p:spPr>
           <a:xfrm>
-            <a:off x="1596599" y="1152000"/>
-            <a:ext cx="9000000" cy="4277636"/>
+            <a:off x="2136599" y="2340000"/>
+            <a:ext cx="7920000" cy="3743300"/>
           </a:xfrm>
           <a:prstGeom prst="rect">
             <a:avLst/>
           </a:prstGeom>
         </p:spPr>
       </p:pic>
-      <p:sp>
-        <p:nvSpPr>
-          <p:cNvPr id="8" name="TextBox 7"/>
-          <p:cNvSpPr txBox="1"/>
-          <p:nvPr/>
-        </p:nvSpPr>
-        <p:spPr>
-          <a:xfrm>
-            <a:off x="576000" y="5555635"/>
-            <a:ext cx="11041200" cy="852364"/>
-          </a:xfrm>
-          <a:prstGeom prst="rect">
-            <a:avLst/>
-          </a:prstGeom>
-          <a:noFill/>
-        </p:spPr>
-        <p:txBody>
-          <a:bodyPr wrap="square" anchor="t" lIns="0" rIns="0" tIns="0" bIns="0">
-            <a:spAutoFit/>
-          </a:bodyPr>
-          <a:lstStyle/>
-          <a:p>
-            <a:pPr algn="ctr">
-              <a:spcAft>
-                <a:spcPts val="600"/>
-              </a:spcAft>
-            </a:pPr>
-            <a:r>
-              <a:rPr sz="1800" b="1" i="0">
-                <a:solidFill>
-                  <a:srgbClr val="000000"/>
-                </a:solidFill>
-                <a:latin typeface="Times New Roman"/>
-                <a:ea typeface="標楷體"/>
-                <a:ea typeface="標楷體"/>
-              </a:rPr>
-              <a:t>一句話：</a:t>
-            </a:r>
-            <a:r>
-              <a:rPr sz="1800" b="0" i="0">
-                <a:solidFill>
-                  <a:srgbClr val="000000"/>
-                </a:solidFill>
-                <a:latin typeface="Times New Roman"/>
-                <a:ea typeface="標楷體"/>
-                <a:ea typeface="標楷體"/>
-              </a:rPr>
-              <a:t>用神經網路取代「固定公式」，但要求它同時滿足物理定律。</a:t>
-            </a:r>
-          </a:p>
-          <a:p>
-            <a:pPr algn="ctr">
-              <a:spcAft>
-                <a:spcPts val="600"/>
-              </a:spcAft>
-            </a:pPr>
-            <a:r>
-              <a:rPr sz="1600" b="0" i="0">
-                <a:solidFill>
-                  <a:srgbClr val="595959"/>
-                </a:solidFill>
-                <a:latin typeface="Times New Roman"/>
-                <a:ea typeface="標楷體"/>
-                <a:ea typeface="標楷體"/>
-              </a:rPr>
-              <a:t>這樣生物速率就不必被假設成固定值——它本來就會隨氫氣耗盡而改變。</a:t>
-            </a:r>
-          </a:p>
-        </p:txBody>
-      </p:sp>
     </p:spTree>
   </p:cSld>
   <p:clrMapOvr>
@@ -4046,7 +4110,7 @@
                 <a:ea typeface="標楷體"/>
                 <a:ea typeface="標楷體"/>
               </a:rPr>
-              <a:t>十二、試過但不成立的兩個方法</a:t>
+              <a:t>十、同一條壓降，兩種完全不同的答案</a:t>
             </a:r>
           </a:p>
         </p:txBody>
@@ -4131,7 +4195,7 @@
                 <a:ea typeface="標楷體"/>
                 <a:ea typeface="標楷體"/>
               </a:rPr>
-              <a:t>誠實記錄，避免後續重複投入</a:t>
+              <a:t>兩者的擬合誤差幾乎相同，資料無從選擇</a:t>
             </a:r>
           </a:p>
         </p:txBody>
@@ -4221,148 +4285,9 @@
           </a:p>
         </p:txBody>
       </p:sp>
-      <p:sp>
-        <p:nvSpPr>
-          <p:cNvPr id="7" name="TextBox 6"/>
-          <p:cNvSpPr txBox="1"/>
-          <p:nvPr/>
-        </p:nvSpPr>
-        <p:spPr>
-          <a:xfrm>
-            <a:off x="576000" y="1152000"/>
-            <a:ext cx="11041200" cy="2088000"/>
-          </a:xfrm>
-          <a:prstGeom prst="rect">
-            <a:avLst/>
-          </a:prstGeom>
-          <a:noFill/>
-        </p:spPr>
-        <p:txBody>
-          <a:bodyPr wrap="square" anchor="t" lIns="0" rIns="0" tIns="0" bIns="0">
-            <a:spAutoFit/>
-          </a:bodyPr>
-          <a:lstStyle/>
-          <a:p>
-            <a:pPr algn="l">
-              <a:spcAft>
-                <a:spcPts val="800"/>
-              </a:spcAft>
-            </a:pPr>
-            <a:r>
-              <a:rPr sz="2000" b="1" i="0">
-                <a:solidFill>
-                  <a:srgbClr val="000000"/>
-                </a:solidFill>
-                <a:latin typeface="Times New Roman"/>
-                <a:ea typeface="標楷體"/>
-                <a:ea typeface="標楷體"/>
-              </a:rPr>
-              <a:t>① 以「曲率」分離生物與物理</a:t>
-            </a:r>
-          </a:p>
-          <a:p>
-            <a:pPr algn="l">
-              <a:spcAft>
-                <a:spcPts val="1200"/>
-              </a:spcAft>
-            </a:pPr>
-            <a:r>
-              <a:rPr sz="1700" b="0" i="0">
-                <a:solidFill>
-                  <a:srgbClr val="000000"/>
-                </a:solidFill>
-                <a:latin typeface="Times New Roman"/>
-                <a:ea typeface="標楷體"/>
-                <a:ea typeface="標楷體"/>
-              </a:rPr>
-              <a:t>前提是生物速率為定值，但它會隨氫氣耗盡而變動。以已知答案驗證：真實物理份額 0% 時，該方法報出 </a:t>
-            </a:r>
-            <a:r>
-              <a:rPr sz="1900" b="1" i="0">
-                <a:solidFill>
-                  <a:srgbClr val="FF0000"/>
-                </a:solidFill>
-                <a:latin typeface="Times New Roman"/>
-                <a:ea typeface="標楷體"/>
-                <a:ea typeface="標楷體"/>
-              </a:rPr>
-              <a:t>101%</a:t>
-            </a:r>
-            <a:r>
-              <a:rPr sz="1700" b="0" i="0">
-                <a:solidFill>
-                  <a:srgbClr val="000000"/>
-                </a:solidFill>
-                <a:latin typeface="Times New Roman"/>
-                <a:ea typeface="標楷體"/>
-                <a:ea typeface="標楷體"/>
-              </a:rPr>
-              <a:t>。</a:t>
-            </a:r>
-          </a:p>
-          <a:p>
-            <a:pPr algn="l">
-              <a:spcAft>
-                <a:spcPts val="800"/>
-              </a:spcAft>
-            </a:pPr>
-            <a:r>
-              <a:rPr sz="2000" b="1" i="0">
-                <a:solidFill>
-                  <a:srgbClr val="000000"/>
-                </a:solidFill>
-                <a:latin typeface="Times New Roman"/>
-                <a:ea typeface="標楷體"/>
-                <a:ea typeface="標楷體"/>
-              </a:rPr>
-              <a:t>② 以物理資訊神經網路（</a:t>
-            </a:r>
-            <a:r>
-              <a:rPr sz="2000" b="1" i="0">
-                <a:solidFill>
-                  <a:srgbClr val="000000"/>
-                </a:solidFill>
-                <a:latin typeface="Times New Roman"/>
-                <a:ea typeface="標楷體"/>
-                <a:ea typeface="標楷體"/>
-              </a:rPr>
-              <a:t>PINN</a:t>
-            </a:r>
-            <a:r>
-              <a:rPr sz="2000" b="1" i="0">
-                <a:solidFill>
-                  <a:srgbClr val="000000"/>
-                </a:solidFill>
-                <a:latin typeface="Times New Roman"/>
-                <a:ea typeface="標楷體"/>
-                <a:ea typeface="標楷體"/>
-              </a:rPr>
-              <a:t>）反推生物速率</a:t>
-            </a:r>
-          </a:p>
-          <a:p>
-            <a:pPr algn="l">
-              <a:spcAft>
-                <a:spcPts val="600"/>
-              </a:spcAft>
-            </a:pPr>
-            <a:r>
-              <a:rPr sz="1700" b="0" i="0">
-                <a:solidFill>
-                  <a:srgbClr val="000000"/>
-                </a:solidFill>
-                <a:latin typeface="Times New Roman"/>
-                <a:ea typeface="標楷體"/>
-                <a:ea typeface="標楷體"/>
-              </a:rPr>
-              <a:t>方向正確，但方程式本身存在一個恰好抵銷的自由度（見次頁）。</a:t>
-            </a:r>
-          </a:p>
-        </p:txBody>
-      </p:sp>
       <p:pic>
         <p:nvPicPr>
-          <p:cNvPr id="8" name="Picture 7" descr="deck6_pinn.png"/>
+          <p:cNvPr id="7" name="Picture 6" descr="deck7_pinn_features.png"/>
           <p:cNvPicPr>
             <a:picLocks noChangeAspect="1"/>
           </p:cNvPicPr>
@@ -4376,14 +4301,99 @@
         </p:blipFill>
         <p:spPr>
           <a:xfrm>
-            <a:off x="3126599" y="3311999"/>
-            <a:ext cx="5940000" cy="3101591"/>
+            <a:off x="1956599" y="1152000"/>
+            <a:ext cx="8280000" cy="4159528"/>
           </a:xfrm>
           <a:prstGeom prst="rect">
             <a:avLst/>
           </a:prstGeom>
         </p:spPr>
       </p:pic>
+      <p:sp>
+        <p:nvSpPr>
+          <p:cNvPr id="8" name="TextBox 7"/>
+          <p:cNvSpPr txBox="1"/>
+          <p:nvPr/>
+        </p:nvSpPr>
+        <p:spPr>
+          <a:xfrm>
+            <a:off x="576000" y="5455528"/>
+            <a:ext cx="11041200" cy="952471"/>
+          </a:xfrm>
+          <a:prstGeom prst="rect">
+            <a:avLst/>
+          </a:prstGeom>
+          <a:noFill/>
+        </p:spPr>
+        <p:txBody>
+          <a:bodyPr wrap="square" anchor="t" lIns="0" rIns="0" tIns="0" bIns="0">
+            <a:spAutoFit/>
+          </a:bodyPr>
+          <a:lstStyle/>
+          <a:p>
+            <a:pPr algn="l">
+              <a:spcAft>
+                <a:spcPts val="600"/>
+              </a:spcAft>
+            </a:pPr>
+            <a:r>
+              <a:rPr sz="1700" b="0" i="0">
+                <a:solidFill>
+                  <a:srgbClr val="000000"/>
+                </a:solidFill>
+                <a:latin typeface="Times New Roman"/>
+                <a:ea typeface="標楷體"/>
+                <a:ea typeface="標楷體"/>
+              </a:rPr>
+              <a:t>但要講清楚：分不開的是生物速率的</a:t>
+            </a:r>
+            <a:r>
+              <a:rPr sz="1900" b="1" i="0">
+                <a:solidFill>
+                  <a:srgbClr val="FF0000"/>
+                </a:solidFill>
+                <a:latin typeface="Times New Roman"/>
+                <a:ea typeface="標楷體"/>
+                <a:ea typeface="標楷體"/>
+              </a:rPr>
+              <a:t>平均值</a:t>
+            </a:r>
+            <a:r>
+              <a:rPr sz="1700" b="0" i="0">
+                <a:solidFill>
+                  <a:srgbClr val="000000"/>
+                </a:solidFill>
+                <a:latin typeface="Times New Roman"/>
+                <a:ea typeface="標楷體"/>
+                <a:ea typeface="標楷體"/>
+              </a:rPr>
+              <a:t>。它的</a:t>
+            </a:r>
+            <a:r>
+              <a:rPr sz="1900" b="1" i="0">
+                <a:solidFill>
+                  <a:srgbClr val="1F6FB5"/>
+                </a:solidFill>
+                <a:latin typeface="Times New Roman"/>
+                <a:ea typeface="標楷體"/>
+                <a:ea typeface="標楷體"/>
+              </a:rPr>
+              <a:t>時間變化</a:t>
+            </a:r>
+            <a:r>
+              <a:rPr sz="1700" b="0" i="0">
+                <a:solidFill>
+                  <a:srgbClr val="000000"/>
+                </a:solidFill>
+                <a:latin typeface="Times New Roman"/>
+                <a:ea typeface="標楷體"/>
+                <a:ea typeface="標楷體"/>
+              </a:rPr>
+              <a:t>其實還留在資料裡（訊噪比 6.0），只是被「速率不可為負」這個設定連帶壓死了——把平均值另外定住，變化的形狀就回來了（相關 0.97）。</a:t>
+            </a:r>
+          </a:p>
+        </p:txBody>
+      </p:sp>
     </p:spTree>
   </p:cSld>
   <p:clrMapOvr>
@@ -4438,29 +4448,7 @@
                 <a:ea typeface="標楷體"/>
                 <a:ea typeface="標楷體"/>
               </a:rPr>
-              <a:t>十二之一、</a:t>
-            </a:r>
-            <a:r>
-              <a:rPr sz="2800" b="1" i="0">
-                <a:solidFill>
-                  <a:srgbClr val="000000"/>
-                </a:solidFill>
-                <a:latin typeface="Times New Roman"/>
-                <a:ea typeface="標楷體"/>
-                <a:ea typeface="標楷體"/>
-              </a:rPr>
-              <a:t>PINN</a:t>
-            </a:r>
-            <a:r>
-              <a:rPr sz="2800" b="1" i="0">
-                <a:solidFill>
-                  <a:srgbClr val="000000"/>
-                </a:solidFill>
-                <a:latin typeface="Times New Roman"/>
-                <a:ea typeface="標楷體"/>
-                <a:ea typeface="標楷體"/>
-              </a:rPr>
-              <a:t> 為什麼撈不回來</a:t>
+              <a:t>十一、偏離的解釋之一：碳酸鹽脫氣</a:t>
             </a:r>
           </a:p>
         </p:txBody>
@@ -4545,7 +4533,7 @@
                 <a:ea typeface="標楷體"/>
                 <a:ea typeface="標楷體"/>
               </a:rPr>
-              <a:t>不是網路不夠大，是壓力這一個通道裡沒有這個資訊</a:t>
+              <a:t>2026-09-23 補充——這個解釋不需要任何洩漏</a:t>
             </a:r>
           </a:p>
         </p:txBody>
@@ -4635,72 +4623,9 @@
           </a:p>
         </p:txBody>
       </p:sp>
-      <p:sp>
-        <p:nvSpPr>
-          <p:cNvPr id="7" name="TextBox 6"/>
-          <p:cNvSpPr txBox="1"/>
-          <p:nvPr/>
-        </p:nvSpPr>
-        <p:spPr>
-          <a:xfrm>
-            <a:off x="576000" y="1116000"/>
-            <a:ext cx="11041200" cy="1152000"/>
-          </a:xfrm>
-          <a:prstGeom prst="rect">
-            <a:avLst/>
-          </a:prstGeom>
-          <a:noFill/>
-        </p:spPr>
-        <p:txBody>
-          <a:bodyPr wrap="square" anchor="t" lIns="0" rIns="0" tIns="0" bIns="0">
-            <a:spAutoFit/>
-          </a:bodyPr>
-          <a:lstStyle/>
-          <a:p>
-            <a:pPr algn="l">
-              <a:spcAft>
-                <a:spcPts val="600"/>
-              </a:spcAft>
-            </a:pPr>
-            <a:r>
-              <a:rPr sz="1700" b="0" i="0">
-                <a:solidFill>
-                  <a:srgbClr val="000000"/>
-                </a:solidFill>
-                <a:latin typeface="Times New Roman"/>
-                <a:ea typeface="標楷體"/>
-                <a:ea typeface="標楷體"/>
-              </a:rPr>
-              <a:t>氣體變少只有兩個原因：溶進水裡（物理）、被菌吃掉（生物）。壓力計只看得到兩者的</a:t>
-            </a:r>
-            <a:r>
-              <a:rPr sz="1900" b="1" i="0">
-                <a:solidFill>
-                  <a:srgbClr val="FF0000"/>
-                </a:solidFill>
-                <a:latin typeface="Times New Roman"/>
-                <a:ea typeface="標楷體"/>
-                <a:ea typeface="標楷體"/>
-              </a:rPr>
-              <a:t>總和</a:t>
-            </a:r>
-            <a:r>
-              <a:rPr sz="1700" b="0" i="0">
-                <a:solidFill>
-                  <a:srgbClr val="000000"/>
-                </a:solidFill>
-                <a:latin typeface="Times New Roman"/>
-                <a:ea typeface="標楷體"/>
-                <a:ea typeface="標楷體"/>
-              </a:rPr>
-              <a:t>。把生物項算多一點、同時把「平衡壓力」調高一點，兩者剛好互相抵銷——壓力曲線一模一樣。</a:t>
-            </a:r>
-          </a:p>
-        </p:txBody>
-      </p:sp>
       <p:pic>
         <p:nvPicPr>
-          <p:cNvPr id="8" name="Picture 7" descr="deck8_pinn_corr.png"/>
+          <p:cNvPr id="7" name="Picture 6" descr="deck9_carbonate.png"/>
           <p:cNvPicPr>
             <a:picLocks noChangeAspect="1"/>
           </p:cNvPicPr>
@@ -4714,14 +4639,161 @@
         </p:blipFill>
         <p:spPr>
           <a:xfrm>
-            <a:off x="2136599" y="2340000"/>
-            <a:ext cx="7920000" cy="3743300"/>
+            <a:off x="1956599" y="1188000"/>
+            <a:ext cx="8280000" cy="4247456"/>
           </a:xfrm>
           <a:prstGeom prst="rect">
             <a:avLst/>
           </a:prstGeom>
         </p:spPr>
       </p:pic>
+      <p:sp>
+        <p:nvSpPr>
+          <p:cNvPr id="8" name="TextBox 7"/>
+          <p:cNvSpPr txBox="1"/>
+          <p:nvPr/>
+        </p:nvSpPr>
+        <p:spPr>
+          <a:xfrm>
+            <a:off x="576000" y="5561455"/>
+            <a:ext cx="11041200" cy="846544"/>
+          </a:xfrm>
+          <a:prstGeom prst="rect">
+            <a:avLst/>
+          </a:prstGeom>
+          <a:noFill/>
+        </p:spPr>
+        <p:txBody>
+          <a:bodyPr wrap="square" anchor="t" lIns="0" rIns="0" tIns="0" bIns="0">
+            <a:spAutoFit/>
+          </a:bodyPr>
+          <a:lstStyle/>
+          <a:p>
+            <a:pPr algn="ctr">
+              <a:spcAft>
+                <a:spcPts val="600"/>
+              </a:spcAft>
+            </a:pPr>
+            <a:r>
+              <a:rPr sz="1700" b="0" i="0">
+                <a:solidFill>
+                  <a:srgbClr val="000000"/>
+                </a:solidFill>
+                <a:latin typeface="Times New Roman"/>
+                <a:ea typeface="標楷體"/>
+                <a:ea typeface="標楷體"/>
+              </a:rPr>
+              <a:t>量級檢查：只需 </a:t>
+            </a:r>
+            <a:r>
+              <a:rPr sz="2000" b="1" i="0">
+                <a:solidFill>
+                  <a:srgbClr val="FF0000"/>
+                </a:solidFill>
+                <a:latin typeface="Times New Roman"/>
+                <a:ea typeface="標楷體"/>
+                <a:ea typeface="標楷體"/>
+              </a:rPr>
+              <a:t>2.6%</a:t>
+            </a:r>
+            <a:r>
+              <a:rPr sz="1700" b="0" i="0">
+                <a:solidFill>
+                  <a:srgbClr val="000000"/>
+                </a:solidFill>
+                <a:latin typeface="Times New Roman"/>
+                <a:ea typeface="標楷體"/>
+                <a:ea typeface="標楷體"/>
+              </a:rPr>
+              <a:t> 的液相碳庫在排氣瞬間冒出來，就足以解釋觀測到的全部偏離。</a:t>
+            </a:r>
+          </a:p>
+          <a:p>
+            <a:pPr algn="ctr">
+              <a:spcAft>
+                <a:spcPts val="600"/>
+              </a:spcAft>
+            </a:pPr>
+            <a:r>
+              <a:rPr sz="1400" b="0" i="0">
+                <a:solidFill>
+                  <a:srgbClr val="595959"/>
+                </a:solidFill>
+                <a:latin typeface="Times New Roman"/>
+                <a:ea typeface="標楷體"/>
+                <a:ea typeface="標楷體"/>
+              </a:rPr>
+              <a:t>方向性檢驗（壓降越大應脫越多）實測 </a:t>
+            </a:r>
+            <a:r>
+              <a:rPr sz="1400" b="0" i="1">
+                <a:solidFill>
+                  <a:srgbClr val="595959"/>
+                </a:solidFill>
+                <a:latin typeface="Times New Roman"/>
+                <a:ea typeface="標楷體"/>
+                <a:ea typeface="標楷體"/>
+              </a:rPr>
+              <a:t>ρ</a:t>
+            </a:r>
+            <a:r>
+              <a:rPr sz="1400" b="0" i="0">
+                <a:solidFill>
+                  <a:srgbClr val="595959"/>
+                </a:solidFill>
+                <a:latin typeface="Times New Roman"/>
+                <a:ea typeface="標楷體"/>
+                <a:ea typeface="標楷體"/>
+              </a:rPr>
+              <a:t>=+0.21，方向符合，但 35 筆的可偵測門檻是 0.46，樣本不足以分辨；排氣後立刻補氣會降 </a:t>
+            </a:r>
+            <a:r>
+              <a:rPr sz="1400" b="0" i="0">
+                <a:solidFill>
+                  <a:srgbClr val="595959"/>
+                </a:solidFill>
+                <a:latin typeface="Times New Roman"/>
+                <a:ea typeface="標楷體"/>
+                <a:ea typeface="標楷體"/>
+              </a:rPr>
+              <a:t>pH</a:t>
+            </a:r>
+            <a:r>
+              <a:rPr sz="1400" b="0" i="0">
+                <a:solidFill>
+                  <a:srgbClr val="595959"/>
+                </a:solidFill>
+                <a:latin typeface="Times New Roman"/>
+                <a:ea typeface="標楷體"/>
+                <a:ea typeface="標楷體"/>
+              </a:rPr>
+              <a:t>，故 </a:t>
+            </a:r>
+            <a:r>
+              <a:rPr sz="1400" b="0" i="0">
+                <a:solidFill>
+                  <a:srgbClr val="595959"/>
+                </a:solidFill>
+                <a:latin typeface="Times New Roman"/>
+                <a:ea typeface="標楷體"/>
+                <a:ea typeface="標楷體"/>
+              </a:rPr>
+              <a:t>pH</a:t>
+            </a:r>
+            <a:r>
+              <a:rPr sz="1400" b="0" i="0">
+                <a:solidFill>
+                  <a:srgbClr val="595959"/>
+                </a:solidFill>
+                <a:latin typeface="Times New Roman"/>
+                <a:ea typeface="標楷體"/>
+                <a:ea typeface="標楷體"/>
+              </a:rPr>
+              <a:t> 檢驗遭混淆、不可單獨解讀。</a:t>
+            </a:r>
+          </a:p>
+        </p:txBody>
+      </p:sp>
     </p:spTree>
   </p:cSld>
   <p:clrMapOvr>
@@ -4776,7 +4848,51 @@
                 <a:ea typeface="標楷體"/>
                 <a:ea typeface="標楷體"/>
               </a:rPr>
-              <a:t>十二之二、同一條壓降，兩種完全不同的答案</a:t>
+              <a:t>十二、</a:t>
+            </a:r>
+            <a:r>
+              <a:rPr sz="2800" b="1" i="0">
+                <a:solidFill>
+                  <a:srgbClr val="000000"/>
+                </a:solidFill>
+                <a:latin typeface="Times New Roman"/>
+                <a:ea typeface="標楷體"/>
+                <a:ea typeface="標楷體"/>
+              </a:rPr>
+              <a:t>ORP</a:t>
+            </a:r>
+            <a:r>
+              <a:rPr sz="2800" b="1" i="0">
+                <a:solidFill>
+                  <a:srgbClr val="000000"/>
+                </a:solidFill>
+                <a:latin typeface="Times New Roman"/>
+                <a:ea typeface="標楷體"/>
+                <a:ea typeface="標楷體"/>
+              </a:rPr>
+              <a:t> 與 </a:t>
+            </a:r>
+            <a:r>
+              <a:rPr sz="2800" b="1" i="0">
+                <a:solidFill>
+                  <a:srgbClr val="000000"/>
+                </a:solidFill>
+                <a:latin typeface="Times New Roman"/>
+                <a:ea typeface="標楷體"/>
+                <a:ea typeface="標楷體"/>
+              </a:rPr>
+              <a:t>pH</a:t>
+            </a:r>
+            <a:r>
+              <a:rPr sz="2800" b="1" i="0">
+                <a:solidFill>
+                  <a:srgbClr val="000000"/>
+                </a:solidFill>
+                <a:latin typeface="Times New Roman"/>
+                <a:ea typeface="標楷體"/>
+                <a:ea typeface="標楷體"/>
+              </a:rPr>
+              <a:t> 的關聯到底長什麼樣</a:t>
             </a:r>
           </a:p>
         </p:txBody>
@@ -4861,7 +4977,7 @@
                 <a:ea typeface="標楷體"/>
                 <a:ea typeface="標楷體"/>
               </a:rPr>
-              <a:t>兩者的擬合誤差幾乎相同，資料無從選擇</a:t>
+              <a:t>現場觀察到兩者有關聯——資料顯示有，但不是想像的那種</a:t>
             </a:r>
           </a:p>
         </p:txBody>
@@ -4953,7 +5069,7 @@
       </p:sp>
       <p:pic>
         <p:nvPicPr>
-          <p:cNvPr id="7" name="Picture 6" descr="deck7_pinn_features.png"/>
+          <p:cNvPr id="7" name="Picture 6" descr="deck10_coupling.png"/>
           <p:cNvPicPr>
             <a:picLocks noChangeAspect="1"/>
           </p:cNvPicPr>
@@ -4967,8 +5083,8 @@
         </p:blipFill>
         <p:spPr>
           <a:xfrm>
-            <a:off x="1956599" y="1152000"/>
-            <a:ext cx="8280000" cy="4159528"/>
+            <a:off x="1776599" y="1188000"/>
+            <a:ext cx="8640000" cy="3853072"/>
           </a:xfrm>
           <a:prstGeom prst="rect">
             <a:avLst/>
@@ -4983,8 +5099,8 @@
         </p:nvSpPr>
         <p:spPr>
           <a:xfrm>
-            <a:off x="576000" y="5455528"/>
-            <a:ext cx="11041200" cy="952471"/>
+            <a:off x="576000" y="5149072"/>
+            <a:ext cx="11041200" cy="1258928"/>
           </a:xfrm>
           <a:prstGeom prst="rect">
             <a:avLst/>
@@ -5011,7 +5127,95 @@
                 <a:ea typeface="標楷體"/>
                 <a:ea typeface="標楷體"/>
               </a:rPr>
-              <a:t>但要講清楚：分不開的是生物速率的</a:t>
+              <a:t>關聯確實存在，但是「</a:t>
+            </a:r>
+            <a:r>
+              <a:rPr sz="1700" b="0" i="0">
+                <a:solidFill>
+                  <a:srgbClr val="000000"/>
+                </a:solidFill>
+                <a:latin typeface="Times New Roman"/>
+                <a:ea typeface="標楷體"/>
+                <a:ea typeface="標楷體"/>
+              </a:rPr>
+              <a:t>ORP</a:t>
+            </a:r>
+            <a:r>
+              <a:rPr sz="1700" b="0" i="0">
+                <a:solidFill>
+                  <a:srgbClr val="000000"/>
+                </a:solidFill>
+                <a:latin typeface="Times New Roman"/>
+                <a:ea typeface="標楷體"/>
+                <a:ea typeface="標楷體"/>
+              </a:rPr>
+              <a:t> 的水準」對「</a:t>
+            </a:r>
+            <a:r>
+              <a:rPr sz="1700" b="0" i="0">
+                <a:solidFill>
+                  <a:srgbClr val="000000"/>
+                </a:solidFill>
+                <a:latin typeface="Times New Roman"/>
+                <a:ea typeface="標楷體"/>
+                <a:ea typeface="標楷體"/>
+              </a:rPr>
+              <a:t>pH</a:t>
+            </a:r>
+            <a:r>
+              <a:rPr sz="1700" b="0" i="0">
+                <a:solidFill>
+                  <a:srgbClr val="000000"/>
+                </a:solidFill>
+                <a:latin typeface="Times New Roman"/>
+                <a:ea typeface="標楷體"/>
+                <a:ea typeface="標楷體"/>
+              </a:rPr>
+              <a:t> 的變化」；</a:t>
+            </a:r>
+            <a:r>
+              <a:rPr sz="1700" b="0" i="0">
+                <a:solidFill>
+                  <a:srgbClr val="000000"/>
+                </a:solidFill>
+                <a:latin typeface="Times New Roman"/>
+                <a:ea typeface="標楷體"/>
+                <a:ea typeface="標楷體"/>
+              </a:rPr>
+              <a:t>ORP</a:t>
+            </a:r>
+            <a:r>
+              <a:rPr sz="1700" b="0" i="0">
+                <a:solidFill>
+                  <a:srgbClr val="000000"/>
+                </a:solidFill>
+                <a:latin typeface="Times New Roman"/>
+                <a:ea typeface="標楷體"/>
+                <a:ea typeface="標楷體"/>
+              </a:rPr>
+              <a:t> 與 </a:t>
+            </a:r>
+            <a:r>
+              <a:rPr sz="1700" b="0" i="0">
+                <a:solidFill>
+                  <a:srgbClr val="000000"/>
+                </a:solidFill>
+                <a:latin typeface="Times New Roman"/>
+                <a:ea typeface="標楷體"/>
+                <a:ea typeface="標楷體"/>
+              </a:rPr>
+              <a:t>pH</a:t>
+            </a:r>
+            <a:r>
+              <a:rPr sz="1700" b="0" i="0">
+                <a:solidFill>
+                  <a:srgbClr val="000000"/>
+                </a:solidFill>
+                <a:latin typeface="Times New Roman"/>
+                <a:ea typeface="標楷體"/>
+                <a:ea typeface="標楷體"/>
+              </a:rPr>
+              <a:t> 的</a:t>
             </a:r>
             <a:r>
               <a:rPr sz="1900" b="1" i="0">
@@ -5022,7 +5226,7 @@
                 <a:ea typeface="標楷體"/>
                 <a:ea typeface="標楷體"/>
               </a:rPr>
-              <a:t>平均值</a:t>
+              <a:t>變化量之間幾乎無關</a:t>
             </a:r>
             <a:r>
               <a:rPr sz="1700" b="0" i="0">
@@ -5033,29 +5237,7 @@
                 <a:ea typeface="標楷體"/>
                 <a:ea typeface="標楷體"/>
               </a:rPr>
-              <a:t>。它的</a:t>
-            </a:r>
-            <a:r>
-              <a:rPr sz="1900" b="1" i="0">
-                <a:solidFill>
-                  <a:srgbClr val="1F6FB5"/>
-                </a:solidFill>
-                <a:latin typeface="Times New Roman"/>
-                <a:ea typeface="標楷體"/>
-                <a:ea typeface="標楷體"/>
-              </a:rPr>
-              <a:t>時間變化</a:t>
-            </a:r>
-            <a:r>
-              <a:rPr sz="1700" b="0" i="0">
-                <a:solidFill>
-                  <a:srgbClr val="000000"/>
-                </a:solidFill>
-                <a:latin typeface="Times New Roman"/>
-                <a:ea typeface="標楷體"/>
-                <a:ea typeface="標楷體"/>
-              </a:rPr>
-              <a:t>其實還留在資料裡（訊噪比 6.0），只是被「速率不可為負」這個設定連帶壓死了——把平均值另外定住，變化的形狀就回來了（相關 0.97）。</a:t>
+              <a:t>（+0.02）。扣掉時間漂移後這些關聯幾乎不變，故不是時間造成的。</a:t>
             </a:r>
           </a:p>
         </p:txBody>
@@ -5114,7 +5296,7 @@
                 <a:ea typeface="標楷體"/>
                 <a:ea typeface="標楷體"/>
               </a:rPr>
-              <a:t>十二之三、還有另一個解釋：碳酸鹽脫氣</a:t>
+              <a:t>十三、偏離的解釋之二：排氣挑掉氫氣</a:t>
             </a:r>
           </a:p>
         </p:txBody>
@@ -5199,7 +5381,7 @@
                 <a:ea typeface="標楷體"/>
                 <a:ea typeface="標楷體"/>
               </a:rPr>
-              <a:t>2026-09-23 補充——這個解釋不需要任何洩漏</a:t>
+              <a:t>2026-09-27 補充——這也不需要洩漏</a:t>
             </a:r>
           </a:p>
         </p:txBody>
@@ -5291,7 +5473,7 @@
       </p:sp>
       <p:pic>
         <p:nvPicPr>
-          <p:cNvPr id="7" name="Picture 6" descr="deck9_carbonate.png"/>
+          <p:cNvPr id="7" name="Picture 6" descr="deck13_ventloss.png"/>
           <p:cNvPicPr>
             <a:picLocks noChangeAspect="1"/>
           </p:cNvPicPr>
@@ -5305,8 +5487,8 @@
         </p:blipFill>
         <p:spPr>
           <a:xfrm>
-            <a:off x="1956599" y="1188000"/>
-            <a:ext cx="8280000" cy="4247456"/>
+            <a:off x="1596599" y="1152000"/>
+            <a:ext cx="9000000" cy="4958613"/>
           </a:xfrm>
           <a:prstGeom prst="rect">
             <a:avLst/>
@@ -5321,8 +5503,8 @@
         </p:nvSpPr>
         <p:spPr>
           <a:xfrm>
-            <a:off x="576000" y="5561455"/>
-            <a:ext cx="11041200" cy="846544"/>
+            <a:off x="576000" y="6218613"/>
+            <a:ext cx="11041200" cy="189386"/>
           </a:xfrm>
           <a:prstGeom prst="rect">
             <a:avLst/>
@@ -5349,10 +5531,32 @@
                 <a:ea typeface="標楷體"/>
                 <a:ea typeface="標楷體"/>
               </a:rPr>
-              <a:t>量級檢查：只需 </a:t>
-            </a:r>
-            <a:r>
-              <a:rPr sz="2000" b="1" i="0">
+              <a:t>另一項更正：先前偵測到的排氣只有 </a:t>
+            </a:r>
+            <a:r>
+              <a:rPr sz="1900" b="1" i="0">
+                <a:solidFill>
+                  <a:srgbClr val="000000"/>
+                </a:solidFill>
+                <a:latin typeface="Times New Roman"/>
+                <a:ea typeface="標楷體"/>
+                <a:ea typeface="標楷體"/>
+              </a:rPr>
+              <a:t>35 次</a:t>
+            </a:r>
+            <a:r>
+              <a:rPr sz="1700" b="0" i="0">
+                <a:solidFill>
+                  <a:srgbClr val="000000"/>
+                </a:solidFill>
+                <a:latin typeface="Times New Roman"/>
+                <a:ea typeface="標楷體"/>
+                <a:ea typeface="標楷體"/>
+              </a:rPr>
+              <a:t>（限有氣體組成者），以壓力驟降重新偵測後實際有 </a:t>
+            </a:r>
+            <a:r>
+              <a:rPr sz="1900" b="1" i="0">
                 <a:solidFill>
                   <a:srgbClr val="FF0000"/>
                 </a:solidFill>
@@ -5360,7 +5564,7 @@
                 <a:ea typeface="標楷體"/>
                 <a:ea typeface="標楷體"/>
               </a:rPr>
-              <a:t>2.6%</a:t>
+              <a:t>108 次</a:t>
             </a:r>
             <a:r>
               <a:rPr sz="1700" b="0" i="0">
@@ -5371,91 +5575,7 @@
                 <a:ea typeface="標楷體"/>
                 <a:ea typeface="標楷體"/>
               </a:rPr>
-              <a:t> 的液相碳庫在排氣瞬間冒出來，就足以解釋觀測到的全部偏離。</a:t>
-            </a:r>
-          </a:p>
-          <a:p>
-            <a:pPr algn="ctr">
-              <a:spcAft>
-                <a:spcPts val="600"/>
-              </a:spcAft>
-            </a:pPr>
-            <a:r>
-              <a:rPr sz="1400" b="0" i="0">
-                <a:solidFill>
-                  <a:srgbClr val="595959"/>
-                </a:solidFill>
-                <a:latin typeface="Times New Roman"/>
-                <a:ea typeface="標楷體"/>
-                <a:ea typeface="標楷體"/>
-              </a:rPr>
-              <a:t>方向性檢驗（壓降越大應脫越多）實測 </a:t>
-            </a:r>
-            <a:r>
-              <a:rPr sz="1400" b="0" i="1">
-                <a:solidFill>
-                  <a:srgbClr val="595959"/>
-                </a:solidFill>
-                <a:latin typeface="Times New Roman"/>
-                <a:ea typeface="標楷體"/>
-                <a:ea typeface="標楷體"/>
-              </a:rPr>
-              <a:t>ρ</a:t>
-            </a:r>
-            <a:r>
-              <a:rPr sz="1400" b="0" i="0">
-                <a:solidFill>
-                  <a:srgbClr val="595959"/>
-                </a:solidFill>
-                <a:latin typeface="Times New Roman"/>
-                <a:ea typeface="標楷體"/>
-                <a:ea typeface="標楷體"/>
-              </a:rPr>
-              <a:t>=+0.21，方向符合，但 35 筆的可偵測門檻是 0.46，樣本不足以分辨；排氣後立刻補氣會降 </a:t>
-            </a:r>
-            <a:r>
-              <a:rPr sz="1400" b="0" i="0">
-                <a:solidFill>
-                  <a:srgbClr val="595959"/>
-                </a:solidFill>
-                <a:latin typeface="Times New Roman"/>
-                <a:ea typeface="標楷體"/>
-                <a:ea typeface="標楷體"/>
-              </a:rPr>
-              <a:t>pH</a:t>
-            </a:r>
-            <a:r>
-              <a:rPr sz="1400" b="0" i="0">
-                <a:solidFill>
-                  <a:srgbClr val="595959"/>
-                </a:solidFill>
-                <a:latin typeface="Times New Roman"/>
-                <a:ea typeface="標楷體"/>
-                <a:ea typeface="標楷體"/>
-              </a:rPr>
-              <a:t>，故 </a:t>
-            </a:r>
-            <a:r>
-              <a:rPr sz="1400" b="0" i="0">
-                <a:solidFill>
-                  <a:srgbClr val="595959"/>
-                </a:solidFill>
-                <a:latin typeface="Times New Roman"/>
-                <a:ea typeface="標楷體"/>
-                <a:ea typeface="標楷體"/>
-              </a:rPr>
-              <a:t>pH</a:t>
-            </a:r>
-            <a:r>
-              <a:rPr sz="1400" b="0" i="0">
-                <a:solidFill>
-                  <a:srgbClr val="595959"/>
-                </a:solidFill>
-                <a:latin typeface="Times New Roman"/>
-                <a:ea typeface="標楷體"/>
-                <a:ea typeface="標楷體"/>
-              </a:rPr>
-              <a:t> 檢驗遭混淆、不可單獨解讀。</a:t>
+              <a:t>。</a:t>
             </a:r>
           </a:p>
         </p:txBody>
@@ -5514,51 +5634,7 @@
                 <a:ea typeface="標楷體"/>
                 <a:ea typeface="標楷體"/>
               </a:rPr>
-              <a:t>十二之四、</a:t>
-            </a:r>
-            <a:r>
-              <a:rPr sz="2800" b="1" i="0">
-                <a:solidFill>
-                  <a:srgbClr val="000000"/>
-                </a:solidFill>
-                <a:latin typeface="Times New Roman"/>
-                <a:ea typeface="標楷體"/>
-                <a:ea typeface="標楷體"/>
-              </a:rPr>
-              <a:t>ORP</a:t>
-            </a:r>
-            <a:r>
-              <a:rPr sz="2800" b="1" i="0">
-                <a:solidFill>
-                  <a:srgbClr val="000000"/>
-                </a:solidFill>
-                <a:latin typeface="Times New Roman"/>
-                <a:ea typeface="標楷體"/>
-                <a:ea typeface="標楷體"/>
-              </a:rPr>
-              <a:t> 與 </a:t>
-            </a:r>
-            <a:r>
-              <a:rPr sz="2800" b="1" i="0">
-                <a:solidFill>
-                  <a:srgbClr val="000000"/>
-                </a:solidFill>
-                <a:latin typeface="Times New Roman"/>
-                <a:ea typeface="標楷體"/>
-                <a:ea typeface="標楷體"/>
-              </a:rPr>
-              <a:t>pH</a:t>
-            </a:r>
-            <a:r>
-              <a:rPr sz="2800" b="1" i="0">
-                <a:solidFill>
-                  <a:srgbClr val="000000"/>
-                </a:solidFill>
-                <a:latin typeface="Times New Roman"/>
-                <a:ea typeface="標楷體"/>
-                <a:ea typeface="標楷體"/>
-              </a:rPr>
-              <a:t> 的關聯到底長什麼樣</a:t>
+              <a:t>十四、二氧化碳的消耗量</a:t>
             </a:r>
           </a:p>
         </p:txBody>
@@ -5643,7 +5719,7 @@
                 <a:ea typeface="標楷體"/>
                 <a:ea typeface="標楷體"/>
               </a:rPr>
-              <a:t>現場觀察到兩者有關聯——資料顯示有，但不是想像的那種</a:t>
+              <a:t>洪博要求的數字——不需要氫氣感測器就能給</a:t>
             </a:r>
           </a:p>
         </p:txBody>
@@ -5735,7 +5811,7 @@
       </p:sp>
       <p:pic>
         <p:nvPicPr>
-          <p:cNvPr id="7" name="Picture 6" descr="deck10_coupling.png"/>
+          <p:cNvPr id="7" name="Picture 6" descr="deck12_co2.png"/>
           <p:cNvPicPr>
             <a:picLocks noChangeAspect="1"/>
           </p:cNvPicPr>
@@ -5749,8 +5825,8 @@
         </p:blipFill>
         <p:spPr>
           <a:xfrm>
-            <a:off x="1776599" y="1188000"/>
-            <a:ext cx="8640000" cy="3853072"/>
+            <a:off x="1596599" y="1152000"/>
+            <a:ext cx="9000000" cy="4945054"/>
           </a:xfrm>
           <a:prstGeom prst="rect">
             <a:avLst/>
@@ -5765,8 +5841,8 @@
         </p:nvSpPr>
         <p:spPr>
           <a:xfrm>
-            <a:off x="576000" y="5149072"/>
-            <a:ext cx="11041200" cy="1258928"/>
+            <a:off x="576000" y="6205054"/>
+            <a:ext cx="11041200" cy="202946"/>
           </a:xfrm>
           <a:prstGeom prst="rect">
             <a:avLst/>
@@ -5779,7 +5855,7 @@
           </a:bodyPr>
           <a:lstStyle/>
           <a:p>
-            <a:pPr algn="l">
+            <a:pPr algn="ctr">
               <a:spcAft>
                 <a:spcPts val="600"/>
               </a:spcAft>
@@ -5793,7 +5869,18 @@
                 <a:ea typeface="標楷體"/>
                 <a:ea typeface="標楷體"/>
               </a:rPr>
-              <a:t>關聯確實存在，但是「</a:t>
+              <a:t>以總容積 1.8 </a:t>
+            </a:r>
+            <a:r>
+              <a:rPr sz="1700" b="0" i="1">
+                <a:solidFill>
+                  <a:srgbClr val="000000"/>
+                </a:solidFill>
+                <a:latin typeface="Times New Roman"/>
+                <a:ea typeface="標楷體"/>
+                <a:ea typeface="標楷體"/>
+              </a:rPr>
+              <a:t>L</a:t>
             </a:r>
             <a:r>
               <a:rPr sz="1700" b="0" i="0">
@@ -5804,7 +5891,51 @@
                 <a:ea typeface="標楷體"/>
                 <a:ea typeface="標楷體"/>
               </a:rPr>
-              <a:t>ORP</a:t>
+              <a:t>、液相佔一半估算整機：長期 </a:t>
+            </a:r>
+            <a:r>
+              <a:rPr sz="1900" b="1" i="0">
+                <a:solidFill>
+                  <a:srgbClr val="1F6FB5"/>
+                </a:solidFill>
+                <a:latin typeface="Times New Roman"/>
+                <a:ea typeface="標楷體"/>
+                <a:ea typeface="標楷體"/>
+              </a:rPr>
+              <a:t>0.120 </a:t>
+            </a:r>
+            <a:r>
+              <a:rPr sz="1900" b="1" i="0">
+                <a:solidFill>
+                  <a:srgbClr val="1F6FB5"/>
+                </a:solidFill>
+                <a:latin typeface="Times New Roman"/>
+                <a:ea typeface="標楷體"/>
+                <a:ea typeface="標楷體"/>
+              </a:rPr>
+              <a:t>mmol</a:t>
+            </a:r>
+            <a:r>
+              <a:rPr sz="1900" b="1" i="0">
+                <a:solidFill>
+                  <a:srgbClr val="1F6FB5"/>
+                </a:solidFill>
+                <a:latin typeface="Times New Roman"/>
+                <a:ea typeface="標楷體"/>
+                <a:ea typeface="標楷體"/>
+              </a:rPr>
+              <a:t>/</a:t>
+            </a:r>
+            <a:r>
+              <a:rPr sz="1900" b="1" i="0">
+                <a:solidFill>
+                  <a:srgbClr val="1F6FB5"/>
+                </a:solidFill>
+                <a:latin typeface="Times New Roman"/>
+                <a:ea typeface="標楷體"/>
+                <a:ea typeface="標楷體"/>
+              </a:rPr>
+              <a:t>hr</a:t>
             </a:r>
             <a:r>
               <a:rPr sz="1700" b="0" i="0">
@@ -5815,7 +5946,51 @@
                 <a:ea typeface="標楷體"/>
                 <a:ea typeface="標楷體"/>
               </a:rPr>
-              <a:t> 的水準」對「</a:t>
+              <a:t>、初始 </a:t>
+            </a:r>
+            <a:r>
+              <a:rPr sz="1900" b="1" i="0">
+                <a:solidFill>
+                  <a:srgbClr val="FF0000"/>
+                </a:solidFill>
+                <a:latin typeface="Times New Roman"/>
+                <a:ea typeface="標楷體"/>
+                <a:ea typeface="標楷體"/>
+              </a:rPr>
+              <a:t>0.391 </a:t>
+            </a:r>
+            <a:r>
+              <a:rPr sz="1900" b="1" i="0">
+                <a:solidFill>
+                  <a:srgbClr val="FF0000"/>
+                </a:solidFill>
+                <a:latin typeface="Times New Roman"/>
+                <a:ea typeface="標楷體"/>
+                <a:ea typeface="標楷體"/>
+              </a:rPr>
+              <a:t>mmol</a:t>
+            </a:r>
+            <a:r>
+              <a:rPr sz="1900" b="1" i="0">
+                <a:solidFill>
+                  <a:srgbClr val="FF0000"/>
+                </a:solidFill>
+                <a:latin typeface="Times New Roman"/>
+                <a:ea typeface="標楷體"/>
+                <a:ea typeface="標楷體"/>
+              </a:rPr>
+              <a:t>/</a:t>
+            </a:r>
+            <a:r>
+              <a:rPr sz="1900" b="1" i="0">
+                <a:solidFill>
+                  <a:srgbClr val="FF0000"/>
+                </a:solidFill>
+                <a:latin typeface="Times New Roman"/>
+                <a:ea typeface="標楷體"/>
+                <a:ea typeface="標楷體"/>
+              </a:rPr>
+              <a:t>hr</a:t>
             </a:r>
             <a:r>
               <a:rPr sz="1700" b="0" i="0">
@@ -5826,84 +6001,7 @@
                 <a:ea typeface="標楷體"/>
                 <a:ea typeface="標楷體"/>
               </a:rPr>
-              <a:t>pH</a:t>
-            </a:r>
-            <a:r>
-              <a:rPr sz="1700" b="0" i="0">
-                <a:solidFill>
-                  <a:srgbClr val="000000"/>
-                </a:solidFill>
-                <a:latin typeface="Times New Roman"/>
-                <a:ea typeface="標楷體"/>
-                <a:ea typeface="標楷體"/>
-              </a:rPr>
-              <a:t> 的變化」；</a:t>
-            </a:r>
-            <a:r>
-              <a:rPr sz="1700" b="0" i="0">
-                <a:solidFill>
-                  <a:srgbClr val="000000"/>
-                </a:solidFill>
-                <a:latin typeface="Times New Roman"/>
-                <a:ea typeface="標楷體"/>
-                <a:ea typeface="標楷體"/>
-              </a:rPr>
-              <a:t>ORP</a:t>
-            </a:r>
-            <a:r>
-              <a:rPr sz="1700" b="0" i="0">
-                <a:solidFill>
-                  <a:srgbClr val="000000"/>
-                </a:solidFill>
-                <a:latin typeface="Times New Roman"/>
-                <a:ea typeface="標楷體"/>
-                <a:ea typeface="標楷體"/>
-              </a:rPr>
-              <a:t> 與 </a:t>
-            </a:r>
-            <a:r>
-              <a:rPr sz="1700" b="0" i="0">
-                <a:solidFill>
-                  <a:srgbClr val="000000"/>
-                </a:solidFill>
-                <a:latin typeface="Times New Roman"/>
-                <a:ea typeface="標楷體"/>
-                <a:ea typeface="標楷體"/>
-              </a:rPr>
-              <a:t>pH</a:t>
-            </a:r>
-            <a:r>
-              <a:rPr sz="1700" b="0" i="0">
-                <a:solidFill>
-                  <a:srgbClr val="000000"/>
-                </a:solidFill>
-                <a:latin typeface="Times New Roman"/>
-                <a:ea typeface="標楷體"/>
-                <a:ea typeface="標楷體"/>
-              </a:rPr>
-              <a:t> 的</a:t>
-            </a:r>
-            <a:r>
-              <a:rPr sz="1900" b="1" i="0">
-                <a:solidFill>
-                  <a:srgbClr val="FF0000"/>
-                </a:solidFill>
-                <a:latin typeface="Times New Roman"/>
-                <a:ea typeface="標楷體"/>
-                <a:ea typeface="標楷體"/>
-              </a:rPr>
-              <a:t>變化量之間幾乎無關</a:t>
-            </a:r>
-            <a:r>
-              <a:rPr sz="1700" b="0" i="0">
-                <a:solidFill>
-                  <a:srgbClr val="000000"/>
-                </a:solidFill>
-                <a:latin typeface="Times New Roman"/>
-                <a:ea typeface="標楷體"/>
-                <a:ea typeface="標楷體"/>
-              </a:rPr>
-              <a:t>（+0.02）。扣掉時間漂移後這些關聯幾乎不變，故不是時間造成的。</a:t>
+              <a:t>。⚠ 液位確認後即可定案。</a:t>
             </a:r>
           </a:p>
         </p:txBody>
@@ -5962,7 +6060,7 @@
                 <a:ea typeface="標楷體"/>
                 <a:ea typeface="標楷體"/>
               </a:rPr>
-              <a:t>十二之五、第三個解釋：排氣本身就會挑掉氫氣</a:t>
+              <a:t>十五、四個方法都指向同一個方向</a:t>
             </a:r>
           </a:p>
         </p:txBody>
@@ -6047,7 +6145,7 @@
                 <a:ea typeface="標楷體"/>
                 <a:ea typeface="標楷體"/>
               </a:rPr>
-              <a:t>2026-09-27 補充——這也不需要洩漏</a:t>
+              <a:t>論文定版的生物速率可能被低估</a:t>
             </a:r>
           </a:p>
         </p:txBody>
@@ -6139,7 +6237,7 @@
       </p:sp>
       <p:pic>
         <p:nvPicPr>
-          <p:cNvPr id="7" name="Picture 6" descr="deck13_ventloss.png"/>
+          <p:cNvPr id="7" name="Picture 6" descr="deck14_curvature.png"/>
           <p:cNvPicPr>
             <a:picLocks noChangeAspect="1"/>
           </p:cNvPicPr>
@@ -6153,8 +6251,8 @@
         </p:blipFill>
         <p:spPr>
           <a:xfrm>
-            <a:off x="1596599" y="1152000"/>
-            <a:ext cx="9000000" cy="4958613"/>
+            <a:off x="1776599" y="1152000"/>
+            <a:ext cx="8640000" cy="3921815"/>
           </a:xfrm>
           <a:prstGeom prst="rect">
             <a:avLst/>
@@ -6169,8 +6267,8 @@
         </p:nvSpPr>
         <p:spPr>
           <a:xfrm>
-            <a:off x="576000" y="6218613"/>
-            <a:ext cx="11041200" cy="189386"/>
+            <a:off x="576000" y="5181815"/>
+            <a:ext cx="11041200" cy="1226185"/>
           </a:xfrm>
           <a:prstGeom prst="rect">
             <a:avLst/>
@@ -6189,7 +6287,7 @@
               </a:spcAft>
             </a:pPr>
             <a:r>
-              <a:rPr sz="1700" b="0" i="0">
+              <a:rPr sz="1600" b="0" i="0">
                 <a:solidFill>
                   <a:srgbClr val="000000"/>
                 </a:solidFill>
@@ -6197,51 +6295,7 @@
                 <a:ea typeface="標楷體"/>
                 <a:ea typeface="標楷體"/>
               </a:rPr>
-              <a:t>另一項更正：先前偵測到的排氣只有 </a:t>
-            </a:r>
-            <a:r>
-              <a:rPr sz="1900" b="1" i="0">
-                <a:solidFill>
-                  <a:srgbClr val="000000"/>
-                </a:solidFill>
-                <a:latin typeface="Times New Roman"/>
-                <a:ea typeface="標楷體"/>
-                <a:ea typeface="標楷體"/>
-              </a:rPr>
-              <a:t>35 次</a:t>
-            </a:r>
-            <a:r>
-              <a:rPr sz="1700" b="0" i="0">
-                <a:solidFill>
-                  <a:srgbClr val="000000"/>
-                </a:solidFill>
-                <a:latin typeface="Times New Roman"/>
-                <a:ea typeface="標楷體"/>
-                <a:ea typeface="標楷體"/>
-              </a:rPr>
-              <a:t>（限有氣體組成者），以壓力驟降重新偵測後實際有 </a:t>
-            </a:r>
-            <a:r>
-              <a:rPr sz="1900" b="1" i="0">
-                <a:solidFill>
-                  <a:srgbClr val="FF0000"/>
-                </a:solidFill>
-                <a:latin typeface="Times New Roman"/>
-                <a:ea typeface="標楷體"/>
-                <a:ea typeface="標楷體"/>
-              </a:rPr>
-              <a:t>108 次</a:t>
-            </a:r>
-            <a:r>
-              <a:rPr sz="1700" b="0" i="0">
-                <a:solidFill>
-                  <a:srgbClr val="000000"/>
-                </a:solidFill>
-                <a:latin typeface="Times New Roman"/>
-                <a:ea typeface="標楷體"/>
-                <a:ea typeface="標楷體"/>
-              </a:rPr>
-              <a:t>。</a:t>
+              <a:t>曲率配對是本次新做的：用既有資料裡「質傳速率不同」的兩條曲線互相對消，即可解出生物速率，不需要新實驗。</a:t>
             </a:r>
           </a:p>
         </p:txBody>
@@ -6300,7 +6354,7 @@
                 <a:ea typeface="標楷體"/>
                 <a:ea typeface="標楷體"/>
               </a:rPr>
-              <a:t>十二之六、二氧化碳的消耗量</a:t>
+              <a:t>十六、本分析的限制</a:t>
             </a:r>
           </a:p>
         </p:txBody>
@@ -6385,7 +6439,7 @@
                 <a:ea typeface="標楷體"/>
                 <a:ea typeface="標楷體"/>
               </a:rPr>
-              <a:t>洪博要求的數字——不需要氫氣感測器就能給</a:t>
+              <a:t>引用時應一併說明</a:t>
             </a:r>
           </a:p>
         </p:txBody>
@@ -6475,40 +6529,16 @@
           </a:p>
         </p:txBody>
       </p:sp>
-      <p:pic>
-        <p:nvPicPr>
-          <p:cNvPr id="7" name="Picture 6" descr="deck12_co2.png"/>
-          <p:cNvPicPr>
-            <a:picLocks noChangeAspect="1"/>
-          </p:cNvPicPr>
-          <p:nvPr/>
-        </p:nvPicPr>
-        <p:blipFill>
-          <a:blip r:embed="rId2"/>
-          <a:stretch>
-            <a:fillRect/>
-          </a:stretch>
-        </p:blipFill>
-        <p:spPr>
-          <a:xfrm>
-            <a:off x="1596599" y="1152000"/>
-            <a:ext cx="9000000" cy="4945054"/>
-          </a:xfrm>
-          <a:prstGeom prst="rect">
-            <a:avLst/>
-          </a:prstGeom>
-        </p:spPr>
-      </p:pic>
-      <p:sp>
-        <p:nvSpPr>
-          <p:cNvPr id="8" name="TextBox 7"/>
+      <p:sp>
+        <p:nvSpPr>
+          <p:cNvPr id="7" name="TextBox 6"/>
           <p:cNvSpPr txBox="1"/>
           <p:nvPr/>
         </p:nvSpPr>
         <p:spPr>
           <a:xfrm>
-            <a:off x="576000" y="6205054"/>
-            <a:ext cx="11041200" cy="202946"/>
+            <a:off x="576000" y="1440000"/>
+            <a:ext cx="11041200" cy="4320000"/>
           </a:xfrm>
           <a:prstGeom prst="rect">
             <a:avLst/>
@@ -6521,13 +6551,13 @@
           </a:bodyPr>
           <a:lstStyle/>
           <a:p>
-            <a:pPr algn="ctr">
+            <a:pPr algn="l">
               <a:spcAft>
-                <a:spcPts val="600"/>
+                <a:spcPts val="1600"/>
               </a:spcAft>
             </a:pPr>
             <a:r>
-              <a:rPr sz="1700" b="0" i="0">
+              <a:rPr sz="1800" b="0" i="0">
                 <a:solidFill>
                   <a:srgbClr val="000000"/>
                 </a:solidFill>
@@ -6535,10 +6565,17 @@
                 <a:ea typeface="標楷體"/>
                 <a:ea typeface="標楷體"/>
               </a:rPr>
-              <a:t>以總容積 1.8 </a:t>
-            </a:r>
-            <a:r>
-              <a:rPr sz="1700" b="0" i="1">
+              <a:t>• 氫氣濃度為差額推算，非直接量測（分析儀僅量二氧化碳與甲烷）</a:t>
+            </a:r>
+          </a:p>
+          <a:p>
+            <a:pPr algn="l">
+              <a:spcAft>
+                <a:spcPts val="1600"/>
+              </a:spcAft>
+            </a:pPr>
+            <a:r>
+              <a:rPr sz="1800" b="0" i="0">
                 <a:solidFill>
                   <a:srgbClr val="000000"/>
                 </a:solidFill>
@@ -6546,10 +6583,17 @@
                 <a:ea typeface="標楷體"/>
                 <a:ea typeface="標楷體"/>
               </a:rPr>
-              <a:t>L</a:t>
-            </a:r>
-            <a:r>
-              <a:rPr sz="1700" b="0" i="0">
+              <a:t>• 無法區分氫氣流失的機制：洩漏、穿透、或其他耗氫生化反應</a:t>
+            </a:r>
+          </a:p>
+          <a:p>
+            <a:pPr algn="l">
+              <a:spcAft>
+                <a:spcPts val="1600"/>
+              </a:spcAft>
+            </a:pPr>
+            <a:r>
+              <a:rPr sz="1800" b="0" i="0">
                 <a:solidFill>
                   <a:srgbClr val="000000"/>
                 </a:solidFill>
@@ -6557,54 +6601,17 @@
                 <a:ea typeface="標楷體"/>
                 <a:ea typeface="標楷體"/>
               </a:rPr>
-              <a:t>、液相佔一半估算整機：長期 </a:t>
-            </a:r>
-            <a:r>
-              <a:rPr sz="1900" b="1" i="0">
-                <a:solidFill>
-                  <a:srgbClr val="1F6FB5"/>
-                </a:solidFill>
-                <a:latin typeface="Times New Roman"/>
-                <a:ea typeface="標楷體"/>
-                <a:ea typeface="標楷體"/>
-              </a:rPr>
-              <a:t>0.120 </a:t>
-            </a:r>
-            <a:r>
-              <a:rPr sz="1900" b="1" i="0">
-                <a:solidFill>
-                  <a:srgbClr val="1F6FB5"/>
-                </a:solidFill>
-                <a:latin typeface="Times New Roman"/>
-                <a:ea typeface="標楷體"/>
-                <a:ea typeface="標楷體"/>
-              </a:rPr>
-              <a:t>mmol</a:t>
-            </a:r>
-            <a:r>
-              <a:rPr sz="1900" b="1" i="0">
-                <a:solidFill>
-                  <a:srgbClr val="1F6FB5"/>
-                </a:solidFill>
-                <a:latin typeface="Times New Roman"/>
-                <a:ea typeface="標楷體"/>
-                <a:ea typeface="標楷體"/>
-              </a:rPr>
-              <a:t>/</a:t>
-            </a:r>
-            <a:r>
-              <a:rPr sz="1900" b="1" i="0">
-                <a:solidFill>
-                  <a:srgbClr val="1F6FB5"/>
-                </a:solidFill>
-                <a:latin typeface="Times New Roman"/>
-                <a:ea typeface="標楷體"/>
-                <a:ea typeface="標楷體"/>
-              </a:rPr>
-              <a:t>hr</a:t>
-            </a:r>
-            <a:r>
-              <a:rPr sz="1700" b="0" i="0">
+              <a:t>• 僅 35 筆可用的氣體組成資料，平均每 11 天一筆</a:t>
+            </a:r>
+          </a:p>
+          <a:p>
+            <a:pPr algn="l">
+              <a:spcAft>
+                <a:spcPts val="1600"/>
+              </a:spcAft>
+            </a:pPr>
+            <a:r>
+              <a:rPr sz="1800" b="0" i="0">
                 <a:solidFill>
                   <a:srgbClr val="000000"/>
                 </a:solidFill>
@@ -6612,54 +6619,17 @@
                 <a:ea typeface="標楷體"/>
                 <a:ea typeface="標楷體"/>
               </a:rPr>
-              <a:t>、初始 </a:t>
-            </a:r>
-            <a:r>
-              <a:rPr sz="1900" b="1" i="0">
-                <a:solidFill>
-                  <a:srgbClr val="FF0000"/>
-                </a:solidFill>
-                <a:latin typeface="Times New Roman"/>
-                <a:ea typeface="標楷體"/>
-                <a:ea typeface="標楷體"/>
-              </a:rPr>
-              <a:t>0.391 </a:t>
-            </a:r>
-            <a:r>
-              <a:rPr sz="1900" b="1" i="0">
-                <a:solidFill>
-                  <a:srgbClr val="FF0000"/>
-                </a:solidFill>
-                <a:latin typeface="Times New Roman"/>
-                <a:ea typeface="標楷體"/>
-                <a:ea typeface="標楷體"/>
-              </a:rPr>
-              <a:t>mmol</a:t>
-            </a:r>
-            <a:r>
-              <a:rPr sz="1900" b="1" i="0">
-                <a:solidFill>
-                  <a:srgbClr val="FF0000"/>
-                </a:solidFill>
-                <a:latin typeface="Times New Roman"/>
-                <a:ea typeface="標楷體"/>
-                <a:ea typeface="標楷體"/>
-              </a:rPr>
-              <a:t>/</a:t>
-            </a:r>
-            <a:r>
-              <a:rPr sz="1900" b="1" i="0">
-                <a:solidFill>
-                  <a:srgbClr val="FF0000"/>
-                </a:solidFill>
-                <a:latin typeface="Times New Roman"/>
-                <a:ea typeface="標楷體"/>
-                <a:ea typeface="標楷體"/>
-              </a:rPr>
-              <a:t>hr</a:t>
-            </a:r>
-            <a:r>
-              <a:rPr sz="1700" b="0" i="0">
+              <a:t>• 碳源中斷時進料組成同時改變，兩時段的差異不僅限於碳源有無</a:t>
+            </a:r>
+          </a:p>
+          <a:p>
+            <a:pPr algn="l">
+              <a:spcAft>
+                <a:spcPts val="1600"/>
+              </a:spcAft>
+            </a:pPr>
+            <a:r>
+              <a:rPr sz="1800" b="0" i="0">
                 <a:solidFill>
                   <a:srgbClr val="000000"/>
                 </a:solidFill>
@@ -6667,7 +6637,7 @@
                 <a:ea typeface="標楷體"/>
                 <a:ea typeface="標楷體"/>
               </a:rPr>
-              <a:t>。⚠ 液位確認後即可定案。</a:t>
+              <a:t>• 酸鹼值的結果效應量極小（約為儀器刻度的七分之一），屬方向性證據</a:t>
             </a:r>
           </a:p>
         </p:txBody>
@@ -6726,7 +6696,7 @@
                 <a:ea typeface="標楷體"/>
                 <a:ea typeface="標楷體"/>
               </a:rPr>
-              <a:t>十二之七、四個方法都指向同一個方向</a:t>
+              <a:t>十七、建議</a:t>
             </a:r>
           </a:p>
         </p:txBody>
@@ -6811,7 +6781,7 @@
                 <a:ea typeface="標楷體"/>
                 <a:ea typeface="標楷體"/>
               </a:rPr>
-              <a:t>論文定版的生物速率可能被低估</a:t>
+              <a:t>第一項完成前，其餘方向都無法定案</a:t>
             </a:r>
           </a:p>
         </p:txBody>
@@ -6897,1247 +6867,6 @@
                 <a:ea typeface="標楷體"/>
               </a:rPr>
               <a:t>19</a:t>
-            </a:r>
-          </a:p>
-        </p:txBody>
-      </p:sp>
-      <p:pic>
-        <p:nvPicPr>
-          <p:cNvPr id="7" name="Picture 6" descr="deck14_curvature.png"/>
-          <p:cNvPicPr>
-            <a:picLocks noChangeAspect="1"/>
-          </p:cNvPicPr>
-          <p:nvPr/>
-        </p:nvPicPr>
-        <p:blipFill>
-          <a:blip r:embed="rId2"/>
-          <a:stretch>
-            <a:fillRect/>
-          </a:stretch>
-        </p:blipFill>
-        <p:spPr>
-          <a:xfrm>
-            <a:off x="1776599" y="1152000"/>
-            <a:ext cx="8640000" cy="3921815"/>
-          </a:xfrm>
-          <a:prstGeom prst="rect">
-            <a:avLst/>
-          </a:prstGeom>
-        </p:spPr>
-      </p:pic>
-      <p:sp>
-        <p:nvSpPr>
-          <p:cNvPr id="8" name="TextBox 7"/>
-          <p:cNvSpPr txBox="1"/>
-          <p:nvPr/>
-        </p:nvSpPr>
-        <p:spPr>
-          <a:xfrm>
-            <a:off x="576000" y="5181815"/>
-            <a:ext cx="11041200" cy="1226185"/>
-          </a:xfrm>
-          <a:prstGeom prst="rect">
-            <a:avLst/>
-          </a:prstGeom>
-          <a:noFill/>
-        </p:spPr>
-        <p:txBody>
-          <a:bodyPr wrap="square" anchor="t" lIns="0" rIns="0" tIns="0" bIns="0">
-            <a:spAutoFit/>
-          </a:bodyPr>
-          <a:lstStyle/>
-          <a:p>
-            <a:pPr algn="ctr">
-              <a:spcAft>
-                <a:spcPts val="600"/>
-              </a:spcAft>
-            </a:pPr>
-            <a:r>
-              <a:rPr sz="1600" b="0" i="0">
-                <a:solidFill>
-                  <a:srgbClr val="000000"/>
-                </a:solidFill>
-                <a:latin typeface="Times New Roman"/>
-                <a:ea typeface="標楷體"/>
-                <a:ea typeface="標楷體"/>
-              </a:rPr>
-              <a:t>曲率配對是本次新做的：用既有資料裡「質傳速率不同」的兩條曲線互相對消，即可解出生物速率，不需要新實驗。</a:t>
-            </a:r>
-          </a:p>
-        </p:txBody>
-      </p:sp>
-    </p:spTree>
-  </p:cSld>
-  <p:clrMapOvr>
-    <a:masterClrMapping/>
-  </p:clrMapOvr>
-</p:sld>
-</file>
-
-<file path=ppt/slides/slide19.xml><?xml version="1.0" encoding="utf-8"?>
-<p:sld xmlns:a="http://schemas.openxmlformats.org/drawingml/2006/main" xmlns:p="http://schemas.openxmlformats.org/presentationml/2006/main" xmlns:r="http://schemas.openxmlformats.org/officeDocument/2006/relationships">
-  <p:cSld>
-    <p:spTree>
-      <p:nvGrpSpPr>
-        <p:cNvPr id="1" name=""/>
-        <p:cNvGrpSpPr/>
-        <p:nvPr/>
-      </p:nvGrpSpPr>
-      <p:grpSpPr/>
-      <p:sp>
-        <p:nvSpPr>
-          <p:cNvPr id="2" name="TextBox 1"/>
-          <p:cNvSpPr txBox="1"/>
-          <p:nvPr/>
-        </p:nvSpPr>
-        <p:spPr>
-          <a:xfrm>
-            <a:off x="432000" y="180000"/>
-            <a:ext cx="11329200" cy="540000"/>
-          </a:xfrm>
-          <a:prstGeom prst="rect">
-            <a:avLst/>
-          </a:prstGeom>
-          <a:noFill/>
-        </p:spPr>
-        <p:txBody>
-          <a:bodyPr wrap="square" anchor="t" lIns="0" rIns="0" tIns="0" bIns="0">
-            <a:spAutoFit/>
-          </a:bodyPr>
-          <a:lstStyle/>
-          <a:p>
-            <a:pPr algn="ctr">
-              <a:spcAft>
-                <a:spcPts val="0"/>
-              </a:spcAft>
-            </a:pPr>
-            <a:r>
-              <a:rPr sz="2800" b="1" i="0">
-                <a:solidFill>
-                  <a:srgbClr val="000000"/>
-                </a:solidFill>
-                <a:latin typeface="Times New Roman"/>
-                <a:ea typeface="標楷體"/>
-                <a:ea typeface="標楷體"/>
-              </a:rPr>
-              <a:t>十三、本分析的限制</a:t>
-            </a:r>
-          </a:p>
-        </p:txBody>
-      </p:sp>
-      <p:sp>
-        <p:nvSpPr>
-          <p:cNvPr id="3" name="Rectangle 2"/>
-          <p:cNvSpPr/>
-          <p:nvPr/>
-        </p:nvSpPr>
-        <p:spPr>
-          <a:xfrm>
-            <a:off x="216000" y="763200"/>
-            <a:ext cx="11761200" cy="18000"/>
-          </a:xfrm>
-          <a:prstGeom prst="rect">
-            <a:avLst/>
-          </a:prstGeom>
-          <a:solidFill>
-            <a:srgbClr val="2AB6D8"/>
-          </a:solidFill>
-          <a:ln>
-            <a:noFill/>
-          </a:ln>
-          <a:effectLst/>
-        </p:spPr>
-        <p:style>
-          <a:lnRef idx="1">
-            <a:schemeClr val="accent1"/>
-          </a:lnRef>
-          <a:fillRef idx="3">
-            <a:schemeClr val="accent1"/>
-          </a:fillRef>
-          <a:effectRef idx="2">
-            <a:schemeClr val="accent1"/>
-          </a:effectRef>
-          <a:fontRef idx="minor">
-            <a:schemeClr val="lt1"/>
-          </a:fontRef>
-        </p:style>
-        <p:txBody>
-          <a:bodyPr rtlCol="0" anchor="ctr"/>
-          <a:lstStyle/>
-          <a:p>
-            <a:pPr algn="ctr"/>
-          </a:p>
-        </p:txBody>
-      </p:sp>
-      <p:sp>
-        <p:nvSpPr>
-          <p:cNvPr id="4" name="TextBox 3"/>
-          <p:cNvSpPr txBox="1"/>
-          <p:nvPr/>
-        </p:nvSpPr>
-        <p:spPr>
-          <a:xfrm>
-            <a:off x="503999" y="842400"/>
-            <a:ext cx="11185201" cy="251999"/>
-          </a:xfrm>
-          <a:prstGeom prst="rect">
-            <a:avLst/>
-          </a:prstGeom>
-          <a:noFill/>
-        </p:spPr>
-        <p:txBody>
-          <a:bodyPr wrap="square" anchor="t" lIns="0" rIns="0" tIns="0" bIns="0">
-            <a:spAutoFit/>
-          </a:bodyPr>
-          <a:lstStyle/>
-          <a:p>
-            <a:pPr algn="ctr">
-              <a:spcAft>
-                <a:spcPts val="600"/>
-              </a:spcAft>
-            </a:pPr>
-            <a:r>
-              <a:rPr sz="1300" b="0" i="0">
-                <a:solidFill>
-                  <a:srgbClr val="595959"/>
-                </a:solidFill>
-                <a:latin typeface="Times New Roman"/>
-                <a:ea typeface="標楷體"/>
-                <a:ea typeface="標楷體"/>
-              </a:rPr>
-              <a:t>引用時應一併說明</a:t>
-            </a:r>
-          </a:p>
-        </p:txBody>
-      </p:sp>
-      <p:sp>
-        <p:nvSpPr>
-          <p:cNvPr id="5" name="Rectangle 4"/>
-          <p:cNvSpPr/>
-          <p:nvPr/>
-        </p:nvSpPr>
-        <p:spPr>
-          <a:xfrm>
-            <a:off x="0" y="6552000"/>
-            <a:ext cx="12193200" cy="306000"/>
-          </a:xfrm>
-          <a:prstGeom prst="rect">
-            <a:avLst/>
-          </a:prstGeom>
-          <a:solidFill>
-            <a:srgbClr val="2E8BC0"/>
-          </a:solidFill>
-          <a:ln>
-            <a:noFill/>
-          </a:ln>
-          <a:effectLst/>
-        </p:spPr>
-        <p:style>
-          <a:lnRef idx="1">
-            <a:schemeClr val="accent1"/>
-          </a:lnRef>
-          <a:fillRef idx="3">
-            <a:schemeClr val="accent1"/>
-          </a:fillRef>
-          <a:effectRef idx="2">
-            <a:schemeClr val="accent1"/>
-          </a:effectRef>
-          <a:fontRef idx="minor">
-            <a:schemeClr val="lt1"/>
-          </a:fontRef>
-        </p:style>
-        <p:txBody>
-          <a:bodyPr rtlCol="0" anchor="ctr"/>
-          <a:lstStyle/>
-          <a:p>
-            <a:pPr algn="ctr"/>
-          </a:p>
-        </p:txBody>
-      </p:sp>
-      <p:sp>
-        <p:nvSpPr>
-          <p:cNvPr id="6" name="TextBox 5"/>
-          <p:cNvSpPr txBox="1"/>
-          <p:nvPr/>
-        </p:nvSpPr>
-        <p:spPr>
-          <a:xfrm>
-            <a:off x="11329200" y="6577200"/>
-            <a:ext cx="576000" cy="216000"/>
-          </a:xfrm>
-          <a:prstGeom prst="rect">
-            <a:avLst/>
-          </a:prstGeom>
-          <a:noFill/>
-        </p:spPr>
-        <p:txBody>
-          <a:bodyPr wrap="square" anchor="t" lIns="0" rIns="0" tIns="0" bIns="0">
-            <a:spAutoFit/>
-          </a:bodyPr>
-          <a:lstStyle/>
-          <a:p>
-            <a:pPr algn="r">
-              <a:spcAft>
-                <a:spcPts val="600"/>
-              </a:spcAft>
-            </a:pPr>
-            <a:r>
-              <a:rPr sz="1100" b="0" i="0">
-                <a:solidFill>
-                  <a:srgbClr val="FFFFFF"/>
-                </a:solidFill>
-                <a:latin typeface="Times New Roman"/>
-                <a:ea typeface="標楷體"/>
-                <a:ea typeface="標楷體"/>
-              </a:rPr>
-              <a:t>20</a:t>
-            </a:r>
-          </a:p>
-        </p:txBody>
-      </p:sp>
-      <p:sp>
-        <p:nvSpPr>
-          <p:cNvPr id="7" name="TextBox 6"/>
-          <p:cNvSpPr txBox="1"/>
-          <p:nvPr/>
-        </p:nvSpPr>
-        <p:spPr>
-          <a:xfrm>
-            <a:off x="576000" y="1440000"/>
-            <a:ext cx="11041200" cy="4320000"/>
-          </a:xfrm>
-          <a:prstGeom prst="rect">
-            <a:avLst/>
-          </a:prstGeom>
-          <a:noFill/>
-        </p:spPr>
-        <p:txBody>
-          <a:bodyPr wrap="square" anchor="t" lIns="0" rIns="0" tIns="0" bIns="0">
-            <a:spAutoFit/>
-          </a:bodyPr>
-          <a:lstStyle/>
-          <a:p>
-            <a:pPr algn="l">
-              <a:spcAft>
-                <a:spcPts val="1600"/>
-              </a:spcAft>
-            </a:pPr>
-            <a:r>
-              <a:rPr sz="1800" b="0" i="0">
-                <a:solidFill>
-                  <a:srgbClr val="000000"/>
-                </a:solidFill>
-                <a:latin typeface="Times New Roman"/>
-                <a:ea typeface="標楷體"/>
-                <a:ea typeface="標楷體"/>
-              </a:rPr>
-              <a:t>• 氫氣濃度為差額推算，非直接量測（分析儀僅量二氧化碳與甲烷）</a:t>
-            </a:r>
-          </a:p>
-          <a:p>
-            <a:pPr algn="l">
-              <a:spcAft>
-                <a:spcPts val="1600"/>
-              </a:spcAft>
-            </a:pPr>
-            <a:r>
-              <a:rPr sz="1800" b="0" i="0">
-                <a:solidFill>
-                  <a:srgbClr val="000000"/>
-                </a:solidFill>
-                <a:latin typeface="Times New Roman"/>
-                <a:ea typeface="標楷體"/>
-                <a:ea typeface="標楷體"/>
-              </a:rPr>
-              <a:t>• 無法區分氫氣流失的機制：洩漏、穿透、或其他耗氫生化反應</a:t>
-            </a:r>
-          </a:p>
-          <a:p>
-            <a:pPr algn="l">
-              <a:spcAft>
-                <a:spcPts val="1600"/>
-              </a:spcAft>
-            </a:pPr>
-            <a:r>
-              <a:rPr sz="1800" b="0" i="0">
-                <a:solidFill>
-                  <a:srgbClr val="000000"/>
-                </a:solidFill>
-                <a:latin typeface="Times New Roman"/>
-                <a:ea typeface="標楷體"/>
-                <a:ea typeface="標楷體"/>
-              </a:rPr>
-              <a:t>• 僅 35 筆可用的氣體組成資料，平均每 11 天一筆</a:t>
-            </a:r>
-          </a:p>
-          <a:p>
-            <a:pPr algn="l">
-              <a:spcAft>
-                <a:spcPts val="1600"/>
-              </a:spcAft>
-            </a:pPr>
-            <a:r>
-              <a:rPr sz="1800" b="0" i="0">
-                <a:solidFill>
-                  <a:srgbClr val="000000"/>
-                </a:solidFill>
-                <a:latin typeface="Times New Roman"/>
-                <a:ea typeface="標楷體"/>
-                <a:ea typeface="標楷體"/>
-              </a:rPr>
-              <a:t>• 碳源中斷時進料組成同時改變，兩時段的差異不僅限於碳源有無</a:t>
-            </a:r>
-          </a:p>
-          <a:p>
-            <a:pPr algn="l">
-              <a:spcAft>
-                <a:spcPts val="1600"/>
-              </a:spcAft>
-            </a:pPr>
-            <a:r>
-              <a:rPr sz="1800" b="0" i="0">
-                <a:solidFill>
-                  <a:srgbClr val="000000"/>
-                </a:solidFill>
-                <a:latin typeface="Times New Roman"/>
-                <a:ea typeface="標楷體"/>
-                <a:ea typeface="標楷體"/>
-              </a:rPr>
-              <a:t>• 酸鹼值的結果效應量極小（約為儀器刻度的七分之一），屬方向性證據</a:t>
-            </a:r>
-          </a:p>
-        </p:txBody>
-      </p:sp>
-    </p:spTree>
-  </p:cSld>
-  <p:clrMapOvr>
-    <a:masterClrMapping/>
-  </p:clrMapOvr>
-</p:sld>
-</file>
-
-<file path=ppt/slides/slide2.xml><?xml version="1.0" encoding="utf-8"?>
-<p:sld xmlns:a="http://schemas.openxmlformats.org/drawingml/2006/main" xmlns:p="http://schemas.openxmlformats.org/presentationml/2006/main" xmlns:r="http://schemas.openxmlformats.org/officeDocument/2006/relationships">
-  <p:cSld>
-    <p:spTree>
-      <p:nvGrpSpPr>
-        <p:cNvPr id="1" name=""/>
-        <p:cNvGrpSpPr/>
-        <p:nvPr/>
-      </p:nvGrpSpPr>
-      <p:grpSpPr/>
-      <p:sp>
-        <p:nvSpPr>
-          <p:cNvPr id="2" name="TextBox 1"/>
-          <p:cNvSpPr txBox="1"/>
-          <p:nvPr/>
-        </p:nvSpPr>
-        <p:spPr>
-          <a:xfrm>
-            <a:off x="432000" y="180000"/>
-            <a:ext cx="11329200" cy="540000"/>
-          </a:xfrm>
-          <a:prstGeom prst="rect">
-            <a:avLst/>
-          </a:prstGeom>
-          <a:noFill/>
-        </p:spPr>
-        <p:txBody>
-          <a:bodyPr wrap="square" anchor="t" lIns="0" rIns="0" tIns="0" bIns="0">
-            <a:spAutoFit/>
-          </a:bodyPr>
-          <a:lstStyle/>
-          <a:p>
-            <a:pPr algn="ctr">
-              <a:spcAft>
-                <a:spcPts val="0"/>
-              </a:spcAft>
-            </a:pPr>
-            <a:r>
-              <a:rPr sz="2800" b="1" i="0">
-                <a:solidFill>
-                  <a:srgbClr val="000000"/>
-                </a:solidFill>
-                <a:latin typeface="Times New Roman"/>
-                <a:ea typeface="標楷體"/>
-                <a:ea typeface="標楷體"/>
-              </a:rPr>
-              <a:t>三、先前遺留的三個矛盾</a:t>
-            </a:r>
-          </a:p>
-        </p:txBody>
-      </p:sp>
-      <p:sp>
-        <p:nvSpPr>
-          <p:cNvPr id="3" name="Rectangle 2"/>
-          <p:cNvSpPr/>
-          <p:nvPr/>
-        </p:nvSpPr>
-        <p:spPr>
-          <a:xfrm>
-            <a:off x="216000" y="763200"/>
-            <a:ext cx="11761200" cy="18000"/>
-          </a:xfrm>
-          <a:prstGeom prst="rect">
-            <a:avLst/>
-          </a:prstGeom>
-          <a:solidFill>
-            <a:srgbClr val="2AB6D8"/>
-          </a:solidFill>
-          <a:ln>
-            <a:noFill/>
-          </a:ln>
-          <a:effectLst/>
-        </p:spPr>
-        <p:style>
-          <a:lnRef idx="1">
-            <a:schemeClr val="accent1"/>
-          </a:lnRef>
-          <a:fillRef idx="3">
-            <a:schemeClr val="accent1"/>
-          </a:fillRef>
-          <a:effectRef idx="2">
-            <a:schemeClr val="accent1"/>
-          </a:effectRef>
-          <a:fontRef idx="minor">
-            <a:schemeClr val="lt1"/>
-          </a:fontRef>
-        </p:style>
-        <p:txBody>
-          <a:bodyPr rtlCol="0" anchor="ctr"/>
-          <a:lstStyle/>
-          <a:p>
-            <a:pPr algn="ctr"/>
-          </a:p>
-        </p:txBody>
-      </p:sp>
-      <p:sp>
-        <p:nvSpPr>
-          <p:cNvPr id="4" name="TextBox 3"/>
-          <p:cNvSpPr txBox="1"/>
-          <p:nvPr/>
-        </p:nvSpPr>
-        <p:spPr>
-          <a:xfrm>
-            <a:off x="503999" y="842400"/>
-            <a:ext cx="11185201" cy="251999"/>
-          </a:xfrm>
-          <a:prstGeom prst="rect">
-            <a:avLst/>
-          </a:prstGeom>
-          <a:noFill/>
-        </p:spPr>
-        <p:txBody>
-          <a:bodyPr wrap="square" anchor="t" lIns="0" rIns="0" tIns="0" bIns="0">
-            <a:spAutoFit/>
-          </a:bodyPr>
-          <a:lstStyle/>
-          <a:p>
-            <a:pPr algn="ctr">
-              <a:spcAft>
-                <a:spcPts val="600"/>
-              </a:spcAft>
-            </a:pPr>
-            <a:r>
-              <a:rPr sz="1300" b="0" i="0">
-                <a:solidFill>
-                  <a:srgbClr val="595959"/>
-                </a:solidFill>
-                <a:latin typeface="Times New Roman"/>
-                <a:ea typeface="標楷體"/>
-                <a:ea typeface="標楷體"/>
-              </a:rPr>
-              <a:t>這三件事用「產甲烷主導」解釋不通</a:t>
-            </a:r>
-          </a:p>
-        </p:txBody>
-      </p:sp>
-      <p:sp>
-        <p:nvSpPr>
-          <p:cNvPr id="5" name="Rectangle 4"/>
-          <p:cNvSpPr/>
-          <p:nvPr/>
-        </p:nvSpPr>
-        <p:spPr>
-          <a:xfrm>
-            <a:off x="0" y="6552000"/>
-            <a:ext cx="12193200" cy="306000"/>
-          </a:xfrm>
-          <a:prstGeom prst="rect">
-            <a:avLst/>
-          </a:prstGeom>
-          <a:solidFill>
-            <a:srgbClr val="2E8BC0"/>
-          </a:solidFill>
-          <a:ln>
-            <a:noFill/>
-          </a:ln>
-          <a:effectLst/>
-        </p:spPr>
-        <p:style>
-          <a:lnRef idx="1">
-            <a:schemeClr val="accent1"/>
-          </a:lnRef>
-          <a:fillRef idx="3">
-            <a:schemeClr val="accent1"/>
-          </a:fillRef>
-          <a:effectRef idx="2">
-            <a:schemeClr val="accent1"/>
-          </a:effectRef>
-          <a:fontRef idx="minor">
-            <a:schemeClr val="lt1"/>
-          </a:fontRef>
-        </p:style>
-        <p:txBody>
-          <a:bodyPr rtlCol="0" anchor="ctr"/>
-          <a:lstStyle/>
-          <a:p>
-            <a:pPr algn="ctr"/>
-          </a:p>
-        </p:txBody>
-      </p:sp>
-      <p:sp>
-        <p:nvSpPr>
-          <p:cNvPr id="6" name="TextBox 5"/>
-          <p:cNvSpPr txBox="1"/>
-          <p:nvPr/>
-        </p:nvSpPr>
-        <p:spPr>
-          <a:xfrm>
-            <a:off x="11329200" y="6577200"/>
-            <a:ext cx="576000" cy="216000"/>
-          </a:xfrm>
-          <a:prstGeom prst="rect">
-            <a:avLst/>
-          </a:prstGeom>
-          <a:noFill/>
-        </p:spPr>
-        <p:txBody>
-          <a:bodyPr wrap="square" anchor="t" lIns="0" rIns="0" tIns="0" bIns="0">
-            <a:spAutoFit/>
-          </a:bodyPr>
-          <a:lstStyle/>
-          <a:p>
-            <a:pPr algn="r">
-              <a:spcAft>
-                <a:spcPts val="600"/>
-              </a:spcAft>
-            </a:pPr>
-            <a:r>
-              <a:rPr sz="1100" b="0" i="0">
-                <a:solidFill>
-                  <a:srgbClr val="FFFFFF"/>
-                </a:solidFill>
-                <a:latin typeface="Times New Roman"/>
-                <a:ea typeface="標楷體"/>
-                <a:ea typeface="標楷體"/>
-              </a:rPr>
-              <a:t>3</a:t>
-            </a:r>
-          </a:p>
-        </p:txBody>
-      </p:sp>
-      <p:graphicFrame>
-        <p:nvGraphicFramePr>
-          <p:cNvPr id="7" name="Table 6"/>
-          <p:cNvGraphicFramePr>
-            <a:graphicFrameLocks noGrp="1"/>
-          </p:cNvGraphicFramePr>
-          <p:nvPr/>
-        </p:nvGraphicFramePr>
-        <p:xfrm>
-          <a:off x="576000" y="1512000"/>
-          <a:ext cx="11051999" cy="1371600"/>
-        </p:xfrm>
-        <a:graphic>
-          <a:graphicData uri="http://schemas.openxmlformats.org/drawingml/2006/table">
-            <a:tbl>
-              <a:tblPr>
-                <a:tableStyleId>{5C22544A-7EE6-4342-B048-85BDC9FD1C3A}</a:tableStyleId>
-              </a:tblPr>
-              <a:tblGrid>
-                <a:gridCol w="2880000"/>
-                <a:gridCol w="4140000"/>
-                <a:gridCol w="4031999"/>
-              </a:tblGrid>
-              <a:tr h="378000">
-                <a:tc>
-                  <a:txBody>
-                    <a:bodyPr/>
-                    <a:lstStyle/>
-                    <a:p>
-                      <a:pPr algn="ctr"/>
-                      <a:r>
-                        <a:rPr sz="1500" b="1" i="0">
-                          <a:solidFill>
-                            <a:srgbClr val="FFFFFF"/>
-                          </a:solidFill>
-                          <a:latin typeface="Times New Roman"/>
-                          <a:ea typeface="標楷體"/>
-                          <a:ea typeface="標楷體"/>
-                        </a:rPr>
-                        <a:t>觀察</a:t>
-                      </a:r>
-                    </a:p>
-                  </a:txBody>
-                  <a:tcPr marL="72000" marR="72000" anchor="ctr">
-                    <a:solidFill>
-                      <a:srgbClr val="2E9BD6"/>
-                    </a:solidFill>
-                  </a:tcPr>
-                </a:tc>
-                <a:tc>
-                  <a:txBody>
-                    <a:bodyPr/>
-                    <a:lstStyle/>
-                    <a:p>
-                      <a:pPr algn="ctr"/>
-                      <a:r>
-                        <a:rPr sz="1500" b="1" i="0">
-                          <a:solidFill>
-                            <a:srgbClr val="FFFFFF"/>
-                          </a:solidFill>
-                          <a:latin typeface="Times New Roman"/>
-                          <a:ea typeface="標楷體"/>
-                          <a:ea typeface="標楷體"/>
-                        </a:rPr>
-                        <a:t>若壓降主要來自產甲烷，應該看到</a:t>
-                      </a:r>
-                    </a:p>
-                  </a:txBody>
-                  <a:tcPr marL="72000" marR="72000" anchor="ctr">
-                    <a:solidFill>
-                      <a:srgbClr val="2E9BD6"/>
-                    </a:solidFill>
-                  </a:tcPr>
-                </a:tc>
-                <a:tc>
-                  <a:txBody>
-                    <a:bodyPr/>
-                    <a:lstStyle/>
-                    <a:p>
-                      <a:pPr algn="ctr"/>
-                      <a:r>
-                        <a:rPr sz="1500" b="1" i="0">
-                          <a:solidFill>
-                            <a:srgbClr val="FFFFFF"/>
-                          </a:solidFill>
-                          <a:latin typeface="Times New Roman"/>
-                          <a:ea typeface="標楷體"/>
-                          <a:ea typeface="標楷體"/>
-                        </a:rPr>
-                        <a:t>實際看到</a:t>
-                      </a:r>
-                    </a:p>
-                  </a:txBody>
-                  <a:tcPr marL="72000" marR="72000" anchor="ctr">
-                    <a:solidFill>
-                      <a:srgbClr val="2E9BD6"/>
-                    </a:solidFill>
-                  </a:tcPr>
-                </a:tc>
-              </a:tr>
-              <a:tr h="331200">
-                <a:tc>
-                  <a:txBody>
-                    <a:bodyPr/>
-                    <a:lstStyle/>
-                    <a:p>
-                      <a:pPr algn="ctr"/>
-                      <a:r>
-                        <a:rPr sz="1500" b="0" i="0">
-                          <a:solidFill>
-                            <a:srgbClr val="000000"/>
-                          </a:solidFill>
-                          <a:latin typeface="Times New Roman"/>
-                          <a:ea typeface="標楷體"/>
-                          <a:ea typeface="標楷體"/>
-                        </a:rPr>
-                        <a:t>切斷碳源（二氧化碳）後</a:t>
-                      </a:r>
-                    </a:p>
-                  </a:txBody>
-                  <a:tcPr marL="72000" marR="72000" anchor="ctr">
-                    <a:solidFill>
-                      <a:srgbClr val="DBE9F6"/>
-                    </a:solidFill>
-                  </a:tcPr>
-                </a:tc>
-                <a:tc>
-                  <a:txBody>
-                    <a:bodyPr/>
-                    <a:lstStyle/>
-                    <a:p>
-                      <a:pPr algn="ctr"/>
-                      <a:r>
-                        <a:rPr sz="1500" b="0" i="0">
-                          <a:solidFill>
-                            <a:srgbClr val="000000"/>
-                          </a:solidFill>
-                          <a:latin typeface="Times New Roman"/>
-                          <a:ea typeface="標楷體"/>
-                          <a:ea typeface="標楷體"/>
-                        </a:rPr>
-                        <a:t>壓降速率應大幅下降</a:t>
-                      </a:r>
-                    </a:p>
-                  </a:txBody>
-                  <a:tcPr marL="72000" marR="72000" anchor="ctr">
-                    <a:solidFill>
-                      <a:srgbClr val="DBE9F6"/>
-                    </a:solidFill>
-                  </a:tcPr>
-                </a:tc>
-                <a:tc>
-                  <a:txBody>
-                    <a:bodyPr/>
-                    <a:lstStyle/>
-                    <a:p>
-                      <a:pPr algn="ctr"/>
-                      <a:r>
-                        <a:rPr sz="1500" b="0" i="0">
-                          <a:solidFill>
-                            <a:srgbClr val="000000"/>
-                          </a:solidFill>
-                          <a:latin typeface="Times New Roman"/>
-                          <a:ea typeface="標楷體"/>
-                          <a:ea typeface="標楷體"/>
-                        </a:rPr>
-                        <a:t>幾乎沒變（0.0347 → 0.0367）</a:t>
-                      </a:r>
-                    </a:p>
-                  </a:txBody>
-                  <a:tcPr marL="72000" marR="72000" anchor="ctr">
-                    <a:solidFill>
-                      <a:srgbClr val="DBE9F6"/>
-                    </a:solidFill>
-                  </a:tcPr>
-                </a:tc>
-              </a:tr>
-              <a:tr h="331200">
-                <a:tc>
-                  <a:txBody>
-                    <a:bodyPr/>
-                    <a:lstStyle/>
-                    <a:p>
-                      <a:pPr algn="ctr"/>
-                      <a:r>
-                        <a:rPr sz="1500" b="0" i="0">
-                          <a:solidFill>
-                            <a:srgbClr val="000000"/>
-                          </a:solidFill>
-                          <a:latin typeface="Times New Roman"/>
-                          <a:ea typeface="標楷體"/>
-                          <a:ea typeface="標楷體"/>
-                        </a:rPr>
-                        <a:t>氣體總收支</a:t>
-                      </a:r>
-                    </a:p>
-                  </a:txBody>
-                  <a:tcPr marL="72000" marR="72000" anchor="ctr">
-                    <a:solidFill>
-                      <a:srgbClr val="EAF2FA"/>
-                    </a:solidFill>
-                  </a:tcPr>
-                </a:tc>
-                <a:tc>
-                  <a:txBody>
-                    <a:bodyPr/>
-                    <a:lstStyle/>
-                    <a:p>
-                      <a:pPr algn="ctr"/>
-                      <a:r>
-                        <a:rPr sz="1500" b="0" i="0">
-                          <a:solidFill>
-                            <a:srgbClr val="000000"/>
-                          </a:solidFill>
-                          <a:latin typeface="Times New Roman"/>
-                          <a:ea typeface="標楷體"/>
-                          <a:ea typeface="標楷體"/>
-                        </a:rPr>
-                        <a:t>消失的氣體應對應到甲烷產量</a:t>
-                      </a:r>
-                    </a:p>
-                  </a:txBody>
-                  <a:tcPr marL="72000" marR="72000" anchor="ctr">
-                    <a:solidFill>
-                      <a:srgbClr val="EAF2FA"/>
-                    </a:solidFill>
-                  </a:tcPr>
-                </a:tc>
-                <a:tc>
-                  <a:txBody>
-                    <a:bodyPr/>
-                    <a:lstStyle/>
-                    <a:p>
-                      <a:pPr algn="ctr"/>
-                      <a:r>
-                        <a:rPr sz="1500" b="0" i="0">
-                          <a:solidFill>
-                            <a:srgbClr val="000000"/>
-                          </a:solidFill>
-                          <a:latin typeface="Times New Roman"/>
-                          <a:ea typeface="標楷體"/>
-                          <a:ea typeface="標楷體"/>
-                        </a:rPr>
-                        <a:t>有一大段對不起來</a:t>
-                      </a:r>
-                    </a:p>
-                  </a:txBody>
-                  <a:tcPr marL="72000" marR="72000" anchor="ctr">
-                    <a:solidFill>
-                      <a:srgbClr val="EAF2FA"/>
-                    </a:solidFill>
-                  </a:tcPr>
-                </a:tc>
-              </a:tr>
-              <a:tr h="331200">
-                <a:tc>
-                  <a:txBody>
-                    <a:bodyPr/>
-                    <a:lstStyle/>
-                    <a:p>
-                      <a:pPr algn="ctr"/>
-                      <a:r>
-                        <a:rPr sz="1500" b="0" i="0">
-                          <a:solidFill>
-                            <a:srgbClr val="000000"/>
-                          </a:solidFill>
-                          <a:latin typeface="Times New Roman"/>
-                          <a:ea typeface="標楷體"/>
-                          <a:ea typeface="標楷體"/>
-                        </a:rPr>
-                        <a:t>壓降曲線形狀</a:t>
-                      </a:r>
-                    </a:p>
-                  </a:txBody>
-                  <a:tcPr marL="72000" marR="72000" anchor="ctr">
-                    <a:solidFill>
-                      <a:srgbClr val="DBE9F6"/>
-                    </a:solidFill>
-                  </a:tcPr>
-                </a:tc>
-                <a:tc>
-                  <a:txBody>
-                    <a:bodyPr/>
-                    <a:lstStyle/>
-                    <a:p>
-                      <a:pPr algn="ctr"/>
-                      <a:r>
-                        <a:rPr sz="1500" b="0" i="0">
-                          <a:solidFill>
-                            <a:srgbClr val="000000"/>
-                          </a:solidFill>
-                          <a:latin typeface="Times New Roman"/>
-                          <a:ea typeface="標楷體"/>
-                          <a:ea typeface="標楷體"/>
-                        </a:rPr>
-                        <a:t>應呈明顯彎曲（溶解的特徵）</a:t>
-                      </a:r>
-                    </a:p>
-                  </a:txBody>
-                  <a:tcPr marL="72000" marR="72000" anchor="ctr">
-                    <a:solidFill>
-                      <a:srgbClr val="DBE9F6"/>
-                    </a:solidFill>
-                  </a:tcPr>
-                </a:tc>
-                <a:tc>
-                  <a:txBody>
-                    <a:bodyPr/>
-                    <a:lstStyle/>
-                    <a:p>
-                      <a:pPr algn="ctr"/>
-                      <a:r>
-                        <a:rPr sz="1500" b="0" i="0">
-                          <a:solidFill>
-                            <a:srgbClr val="000000"/>
-                          </a:solidFill>
-                          <a:latin typeface="Times New Roman"/>
-                          <a:ea typeface="標楷體"/>
-                          <a:ea typeface="標楷體"/>
-                        </a:rPr>
-                        <a:t>91% 幾乎是直線</a:t>
-                      </a:r>
-                    </a:p>
-                  </a:txBody>
-                  <a:tcPr marL="72000" marR="72000" anchor="ctr">
-                    <a:solidFill>
-                      <a:srgbClr val="DBE9F6"/>
-                    </a:solidFill>
-                  </a:tcPr>
-                </a:tc>
-              </a:tr>
-            </a:tbl>
-          </a:graphicData>
-        </a:graphic>
-      </p:graphicFrame>
-      <p:sp>
-        <p:nvSpPr>
-          <p:cNvPr id="8" name="TextBox 7"/>
-          <p:cNvSpPr txBox="1"/>
-          <p:nvPr/>
-        </p:nvSpPr>
-        <p:spPr>
-          <a:xfrm>
-            <a:off x="576000" y="3816000"/>
-            <a:ext cx="11041200" cy="2160000"/>
-          </a:xfrm>
-          <a:prstGeom prst="rect">
-            <a:avLst/>
-          </a:prstGeom>
-          <a:noFill/>
-        </p:spPr>
-        <p:txBody>
-          <a:bodyPr wrap="square" anchor="t" lIns="0" rIns="0" tIns="0" bIns="0">
-            <a:spAutoFit/>
-          </a:bodyPr>
-          <a:lstStyle/>
-          <a:p>
-            <a:pPr algn="l">
-              <a:spcAft>
-                <a:spcPts val="600"/>
-              </a:spcAft>
-            </a:pPr>
-            <a:r>
-              <a:rPr sz="1900" b="1" i="0">
-                <a:solidFill>
-                  <a:srgbClr val="000000"/>
-                </a:solidFill>
-                <a:latin typeface="Times New Roman"/>
-                <a:ea typeface="標楷體"/>
-                <a:ea typeface="標楷體"/>
-              </a:rPr>
-              <a:t>本次分析從解開這三個矛盾出發。結果是：它們有同一個答案。</a:t>
-            </a:r>
-          </a:p>
-        </p:txBody>
-      </p:sp>
-    </p:spTree>
-  </p:cSld>
-  <p:clrMapOvr>
-    <a:masterClrMapping/>
-  </p:clrMapOvr>
-</p:sld>
-</file>
-
-<file path=ppt/slides/slide20.xml><?xml version="1.0" encoding="utf-8"?>
-<p:sld xmlns:a="http://schemas.openxmlformats.org/drawingml/2006/main" xmlns:p="http://schemas.openxmlformats.org/presentationml/2006/main" xmlns:r="http://schemas.openxmlformats.org/officeDocument/2006/relationships">
-  <p:cSld>
-    <p:spTree>
-      <p:nvGrpSpPr>
-        <p:cNvPr id="1" name=""/>
-        <p:cNvGrpSpPr/>
-        <p:nvPr/>
-      </p:nvGrpSpPr>
-      <p:grpSpPr/>
-      <p:sp>
-        <p:nvSpPr>
-          <p:cNvPr id="2" name="TextBox 1"/>
-          <p:cNvSpPr txBox="1"/>
-          <p:nvPr/>
-        </p:nvSpPr>
-        <p:spPr>
-          <a:xfrm>
-            <a:off x="432000" y="180000"/>
-            <a:ext cx="11329200" cy="540000"/>
-          </a:xfrm>
-          <a:prstGeom prst="rect">
-            <a:avLst/>
-          </a:prstGeom>
-          <a:noFill/>
-        </p:spPr>
-        <p:txBody>
-          <a:bodyPr wrap="square" anchor="t" lIns="0" rIns="0" tIns="0" bIns="0">
-            <a:spAutoFit/>
-          </a:bodyPr>
-          <a:lstStyle/>
-          <a:p>
-            <a:pPr algn="ctr">
-              <a:spcAft>
-                <a:spcPts val="0"/>
-              </a:spcAft>
-            </a:pPr>
-            <a:r>
-              <a:rPr sz="2800" b="1" i="0">
-                <a:solidFill>
-                  <a:srgbClr val="000000"/>
-                </a:solidFill>
-                <a:latin typeface="Times New Roman"/>
-                <a:ea typeface="標楷體"/>
-                <a:ea typeface="標楷體"/>
-              </a:rPr>
-              <a:t>十四、建議</a:t>
-            </a:r>
-          </a:p>
-        </p:txBody>
-      </p:sp>
-      <p:sp>
-        <p:nvSpPr>
-          <p:cNvPr id="3" name="Rectangle 2"/>
-          <p:cNvSpPr/>
-          <p:nvPr/>
-        </p:nvSpPr>
-        <p:spPr>
-          <a:xfrm>
-            <a:off x="216000" y="763200"/>
-            <a:ext cx="11761200" cy="18000"/>
-          </a:xfrm>
-          <a:prstGeom prst="rect">
-            <a:avLst/>
-          </a:prstGeom>
-          <a:solidFill>
-            <a:srgbClr val="2AB6D8"/>
-          </a:solidFill>
-          <a:ln>
-            <a:noFill/>
-          </a:ln>
-          <a:effectLst/>
-        </p:spPr>
-        <p:style>
-          <a:lnRef idx="1">
-            <a:schemeClr val="accent1"/>
-          </a:lnRef>
-          <a:fillRef idx="3">
-            <a:schemeClr val="accent1"/>
-          </a:fillRef>
-          <a:effectRef idx="2">
-            <a:schemeClr val="accent1"/>
-          </a:effectRef>
-          <a:fontRef idx="minor">
-            <a:schemeClr val="lt1"/>
-          </a:fontRef>
-        </p:style>
-        <p:txBody>
-          <a:bodyPr rtlCol="0" anchor="ctr"/>
-          <a:lstStyle/>
-          <a:p>
-            <a:pPr algn="ctr"/>
-          </a:p>
-        </p:txBody>
-      </p:sp>
-      <p:sp>
-        <p:nvSpPr>
-          <p:cNvPr id="4" name="TextBox 3"/>
-          <p:cNvSpPr txBox="1"/>
-          <p:nvPr/>
-        </p:nvSpPr>
-        <p:spPr>
-          <a:xfrm>
-            <a:off x="503999" y="842400"/>
-            <a:ext cx="11185201" cy="251999"/>
-          </a:xfrm>
-          <a:prstGeom prst="rect">
-            <a:avLst/>
-          </a:prstGeom>
-          <a:noFill/>
-        </p:spPr>
-        <p:txBody>
-          <a:bodyPr wrap="square" anchor="t" lIns="0" rIns="0" tIns="0" bIns="0">
-            <a:spAutoFit/>
-          </a:bodyPr>
-          <a:lstStyle/>
-          <a:p>
-            <a:pPr algn="ctr">
-              <a:spcAft>
-                <a:spcPts val="600"/>
-              </a:spcAft>
-            </a:pPr>
-            <a:r>
-              <a:rPr sz="1300" b="0" i="0">
-                <a:solidFill>
-                  <a:srgbClr val="595959"/>
-                </a:solidFill>
-                <a:latin typeface="Times New Roman"/>
-                <a:ea typeface="標楷體"/>
-                <a:ea typeface="標楷體"/>
-              </a:rPr>
-              <a:t>第一項完成前，其餘方向都無法定案</a:t>
-            </a:r>
-          </a:p>
-        </p:txBody>
-      </p:sp>
-      <p:sp>
-        <p:nvSpPr>
-          <p:cNvPr id="5" name="Rectangle 4"/>
-          <p:cNvSpPr/>
-          <p:nvPr/>
-        </p:nvSpPr>
-        <p:spPr>
-          <a:xfrm>
-            <a:off x="0" y="6552000"/>
-            <a:ext cx="12193200" cy="306000"/>
-          </a:xfrm>
-          <a:prstGeom prst="rect">
-            <a:avLst/>
-          </a:prstGeom>
-          <a:solidFill>
-            <a:srgbClr val="2E8BC0"/>
-          </a:solidFill>
-          <a:ln>
-            <a:noFill/>
-          </a:ln>
-          <a:effectLst/>
-        </p:spPr>
-        <p:style>
-          <a:lnRef idx="1">
-            <a:schemeClr val="accent1"/>
-          </a:lnRef>
-          <a:fillRef idx="3">
-            <a:schemeClr val="accent1"/>
-          </a:fillRef>
-          <a:effectRef idx="2">
-            <a:schemeClr val="accent1"/>
-          </a:effectRef>
-          <a:fontRef idx="minor">
-            <a:schemeClr val="lt1"/>
-          </a:fontRef>
-        </p:style>
-        <p:txBody>
-          <a:bodyPr rtlCol="0" anchor="ctr"/>
-          <a:lstStyle/>
-          <a:p>
-            <a:pPr algn="ctr"/>
-          </a:p>
-        </p:txBody>
-      </p:sp>
-      <p:sp>
-        <p:nvSpPr>
-          <p:cNvPr id="6" name="TextBox 5"/>
-          <p:cNvSpPr txBox="1"/>
-          <p:nvPr/>
-        </p:nvSpPr>
-        <p:spPr>
-          <a:xfrm>
-            <a:off x="11329200" y="6577200"/>
-            <a:ext cx="576000" cy="216000"/>
-          </a:xfrm>
-          <a:prstGeom prst="rect">
-            <a:avLst/>
-          </a:prstGeom>
-          <a:noFill/>
-        </p:spPr>
-        <p:txBody>
-          <a:bodyPr wrap="square" anchor="t" lIns="0" rIns="0" tIns="0" bIns="0">
-            <a:spAutoFit/>
-          </a:bodyPr>
-          <a:lstStyle/>
-          <a:p>
-            <a:pPr algn="r">
-              <a:spcAft>
-                <a:spcPts val="600"/>
-              </a:spcAft>
-            </a:pPr>
-            <a:r>
-              <a:rPr sz="1100" b="0" i="0">
-                <a:solidFill>
-                  <a:srgbClr val="FFFFFF"/>
-                </a:solidFill>
-                <a:latin typeface="Times New Roman"/>
-                <a:ea typeface="標楷體"/>
-                <a:ea typeface="標楷體"/>
-              </a:rPr>
-              <a:t>21</a:t>
             </a:r>
           </a:p>
         </p:txBody>
@@ -8915,7 +7644,7 @@
 </p:sld>
 </file>
 
-<file path=ppt/slides/slide21.xml><?xml version="1.0" encoding="utf-8"?>
+<file path=ppt/slides/slide19.xml><?xml version="1.0" encoding="utf-8"?>
 <p:sld xmlns:a="http://schemas.openxmlformats.org/drawingml/2006/main" xmlns:p="http://schemas.openxmlformats.org/presentationml/2006/main" xmlns:r="http://schemas.openxmlformats.org/officeDocument/2006/relationships">
   <p:cSld>
     <p:spTree>
@@ -8961,7 +7690,7 @@
                 <a:ea typeface="標楷體"/>
                 <a:ea typeface="標楷體"/>
               </a:rPr>
-              <a:t>十五、需要協助與確認的事項</a:t>
+              <a:t>十八、需要協助與確認的事項</a:t>
             </a:r>
           </a:p>
         </p:txBody>
@@ -9131,7 +7860,7 @@
                 <a:ea typeface="標楷體"/>
                 <a:ea typeface="標楷體"/>
               </a:rPr>
-              <a:t>22</a:t>
+              <a:t>20</a:t>
             </a:r>
           </a:p>
         </p:txBody>
@@ -9908,7 +8637,7 @@
 </p:sld>
 </file>
 
-<file path=ppt/slides/slide3.xml><?xml version="1.0" encoding="utf-8"?>
+<file path=ppt/slides/slide2.xml><?xml version="1.0" encoding="utf-8"?>
 <p:sld xmlns:a="http://schemas.openxmlformats.org/drawingml/2006/main" xmlns:p="http://schemas.openxmlformats.org/presentationml/2006/main" xmlns:r="http://schemas.openxmlformats.org/officeDocument/2006/relationships">
   <p:cSld>
     <p:spTree>
@@ -9954,7 +8683,7 @@
                 <a:ea typeface="標楷體"/>
                 <a:ea typeface="標楷體"/>
               </a:rPr>
-              <a:t>四、先確認：氣體讀數什麼時候可信</a:t>
+              <a:t>一、壓力為什麼會掉</a:t>
             </a:r>
           </a:p>
         </p:txBody>
@@ -10039,7 +8768,7 @@
                 <a:ea typeface="標楷體"/>
                 <a:ea typeface="標楷體"/>
               </a:rPr>
-              <a:t>補氣加入的是二氧化碳與氫氣、不含甲烷，真頂空必定被稀釋</a:t>
+              <a:t>氣泵把氣體打回液相，再由微生物消耗</a:t>
             </a:r>
           </a:p>
         </p:txBody>
@@ -10124,14 +8853,14 @@
                 <a:ea typeface="標楷體"/>
                 <a:ea typeface="標楷體"/>
               </a:rPr>
-              <a:t>4</a:t>
+              <a:t>3</a:t>
             </a:r>
           </a:p>
         </p:txBody>
       </p:sp>
       <p:pic>
         <p:nvPicPr>
-          <p:cNvPr id="7" name="Picture 6" descr="deck1_sensor.png"/>
+          <p:cNvPr id="7" name="Picture 6" descr="deck15_series.png"/>
           <p:cNvPicPr>
             <a:picLocks noChangeAspect="1"/>
           </p:cNvPicPr>
@@ -10145,8 +8874,8 @@
         </p:blipFill>
         <p:spPr>
           <a:xfrm>
-            <a:off x="1596599" y="1224000"/>
-            <a:ext cx="9000000" cy="4475531"/>
+            <a:off x="1596599" y="1152000"/>
+            <a:ext cx="9000000" cy="5092105"/>
           </a:xfrm>
           <a:prstGeom prst="rect">
             <a:avLst/>
@@ -10161,8 +8890,8 @@
         </p:nvSpPr>
         <p:spPr>
           <a:xfrm>
-            <a:off x="576000" y="5789531"/>
-            <a:ext cx="11041200" cy="744468"/>
+            <a:off x="576000" y="6352105"/>
+            <a:ext cx="11041200" cy="55895"/>
           </a:xfrm>
           <a:prstGeom prst="rect">
             <a:avLst/>
@@ -10181,7 +8910,7 @@
               </a:spcAft>
             </a:pPr>
             <a:r>
-              <a:rPr sz="1700" b="0" i="0">
+              <a:rPr sz="1600" b="0" i="0">
                 <a:solidFill>
                   <a:srgbClr val="000000"/>
                 </a:solidFill>
@@ -10189,10 +8918,10 @@
                 <a:ea typeface="標楷體"/>
                 <a:ea typeface="標楷體"/>
               </a:rPr>
-              <a:t>實測斜率 </a:t>
-            </a:r>
-            <a:r>
-              <a:rPr sz="1900" b="1" i="0">
+              <a:t>⚠ 先前把溶解與生物當成兩條並聯途徑，並據此主張「壓降主因不是溶解」。</a:t>
+            </a:r>
+            <a:r>
+              <a:rPr sz="1800" b="1" i="0">
                 <a:solidFill>
                   <a:srgbClr val="FF0000"/>
                 </a:solidFill>
@@ -10200,18 +8929,7 @@
                 <a:ea typeface="標楷體"/>
                 <a:ea typeface="標楷體"/>
               </a:rPr>
-              <a:t>+0.008 ± 0.225</a:t>
-            </a:r>
-            <a:r>
-              <a:rPr sz="1700" b="0" i="0">
-                <a:solidFill>
-                  <a:srgbClr val="000000"/>
-                </a:solidFill>
-                <a:latin typeface="Times New Roman"/>
-                <a:ea typeface="標楷體"/>
-                <a:ea typeface="標楷體"/>
-              </a:rPr>
-              <a:t>，距「真頂空」應有的 −1 有 4.5 個標準差。分析儀只有在排氣當下的一至二分鐘可信——全資料庫僅 35 筆，後續所有氣體計算只用這 35 筆。</a:t>
+              <a:t>該主張已撤回。</a:t>
             </a:r>
           </a:p>
         </p:txBody>
@@ -10224,7 +8942,7 @@
 </p:sld>
 </file>
 
-<file path=ppt/slides/slide4.xml><?xml version="1.0" encoding="utf-8"?>
+<file path=ppt/slides/slide3.xml><?xml version="1.0" encoding="utf-8"?>
 <p:sld xmlns:a="http://schemas.openxmlformats.org/drawingml/2006/main" xmlns:p="http://schemas.openxmlformats.org/presentationml/2006/main" xmlns:r="http://schemas.openxmlformats.org/officeDocument/2006/relationships">
   <p:cSld>
     <p:spTree>
@@ -10270,7 +8988,7 @@
                 <a:ea typeface="標楷體"/>
                 <a:ea typeface="標楷體"/>
               </a:rPr>
-              <a:t>六、結果：34 / 35 次都偏向同一側</a:t>
+              <a:t>二、這個模型一次解釋了三件事</a:t>
             </a:r>
           </a:p>
         </p:txBody>
@@ -10355,7 +9073,7 @@
                 <a:ea typeface="標楷體"/>
                 <a:ea typeface="標楷體"/>
               </a:rPr>
-              <a:t>紅色虛線 = 只有產甲烷反應時應有的位置</a:t>
+              <a:t>都是先前當成獨立謎題的</a:t>
             </a:r>
           </a:p>
         </p:txBody>
@@ -10440,780 +9158,14 @@
                 <a:ea typeface="標楷體"/>
                 <a:ea typeface="標楷體"/>
               </a:rPr>
-              <a:t>5</a:t>
-            </a:r>
-          </a:p>
-        </p:txBody>
-      </p:sp>
-      <p:pic>
-        <p:nvPicPr>
-          <p:cNvPr id="7" name="Picture 6" descr="deck2_hydrogen.png"/>
-          <p:cNvPicPr>
-            <a:picLocks noChangeAspect="1"/>
-          </p:cNvPicPr>
-          <p:nvPr/>
-        </p:nvPicPr>
-        <p:blipFill>
-          <a:blip r:embed="rId2"/>
-          <a:stretch>
-            <a:fillRect/>
-          </a:stretch>
-        </p:blipFill>
-        <p:spPr>
-          <a:xfrm>
-            <a:off x="1596599" y="1188000"/>
-            <a:ext cx="9000000" cy="4613445"/>
-          </a:xfrm>
-          <a:prstGeom prst="rect">
-            <a:avLst/>
-          </a:prstGeom>
-        </p:spPr>
-      </p:pic>
-      <p:sp>
-        <p:nvSpPr>
-          <p:cNvPr id="8" name="TextBox 7"/>
-          <p:cNvSpPr txBox="1"/>
-          <p:nvPr/>
-        </p:nvSpPr>
-        <p:spPr>
-          <a:xfrm>
-            <a:off x="576000" y="5891445"/>
-            <a:ext cx="11041200" cy="642554"/>
-          </a:xfrm>
-          <a:prstGeom prst="rect">
-            <a:avLst/>
-          </a:prstGeom>
-          <a:noFill/>
-        </p:spPr>
-        <p:txBody>
-          <a:bodyPr wrap="square" anchor="t" lIns="0" rIns="0" tIns="0" bIns="0">
-            <a:spAutoFit/>
-          </a:bodyPr>
-          <a:lstStyle/>
-          <a:p>
-            <a:pPr algn="ctr">
-              <a:spcAft>
-                <a:spcPts val="600"/>
-              </a:spcAft>
-            </a:pPr>
-            <a:r>
-              <a:rPr sz="1700" b="1" i="0">
-                <a:solidFill>
-                  <a:srgbClr val="FF0000"/>
-                </a:solidFill>
-                <a:latin typeface="Times New Roman"/>
-                <a:ea typeface="標楷體"/>
-                <a:ea typeface="標楷體"/>
-              </a:rPr>
-              <a:t>34 / 35 次高於進料比　｜　中位 2.79 倍　｜　</a:t>
-            </a:r>
-            <a:r>
-              <a:rPr sz="1700" b="1" i="1">
-                <a:solidFill>
-                  <a:srgbClr val="FF0000"/>
-                </a:solidFill>
-                <a:latin typeface="Times New Roman"/>
-                <a:ea typeface="標楷體"/>
-                <a:ea typeface="標楷體"/>
-              </a:rPr>
-              <a:t>p</a:t>
-            </a:r>
-            <a:r>
-              <a:rPr sz="1700" b="1" i="0">
-                <a:solidFill>
-                  <a:srgbClr val="FF0000"/>
-                </a:solidFill>
-                <a:latin typeface="Times New Roman"/>
-                <a:ea typeface="標楷體"/>
-                <a:ea typeface="標楷體"/>
-              </a:rPr>
-              <a:t> &lt; 0.0001。★把甲烷當零的最壞情況下仍有 1.33 倍（25/35，</a:t>
-            </a:r>
-            <a:r>
-              <a:rPr sz="1700" b="1" i="1">
-                <a:solidFill>
-                  <a:srgbClr val="FF0000"/>
-                </a:solidFill>
-                <a:latin typeface="Times New Roman"/>
-                <a:ea typeface="標楷體"/>
-                <a:ea typeface="標楷體"/>
-              </a:rPr>
-              <a:t>p</a:t>
-            </a:r>
-            <a:r>
-              <a:rPr sz="1700" b="1" i="0">
-                <a:solidFill>
-                  <a:srgbClr val="FF0000"/>
-                </a:solidFill>
-                <a:latin typeface="Times New Roman"/>
-                <a:ea typeface="標楷體"/>
-                <a:ea typeface="標楷體"/>
-              </a:rPr>
-              <a:t>=0.031）</a:t>
-            </a:r>
-          </a:p>
-        </p:txBody>
-      </p:sp>
-    </p:spTree>
-  </p:cSld>
-  <p:clrMapOvr>
-    <a:masterClrMapping/>
-  </p:clrMapOvr>
-</p:sld>
-</file>
-
-<file path=ppt/slides/slide5.xml><?xml version="1.0" encoding="utf-8"?>
-<p:sld xmlns:a="http://schemas.openxmlformats.org/drawingml/2006/main" xmlns:p="http://schemas.openxmlformats.org/presentationml/2006/main" xmlns:r="http://schemas.openxmlformats.org/officeDocument/2006/relationships">
-  <p:cSld>
-    <p:spTree>
-      <p:nvGrpSpPr>
-        <p:cNvPr id="1" name=""/>
-        <p:cNvGrpSpPr/>
-        <p:nvPr/>
-      </p:nvGrpSpPr>
-      <p:grpSpPr/>
-      <p:sp>
-        <p:nvSpPr>
-          <p:cNvPr id="2" name="TextBox 1"/>
-          <p:cNvSpPr txBox="1"/>
-          <p:nvPr/>
-        </p:nvSpPr>
-        <p:spPr>
-          <a:xfrm>
-            <a:off x="432000" y="180000"/>
-            <a:ext cx="11329200" cy="540000"/>
-          </a:xfrm>
-          <a:prstGeom prst="rect">
-            <a:avLst/>
-          </a:prstGeom>
-          <a:noFill/>
-        </p:spPr>
-        <p:txBody>
-          <a:bodyPr wrap="square" anchor="t" lIns="0" rIns="0" tIns="0" bIns="0">
-            <a:spAutoFit/>
-          </a:bodyPr>
-          <a:lstStyle/>
-          <a:p>
-            <a:pPr algn="ctr">
-              <a:spcAft>
-                <a:spcPts val="0"/>
-              </a:spcAft>
-            </a:pPr>
-            <a:r>
-              <a:rPr sz="2800" b="1" i="0">
-                <a:solidFill>
-                  <a:srgbClr val="000000"/>
-                </a:solidFill>
-                <a:latin typeface="Times New Roman"/>
-                <a:ea typeface="標楷體"/>
-                <a:ea typeface="標楷體"/>
-              </a:rPr>
-              <a:t>七、這不是量測誤差造成的</a:t>
-            </a:r>
-          </a:p>
-        </p:txBody>
-      </p:sp>
-      <p:sp>
-        <p:nvSpPr>
-          <p:cNvPr id="3" name="Rectangle 2"/>
-          <p:cNvSpPr/>
-          <p:nvPr/>
-        </p:nvSpPr>
-        <p:spPr>
-          <a:xfrm>
-            <a:off x="216000" y="763200"/>
-            <a:ext cx="11761200" cy="18000"/>
-          </a:xfrm>
-          <a:prstGeom prst="rect">
-            <a:avLst/>
-          </a:prstGeom>
-          <a:solidFill>
-            <a:srgbClr val="2AB6D8"/>
-          </a:solidFill>
-          <a:ln>
-            <a:noFill/>
-          </a:ln>
-          <a:effectLst/>
-        </p:spPr>
-        <p:style>
-          <a:lnRef idx="1">
-            <a:schemeClr val="accent1"/>
-          </a:lnRef>
-          <a:fillRef idx="3">
-            <a:schemeClr val="accent1"/>
-          </a:fillRef>
-          <a:effectRef idx="2">
-            <a:schemeClr val="accent1"/>
-          </a:effectRef>
-          <a:fontRef idx="minor">
-            <a:schemeClr val="lt1"/>
-          </a:fontRef>
-        </p:style>
-        <p:txBody>
-          <a:bodyPr rtlCol="0" anchor="ctr"/>
-          <a:lstStyle/>
-          <a:p>
-            <a:pPr algn="ctr"/>
-          </a:p>
-        </p:txBody>
-      </p:sp>
-      <p:sp>
-        <p:nvSpPr>
-          <p:cNvPr id="4" name="TextBox 3"/>
-          <p:cNvSpPr txBox="1"/>
-          <p:nvPr/>
-        </p:nvSpPr>
-        <p:spPr>
-          <a:xfrm>
-            <a:off x="503999" y="842400"/>
-            <a:ext cx="11185201" cy="251999"/>
-          </a:xfrm>
-          <a:prstGeom prst="rect">
-            <a:avLst/>
-          </a:prstGeom>
-          <a:noFill/>
-        </p:spPr>
-        <p:txBody>
-          <a:bodyPr wrap="square" anchor="t" lIns="0" rIns="0" tIns="0" bIns="0">
-            <a:spAutoFit/>
-          </a:bodyPr>
-          <a:lstStyle/>
-          <a:p>
-            <a:pPr algn="ctr">
-              <a:spcAft>
-                <a:spcPts val="600"/>
-              </a:spcAft>
-            </a:pPr>
-            <a:r>
-              <a:rPr sz="1300" b="0" i="0">
-                <a:solidFill>
-                  <a:srgbClr val="595959"/>
-                </a:solidFill>
-                <a:latin typeface="Times New Roman"/>
-                <a:ea typeface="標楷體"/>
-                <a:ea typeface="標楷體"/>
-              </a:rPr>
-              <a:t>以 2026-07-30 那次排氣為例</a:t>
-            </a:r>
-          </a:p>
-        </p:txBody>
-      </p:sp>
-      <p:sp>
-        <p:nvSpPr>
-          <p:cNvPr id="5" name="Rectangle 4"/>
-          <p:cNvSpPr/>
-          <p:nvPr/>
-        </p:nvSpPr>
-        <p:spPr>
-          <a:xfrm>
-            <a:off x="0" y="6552000"/>
-            <a:ext cx="12193200" cy="306000"/>
-          </a:xfrm>
-          <a:prstGeom prst="rect">
-            <a:avLst/>
-          </a:prstGeom>
-          <a:solidFill>
-            <a:srgbClr val="2E8BC0"/>
-          </a:solidFill>
-          <a:ln>
-            <a:noFill/>
-          </a:ln>
-          <a:effectLst/>
-        </p:spPr>
-        <p:style>
-          <a:lnRef idx="1">
-            <a:schemeClr val="accent1"/>
-          </a:lnRef>
-          <a:fillRef idx="3">
-            <a:schemeClr val="accent1"/>
-          </a:fillRef>
-          <a:effectRef idx="2">
-            <a:schemeClr val="accent1"/>
-          </a:effectRef>
-          <a:fontRef idx="minor">
-            <a:schemeClr val="lt1"/>
-          </a:fontRef>
-        </p:style>
-        <p:txBody>
-          <a:bodyPr rtlCol="0" anchor="ctr"/>
-          <a:lstStyle/>
-          <a:p>
-            <a:pPr algn="ctr"/>
-          </a:p>
-        </p:txBody>
-      </p:sp>
-      <p:sp>
-        <p:nvSpPr>
-          <p:cNvPr id="6" name="TextBox 5"/>
-          <p:cNvSpPr txBox="1"/>
-          <p:nvPr/>
-        </p:nvSpPr>
-        <p:spPr>
-          <a:xfrm>
-            <a:off x="11329200" y="6577200"/>
-            <a:ext cx="576000" cy="216000"/>
-          </a:xfrm>
-          <a:prstGeom prst="rect">
-            <a:avLst/>
-          </a:prstGeom>
-          <a:noFill/>
-        </p:spPr>
-        <p:txBody>
-          <a:bodyPr wrap="square" anchor="t" lIns="0" rIns="0" tIns="0" bIns="0">
-            <a:spAutoFit/>
-          </a:bodyPr>
-          <a:lstStyle/>
-          <a:p>
-            <a:pPr algn="r">
-              <a:spcAft>
-                <a:spcPts val="600"/>
-              </a:spcAft>
-            </a:pPr>
-            <a:r>
-              <a:rPr sz="1100" b="0" i="0">
-                <a:solidFill>
-                  <a:srgbClr val="FFFFFF"/>
-                </a:solidFill>
-                <a:latin typeface="Times New Roman"/>
-                <a:ea typeface="標楷體"/>
-                <a:ea typeface="標楷體"/>
-              </a:rPr>
-              <a:t>6</a:t>
-            </a:r>
-          </a:p>
-        </p:txBody>
-      </p:sp>
-      <p:sp>
-        <p:nvSpPr>
-          <p:cNvPr id="7" name="TextBox 6"/>
-          <p:cNvSpPr txBox="1"/>
-          <p:nvPr/>
-        </p:nvSpPr>
-        <p:spPr>
-          <a:xfrm>
-            <a:off x="576000" y="1440000"/>
-            <a:ext cx="11041200" cy="3960000"/>
-          </a:xfrm>
-          <a:prstGeom prst="rect">
-            <a:avLst/>
-          </a:prstGeom>
-          <a:noFill/>
-        </p:spPr>
-        <p:txBody>
-          <a:bodyPr wrap="square" anchor="t" lIns="0" rIns="0" tIns="0" bIns="0">
-            <a:spAutoFit/>
-          </a:bodyPr>
-          <a:lstStyle/>
-          <a:p>
-            <a:pPr algn="l">
-              <a:spcAft>
-                <a:spcPts val="1400"/>
-              </a:spcAft>
-            </a:pPr>
-            <a:r>
-              <a:rPr sz="2000" b="1" i="0">
-                <a:solidFill>
-                  <a:srgbClr val="000000"/>
-                </a:solidFill>
-                <a:latin typeface="Times New Roman"/>
-                <a:ea typeface="標楷體"/>
-                <a:ea typeface="標楷體"/>
-              </a:rPr>
-              <a:t>量測到：二氧化碳 21.3%、甲烷 34.79%</a:t>
-            </a:r>
-          </a:p>
-          <a:p>
-            <a:pPr algn="l">
-              <a:spcAft>
-                <a:spcPts val="1400"/>
-              </a:spcAft>
-            </a:pPr>
-            <a:r>
-              <a:rPr sz="1800" b="0" i="0">
-                <a:solidFill>
-                  <a:srgbClr val="000000"/>
-                </a:solidFill>
-                <a:latin typeface="Times New Roman"/>
-                <a:ea typeface="標楷體"/>
-                <a:ea typeface="標楷體"/>
-              </a:rPr>
-              <a:t>若殘餘氣體真的維持 1:4，扣除甲烷與水蒸氣後，二氧化碳應該只有 </a:t>
-            </a:r>
-            <a:r>
-              <a:rPr sz="2000" b="1" i="0">
-                <a:solidFill>
-                  <a:srgbClr val="1F6FB5"/>
-                </a:solidFill>
-                <a:latin typeface="Times New Roman"/>
-                <a:ea typeface="標楷體"/>
-                <a:ea typeface="標楷體"/>
-              </a:rPr>
-              <a:t>12.6%</a:t>
-            </a:r>
-          </a:p>
-          <a:p>
-            <a:pPr algn="l">
-              <a:spcAft>
-                <a:spcPts val="1400"/>
-              </a:spcAft>
-            </a:pPr>
-            <a:r>
-              <a:rPr sz="1800" b="0" i="0">
-                <a:solidFill>
-                  <a:srgbClr val="000000"/>
-                </a:solidFill>
-                <a:latin typeface="Times New Roman"/>
-                <a:ea typeface="標楷體"/>
-                <a:ea typeface="標楷體"/>
-              </a:rPr>
-              <a:t>即使把甲烷讀數</a:t>
-            </a:r>
-            <a:r>
-              <a:rPr sz="2000" b="1" i="0">
-                <a:solidFill>
-                  <a:srgbClr val="FF0000"/>
-                </a:solidFill>
-                <a:latin typeface="Times New Roman"/>
-                <a:ea typeface="標楷體"/>
-                <a:ea typeface="標楷體"/>
-              </a:rPr>
-              <a:t>全部當成零</a:t>
-            </a:r>
-            <a:r>
-              <a:rPr sz="1800" b="0" i="0">
-                <a:solidFill>
-                  <a:srgbClr val="000000"/>
-                </a:solidFill>
-                <a:latin typeface="Times New Roman"/>
-                <a:ea typeface="標楷體"/>
-                <a:ea typeface="標楷體"/>
-              </a:rPr>
-              <a:t>（最極端的假設），氫氣上限也只有 78.7%，比值仍為 0.27</a:t>
-            </a:r>
-          </a:p>
-          <a:p>
-            <a:pPr algn="l">
-              <a:spcAft>
-                <a:spcPts val="1000"/>
-              </a:spcAft>
-            </a:pPr>
-          </a:p>
-          <a:p>
-            <a:pPr algn="l">
-              <a:spcAft>
-                <a:spcPts val="1600"/>
-              </a:spcAft>
-            </a:pPr>
-            <a:r>
-              <a:rPr sz="2200" b="1" i="0">
-                <a:solidFill>
-                  <a:srgbClr val="FF0000"/>
-                </a:solidFill>
-                <a:latin typeface="Times New Roman"/>
-                <a:ea typeface="標楷體"/>
-                <a:ea typeface="標楷體"/>
-              </a:rPr>
-              <a:t>也就是說——二氧化碳的實測值本身，就高到與 1:4 不相容。</a:t>
-            </a:r>
-          </a:p>
-          <a:p>
-            <a:pPr algn="l">
-              <a:spcAft>
-                <a:spcPts val="600"/>
-              </a:spcAft>
-            </a:pPr>
-            <a:r>
-              <a:rPr sz="1600" b="0" i="0">
-                <a:solidFill>
-                  <a:srgbClr val="595959"/>
-                </a:solidFill>
-                <a:latin typeface="Times New Roman"/>
-                <a:ea typeface="標楷體"/>
-                <a:ea typeface="標楷體"/>
-              </a:rPr>
-              <a:t>量級換算（保守估計）：要讓比值漂移到實測中位數，需要額外移除約 2.57 莫耳氫氣，相當於進料氫氣的 64%。</a:t>
-            </a:r>
-          </a:p>
-        </p:txBody>
-      </p:sp>
-      <p:sp>
-        <p:nvSpPr>
-          <p:cNvPr id="8" name="Rectangle 7"/>
-          <p:cNvSpPr/>
-          <p:nvPr/>
-        </p:nvSpPr>
-        <p:spPr>
-          <a:xfrm>
-            <a:off x="432000" y="5562000"/>
-            <a:ext cx="11329200" cy="864000"/>
-          </a:xfrm>
-          <a:prstGeom prst="rect">
-            <a:avLst/>
-          </a:prstGeom>
-          <a:solidFill>
-            <a:srgbClr val="F2F7FC"/>
-          </a:solidFill>
-          <a:ln w="9525">
-            <a:solidFill>
-              <a:srgbClr val="2AB6D8"/>
-            </a:solidFill>
-          </a:ln>
-          <a:effectLst/>
-        </p:spPr>
-        <p:style>
-          <a:lnRef idx="1">
-            <a:schemeClr val="accent1"/>
-          </a:lnRef>
-          <a:fillRef idx="3">
-            <a:schemeClr val="accent1"/>
-          </a:fillRef>
-          <a:effectRef idx="2">
-            <a:schemeClr val="accent1"/>
-          </a:effectRef>
-          <a:fontRef idx="minor">
-            <a:schemeClr val="lt1"/>
-          </a:fontRef>
-        </p:style>
-        <p:txBody>
-          <a:bodyPr rtlCol="0" anchor="ctr"/>
-          <a:lstStyle/>
-          <a:p>
-            <a:pPr algn="ctr"/>
-          </a:p>
-        </p:txBody>
-      </p:sp>
-      <p:sp>
-        <p:nvSpPr>
-          <p:cNvPr id="9" name="TextBox 8"/>
-          <p:cNvSpPr txBox="1"/>
-          <p:nvPr/>
-        </p:nvSpPr>
-        <p:spPr>
-          <a:xfrm>
-            <a:off x="612000" y="5670000"/>
-            <a:ext cx="10969200" cy="648000"/>
-          </a:xfrm>
-          <a:prstGeom prst="rect">
-            <a:avLst/>
-          </a:prstGeom>
-          <a:noFill/>
-        </p:spPr>
-        <p:txBody>
-          <a:bodyPr wrap="square" anchor="ctr" lIns="0" rIns="0" tIns="0" bIns="0">
-            <a:spAutoFit/>
-          </a:bodyPr>
-          <a:lstStyle/>
-          <a:p>
-            <a:pPr algn="l">
-              <a:spcAft>
-                <a:spcPts val="600"/>
-              </a:spcAft>
-            </a:pPr>
-            <a:r>
-              <a:rPr sz="1300" b="0" i="0">
-                <a:solidFill>
-                  <a:srgbClr val="FF0000"/>
-                </a:solidFill>
-                <a:latin typeface="Times New Roman"/>
-                <a:ea typeface="標楷體"/>
-                <a:ea typeface="標楷體"/>
-              </a:rPr>
-              <a:t>此換算為單次通過的保守估計，實際為連續補氣，數值僅示意量級。</a:t>
-            </a:r>
-          </a:p>
-        </p:txBody>
-      </p:sp>
-    </p:spTree>
-  </p:cSld>
-  <p:clrMapOvr>
-    <a:masterClrMapping/>
-  </p:clrMapOvr>
-</p:sld>
-</file>
-
-<file path=ppt/slides/slide6.xml><?xml version="1.0" encoding="utf-8"?>
-<p:sld xmlns:a="http://schemas.openxmlformats.org/drawingml/2006/main" xmlns:p="http://schemas.openxmlformats.org/presentationml/2006/main" xmlns:r="http://schemas.openxmlformats.org/officeDocument/2006/relationships">
-  <p:cSld>
-    <p:spTree>
-      <p:nvGrpSpPr>
-        <p:cNvPr id="1" name=""/>
-        <p:cNvGrpSpPr/>
-        <p:nvPr/>
-      </p:nvGrpSpPr>
-      <p:grpSpPr/>
-      <p:sp>
-        <p:nvSpPr>
-          <p:cNvPr id="2" name="TextBox 1"/>
-          <p:cNvSpPr txBox="1"/>
-          <p:nvPr/>
-        </p:nvSpPr>
-        <p:spPr>
-          <a:xfrm>
-            <a:off x="432000" y="180000"/>
-            <a:ext cx="11329200" cy="540000"/>
-          </a:xfrm>
-          <a:prstGeom prst="rect">
-            <a:avLst/>
-          </a:prstGeom>
-          <a:noFill/>
-        </p:spPr>
-        <p:txBody>
-          <a:bodyPr wrap="square" anchor="t" lIns="0" rIns="0" tIns="0" bIns="0">
-            <a:spAutoFit/>
-          </a:bodyPr>
-          <a:lstStyle/>
-          <a:p>
-            <a:pPr algn="ctr">
-              <a:spcAft>
-                <a:spcPts val="0"/>
-              </a:spcAft>
-            </a:pPr>
-            <a:r>
-              <a:rPr sz="2800" b="1" i="0">
-                <a:solidFill>
-                  <a:srgbClr val="000000"/>
-                </a:solidFill>
-                <a:latin typeface="Times New Roman"/>
-                <a:ea typeface="標楷體"/>
-                <a:ea typeface="標楷體"/>
-              </a:rPr>
-              <a:t>八、三個矛盾，同一個答案</a:t>
-            </a:r>
-          </a:p>
-        </p:txBody>
-      </p:sp>
-      <p:sp>
-        <p:nvSpPr>
-          <p:cNvPr id="3" name="Rectangle 2"/>
-          <p:cNvSpPr/>
-          <p:nvPr/>
-        </p:nvSpPr>
-        <p:spPr>
-          <a:xfrm>
-            <a:off x="216000" y="763200"/>
-            <a:ext cx="11761200" cy="18000"/>
-          </a:xfrm>
-          <a:prstGeom prst="rect">
-            <a:avLst/>
-          </a:prstGeom>
-          <a:solidFill>
-            <a:srgbClr val="2AB6D8"/>
-          </a:solidFill>
-          <a:ln>
-            <a:noFill/>
-          </a:ln>
-          <a:effectLst/>
-        </p:spPr>
-        <p:style>
-          <a:lnRef idx="1">
-            <a:schemeClr val="accent1"/>
-          </a:lnRef>
-          <a:fillRef idx="3">
-            <a:schemeClr val="accent1"/>
-          </a:fillRef>
-          <a:effectRef idx="2">
-            <a:schemeClr val="accent1"/>
-          </a:effectRef>
-          <a:fontRef idx="minor">
-            <a:schemeClr val="lt1"/>
-          </a:fontRef>
-        </p:style>
-        <p:txBody>
-          <a:bodyPr rtlCol="0" anchor="ctr"/>
-          <a:lstStyle/>
-          <a:p>
-            <a:pPr algn="ctr"/>
-          </a:p>
-        </p:txBody>
-      </p:sp>
-      <p:sp>
-        <p:nvSpPr>
-          <p:cNvPr id="4" name="Rectangle 3"/>
-          <p:cNvSpPr/>
-          <p:nvPr/>
-        </p:nvSpPr>
-        <p:spPr>
-          <a:xfrm>
-            <a:off x="0" y="6552000"/>
-            <a:ext cx="12193200" cy="306000"/>
-          </a:xfrm>
-          <a:prstGeom prst="rect">
-            <a:avLst/>
-          </a:prstGeom>
-          <a:solidFill>
-            <a:srgbClr val="2E8BC0"/>
-          </a:solidFill>
-          <a:ln>
-            <a:noFill/>
-          </a:ln>
-          <a:effectLst/>
-        </p:spPr>
-        <p:style>
-          <a:lnRef idx="1">
-            <a:schemeClr val="accent1"/>
-          </a:lnRef>
-          <a:fillRef idx="3">
-            <a:schemeClr val="accent1"/>
-          </a:fillRef>
-          <a:effectRef idx="2">
-            <a:schemeClr val="accent1"/>
-          </a:effectRef>
-          <a:fontRef idx="minor">
-            <a:schemeClr val="lt1"/>
-          </a:fontRef>
-        </p:style>
-        <p:txBody>
-          <a:bodyPr rtlCol="0" anchor="ctr"/>
-          <a:lstStyle/>
-          <a:p>
-            <a:pPr algn="ctr"/>
-          </a:p>
-        </p:txBody>
-      </p:sp>
-      <p:sp>
-        <p:nvSpPr>
-          <p:cNvPr id="5" name="TextBox 4"/>
-          <p:cNvSpPr txBox="1"/>
-          <p:nvPr/>
-        </p:nvSpPr>
-        <p:spPr>
-          <a:xfrm>
-            <a:off x="11329200" y="6577200"/>
-            <a:ext cx="576000" cy="216000"/>
-          </a:xfrm>
-          <a:prstGeom prst="rect">
-            <a:avLst/>
-          </a:prstGeom>
-          <a:noFill/>
-        </p:spPr>
-        <p:txBody>
-          <a:bodyPr wrap="square" anchor="t" lIns="0" rIns="0" tIns="0" bIns="0">
-            <a:spAutoFit/>
-          </a:bodyPr>
-          <a:lstStyle/>
-          <a:p>
-            <a:pPr algn="r">
-              <a:spcAft>
-                <a:spcPts val="600"/>
-              </a:spcAft>
-            </a:pPr>
-            <a:r>
-              <a:rPr sz="1100" b="0" i="0">
-                <a:solidFill>
-                  <a:srgbClr val="FFFFFF"/>
-                </a:solidFill>
-                <a:latin typeface="Times New Roman"/>
-                <a:ea typeface="標楷體"/>
-                <a:ea typeface="標楷體"/>
-              </a:rPr>
-              <a:t>7</a:t>
+              <a:t>4</a:t>
             </a:r>
           </a:p>
         </p:txBody>
       </p:sp>
       <p:graphicFrame>
         <p:nvGraphicFramePr>
-          <p:cNvPr id="6" name="Table 5"/>
+          <p:cNvPr id="7" name="Table 6"/>
           <p:cNvGraphicFramePr>
             <a:graphicFrameLocks noGrp="1"/>
           </p:cNvGraphicFramePr>
@@ -11230,8 +9182,9 @@
                 <a:tableStyleId>{5C22544A-7EE6-4342-B048-85BDC9FD1C3A}</a:tableStyleId>
               </a:tblPr>
               <a:tblGrid>
-                <a:gridCol w="4680000"/>
-                <a:gridCol w="6372000"/>
+                <a:gridCol w="3240000"/>
+                <a:gridCol w="3240000"/>
+                <a:gridCol w="4572000"/>
               </a:tblGrid>
               <a:tr h="378000">
                 <a:tc>
@@ -11241,7 +9194,7 @@
                     <a:p>
                       <a:pPr algn="ctr"/>
                       <a:r>
-                        <a:rPr sz="1600" b="1" i="0">
+                        <a:rPr sz="1400" b="1" i="0">
                           <a:solidFill>
                             <a:srgbClr val="FFFFFF"/>
                           </a:solidFill>
@@ -11249,7 +9202,7 @@
                           <a:ea typeface="標楷體"/>
                           <a:ea typeface="標楷體"/>
                         </a:rPr>
-                        <a:t>先前的矛盾</a:t>
+                        <a:t>先前的觀察</a:t>
                       </a:r>
                     </a:p>
                   </a:txBody>
@@ -11266,7 +9219,7 @@
                     <a:p>
                       <a:pPr algn="ctr"/>
                       <a:r>
-                        <a:rPr sz="1600" b="1" i="0">
+                        <a:rPr sz="1400" b="1" i="0">
                           <a:solidFill>
                             <a:srgbClr val="FFFFFF"/>
                           </a:solidFill>
@@ -11274,7 +9227,32 @@
                           <a:ea typeface="標楷體"/>
                           <a:ea typeface="標楷體"/>
                         </a:rPr>
-                        <a:t>「氫氣流失」如何解釋（★但見第 17、19 頁的替代解釋）</a:t>
+                        <a:t>先前的解讀</a:t>
+                      </a:r>
+                    </a:p>
+                  </a:txBody>
+                  <a:tcPr marL="72000" marR="72000" anchor="ctr">
+                    <a:solidFill>
+                      <a:srgbClr val="2E9BD6"/>
+                    </a:solidFill>
+                  </a:tcPr>
+                </a:tc>
+                <a:tc>
+                  <a:txBody>
+                    <a:bodyPr/>
+                    <a:lstStyle/>
+                    <a:p>
+                      <a:pPr algn="ctr"/>
+                      <a:r>
+                        <a:rPr sz="1400" b="1" i="0">
+                          <a:solidFill>
+                            <a:srgbClr val="FFFFFF"/>
+                          </a:solidFill>
+                          <a:latin typeface="Times New Roman"/>
+                          <a:ea typeface="標楷體"/>
+                          <a:ea typeface="標楷體"/>
+                        </a:rPr>
+                        <a:t>串聯模型的解釋</a:t>
                       </a:r>
                     </a:p>
                   </a:txBody>
@@ -11293,7 +9271,161 @@
                     <a:p>
                       <a:pPr algn="ctr"/>
                       <a:r>
-                        <a:rPr sz="1600" b="0" i="0">
+                        <a:rPr sz="1400" b="0" i="0">
+                          <a:solidFill>
+                            <a:srgbClr val="000000"/>
+                          </a:solidFill>
+                          <a:latin typeface="Times New Roman"/>
+                          <a:ea typeface="標楷體"/>
+                          <a:ea typeface="標楷體"/>
+                        </a:rPr>
+                        <a:t>91% 的壓降曲線接近直線</a:t>
+                      </a:r>
+                    </a:p>
+                  </a:txBody>
+                  <a:tcPr marL="72000" marR="72000" anchor="ctr">
+                    <a:solidFill>
+                      <a:srgbClr val="DBE9F6"/>
+                    </a:solidFill>
+                  </a:tcPr>
+                </a:tc>
+                <a:tc>
+                  <a:txBody>
+                    <a:bodyPr/>
+                    <a:lstStyle/>
+                    <a:p>
+                      <a:pPr algn="ctr"/>
+                      <a:r>
+                        <a:rPr sz="1400" b="0" i="0">
+                          <a:solidFill>
+                            <a:srgbClr val="000000"/>
+                          </a:solidFill>
+                          <a:latin typeface="Times New Roman"/>
+                          <a:ea typeface="標楷體"/>
+                          <a:ea typeface="標楷體"/>
+                        </a:rPr>
+                        <a:t>⚠ 曾解讀為「不是溶解」</a:t>
+                      </a:r>
+                    </a:p>
+                  </a:txBody>
+                  <a:tcPr marL="72000" marR="72000" anchor="ctr">
+                    <a:solidFill>
+                      <a:srgbClr val="DBE9F6"/>
+                    </a:solidFill>
+                  </a:tcPr>
+                </a:tc>
+                <a:tc>
+                  <a:txBody>
+                    <a:bodyPr/>
+                    <a:lstStyle/>
+                    <a:p>
+                      <a:pPr algn="ctr"/>
+                      <a:r>
+                        <a:rPr sz="1400" b="0" i="0">
+                          <a:solidFill>
+                            <a:srgbClr val="000000"/>
+                          </a:solidFill>
+                          <a:latin typeface="Times New Roman"/>
+                          <a:ea typeface="標楷體"/>
+                          <a:ea typeface="標楷體"/>
+                        </a:rPr>
+                        <a:t>液相近似無限匯，定速溶解本來就是直線</a:t>
+                      </a:r>
+                    </a:p>
+                  </a:txBody>
+                  <a:tcPr marL="72000" marR="72000" anchor="ctr">
+                    <a:solidFill>
+                      <a:srgbClr val="DBE9F6"/>
+                    </a:solidFill>
+                  </a:tcPr>
+                </a:tc>
+              </a:tr>
+              <a:tr h="331200">
+                <a:tc>
+                  <a:txBody>
+                    <a:bodyPr/>
+                    <a:lstStyle/>
+                    <a:p>
+                      <a:pPr algn="ctr"/>
+                      <a:r>
+                        <a:rPr sz="1400" b="0" i="0">
+                          <a:solidFill>
+                            <a:srgbClr val="000000"/>
+                          </a:solidFill>
+                          <a:latin typeface="Times New Roman"/>
+                          <a:ea typeface="標楷體"/>
+                          <a:ea typeface="標楷體"/>
+                        </a:rPr>
+                        <a:t>生物速率與平衡壓力分不開</a:t>
+                      </a:r>
+                    </a:p>
+                  </a:txBody>
+                  <a:tcPr marL="72000" marR="72000" anchor="ctr">
+                    <a:solidFill>
+                      <a:srgbClr val="EAF2FA"/>
+                    </a:solidFill>
+                  </a:tcPr>
+                </a:tc>
+                <a:tc>
+                  <a:txBody>
+                    <a:bodyPr/>
+                    <a:lstStyle/>
+                    <a:p>
+                      <a:pPr algn="ctr"/>
+                      <a:r>
+                        <a:rPr sz="1400" b="0" i="0">
+                          <a:solidFill>
+                            <a:srgbClr val="000000"/>
+                          </a:solidFill>
+                          <a:latin typeface="Times New Roman"/>
+                          <a:ea typeface="標楷體"/>
+                          <a:ea typeface="標楷體"/>
+                        </a:rPr>
+                        <a:t>⚠ 曾視為模型的巧合</a:t>
+                      </a:r>
+                    </a:p>
+                  </a:txBody>
+                  <a:tcPr marL="72000" marR="72000" anchor="ctr">
+                    <a:solidFill>
+                      <a:srgbClr val="EAF2FA"/>
+                    </a:solidFill>
+                  </a:tcPr>
+                </a:tc>
+                <a:tc>
+                  <a:txBody>
+                    <a:bodyPr/>
+                    <a:lstStyle/>
+                    <a:p>
+                      <a:pPr algn="ctr"/>
+                      <a:r>
+                        <a:rPr sz="1400" b="0" i="0">
+                          <a:solidFill>
+                            <a:srgbClr val="000000"/>
+                          </a:solidFill>
+                          <a:latin typeface="Times New Roman"/>
+                          <a:ea typeface="標楷體"/>
+                          <a:ea typeface="標楷體"/>
+                        </a:rPr>
+                        <a:t>把直線硬套指數模型的必然結果</a:t>
+                      </a:r>
+                    </a:p>
+                  </a:txBody>
+                  <a:tcPr marL="72000" marR="72000" anchor="ctr">
+                    <a:solidFill>
+                      <a:srgbClr val="EAF2FA"/>
+                    </a:solidFill>
+                  </a:tcPr>
+                </a:tc>
+              </a:tr>
+              <a:tr h="331200">
+                <a:tc>
+                  <a:txBody>
+                    <a:bodyPr/>
+                    <a:lstStyle/>
+                    <a:p>
+                      <a:pPr algn="ctr"/>
+                      <a:r>
+                        <a:rPr sz="1400" b="0" i="0">
                           <a:solidFill>
                             <a:srgbClr val="000000"/>
                           </a:solidFill>
@@ -11318,7 +9450,7 @@
                     <a:p>
                       <a:pPr algn="ctr"/>
                       <a:r>
-                        <a:rPr sz="1600" b="0" i="0">
+                        <a:rPr sz="1400" b="0" i="0">
                           <a:solidFill>
                             <a:srgbClr val="000000"/>
                           </a:solidFill>
@@ -11326,86 +9458,7 @@
                           <a:ea typeface="標楷體"/>
                           <a:ea typeface="標楷體"/>
                         </a:rPr>
-                        <a:t>因為消失的主要是氫氣，與碳源有無無關</a:t>
-                      </a:r>
-                    </a:p>
-                  </a:txBody>
-                  <a:tcPr marL="72000" marR="72000" anchor="ctr">
-                    <a:solidFill>
-                      <a:srgbClr val="DBE9F6"/>
-                    </a:solidFill>
-                  </a:tcPr>
-                </a:tc>
-              </a:tr>
-              <a:tr h="331200">
-                <a:tc>
-                  <a:txBody>
-                    <a:bodyPr/>
-                    <a:lstStyle/>
-                    <a:p>
-                      <a:pPr algn="ctr"/>
-                      <a:r>
-                        <a:rPr sz="1600" b="0" i="0">
-                          <a:solidFill>
-                            <a:srgbClr val="000000"/>
-                          </a:solidFill>
-                          <a:latin typeface="Times New Roman"/>
-                          <a:ea typeface="標楷體"/>
-                          <a:ea typeface="標楷體"/>
-                        </a:rPr>
-                        <a:t>氣體收支對不起來</a:t>
-                      </a:r>
-                    </a:p>
-                  </a:txBody>
-                  <a:tcPr marL="72000" marR="72000" anchor="ctr">
-                    <a:solidFill>
-                      <a:srgbClr val="EAF2FA"/>
-                    </a:solidFill>
-                  </a:tcPr>
-                </a:tc>
-                <a:tc>
-                  <a:txBody>
-                    <a:bodyPr/>
-                    <a:lstStyle/>
-                    <a:p>
-                      <a:pPr algn="ctr"/>
-                      <a:r>
-                        <a:rPr sz="1600" b="0" i="0">
-                          <a:solidFill>
-                            <a:srgbClr val="000000"/>
-                          </a:solidFill>
-                          <a:latin typeface="Times New Roman"/>
-                          <a:ea typeface="標楷體"/>
-                          <a:ea typeface="標楷體"/>
-                        </a:rPr>
-                        <a:t>缺口就是漏掉的氫氣</a:t>
-                      </a:r>
-                    </a:p>
-                  </a:txBody>
-                  <a:tcPr marL="72000" marR="72000" anchor="ctr">
-                    <a:solidFill>
-                      <a:srgbClr val="EAF2FA"/>
-                    </a:solidFill>
-                  </a:tcPr>
-                </a:tc>
-              </a:tr>
-              <a:tr h="331200">
-                <a:tc>
-                  <a:txBody>
-                    <a:bodyPr/>
-                    <a:lstStyle/>
-                    <a:p>
-                      <a:pPr algn="ctr"/>
-                      <a:r>
-                        <a:rPr sz="1600" b="0" i="0">
-                          <a:solidFill>
-                            <a:srgbClr val="000000"/>
-                          </a:solidFill>
-                          <a:latin typeface="Times New Roman"/>
-                          <a:ea typeface="標楷體"/>
-                          <a:ea typeface="標楷體"/>
-                        </a:rPr>
-                        <a:t>壓降曲線幾乎是直線</a:t>
+                        <a:t>⚠ 曾解讀為「氫氣流失」</a:t>
                       </a:r>
                     </a:p>
                   </a:txBody>
@@ -11422,7 +9475,7 @@
                     <a:p>
                       <a:pPr algn="ctr"/>
                       <a:r>
-                        <a:rPr sz="1600" b="0" i="0">
+                        <a:rPr sz="1400" b="0" i="0">
                           <a:solidFill>
                             <a:srgbClr val="000000"/>
                           </a:solidFill>
@@ -11430,7 +9483,7 @@
                           <a:ea typeface="標楷體"/>
                           <a:ea typeface="標楷體"/>
                         </a:rPr>
-                        <a:t>定速移除才會是直線——洩漏正是定速</a:t>
+                        <a:t>液相碳庫可供應數十天，碳源並未耗盡</a:t>
                       </a:r>
                     </a:p>
                   </a:txBody>
@@ -11447,13 +9500,13 @@
       </p:graphicFrame>
       <p:sp>
         <p:nvSpPr>
-          <p:cNvPr id="7" name="TextBox 6"/>
+          <p:cNvPr id="8" name="TextBox 7"/>
           <p:cNvSpPr txBox="1"/>
           <p:nvPr/>
         </p:nvSpPr>
         <p:spPr>
           <a:xfrm>
-            <a:off x="576000" y="4104000"/>
+            <a:off x="576000" y="4176000"/>
             <a:ext cx="11041200" cy="1980000"/>
           </a:xfrm>
           <a:prstGeom prst="rect">
@@ -11467,41 +9520,23 @@
           </a:bodyPr>
           <a:lstStyle/>
           <a:p>
-            <a:pPr algn="l">
-              <a:spcAft>
-                <a:spcPts val="1000"/>
-              </a:spcAft>
-            </a:pPr>
-            <a:r>
-              <a:rPr sz="2000" b="1" i="0">
-                <a:solidFill>
-                  <a:srgbClr val="000000"/>
-                </a:solidFill>
-                <a:latin typeface="Times New Roman"/>
-                <a:ea typeface="標楷體"/>
-                <a:ea typeface="標楷體"/>
-              </a:rPr>
-              <a:t>甲烷確實在產生</a:t>
-            </a:r>
-            <a:r>
-              <a:rPr sz="1800" b="0" i="0">
-                <a:solidFill>
-                  <a:srgbClr val="000000"/>
-                </a:solidFill>
-                <a:latin typeface="Times New Roman"/>
-                <a:ea typeface="標楷體"/>
-                <a:ea typeface="標楷體"/>
-              </a:rPr>
-              <a:t>（自動化批次由 9.99% 升至 39.6%），氧化還原電位也落在文獻最適區間。</a:t>
-            </a:r>
-          </a:p>
-          <a:p>
-            <a:pPr algn="l">
+            <a:pPr algn="ctr">
               <a:spcAft>
                 <a:spcPts val="600"/>
               </a:spcAft>
             </a:pPr>
             <a:r>
+              <a:rPr sz="1800" b="0" i="0">
+                <a:solidFill>
+                  <a:srgbClr val="000000"/>
+                </a:solidFill>
+                <a:latin typeface="Times New Roman"/>
+                <a:ea typeface="標楷體"/>
+                <a:ea typeface="標楷體"/>
+              </a:rPr>
+              <a:t>三項先前各自成謎的觀察，在正確的模型下都是</a:t>
+            </a:r>
+            <a:r>
               <a:rPr sz="2000" b="1" i="0">
                 <a:solidFill>
                   <a:srgbClr val="FF0000"/>
@@ -11510,32 +9545,162 @@
                 <a:ea typeface="標楷體"/>
                 <a:ea typeface="標楷體"/>
               </a:rPr>
-              <a:t>但——以壓降速率作為產甲烷速率的代理量，會嚴重高估。</a:t>
-            </a:r>
-          </a:p>
-        </p:txBody>
-      </p:sp>
-      <p:sp>
-        <p:nvSpPr>
-          <p:cNvPr id="8" name="Rectangle 7"/>
+              <a:t>必然的結果</a:t>
+            </a:r>
+            <a:r>
+              <a:rPr sz="1800" b="0" i="0">
+                <a:solidFill>
+                  <a:srgbClr val="000000"/>
+                </a:solidFill>
+                <a:latin typeface="Times New Roman"/>
+                <a:ea typeface="標楷體"/>
+                <a:ea typeface="標楷體"/>
+              </a:rPr>
+              <a:t>。</a:t>
+            </a:r>
+          </a:p>
+          <a:p>
+            <a:pPr algn="ctr">
+              <a:spcAft>
+                <a:spcPts val="600"/>
+              </a:spcAft>
+            </a:pPr>
+            <a:r>
+              <a:rPr sz="1700" b="0" i="0">
+                <a:solidFill>
+                  <a:srgbClr val="595959"/>
+                </a:solidFill>
+                <a:latin typeface="Times New Roman"/>
+                <a:ea typeface="標楷體"/>
+                <a:ea typeface="標楷體"/>
+              </a:rPr>
+              <a:t>⟹ 真正待解的，是壓降中生物解釋不了的那 61%，以及 </a:t>
+            </a:r>
+            <a:r>
+              <a:rPr sz="1700" b="0" i="0">
+                <a:solidFill>
+                  <a:srgbClr val="595959"/>
+                </a:solidFill>
+                <a:latin typeface="Times New Roman"/>
+                <a:ea typeface="標楷體"/>
+                <a:ea typeface="標楷體"/>
+              </a:rPr>
+              <a:t>CO</a:t>
+            </a:r>
+            <a:r>
+              <a:rPr sz="1700" b="0" i="0">
+                <a:solidFill>
+                  <a:srgbClr val="595959"/>
+                </a:solidFill>
+                <a:latin typeface="Times New Roman"/>
+                <a:ea typeface="標楷體"/>
+                <a:ea typeface="標楷體"/>
+              </a:rPr>
+              <a:t>₂:</a:t>
+            </a:r>
+            <a:r>
+              <a:rPr sz="1700" b="0" i="0">
+                <a:solidFill>
+                  <a:srgbClr val="595959"/>
+                </a:solidFill>
+                <a:latin typeface="Times New Roman"/>
+                <a:ea typeface="標楷體"/>
+                <a:ea typeface="標楷體"/>
+              </a:rPr>
+              <a:t>H</a:t>
+            </a:r>
+            <a:r>
+              <a:rPr sz="1700" b="0" i="0">
+                <a:solidFill>
+                  <a:srgbClr val="595959"/>
+                </a:solidFill>
+                <a:latin typeface="Times New Roman"/>
+                <a:ea typeface="標楷體"/>
+                <a:ea typeface="標楷體"/>
+              </a:rPr>
+              <a:t>₂ 的偏離。</a:t>
+            </a:r>
+          </a:p>
+        </p:txBody>
+      </p:sp>
+    </p:spTree>
+  </p:cSld>
+  <p:clrMapOvr>
+    <a:masterClrMapping/>
+  </p:clrMapOvr>
+</p:sld>
+</file>
+
+<file path=ppt/slides/slide4.xml><?xml version="1.0" encoding="utf-8"?>
+<p:sld xmlns:a="http://schemas.openxmlformats.org/drawingml/2006/main" xmlns:p="http://schemas.openxmlformats.org/presentationml/2006/main" xmlns:r="http://schemas.openxmlformats.org/officeDocument/2006/relationships">
+  <p:cSld>
+    <p:spTree>
+      <p:nvGrpSpPr>
+        <p:cNvPr id="1" name=""/>
+        <p:cNvGrpSpPr/>
+        <p:nvPr/>
+      </p:nvGrpSpPr>
+      <p:grpSpPr/>
+      <p:sp>
+        <p:nvSpPr>
+          <p:cNvPr id="2" name="TextBox 1"/>
+          <p:cNvSpPr txBox="1"/>
+          <p:nvPr/>
+        </p:nvSpPr>
+        <p:spPr>
+          <a:xfrm>
+            <a:off x="432000" y="180000"/>
+            <a:ext cx="11329200" cy="540000"/>
+          </a:xfrm>
+          <a:prstGeom prst="rect">
+            <a:avLst/>
+          </a:prstGeom>
+          <a:noFill/>
+        </p:spPr>
+        <p:txBody>
+          <a:bodyPr wrap="square" anchor="t" lIns="0" rIns="0" tIns="0" bIns="0">
+            <a:spAutoFit/>
+          </a:bodyPr>
+          <a:lstStyle/>
+          <a:p>
+            <a:pPr algn="ctr">
+              <a:spcAft>
+                <a:spcPts val="0"/>
+              </a:spcAft>
+            </a:pPr>
+            <a:r>
+              <a:rPr sz="2800" b="1" i="0">
+                <a:solidFill>
+                  <a:srgbClr val="000000"/>
+                </a:solidFill>
+                <a:latin typeface="Times New Roman"/>
+                <a:ea typeface="標楷體"/>
+                <a:ea typeface="標楷體"/>
+              </a:rPr>
+              <a:t>三、先確認：氣體讀數什麼時候可信</a:t>
+            </a:r>
+          </a:p>
+        </p:txBody>
+      </p:sp>
+      <p:sp>
+        <p:nvSpPr>
+          <p:cNvPr id="3" name="Rectangle 2"/>
           <p:cNvSpPr/>
           <p:nvPr/>
         </p:nvSpPr>
         <p:spPr>
           <a:xfrm>
-            <a:off x="432000" y="5562000"/>
-            <a:ext cx="11329200" cy="864000"/>
+            <a:off x="216000" y="763200"/>
+            <a:ext cx="11761200" cy="18000"/>
           </a:xfrm>
           <a:prstGeom prst="rect">
             <a:avLst/>
           </a:prstGeom>
           <a:solidFill>
-            <a:srgbClr val="F2F7FC"/>
+            <a:srgbClr val="2AB6D8"/>
           </a:solidFill>
-          <a:ln w="9525">
-            <a:solidFill>
-              <a:srgbClr val="2AB6D8"/>
-            </a:solidFill>
+          <a:ln>
+            <a:noFill/>
           </a:ln>
           <a:effectLst/>
         </p:spPr>
@@ -11563,14 +9728,14 @@
       </p:sp>
       <p:sp>
         <p:nvSpPr>
-          <p:cNvPr id="9" name="TextBox 8"/>
+          <p:cNvPr id="4" name="TextBox 3"/>
           <p:cNvSpPr txBox="1"/>
           <p:nvPr/>
         </p:nvSpPr>
         <p:spPr>
           <a:xfrm>
-            <a:off x="612000" y="5670000"/>
-            <a:ext cx="10969200" cy="648000"/>
+            <a:off x="503999" y="842400"/>
+            <a:ext cx="11185201" cy="251999"/>
           </a:xfrm>
           <a:prstGeom prst="rect">
             <a:avLst/>
@@ -11578,10 +9743,946 @@
           <a:noFill/>
         </p:spPr>
         <p:txBody>
-          <a:bodyPr wrap="square" anchor="ctr" lIns="0" rIns="0" tIns="0" bIns="0">
+          <a:bodyPr wrap="square" anchor="t" lIns="0" rIns="0" tIns="0" bIns="0">
             <a:spAutoFit/>
           </a:bodyPr>
           <a:lstStyle/>
+          <a:p>
+            <a:pPr algn="ctr">
+              <a:spcAft>
+                <a:spcPts val="600"/>
+              </a:spcAft>
+            </a:pPr>
+            <a:r>
+              <a:rPr sz="1300" b="0" i="0">
+                <a:solidFill>
+                  <a:srgbClr val="595959"/>
+                </a:solidFill>
+                <a:latin typeface="Times New Roman"/>
+                <a:ea typeface="標楷體"/>
+                <a:ea typeface="標楷體"/>
+              </a:rPr>
+              <a:t>補氣加入的是二氧化碳與氫氣、不含甲烷，真頂空必定被稀釋</a:t>
+            </a:r>
+          </a:p>
+        </p:txBody>
+      </p:sp>
+      <p:sp>
+        <p:nvSpPr>
+          <p:cNvPr id="5" name="Rectangle 4"/>
+          <p:cNvSpPr/>
+          <p:nvPr/>
+        </p:nvSpPr>
+        <p:spPr>
+          <a:xfrm>
+            <a:off x="0" y="6552000"/>
+            <a:ext cx="12193200" cy="306000"/>
+          </a:xfrm>
+          <a:prstGeom prst="rect">
+            <a:avLst/>
+          </a:prstGeom>
+          <a:solidFill>
+            <a:srgbClr val="2E8BC0"/>
+          </a:solidFill>
+          <a:ln>
+            <a:noFill/>
+          </a:ln>
+          <a:effectLst/>
+        </p:spPr>
+        <p:style>
+          <a:lnRef idx="1">
+            <a:schemeClr val="accent1"/>
+          </a:lnRef>
+          <a:fillRef idx="3">
+            <a:schemeClr val="accent1"/>
+          </a:fillRef>
+          <a:effectRef idx="2">
+            <a:schemeClr val="accent1"/>
+          </a:effectRef>
+          <a:fontRef idx="minor">
+            <a:schemeClr val="lt1"/>
+          </a:fontRef>
+        </p:style>
+        <p:txBody>
+          <a:bodyPr rtlCol="0" anchor="ctr"/>
+          <a:lstStyle/>
+          <a:p>
+            <a:pPr algn="ctr"/>
+          </a:p>
+        </p:txBody>
+      </p:sp>
+      <p:sp>
+        <p:nvSpPr>
+          <p:cNvPr id="6" name="TextBox 5"/>
+          <p:cNvSpPr txBox="1"/>
+          <p:nvPr/>
+        </p:nvSpPr>
+        <p:spPr>
+          <a:xfrm>
+            <a:off x="11329200" y="6577200"/>
+            <a:ext cx="576000" cy="216000"/>
+          </a:xfrm>
+          <a:prstGeom prst="rect">
+            <a:avLst/>
+          </a:prstGeom>
+          <a:noFill/>
+        </p:spPr>
+        <p:txBody>
+          <a:bodyPr wrap="square" anchor="t" lIns="0" rIns="0" tIns="0" bIns="0">
+            <a:spAutoFit/>
+          </a:bodyPr>
+          <a:lstStyle/>
+          <a:p>
+            <a:pPr algn="r">
+              <a:spcAft>
+                <a:spcPts val="600"/>
+              </a:spcAft>
+            </a:pPr>
+            <a:r>
+              <a:rPr sz="1100" b="0" i="0">
+                <a:solidFill>
+                  <a:srgbClr val="FFFFFF"/>
+                </a:solidFill>
+                <a:latin typeface="Times New Roman"/>
+                <a:ea typeface="標楷體"/>
+                <a:ea typeface="標楷體"/>
+              </a:rPr>
+              <a:t>5</a:t>
+            </a:r>
+          </a:p>
+        </p:txBody>
+      </p:sp>
+      <p:pic>
+        <p:nvPicPr>
+          <p:cNvPr id="7" name="Picture 6" descr="deck1_sensor.png"/>
+          <p:cNvPicPr>
+            <a:picLocks noChangeAspect="1"/>
+          </p:cNvPicPr>
+          <p:nvPr/>
+        </p:nvPicPr>
+        <p:blipFill>
+          <a:blip r:embed="rId2"/>
+          <a:stretch>
+            <a:fillRect/>
+          </a:stretch>
+        </p:blipFill>
+        <p:spPr>
+          <a:xfrm>
+            <a:off x="1596599" y="1224000"/>
+            <a:ext cx="9000000" cy="4475531"/>
+          </a:xfrm>
+          <a:prstGeom prst="rect">
+            <a:avLst/>
+          </a:prstGeom>
+        </p:spPr>
+      </p:pic>
+      <p:sp>
+        <p:nvSpPr>
+          <p:cNvPr id="8" name="TextBox 7"/>
+          <p:cNvSpPr txBox="1"/>
+          <p:nvPr/>
+        </p:nvSpPr>
+        <p:spPr>
+          <a:xfrm>
+            <a:off x="576000" y="5789531"/>
+            <a:ext cx="11041200" cy="744468"/>
+          </a:xfrm>
+          <a:prstGeom prst="rect">
+            <a:avLst/>
+          </a:prstGeom>
+          <a:noFill/>
+        </p:spPr>
+        <p:txBody>
+          <a:bodyPr wrap="square" anchor="t" lIns="0" rIns="0" tIns="0" bIns="0">
+            <a:spAutoFit/>
+          </a:bodyPr>
+          <a:lstStyle/>
+          <a:p>
+            <a:pPr algn="ctr">
+              <a:spcAft>
+                <a:spcPts val="600"/>
+              </a:spcAft>
+            </a:pPr>
+            <a:r>
+              <a:rPr sz="1700" b="0" i="0">
+                <a:solidFill>
+                  <a:srgbClr val="000000"/>
+                </a:solidFill>
+                <a:latin typeface="Times New Roman"/>
+                <a:ea typeface="標楷體"/>
+                <a:ea typeface="標楷體"/>
+              </a:rPr>
+              <a:t>實測斜率 </a:t>
+            </a:r>
+            <a:r>
+              <a:rPr sz="1900" b="1" i="0">
+                <a:solidFill>
+                  <a:srgbClr val="FF0000"/>
+                </a:solidFill>
+                <a:latin typeface="Times New Roman"/>
+                <a:ea typeface="標楷體"/>
+                <a:ea typeface="標楷體"/>
+              </a:rPr>
+              <a:t>+0.008 ± 0.225</a:t>
+            </a:r>
+            <a:r>
+              <a:rPr sz="1700" b="0" i="0">
+                <a:solidFill>
+                  <a:srgbClr val="000000"/>
+                </a:solidFill>
+                <a:latin typeface="Times New Roman"/>
+                <a:ea typeface="標楷體"/>
+                <a:ea typeface="標楷體"/>
+              </a:rPr>
+              <a:t>，距「真頂空」應有的 −1 有 4.5 個標準差。分析儀只有在排氣當下的一至二分鐘可信——全資料庫僅 35 筆，後續所有氣體計算只用這 35 筆。</a:t>
+            </a:r>
+          </a:p>
+        </p:txBody>
+      </p:sp>
+    </p:spTree>
+  </p:cSld>
+  <p:clrMapOvr>
+    <a:masterClrMapping/>
+  </p:clrMapOvr>
+</p:sld>
+</file>
+
+<file path=ppt/slides/slide5.xml><?xml version="1.0" encoding="utf-8"?>
+<p:sld xmlns:a="http://schemas.openxmlformats.org/drawingml/2006/main" xmlns:p="http://schemas.openxmlformats.org/presentationml/2006/main" xmlns:r="http://schemas.openxmlformats.org/officeDocument/2006/relationships">
+  <p:cSld>
+    <p:spTree>
+      <p:nvGrpSpPr>
+        <p:cNvPr id="1" name=""/>
+        <p:cNvGrpSpPr/>
+        <p:nvPr/>
+      </p:nvGrpSpPr>
+      <p:grpSpPr/>
+      <p:sp>
+        <p:nvSpPr>
+          <p:cNvPr id="2" name="TextBox 1"/>
+          <p:cNvSpPr txBox="1"/>
+          <p:nvPr/>
+        </p:nvSpPr>
+        <p:spPr>
+          <a:xfrm>
+            <a:off x="432000" y="180000"/>
+            <a:ext cx="11329200" cy="540000"/>
+          </a:xfrm>
+          <a:prstGeom prst="rect">
+            <a:avLst/>
+          </a:prstGeom>
+          <a:noFill/>
+        </p:spPr>
+        <p:txBody>
+          <a:bodyPr wrap="square" anchor="t" lIns="0" rIns="0" tIns="0" bIns="0">
+            <a:spAutoFit/>
+          </a:bodyPr>
+          <a:lstStyle/>
+          <a:p>
+            <a:pPr algn="ctr">
+              <a:spcAft>
+                <a:spcPts val="0"/>
+              </a:spcAft>
+            </a:pPr>
+            <a:r>
+              <a:rPr sz="2800" b="1" i="0">
+                <a:solidFill>
+                  <a:srgbClr val="000000"/>
+                </a:solidFill>
+                <a:latin typeface="Times New Roman"/>
+                <a:ea typeface="標楷體"/>
+                <a:ea typeface="標楷體"/>
+              </a:rPr>
+              <a:t>四、殘餘氣體的 </a:t>
+            </a:r>
+            <a:r>
+              <a:rPr sz="2800" b="1" i="0">
+                <a:solidFill>
+                  <a:srgbClr val="000000"/>
+                </a:solidFill>
+                <a:latin typeface="Times New Roman"/>
+                <a:ea typeface="標楷體"/>
+                <a:ea typeface="標楷體"/>
+              </a:rPr>
+              <a:t>CO</a:t>
+            </a:r>
+            <a:r>
+              <a:rPr sz="2800" b="1" i="0">
+                <a:solidFill>
+                  <a:srgbClr val="000000"/>
+                </a:solidFill>
+                <a:latin typeface="Times New Roman"/>
+                <a:ea typeface="標楷體"/>
+                <a:ea typeface="標楷體"/>
+              </a:rPr>
+              <a:t>₂:</a:t>
+            </a:r>
+            <a:r>
+              <a:rPr sz="2800" b="1" i="0">
+                <a:solidFill>
+                  <a:srgbClr val="000000"/>
+                </a:solidFill>
+                <a:latin typeface="Times New Roman"/>
+                <a:ea typeface="標楷體"/>
+                <a:ea typeface="標楷體"/>
+              </a:rPr>
+              <a:t>H</a:t>
+            </a:r>
+            <a:r>
+              <a:rPr sz="2800" b="1" i="0">
+                <a:solidFill>
+                  <a:srgbClr val="000000"/>
+                </a:solidFill>
+                <a:latin typeface="Times New Roman"/>
+                <a:ea typeface="標楷體"/>
+                <a:ea typeface="標楷體"/>
+              </a:rPr>
+              <a:t>₂ 偏離進料比</a:t>
+            </a:r>
+          </a:p>
+        </p:txBody>
+      </p:sp>
+      <p:sp>
+        <p:nvSpPr>
+          <p:cNvPr id="3" name="Rectangle 2"/>
+          <p:cNvSpPr/>
+          <p:nvPr/>
+        </p:nvSpPr>
+        <p:spPr>
+          <a:xfrm>
+            <a:off x="216000" y="763200"/>
+            <a:ext cx="11761200" cy="18000"/>
+          </a:xfrm>
+          <a:prstGeom prst="rect">
+            <a:avLst/>
+          </a:prstGeom>
+          <a:solidFill>
+            <a:srgbClr val="2AB6D8"/>
+          </a:solidFill>
+          <a:ln>
+            <a:noFill/>
+          </a:ln>
+          <a:effectLst/>
+        </p:spPr>
+        <p:style>
+          <a:lnRef idx="1">
+            <a:schemeClr val="accent1"/>
+          </a:lnRef>
+          <a:fillRef idx="3">
+            <a:schemeClr val="accent1"/>
+          </a:fillRef>
+          <a:effectRef idx="2">
+            <a:schemeClr val="accent1"/>
+          </a:effectRef>
+          <a:fontRef idx="minor">
+            <a:schemeClr val="lt1"/>
+          </a:fontRef>
+        </p:style>
+        <p:txBody>
+          <a:bodyPr rtlCol="0" anchor="ctr"/>
+          <a:lstStyle/>
+          <a:p>
+            <a:pPr algn="ctr"/>
+          </a:p>
+        </p:txBody>
+      </p:sp>
+      <p:sp>
+        <p:nvSpPr>
+          <p:cNvPr id="4" name="TextBox 3"/>
+          <p:cNvSpPr txBox="1"/>
+          <p:nvPr/>
+        </p:nvSpPr>
+        <p:spPr>
+          <a:xfrm>
+            <a:off x="503999" y="842400"/>
+            <a:ext cx="11185201" cy="251999"/>
+          </a:xfrm>
+          <a:prstGeom prst="rect">
+            <a:avLst/>
+          </a:prstGeom>
+          <a:noFill/>
+        </p:spPr>
+        <p:txBody>
+          <a:bodyPr wrap="square" anchor="t" lIns="0" rIns="0" tIns="0" bIns="0">
+            <a:spAutoFit/>
+          </a:bodyPr>
+          <a:lstStyle/>
+          <a:p>
+            <a:pPr algn="ctr">
+              <a:spcAft>
+                <a:spcPts val="600"/>
+              </a:spcAft>
+            </a:pPr>
+            <a:r>
+              <a:rPr sz="1300" b="0" i="0">
+                <a:solidFill>
+                  <a:srgbClr val="595959"/>
+                </a:solidFill>
+                <a:latin typeface="Times New Roman"/>
+                <a:ea typeface="標楷體"/>
+                <a:ea typeface="標楷體"/>
+              </a:rPr>
+              <a:t>紅色虛線 = 只有產甲烷反應時應有的位置</a:t>
+            </a:r>
+          </a:p>
+        </p:txBody>
+      </p:sp>
+      <p:sp>
+        <p:nvSpPr>
+          <p:cNvPr id="5" name="Rectangle 4"/>
+          <p:cNvSpPr/>
+          <p:nvPr/>
+        </p:nvSpPr>
+        <p:spPr>
+          <a:xfrm>
+            <a:off x="0" y="6552000"/>
+            <a:ext cx="12193200" cy="306000"/>
+          </a:xfrm>
+          <a:prstGeom prst="rect">
+            <a:avLst/>
+          </a:prstGeom>
+          <a:solidFill>
+            <a:srgbClr val="2E8BC0"/>
+          </a:solidFill>
+          <a:ln>
+            <a:noFill/>
+          </a:ln>
+          <a:effectLst/>
+        </p:spPr>
+        <p:style>
+          <a:lnRef idx="1">
+            <a:schemeClr val="accent1"/>
+          </a:lnRef>
+          <a:fillRef idx="3">
+            <a:schemeClr val="accent1"/>
+          </a:fillRef>
+          <a:effectRef idx="2">
+            <a:schemeClr val="accent1"/>
+          </a:effectRef>
+          <a:fontRef idx="minor">
+            <a:schemeClr val="lt1"/>
+          </a:fontRef>
+        </p:style>
+        <p:txBody>
+          <a:bodyPr rtlCol="0" anchor="ctr"/>
+          <a:lstStyle/>
+          <a:p>
+            <a:pPr algn="ctr"/>
+          </a:p>
+        </p:txBody>
+      </p:sp>
+      <p:sp>
+        <p:nvSpPr>
+          <p:cNvPr id="6" name="TextBox 5"/>
+          <p:cNvSpPr txBox="1"/>
+          <p:nvPr/>
+        </p:nvSpPr>
+        <p:spPr>
+          <a:xfrm>
+            <a:off x="11329200" y="6577200"/>
+            <a:ext cx="576000" cy="216000"/>
+          </a:xfrm>
+          <a:prstGeom prst="rect">
+            <a:avLst/>
+          </a:prstGeom>
+          <a:noFill/>
+        </p:spPr>
+        <p:txBody>
+          <a:bodyPr wrap="square" anchor="t" lIns="0" rIns="0" tIns="0" bIns="0">
+            <a:spAutoFit/>
+          </a:bodyPr>
+          <a:lstStyle/>
+          <a:p>
+            <a:pPr algn="r">
+              <a:spcAft>
+                <a:spcPts val="600"/>
+              </a:spcAft>
+            </a:pPr>
+            <a:r>
+              <a:rPr sz="1100" b="0" i="0">
+                <a:solidFill>
+                  <a:srgbClr val="FFFFFF"/>
+                </a:solidFill>
+                <a:latin typeface="Times New Roman"/>
+                <a:ea typeface="標楷體"/>
+                <a:ea typeface="標楷體"/>
+              </a:rPr>
+              <a:t>6</a:t>
+            </a:r>
+          </a:p>
+        </p:txBody>
+      </p:sp>
+      <p:pic>
+        <p:nvPicPr>
+          <p:cNvPr id="7" name="Picture 6" descr="deck2_hydrogen.png"/>
+          <p:cNvPicPr>
+            <a:picLocks noChangeAspect="1"/>
+          </p:cNvPicPr>
+          <p:nvPr/>
+        </p:nvPicPr>
+        <p:blipFill>
+          <a:blip r:embed="rId2"/>
+          <a:stretch>
+            <a:fillRect/>
+          </a:stretch>
+        </p:blipFill>
+        <p:spPr>
+          <a:xfrm>
+            <a:off x="1596599" y="1188000"/>
+            <a:ext cx="9000000" cy="4613445"/>
+          </a:xfrm>
+          <a:prstGeom prst="rect">
+            <a:avLst/>
+          </a:prstGeom>
+        </p:spPr>
+      </p:pic>
+      <p:sp>
+        <p:nvSpPr>
+          <p:cNvPr id="8" name="TextBox 7"/>
+          <p:cNvSpPr txBox="1"/>
+          <p:nvPr/>
+        </p:nvSpPr>
+        <p:spPr>
+          <a:xfrm>
+            <a:off x="576000" y="5891445"/>
+            <a:ext cx="11041200" cy="642554"/>
+          </a:xfrm>
+          <a:prstGeom prst="rect">
+            <a:avLst/>
+          </a:prstGeom>
+          <a:noFill/>
+        </p:spPr>
+        <p:txBody>
+          <a:bodyPr wrap="square" anchor="t" lIns="0" rIns="0" tIns="0" bIns="0">
+            <a:spAutoFit/>
+          </a:bodyPr>
+          <a:lstStyle/>
+          <a:p>
+            <a:pPr algn="ctr">
+              <a:spcAft>
+                <a:spcPts val="600"/>
+              </a:spcAft>
+            </a:pPr>
+            <a:r>
+              <a:rPr sz="1700" b="1" i="0">
+                <a:solidFill>
+                  <a:srgbClr val="FF0000"/>
+                </a:solidFill>
+                <a:latin typeface="Times New Roman"/>
+                <a:ea typeface="標楷體"/>
+                <a:ea typeface="標楷體"/>
+              </a:rPr>
+              <a:t>34 / 35 次高於進料比　｜　中位 2.79 倍　｜　</a:t>
+            </a:r>
+            <a:r>
+              <a:rPr sz="1700" b="1" i="1">
+                <a:solidFill>
+                  <a:srgbClr val="FF0000"/>
+                </a:solidFill>
+                <a:latin typeface="Times New Roman"/>
+                <a:ea typeface="標楷體"/>
+                <a:ea typeface="標楷體"/>
+              </a:rPr>
+              <a:t>p</a:t>
+            </a:r>
+            <a:r>
+              <a:rPr sz="1700" b="1" i="0">
+                <a:solidFill>
+                  <a:srgbClr val="FF0000"/>
+                </a:solidFill>
+                <a:latin typeface="Times New Roman"/>
+                <a:ea typeface="標楷體"/>
+                <a:ea typeface="標楷體"/>
+              </a:rPr>
+              <a:t> &lt; 0.0001。★把甲烷當零的最壞情況下仍有 1.33 倍（25/35，</a:t>
+            </a:r>
+            <a:r>
+              <a:rPr sz="1700" b="1" i="1">
+                <a:solidFill>
+                  <a:srgbClr val="FF0000"/>
+                </a:solidFill>
+                <a:latin typeface="Times New Roman"/>
+                <a:ea typeface="標楷體"/>
+                <a:ea typeface="標楷體"/>
+              </a:rPr>
+              <a:t>p</a:t>
+            </a:r>
+            <a:r>
+              <a:rPr sz="1700" b="1" i="0">
+                <a:solidFill>
+                  <a:srgbClr val="FF0000"/>
+                </a:solidFill>
+                <a:latin typeface="Times New Roman"/>
+                <a:ea typeface="標楷體"/>
+                <a:ea typeface="標楷體"/>
+              </a:rPr>
+              <a:t>=0.031）</a:t>
+            </a:r>
+          </a:p>
+        </p:txBody>
+      </p:sp>
+    </p:spTree>
+  </p:cSld>
+  <p:clrMapOvr>
+    <a:masterClrMapping/>
+  </p:clrMapOvr>
+</p:sld>
+</file>
+
+<file path=ppt/slides/slide6.xml><?xml version="1.0" encoding="utf-8"?>
+<p:sld xmlns:a="http://schemas.openxmlformats.org/drawingml/2006/main" xmlns:p="http://schemas.openxmlformats.org/presentationml/2006/main" xmlns:r="http://schemas.openxmlformats.org/officeDocument/2006/relationships">
+  <p:cSld>
+    <p:spTree>
+      <p:nvGrpSpPr>
+        <p:cNvPr id="1" name=""/>
+        <p:cNvGrpSpPr/>
+        <p:nvPr/>
+      </p:nvGrpSpPr>
+      <p:grpSpPr/>
+      <p:sp>
+        <p:nvSpPr>
+          <p:cNvPr id="2" name="TextBox 1"/>
+          <p:cNvSpPr txBox="1"/>
+          <p:nvPr/>
+        </p:nvSpPr>
+        <p:spPr>
+          <a:xfrm>
+            <a:off x="432000" y="180000"/>
+            <a:ext cx="11329200" cy="540000"/>
+          </a:xfrm>
+          <a:prstGeom prst="rect">
+            <a:avLst/>
+          </a:prstGeom>
+          <a:noFill/>
+        </p:spPr>
+        <p:txBody>
+          <a:bodyPr wrap="square" anchor="t" lIns="0" rIns="0" tIns="0" bIns="0">
+            <a:spAutoFit/>
+          </a:bodyPr>
+          <a:lstStyle/>
+          <a:p>
+            <a:pPr algn="ctr">
+              <a:spcAft>
+                <a:spcPts val="0"/>
+              </a:spcAft>
+            </a:pPr>
+            <a:r>
+              <a:rPr sz="2800" b="1" i="0">
+                <a:solidFill>
+                  <a:srgbClr val="000000"/>
+                </a:solidFill>
+                <a:latin typeface="Times New Roman"/>
+                <a:ea typeface="標楷體"/>
+                <a:ea typeface="標楷體"/>
+              </a:rPr>
+              <a:t>五、這不是量測誤差造成的</a:t>
+            </a:r>
+          </a:p>
+        </p:txBody>
+      </p:sp>
+      <p:sp>
+        <p:nvSpPr>
+          <p:cNvPr id="3" name="Rectangle 2"/>
+          <p:cNvSpPr/>
+          <p:nvPr/>
+        </p:nvSpPr>
+        <p:spPr>
+          <a:xfrm>
+            <a:off x="216000" y="763200"/>
+            <a:ext cx="11761200" cy="18000"/>
+          </a:xfrm>
+          <a:prstGeom prst="rect">
+            <a:avLst/>
+          </a:prstGeom>
+          <a:solidFill>
+            <a:srgbClr val="2AB6D8"/>
+          </a:solidFill>
+          <a:ln>
+            <a:noFill/>
+          </a:ln>
+          <a:effectLst/>
+        </p:spPr>
+        <p:style>
+          <a:lnRef idx="1">
+            <a:schemeClr val="accent1"/>
+          </a:lnRef>
+          <a:fillRef idx="3">
+            <a:schemeClr val="accent1"/>
+          </a:fillRef>
+          <a:effectRef idx="2">
+            <a:schemeClr val="accent1"/>
+          </a:effectRef>
+          <a:fontRef idx="minor">
+            <a:schemeClr val="lt1"/>
+          </a:fontRef>
+        </p:style>
+        <p:txBody>
+          <a:bodyPr rtlCol="0" anchor="ctr"/>
+          <a:lstStyle/>
+          <a:p>
+            <a:pPr algn="ctr"/>
+          </a:p>
+        </p:txBody>
+      </p:sp>
+      <p:sp>
+        <p:nvSpPr>
+          <p:cNvPr id="4" name="TextBox 3"/>
+          <p:cNvSpPr txBox="1"/>
+          <p:nvPr/>
+        </p:nvSpPr>
+        <p:spPr>
+          <a:xfrm>
+            <a:off x="503999" y="842400"/>
+            <a:ext cx="11185201" cy="251999"/>
+          </a:xfrm>
+          <a:prstGeom prst="rect">
+            <a:avLst/>
+          </a:prstGeom>
+          <a:noFill/>
+        </p:spPr>
+        <p:txBody>
+          <a:bodyPr wrap="square" anchor="t" lIns="0" rIns="0" tIns="0" bIns="0">
+            <a:spAutoFit/>
+          </a:bodyPr>
+          <a:lstStyle/>
+          <a:p>
+            <a:pPr algn="ctr">
+              <a:spcAft>
+                <a:spcPts val="600"/>
+              </a:spcAft>
+            </a:pPr>
+            <a:r>
+              <a:rPr sz="1300" b="0" i="0">
+                <a:solidFill>
+                  <a:srgbClr val="595959"/>
+                </a:solidFill>
+                <a:latin typeface="Times New Roman"/>
+                <a:ea typeface="標楷體"/>
+                <a:ea typeface="標楷體"/>
+              </a:rPr>
+              <a:t>以 2026-07-30 那次排氣為例</a:t>
+            </a:r>
+          </a:p>
+        </p:txBody>
+      </p:sp>
+      <p:sp>
+        <p:nvSpPr>
+          <p:cNvPr id="5" name="Rectangle 4"/>
+          <p:cNvSpPr/>
+          <p:nvPr/>
+        </p:nvSpPr>
+        <p:spPr>
+          <a:xfrm>
+            <a:off x="0" y="6552000"/>
+            <a:ext cx="12193200" cy="306000"/>
+          </a:xfrm>
+          <a:prstGeom prst="rect">
+            <a:avLst/>
+          </a:prstGeom>
+          <a:solidFill>
+            <a:srgbClr val="2E8BC0"/>
+          </a:solidFill>
+          <a:ln>
+            <a:noFill/>
+          </a:ln>
+          <a:effectLst/>
+        </p:spPr>
+        <p:style>
+          <a:lnRef idx="1">
+            <a:schemeClr val="accent1"/>
+          </a:lnRef>
+          <a:fillRef idx="3">
+            <a:schemeClr val="accent1"/>
+          </a:fillRef>
+          <a:effectRef idx="2">
+            <a:schemeClr val="accent1"/>
+          </a:effectRef>
+          <a:fontRef idx="minor">
+            <a:schemeClr val="lt1"/>
+          </a:fontRef>
+        </p:style>
+        <p:txBody>
+          <a:bodyPr rtlCol="0" anchor="ctr"/>
+          <a:lstStyle/>
+          <a:p>
+            <a:pPr algn="ctr"/>
+          </a:p>
+        </p:txBody>
+      </p:sp>
+      <p:sp>
+        <p:nvSpPr>
+          <p:cNvPr id="6" name="TextBox 5"/>
+          <p:cNvSpPr txBox="1"/>
+          <p:nvPr/>
+        </p:nvSpPr>
+        <p:spPr>
+          <a:xfrm>
+            <a:off x="11329200" y="6577200"/>
+            <a:ext cx="576000" cy="216000"/>
+          </a:xfrm>
+          <a:prstGeom prst="rect">
+            <a:avLst/>
+          </a:prstGeom>
+          <a:noFill/>
+        </p:spPr>
+        <p:txBody>
+          <a:bodyPr wrap="square" anchor="t" lIns="0" rIns="0" tIns="0" bIns="0">
+            <a:spAutoFit/>
+          </a:bodyPr>
+          <a:lstStyle/>
+          <a:p>
+            <a:pPr algn="r">
+              <a:spcAft>
+                <a:spcPts val="600"/>
+              </a:spcAft>
+            </a:pPr>
+            <a:r>
+              <a:rPr sz="1100" b="0" i="0">
+                <a:solidFill>
+                  <a:srgbClr val="FFFFFF"/>
+                </a:solidFill>
+                <a:latin typeface="Times New Roman"/>
+                <a:ea typeface="標楷體"/>
+                <a:ea typeface="標楷體"/>
+              </a:rPr>
+              <a:t>7</a:t>
+            </a:r>
+          </a:p>
+        </p:txBody>
+      </p:sp>
+      <p:sp>
+        <p:nvSpPr>
+          <p:cNvPr id="7" name="TextBox 6"/>
+          <p:cNvSpPr txBox="1"/>
+          <p:nvPr/>
+        </p:nvSpPr>
+        <p:spPr>
+          <a:xfrm>
+            <a:off x="576000" y="1440000"/>
+            <a:ext cx="11041200" cy="3960000"/>
+          </a:xfrm>
+          <a:prstGeom prst="rect">
+            <a:avLst/>
+          </a:prstGeom>
+          <a:noFill/>
+        </p:spPr>
+        <p:txBody>
+          <a:bodyPr wrap="square" anchor="t" lIns="0" rIns="0" tIns="0" bIns="0">
+            <a:spAutoFit/>
+          </a:bodyPr>
+          <a:lstStyle/>
+          <a:p>
+            <a:pPr algn="l">
+              <a:spcAft>
+                <a:spcPts val="1400"/>
+              </a:spcAft>
+            </a:pPr>
+            <a:r>
+              <a:rPr sz="2000" b="1" i="0">
+                <a:solidFill>
+                  <a:srgbClr val="000000"/>
+                </a:solidFill>
+                <a:latin typeface="Times New Roman"/>
+                <a:ea typeface="標楷體"/>
+                <a:ea typeface="標楷體"/>
+              </a:rPr>
+              <a:t>量測到：二氧化碳 21.3%、甲烷 34.79%</a:t>
+            </a:r>
+          </a:p>
+          <a:p>
+            <a:pPr algn="l">
+              <a:spcAft>
+                <a:spcPts val="1400"/>
+              </a:spcAft>
+            </a:pPr>
+            <a:r>
+              <a:rPr sz="1800" b="0" i="0">
+                <a:solidFill>
+                  <a:srgbClr val="000000"/>
+                </a:solidFill>
+                <a:latin typeface="Times New Roman"/>
+                <a:ea typeface="標楷體"/>
+                <a:ea typeface="標楷體"/>
+              </a:rPr>
+              <a:t>若殘餘氣體真的維持 1:4，扣除甲烷與水蒸氣後，二氧化碳應該只有 </a:t>
+            </a:r>
+            <a:r>
+              <a:rPr sz="2000" b="1" i="0">
+                <a:solidFill>
+                  <a:srgbClr val="1F6FB5"/>
+                </a:solidFill>
+                <a:latin typeface="Times New Roman"/>
+                <a:ea typeface="標楷體"/>
+                <a:ea typeface="標楷體"/>
+              </a:rPr>
+              <a:t>12.6%</a:t>
+            </a:r>
+          </a:p>
+          <a:p>
+            <a:pPr algn="l">
+              <a:spcAft>
+                <a:spcPts val="1400"/>
+              </a:spcAft>
+            </a:pPr>
+            <a:r>
+              <a:rPr sz="1800" b="0" i="0">
+                <a:solidFill>
+                  <a:srgbClr val="000000"/>
+                </a:solidFill>
+                <a:latin typeface="Times New Roman"/>
+                <a:ea typeface="標楷體"/>
+                <a:ea typeface="標楷體"/>
+              </a:rPr>
+              <a:t>即使把甲烷讀數</a:t>
+            </a:r>
+            <a:r>
+              <a:rPr sz="2000" b="1" i="0">
+                <a:solidFill>
+                  <a:srgbClr val="FF0000"/>
+                </a:solidFill>
+                <a:latin typeface="Times New Roman"/>
+                <a:ea typeface="標楷體"/>
+                <a:ea typeface="標楷體"/>
+              </a:rPr>
+              <a:t>全部當成零</a:t>
+            </a:r>
+            <a:r>
+              <a:rPr sz="1800" b="0" i="0">
+                <a:solidFill>
+                  <a:srgbClr val="000000"/>
+                </a:solidFill>
+                <a:latin typeface="Times New Roman"/>
+                <a:ea typeface="標楷體"/>
+                <a:ea typeface="標楷體"/>
+              </a:rPr>
+              <a:t>（最極端的假設），氫氣上限也只有 78.7%，比值仍為 0.27</a:t>
+            </a:r>
+          </a:p>
+          <a:p>
+            <a:pPr algn="l">
+              <a:spcAft>
+                <a:spcPts val="1000"/>
+              </a:spcAft>
+            </a:pPr>
+          </a:p>
+          <a:p>
+            <a:pPr algn="l">
+              <a:spcAft>
+                <a:spcPts val="1600"/>
+              </a:spcAft>
+            </a:pPr>
+            <a:r>
+              <a:rPr sz="2200" b="1" i="0">
+                <a:solidFill>
+                  <a:srgbClr val="FF0000"/>
+                </a:solidFill>
+                <a:latin typeface="Times New Roman"/>
+                <a:ea typeface="標楷體"/>
+                <a:ea typeface="標楷體"/>
+              </a:rPr>
+              <a:t>也就是說——二氧化碳的實測值本身，就高到與 1:4 不相容。</a:t>
+            </a:r>
+          </a:p>
           <a:p>
             <a:pPr algn="l">
               <a:spcAft>
@@ -11589,6 +10690,93 @@
               </a:spcAft>
             </a:pPr>
             <a:r>
+              <a:rPr sz="1600" b="0" i="0">
+                <a:solidFill>
+                  <a:srgbClr val="595959"/>
+                </a:solidFill>
+                <a:latin typeface="Times New Roman"/>
+                <a:ea typeface="標楷體"/>
+                <a:ea typeface="標楷體"/>
+              </a:rPr>
+              <a:t>量級換算（保守估計）：要讓比值漂移到實測中位數，需要額外移除約 2.57 莫耳氫氣，相當於進料氫氣的 64%。</a:t>
+            </a:r>
+          </a:p>
+        </p:txBody>
+      </p:sp>
+      <p:sp>
+        <p:nvSpPr>
+          <p:cNvPr id="8" name="Rectangle 7"/>
+          <p:cNvSpPr/>
+          <p:nvPr/>
+        </p:nvSpPr>
+        <p:spPr>
+          <a:xfrm>
+            <a:off x="432000" y="5562000"/>
+            <a:ext cx="11329200" cy="864000"/>
+          </a:xfrm>
+          <a:prstGeom prst="rect">
+            <a:avLst/>
+          </a:prstGeom>
+          <a:solidFill>
+            <a:srgbClr val="F2F7FC"/>
+          </a:solidFill>
+          <a:ln w="9525">
+            <a:solidFill>
+              <a:srgbClr val="2AB6D8"/>
+            </a:solidFill>
+          </a:ln>
+          <a:effectLst/>
+        </p:spPr>
+        <p:style>
+          <a:lnRef idx="1">
+            <a:schemeClr val="accent1"/>
+          </a:lnRef>
+          <a:fillRef idx="3">
+            <a:schemeClr val="accent1"/>
+          </a:fillRef>
+          <a:effectRef idx="2">
+            <a:schemeClr val="accent1"/>
+          </a:effectRef>
+          <a:fontRef idx="minor">
+            <a:schemeClr val="lt1"/>
+          </a:fontRef>
+        </p:style>
+        <p:txBody>
+          <a:bodyPr rtlCol="0" anchor="ctr"/>
+          <a:lstStyle/>
+          <a:p>
+            <a:pPr algn="ctr"/>
+          </a:p>
+        </p:txBody>
+      </p:sp>
+      <p:sp>
+        <p:nvSpPr>
+          <p:cNvPr id="9" name="TextBox 8"/>
+          <p:cNvSpPr txBox="1"/>
+          <p:nvPr/>
+        </p:nvSpPr>
+        <p:spPr>
+          <a:xfrm>
+            <a:off x="612000" y="5670000"/>
+            <a:ext cx="10969200" cy="648000"/>
+          </a:xfrm>
+          <a:prstGeom prst="rect">
+            <a:avLst/>
+          </a:prstGeom>
+          <a:noFill/>
+        </p:spPr>
+        <p:txBody>
+          <a:bodyPr wrap="square" anchor="ctr" lIns="0" rIns="0" tIns="0" bIns="0">
+            <a:spAutoFit/>
+          </a:bodyPr>
+          <a:lstStyle/>
+          <a:p>
+            <a:pPr algn="l">
+              <a:spcAft>
+                <a:spcPts val="600"/>
+              </a:spcAft>
+            </a:pPr>
+            <a:r>
               <a:rPr sz="1300" b="0" i="0">
                 <a:solidFill>
                   <a:srgbClr val="FF0000"/>
@@ -11597,7 +10785,7 @@
                 <a:ea typeface="標楷體"/>
                 <a:ea typeface="標楷體"/>
               </a:rPr>
-              <a:t>★ 2026-09-23：這三項矛盾也能由「碳酸鹽脫氣」解釋，且不需要任何洩漏。★ 2026-09-27 又找到第三個解釋（排氣本身會挑掉氫氣），三者尚未分辨，見第 17、19 頁。</a:t>
+              <a:t>此換算為單次通過的保守估計，實際為連續補氣，數值僅示意量級。</a:t>
             </a:r>
           </a:p>
         </p:txBody>
@@ -11656,7 +10844,29 @@
                 <a:ea typeface="標楷體"/>
                 <a:ea typeface="標楷體"/>
               </a:rPr>
-              <a:t>九、佐證一：切斷碳源，壓降照舊</a:t>
+              <a:t>六、氧化還原電位（</a:t>
+            </a:r>
+            <a:r>
+              <a:rPr sz="2800" b="1" i="0">
+                <a:solidFill>
+                  <a:srgbClr val="000000"/>
+                </a:solidFill>
+                <a:latin typeface="Times New Roman"/>
+                <a:ea typeface="標楷體"/>
+                <a:ea typeface="標楷體"/>
+              </a:rPr>
+              <a:t>ORP</a:t>
+            </a:r>
+            <a:r>
+              <a:rPr sz="2800" b="1" i="0">
+                <a:solidFill>
+                  <a:srgbClr val="000000"/>
+                </a:solidFill>
+                <a:latin typeface="Times New Roman"/>
+                <a:ea typeface="標楷體"/>
+                <a:ea typeface="標楷體"/>
+              </a:rPr>
+              <a:t>）該怎麼讀</a:t>
             </a:r>
           </a:p>
         </p:txBody>
@@ -11741,7 +10951,7 @@
                 <a:ea typeface="標楷體"/>
                 <a:ea typeface="標楷體"/>
               </a:rPr>
-              <a:t>自動化批次 2026-08-11 ~ 08-31</a:t>
+              <a:t>水準健康，但循環內的變化不是生物造成的</a:t>
             </a:r>
           </a:p>
         </p:txBody>
@@ -11833,7 +11043,7 @@
       </p:sp>
       <p:pic>
         <p:nvPicPr>
-          <p:cNvPr id="7" name="Picture 6" descr="deck3_co2cut.png"/>
+          <p:cNvPr id="7" name="Picture 6" descr="deck5_orp.png"/>
           <p:cNvPicPr>
             <a:picLocks noChangeAspect="1"/>
           </p:cNvPicPr>
@@ -11847,8 +11057,8 @@
         </p:blipFill>
         <p:spPr>
           <a:xfrm>
-            <a:off x="2136599" y="1188000"/>
-            <a:ext cx="7920000" cy="4596600"/>
+            <a:off x="2856599" y="1152000"/>
+            <a:ext cx="6480000" cy="3165077"/>
           </a:xfrm>
           <a:prstGeom prst="rect">
             <a:avLst/>
@@ -11863,8 +11073,8 @@
         </p:nvSpPr>
         <p:spPr>
           <a:xfrm>
-            <a:off x="576000" y="5856599"/>
-            <a:ext cx="11041200" cy="659400"/>
+            <a:off x="576000" y="4425077"/>
+            <a:ext cx="11041200" cy="1154922"/>
           </a:xfrm>
           <a:prstGeom prst="rect">
             <a:avLst/>
@@ -11877,32 +11087,331 @@
           </a:bodyPr>
           <a:lstStyle/>
           <a:p>
-            <a:pPr algn="ctr">
+            <a:pPr algn="l">
+              <a:spcAft>
+                <a:spcPts val="500"/>
+              </a:spcAft>
+            </a:pPr>
+            <a:r>
+              <a:rPr sz="1700" b="1" i="0">
+                <a:solidFill>
+                  <a:srgbClr val="000000"/>
+                </a:solidFill>
+                <a:latin typeface="Times New Roman"/>
+                <a:ea typeface="標楷體"/>
+                <a:ea typeface="標楷體"/>
+              </a:rPr>
+              <a:t>水準：</a:t>
+            </a:r>
+            <a:r>
+              <a:rPr sz="1600" b="0" i="0">
+                <a:solidFill>
+                  <a:srgbClr val="000000"/>
+                </a:solidFill>
+                <a:latin typeface="Times New Roman"/>
+                <a:ea typeface="標楷體"/>
+                <a:ea typeface="標楷體"/>
+              </a:rPr>
+              <a:t>−357 </a:t>
+            </a:r>
+            <a:r>
+              <a:rPr sz="1600" b="0" i="0">
+                <a:solidFill>
+                  <a:srgbClr val="000000"/>
+                </a:solidFill>
+                <a:latin typeface="Times New Roman"/>
+                <a:ea typeface="標楷體"/>
+                <a:ea typeface="標楷體"/>
+              </a:rPr>
+              <a:t>mV</a:t>
+            </a:r>
+            <a:r>
+              <a:rPr sz="1600" b="0" i="0">
+                <a:solidFill>
+                  <a:srgbClr val="000000"/>
+                </a:solidFill>
+                <a:latin typeface="Times New Roman"/>
+                <a:ea typeface="標楷體"/>
+                <a:ea typeface="標楷體"/>
+              </a:rPr>
+              <a:t>（對 </a:t>
+            </a:r>
+            <a:r>
+              <a:rPr sz="1600" b="0" i="0">
+                <a:solidFill>
+                  <a:srgbClr val="000000"/>
+                </a:solidFill>
+                <a:latin typeface="Times New Roman"/>
+                <a:ea typeface="標楷體"/>
+                <a:ea typeface="標楷體"/>
+              </a:rPr>
+              <a:t>SHE</a:t>
+            </a:r>
+            <a:r>
+              <a:rPr sz="1600" b="0" i="0">
+                <a:solidFill>
+                  <a:srgbClr val="000000"/>
+                </a:solidFill>
+                <a:latin typeface="Times New Roman"/>
+                <a:ea typeface="標楷體"/>
+                <a:ea typeface="標楷體"/>
+              </a:rPr>
+              <a:t>），文獻最適為 −335.6 ± 29.0 </a:t>
+            </a:r>
+            <a:r>
+              <a:rPr sz="1600" b="0" i="0">
+                <a:solidFill>
+                  <a:srgbClr val="000000"/>
+                </a:solidFill>
+                <a:latin typeface="Times New Roman"/>
+                <a:ea typeface="標楷體"/>
+                <a:ea typeface="標楷體"/>
+              </a:rPr>
+              <a:t>mV</a:t>
+            </a:r>
+            <a:r>
+              <a:rPr sz="1600" b="0" i="0">
+                <a:solidFill>
+                  <a:srgbClr val="000000"/>
+                </a:solidFill>
+                <a:latin typeface="Times New Roman"/>
+                <a:ea typeface="標楷體"/>
+                <a:ea typeface="標楷體"/>
+              </a:rPr>
+              <a:t> — </a:t>
+            </a:r>
+            <a:r>
+              <a:rPr sz="1700" b="1" i="0">
+                <a:solidFill>
+                  <a:srgbClr val="1F6FB5"/>
+                </a:solidFill>
+                <a:latin typeface="Times New Roman"/>
+                <a:ea typeface="標楷體"/>
+                <a:ea typeface="標楷體"/>
+              </a:rPr>
+              <a:t>正落在區間內</a:t>
+            </a:r>
+          </a:p>
+          <a:p>
+            <a:pPr algn="l">
+              <a:spcAft>
+                <a:spcPts val="500"/>
+              </a:spcAft>
+            </a:pPr>
+            <a:r>
+              <a:rPr sz="1700" b="1" i="0">
+                <a:solidFill>
+                  <a:srgbClr val="000000"/>
+                </a:solidFill>
+                <a:latin typeface="Times New Roman"/>
+                <a:ea typeface="標楷體"/>
+                <a:ea typeface="標楷體"/>
+              </a:rPr>
+              <a:t>變化：</a:t>
+            </a:r>
+            <a:r>
+              <a:rPr sz="1600" b="0" i="0">
+                <a:solidFill>
+                  <a:srgbClr val="000000"/>
+                </a:solidFill>
+                <a:latin typeface="Times New Roman"/>
+                <a:ea typeface="標楷體"/>
+                <a:ea typeface="標楷體"/>
+              </a:rPr>
+              <a:t>補氣跳 +37 </a:t>
+            </a:r>
+            <a:r>
+              <a:rPr sz="1600" b="0" i="0">
+                <a:solidFill>
+                  <a:srgbClr val="000000"/>
+                </a:solidFill>
+                <a:latin typeface="Times New Roman"/>
+                <a:ea typeface="標楷體"/>
+                <a:ea typeface="標楷體"/>
+              </a:rPr>
+              <a:t>mV</a:t>
+            </a:r>
+            <a:r>
+              <a:rPr sz="1600" b="0" i="0">
+                <a:solidFill>
+                  <a:srgbClr val="000000"/>
+                </a:solidFill>
+                <a:latin typeface="Times New Roman"/>
+                <a:ea typeface="標楷體"/>
+                <a:ea typeface="標楷體"/>
+              </a:rPr>
+              <a:t>；泵運轉 +3.5 ~ +10.8 </a:t>
+            </a:r>
+            <a:r>
+              <a:rPr sz="1600" b="0" i="0">
+                <a:solidFill>
+                  <a:srgbClr val="000000"/>
+                </a:solidFill>
+                <a:latin typeface="Times New Roman"/>
+                <a:ea typeface="標楷體"/>
+                <a:ea typeface="標楷體"/>
+              </a:rPr>
+              <a:t>mV</a:t>
+            </a:r>
+            <a:r>
+              <a:rPr sz="1600" b="0" i="0">
+                <a:solidFill>
+                  <a:srgbClr val="000000"/>
+                </a:solidFill>
+                <a:latin typeface="Times New Roman"/>
+                <a:ea typeface="標楷體"/>
+                <a:ea typeface="標楷體"/>
+              </a:rPr>
+              <a:t>/分。</a:t>
+            </a:r>
+          </a:p>
+          <a:p>
+            <a:pPr algn="l">
               <a:spcAft>
                 <a:spcPts val="600"/>
               </a:spcAft>
             </a:pPr>
             <a:r>
-              <a:rPr sz="1800" b="1" i="0">
-                <a:solidFill>
-                  <a:srgbClr val="1F6FB5"/>
-                </a:solidFill>
-                <a:latin typeface="Times New Roman"/>
-                <a:ea typeface="標楷體"/>
-                <a:ea typeface="標楷體"/>
-              </a:rPr>
-              <a:t>這個「沒有差異」有檢定力：</a:t>
-            </a:r>
-            <a:r>
-              <a:rPr sz="1700" b="0" i="0">
-                <a:solidFill>
-                  <a:srgbClr val="000000"/>
-                </a:solidFill>
-                <a:latin typeface="Times New Roman"/>
-                <a:ea typeface="標楷體"/>
-                <a:ea typeface="標楷體"/>
-              </a:rPr>
-              <a:t>若生物途徑真的佔總壓降三分之一（0.0125），本檢定偵測得到的機率是 100%。結果沒有。</a:t>
+              <a:rPr sz="1600" b="1" i="0">
+                <a:solidFill>
+                  <a:srgbClr val="FF0000"/>
+                </a:solidFill>
+                <a:latin typeface="Times New Roman"/>
+                <a:ea typeface="標楷體"/>
+                <a:ea typeface="標楷體"/>
+              </a:rPr>
+              <a:t>產甲烷必須停止的時段，</a:t>
+            </a:r>
+            <a:r>
+              <a:rPr sz="1600" b="1" i="0">
+                <a:solidFill>
+                  <a:srgbClr val="FF0000"/>
+                </a:solidFill>
+                <a:latin typeface="Times New Roman"/>
+                <a:ea typeface="標楷體"/>
+                <a:ea typeface="標楷體"/>
+              </a:rPr>
+              <a:t>ORP</a:t>
+            </a:r>
+            <a:r>
+              <a:rPr sz="1600" b="1" i="0">
+                <a:solidFill>
+                  <a:srgbClr val="FF0000"/>
+                </a:solidFill>
+                <a:latin typeface="Times New Roman"/>
+                <a:ea typeface="標楷體"/>
+                <a:ea typeface="標楷體"/>
+              </a:rPr>
+              <a:t> 照常變化。</a:t>
+            </a:r>
+          </a:p>
+        </p:txBody>
+      </p:sp>
+      <p:sp>
+        <p:nvSpPr>
+          <p:cNvPr id="9" name="Rectangle 8"/>
+          <p:cNvSpPr/>
+          <p:nvPr/>
+        </p:nvSpPr>
+        <p:spPr>
+          <a:xfrm>
+            <a:off x="432000" y="5562000"/>
+            <a:ext cx="11329200" cy="864000"/>
+          </a:xfrm>
+          <a:prstGeom prst="rect">
+            <a:avLst/>
+          </a:prstGeom>
+          <a:solidFill>
+            <a:srgbClr val="F2F7FC"/>
+          </a:solidFill>
+          <a:ln w="9525">
+            <a:solidFill>
+              <a:srgbClr val="2AB6D8"/>
+            </a:solidFill>
+          </a:ln>
+          <a:effectLst/>
+        </p:spPr>
+        <p:style>
+          <a:lnRef idx="1">
+            <a:schemeClr val="accent1"/>
+          </a:lnRef>
+          <a:fillRef idx="3">
+            <a:schemeClr val="accent1"/>
+          </a:fillRef>
+          <a:effectRef idx="2">
+            <a:schemeClr val="accent1"/>
+          </a:effectRef>
+          <a:fontRef idx="minor">
+            <a:schemeClr val="lt1"/>
+          </a:fontRef>
+        </p:style>
+        <p:txBody>
+          <a:bodyPr rtlCol="0" anchor="ctr"/>
+          <a:lstStyle/>
+          <a:p>
+            <a:pPr algn="ctr"/>
+          </a:p>
+        </p:txBody>
+      </p:sp>
+      <p:sp>
+        <p:nvSpPr>
+          <p:cNvPr id="10" name="TextBox 9"/>
+          <p:cNvSpPr txBox="1"/>
+          <p:nvPr/>
+        </p:nvSpPr>
+        <p:spPr>
+          <a:xfrm>
+            <a:off x="612000" y="5670000"/>
+            <a:ext cx="10969200" cy="648000"/>
+          </a:xfrm>
+          <a:prstGeom prst="rect">
+            <a:avLst/>
+          </a:prstGeom>
+          <a:noFill/>
+        </p:spPr>
+        <p:txBody>
+          <a:bodyPr wrap="square" anchor="ctr" lIns="0" rIns="0" tIns="0" bIns="0">
+            <a:spAutoFit/>
+          </a:bodyPr>
+          <a:lstStyle/>
+          <a:p>
+            <a:pPr algn="l">
+              <a:spcAft>
+                <a:spcPts val="600"/>
+              </a:spcAft>
+            </a:pPr>
+            <a:r>
+              <a:rPr sz="1300" b="0" i="0">
+                <a:solidFill>
+                  <a:srgbClr val="FF0000"/>
+                </a:solidFill>
+                <a:latin typeface="Times New Roman"/>
+                <a:ea typeface="標楷體"/>
+                <a:ea typeface="標楷體"/>
+              </a:rPr>
+              <a:t>文獻將 </a:t>
+            </a:r>
+            <a:r>
+              <a:rPr sz="1300" b="0" i="0">
+                <a:solidFill>
+                  <a:srgbClr val="FF0000"/>
+                </a:solidFill>
+                <a:latin typeface="Times New Roman"/>
+                <a:ea typeface="標楷體"/>
+                <a:ea typeface="標楷體"/>
+              </a:rPr>
+              <a:t>ORP</a:t>
+            </a:r>
+            <a:r>
+              <a:rPr sz="1300" b="0" i="0">
+                <a:solidFill>
+                  <a:srgbClr val="FF0000"/>
+                </a:solidFill>
+                <a:latin typeface="Times New Roman"/>
+                <a:ea typeface="標楷體"/>
+                <a:ea typeface="標楷體"/>
+              </a:rPr>
+              <a:t> 當微生物活性指標，其對象是未外加氫氣的系統；本反應器的氫氣為外部輸入，會直接鉗制電位，該套解讀不能直接移植。</a:t>
             </a:r>
           </a:p>
         </p:txBody>
@@ -11961,7 +11470,18 @@
                 <a:ea typeface="標楷體"/>
                 <a:ea typeface="標楷體"/>
               </a:rPr>
-              <a:t>十、佐證二：壓降曲線幾乎是直線</a:t>
+              <a:t>七、先說明什麼是 </a:t>
+            </a:r>
+            <a:r>
+              <a:rPr sz="2800" b="1" i="0">
+                <a:solidFill>
+                  <a:srgbClr val="000000"/>
+                </a:solidFill>
+                <a:latin typeface="Times New Roman"/>
+                <a:ea typeface="標楷體"/>
+                <a:ea typeface="標楷體"/>
+              </a:rPr>
+              <a:t>PINN</a:t>
             </a:r>
           </a:p>
         </p:txBody>
@@ -12046,7 +11566,7 @@
                 <a:ea typeface="標楷體"/>
                 <a:ea typeface="標楷體"/>
               </a:rPr>
-              <a:t>溶解會讓曲線彎，定速移除是直線</a:t>
+              <a:t>後面兩頁會用到，這裡先把它講清楚</a:t>
             </a:r>
           </a:p>
         </p:txBody>
@@ -12138,7 +11658,7 @@
       </p:sp>
       <p:pic>
         <p:nvPicPr>
-          <p:cNvPr id="7" name="Picture 6" descr="deck4_shape.png"/>
+          <p:cNvPr id="7" name="Picture 6" descr="deck11_pinn_what.png"/>
           <p:cNvPicPr>
             <a:picLocks noChangeAspect="1"/>
           </p:cNvPicPr>
@@ -12152,8 +11672,8 @@
         </p:blipFill>
         <p:spPr>
           <a:xfrm>
-            <a:off x="1596599" y="1224000"/>
-            <a:ext cx="9000000" cy="4790675"/>
+            <a:off x="1596599" y="1152000"/>
+            <a:ext cx="9000000" cy="4277636"/>
           </a:xfrm>
           <a:prstGeom prst="rect">
             <a:avLst/>
@@ -12168,8 +11688,8 @@
         </p:nvSpPr>
         <p:spPr>
           <a:xfrm>
-            <a:off x="576000" y="6086674"/>
-            <a:ext cx="11041200" cy="429325"/>
+            <a:off x="576000" y="5555635"/>
+            <a:ext cx="11041200" cy="852364"/>
           </a:xfrm>
           <a:prstGeom prst="rect">
             <a:avLst/>
@@ -12196,7 +11716,36 @@
                 <a:ea typeface="標楷體"/>
                 <a:ea typeface="標楷體"/>
               </a:rPr>
-              <a:t>全資料庫 252 條下降曲線，九成落在「接近直線」這一群。</a:t>
+              <a:t>一句話：</a:t>
+            </a:r>
+            <a:r>
+              <a:rPr sz="1800" b="0" i="0">
+                <a:solidFill>
+                  <a:srgbClr val="000000"/>
+                </a:solidFill>
+                <a:latin typeface="Times New Roman"/>
+                <a:ea typeface="標楷體"/>
+                <a:ea typeface="標楷體"/>
+              </a:rPr>
+              <a:t>用神經網路取代「固定公式」，但要求它同時滿足物理定律。</a:t>
+            </a:r>
+          </a:p>
+          <a:p>
+            <a:pPr algn="ctr">
+              <a:spcAft>
+                <a:spcPts val="600"/>
+              </a:spcAft>
+            </a:pPr>
+            <a:r>
+              <a:rPr sz="1600" b="0" i="0">
+                <a:solidFill>
+                  <a:srgbClr val="595959"/>
+                </a:solidFill>
+                <a:latin typeface="Times New Roman"/>
+                <a:ea typeface="標楷體"/>
+                <a:ea typeface="標楷體"/>
+              </a:rPr>
+              <a:t>這樣生物速率就不必被假設成固定值——它本來就會隨氫氣耗盡而改變。</a:t>
             </a:r>
           </a:p>
         </p:txBody>
@@ -12255,29 +11804,7 @@
                 <a:ea typeface="標楷體"/>
                 <a:ea typeface="標楷體"/>
               </a:rPr>
-              <a:t>十一、氧化還原電位（</a:t>
-            </a:r>
-            <a:r>
-              <a:rPr sz="2800" b="1" i="0">
-                <a:solidFill>
-                  <a:srgbClr val="000000"/>
-                </a:solidFill>
-                <a:latin typeface="Times New Roman"/>
-                <a:ea typeface="標楷體"/>
-                <a:ea typeface="標楷體"/>
-              </a:rPr>
-              <a:t>ORP</a:t>
-            </a:r>
-            <a:r>
-              <a:rPr sz="2800" b="1" i="0">
-                <a:solidFill>
-                  <a:srgbClr val="000000"/>
-                </a:solidFill>
-                <a:latin typeface="Times New Roman"/>
-                <a:ea typeface="標楷體"/>
-                <a:ea typeface="標楷體"/>
-              </a:rPr>
-              <a:t>）該怎麼讀</a:t>
+              <a:t>八、試過但不成立的兩個方法</a:t>
             </a:r>
           </a:p>
         </p:txBody>
@@ -12362,7 +11889,7 @@
                 <a:ea typeface="標楷體"/>
                 <a:ea typeface="標楷體"/>
               </a:rPr>
-              <a:t>水準健康，但循環內的變化不是生物造成的</a:t>
+              <a:t>誠實記錄，避免後續重複投入</a:t>
             </a:r>
           </a:p>
         </p:txBody>
@@ -12452,9 +11979,148 @@
           </a:p>
         </p:txBody>
       </p:sp>
+      <p:sp>
+        <p:nvSpPr>
+          <p:cNvPr id="7" name="TextBox 6"/>
+          <p:cNvSpPr txBox="1"/>
+          <p:nvPr/>
+        </p:nvSpPr>
+        <p:spPr>
+          <a:xfrm>
+            <a:off x="576000" y="1152000"/>
+            <a:ext cx="11041200" cy="2088000"/>
+          </a:xfrm>
+          <a:prstGeom prst="rect">
+            <a:avLst/>
+          </a:prstGeom>
+          <a:noFill/>
+        </p:spPr>
+        <p:txBody>
+          <a:bodyPr wrap="square" anchor="t" lIns="0" rIns="0" tIns="0" bIns="0">
+            <a:spAutoFit/>
+          </a:bodyPr>
+          <a:lstStyle/>
+          <a:p>
+            <a:pPr algn="l">
+              <a:spcAft>
+                <a:spcPts val="800"/>
+              </a:spcAft>
+            </a:pPr>
+            <a:r>
+              <a:rPr sz="2000" b="1" i="0">
+                <a:solidFill>
+                  <a:srgbClr val="000000"/>
+                </a:solidFill>
+                <a:latin typeface="Times New Roman"/>
+                <a:ea typeface="標楷體"/>
+                <a:ea typeface="標楷體"/>
+              </a:rPr>
+              <a:t>① 以「曲率」分離生物與物理</a:t>
+            </a:r>
+          </a:p>
+          <a:p>
+            <a:pPr algn="l">
+              <a:spcAft>
+                <a:spcPts val="1200"/>
+              </a:spcAft>
+            </a:pPr>
+            <a:r>
+              <a:rPr sz="1700" b="0" i="0">
+                <a:solidFill>
+                  <a:srgbClr val="000000"/>
+                </a:solidFill>
+                <a:latin typeface="Times New Roman"/>
+                <a:ea typeface="標楷體"/>
+                <a:ea typeface="標楷體"/>
+              </a:rPr>
+              <a:t>前提是生物速率為定值，但它會隨氫氣耗盡而變動。以已知答案驗證：真實物理份額 0% 時，該方法報出 </a:t>
+            </a:r>
+            <a:r>
+              <a:rPr sz="1900" b="1" i="0">
+                <a:solidFill>
+                  <a:srgbClr val="FF0000"/>
+                </a:solidFill>
+                <a:latin typeface="Times New Roman"/>
+                <a:ea typeface="標楷體"/>
+                <a:ea typeface="標楷體"/>
+              </a:rPr>
+              <a:t>101%</a:t>
+            </a:r>
+            <a:r>
+              <a:rPr sz="1700" b="0" i="0">
+                <a:solidFill>
+                  <a:srgbClr val="000000"/>
+                </a:solidFill>
+                <a:latin typeface="Times New Roman"/>
+                <a:ea typeface="標楷體"/>
+                <a:ea typeface="標楷體"/>
+              </a:rPr>
+              <a:t>。</a:t>
+            </a:r>
+          </a:p>
+          <a:p>
+            <a:pPr algn="l">
+              <a:spcAft>
+                <a:spcPts val="800"/>
+              </a:spcAft>
+            </a:pPr>
+            <a:r>
+              <a:rPr sz="2000" b="1" i="0">
+                <a:solidFill>
+                  <a:srgbClr val="000000"/>
+                </a:solidFill>
+                <a:latin typeface="Times New Roman"/>
+                <a:ea typeface="標楷體"/>
+                <a:ea typeface="標楷體"/>
+              </a:rPr>
+              <a:t>② 以物理資訊神經網路（</a:t>
+            </a:r>
+            <a:r>
+              <a:rPr sz="2000" b="1" i="0">
+                <a:solidFill>
+                  <a:srgbClr val="000000"/>
+                </a:solidFill>
+                <a:latin typeface="Times New Roman"/>
+                <a:ea typeface="標楷體"/>
+                <a:ea typeface="標楷體"/>
+              </a:rPr>
+              <a:t>PINN</a:t>
+            </a:r>
+            <a:r>
+              <a:rPr sz="2000" b="1" i="0">
+                <a:solidFill>
+                  <a:srgbClr val="000000"/>
+                </a:solidFill>
+                <a:latin typeface="Times New Roman"/>
+                <a:ea typeface="標楷體"/>
+                <a:ea typeface="標楷體"/>
+              </a:rPr>
+              <a:t>）反推生物速率</a:t>
+            </a:r>
+          </a:p>
+          <a:p>
+            <a:pPr algn="l">
+              <a:spcAft>
+                <a:spcPts val="600"/>
+              </a:spcAft>
+            </a:pPr>
+            <a:r>
+              <a:rPr sz="1700" b="0" i="0">
+                <a:solidFill>
+                  <a:srgbClr val="000000"/>
+                </a:solidFill>
+                <a:latin typeface="Times New Roman"/>
+                <a:ea typeface="標楷體"/>
+                <a:ea typeface="標楷體"/>
+              </a:rPr>
+              <a:t>方向正確，但方程式本身存在一個恰好抵銷的自由度（見次頁）。</a:t>
+            </a:r>
+          </a:p>
+        </p:txBody>
+      </p:sp>
       <p:pic>
         <p:nvPicPr>
-          <p:cNvPr id="7" name="Picture 6" descr="deck5_orp.png"/>
+          <p:cNvPr id="8" name="Picture 7" descr="deck6_pinn.png"/>
           <p:cNvPicPr>
             <a:picLocks noChangeAspect="1"/>
           </p:cNvPicPr>
@@ -12468,365 +12134,14 @@
         </p:blipFill>
         <p:spPr>
           <a:xfrm>
-            <a:off x="2856599" y="1152000"/>
-            <a:ext cx="6480000" cy="3165077"/>
+            <a:off x="3126599" y="3311999"/>
+            <a:ext cx="5940000" cy="3101591"/>
           </a:xfrm>
           <a:prstGeom prst="rect">
             <a:avLst/>
           </a:prstGeom>
         </p:spPr>
       </p:pic>
-      <p:sp>
-        <p:nvSpPr>
-          <p:cNvPr id="8" name="TextBox 7"/>
-          <p:cNvSpPr txBox="1"/>
-          <p:nvPr/>
-        </p:nvSpPr>
-        <p:spPr>
-          <a:xfrm>
-            <a:off x="576000" y="4425077"/>
-            <a:ext cx="11041200" cy="1154922"/>
-          </a:xfrm>
-          <a:prstGeom prst="rect">
-            <a:avLst/>
-          </a:prstGeom>
-          <a:noFill/>
-        </p:spPr>
-        <p:txBody>
-          <a:bodyPr wrap="square" anchor="t" lIns="0" rIns="0" tIns="0" bIns="0">
-            <a:spAutoFit/>
-          </a:bodyPr>
-          <a:lstStyle/>
-          <a:p>
-            <a:pPr algn="l">
-              <a:spcAft>
-                <a:spcPts val="500"/>
-              </a:spcAft>
-            </a:pPr>
-            <a:r>
-              <a:rPr sz="1700" b="1" i="0">
-                <a:solidFill>
-                  <a:srgbClr val="000000"/>
-                </a:solidFill>
-                <a:latin typeface="Times New Roman"/>
-                <a:ea typeface="標楷體"/>
-                <a:ea typeface="標楷體"/>
-              </a:rPr>
-              <a:t>水準：</a:t>
-            </a:r>
-            <a:r>
-              <a:rPr sz="1600" b="0" i="0">
-                <a:solidFill>
-                  <a:srgbClr val="000000"/>
-                </a:solidFill>
-                <a:latin typeface="Times New Roman"/>
-                <a:ea typeface="標楷體"/>
-                <a:ea typeface="標楷體"/>
-              </a:rPr>
-              <a:t>−357 </a:t>
-            </a:r>
-            <a:r>
-              <a:rPr sz="1600" b="0" i="0">
-                <a:solidFill>
-                  <a:srgbClr val="000000"/>
-                </a:solidFill>
-                <a:latin typeface="Times New Roman"/>
-                <a:ea typeface="標楷體"/>
-                <a:ea typeface="標楷體"/>
-              </a:rPr>
-              <a:t>mV</a:t>
-            </a:r>
-            <a:r>
-              <a:rPr sz="1600" b="0" i="0">
-                <a:solidFill>
-                  <a:srgbClr val="000000"/>
-                </a:solidFill>
-                <a:latin typeface="Times New Roman"/>
-                <a:ea typeface="標楷體"/>
-                <a:ea typeface="標楷體"/>
-              </a:rPr>
-              <a:t>（對 </a:t>
-            </a:r>
-            <a:r>
-              <a:rPr sz="1600" b="0" i="0">
-                <a:solidFill>
-                  <a:srgbClr val="000000"/>
-                </a:solidFill>
-                <a:latin typeface="Times New Roman"/>
-                <a:ea typeface="標楷體"/>
-                <a:ea typeface="標楷體"/>
-              </a:rPr>
-              <a:t>SHE</a:t>
-            </a:r>
-            <a:r>
-              <a:rPr sz="1600" b="0" i="0">
-                <a:solidFill>
-                  <a:srgbClr val="000000"/>
-                </a:solidFill>
-                <a:latin typeface="Times New Roman"/>
-                <a:ea typeface="標楷體"/>
-                <a:ea typeface="標楷體"/>
-              </a:rPr>
-              <a:t>），文獻最適為 −335.6 ± 29.0 </a:t>
-            </a:r>
-            <a:r>
-              <a:rPr sz="1600" b="0" i="0">
-                <a:solidFill>
-                  <a:srgbClr val="000000"/>
-                </a:solidFill>
-                <a:latin typeface="Times New Roman"/>
-                <a:ea typeface="標楷體"/>
-                <a:ea typeface="標楷體"/>
-              </a:rPr>
-              <a:t>mV</a:t>
-            </a:r>
-            <a:r>
-              <a:rPr sz="1600" b="0" i="0">
-                <a:solidFill>
-                  <a:srgbClr val="000000"/>
-                </a:solidFill>
-                <a:latin typeface="Times New Roman"/>
-                <a:ea typeface="標楷體"/>
-                <a:ea typeface="標楷體"/>
-              </a:rPr>
-              <a:t> — </a:t>
-            </a:r>
-            <a:r>
-              <a:rPr sz="1700" b="1" i="0">
-                <a:solidFill>
-                  <a:srgbClr val="1F6FB5"/>
-                </a:solidFill>
-                <a:latin typeface="Times New Roman"/>
-                <a:ea typeface="標楷體"/>
-                <a:ea typeface="標楷體"/>
-              </a:rPr>
-              <a:t>正落在區間內</a:t>
-            </a:r>
-          </a:p>
-          <a:p>
-            <a:pPr algn="l">
-              <a:spcAft>
-                <a:spcPts val="500"/>
-              </a:spcAft>
-            </a:pPr>
-            <a:r>
-              <a:rPr sz="1700" b="1" i="0">
-                <a:solidFill>
-                  <a:srgbClr val="000000"/>
-                </a:solidFill>
-                <a:latin typeface="Times New Roman"/>
-                <a:ea typeface="標楷體"/>
-                <a:ea typeface="標楷體"/>
-              </a:rPr>
-              <a:t>變化：</a:t>
-            </a:r>
-            <a:r>
-              <a:rPr sz="1600" b="0" i="0">
-                <a:solidFill>
-                  <a:srgbClr val="000000"/>
-                </a:solidFill>
-                <a:latin typeface="Times New Roman"/>
-                <a:ea typeface="標楷體"/>
-                <a:ea typeface="標楷體"/>
-              </a:rPr>
-              <a:t>補氣跳 +37 </a:t>
-            </a:r>
-            <a:r>
-              <a:rPr sz="1600" b="0" i="0">
-                <a:solidFill>
-                  <a:srgbClr val="000000"/>
-                </a:solidFill>
-                <a:latin typeface="Times New Roman"/>
-                <a:ea typeface="標楷體"/>
-                <a:ea typeface="標楷體"/>
-              </a:rPr>
-              <a:t>mV</a:t>
-            </a:r>
-            <a:r>
-              <a:rPr sz="1600" b="0" i="0">
-                <a:solidFill>
-                  <a:srgbClr val="000000"/>
-                </a:solidFill>
-                <a:latin typeface="Times New Roman"/>
-                <a:ea typeface="標楷體"/>
-                <a:ea typeface="標楷體"/>
-              </a:rPr>
-              <a:t>；泵運轉 +3.5 ~ +10.8 </a:t>
-            </a:r>
-            <a:r>
-              <a:rPr sz="1600" b="0" i="0">
-                <a:solidFill>
-                  <a:srgbClr val="000000"/>
-                </a:solidFill>
-                <a:latin typeface="Times New Roman"/>
-                <a:ea typeface="標楷體"/>
-                <a:ea typeface="標楷體"/>
-              </a:rPr>
-              <a:t>mV</a:t>
-            </a:r>
-            <a:r>
-              <a:rPr sz="1600" b="0" i="0">
-                <a:solidFill>
-                  <a:srgbClr val="000000"/>
-                </a:solidFill>
-                <a:latin typeface="Times New Roman"/>
-                <a:ea typeface="標楷體"/>
-                <a:ea typeface="標楷體"/>
-              </a:rPr>
-              <a:t>/分。</a:t>
-            </a:r>
-          </a:p>
-          <a:p>
-            <a:pPr algn="l">
-              <a:spcAft>
-                <a:spcPts val="600"/>
-              </a:spcAft>
-            </a:pPr>
-            <a:r>
-              <a:rPr sz="1600" b="1" i="0">
-                <a:solidFill>
-                  <a:srgbClr val="FF0000"/>
-                </a:solidFill>
-                <a:latin typeface="Times New Roman"/>
-                <a:ea typeface="標楷體"/>
-                <a:ea typeface="標楷體"/>
-              </a:rPr>
-              <a:t>產甲烷必須停止的時段，</a:t>
-            </a:r>
-            <a:r>
-              <a:rPr sz="1600" b="1" i="0">
-                <a:solidFill>
-                  <a:srgbClr val="FF0000"/>
-                </a:solidFill>
-                <a:latin typeface="Times New Roman"/>
-                <a:ea typeface="標楷體"/>
-                <a:ea typeface="標楷體"/>
-              </a:rPr>
-              <a:t>ORP</a:t>
-            </a:r>
-            <a:r>
-              <a:rPr sz="1600" b="1" i="0">
-                <a:solidFill>
-                  <a:srgbClr val="FF0000"/>
-                </a:solidFill>
-                <a:latin typeface="Times New Roman"/>
-                <a:ea typeface="標楷體"/>
-                <a:ea typeface="標楷體"/>
-              </a:rPr>
-              <a:t> 照常變化。</a:t>
-            </a:r>
-          </a:p>
-        </p:txBody>
-      </p:sp>
-      <p:sp>
-        <p:nvSpPr>
-          <p:cNvPr id="9" name="Rectangle 8"/>
-          <p:cNvSpPr/>
-          <p:nvPr/>
-        </p:nvSpPr>
-        <p:spPr>
-          <a:xfrm>
-            <a:off x="432000" y="5562000"/>
-            <a:ext cx="11329200" cy="864000"/>
-          </a:xfrm>
-          <a:prstGeom prst="rect">
-            <a:avLst/>
-          </a:prstGeom>
-          <a:solidFill>
-            <a:srgbClr val="F2F7FC"/>
-          </a:solidFill>
-          <a:ln w="9525">
-            <a:solidFill>
-              <a:srgbClr val="2AB6D8"/>
-            </a:solidFill>
-          </a:ln>
-          <a:effectLst/>
-        </p:spPr>
-        <p:style>
-          <a:lnRef idx="1">
-            <a:schemeClr val="accent1"/>
-          </a:lnRef>
-          <a:fillRef idx="3">
-            <a:schemeClr val="accent1"/>
-          </a:fillRef>
-          <a:effectRef idx="2">
-            <a:schemeClr val="accent1"/>
-          </a:effectRef>
-          <a:fontRef idx="minor">
-            <a:schemeClr val="lt1"/>
-          </a:fontRef>
-        </p:style>
-        <p:txBody>
-          <a:bodyPr rtlCol="0" anchor="ctr"/>
-          <a:lstStyle/>
-          <a:p>
-            <a:pPr algn="ctr"/>
-          </a:p>
-        </p:txBody>
-      </p:sp>
-      <p:sp>
-        <p:nvSpPr>
-          <p:cNvPr id="10" name="TextBox 9"/>
-          <p:cNvSpPr txBox="1"/>
-          <p:nvPr/>
-        </p:nvSpPr>
-        <p:spPr>
-          <a:xfrm>
-            <a:off x="612000" y="5670000"/>
-            <a:ext cx="10969200" cy="648000"/>
-          </a:xfrm>
-          <a:prstGeom prst="rect">
-            <a:avLst/>
-          </a:prstGeom>
-          <a:noFill/>
-        </p:spPr>
-        <p:txBody>
-          <a:bodyPr wrap="square" anchor="ctr" lIns="0" rIns="0" tIns="0" bIns="0">
-            <a:spAutoFit/>
-          </a:bodyPr>
-          <a:lstStyle/>
-          <a:p>
-            <a:pPr algn="l">
-              <a:spcAft>
-                <a:spcPts val="600"/>
-              </a:spcAft>
-            </a:pPr>
-            <a:r>
-              <a:rPr sz="1300" b="0" i="0">
-                <a:solidFill>
-                  <a:srgbClr val="FF0000"/>
-                </a:solidFill>
-                <a:latin typeface="Times New Roman"/>
-                <a:ea typeface="標楷體"/>
-                <a:ea typeface="標楷體"/>
-              </a:rPr>
-              <a:t>文獻將 </a:t>
-            </a:r>
-            <a:r>
-              <a:rPr sz="1300" b="0" i="0">
-                <a:solidFill>
-                  <a:srgbClr val="FF0000"/>
-                </a:solidFill>
-                <a:latin typeface="Times New Roman"/>
-                <a:ea typeface="標楷體"/>
-                <a:ea typeface="標楷體"/>
-              </a:rPr>
-              <a:t>ORP</a:t>
-            </a:r>
-            <a:r>
-              <a:rPr sz="1300" b="0" i="0">
-                <a:solidFill>
-                  <a:srgbClr val="FF0000"/>
-                </a:solidFill>
-                <a:latin typeface="Times New Roman"/>
-                <a:ea typeface="標楷體"/>
-                <a:ea typeface="標楷體"/>
-              </a:rPr>
-              <a:t> 當微生物活性指標，其對象是未外加氫氣的系統；本反應器的氫氣為外部輸入，會直接鉗制電位，該套解讀不能直接移植。</a:t>
-            </a:r>
-          </a:p>
-        </p:txBody>
-      </p:sp>
     </p:spTree>
   </p:cSld>
   <p:clrMapOvr>

--- a/docs/decks/簡報_2026-09-21_氫氣流失與壓降歸因.pptx
+++ b/docs/decks/簡報_2026-09-21_氫氣流失與壓降歸因.pptx
@@ -3382,7 +3382,7 @@
                 <a:ea typeface="標楷體"/>
                 <a:ea typeface="標楷體"/>
               </a:rPr>
-              <a:t>氣泵把氣體打回液相（裝置設計如此），再由微生物消耗。</a:t>
+              <a:t>氣泵把氣體打進水裡（裝置本來就是這樣設計），再被菌吃掉。</a:t>
             </a:r>
           </a:p>
           <a:p>
@@ -3462,7 +3462,7 @@
                 <a:ea typeface="標楷體"/>
                 <a:ea typeface="標楷體"/>
               </a:rPr>
-              <a:t>② 殘餘氣體為何偏離進料比　</a:t>
+              <a:t>② 剩下的氣體比例不對　</a:t>
             </a:r>
             <a:r>
               <a:rPr sz="1800" b="0" i="0">
@@ -3473,40 +3473,7 @@
                 <a:ea typeface="標楷體"/>
                 <a:ea typeface="標楷體"/>
               </a:rPr>
-              <a:t>CO</a:t>
-            </a:r>
-            <a:r>
-              <a:rPr sz="1800" b="0" i="0">
-                <a:solidFill>
-                  <a:srgbClr val="000000"/>
-                </a:solidFill>
-                <a:latin typeface="Times New Roman"/>
-                <a:ea typeface="標楷體"/>
-                <a:ea typeface="標楷體"/>
-              </a:rPr>
-              <a:t>₂:</a:t>
-            </a:r>
-            <a:r>
-              <a:rPr sz="1800" b="0" i="0">
-                <a:solidFill>
-                  <a:srgbClr val="000000"/>
-                </a:solidFill>
-                <a:latin typeface="Times New Roman"/>
-                <a:ea typeface="標楷體"/>
-                <a:ea typeface="標楷體"/>
-              </a:rPr>
-              <a:t>H</a:t>
-            </a:r>
-            <a:r>
-              <a:rPr sz="1800" b="0" i="0">
-                <a:solidFill>
-                  <a:srgbClr val="000000"/>
-                </a:solidFill>
-                <a:latin typeface="Times New Roman"/>
-                <a:ea typeface="標楷體"/>
-                <a:ea typeface="標楷體"/>
-              </a:rPr>
-              <a:t>₂ 高於 1:4 達 1.33 – 2.79 倍。</a:t>
+              <a:t>二氧化碳對氫氣比補進去的比例高 1.33 – 2.79 倍。</a:t>
             </a:r>
           </a:p>
           <a:p>
@@ -3524,29 +3491,7 @@
                 <a:ea typeface="標楷體"/>
                 <a:ea typeface="標楷體"/>
               </a:rPr>
-              <a:t>　 溶解**不能**解釋（移除 </a:t>
-            </a:r>
-            <a:r>
-              <a:rPr sz="1700" b="0" i="0">
-                <a:solidFill>
-                  <a:srgbClr val="595959"/>
-                </a:solidFill>
-                <a:latin typeface="Times New Roman"/>
-                <a:ea typeface="標楷體"/>
-                <a:ea typeface="標楷體"/>
-              </a:rPr>
-              <a:t>CO</a:t>
-            </a:r>
-            <a:r>
-              <a:rPr sz="1700" b="0" i="0">
-                <a:solidFill>
-                  <a:srgbClr val="595959"/>
-                </a:solidFill>
-                <a:latin typeface="Times New Roman"/>
-                <a:ea typeface="標楷體"/>
-                <a:ea typeface="標楷體"/>
-              </a:rPr>
-              <a:t>₂ 會讓比值下降，實測是上升），故為獨立的待解問題。</a:t>
+              <a:t>　 溶進水裡解釋不了這件事：二氧化碳溶掉會讓比值變小，但實測是變大。這是另一個待解的問題。</a:t>
             </a:r>
           </a:p>
           <a:p>
@@ -3582,7 +3527,7 @@
                 <a:ea typeface="標楷體"/>
                 <a:ea typeface="標楷體"/>
               </a:rPr>
-              <a:t>原先把溶解與生物當成兩條並聯途徑，並據此主張「壓降主因不是溶解」。實際上兩者是串聯——溶解是通道、生物是匯。該主張已撤回。</a:t>
+              <a:t>原先把「溶進水裡」與「被菌吃掉」當成兩條各走各的路，並據此說「壓降主因不是溶解」。實際上是一個接著一個：氣體先溶進水裡，再被菌吃掉。那個說法已撤回。</a:t>
             </a:r>
           </a:p>
         </p:txBody>
@@ -4110,7 +4055,7 @@
                 <a:ea typeface="標楷體"/>
                 <a:ea typeface="標楷體"/>
               </a:rPr>
-              <a:t>十、同一條壓降，兩種完全不同的答案</a:t>
+              <a:t>十、同一條壓降，兩種完全不同的說法</a:t>
             </a:r>
           </a:p>
         </p:txBody>
@@ -4448,7 +4393,7 @@
                 <a:ea typeface="標楷體"/>
                 <a:ea typeface="標楷體"/>
               </a:rPr>
-              <a:t>十一、偏離的解釋之一：碳酸鹽脫氣</a:t>
+              <a:t>十一、比例不對的解釋之一：水裡的碳冒回來</a:t>
             </a:r>
           </a:p>
         </p:txBody>
@@ -4870,29 +4815,7 @@
                 <a:ea typeface="標楷體"/>
                 <a:ea typeface="標楷體"/>
               </a:rPr>
-              <a:t> 與 </a:t>
-            </a:r>
-            <a:r>
-              <a:rPr sz="2800" b="1" i="0">
-                <a:solidFill>
-                  <a:srgbClr val="000000"/>
-                </a:solidFill>
-                <a:latin typeface="Times New Roman"/>
-                <a:ea typeface="標楷體"/>
-                <a:ea typeface="標楷體"/>
-              </a:rPr>
-              <a:t>pH</a:t>
-            </a:r>
-            <a:r>
-              <a:rPr sz="2800" b="1" i="0">
-                <a:solidFill>
-                  <a:srgbClr val="000000"/>
-                </a:solidFill>
-                <a:latin typeface="Times New Roman"/>
-                <a:ea typeface="標楷體"/>
-                <a:ea typeface="標楷體"/>
-              </a:rPr>
-              <a:t> 的關聯到底長什麼樣</a:t>
+              <a:t> 與酸鹼值到底有沒有關係</a:t>
             </a:r>
           </a:p>
         </p:txBody>
@@ -5296,7 +5219,7 @@
                 <a:ea typeface="標楷體"/>
                 <a:ea typeface="標楷體"/>
               </a:rPr>
-              <a:t>十三、偏離的解釋之二：排氣挑掉氫氣</a:t>
+              <a:t>十三、比例不對的解釋之二：排氣挑掉氫氣</a:t>
             </a:r>
           </a:p>
         </p:txBody>
@@ -6252,7 +6175,7 @@
         <p:spPr>
           <a:xfrm>
             <a:off x="1776599" y="1152000"/>
-            <a:ext cx="8640000" cy="3921815"/>
+            <a:ext cx="8640000" cy="3846978"/>
           </a:xfrm>
           <a:prstGeom prst="rect">
             <a:avLst/>
@@ -6267,8 +6190,8 @@
         </p:nvSpPr>
         <p:spPr>
           <a:xfrm>
-            <a:off x="576000" y="5181815"/>
-            <a:ext cx="11041200" cy="1226185"/>
+            <a:off x="576000" y="5106978"/>
+            <a:ext cx="11041200" cy="1301022"/>
           </a:xfrm>
           <a:prstGeom prst="rect">
             <a:avLst/>
@@ -6354,7 +6277,7 @@
                 <a:ea typeface="標楷體"/>
                 <a:ea typeface="標楷體"/>
               </a:rPr>
-              <a:t>十六、本分析的限制</a:t>
+              <a:t>十六、這份分析做不到的事</a:t>
             </a:r>
           </a:p>
         </p:txBody>
@@ -8768,7 +8691,7 @@
                 <a:ea typeface="標楷體"/>
                 <a:ea typeface="標楷體"/>
               </a:rPr>
-              <a:t>氣泵把氣體打回液相，再由微生物消耗</a:t>
+              <a:t>氣泵把氣體打進水裡，再被菌吃掉</a:t>
             </a:r>
           </a:p>
         </p:txBody>
@@ -8875,7 +8798,7 @@
         <p:spPr>
           <a:xfrm>
             <a:off x="1596599" y="1152000"/>
-            <a:ext cx="9000000" cy="5092105"/>
+            <a:ext cx="9000000" cy="5018153"/>
           </a:xfrm>
           <a:prstGeom prst="rect">
             <a:avLst/>
@@ -8890,8 +8813,8 @@
         </p:nvSpPr>
         <p:spPr>
           <a:xfrm>
-            <a:off x="576000" y="6352105"/>
-            <a:ext cx="11041200" cy="55895"/>
+            <a:off x="576000" y="6278153"/>
+            <a:ext cx="11041200" cy="129847"/>
           </a:xfrm>
           <a:prstGeom prst="rect">
             <a:avLst/>
@@ -8918,7 +8841,7 @@
                 <a:ea typeface="標楷體"/>
                 <a:ea typeface="標楷體"/>
               </a:rPr>
-              <a:t>⚠ 先前把溶解與生物當成兩條並聯途徑，並據此主張「壓降主因不是溶解」。</a:t>
+              <a:t>⚠ 先前把這兩件事當成各走各的，並據此說「壓降主因不是溶解」。</a:t>
             </a:r>
             <a:r>
               <a:rPr sz="1800" b="1" i="0">
@@ -8988,7 +8911,7 @@
                 <a:ea typeface="標楷體"/>
                 <a:ea typeface="標楷體"/>
               </a:rPr>
-              <a:t>二、這個模型一次解釋了三件事</a:t>
+              <a:t>二、這樣看一次解釋了三件事</a:t>
             </a:r>
           </a:p>
         </p:txBody>
@@ -9073,7 +8996,7 @@
                 <a:ea typeface="標楷體"/>
                 <a:ea typeface="標楷體"/>
               </a:rPr>
-              <a:t>都是先前當成獨立謎題的</a:t>
+              <a:t>這三件先前都當成各自獨立的謎</a:t>
             </a:r>
           </a:p>
         </p:txBody>
@@ -9252,7 +9175,7 @@
                           <a:ea typeface="標楷體"/>
                           <a:ea typeface="標楷體"/>
                         </a:rPr>
-                        <a:t>串聯模型的解釋</a:t>
+                        <a:t>正確的解釋</a:t>
                       </a:r>
                     </a:p>
                   </a:txBody>
@@ -9329,7 +9252,7 @@
                           <a:ea typeface="標楷體"/>
                           <a:ea typeface="標楷體"/>
                         </a:rPr>
-                        <a:t>液相近似無限匯，定速溶解本來就是直線</a:t>
+                        <a:t>水裡的碳一直被菌吃掉、吸不飽，所以溶解是固定速度——那本來就是直線</a:t>
                       </a:r>
                     </a:p>
                   </a:txBody>
@@ -9356,7 +9279,7 @@
                           <a:ea typeface="標楷體"/>
                           <a:ea typeface="標楷體"/>
                         </a:rPr>
-                        <a:t>生物速率與平衡壓力分不開</a:t>
+                        <a:t>菌吃多快與平衡壓力分不開</a:t>
                       </a:r>
                     </a:p>
                   </a:txBody>
@@ -9381,7 +9304,7 @@
                           <a:ea typeface="標楷體"/>
                           <a:ea typeface="標楷體"/>
                         </a:rPr>
-                        <a:t>⚠ 曾視為模型的巧合</a:t>
+                        <a:t>⚠ 曾視為巧合</a:t>
                       </a:r>
                     </a:p>
                   </a:txBody>
@@ -9406,7 +9329,7 @@
                           <a:ea typeface="標楷體"/>
                           <a:ea typeface="標楷體"/>
                         </a:rPr>
-                        <a:t>把直線硬套指數模型的必然結果</a:t>
+                        <a:t>本來就是直線，卻拿彎曲的公式去套，當然套不出來</a:t>
                       </a:r>
                     </a:p>
                   </a:txBody>
@@ -9483,7 +9406,7 @@
                           <a:ea typeface="標楷體"/>
                           <a:ea typeface="標楷體"/>
                         </a:rPr>
-                        <a:t>液相碳庫可供應數十天，碳源並未耗盡</a:t>
+                        <a:t>水裡存的碳還夠用幾十天，所以碳源根本沒斷</a:t>
                       </a:r>
                     </a:p>
                   </a:txBody>
@@ -9574,51 +9497,7 @@
                 <a:ea typeface="標楷體"/>
                 <a:ea typeface="標楷體"/>
               </a:rPr>
-              <a:t>⟹ 真正待解的，是壓降中生物解釋不了的那 61%，以及 </a:t>
-            </a:r>
-            <a:r>
-              <a:rPr sz="1700" b="0" i="0">
-                <a:solidFill>
-                  <a:srgbClr val="595959"/>
-                </a:solidFill>
-                <a:latin typeface="Times New Roman"/>
-                <a:ea typeface="標楷體"/>
-                <a:ea typeface="標楷體"/>
-              </a:rPr>
-              <a:t>CO</a:t>
-            </a:r>
-            <a:r>
-              <a:rPr sz="1700" b="0" i="0">
-                <a:solidFill>
-                  <a:srgbClr val="595959"/>
-                </a:solidFill>
-                <a:latin typeface="Times New Roman"/>
-                <a:ea typeface="標楷體"/>
-                <a:ea typeface="標楷體"/>
-              </a:rPr>
-              <a:t>₂:</a:t>
-            </a:r>
-            <a:r>
-              <a:rPr sz="1700" b="0" i="0">
-                <a:solidFill>
-                  <a:srgbClr val="595959"/>
-                </a:solidFill>
-                <a:latin typeface="Times New Roman"/>
-                <a:ea typeface="標楷體"/>
-                <a:ea typeface="標楷體"/>
-              </a:rPr>
-              <a:t>H</a:t>
-            </a:r>
-            <a:r>
-              <a:rPr sz="1700" b="0" i="0">
-                <a:solidFill>
-                  <a:srgbClr val="595959"/>
-                </a:solidFill>
-                <a:latin typeface="Times New Roman"/>
-                <a:ea typeface="標楷體"/>
-                <a:ea typeface="標楷體"/>
-              </a:rPr>
-              <a:t>₂ 的偏離。</a:t>
+              <a:t>⟹ 真正待解的是兩件：菌吃掉的量解釋不了的那 61% 壓降，以及剩下的氣體比例為何不對。</a:t>
             </a:r>
           </a:p>
         </p:txBody>
@@ -9993,51 +9872,7 @@
                 <a:ea typeface="標楷體"/>
                 <a:ea typeface="標楷體"/>
               </a:rPr>
-              <a:t>四、殘餘氣體的 </a:t>
-            </a:r>
-            <a:r>
-              <a:rPr sz="2800" b="1" i="0">
-                <a:solidFill>
-                  <a:srgbClr val="000000"/>
-                </a:solidFill>
-                <a:latin typeface="Times New Roman"/>
-                <a:ea typeface="標楷體"/>
-                <a:ea typeface="標楷體"/>
-              </a:rPr>
-              <a:t>CO</a:t>
-            </a:r>
-            <a:r>
-              <a:rPr sz="2800" b="1" i="0">
-                <a:solidFill>
-                  <a:srgbClr val="000000"/>
-                </a:solidFill>
-                <a:latin typeface="Times New Roman"/>
-                <a:ea typeface="標楷體"/>
-                <a:ea typeface="標楷體"/>
-              </a:rPr>
-              <a:t>₂:</a:t>
-            </a:r>
-            <a:r>
-              <a:rPr sz="2800" b="1" i="0">
-                <a:solidFill>
-                  <a:srgbClr val="000000"/>
-                </a:solidFill>
-                <a:latin typeface="Times New Roman"/>
-                <a:ea typeface="標楷體"/>
-                <a:ea typeface="標楷體"/>
-              </a:rPr>
-              <a:t>H</a:t>
-            </a:r>
-            <a:r>
-              <a:rPr sz="2800" b="1" i="0">
-                <a:solidFill>
-                  <a:srgbClr val="000000"/>
-                </a:solidFill>
-                <a:latin typeface="Times New Roman"/>
-                <a:ea typeface="標楷體"/>
-                <a:ea typeface="標楷體"/>
-              </a:rPr>
-              <a:t>₂ 偏離進料比</a:t>
+              <a:t>四、剩下的氣體比例與補進去的不同</a:t>
             </a:r>
           </a:p>
         </p:txBody>

--- a/docs/decks/簡報_2026-09-21_氫氣流失與壓降歸因.pptx
+++ b/docs/decks/簡報_2026-09-21_氫氣流失與壓降歸因.pptx
@@ -4650,7 +4650,7 @@
                 <a:ea typeface="標楷體"/>
                 <a:ea typeface="標楷體"/>
               </a:rPr>
-              <a:t> 的液相碳庫在排氣瞬間冒出來，就足以解釋觀測到的全部偏離。</a:t>
+              <a:t> 的「水裡溶著的碳」在排氣瞬間冒出來，就足以解釋全部的偏離。</a:t>
             </a:r>
           </a:p>
           <a:p>
@@ -4690,7 +4690,7 @@
                 <a:ea typeface="標楷體"/>
                 <a:ea typeface="標楷體"/>
               </a:rPr>
-              <a:t>=+0.21，方向符合，但 35 筆的可偵測門檻是 0.46，樣本不足以分辨；排氣後立刻補氣會降 </a:t>
+              <a:t>=+0.21，方向符合，但 35 筆資料最少要 0.46 才看得出來，樣本不足以分辨；排氣後立刻補氣會降 </a:t>
             </a:r>
             <a:r>
               <a:rPr sz="1400" b="0" i="0">
@@ -5072,7 +5072,7 @@
                 <a:ea typeface="標楷體"/>
                 <a:ea typeface="標楷體"/>
               </a:rPr>
-              <a:t> 的水準」對「</a:t>
+              <a:t> 的高低」對「</a:t>
             </a:r>
             <a:r>
               <a:rPr sz="1700" b="0" i="0">
@@ -5454,7 +5454,7 @@
                 <a:ea typeface="標楷體"/>
                 <a:ea typeface="標楷體"/>
               </a:rPr>
-              <a:t>另一項更正：先前偵測到的排氣只有 </a:t>
+              <a:t>先前只數到 </a:t>
             </a:r>
             <a:r>
               <a:rPr sz="1900" b="1" i="0">
@@ -5476,7 +5476,7 @@
                 <a:ea typeface="標楷體"/>
                 <a:ea typeface="標楷體"/>
               </a:rPr>
-              <a:t>（限有氣體組成者），以壓力驟降重新偵測後實際有 </a:t>
+              <a:t>排氣（限有氣體讀數的），改以壓力驟降去找，實際有 </a:t>
             </a:r>
             <a:r>
               <a:rPr sz="1900" b="1" i="0">
@@ -5814,7 +5814,7 @@
                 <a:ea typeface="標楷體"/>
                 <a:ea typeface="標楷體"/>
               </a:rPr>
-              <a:t>、液相佔一半估算整機：長期 </a:t>
+              <a:t>、水佔一半估算：長期 </a:t>
             </a:r>
             <a:r>
               <a:rPr sz="1900" b="1" i="0">
@@ -5825,12 +5825,34 @@
                 <a:ea typeface="標楷體"/>
                 <a:ea typeface="標楷體"/>
               </a:rPr>
-              <a:t>0.120 </a:t>
+              <a:t>0.120</a:t>
+            </a:r>
+            <a:r>
+              <a:rPr sz="1700" b="0" i="0">
+                <a:solidFill>
+                  <a:srgbClr val="000000"/>
+                </a:solidFill>
+                <a:latin typeface="Times New Roman"/>
+                <a:ea typeface="標楷體"/>
+                <a:ea typeface="標楷體"/>
+              </a:rPr>
+              <a:t>、初始 </a:t>
             </a:r>
             <a:r>
               <a:rPr sz="1900" b="1" i="0">
                 <a:solidFill>
-                  <a:srgbClr val="1F6FB5"/>
+                  <a:srgbClr val="FF0000"/>
+                </a:solidFill>
+                <a:latin typeface="Times New Roman"/>
+                <a:ea typeface="標楷體"/>
+                <a:ea typeface="標楷體"/>
+              </a:rPr>
+              <a:t>0.391 </a:t>
+            </a:r>
+            <a:r>
+              <a:rPr sz="1900" b="1" i="0">
+                <a:solidFill>
+                  <a:srgbClr val="FF0000"/>
                 </a:solidFill>
                 <a:latin typeface="Times New Roman"/>
                 <a:ea typeface="標楷體"/>
@@ -5841,7 +5863,7 @@
             <a:r>
               <a:rPr sz="1900" b="1" i="0">
                 <a:solidFill>
-                  <a:srgbClr val="1F6FB5"/>
+                  <a:srgbClr val="FF0000"/>
                 </a:solidFill>
                 <a:latin typeface="Times New Roman"/>
                 <a:ea typeface="標楷體"/>
@@ -5852,7 +5874,7 @@
             <a:r>
               <a:rPr sz="1900" b="1" i="0">
                 <a:solidFill>
-                  <a:srgbClr val="1F6FB5"/>
+                  <a:srgbClr val="FF0000"/>
                 </a:solidFill>
                 <a:latin typeface="Times New Roman"/>
                 <a:ea typeface="標楷體"/>
@@ -5869,62 +5891,7 @@
                 <a:ea typeface="標楷體"/>
                 <a:ea typeface="標楷體"/>
               </a:rPr>
-              <a:t>、初始 </a:t>
-            </a:r>
-            <a:r>
-              <a:rPr sz="1900" b="1" i="0">
-                <a:solidFill>
-                  <a:srgbClr val="FF0000"/>
-                </a:solidFill>
-                <a:latin typeface="Times New Roman"/>
-                <a:ea typeface="標楷體"/>
-                <a:ea typeface="標楷體"/>
-              </a:rPr>
-              <a:t>0.391 </a:t>
-            </a:r>
-            <a:r>
-              <a:rPr sz="1900" b="1" i="0">
-                <a:solidFill>
-                  <a:srgbClr val="FF0000"/>
-                </a:solidFill>
-                <a:latin typeface="Times New Roman"/>
-                <a:ea typeface="標楷體"/>
-                <a:ea typeface="標楷體"/>
-              </a:rPr>
-              <a:t>mmol</a:t>
-            </a:r>
-            <a:r>
-              <a:rPr sz="1900" b="1" i="0">
-                <a:solidFill>
-                  <a:srgbClr val="FF0000"/>
-                </a:solidFill>
-                <a:latin typeface="Times New Roman"/>
-                <a:ea typeface="標楷體"/>
-                <a:ea typeface="標楷體"/>
-              </a:rPr>
-              <a:t>/</a:t>
-            </a:r>
-            <a:r>
-              <a:rPr sz="1900" b="1" i="0">
-                <a:solidFill>
-                  <a:srgbClr val="FF0000"/>
-                </a:solidFill>
-                <a:latin typeface="Times New Roman"/>
-                <a:ea typeface="標楷體"/>
-                <a:ea typeface="標楷體"/>
-              </a:rPr>
-              <a:t>hr</a:t>
-            </a:r>
-            <a:r>
-              <a:rPr sz="1700" b="0" i="0">
-                <a:solidFill>
-                  <a:srgbClr val="000000"/>
-                </a:solidFill>
-                <a:latin typeface="Times New Roman"/>
-                <a:ea typeface="標楷體"/>
-                <a:ea typeface="標楷體"/>
-              </a:rPr>
-              <a:t>。⚠ 液位確認後即可定案。</a:t>
+              <a:t>（⚠ 待水位確認）</a:t>
             </a:r>
           </a:p>
         </p:txBody>
@@ -6218,7 +6185,7 @@
                 <a:ea typeface="標楷體"/>
                 <a:ea typeface="標楷體"/>
               </a:rPr>
-              <a:t>曲率配對是本次新做的：用既有資料裡「質傳速率不同」的兩條曲線互相對消，即可解出生物速率，不需要新實驗。</a:t>
+              <a:t>曲率配對是本次新做的：用既有資料裡「氣體溶進水的快慢不同」的兩條曲線互相對消，即可解出生物速率，不需要新實驗。</a:t>
             </a:r>
           </a:p>
         </p:txBody>
@@ -6848,7 +6815,7 @@
                 <a:ea typeface="標楷體"/>
                 <a:ea typeface="標楷體"/>
               </a:rPr>
-              <a:t>於無菌或不含微生物的條件下，以氮氣與氫氣分別充壓至相同絕對壓力，記錄 24 小時的壓力變化。氫氣若衰減顯著較快，即為直接證據。同時建議檢查彈性體墊片材質是否為氫氣適用。</a:t>
+              <a:t>於無菌或不含微生物的條件下，以氮氣與氫氣分別充壓至相同絕對壓力，記錄 24 小時的壓力變化。氫氣若衰減顯著較快，即為直接證據。同時建議檢查橡膠墊片的材質是否適用於氫氣。</a:t>
             </a:r>
           </a:p>
         </p:txBody>
@@ -7908,7 +7875,7 @@
                 <a:ea typeface="標楷體"/>
                 <a:ea typeface="標楷體"/>
               </a:rPr>
-              <a:t>。這是目前唯一能分辨「氫氣流失」與「碳酸鹽脫氣」的方法。</a:t>
+              <a:t>。這是目前唯一能分辨「氫氣流失」與「水裡的碳冒回來」的方法。</a:t>
             </a:r>
           </a:p>
           <a:p>
@@ -7937,7 +7904,7 @@
                 <a:ea typeface="標楷體"/>
                 <a:ea typeface="標楷體"/>
               </a:rPr>
-              <a:t>——剛充壓時氣體仍在溶進水裡，那段壓降不是洩漏。須待溶解平衡後（約 5 個時間常數）才開始計算。</a:t>
+              <a:t>——剛充壓時氣體仍在溶進水裡，那段壓降不是洩漏。須等氣體溶進水的過程走完之後，才開始計算。</a:t>
             </a:r>
           </a:p>
         </p:txBody>
@@ -8314,7 +8281,7 @@
                           <a:ea typeface="標楷體"/>
                           <a:ea typeface="標楷體"/>
                         </a:rPr>
-                        <a:t>洩漏被排除，剩碳酸鹽脫氣</a:t>
+                        <a:t>洩漏被排除，剩水裡的碳冒回來</a:t>
                       </a:r>
                     </a:p>
                   </a:txBody>
@@ -8430,7 +8397,7 @@
                 <a:ea typeface="標楷體"/>
                 <a:ea typeface="標楷體"/>
               </a:rPr>
-              <a:t>（最優先，液相三成 </a:t>
+              <a:t>（最優先，水佔三成 </a:t>
             </a:r>
             <a:r>
               <a:rPr sz="1700" b="0" i="0">
@@ -8452,7 +8419,7 @@
                 <a:ea typeface="標楷體"/>
                 <a:ea typeface="標楷體"/>
               </a:rPr>
-              <a:t> 七成整機速率差 2.3 倍）　③ 墊片材質　④ 液相溫度　⑤ 總容積究竉是 1.8 還是 1.99 </a:t>
+              <a:t> 七成，整機速率差 2.3 倍）　③ 墊片材質　④ 水溫　⑤ 總容積究竟是 1.8 還是 1.99 </a:t>
             </a:r>
             <a:r>
               <a:rPr sz="1700" b="0" i="1">
@@ -8492,7 +8459,7 @@
                 <a:ea typeface="標楷體"/>
                 <a:ea typeface="標楷體"/>
               </a:rPr>
-              <a:t>鹼度 </a:t>
+              <a:t>水裡的碳總量（鹼度 </a:t>
             </a:r>
             <a:r>
               <a:rPr sz="1800" b="1" i="0">
@@ -8514,7 +8481,7 @@
                 <a:ea typeface="標楷體"/>
                 <a:ea typeface="標楷體"/>
               </a:rPr>
-              <a:t> 或總溶解無機碳</a:t>
+              <a:t> 或總溶解無機碳）</a:t>
             </a:r>
             <a:r>
               <a:rPr sz="1700" b="0" i="0">
@@ -8525,7 +8492,7 @@
                 <a:ea typeface="標楷體"/>
                 <a:ea typeface="標楷體"/>
               </a:rPr>
-              <a:t>（需滴定）——目前液相碳庫是由 </a:t>
+              <a:t>（需做酸鹼滴定）——目前這個量是由 </a:t>
             </a:r>
             <a:r>
               <a:rPr sz="1700" b="0" i="0">
@@ -8547,7 +8514,7 @@
                 <a:ea typeface="標楷體"/>
                 <a:ea typeface="標楷體"/>
               </a:rPr>
-              <a:t> 推算的，而它直接決定上述兩個機制的強度。</a:t>
+              <a:t> 回推的，而它直接決定上述兩個機制的強度。</a:t>
             </a:r>
           </a:p>
         </p:txBody>
@@ -8797,8 +8764,8 @@
         </p:blipFill>
         <p:spPr>
           <a:xfrm>
-            <a:off x="1596599" y="1152000"/>
-            <a:ext cx="9000000" cy="5018153"/>
+            <a:off x="1776599" y="1152000"/>
+            <a:ext cx="8640000" cy="4817427"/>
           </a:xfrm>
           <a:prstGeom prst="rect">
             <a:avLst/>
@@ -8813,8 +8780,8 @@
         </p:nvSpPr>
         <p:spPr>
           <a:xfrm>
-            <a:off x="576000" y="6278153"/>
-            <a:ext cx="11041200" cy="129847"/>
+            <a:off x="576000" y="6077427"/>
+            <a:ext cx="11041200" cy="330573"/>
           </a:xfrm>
           <a:prstGeom prst="rect">
             <a:avLst/>
@@ -9641,7 +9608,7 @@
                 <a:ea typeface="標楷體"/>
                 <a:ea typeface="標楷體"/>
               </a:rPr>
-              <a:t>補氣加入的是二氧化碳與氫氣、不含甲烷，真頂空必定被稀釋</a:t>
+              <a:t>補進去的是二氧化碳與氫氣、不含甲烷，槽內真實氣體必定被稀釋</a:t>
             </a:r>
           </a:p>
         </p:txBody>
@@ -9813,7 +9780,7 @@
                 <a:ea typeface="標楷體"/>
                 <a:ea typeface="標楷體"/>
               </a:rPr>
-              <a:t>，距「真頂空」應有的 −1 有 4.5 個標準差。分析儀只有在排氣當下的一至二分鐘可信——全資料庫僅 35 筆，後續所有氣體計算只用這 35 筆。</a:t>
+              <a:t>，距「真的量到槽內氣體」應有的 −1 差了 4.5 個標準差。分析儀只有在排氣當下的一至二分鐘可信——全資料庫僅 35 筆，後續所有氣體計算只用這 35 筆。</a:t>
             </a:r>
           </a:p>
         </p:txBody>
@@ -10679,7 +10646,7 @@
                 <a:ea typeface="標楷體"/>
                 <a:ea typeface="標楷體"/>
               </a:rPr>
-              <a:t>六、氧化還原電位（</a:t>
+              <a:t>六、</a:t>
             </a:r>
             <a:r>
               <a:rPr sz="2800" b="1" i="0">
@@ -10701,7 +10668,7 @@
                 <a:ea typeface="標楷體"/>
                 <a:ea typeface="標楷體"/>
               </a:rPr>
-              <a:t>）該怎麼讀</a:t>
+              <a:t>（水的氧化還原狀態）該怎麼讀</a:t>
             </a:r>
           </a:p>
         </p:txBody>
@@ -10786,7 +10753,7 @@
                 <a:ea typeface="標楷體"/>
                 <a:ea typeface="標楷體"/>
               </a:rPr>
-              <a:t>水準健康，但循環內的變化不是生物造成的</a:t>
+              <a:t>數值本身正常，但循環裡的起伏不是菌造成的</a:t>
             </a:r>
           </a:p>
         </p:txBody>
@@ -10936,7 +10903,7 @@
                 <a:ea typeface="標楷體"/>
                 <a:ea typeface="標楷體"/>
               </a:rPr>
-              <a:t>水準：</a:t>
+              <a:t>數值本身：</a:t>
             </a:r>
             <a:r>
               <a:rPr sz="1600" b="0" i="0">
@@ -10969,7 +10936,7 @@
                 <a:ea typeface="標楷體"/>
                 <a:ea typeface="標楷體"/>
               </a:rPr>
-              <a:t>（對 </a:t>
+              <a:t>，落在文獻最適範圍 −335.6 ± 29.0 </a:t>
             </a:r>
             <a:r>
               <a:rPr sz="1600" b="0" i="0">
@@ -10980,7 +10947,7 @@
                 <a:ea typeface="標楷體"/>
                 <a:ea typeface="標楷體"/>
               </a:rPr>
-              <a:t>SHE</a:t>
+              <a:t>mV</a:t>
             </a:r>
             <a:r>
               <a:rPr sz="1600" b="0" i="0">
@@ -10991,29 +10958,7 @@
                 <a:ea typeface="標楷體"/>
                 <a:ea typeface="標楷體"/>
               </a:rPr>
-              <a:t>），文獻最適為 −335.6 ± 29.0 </a:t>
-            </a:r>
-            <a:r>
-              <a:rPr sz="1600" b="0" i="0">
-                <a:solidFill>
-                  <a:srgbClr val="000000"/>
-                </a:solidFill>
-                <a:latin typeface="Times New Roman"/>
-                <a:ea typeface="標楷體"/>
-                <a:ea typeface="標楷體"/>
-              </a:rPr>
-              <a:t>mV</a:t>
-            </a:r>
-            <a:r>
-              <a:rPr sz="1600" b="0" i="0">
-                <a:solidFill>
-                  <a:srgbClr val="000000"/>
-                </a:solidFill>
-                <a:latin typeface="Times New Roman"/>
-                <a:ea typeface="標楷體"/>
-                <a:ea typeface="標楷體"/>
-              </a:rPr>
-              <a:t> — </a:t>
+              <a:t> </a:t>
             </a:r>
             <a:r>
               <a:rPr sz="1700" b="1" i="0">
@@ -11024,7 +10969,7 @@
                 <a:ea typeface="標楷體"/>
                 <a:ea typeface="標楷體"/>
               </a:rPr>
-              <a:t>正落在區間內</a:t>
+              <a:t>之內</a:t>
             </a:r>
           </a:p>
           <a:p>
@@ -11042,7 +10987,7 @@
                 <a:ea typeface="標楷體"/>
                 <a:ea typeface="標楷體"/>
               </a:rPr>
-              <a:t>變化：</a:t>
+              <a:t>循環裡的起伏：</a:t>
             </a:r>
             <a:r>
               <a:rPr sz="1600" b="0" i="0">
@@ -11053,7 +10998,7 @@
                 <a:ea typeface="標楷體"/>
                 <a:ea typeface="標楷體"/>
               </a:rPr>
-              <a:t>補氣跳 +37 </a:t>
+              <a:t>一補氣就跳 +37 </a:t>
             </a:r>
             <a:r>
               <a:rPr sz="1600" b="0" i="0">
@@ -11075,7 +11020,7 @@
                 <a:ea typeface="標楷體"/>
                 <a:ea typeface="標楷體"/>
               </a:rPr>
-              <a:t>；泵運轉 +3.5 ~ +10.8 </a:t>
+              <a:t>，氣泵一開每分鐘再走 +3.5 ~ +10.8 </a:t>
             </a:r>
             <a:r>
               <a:rPr sz="1600" b="0" i="0">
@@ -11097,7 +11042,7 @@
                 <a:ea typeface="標楷體"/>
                 <a:ea typeface="標楷體"/>
               </a:rPr>
-              <a:t>/分。</a:t>
+              <a:t>——都是操作造成的。</a:t>
             </a:r>
           </a:p>
           <a:p>
@@ -11115,7 +11060,7 @@
                 <a:ea typeface="標楷體"/>
                 <a:ea typeface="標楷體"/>
               </a:rPr>
-              <a:t>產甲烷必須停止的時段，</a:t>
+              <a:t>連碳源已用完、菌不可能在產甲烷的時段，</a:t>
             </a:r>
             <a:r>
               <a:rPr sz="1600" b="1" i="0">
@@ -11137,7 +11082,7 @@
                 <a:ea typeface="標楷體"/>
                 <a:ea typeface="標楷體"/>
               </a:rPr>
-              <a:t> 照常變化。</a:t>
+              <a:t> 照樣在動。</a:t>
             </a:r>
           </a:p>
         </p:txBody>
@@ -11224,7 +11169,7 @@
                 <a:ea typeface="標楷體"/>
                 <a:ea typeface="標楷體"/>
               </a:rPr>
-              <a:t>文獻將 </a:t>
+              <a:t>文獻把 </a:t>
             </a:r>
             <a:r>
               <a:rPr sz="1300" b="0" i="0">
@@ -11246,7 +11191,7 @@
                 <a:ea typeface="標楷體"/>
                 <a:ea typeface="標楷體"/>
               </a:rPr>
-              <a:t> 當微生物活性指標，其對象是未外加氫氣的系統；本反應器的氫氣為外部輸入，會直接鉗制電位，該套解讀不能直接移植。</a:t>
+              <a:t> 當成「菌有多活躍」的指標，但那些系統沒有從外面加氫氣；本反應器的氫氣是打進去的，會直接把數值壓住，那套讀法不能照搬。</a:t>
             </a:r>
           </a:p>
         </p:txBody>

--- a/docs/decks/簡報_2026-09-21_氫氣流失與壓降歸因.pptx
+++ b/docs/decks/簡報_2026-09-21_氫氣流失與壓降歸因.pptx
@@ -24,6 +24,7 @@
     <p:sldId id="272" r:id="rId23"/>
     <p:sldId id="273" r:id="rId24"/>
     <p:sldId id="274" r:id="rId25"/>
+    <p:sldId id="275" r:id="rId26"/>
   </p:sldIdLst>
   <p:sldSz cx="12193200" cy="6858000" type="screen4x3"/>
   <p:notesSz cx="6858000" cy="9144000"/>
@@ -6586,7 +6587,7 @@
                 <a:ea typeface="標楷體"/>
                 <a:ea typeface="標楷體"/>
               </a:rPr>
-              <a:t>十七、建議</a:t>
+              <a:t>十七、比例不對的解釋之三：補氣的比例本身</a:t>
             </a:r>
           </a:p>
         </p:txBody>
@@ -6671,7 +6672,7 @@
                 <a:ea typeface="標楷體"/>
                 <a:ea typeface="標楷體"/>
               </a:rPr>
-              <a:t>第一項完成前，其餘方向都無法定案</a:t>
+              <a:t>2026-10-02 補充——這個解釋既不需要洩漏，也不需要脫氣</a:t>
             </a:r>
           </a:p>
         </p:txBody>
@@ -6770,6 +6771,596 @@
         <p:spPr>
           <a:xfrm>
             <a:off x="576000" y="1296000"/>
+            <a:ext cx="11041200" cy="4176000"/>
+          </a:xfrm>
+          <a:prstGeom prst="rect">
+            <a:avLst/>
+          </a:prstGeom>
+          <a:noFill/>
+        </p:spPr>
+        <p:txBody>
+          <a:bodyPr wrap="square" anchor="t" lIns="0" rIns="0" tIns="0" bIns="0">
+            <a:spAutoFit/>
+          </a:bodyPr>
+          <a:lstStyle/>
+          <a:p>
+            <a:pPr algn="l">
+              <a:spcAft>
+                <a:spcPts val="1200"/>
+              </a:spcAft>
+            </a:pPr>
+            <a:r>
+              <a:rPr sz="1800" b="1" i="0">
+                <a:solidFill>
+                  <a:srgbClr val="000000"/>
+                </a:solidFill>
+                <a:latin typeface="Times New Roman"/>
+                <a:ea typeface="標楷體"/>
+                <a:ea typeface="標楷體"/>
+              </a:rPr>
+              <a:t>做法：</a:t>
+            </a:r>
+            <a:r>
+              <a:rPr sz="1700" b="0" i="0">
+                <a:solidFill>
+                  <a:srgbClr val="000000"/>
+                </a:solidFill>
+                <a:latin typeface="Times New Roman"/>
+                <a:ea typeface="標楷體"/>
+                <a:ea typeface="標楷體"/>
+              </a:rPr>
+              <a:t>把「兩次排氣之間多出來的二氧化碳」對「同期間補氣的壓力增量」做回歸。斜率就是補氣偏離 1:4 的程度，</a:t>
+            </a:r>
+            <a:r>
+              <a:rPr sz="1800" b="1" i="0">
+                <a:solidFill>
+                  <a:srgbClr val="1F6FB5"/>
+                </a:solidFill>
+                <a:latin typeface="Times New Roman"/>
+                <a:ea typeface="標楷體"/>
+                <a:ea typeface="標楷體"/>
+              </a:rPr>
+              <a:t>與水位無關</a:t>
+            </a:r>
+            <a:r>
+              <a:rPr sz="1700" b="0" i="0">
+                <a:solidFill>
+                  <a:srgbClr val="000000"/>
+                </a:solidFill>
+                <a:latin typeface="Times New Roman"/>
+                <a:ea typeface="標楷體"/>
+                <a:ea typeface="標楷體"/>
+              </a:rPr>
+              <a:t>（兩邊都正比於氣體空間，約掉了）。</a:t>
+            </a:r>
+          </a:p>
+          <a:p>
+            <a:pPr algn="l">
+              <a:spcAft>
+                <a:spcPts val="1000"/>
+              </a:spcAft>
+            </a:pPr>
+            <a:r>
+              <a:rPr sz="1800" b="0" i="0">
+                <a:solidFill>
+                  <a:srgbClr val="000000"/>
+                </a:solidFill>
+                <a:latin typeface="Times New Roman"/>
+                <a:ea typeface="標楷體"/>
+                <a:ea typeface="標楷體"/>
+              </a:rPr>
+              <a:t>實測：有效補氣比 = 1 : </a:t>
+            </a:r>
+            <a:r>
+              <a:rPr sz="2400" b="1" i="0">
+                <a:solidFill>
+                  <a:srgbClr val="FF0000"/>
+                </a:solidFill>
+                <a:latin typeface="Times New Roman"/>
+                <a:ea typeface="標楷體"/>
+                <a:ea typeface="標楷體"/>
+              </a:rPr>
+              <a:t>3.85</a:t>
+            </a:r>
+            <a:r>
+              <a:rPr sz="1800" b="0" i="0">
+                <a:solidFill>
+                  <a:srgbClr val="000000"/>
+                </a:solidFill>
+                <a:latin typeface="Times New Roman"/>
+                <a:ea typeface="標楷體"/>
+                <a:ea typeface="標楷體"/>
+              </a:rPr>
+              <a:t>　（95% 區間 1 : 4.03 ~ 1 : 3.63）</a:t>
+            </a:r>
+          </a:p>
+          <a:p>
+            <a:pPr algn="l">
+              <a:spcAft>
+                <a:spcPts val="1200"/>
+              </a:spcAft>
+            </a:pPr>
+            <a:r>
+              <a:rPr sz="1900" b="1" i="0">
+                <a:solidFill>
+                  <a:srgbClr val="000000"/>
+                </a:solidFill>
+                <a:latin typeface="Times New Roman"/>
+                <a:ea typeface="標楷體"/>
+                <a:ea typeface="標楷體"/>
+              </a:rPr>
+              <a:t>也就是說——補氣只要比 1:4 少 </a:t>
+            </a:r>
+            <a:r>
+              <a:rPr sz="2400" b="1" i="0">
+                <a:solidFill>
+                  <a:srgbClr val="FF0000"/>
+                </a:solidFill>
+                <a:latin typeface="Times New Roman"/>
+                <a:ea typeface="標楷體"/>
+                <a:ea typeface="標楷體"/>
+              </a:rPr>
+              <a:t>3.6%</a:t>
+            </a:r>
+            <a:r>
+              <a:rPr sz="1900" b="1" i="0">
+                <a:solidFill>
+                  <a:srgbClr val="000000"/>
+                </a:solidFill>
+                <a:latin typeface="Times New Roman"/>
+                <a:ea typeface="標楷體"/>
+                <a:ea typeface="標楷體"/>
+              </a:rPr>
+              <a:t> 的氫氣，就足以造出全部觀測到的超量。</a:t>
+            </a:r>
+          </a:p>
+          <a:p>
+            <a:pPr algn="l">
+              <a:spcAft>
+                <a:spcPts val="1100"/>
+              </a:spcAft>
+            </a:pPr>
+            <a:r>
+              <a:rPr sz="1700" b="0" i="0">
+                <a:solidFill>
+                  <a:srgbClr val="000000"/>
+                </a:solidFill>
+                <a:latin typeface="Times New Roman"/>
+                <a:ea typeface="標楷體"/>
+                <a:ea typeface="標楷體"/>
+              </a:rPr>
+              <a:t>一般配氣與流量計的誤差就是這個量級，而且誤差是</a:t>
+            </a:r>
+            <a:r>
+              <a:rPr sz="1800" b="1" i="0">
+                <a:solidFill>
+                  <a:srgbClr val="FF0000"/>
+                </a:solidFill>
+                <a:latin typeface="Times New Roman"/>
+                <a:ea typeface="標楷體"/>
+                <a:ea typeface="標楷體"/>
+              </a:rPr>
+              <a:t>單向累積</a:t>
+            </a:r>
+            <a:r>
+              <a:rPr sz="1700" b="0" i="0">
+                <a:solidFill>
+                  <a:srgbClr val="000000"/>
+                </a:solidFill>
+                <a:latin typeface="Times New Roman"/>
+                <a:ea typeface="標楷體"/>
+                <a:ea typeface="標楷體"/>
+              </a:rPr>
+              <a:t>的：消耗嚴格 1:4、補氣稍微偏二氧化碳，殘餘比就會一路往上爬，最後把氫氣逼到近零——正是 35 筆裡最極端那幾筆的樣子。</a:t>
+            </a:r>
+          </a:p>
+          <a:p>
+            <a:pPr algn="l">
+              <a:spcAft>
+                <a:spcPts val="1100"/>
+              </a:spcAft>
+            </a:pPr>
+            <a:r>
+              <a:rPr sz="1700" b="0" i="0">
+                <a:solidFill>
+                  <a:srgbClr val="000000"/>
+                </a:solidFill>
+                <a:latin typeface="Times New Roman"/>
+                <a:ea typeface="標楷體"/>
+                <a:ea typeface="標楷體"/>
+              </a:rPr>
+              <a:t>無補氣的 09-12 短程實驗殘餘比只有 </a:t>
+            </a:r>
+            <a:r>
+              <a:rPr sz="1900" b="1" i="0">
+                <a:solidFill>
+                  <a:srgbClr val="1F6FB5"/>
+                </a:solidFill>
+                <a:latin typeface="Times New Roman"/>
+                <a:ea typeface="標楷體"/>
+                <a:ea typeface="標楷體"/>
+              </a:rPr>
+              <a:t>1.08 倍</a:t>
+            </a:r>
+            <a:r>
+              <a:rPr sz="1700" b="0" i="0">
+                <a:solidFill>
+                  <a:srgbClr val="000000"/>
+                </a:solidFill>
+                <a:latin typeface="Times New Roman"/>
+                <a:ea typeface="標楷體"/>
+                <a:ea typeface="標楷體"/>
+              </a:rPr>
+              <a:t>（長紀錄中位 2.79 倍）-&gt; 超量是一次一次補氣累積出來的。</a:t>
+            </a:r>
+          </a:p>
+          <a:p>
+            <a:pPr algn="l">
+              <a:spcAft>
+                <a:spcPts val="1100"/>
+              </a:spcAft>
+            </a:pPr>
+            <a:r>
+              <a:rPr sz="1700" b="0" i="0">
+                <a:solidFill>
+                  <a:srgbClr val="000000"/>
+                </a:solidFill>
+                <a:latin typeface="Times New Roman"/>
+                <a:ea typeface="標楷體"/>
+                <a:ea typeface="標楷體"/>
+              </a:rPr>
+              <a:t>⚠ 同樣大小的氫氣洩漏會給出一模一樣的斜率，這批資料分不開兩者。差別在於：配氣誤差不需要洩漏，而且查一份氣體分析報告就知道。</a:t>
+            </a:r>
+          </a:p>
+        </p:txBody>
+      </p:sp>
+      <p:sp>
+        <p:nvSpPr>
+          <p:cNvPr id="8" name="Rectangle 7"/>
+          <p:cNvSpPr/>
+          <p:nvPr/>
+        </p:nvSpPr>
+        <p:spPr>
+          <a:xfrm>
+            <a:off x="432000" y="5562000"/>
+            <a:ext cx="11329200" cy="864000"/>
+          </a:xfrm>
+          <a:prstGeom prst="rect">
+            <a:avLst/>
+          </a:prstGeom>
+          <a:solidFill>
+            <a:srgbClr val="F2F7FC"/>
+          </a:solidFill>
+          <a:ln w="9525">
+            <a:solidFill>
+              <a:srgbClr val="2AB6D8"/>
+            </a:solidFill>
+          </a:ln>
+          <a:effectLst/>
+        </p:spPr>
+        <p:style>
+          <a:lnRef idx="1">
+            <a:schemeClr val="accent1"/>
+          </a:lnRef>
+          <a:fillRef idx="3">
+            <a:schemeClr val="accent1"/>
+          </a:fillRef>
+          <a:effectRef idx="2">
+            <a:schemeClr val="accent1"/>
+          </a:effectRef>
+          <a:fontRef idx="minor">
+            <a:schemeClr val="lt1"/>
+          </a:fontRef>
+        </p:style>
+        <p:txBody>
+          <a:bodyPr rtlCol="0" anchor="ctr"/>
+          <a:lstStyle/>
+          <a:p>
+            <a:pPr algn="ctr"/>
+          </a:p>
+        </p:txBody>
+      </p:sp>
+      <p:sp>
+        <p:nvSpPr>
+          <p:cNvPr id="9" name="TextBox 8"/>
+          <p:cNvSpPr txBox="1"/>
+          <p:nvPr/>
+        </p:nvSpPr>
+        <p:spPr>
+          <a:xfrm>
+            <a:off x="612000" y="5670000"/>
+            <a:ext cx="10969200" cy="648000"/>
+          </a:xfrm>
+          <a:prstGeom prst="rect">
+            <a:avLst/>
+          </a:prstGeom>
+          <a:noFill/>
+        </p:spPr>
+        <p:txBody>
+          <a:bodyPr wrap="square" anchor="ctr" lIns="0" rIns="0" tIns="0" bIns="0">
+            <a:spAutoFit/>
+          </a:bodyPr>
+          <a:lstStyle/>
+          <a:p>
+            <a:pPr algn="l">
+              <a:spcAft>
+                <a:spcPts val="600"/>
+              </a:spcAft>
+            </a:pPr>
+            <a:r>
+              <a:rPr sz="1300" b="0" i="0">
+                <a:solidFill>
+                  <a:srgbClr val="FF0000"/>
+                </a:solidFill>
+                <a:latin typeface="Times New Roman"/>
+                <a:ea typeface="標楷體"/>
+                <a:ea typeface="標楷體"/>
+              </a:rPr>
+              <a:t>純二氧化碳補氣已被排除：那要求的碳輸入是生物消耗的 14 倍，且每 4 天要讓液體多吸收 0.19 </a:t>
+            </a:r>
+            <a:r>
+              <a:rPr sz="1300" b="0" i="1">
+                <a:solidFill>
+                  <a:srgbClr val="FF0000"/>
+                </a:solidFill>
+                <a:latin typeface="Times New Roman"/>
+                <a:ea typeface="標楷體"/>
+                <a:ea typeface="標楷體"/>
+              </a:rPr>
+              <a:t>M</a:t>
+            </a:r>
+            <a:r>
+              <a:rPr sz="1300" b="0" i="0">
+                <a:solidFill>
+                  <a:srgbClr val="FF0000"/>
+                </a:solidFill>
+                <a:latin typeface="Times New Roman"/>
+                <a:ea typeface="標楷體"/>
+                <a:ea typeface="標楷體"/>
+              </a:rPr>
+              <a:t> 的碳，酸鹼值不可能像實測這樣平。</a:t>
+            </a:r>
+          </a:p>
+        </p:txBody>
+      </p:sp>
+    </p:spTree>
+  </p:cSld>
+  <p:clrMapOvr>
+    <a:masterClrMapping/>
+  </p:clrMapOvr>
+</p:sld>
+</file>
+
+<file path=ppt/slides/slide19.xml><?xml version="1.0" encoding="utf-8"?>
+<p:sld xmlns:a="http://schemas.openxmlformats.org/drawingml/2006/main" xmlns:p="http://schemas.openxmlformats.org/presentationml/2006/main" xmlns:r="http://schemas.openxmlformats.org/officeDocument/2006/relationships">
+  <p:cSld>
+    <p:spTree>
+      <p:nvGrpSpPr>
+        <p:cNvPr id="1" name=""/>
+        <p:cNvGrpSpPr/>
+        <p:nvPr/>
+      </p:nvGrpSpPr>
+      <p:grpSpPr/>
+      <p:sp>
+        <p:nvSpPr>
+          <p:cNvPr id="2" name="TextBox 1"/>
+          <p:cNvSpPr txBox="1"/>
+          <p:nvPr/>
+        </p:nvSpPr>
+        <p:spPr>
+          <a:xfrm>
+            <a:off x="432000" y="180000"/>
+            <a:ext cx="11329200" cy="540000"/>
+          </a:xfrm>
+          <a:prstGeom prst="rect">
+            <a:avLst/>
+          </a:prstGeom>
+          <a:noFill/>
+        </p:spPr>
+        <p:txBody>
+          <a:bodyPr wrap="square" anchor="t" lIns="0" rIns="0" tIns="0" bIns="0">
+            <a:spAutoFit/>
+          </a:bodyPr>
+          <a:lstStyle/>
+          <a:p>
+            <a:pPr algn="ctr">
+              <a:spcAft>
+                <a:spcPts val="0"/>
+              </a:spcAft>
+            </a:pPr>
+            <a:r>
+              <a:rPr sz="2800" b="1" i="0">
+                <a:solidFill>
+                  <a:srgbClr val="000000"/>
+                </a:solidFill>
+                <a:latin typeface="Times New Roman"/>
+                <a:ea typeface="標楷體"/>
+                <a:ea typeface="標楷體"/>
+              </a:rPr>
+              <a:t>十八、建議</a:t>
+            </a:r>
+          </a:p>
+        </p:txBody>
+      </p:sp>
+      <p:sp>
+        <p:nvSpPr>
+          <p:cNvPr id="3" name="Rectangle 2"/>
+          <p:cNvSpPr/>
+          <p:nvPr/>
+        </p:nvSpPr>
+        <p:spPr>
+          <a:xfrm>
+            <a:off x="216000" y="763200"/>
+            <a:ext cx="11761200" cy="18000"/>
+          </a:xfrm>
+          <a:prstGeom prst="rect">
+            <a:avLst/>
+          </a:prstGeom>
+          <a:solidFill>
+            <a:srgbClr val="2AB6D8"/>
+          </a:solidFill>
+          <a:ln>
+            <a:noFill/>
+          </a:ln>
+          <a:effectLst/>
+        </p:spPr>
+        <p:style>
+          <a:lnRef idx="1">
+            <a:schemeClr val="accent1"/>
+          </a:lnRef>
+          <a:fillRef idx="3">
+            <a:schemeClr val="accent1"/>
+          </a:fillRef>
+          <a:effectRef idx="2">
+            <a:schemeClr val="accent1"/>
+          </a:effectRef>
+          <a:fontRef idx="minor">
+            <a:schemeClr val="lt1"/>
+          </a:fontRef>
+        </p:style>
+        <p:txBody>
+          <a:bodyPr rtlCol="0" anchor="ctr"/>
+          <a:lstStyle/>
+          <a:p>
+            <a:pPr algn="ctr"/>
+          </a:p>
+        </p:txBody>
+      </p:sp>
+      <p:sp>
+        <p:nvSpPr>
+          <p:cNvPr id="4" name="TextBox 3"/>
+          <p:cNvSpPr txBox="1"/>
+          <p:nvPr/>
+        </p:nvSpPr>
+        <p:spPr>
+          <a:xfrm>
+            <a:off x="503999" y="842400"/>
+            <a:ext cx="11185201" cy="251999"/>
+          </a:xfrm>
+          <a:prstGeom prst="rect">
+            <a:avLst/>
+          </a:prstGeom>
+          <a:noFill/>
+        </p:spPr>
+        <p:txBody>
+          <a:bodyPr wrap="square" anchor="t" lIns="0" rIns="0" tIns="0" bIns="0">
+            <a:spAutoFit/>
+          </a:bodyPr>
+          <a:lstStyle/>
+          <a:p>
+            <a:pPr algn="ctr">
+              <a:spcAft>
+                <a:spcPts val="600"/>
+              </a:spcAft>
+            </a:pPr>
+            <a:r>
+              <a:rPr sz="1300" b="0" i="0">
+                <a:solidFill>
+                  <a:srgbClr val="595959"/>
+                </a:solidFill>
+                <a:latin typeface="Times New Roman"/>
+                <a:ea typeface="標楷體"/>
+                <a:ea typeface="標楷體"/>
+              </a:rPr>
+              <a:t>第一項完成前，其餘方向都無法定案</a:t>
+            </a:r>
+          </a:p>
+        </p:txBody>
+      </p:sp>
+      <p:sp>
+        <p:nvSpPr>
+          <p:cNvPr id="5" name="Rectangle 4"/>
+          <p:cNvSpPr/>
+          <p:nvPr/>
+        </p:nvSpPr>
+        <p:spPr>
+          <a:xfrm>
+            <a:off x="0" y="6552000"/>
+            <a:ext cx="12193200" cy="306000"/>
+          </a:xfrm>
+          <a:prstGeom prst="rect">
+            <a:avLst/>
+          </a:prstGeom>
+          <a:solidFill>
+            <a:srgbClr val="2E8BC0"/>
+          </a:solidFill>
+          <a:ln>
+            <a:noFill/>
+          </a:ln>
+          <a:effectLst/>
+        </p:spPr>
+        <p:style>
+          <a:lnRef idx="1">
+            <a:schemeClr val="accent1"/>
+          </a:lnRef>
+          <a:fillRef idx="3">
+            <a:schemeClr val="accent1"/>
+          </a:fillRef>
+          <a:effectRef idx="2">
+            <a:schemeClr val="accent1"/>
+          </a:effectRef>
+          <a:fontRef idx="minor">
+            <a:schemeClr val="lt1"/>
+          </a:fontRef>
+        </p:style>
+        <p:txBody>
+          <a:bodyPr rtlCol="0" anchor="ctr"/>
+          <a:lstStyle/>
+          <a:p>
+            <a:pPr algn="ctr"/>
+          </a:p>
+        </p:txBody>
+      </p:sp>
+      <p:sp>
+        <p:nvSpPr>
+          <p:cNvPr id="6" name="TextBox 5"/>
+          <p:cNvSpPr txBox="1"/>
+          <p:nvPr/>
+        </p:nvSpPr>
+        <p:spPr>
+          <a:xfrm>
+            <a:off x="11329200" y="6577200"/>
+            <a:ext cx="576000" cy="216000"/>
+          </a:xfrm>
+          <a:prstGeom prst="rect">
+            <a:avLst/>
+          </a:prstGeom>
+          <a:noFill/>
+        </p:spPr>
+        <p:txBody>
+          <a:bodyPr wrap="square" anchor="t" lIns="0" rIns="0" tIns="0" bIns="0">
+            <a:spAutoFit/>
+          </a:bodyPr>
+          <a:lstStyle/>
+          <a:p>
+            <a:pPr algn="r">
+              <a:spcAft>
+                <a:spcPts val="600"/>
+              </a:spcAft>
+            </a:pPr>
+            <a:r>
+              <a:rPr sz="1100" b="0" i="0">
+                <a:solidFill>
+                  <a:srgbClr val="FFFFFF"/>
+                </a:solidFill>
+                <a:latin typeface="Times New Roman"/>
+                <a:ea typeface="標楷體"/>
+                <a:ea typeface="標楷體"/>
+              </a:rPr>
+              <a:t>20</a:t>
+            </a:r>
+          </a:p>
+        </p:txBody>
+      </p:sp>
+      <p:sp>
+        <p:nvSpPr>
+          <p:cNvPr id="7" name="TextBox 6"/>
+          <p:cNvSpPr txBox="1"/>
+          <p:nvPr/>
+        </p:nvSpPr>
+        <p:spPr>
+          <a:xfrm>
+            <a:off x="576000" y="1296000"/>
             <a:ext cx="11041200" cy="1440000"/>
           </a:xfrm>
           <a:prstGeom prst="rect">
@@ -6797,7 +7388,7 @@
                 <a:ea typeface="標楷體"/>
                 <a:ea typeface="標楷體"/>
               </a:rPr>
-              <a:t>最優先：氫氣氣密性檢查</a:t>
+              <a:t>最優先：確認補氣用的氣體組成</a:t>
             </a:r>
           </a:p>
           <a:p>
@@ -6815,7 +7406,7 @@
                 <a:ea typeface="標楷體"/>
                 <a:ea typeface="標楷體"/>
               </a:rPr>
-              <a:t>於無菌或不含微生物的條件下，以氮氣與氫氣分別充壓至相同絕對壓力，記錄 24 小時的壓力變化。氫氣若衰減顯著較快，即為直接證據。同時建議檢查橡膠墊片的材質是否適用於氫氣。</a:t>
+              <a:t>一份氣體分析報告或流量計讀數就能回答，卻直接決定第 4 頁的結論能不能成立——誤差要確認到 1% 以內。第二順位才是氫氣氣密性檢查：於無菌條件下以氮氣與氫氣分別充壓至相同絕對壓力，記錄壓力變化；同時檢查橡膠墊片是否適用於氫氣。</a:t>
             </a:r>
           </a:p>
         </p:txBody>
@@ -7534,7 +8125,7 @@
 </p:sld>
 </file>
 
-<file path=ppt/slides/slide19.xml><?xml version="1.0" encoding="utf-8"?>
+<file path=ppt/slides/slide2.xml><?xml version="1.0" encoding="utf-8"?>
 <p:sld xmlns:a="http://schemas.openxmlformats.org/drawingml/2006/main" xmlns:p="http://schemas.openxmlformats.org/presentationml/2006/main" xmlns:r="http://schemas.openxmlformats.org/officeDocument/2006/relationships">
   <p:cSld>
     <p:spTree>
@@ -7580,7 +8171,7 @@
                 <a:ea typeface="標楷體"/>
                 <a:ea typeface="標楷體"/>
               </a:rPr>
-              <a:t>十八、需要協助與確認的事項</a:t>
+              <a:t>一、壓力為什麼會掉</a:t>
             </a:r>
           </a:p>
         </p:txBody>
@@ -7665,7 +8256,7 @@
                 <a:ea typeface="標楷體"/>
                 <a:ea typeface="標楷體"/>
               </a:rPr>
-              <a:t>2026-09-23</a:t>
+              <a:t>氣泵把氣體打進水裡，再被菌吃掉</a:t>
             </a:r>
           </a:p>
         </p:txBody>
@@ -7750,21 +8341,45 @@
                 <a:ea typeface="標楷體"/>
                 <a:ea typeface="標楷體"/>
               </a:rPr>
-              <a:t>20</a:t>
-            </a:r>
-          </a:p>
-        </p:txBody>
-      </p:sp>
-      <p:sp>
-        <p:nvSpPr>
-          <p:cNvPr id="7" name="TextBox 6"/>
+              <a:t>3</a:t>
+            </a:r>
+          </a:p>
+        </p:txBody>
+      </p:sp>
+      <p:pic>
+        <p:nvPicPr>
+          <p:cNvPr id="7" name="Picture 6" descr="deck15_series.png"/>
+          <p:cNvPicPr>
+            <a:picLocks noChangeAspect="1"/>
+          </p:cNvPicPr>
+          <p:nvPr/>
+        </p:nvPicPr>
+        <p:blipFill>
+          <a:blip r:embed="rId2"/>
+          <a:stretch>
+            <a:fillRect/>
+          </a:stretch>
+        </p:blipFill>
+        <p:spPr>
+          <a:xfrm>
+            <a:off x="1776599" y="1152000"/>
+            <a:ext cx="8640000" cy="4817427"/>
+          </a:xfrm>
+          <a:prstGeom prst="rect">
+            <a:avLst/>
+          </a:prstGeom>
+        </p:spPr>
+      </p:pic>
+      <p:sp>
+        <p:nvSpPr>
+          <p:cNvPr id="8" name="TextBox 7"/>
           <p:cNvSpPr txBox="1"/>
           <p:nvPr/>
         </p:nvSpPr>
         <p:spPr>
           <a:xfrm>
-            <a:off x="576000" y="1188000"/>
-            <a:ext cx="11041200" cy="1655999"/>
+            <a:off x="576000" y="6077427"/>
+            <a:ext cx="11041200" cy="330573"/>
           </a:xfrm>
           <a:prstGeom prst="rect">
             <a:avLst/>
@@ -7777,13 +8392,24 @@
           </a:bodyPr>
           <a:lstStyle/>
           <a:p>
-            <a:pPr algn="l">
+            <a:pPr algn="ctr">
               <a:spcAft>
-                <a:spcPts val="800"/>
+                <a:spcPts val="600"/>
               </a:spcAft>
             </a:pPr>
             <a:r>
-              <a:rPr sz="2200" b="1" i="0">
+              <a:rPr sz="1600" b="0" i="0">
+                <a:solidFill>
+                  <a:srgbClr val="000000"/>
+                </a:solidFill>
+                <a:latin typeface="Times New Roman"/>
+                <a:ea typeface="標楷體"/>
+                <a:ea typeface="標楷體"/>
+              </a:rPr>
+              <a:t>⚠ 先前把這兩件事當成各走各的，並據此說「壓降主因不是溶解」。</a:t>
+            </a:r>
+            <a:r>
+              <a:rPr sz="1800" b="1" i="0">
                 <a:solidFill>
                   <a:srgbClr val="FF0000"/>
                 </a:solidFill>
@@ -7791,9 +8417,261 @@
                 <a:ea typeface="標楷體"/>
                 <a:ea typeface="標楷體"/>
               </a:rPr>
-              <a:t>最優先：無菌（或不含活性菌）靜態保壓</a:t>
-            </a:r>
-          </a:p>
+              <a:t>該主張已撤回。</a:t>
+            </a:r>
+          </a:p>
+        </p:txBody>
+      </p:sp>
+    </p:spTree>
+  </p:cSld>
+  <p:clrMapOvr>
+    <a:masterClrMapping/>
+  </p:clrMapOvr>
+</p:sld>
+</file>
+
+<file path=ppt/slides/slide20.xml><?xml version="1.0" encoding="utf-8"?>
+<p:sld xmlns:a="http://schemas.openxmlformats.org/drawingml/2006/main" xmlns:p="http://schemas.openxmlformats.org/presentationml/2006/main" xmlns:r="http://schemas.openxmlformats.org/officeDocument/2006/relationships">
+  <p:cSld>
+    <p:spTree>
+      <p:nvGrpSpPr>
+        <p:cNvPr id="1" name=""/>
+        <p:cNvGrpSpPr/>
+        <p:nvPr/>
+      </p:nvGrpSpPr>
+      <p:grpSpPr/>
+      <p:sp>
+        <p:nvSpPr>
+          <p:cNvPr id="2" name="TextBox 1"/>
+          <p:cNvSpPr txBox="1"/>
+          <p:nvPr/>
+        </p:nvSpPr>
+        <p:spPr>
+          <a:xfrm>
+            <a:off x="432000" y="180000"/>
+            <a:ext cx="11329200" cy="540000"/>
+          </a:xfrm>
+          <a:prstGeom prst="rect">
+            <a:avLst/>
+          </a:prstGeom>
+          <a:noFill/>
+        </p:spPr>
+        <p:txBody>
+          <a:bodyPr wrap="square" anchor="t" lIns="0" rIns="0" tIns="0" bIns="0">
+            <a:spAutoFit/>
+          </a:bodyPr>
+          <a:lstStyle/>
+          <a:p>
+            <a:pPr algn="ctr">
+              <a:spcAft>
+                <a:spcPts val="0"/>
+              </a:spcAft>
+            </a:pPr>
+            <a:r>
+              <a:rPr sz="2800" b="1" i="0">
+                <a:solidFill>
+                  <a:srgbClr val="000000"/>
+                </a:solidFill>
+                <a:latin typeface="Times New Roman"/>
+                <a:ea typeface="標楷體"/>
+                <a:ea typeface="標楷體"/>
+              </a:rPr>
+              <a:t>十九、需要協助與確認的事項</a:t>
+            </a:r>
+          </a:p>
+        </p:txBody>
+      </p:sp>
+      <p:sp>
+        <p:nvSpPr>
+          <p:cNvPr id="3" name="Rectangle 2"/>
+          <p:cNvSpPr/>
+          <p:nvPr/>
+        </p:nvSpPr>
+        <p:spPr>
+          <a:xfrm>
+            <a:off x="216000" y="763200"/>
+            <a:ext cx="11761200" cy="18000"/>
+          </a:xfrm>
+          <a:prstGeom prst="rect">
+            <a:avLst/>
+          </a:prstGeom>
+          <a:solidFill>
+            <a:srgbClr val="2AB6D8"/>
+          </a:solidFill>
+          <a:ln>
+            <a:noFill/>
+          </a:ln>
+          <a:effectLst/>
+        </p:spPr>
+        <p:style>
+          <a:lnRef idx="1">
+            <a:schemeClr val="accent1"/>
+          </a:lnRef>
+          <a:fillRef idx="3">
+            <a:schemeClr val="accent1"/>
+          </a:fillRef>
+          <a:effectRef idx="2">
+            <a:schemeClr val="accent1"/>
+          </a:effectRef>
+          <a:fontRef idx="minor">
+            <a:schemeClr val="lt1"/>
+          </a:fontRef>
+        </p:style>
+        <p:txBody>
+          <a:bodyPr rtlCol="0" anchor="ctr"/>
+          <a:lstStyle/>
+          <a:p>
+            <a:pPr algn="ctr"/>
+          </a:p>
+        </p:txBody>
+      </p:sp>
+      <p:sp>
+        <p:nvSpPr>
+          <p:cNvPr id="4" name="TextBox 3"/>
+          <p:cNvSpPr txBox="1"/>
+          <p:nvPr/>
+        </p:nvSpPr>
+        <p:spPr>
+          <a:xfrm>
+            <a:off x="503999" y="842400"/>
+            <a:ext cx="11185201" cy="251999"/>
+          </a:xfrm>
+          <a:prstGeom prst="rect">
+            <a:avLst/>
+          </a:prstGeom>
+          <a:noFill/>
+        </p:spPr>
+        <p:txBody>
+          <a:bodyPr wrap="square" anchor="t" lIns="0" rIns="0" tIns="0" bIns="0">
+            <a:spAutoFit/>
+          </a:bodyPr>
+          <a:lstStyle/>
+          <a:p>
+            <a:pPr algn="ctr">
+              <a:spcAft>
+                <a:spcPts val="600"/>
+              </a:spcAft>
+            </a:pPr>
+            <a:r>
+              <a:rPr sz="1300" b="0" i="0">
+                <a:solidFill>
+                  <a:srgbClr val="595959"/>
+                </a:solidFill>
+                <a:latin typeface="Times New Roman"/>
+                <a:ea typeface="標楷體"/>
+                <a:ea typeface="標楷體"/>
+              </a:rPr>
+              <a:t>2026-10-02</a:t>
+            </a:r>
+          </a:p>
+        </p:txBody>
+      </p:sp>
+      <p:sp>
+        <p:nvSpPr>
+          <p:cNvPr id="5" name="Rectangle 4"/>
+          <p:cNvSpPr/>
+          <p:nvPr/>
+        </p:nvSpPr>
+        <p:spPr>
+          <a:xfrm>
+            <a:off x="0" y="6552000"/>
+            <a:ext cx="12193200" cy="306000"/>
+          </a:xfrm>
+          <a:prstGeom prst="rect">
+            <a:avLst/>
+          </a:prstGeom>
+          <a:solidFill>
+            <a:srgbClr val="2E8BC0"/>
+          </a:solidFill>
+          <a:ln>
+            <a:noFill/>
+          </a:ln>
+          <a:effectLst/>
+        </p:spPr>
+        <p:style>
+          <a:lnRef idx="1">
+            <a:schemeClr val="accent1"/>
+          </a:lnRef>
+          <a:fillRef idx="3">
+            <a:schemeClr val="accent1"/>
+          </a:fillRef>
+          <a:effectRef idx="2">
+            <a:schemeClr val="accent1"/>
+          </a:effectRef>
+          <a:fontRef idx="minor">
+            <a:schemeClr val="lt1"/>
+          </a:fontRef>
+        </p:style>
+        <p:txBody>
+          <a:bodyPr rtlCol="0" anchor="ctr"/>
+          <a:lstStyle/>
+          <a:p>
+            <a:pPr algn="ctr"/>
+          </a:p>
+        </p:txBody>
+      </p:sp>
+      <p:sp>
+        <p:nvSpPr>
+          <p:cNvPr id="6" name="TextBox 5"/>
+          <p:cNvSpPr txBox="1"/>
+          <p:nvPr/>
+        </p:nvSpPr>
+        <p:spPr>
+          <a:xfrm>
+            <a:off x="11329200" y="6577200"/>
+            <a:ext cx="576000" cy="216000"/>
+          </a:xfrm>
+          <a:prstGeom prst="rect">
+            <a:avLst/>
+          </a:prstGeom>
+          <a:noFill/>
+        </p:spPr>
+        <p:txBody>
+          <a:bodyPr wrap="square" anchor="t" lIns="0" rIns="0" tIns="0" bIns="0">
+            <a:spAutoFit/>
+          </a:bodyPr>
+          <a:lstStyle/>
+          <a:p>
+            <a:pPr algn="r">
+              <a:spcAft>
+                <a:spcPts val="600"/>
+              </a:spcAft>
+            </a:pPr>
+            <a:r>
+              <a:rPr sz="1100" b="0" i="0">
+                <a:solidFill>
+                  <a:srgbClr val="FFFFFF"/>
+                </a:solidFill>
+                <a:latin typeface="Times New Roman"/>
+                <a:ea typeface="標楷體"/>
+                <a:ea typeface="標楷體"/>
+              </a:rPr>
+              <a:t>21</a:t>
+            </a:r>
+          </a:p>
+        </p:txBody>
+      </p:sp>
+      <p:sp>
+        <p:nvSpPr>
+          <p:cNvPr id="7" name="TextBox 6"/>
+          <p:cNvSpPr txBox="1"/>
+          <p:nvPr/>
+        </p:nvSpPr>
+        <p:spPr>
+          <a:xfrm>
+            <a:off x="576000" y="1188000"/>
+            <a:ext cx="11041200" cy="2160000"/>
+          </a:xfrm>
+          <a:prstGeom prst="rect">
+            <a:avLst/>
+          </a:prstGeom>
+          <a:noFill/>
+        </p:spPr>
+        <p:txBody>
+          <a:bodyPr wrap="square" anchor="t" lIns="0" rIns="0" tIns="0" bIns="0">
+            <a:spAutoFit/>
+          </a:bodyPr>
+          <a:lstStyle/>
           <a:p>
             <a:pPr algn="l">
               <a:spcAft>
@@ -7801,6 +8679,24 @@
               </a:spcAft>
             </a:pPr>
             <a:r>
+              <a:rPr sz="2200" b="1" i="0">
+                <a:solidFill>
+                  <a:srgbClr val="FF0000"/>
+                </a:solidFill>
+                <a:latin typeface="Times New Roman"/>
+                <a:ea typeface="標楷體"/>
+                <a:ea typeface="標楷體"/>
+              </a:rPr>
+              <a:t>最優先（10-02 改）：補氣用的氣體實際組成</a:t>
+            </a:r>
+          </a:p>
+          <a:p>
+            <a:pPr algn="l">
+              <a:spcAft>
+                <a:spcPts val="1000"/>
+              </a:spcAft>
+            </a:pPr>
+            <a:r>
               <a:rPr sz="1700" b="0" i="0">
                 <a:solidFill>
                   <a:srgbClr val="000000"/>
@@ -7809,73 +8705,7 @@
                 <a:ea typeface="標楷體"/>
                 <a:ea typeface="標楷體"/>
               </a:rPr>
-              <a:t>以 </a:t>
-            </a:r>
-            <a:r>
-              <a:rPr sz="1700" b="0" i="0">
-                <a:solidFill>
-                  <a:srgbClr val="000000"/>
-                </a:solidFill>
-                <a:latin typeface="Times New Roman"/>
-                <a:ea typeface="標楷體"/>
-                <a:ea typeface="標楷體"/>
-              </a:rPr>
-              <a:t>N</a:t>
-            </a:r>
-            <a:r>
-              <a:rPr sz="1700" b="0" i="0">
-                <a:solidFill>
-                  <a:srgbClr val="000000"/>
-                </a:solidFill>
-                <a:latin typeface="Times New Roman"/>
-                <a:ea typeface="標楷體"/>
-                <a:ea typeface="標楷體"/>
-              </a:rPr>
-              <a:t>₂ 與 </a:t>
-            </a:r>
-            <a:r>
-              <a:rPr sz="1700" b="0" i="0">
-                <a:solidFill>
-                  <a:srgbClr val="000000"/>
-                </a:solidFill>
-                <a:latin typeface="Times New Roman"/>
-                <a:ea typeface="標楷體"/>
-                <a:ea typeface="標楷體"/>
-              </a:rPr>
-              <a:t>H</a:t>
-            </a:r>
-            <a:r>
-              <a:rPr sz="1700" b="0" i="0">
-                <a:solidFill>
-                  <a:srgbClr val="000000"/>
-                </a:solidFill>
-                <a:latin typeface="Times New Roman"/>
-                <a:ea typeface="標楷體"/>
-                <a:ea typeface="標楷體"/>
-              </a:rPr>
-              <a:t>₂ 分別充壓至相同絕對壓力，各記錄約 </a:t>
-            </a:r>
-            <a:r>
-              <a:rPr sz="1900" b="1" i="0">
-                <a:solidFill>
-                  <a:srgbClr val="000000"/>
-                </a:solidFill>
-                <a:latin typeface="Times New Roman"/>
-                <a:ea typeface="標楷體"/>
-                <a:ea typeface="標楷體"/>
-              </a:rPr>
-              <a:t>3.5 天</a:t>
-            </a:r>
-            <a:r>
-              <a:rPr sz="1700" b="0" i="0">
-                <a:solidFill>
-                  <a:srgbClr val="000000"/>
-                </a:solidFill>
-                <a:latin typeface="Times New Roman"/>
-                <a:ea typeface="標楷體"/>
-                <a:ea typeface="標楷體"/>
-              </a:rPr>
-              <a:t>。這是目前唯一能分辨「氫氣流失」與「水裡的碳冒回來」的方法。</a:t>
+              <a:t>補氣比只要是 1 : 3.85 而非 1 : 4，第 4 頁的超量就全部被解釋掉。</a:t>
             </a:r>
           </a:p>
           <a:p>
@@ -7885,6 +8715,108 @@
               </a:spcAft>
             </a:pPr>
             <a:r>
+              <a:rPr sz="2200" b="1" i="0">
+                <a:solidFill>
+                  <a:srgbClr val="FF0000"/>
+                </a:solidFill>
+                <a:latin typeface="Times New Roman"/>
+                <a:ea typeface="標楷體"/>
+                <a:ea typeface="標楷體"/>
+              </a:rPr>
+              <a:t>第二順位：無菌（或不含活性菌）靜態保壓</a:t>
+            </a:r>
+          </a:p>
+          <a:p>
+            <a:pPr algn="l">
+              <a:spcAft>
+                <a:spcPts val="600"/>
+              </a:spcAft>
+            </a:pPr>
+            <a:r>
+              <a:rPr sz="1700" b="0" i="0">
+                <a:solidFill>
+                  <a:srgbClr val="000000"/>
+                </a:solidFill>
+                <a:latin typeface="Times New Roman"/>
+                <a:ea typeface="標楷體"/>
+                <a:ea typeface="標楷體"/>
+              </a:rPr>
+              <a:t>以 </a:t>
+            </a:r>
+            <a:r>
+              <a:rPr sz="1700" b="0" i="0">
+                <a:solidFill>
+                  <a:srgbClr val="000000"/>
+                </a:solidFill>
+                <a:latin typeface="Times New Roman"/>
+                <a:ea typeface="標楷體"/>
+                <a:ea typeface="標楷體"/>
+              </a:rPr>
+              <a:t>N</a:t>
+            </a:r>
+            <a:r>
+              <a:rPr sz="1700" b="0" i="0">
+                <a:solidFill>
+                  <a:srgbClr val="000000"/>
+                </a:solidFill>
+                <a:latin typeface="Times New Roman"/>
+                <a:ea typeface="標楷體"/>
+                <a:ea typeface="標楷體"/>
+              </a:rPr>
+              <a:t>₂ 與 </a:t>
+            </a:r>
+            <a:r>
+              <a:rPr sz="1700" b="0" i="0">
+                <a:solidFill>
+                  <a:srgbClr val="000000"/>
+                </a:solidFill>
+                <a:latin typeface="Times New Roman"/>
+                <a:ea typeface="標楷體"/>
+                <a:ea typeface="標楷體"/>
+              </a:rPr>
+              <a:t>H</a:t>
+            </a:r>
+            <a:r>
+              <a:rPr sz="1700" b="0" i="0">
+                <a:solidFill>
+                  <a:srgbClr val="000000"/>
+                </a:solidFill>
+                <a:latin typeface="Times New Roman"/>
+                <a:ea typeface="標楷體"/>
+                <a:ea typeface="標楷體"/>
+              </a:rPr>
+              <a:t>₂ 分別充壓至相同絕對壓力，各記錄約 </a:t>
+            </a:r>
+            <a:r>
+              <a:rPr sz="1900" b="1" i="0">
+                <a:solidFill>
+                  <a:srgbClr val="000000"/>
+                </a:solidFill>
+                <a:latin typeface="Times New Roman"/>
+                <a:ea typeface="標楷體"/>
+                <a:ea typeface="標楷體"/>
+              </a:rPr>
+              <a:t>3.5 天</a:t>
+            </a:r>
+            <a:r>
+              <a:rPr sz="1700" b="0" i="0">
+                <a:solidFill>
+                  <a:srgbClr val="000000"/>
+                </a:solidFill>
+                <a:latin typeface="Times New Roman"/>
+                <a:ea typeface="標楷體"/>
+                <a:ea typeface="標楷體"/>
+              </a:rPr>
+              <a:t>。</a:t>
+            </a:r>
+          </a:p>
+          <a:p>
+            <a:pPr algn="l">
+              <a:spcAft>
+                <a:spcPts val="600"/>
+              </a:spcAft>
+            </a:pPr>
+            <a:r>
               <a:rPr sz="1800" b="1" i="0">
                 <a:solidFill>
                   <a:srgbClr val="FF0000"/>
@@ -7893,7 +8825,7 @@
                 <a:ea typeface="標楷體"/>
                 <a:ea typeface="標楷體"/>
               </a:rPr>
-              <a:t>⚠ 關鍵細節：前 33 小時的資料不可採計</a:t>
+              <a:t>⚠ 前 33 小時不可採計</a:t>
             </a:r>
             <a:r>
               <a:rPr sz="1600" b="0" i="0">
@@ -7904,7 +8836,7 @@
                 <a:ea typeface="標楷體"/>
                 <a:ea typeface="標楷體"/>
               </a:rPr>
-              <a:t>——剛充壓時氣體仍在溶進水裡，那段壓降不是洩漏。須等氣體溶進水的過程走完之後，才開始計算。</a:t>
+              <a:t>：剛充壓時氣體仍在溶進水裡，那段壓降不是洩漏。</a:t>
             </a:r>
           </a:p>
         </p:txBody>
@@ -7918,7 +8850,7 @@
           <p:nvPr/>
         </p:nvGraphicFramePr>
         <p:xfrm>
-          <a:off x="576000" y="3096000"/>
+          <a:off x="576000" y="3420000"/>
           <a:ext cx="11052000" cy="1371600"/>
         </p:xfrm>
         <a:graphic>
@@ -8329,8 +9261,8 @@
         </p:nvSpPr>
         <p:spPr>
           <a:xfrm>
-            <a:off x="576000" y="4824000"/>
-            <a:ext cx="11041200" cy="1440000"/>
+            <a:off x="576000" y="4896000"/>
+            <a:ext cx="11041200" cy="1548000"/>
           </a:xfrm>
           <a:prstGeom prst="rect">
             <a:avLst/>
@@ -8481,7 +9413,7 @@
                 <a:ea typeface="標楷體"/>
                 <a:ea typeface="標楷體"/>
               </a:rPr>
-              <a:t> 或總溶解無機碳）</a:t>
+              <a:t>）</a:t>
             </a:r>
             <a:r>
               <a:rPr sz="1700" b="0" i="0">
@@ -8492,7 +9424,7 @@
                 <a:ea typeface="標楷體"/>
                 <a:ea typeface="標楷體"/>
               </a:rPr>
-              <a:t>（需做酸鹼滴定）——目前這個量是由 </a:t>
+              <a:t>——需酸鹼滴定；目前是由 </a:t>
             </a:r>
             <a:r>
               <a:rPr sz="1700" b="0" i="0">
@@ -8514,312 +9446,7 @@
                 <a:ea typeface="標楷體"/>
                 <a:ea typeface="標楷體"/>
               </a:rPr>
-              <a:t> 回推的，而它直接決定上述兩個機制的強度。</a:t>
-            </a:r>
-          </a:p>
-        </p:txBody>
-      </p:sp>
-    </p:spTree>
-  </p:cSld>
-  <p:clrMapOvr>
-    <a:masterClrMapping/>
-  </p:clrMapOvr>
-</p:sld>
-</file>
-
-<file path=ppt/slides/slide2.xml><?xml version="1.0" encoding="utf-8"?>
-<p:sld xmlns:a="http://schemas.openxmlformats.org/drawingml/2006/main" xmlns:p="http://schemas.openxmlformats.org/presentationml/2006/main" xmlns:r="http://schemas.openxmlformats.org/officeDocument/2006/relationships">
-  <p:cSld>
-    <p:spTree>
-      <p:nvGrpSpPr>
-        <p:cNvPr id="1" name=""/>
-        <p:cNvGrpSpPr/>
-        <p:nvPr/>
-      </p:nvGrpSpPr>
-      <p:grpSpPr/>
-      <p:sp>
-        <p:nvSpPr>
-          <p:cNvPr id="2" name="TextBox 1"/>
-          <p:cNvSpPr txBox="1"/>
-          <p:nvPr/>
-        </p:nvSpPr>
-        <p:spPr>
-          <a:xfrm>
-            <a:off x="432000" y="180000"/>
-            <a:ext cx="11329200" cy="540000"/>
-          </a:xfrm>
-          <a:prstGeom prst="rect">
-            <a:avLst/>
-          </a:prstGeom>
-          <a:noFill/>
-        </p:spPr>
-        <p:txBody>
-          <a:bodyPr wrap="square" anchor="t" lIns="0" rIns="0" tIns="0" bIns="0">
-            <a:spAutoFit/>
-          </a:bodyPr>
-          <a:lstStyle/>
-          <a:p>
-            <a:pPr algn="ctr">
-              <a:spcAft>
-                <a:spcPts val="0"/>
-              </a:spcAft>
-            </a:pPr>
-            <a:r>
-              <a:rPr sz="2800" b="1" i="0">
-                <a:solidFill>
-                  <a:srgbClr val="000000"/>
-                </a:solidFill>
-                <a:latin typeface="Times New Roman"/>
-                <a:ea typeface="標楷體"/>
-                <a:ea typeface="標楷體"/>
-              </a:rPr>
-              <a:t>一、壓力為什麼會掉</a:t>
-            </a:r>
-          </a:p>
-        </p:txBody>
-      </p:sp>
-      <p:sp>
-        <p:nvSpPr>
-          <p:cNvPr id="3" name="Rectangle 2"/>
-          <p:cNvSpPr/>
-          <p:nvPr/>
-        </p:nvSpPr>
-        <p:spPr>
-          <a:xfrm>
-            <a:off x="216000" y="763200"/>
-            <a:ext cx="11761200" cy="18000"/>
-          </a:xfrm>
-          <a:prstGeom prst="rect">
-            <a:avLst/>
-          </a:prstGeom>
-          <a:solidFill>
-            <a:srgbClr val="2AB6D8"/>
-          </a:solidFill>
-          <a:ln>
-            <a:noFill/>
-          </a:ln>
-          <a:effectLst/>
-        </p:spPr>
-        <p:style>
-          <a:lnRef idx="1">
-            <a:schemeClr val="accent1"/>
-          </a:lnRef>
-          <a:fillRef idx="3">
-            <a:schemeClr val="accent1"/>
-          </a:fillRef>
-          <a:effectRef idx="2">
-            <a:schemeClr val="accent1"/>
-          </a:effectRef>
-          <a:fontRef idx="minor">
-            <a:schemeClr val="lt1"/>
-          </a:fontRef>
-        </p:style>
-        <p:txBody>
-          <a:bodyPr rtlCol="0" anchor="ctr"/>
-          <a:lstStyle/>
-          <a:p>
-            <a:pPr algn="ctr"/>
-          </a:p>
-        </p:txBody>
-      </p:sp>
-      <p:sp>
-        <p:nvSpPr>
-          <p:cNvPr id="4" name="TextBox 3"/>
-          <p:cNvSpPr txBox="1"/>
-          <p:nvPr/>
-        </p:nvSpPr>
-        <p:spPr>
-          <a:xfrm>
-            <a:off x="503999" y="842400"/>
-            <a:ext cx="11185201" cy="251999"/>
-          </a:xfrm>
-          <a:prstGeom prst="rect">
-            <a:avLst/>
-          </a:prstGeom>
-          <a:noFill/>
-        </p:spPr>
-        <p:txBody>
-          <a:bodyPr wrap="square" anchor="t" lIns="0" rIns="0" tIns="0" bIns="0">
-            <a:spAutoFit/>
-          </a:bodyPr>
-          <a:lstStyle/>
-          <a:p>
-            <a:pPr algn="ctr">
-              <a:spcAft>
-                <a:spcPts val="600"/>
-              </a:spcAft>
-            </a:pPr>
-            <a:r>
-              <a:rPr sz="1300" b="0" i="0">
-                <a:solidFill>
-                  <a:srgbClr val="595959"/>
-                </a:solidFill>
-                <a:latin typeface="Times New Roman"/>
-                <a:ea typeface="標楷體"/>
-                <a:ea typeface="標楷體"/>
-              </a:rPr>
-              <a:t>氣泵把氣體打進水裡，再被菌吃掉</a:t>
-            </a:r>
-          </a:p>
-        </p:txBody>
-      </p:sp>
-      <p:sp>
-        <p:nvSpPr>
-          <p:cNvPr id="5" name="Rectangle 4"/>
-          <p:cNvSpPr/>
-          <p:nvPr/>
-        </p:nvSpPr>
-        <p:spPr>
-          <a:xfrm>
-            <a:off x="0" y="6552000"/>
-            <a:ext cx="12193200" cy="306000"/>
-          </a:xfrm>
-          <a:prstGeom prst="rect">
-            <a:avLst/>
-          </a:prstGeom>
-          <a:solidFill>
-            <a:srgbClr val="2E8BC0"/>
-          </a:solidFill>
-          <a:ln>
-            <a:noFill/>
-          </a:ln>
-          <a:effectLst/>
-        </p:spPr>
-        <p:style>
-          <a:lnRef idx="1">
-            <a:schemeClr val="accent1"/>
-          </a:lnRef>
-          <a:fillRef idx="3">
-            <a:schemeClr val="accent1"/>
-          </a:fillRef>
-          <a:effectRef idx="2">
-            <a:schemeClr val="accent1"/>
-          </a:effectRef>
-          <a:fontRef idx="minor">
-            <a:schemeClr val="lt1"/>
-          </a:fontRef>
-        </p:style>
-        <p:txBody>
-          <a:bodyPr rtlCol="0" anchor="ctr"/>
-          <a:lstStyle/>
-          <a:p>
-            <a:pPr algn="ctr"/>
-          </a:p>
-        </p:txBody>
-      </p:sp>
-      <p:sp>
-        <p:nvSpPr>
-          <p:cNvPr id="6" name="TextBox 5"/>
-          <p:cNvSpPr txBox="1"/>
-          <p:nvPr/>
-        </p:nvSpPr>
-        <p:spPr>
-          <a:xfrm>
-            <a:off x="11329200" y="6577200"/>
-            <a:ext cx="576000" cy="216000"/>
-          </a:xfrm>
-          <a:prstGeom prst="rect">
-            <a:avLst/>
-          </a:prstGeom>
-          <a:noFill/>
-        </p:spPr>
-        <p:txBody>
-          <a:bodyPr wrap="square" anchor="t" lIns="0" rIns="0" tIns="0" bIns="0">
-            <a:spAutoFit/>
-          </a:bodyPr>
-          <a:lstStyle/>
-          <a:p>
-            <a:pPr algn="r">
-              <a:spcAft>
-                <a:spcPts val="600"/>
-              </a:spcAft>
-            </a:pPr>
-            <a:r>
-              <a:rPr sz="1100" b="0" i="0">
-                <a:solidFill>
-                  <a:srgbClr val="FFFFFF"/>
-                </a:solidFill>
-                <a:latin typeface="Times New Roman"/>
-                <a:ea typeface="標楷體"/>
-                <a:ea typeface="標楷體"/>
-              </a:rPr>
-              <a:t>3</a:t>
-            </a:r>
-          </a:p>
-        </p:txBody>
-      </p:sp>
-      <p:pic>
-        <p:nvPicPr>
-          <p:cNvPr id="7" name="Picture 6" descr="deck15_series.png"/>
-          <p:cNvPicPr>
-            <a:picLocks noChangeAspect="1"/>
-          </p:cNvPicPr>
-          <p:nvPr/>
-        </p:nvPicPr>
-        <p:blipFill>
-          <a:blip r:embed="rId2"/>
-          <a:stretch>
-            <a:fillRect/>
-          </a:stretch>
-        </p:blipFill>
-        <p:spPr>
-          <a:xfrm>
-            <a:off x="1776599" y="1152000"/>
-            <a:ext cx="8640000" cy="4817427"/>
-          </a:xfrm>
-          <a:prstGeom prst="rect">
-            <a:avLst/>
-          </a:prstGeom>
-        </p:spPr>
-      </p:pic>
-      <p:sp>
-        <p:nvSpPr>
-          <p:cNvPr id="8" name="TextBox 7"/>
-          <p:cNvSpPr txBox="1"/>
-          <p:nvPr/>
-        </p:nvSpPr>
-        <p:spPr>
-          <a:xfrm>
-            <a:off x="576000" y="6077427"/>
-            <a:ext cx="11041200" cy="330573"/>
-          </a:xfrm>
-          <a:prstGeom prst="rect">
-            <a:avLst/>
-          </a:prstGeom>
-          <a:noFill/>
-        </p:spPr>
-        <p:txBody>
-          <a:bodyPr wrap="square" anchor="t" lIns="0" rIns="0" tIns="0" bIns="0">
-            <a:spAutoFit/>
-          </a:bodyPr>
-          <a:lstStyle/>
-          <a:p>
-            <a:pPr algn="ctr">
-              <a:spcAft>
-                <a:spcPts val="600"/>
-              </a:spcAft>
-            </a:pPr>
-            <a:r>
-              <a:rPr sz="1600" b="0" i="0">
-                <a:solidFill>
-                  <a:srgbClr val="000000"/>
-                </a:solidFill>
-                <a:latin typeface="Times New Roman"/>
-                <a:ea typeface="標楷體"/>
-                <a:ea typeface="標楷體"/>
-              </a:rPr>
-              <a:t>⚠ 先前把這兩件事當成各走各的，並據此說「壓降主因不是溶解」。</a:t>
-            </a:r>
-            <a:r>
-              <a:rPr sz="1800" b="1" i="0">
-                <a:solidFill>
-                  <a:srgbClr val="FF0000"/>
-                </a:solidFill>
-                <a:latin typeface="Times New Roman"/>
-                <a:ea typeface="標楷體"/>
-                <a:ea typeface="標楷體"/>
-              </a:rPr>
-              <a:t>該主張已撤回。</a:t>
+              <a:t> 回推，它直接決定上述兩個機制的強度。</a:t>
             </a:r>
           </a:p>
         </p:txBody>
@@ -10074,7 +10701,7 @@
                 <a:ea typeface="標楷體"/>
                 <a:ea typeface="標楷體"/>
               </a:rPr>
-              <a:t>34 / 35 次高於進料比　｜　中位 2.79 倍　｜　</a:t>
+              <a:t>34/35 次高於進料比　｜　中位 2.79 倍　｜　</a:t>
             </a:r>
             <a:r>
               <a:rPr sz="1700" b="1" i="1">
@@ -10096,29 +10723,25 @@
                 <a:ea typeface="標楷體"/>
                 <a:ea typeface="標楷體"/>
               </a:rPr>
-              <a:t> &lt; 0.0001。★把甲烷當零的最壞情況下仍有 1.33 倍（25/35，</a:t>
-            </a:r>
-            <a:r>
-              <a:rPr sz="1700" b="1" i="1">
-                <a:solidFill>
-                  <a:srgbClr val="FF0000"/>
-                </a:solidFill>
-                <a:latin typeface="Times New Roman"/>
-                <a:ea typeface="標楷體"/>
-                <a:ea typeface="標楷體"/>
-              </a:rPr>
-              <a:t>p</a:t>
-            </a:r>
-            <a:r>
-              <a:rPr sz="1700" b="1" i="0">
-                <a:solidFill>
-                  <a:srgbClr val="FF0000"/>
-                </a:solidFill>
-                <a:latin typeface="Times New Roman"/>
-                <a:ea typeface="標楷體"/>
-                <a:ea typeface="標楷體"/>
-              </a:rPr>
-              <a:t>=0.031）</a:t>
+              <a:t> &lt; 0.0001（甲烷當零的最壞情況仍 1.33 倍）</a:t>
+            </a:r>
+          </a:p>
+          <a:p>
+            <a:pPr algn="ctr">
+              <a:spcAft>
+                <a:spcPts val="600"/>
+              </a:spcAft>
+            </a:pPr>
+            <a:r>
+              <a:rPr sz="1500" b="0" i="0">
+                <a:solidFill>
+                  <a:srgbClr val="595959"/>
+                </a:solidFill>
+                <a:latin typeface="Times New Roman"/>
+                <a:ea typeface="標楷體"/>
+                <a:ea typeface="標楷體"/>
+              </a:rPr>
+              <a:t>⚠ 這整頁的前提是「補進去的真的是 1:4」。10-02 查出只要補氣少 3.6% 的氫氣就能造出全部超量，見第 17 頁。</a:t>
             </a:r>
           </a:p>
         </p:txBody>

--- a/docs/decks/簡報_2026-09-21_氫氣流失與壓降歸因.pptx
+++ b/docs/decks/簡報_2026-09-21_氫氣流失與壓降歸因.pptx
@@ -3313,7 +3313,7 @@
                 <a:ea typeface="標楷體"/>
                 <a:ea typeface="標楷體"/>
               </a:rPr>
-              <a:t>2</a:t>
+              <a:t>1</a:t>
             </a:r>
           </a:p>
         </p:txBody>
@@ -3910,7 +3910,7 @@
                 <a:ea typeface="標楷體"/>
                 <a:ea typeface="標楷體"/>
               </a:rPr>
-              <a:t>11</a:t>
+              <a:t>10</a:t>
             </a:r>
           </a:p>
         </p:txBody>
@@ -4226,7 +4226,7 @@
                 <a:ea typeface="標楷體"/>
                 <a:ea typeface="標楷體"/>
               </a:rPr>
-              <a:t>12</a:t>
+              <a:t>11</a:t>
             </a:r>
           </a:p>
         </p:txBody>
@@ -4564,7 +4564,7 @@
                 <a:ea typeface="標楷體"/>
                 <a:ea typeface="標楷體"/>
               </a:rPr>
-              <a:t>13</a:t>
+              <a:t>12</a:t>
             </a:r>
           </a:p>
         </p:txBody>
@@ -4986,7 +4986,7 @@
                 <a:ea typeface="標楷體"/>
                 <a:ea typeface="標楷體"/>
               </a:rPr>
-              <a:t>14</a:t>
+              <a:t>13</a:t>
             </a:r>
           </a:p>
         </p:txBody>
@@ -5390,7 +5390,7 @@
                 <a:ea typeface="標楷體"/>
                 <a:ea typeface="標楷體"/>
               </a:rPr>
-              <a:t>15</a:t>
+              <a:t>14</a:t>
             </a:r>
           </a:p>
         </p:txBody>
@@ -5728,7 +5728,7 @@
                 <a:ea typeface="標楷體"/>
                 <a:ea typeface="標楷體"/>
               </a:rPr>
-              <a:t>16</a:t>
+              <a:t>15</a:t>
             </a:r>
           </a:p>
         </p:txBody>
@@ -6121,7 +6121,7 @@
                 <a:ea typeface="標楷體"/>
                 <a:ea typeface="標楷體"/>
               </a:rPr>
-              <a:t>17</a:t>
+              <a:t>16</a:t>
             </a:r>
           </a:p>
         </p:txBody>
@@ -6415,7 +6415,7 @@
                 <a:ea typeface="標楷體"/>
                 <a:ea typeface="標楷體"/>
               </a:rPr>
-              <a:t>18</a:t>
+              <a:t>17</a:t>
             </a:r>
           </a:p>
         </p:txBody>
@@ -6757,7 +6757,7 @@
                 <a:ea typeface="標楷體"/>
                 <a:ea typeface="標楷體"/>
               </a:rPr>
-              <a:t>19</a:t>
+              <a:t>18</a:t>
             </a:r>
           </a:p>
         </p:txBody>
@@ -7347,7 +7347,7 @@
                 <a:ea typeface="標楷體"/>
                 <a:ea typeface="標楷體"/>
               </a:rPr>
-              <a:t>20</a:t>
+              <a:t>19</a:t>
             </a:r>
           </a:p>
         </p:txBody>
@@ -7406,7 +7406,7 @@
                 <a:ea typeface="標楷體"/>
                 <a:ea typeface="標楷體"/>
               </a:rPr>
-              <a:t>一份氣體分析報告或流量計讀數就能回答，卻直接決定第 4 頁的結論能不能成立——誤差要確認到 1% 以內。第二順位才是氫氣氣密性檢查：於無菌條件下以氮氣與氫氣分別充壓至相同絕對壓力，記錄壓力變化；同時檢查橡膠墊片是否適用於氫氣。</a:t>
+              <a:t>一份氣體分析報告或流量計讀數就能回答，卻直接決定第 5 頁的結論能不能成立——誤差要確認到 1% 以內。第二順位才是氫氣氣密性檢查：於無菌條件下以氮氣與氫氣分別充壓至相同絕對壓力，記錄壓力變化；同時檢查橡膠墊片是否適用於氫氣。</a:t>
             </a:r>
           </a:p>
         </p:txBody>
@@ -8341,7 +8341,7 @@
                 <a:ea typeface="標楷體"/>
                 <a:ea typeface="標楷體"/>
               </a:rPr>
-              <a:t>3</a:t>
+              <a:t>2</a:t>
             </a:r>
           </a:p>
         </p:txBody>
@@ -8646,7 +8646,7 @@
                 <a:ea typeface="標楷體"/>
                 <a:ea typeface="標楷體"/>
               </a:rPr>
-              <a:t>21</a:t>
+              <a:t>20</a:t>
             </a:r>
           </a:p>
         </p:txBody>
@@ -8705,7 +8705,7 @@
                 <a:ea typeface="標楷體"/>
                 <a:ea typeface="標楷體"/>
               </a:rPr>
-              <a:t>補氣比只要是 1 : 3.85 而非 1 : 4，第 4 頁的超量就全部被解釋掉。</a:t>
+              <a:t>補氣比只要是 1 : 3.85 而非 1 : 4，第 5 頁的超量就全部被解釋掉。</a:t>
             </a:r>
           </a:p>
           <a:p>
@@ -9675,7 +9675,7 @@
                 <a:ea typeface="標楷體"/>
                 <a:ea typeface="標楷體"/>
               </a:rPr>
-              <a:t>4</a:t>
+              <a:t>3</a:t>
             </a:r>
           </a:p>
         </p:txBody>
@@ -10320,7 +10320,7 @@
                 <a:ea typeface="標楷體"/>
                 <a:ea typeface="標楷體"/>
               </a:rPr>
-              <a:t>5</a:t>
+              <a:t>4</a:t>
             </a:r>
           </a:p>
         </p:txBody>
@@ -10636,7 +10636,7 @@
                 <a:ea typeface="標楷體"/>
                 <a:ea typeface="標楷體"/>
               </a:rPr>
-              <a:t>6</a:t>
+              <a:t>5</a:t>
             </a:r>
           </a:p>
         </p:txBody>
@@ -10741,7 +10741,7 @@
                 <a:ea typeface="標楷體"/>
                 <a:ea typeface="標楷體"/>
               </a:rPr>
-              <a:t>⚠ 這整頁的前提是「補進去的真的是 1:4」。10-02 查出只要補氣少 3.6% 的氫氣就能造出全部超量，見第 17 頁。</a:t>
+              <a:t>⚠ 這整頁的前提是「補進去的真的是 1:4」。10-02 查出只要補氣少 3.6% 的氫氣就能造出全部超量，見第 18 頁。</a:t>
             </a:r>
           </a:p>
         </p:txBody>
@@ -10970,7 +10970,7 @@
                 <a:ea typeface="標楷體"/>
                 <a:ea typeface="標楷體"/>
               </a:rPr>
-              <a:t>7</a:t>
+              <a:t>6</a:t>
             </a:r>
           </a:p>
         </p:txBody>
@@ -11461,7 +11461,7 @@
                 <a:ea typeface="標楷體"/>
                 <a:ea typeface="標楷體"/>
               </a:rPr>
-              <a:t>8</a:t>
+              <a:t>7</a:t>
             </a:r>
           </a:p>
         </p:txBody>
@@ -12054,7 +12054,7 @@
                 <a:ea typeface="標楷體"/>
                 <a:ea typeface="標楷體"/>
               </a:rPr>
-              <a:t>9</a:t>
+              <a:t>8</a:t>
             </a:r>
           </a:p>
         </p:txBody>
@@ -12377,7 +12377,7 @@
                 <a:ea typeface="標楷體"/>
                 <a:ea typeface="標楷體"/>
               </a:rPr>
-              <a:t>10</a:t>
+              <a:t>9</a:t>
             </a:r>
           </a:p>
         </p:txBody>
